--- a/plugins/gradient-cio/assets/examples/gradient-portfolio-construction-fixed-income.pptx
+++ b/plugins/gradient-cio/assets/examples/gradient-portfolio-construction-fixed-income.pptx
@@ -1226,6 +1226,59 @@
               </a:solidFill>
             </c:spPr>
           </c:dPt>
+          <c:dLbls>
+            <c:dLbl>
+              <c:idx val="0"/>
+              <c:tx>
+                <c:rich>
+                  <a:bodyPr/>
+                  <a:lstStyle/>
+                  <a:p>
+                    <a:r>
+                      <a:rPr lang="en-US" sz="800"/>
+                      <a:t>4.1%</a:t>
+                    </a:r>
+                  </a:p>
+                </c:rich>
+              </c:tx>
+              <c:dLblPos val="outEnd"/>
+              <c:showLegendKey val="0"/>
+              <c:showVal val="0"/>
+              <c:showCatName val="0"/>
+              <c:showSerName val="0"/>
+              <c:showPercent val="0"/>
+              <c:showBubbleSize val="0"/>
+            </c:dLbl>
+            <c:dLbl>
+              <c:idx val="1"/>
+              <c:tx>
+                <c:rich>
+                  <a:bodyPr/>
+                  <a:lstStyle/>
+                  <a:p>
+                    <a:r>
+                      <a:rPr lang="en-US" sz="800"/>
+                      <a:t>5.2%</a:t>
+                    </a:r>
+                  </a:p>
+                </c:rich>
+              </c:tx>
+              <c:dLblPos val="outEnd"/>
+              <c:showLegendKey val="0"/>
+              <c:showVal val="0"/>
+              <c:showCatName val="0"/>
+              <c:showSerName val="0"/>
+              <c:showPercent val="0"/>
+              <c:showBubbleSize val="0"/>
+            </c:dLbl>
+            <c:dLblPos val="outEnd"/>
+            <c:showLegendKey val="0"/>
+            <c:showVal val="0"/>
+            <c:showCatName val="0"/>
+            <c:showSerName val="0"/>
+            <c:showPercent val="0"/>
+            <c:showBubbleSize val="0"/>
+          </c:dLbls>
           <c:cat>
             <c:strRef>
               <c:f>Sheet1!$A$2:$A$3</c:f>
@@ -1379,7 +1432,7 @@
               <c:strCache>
                 <c:ptCount val="1"/>
                 <c:pt idx="0">
-                  <c:v>Portfolio (TEST)</c:v>
+                  <c:v>Portfolio</c:v>
                 </c:pt>
               </c:strCache>
             </c:strRef>
@@ -1422,7 +1475,7 @@
               <c:strCache>
                 <c:ptCount val="1"/>
                 <c:pt idx="0">
-                  <c:v>Portfolio (TEST)</c:v>
+                  <c:v>Portfolio</c:v>
                 </c:pt>
               </c:strCache>
             </c:strRef>
@@ -1540,6 +1593,37 @@
               </a:solidFill>
             </c:spPr>
           </c:dPt>
+          <c:dLbls>
+            <c:dLbl>
+              <c:idx val="0"/>
+              <c:tx>
+                <c:rich>
+                  <a:bodyPr/>
+                  <a:lstStyle/>
+                  <a:p>
+                    <a:r>
+                      <a:rPr lang="en-US" sz="800"/>
+                      <a:t>+4.7%</a:t>
+                    </a:r>
+                  </a:p>
+                </c:rich>
+              </c:tx>
+              <c:dLblPos val="outEnd"/>
+              <c:showLegendKey val="0"/>
+              <c:showVal val="0"/>
+              <c:showCatName val="0"/>
+              <c:showSerName val="0"/>
+              <c:showPercent val="0"/>
+              <c:showBubbleSize val="0"/>
+            </c:dLbl>
+            <c:dLblPos val="outEnd"/>
+            <c:showLegendKey val="0"/>
+            <c:showVal val="0"/>
+            <c:showCatName val="0"/>
+            <c:showSerName val="0"/>
+            <c:showPercent val="0"/>
+            <c:showBubbleSize val="0"/>
+          </c:dLbls>
           <c:cat>
             <c:strRef>
               <c:f>Sheet1!$A$2:$A$2</c:f>
@@ -4473,7 +4557,7 @@
         </p:nvSpPr>
         <p:spPr>
           <a:xfrm>
-            <a:off x="685800" y="1828800"/>
+            <a:off x="685800" y="1664208"/>
             <a:ext cx="9966960" cy="274320"/>
           </a:xfrm>
           <a:prstGeom prst="rect">
@@ -4491,7 +4575,7 @@
               <a:spcAft>
                 <a:spcPts val="0"/>
               </a:spcAft>
-              <a:defRPr sz="900" b="1">
+              <a:defRPr sz="850" b="1">
                 <a:solidFill>
                   <a:srgbClr val="C6F432"/>
                 </a:solidFill>
@@ -4515,7 +4599,7 @@
         </p:nvSpPr>
         <p:spPr>
           <a:xfrm>
-            <a:off x="685800" y="2176272"/>
+            <a:off x="685800" y="2011680"/>
             <a:ext cx="9966960" cy="1234440"/>
           </a:xfrm>
           <a:prstGeom prst="rect">
@@ -4533,7 +4617,7 @@
               <a:spcAft>
                 <a:spcPts val="0"/>
               </a:spcAft>
-              <a:defRPr sz="3400" b="1">
+              <a:defRPr sz="3300" b="1">
                 <a:solidFill>
                   <a:srgbClr val="FFFFFF"/>
                 </a:solidFill>
@@ -4544,7 +4628,7 @@
               <a:rPr>
                 <a:latin typeface="Inter"/>
               </a:rPr>
-              <a:t>Northstar Fixed Income Portfolio (TEST)</a:t>
+              <a:t>Northstar Fixed Income Portfolio</a:t>
             </a:r>
           </a:p>
         </p:txBody>
@@ -4557,8 +4641,8 @@
         </p:nvSpPr>
         <p:spPr>
           <a:xfrm>
-            <a:off x="685800" y="3456432"/>
-            <a:ext cx="9692640" cy="640080"/>
+            <a:off x="685800" y="3273552"/>
+            <a:ext cx="9692640" cy="594360"/>
           </a:xfrm>
           <a:prstGeom prst="rect">
             <a:avLst/>
@@ -4575,7 +4659,7 @@
               <a:spcAft>
                 <a:spcPts val="0"/>
               </a:spcAft>
-              <a:defRPr sz="1500" b="0">
+              <a:defRPr sz="1400" b="0">
                 <a:solidFill>
                   <a:srgbClr val="9AA5B1"/>
                 </a:solidFill>
@@ -4586,7 +4670,7 @@
               <a:rPr>
                 <a:latin typeface="Inter"/>
               </a:rPr>
-              <a:t>Decision pack · prepared for the Investment Committee (TEST)</a:t>
+              <a:t>Portfolio construction review · prepared for the Investment Committee</a:t>
             </a:r>
           </a:p>
         </p:txBody>
@@ -4599,8 +4683,8 @@
         </p:nvSpPr>
         <p:spPr>
           <a:xfrm>
-            <a:off x="685800" y="4251960"/>
-            <a:ext cx="1005840" cy="54864"/>
+            <a:off x="685800" y="4005072"/>
+            <a:ext cx="822960" cy="45720"/>
           </a:xfrm>
           <a:prstGeom prst="rect">
             <a:avLst/>
@@ -4648,8 +4732,8 @@
         </p:nvSpPr>
         <p:spPr>
           <a:xfrm>
-            <a:off x="685800" y="4572000"/>
-            <a:ext cx="3063240" cy="182880"/>
+            <a:off x="685800" y="4315968"/>
+            <a:ext cx="4709160" cy="182880"/>
           </a:xfrm>
           <a:prstGeom prst="rect">
             <a:avLst/>
@@ -4690,8 +4774,8 @@
         </p:nvSpPr>
         <p:spPr>
           <a:xfrm>
-            <a:off x="685800" y="4773168"/>
-            <a:ext cx="3063240" cy="320040"/>
+            <a:off x="685800" y="4507992"/>
+            <a:ext cx="4709160" cy="310896"/>
           </a:xfrm>
           <a:prstGeom prst="rect">
             <a:avLst/>
@@ -4732,8 +4816,8 @@
         </p:nvSpPr>
         <p:spPr>
           <a:xfrm>
-            <a:off x="4160520" y="4572000"/>
-            <a:ext cx="3063240" cy="182880"/>
+            <a:off x="5852160" y="4315968"/>
+            <a:ext cx="4709160" cy="182880"/>
           </a:xfrm>
           <a:prstGeom prst="rect">
             <a:avLst/>
@@ -4761,7 +4845,7 @@
               <a:rPr>
                 <a:latin typeface="Inter"/>
               </a:rPr>
-              <a:t>BASE CURRENCY</a:t>
+              <a:t>TOTAL NAV</a:t>
             </a:r>
           </a:p>
         </p:txBody>
@@ -4774,8 +4858,8 @@
         </p:nvSpPr>
         <p:spPr>
           <a:xfrm>
-            <a:off x="4160520" y="4773168"/>
-            <a:ext cx="3063240" cy="320040"/>
+            <a:off x="5852160" y="4507992"/>
+            <a:ext cx="4709160" cy="310896"/>
           </a:xfrm>
           <a:prstGeom prst="rect">
             <a:avLst/>
@@ -4803,7 +4887,7 @@
               <a:rPr>
                 <a:latin typeface="Inter"/>
               </a:rPr>
-              <a:t>USD</a:t>
+              <a:t>$1,000.0M</a:t>
             </a:r>
           </a:p>
         </p:txBody>
@@ -4816,8 +4900,8 @@
         </p:nvSpPr>
         <p:spPr>
           <a:xfrm>
-            <a:off x="7635240" y="4572000"/>
-            <a:ext cx="3063240" cy="182880"/>
+            <a:off x="685800" y="4937759"/>
+            <a:ext cx="4709160" cy="182880"/>
           </a:xfrm>
           <a:prstGeom prst="rect">
             <a:avLst/>
@@ -4845,7 +4929,7 @@
               <a:rPr>
                 <a:latin typeface="Inter"/>
               </a:rPr>
-              <a:t>TOTAL NAV</a:t>
+              <a:t>FIXED-INCOME WEIGHT</a:t>
             </a:r>
           </a:p>
         </p:txBody>
@@ -4858,8 +4942,8 @@
         </p:nvSpPr>
         <p:spPr>
           <a:xfrm>
-            <a:off x="7635240" y="4773168"/>
-            <a:ext cx="3063240" cy="320040"/>
+            <a:off x="685800" y="5129783"/>
+            <a:ext cx="4709160" cy="310896"/>
           </a:xfrm>
           <a:prstGeom prst="rect">
             <a:avLst/>
@@ -4887,7 +4971,7 @@
               <a:rPr>
                 <a:latin typeface="Inter"/>
               </a:rPr>
-              <a:t>$1,000.0M</a:t>
+              <a:t>28.0%</a:t>
             </a:r>
           </a:p>
         </p:txBody>
@@ -4900,8 +4984,8 @@
         </p:nvSpPr>
         <p:spPr>
           <a:xfrm>
-            <a:off x="685800" y="5230368"/>
-            <a:ext cx="3063240" cy="182880"/>
+            <a:off x="5852160" y="4937759"/>
+            <a:ext cx="4709160" cy="182880"/>
           </a:xfrm>
           <a:prstGeom prst="rect">
             <a:avLst/>
@@ -4929,7 +5013,7 @@
               <a:rPr>
                 <a:latin typeface="Inter"/>
               </a:rPr>
-              <a:t>FIXED-INCOME WEIGHT</a:t>
+              <a:t>POLICY BENCHMARK</a:t>
             </a:r>
           </a:p>
         </p:txBody>
@@ -4942,8 +5026,8 @@
         </p:nvSpPr>
         <p:spPr>
           <a:xfrm>
-            <a:off x="685800" y="5431536"/>
-            <a:ext cx="3063240" cy="320040"/>
+            <a:off x="5852160" y="5129783"/>
+            <a:ext cx="4709160" cy="310896"/>
           </a:xfrm>
           <a:prstGeom prst="rect">
             <a:avLst/>
@@ -4971,189 +5055,21 @@
               <a:rPr>
                 <a:latin typeface="Inter"/>
               </a:rPr>
-              <a:t>28.0%</a:t>
+              <a:t>Northstar Aggregate Bond Index</a:t>
             </a:r>
           </a:p>
         </p:txBody>
       </p:sp>
       <p:sp>
         <p:nvSpPr>
-          <p:cNvPr id="17" name="TextBox 16"/>
-          <p:cNvSpPr txBox="1"/>
-          <p:nvPr/>
-        </p:nvSpPr>
-        <p:spPr>
-          <a:xfrm>
-            <a:off x="4160520" y="5230368"/>
-            <a:ext cx="3063240" cy="182880"/>
-          </a:xfrm>
-          <a:prstGeom prst="rect">
-            <a:avLst/>
-          </a:prstGeom>
-          <a:noFill/>
-        </p:spPr>
-        <p:txBody>
-          <a:bodyPr wrap="none" lIns="9144" rIns="9144" tIns="9144" bIns="9144" anchor="t">
-            <a:spAutoFit/>
-          </a:bodyPr>
-          <a:lstStyle/>
-          <a:p>
-            <a:pPr algn="l">
-              <a:spcAft>
-                <a:spcPts val="0"/>
-              </a:spcAft>
-              <a:defRPr sz="700" b="1">
-                <a:solidFill>
-                  <a:srgbClr val="8A94A1"/>
-                </a:solidFill>
-                <a:latin typeface="Inter"/>
-              </a:defRPr>
-            </a:pPr>
-            <a:r>
-              <a:rPr>
-                <a:latin typeface="Inter"/>
-              </a:rPr>
-              <a:t>POLICY BENCHMARK</a:t>
-            </a:r>
-          </a:p>
-        </p:txBody>
-      </p:sp>
-      <p:sp>
-        <p:nvSpPr>
-          <p:cNvPr id="18" name="TextBox 17"/>
-          <p:cNvSpPr txBox="1"/>
-          <p:nvPr/>
-        </p:nvSpPr>
-        <p:spPr>
-          <a:xfrm>
-            <a:off x="4160520" y="5431536"/>
-            <a:ext cx="3063240" cy="320040"/>
-          </a:xfrm>
-          <a:prstGeom prst="rect">
-            <a:avLst/>
-          </a:prstGeom>
-          <a:noFill/>
-        </p:spPr>
-        <p:txBody>
-          <a:bodyPr wrap="none" lIns="9144" rIns="9144" tIns="9144" bIns="9144" anchor="t">
-            <a:spAutoFit/>
-          </a:bodyPr>
-          <a:lstStyle/>
-          <a:p>
-            <a:pPr algn="l">
-              <a:spcAft>
-                <a:spcPts val="0"/>
-              </a:spcAft>
-              <a:defRPr sz="1000" b="1">
-                <a:solidFill>
-                  <a:srgbClr val="FFFFFF"/>
-                </a:solidFill>
-                <a:latin typeface="Inter"/>
-              </a:defRPr>
-            </a:pPr>
-            <a:r>
-              <a:rPr>
-                <a:latin typeface="Inter"/>
-              </a:rPr>
-              <a:t>Example Aggregate Bond Index (TEST)</a:t>
-            </a:r>
-          </a:p>
-        </p:txBody>
-      </p:sp>
-      <p:sp>
-        <p:nvSpPr>
-          <p:cNvPr id="19" name="TextBox 18"/>
-          <p:cNvSpPr txBox="1"/>
-          <p:nvPr/>
-        </p:nvSpPr>
-        <p:spPr>
-          <a:xfrm>
-            <a:off x="7635240" y="5230368"/>
-            <a:ext cx="3063240" cy="182880"/>
-          </a:xfrm>
-          <a:prstGeom prst="rect">
-            <a:avLst/>
-          </a:prstGeom>
-          <a:noFill/>
-        </p:spPr>
-        <p:txBody>
-          <a:bodyPr wrap="none" lIns="9144" rIns="9144" tIns="9144" bIns="9144" anchor="t">
-            <a:spAutoFit/>
-          </a:bodyPr>
-          <a:lstStyle/>
-          <a:p>
-            <a:pPr algn="l">
-              <a:spcAft>
-                <a:spcPts val="0"/>
-              </a:spcAft>
-              <a:defRPr sz="700" b="1">
-                <a:solidFill>
-                  <a:srgbClr val="8A94A1"/>
-                </a:solidFill>
-                <a:latin typeface="Inter"/>
-              </a:defRPr>
-            </a:pPr>
-            <a:r>
-              <a:rPr>
-                <a:latin typeface="Inter"/>
-              </a:rPr>
-              <a:t>DATA SCOPE</a:t>
-            </a:r>
-          </a:p>
-        </p:txBody>
-      </p:sp>
-      <p:sp>
-        <p:nvSpPr>
-          <p:cNvPr id="20" name="TextBox 19"/>
-          <p:cNvSpPr txBox="1"/>
-          <p:nvPr/>
-        </p:nvSpPr>
-        <p:spPr>
-          <a:xfrm>
-            <a:off x="7635240" y="5431536"/>
-            <a:ext cx="3063240" cy="320040"/>
-          </a:xfrm>
-          <a:prstGeom prst="rect">
-            <a:avLst/>
-          </a:prstGeom>
-          <a:noFill/>
-        </p:spPr>
-        <p:txBody>
-          <a:bodyPr wrap="none" lIns="9144" rIns="9144" tIns="9144" bIns="9144" anchor="t">
-            <a:spAutoFit/>
-          </a:bodyPr>
-          <a:lstStyle/>
-          <a:p>
-            <a:pPr algn="l">
-              <a:spcAft>
-                <a:spcPts val="0"/>
-              </a:spcAft>
-              <a:defRPr sz="1000" b="1">
-                <a:solidFill>
-                  <a:srgbClr val="FFFFFF"/>
-                </a:solidFill>
-                <a:latin typeface="Inter"/>
-              </a:defRPr>
-            </a:pPr>
-            <a:r>
-              <a:rPr>
-                <a:latin typeface="Inter"/>
-              </a:rPr>
-              <a:t>Fictional TEST data</a:t>
-            </a:r>
-          </a:p>
-        </p:txBody>
-      </p:sp>
-      <p:sp>
-        <p:nvSpPr>
-          <p:cNvPr id="21" name="Rectangle 20"/>
+          <p:cNvPr id="17" name="Rectangle 16"/>
           <p:cNvSpPr/>
           <p:nvPr/>
         </p:nvSpPr>
         <p:spPr>
           <a:xfrm>
-            <a:off x="685800" y="5833872"/>
-            <a:ext cx="3063240" cy="384048"/>
+            <a:off x="685800" y="5687568"/>
+            <a:ext cx="3337560" cy="530352"/>
           </a:xfrm>
           <a:prstGeom prst="rect">
             <a:avLst/>
@@ -5195,14 +5111,14 @@
       </p:sp>
       <p:sp>
         <p:nvSpPr>
-          <p:cNvPr id="22" name="TextBox 21"/>
+          <p:cNvPr id="18" name="TextBox 17"/>
           <p:cNvSpPr txBox="1"/>
           <p:nvPr/>
         </p:nvSpPr>
         <p:spPr>
           <a:xfrm>
-            <a:off x="822960" y="5934456"/>
-            <a:ext cx="2788920" cy="164592"/>
+            <a:off x="822960" y="5760720"/>
+            <a:ext cx="3063240" cy="128016"/>
           </a:xfrm>
           <a:prstGeom prst="rect">
             <a:avLst/>
@@ -5219,7 +5135,7 @@
               <a:spcAft>
                 <a:spcPts val="0"/>
               </a:spcAft>
-              <a:defRPr sz="800" b="1">
+              <a:defRPr sz="620" b="1">
                 <a:solidFill>
                   <a:srgbClr val="0D1117"/>
                 </a:solidFill>
@@ -5230,6 +5146,48 @@
               <a:rPr>
                 <a:latin typeface="Inter"/>
               </a:rPr>
+              <a:t>OVERALL VIEW</a:t>
+            </a:r>
+          </a:p>
+        </p:txBody>
+      </p:sp>
+      <p:sp>
+        <p:nvSpPr>
+          <p:cNvPr id="19" name="TextBox 18"/>
+          <p:cNvSpPr txBox="1"/>
+          <p:nvPr/>
+        </p:nvSpPr>
+        <p:spPr>
+          <a:xfrm>
+            <a:off x="822960" y="5916168"/>
+            <a:ext cx="3063240" cy="182880"/>
+          </a:xfrm>
+          <a:prstGeom prst="rect">
+            <a:avLst/>
+          </a:prstGeom>
+          <a:noFill/>
+        </p:spPr>
+        <p:txBody>
+          <a:bodyPr wrap="none" lIns="9144" rIns="9144" tIns="9144" bIns="9144" anchor="t">
+            <a:spAutoFit/>
+          </a:bodyPr>
+          <a:lstStyle/>
+          <a:p>
+            <a:pPr algn="l">
+              <a:spcAft>
+                <a:spcPts val="0"/>
+              </a:spcAft>
+              <a:defRPr sz="900" b="1">
+                <a:solidFill>
+                  <a:srgbClr val="0D1117"/>
+                </a:solidFill>
+                <a:latin typeface="Inter"/>
+              </a:defRPr>
+            </a:pPr>
+            <a:r>
+              <a:rPr>
+                <a:latin typeface="Inter"/>
+              </a:rPr>
               <a:t>Credit allocation proposed</a:t>
             </a:r>
           </a:p>
@@ -5237,13 +5195,13 @@
       </p:sp>
       <p:sp>
         <p:nvSpPr>
-          <p:cNvPr id="23" name="TextBox 22"/>
+          <p:cNvPr id="20" name="TextBox 19"/>
           <p:cNvSpPr txBox="1"/>
           <p:nvPr/>
         </p:nvSpPr>
         <p:spPr>
           <a:xfrm>
-            <a:off x="3977639" y="5824728"/>
+            <a:off x="4297680" y="5733288"/>
             <a:ext cx="3108960" cy="164592"/>
           </a:xfrm>
           <a:prstGeom prst="rect">
@@ -5272,20 +5230,20 @@
               <a:rPr>
                 <a:latin typeface="Inter"/>
               </a:rPr>
-              <a:t>EVIDENCE COMPLETENESS</a:t>
+              <a:t>SCOPE REVIEWED</a:t>
             </a:r>
           </a:p>
         </p:txBody>
       </p:sp>
       <p:sp>
         <p:nvSpPr>
-          <p:cNvPr id="24" name="TextBox 23"/>
+          <p:cNvPr id="21" name="TextBox 20"/>
           <p:cNvSpPr txBox="1"/>
           <p:nvPr/>
         </p:nvSpPr>
         <p:spPr>
           <a:xfrm>
-            <a:off x="3977639" y="5998464"/>
+            <a:off x="4297680" y="5934456"/>
             <a:ext cx="3108960" cy="201168"/>
           </a:xfrm>
           <a:prstGeom prst="rect">
@@ -5321,14 +5279,14 @@
       </p:sp>
       <p:sp>
         <p:nvSpPr>
-          <p:cNvPr id="25" name="TextBox 24"/>
+          <p:cNvPr id="22" name="TextBox 21"/>
           <p:cNvSpPr txBox="1"/>
           <p:nvPr/>
         </p:nvSpPr>
         <p:spPr>
           <a:xfrm>
-            <a:off x="685800" y="6473952"/>
-            <a:ext cx="8046720" cy="182880"/>
+            <a:off x="685800" y="6400800"/>
+            <a:ext cx="8046720" cy="146304"/>
           </a:xfrm>
           <a:prstGeom prst="rect">
             <a:avLst/>
@@ -5356,14 +5314,56 @@
               <a:rPr>
                 <a:latin typeface="Inter"/>
               </a:rPr>
-              <a:t>TEST DATA — fictional portfolio for rendering tests only</a:t>
+              <a:t>Confidential — Investment Committee</a:t>
             </a:r>
           </a:p>
         </p:txBody>
       </p:sp>
       <p:sp>
         <p:nvSpPr>
-          <p:cNvPr id="26" name="TextBox 25"/>
+          <p:cNvPr id="23" name="TextBox 22"/>
+          <p:cNvSpPr txBox="1"/>
+          <p:nvPr/>
+        </p:nvSpPr>
+        <p:spPr>
+          <a:xfrm>
+            <a:off x="685800" y="6556248"/>
+            <a:ext cx="8046720" cy="128016"/>
+          </a:xfrm>
+          <a:prstGeom prst="rect">
+            <a:avLst/>
+          </a:prstGeom>
+          <a:noFill/>
+        </p:spPr>
+        <p:txBody>
+          <a:bodyPr wrap="none" lIns="9144" rIns="9144" tIns="9144" bIns="9144" anchor="t">
+            <a:spAutoFit/>
+          </a:bodyPr>
+          <a:lstStyle/>
+          <a:p>
+            <a:pPr algn="l">
+              <a:spcAft>
+                <a:spcPts val="0"/>
+              </a:spcAft>
+              <a:defRPr sz="650" b="0">
+                <a:solidFill>
+                  <a:srgbClr val="8A94A1"/>
+                </a:solidFill>
+                <a:latin typeface="Inter"/>
+              </a:defRPr>
+            </a:pPr>
+            <a:r>
+              <a:rPr>
+                <a:latin typeface="Inter"/>
+              </a:rPr>
+              <a:t>Illustrative sample · not client data</a:t>
+            </a:r>
+          </a:p>
+        </p:txBody>
+      </p:sp>
+      <p:sp>
+        <p:nvSpPr>
+          <p:cNvPr id="24" name="TextBox 23"/>
           <p:cNvSpPr txBox="1"/>
           <p:nvPr/>
         </p:nvSpPr>
@@ -5479,7 +5479,7 @@
         <p:spPr>
           <a:xfrm>
             <a:off x="640080" y="329184"/>
-            <a:ext cx="9875520" cy="182880"/>
+            <a:ext cx="5303520" cy="182880"/>
           </a:xfrm>
           <a:prstGeom prst="rect">
             <a:avLst/>
@@ -5520,6 +5520,48 @@
         </p:nvSpPr>
         <p:spPr>
           <a:xfrm>
+            <a:off x="5897880" y="310896"/>
+            <a:ext cx="4800600" cy="256032"/>
+          </a:xfrm>
+          <a:prstGeom prst="rect">
+            <a:avLst/>
+          </a:prstGeom>
+          <a:noFill/>
+        </p:spPr>
+        <p:txBody>
+          <a:bodyPr wrap="none" lIns="9144" rIns="9144" tIns="9144" bIns="9144" anchor="t">
+            <a:spAutoFit/>
+          </a:bodyPr>
+          <a:lstStyle/>
+          <a:p>
+            <a:pPr algn="r">
+              <a:spcAft>
+                <a:spcPts val="0"/>
+              </a:spcAft>
+              <a:defRPr sz="680" b="1">
+                <a:solidFill>
+                  <a:srgbClr val="4F6B00"/>
+                </a:solidFill>
+                <a:latin typeface="Inter"/>
+              </a:defRPr>
+            </a:pPr>
+            <a:r>
+              <a:rPr>
+                <a:latin typeface="Inter"/>
+              </a:rPr>
+              <a:t>Illustrative, Gradient Maintained — demo data, not the client's holdings or managers</a:t>
+            </a:r>
+          </a:p>
+        </p:txBody>
+      </p:sp>
+      <p:sp>
+        <p:nvSpPr>
+          <p:cNvPr id="5" name="TextBox 4"/>
+          <p:cNvSpPr txBox="1"/>
+          <p:nvPr/>
+        </p:nvSpPr>
+        <p:spPr>
+          <a:xfrm>
             <a:off x="640080" y="566928"/>
             <a:ext cx="10058400" cy="530352"/>
           </a:xfrm>
@@ -5556,7 +5598,7 @@
       </p:sp>
       <p:sp>
         <p:nvSpPr>
-          <p:cNvPr id="5" name="Rectangle 4"/>
+          <p:cNvPr id="6" name="Rectangle 5"/>
           <p:cNvSpPr/>
           <p:nvPr/>
         </p:nvSpPr>
@@ -5605,7 +5647,7 @@
       </p:sp>
       <p:sp>
         <p:nvSpPr>
-          <p:cNvPr id="6" name="Rectangle 5"/>
+          <p:cNvPr id="7" name="Rectangle 6"/>
           <p:cNvSpPr/>
           <p:nvPr/>
         </p:nvSpPr>
@@ -5654,7 +5696,7 @@
       </p:sp>
       <p:sp>
         <p:nvSpPr>
-          <p:cNvPr id="7" name="TextBox 6"/>
+          <p:cNvPr id="8" name="TextBox 7"/>
           <p:cNvSpPr txBox="1"/>
           <p:nvPr/>
         </p:nvSpPr>
@@ -5696,7 +5738,7 @@
       </p:sp>
       <p:sp>
         <p:nvSpPr>
-          <p:cNvPr id="8" name="TextBox 7"/>
+          <p:cNvPr id="9" name="TextBox 8"/>
           <p:cNvSpPr txBox="1"/>
           <p:nvPr/>
         </p:nvSpPr>
@@ -5738,7 +5780,7 @@
       </p:sp>
       <p:graphicFrame>
         <p:nvGraphicFramePr>
-          <p:cNvPr id="9" name="Chart 8"/>
+          <p:cNvPr id="10" name="Chart 9"/>
           <p:cNvGraphicFramePr>
             <a:graphicFrameLocks noGrp="1"/>
           </p:cNvGraphicFramePr>
@@ -5756,7 +5798,7 @@
       </p:graphicFrame>
       <p:sp>
         <p:nvSpPr>
-          <p:cNvPr id="10" name="Rectangle 9"/>
+          <p:cNvPr id="11" name="Rectangle 10"/>
           <p:cNvSpPr/>
           <p:nvPr/>
         </p:nvSpPr>
@@ -5805,7 +5847,7 @@
       </p:sp>
       <p:sp>
         <p:nvSpPr>
-          <p:cNvPr id="11" name="TextBox 10"/>
+          <p:cNvPr id="12" name="TextBox 11"/>
           <p:cNvSpPr txBox="1"/>
           <p:nvPr/>
         </p:nvSpPr>
@@ -5840,14 +5882,14 @@
               <a:rPr>
                 <a:latin typeface="Inter"/>
               </a:rPr>
-              <a:t>Sources: none cited</a:t>
+              <a:t>Sources: S1</a:t>
             </a:r>
           </a:p>
         </p:txBody>
       </p:sp>
       <p:sp>
         <p:nvSpPr>
-          <p:cNvPr id="12" name="TextBox 11"/>
+          <p:cNvPr id="13" name="TextBox 12"/>
           <p:cNvSpPr txBox="1"/>
           <p:nvPr/>
         </p:nvSpPr>
@@ -5882,14 +5924,14 @@
               <a:rPr>
                 <a:latin typeface="Inter"/>
               </a:rPr>
-              <a:t>TEST DATA — fictional portfolio for rendering tests only · Data as of 2026-06-30</a:t>
+              <a:t>Confidential — Investment Committee · Data as of 2026-06-30</a:t>
             </a:r>
           </a:p>
         </p:txBody>
       </p:sp>
       <p:sp>
         <p:nvSpPr>
-          <p:cNvPr id="13" name="TextBox 12"/>
+          <p:cNvPr id="14" name="TextBox 13"/>
           <p:cNvSpPr txBox="1"/>
           <p:nvPr/>
         </p:nvSpPr>
@@ -6005,7 +6047,7 @@
         <p:spPr>
           <a:xfrm>
             <a:off x="640080" y="329184"/>
-            <a:ext cx="9875520" cy="182880"/>
+            <a:ext cx="5303520" cy="182880"/>
           </a:xfrm>
           <a:prstGeom prst="rect">
             <a:avLst/>
@@ -6046,6 +6088,48 @@
         </p:nvSpPr>
         <p:spPr>
           <a:xfrm>
+            <a:off x="5897880" y="310896"/>
+            <a:ext cx="4800600" cy="256032"/>
+          </a:xfrm>
+          <a:prstGeom prst="rect">
+            <a:avLst/>
+          </a:prstGeom>
+          <a:noFill/>
+        </p:spPr>
+        <p:txBody>
+          <a:bodyPr wrap="none" lIns="9144" rIns="9144" tIns="9144" bIns="9144" anchor="t">
+            <a:spAutoFit/>
+          </a:bodyPr>
+          <a:lstStyle/>
+          <a:p>
+            <a:pPr algn="r">
+              <a:spcAft>
+                <a:spcPts val="0"/>
+              </a:spcAft>
+              <a:defRPr sz="680" b="1">
+                <a:solidFill>
+                  <a:srgbClr val="4F6B00"/>
+                </a:solidFill>
+                <a:latin typeface="Inter"/>
+              </a:defRPr>
+            </a:pPr>
+            <a:r>
+              <a:rPr>
+                <a:latin typeface="Inter"/>
+              </a:rPr>
+              <a:t>Illustrative, Gradient Maintained — demo data, not the client's holdings or managers</a:t>
+            </a:r>
+          </a:p>
+        </p:txBody>
+      </p:sp>
+      <p:sp>
+        <p:nvSpPr>
+          <p:cNvPr id="5" name="TextBox 4"/>
+          <p:cNvSpPr txBox="1"/>
+          <p:nvPr/>
+        </p:nvSpPr>
+        <p:spPr>
+          <a:xfrm>
             <a:off x="640080" y="566928"/>
             <a:ext cx="10058400" cy="530352"/>
           </a:xfrm>
@@ -6082,7 +6166,7 @@
       </p:sp>
       <p:sp>
         <p:nvSpPr>
-          <p:cNvPr id="5" name="Rectangle 4"/>
+          <p:cNvPr id="6" name="Rectangle 5"/>
           <p:cNvSpPr/>
           <p:nvPr/>
         </p:nvSpPr>
@@ -6131,7 +6215,7 @@
       </p:sp>
       <p:sp>
         <p:nvSpPr>
-          <p:cNvPr id="6" name="Rectangle 5"/>
+          <p:cNvPr id="7" name="Rectangle 6"/>
           <p:cNvSpPr/>
           <p:nvPr/>
         </p:nvSpPr>
@@ -6180,7 +6264,7 @@
       </p:sp>
       <p:sp>
         <p:nvSpPr>
-          <p:cNvPr id="7" name="TextBox 6"/>
+          <p:cNvPr id="8" name="TextBox 7"/>
           <p:cNvSpPr txBox="1"/>
           <p:nvPr/>
         </p:nvSpPr>
@@ -6222,7 +6306,7 @@
       </p:sp>
       <p:sp>
         <p:nvSpPr>
-          <p:cNvPr id="8" name="TextBox 7"/>
+          <p:cNvPr id="9" name="TextBox 8"/>
           <p:cNvSpPr txBox="1"/>
           <p:nvPr/>
         </p:nvSpPr>
@@ -6264,7 +6348,7 @@
       </p:sp>
       <p:graphicFrame>
         <p:nvGraphicFramePr>
-          <p:cNvPr id="9" name="Table 8"/>
+          <p:cNvPr id="10" name="Table 9"/>
           <p:cNvGraphicFramePr>
             <a:graphicFrameLocks noGrp="1"/>
           </p:cNvGraphicFramePr>
@@ -6950,7 +7034,7 @@
       </p:graphicFrame>
       <p:sp>
         <p:nvSpPr>
-          <p:cNvPr id="10" name="Rectangle 9"/>
+          <p:cNvPr id="11" name="Rectangle 10"/>
           <p:cNvSpPr/>
           <p:nvPr/>
         </p:nvSpPr>
@@ -6999,7 +7083,7 @@
       </p:sp>
       <p:sp>
         <p:nvSpPr>
-          <p:cNvPr id="11" name="Rectangle 10"/>
+          <p:cNvPr id="12" name="Rectangle 11"/>
           <p:cNvSpPr/>
           <p:nvPr/>
         </p:nvSpPr>
@@ -7048,7 +7132,7 @@
       </p:sp>
       <p:sp>
         <p:nvSpPr>
-          <p:cNvPr id="12" name="TextBox 11"/>
+          <p:cNvPr id="13" name="TextBox 12"/>
           <p:cNvSpPr txBox="1"/>
           <p:nvPr/>
         </p:nvSpPr>
@@ -7090,7 +7174,7 @@
       </p:sp>
       <p:sp>
         <p:nvSpPr>
-          <p:cNvPr id="13" name="TextBox 12"/>
+          <p:cNvPr id="14" name="TextBox 13"/>
           <p:cNvSpPr txBox="1"/>
           <p:nvPr/>
         </p:nvSpPr>
@@ -7132,7 +7216,7 @@
       </p:sp>
       <p:sp>
         <p:nvSpPr>
-          <p:cNvPr id="14" name="TextBox 13"/>
+          <p:cNvPr id="15" name="TextBox 14"/>
           <p:cNvSpPr txBox="1"/>
           <p:nvPr/>
         </p:nvSpPr>
@@ -7174,7 +7258,7 @@
       </p:sp>
       <p:sp>
         <p:nvSpPr>
-          <p:cNvPr id="15" name="Rectangle 14"/>
+          <p:cNvPr id="16" name="Rectangle 15"/>
           <p:cNvSpPr/>
           <p:nvPr/>
         </p:nvSpPr>
@@ -7223,7 +7307,7 @@
       </p:sp>
       <p:sp>
         <p:nvSpPr>
-          <p:cNvPr id="16" name="TextBox 15"/>
+          <p:cNvPr id="17" name="TextBox 16"/>
           <p:cNvSpPr txBox="1"/>
           <p:nvPr/>
         </p:nvSpPr>
@@ -7265,7 +7349,7 @@
       </p:sp>
       <p:sp>
         <p:nvSpPr>
-          <p:cNvPr id="17" name="TextBox 16"/>
+          <p:cNvPr id="18" name="TextBox 17"/>
           <p:cNvSpPr txBox="1"/>
           <p:nvPr/>
         </p:nvSpPr>
@@ -7300,14 +7384,14 @@
               <a:rPr>
                 <a:latin typeface="Inter"/>
               </a:rPr>
-              <a:t>TEST DATA — fictional portfolio for rendering tests only · Data as of 2026-06-30</a:t>
+              <a:t>Confidential — Investment Committee · Data as of 2026-06-30</a:t>
             </a:r>
           </a:p>
         </p:txBody>
       </p:sp>
       <p:sp>
         <p:nvSpPr>
-          <p:cNvPr id="18" name="TextBox 17"/>
+          <p:cNvPr id="19" name="TextBox 18"/>
           <p:cNvSpPr txBox="1"/>
           <p:nvPr/>
         </p:nvSpPr>
@@ -7422,6 +7506,48 @@
         </p:nvSpPr>
         <p:spPr>
           <a:xfrm>
+            <a:off x="5897880" y="310896"/>
+            <a:ext cx="4800600" cy="256032"/>
+          </a:xfrm>
+          <a:prstGeom prst="rect">
+            <a:avLst/>
+          </a:prstGeom>
+          <a:noFill/>
+        </p:spPr>
+        <p:txBody>
+          <a:bodyPr wrap="none" lIns="9144" rIns="9144" tIns="9144" bIns="9144" anchor="t">
+            <a:spAutoFit/>
+          </a:bodyPr>
+          <a:lstStyle/>
+          <a:p>
+            <a:pPr algn="r">
+              <a:spcAft>
+                <a:spcPts val="0"/>
+              </a:spcAft>
+              <a:defRPr sz="680" b="1">
+                <a:solidFill>
+                  <a:srgbClr val="4F6B00"/>
+                </a:solidFill>
+                <a:latin typeface="Inter"/>
+              </a:defRPr>
+            </a:pPr>
+            <a:r>
+              <a:rPr>
+                <a:latin typeface="Inter"/>
+              </a:rPr>
+              <a:t>Illustrative, Gradient Maintained — demo data, not the client's holdings or managers</a:t>
+            </a:r>
+          </a:p>
+        </p:txBody>
+      </p:sp>
+      <p:sp>
+        <p:nvSpPr>
+          <p:cNvPr id="4" name="TextBox 3"/>
+          <p:cNvSpPr txBox="1"/>
+          <p:nvPr/>
+        </p:nvSpPr>
+        <p:spPr>
+          <a:xfrm>
             <a:off x="640080" y="566928"/>
             <a:ext cx="10058400" cy="530352"/>
           </a:xfrm>
@@ -7458,7 +7584,7 @@
       </p:sp>
       <p:sp>
         <p:nvSpPr>
-          <p:cNvPr id="4" name="Rectangle 3"/>
+          <p:cNvPr id="5" name="Rectangle 4"/>
           <p:cNvSpPr/>
           <p:nvPr/>
         </p:nvSpPr>
@@ -7507,7 +7633,7 @@
       </p:sp>
       <p:sp>
         <p:nvSpPr>
-          <p:cNvPr id="5" name="Rectangle 4"/>
+          <p:cNvPr id="6" name="Rectangle 5"/>
           <p:cNvSpPr/>
           <p:nvPr/>
         </p:nvSpPr>
@@ -7556,7 +7682,7 @@
       </p:sp>
       <p:sp>
         <p:nvSpPr>
-          <p:cNvPr id="6" name="TextBox 5"/>
+          <p:cNvPr id="7" name="TextBox 6"/>
           <p:cNvSpPr txBox="1"/>
           <p:nvPr/>
         </p:nvSpPr>
@@ -7598,7 +7724,7 @@
       </p:sp>
       <p:sp>
         <p:nvSpPr>
-          <p:cNvPr id="7" name="TextBox 6"/>
+          <p:cNvPr id="8" name="TextBox 7"/>
           <p:cNvSpPr txBox="1"/>
           <p:nvPr/>
         </p:nvSpPr>
@@ -7640,7 +7766,7 @@
       </p:sp>
       <p:graphicFrame>
         <p:nvGraphicFramePr>
-          <p:cNvPr id="8" name="Chart 7"/>
+          <p:cNvPr id="9" name="Chart 8"/>
           <p:cNvGraphicFramePr>
             <a:graphicFrameLocks noGrp="1"/>
           </p:cNvGraphicFramePr>
@@ -7658,7 +7784,7 @@
       </p:graphicFrame>
       <p:sp>
         <p:nvSpPr>
-          <p:cNvPr id="9" name="Rectangle 8"/>
+          <p:cNvPr id="10" name="Rectangle 9"/>
           <p:cNvSpPr/>
           <p:nvPr/>
         </p:nvSpPr>
@@ -7707,7 +7833,7 @@
       </p:sp>
       <p:sp>
         <p:nvSpPr>
-          <p:cNvPr id="10" name="TextBox 9"/>
+          <p:cNvPr id="11" name="TextBox 10"/>
           <p:cNvSpPr txBox="1"/>
           <p:nvPr/>
         </p:nvSpPr>
@@ -7749,7 +7875,7 @@
       </p:sp>
       <p:sp>
         <p:nvSpPr>
-          <p:cNvPr id="11" name="TextBox 10"/>
+          <p:cNvPr id="12" name="TextBox 11"/>
           <p:cNvSpPr txBox="1"/>
           <p:nvPr/>
         </p:nvSpPr>
@@ -7784,14 +7910,14 @@
               <a:rPr>
                 <a:latin typeface="Inter"/>
               </a:rPr>
-              <a:t>TEST DATA — fictional portfolio for rendering tests only · Data as of 2026-06-30</a:t>
+              <a:t>Confidential — Investment Committee · Data as of 2026-06-30</a:t>
             </a:r>
           </a:p>
         </p:txBody>
       </p:sp>
       <p:sp>
         <p:nvSpPr>
-          <p:cNvPr id="12" name="TextBox 11"/>
+          <p:cNvPr id="13" name="TextBox 12"/>
           <p:cNvSpPr txBox="1"/>
           <p:nvPr/>
         </p:nvSpPr>
@@ -7906,6 +8032,48 @@
         </p:nvSpPr>
         <p:spPr>
           <a:xfrm>
+            <a:off x="5897880" y="310896"/>
+            <a:ext cx="4800600" cy="256032"/>
+          </a:xfrm>
+          <a:prstGeom prst="rect">
+            <a:avLst/>
+          </a:prstGeom>
+          <a:noFill/>
+        </p:spPr>
+        <p:txBody>
+          <a:bodyPr wrap="none" lIns="9144" rIns="9144" tIns="9144" bIns="9144" anchor="t">
+            <a:spAutoFit/>
+          </a:bodyPr>
+          <a:lstStyle/>
+          <a:p>
+            <a:pPr algn="r">
+              <a:spcAft>
+                <a:spcPts val="0"/>
+              </a:spcAft>
+              <a:defRPr sz="680" b="1">
+                <a:solidFill>
+                  <a:srgbClr val="4F6B00"/>
+                </a:solidFill>
+                <a:latin typeface="Inter"/>
+              </a:defRPr>
+            </a:pPr>
+            <a:r>
+              <a:rPr>
+                <a:latin typeface="Inter"/>
+              </a:rPr>
+              <a:t>Illustrative, Gradient Maintained — demo data, not the client's holdings or managers</a:t>
+            </a:r>
+          </a:p>
+        </p:txBody>
+      </p:sp>
+      <p:sp>
+        <p:nvSpPr>
+          <p:cNvPr id="4" name="TextBox 3"/>
+          <p:cNvSpPr txBox="1"/>
+          <p:nvPr/>
+        </p:nvSpPr>
+        <p:spPr>
+          <a:xfrm>
             <a:off x="640080" y="566928"/>
             <a:ext cx="10058400" cy="530352"/>
           </a:xfrm>
@@ -7942,7 +8110,7 @@
       </p:sp>
       <p:sp>
         <p:nvSpPr>
-          <p:cNvPr id="4" name="Rectangle 3"/>
+          <p:cNvPr id="5" name="Rectangle 4"/>
           <p:cNvSpPr/>
           <p:nvPr/>
         </p:nvSpPr>
@@ -7991,7 +8159,7 @@
       </p:sp>
       <p:sp>
         <p:nvSpPr>
-          <p:cNvPr id="5" name="Rectangle 4"/>
+          <p:cNvPr id="6" name="Rectangle 5"/>
           <p:cNvSpPr/>
           <p:nvPr/>
         </p:nvSpPr>
@@ -8040,7 +8208,7 @@
       </p:sp>
       <p:sp>
         <p:nvSpPr>
-          <p:cNvPr id="6" name="TextBox 5"/>
+          <p:cNvPr id="7" name="TextBox 6"/>
           <p:cNvSpPr txBox="1"/>
           <p:nvPr/>
         </p:nvSpPr>
@@ -8082,7 +8250,7 @@
       </p:sp>
       <p:sp>
         <p:nvSpPr>
-          <p:cNvPr id="7" name="TextBox 6"/>
+          <p:cNvPr id="8" name="TextBox 7"/>
           <p:cNvSpPr txBox="1"/>
           <p:nvPr/>
         </p:nvSpPr>
@@ -8124,7 +8292,7 @@
       </p:sp>
       <p:graphicFrame>
         <p:nvGraphicFramePr>
-          <p:cNvPr id="8" name="Table 7"/>
+          <p:cNvPr id="9" name="Table 8"/>
           <p:cNvGraphicFramePr>
             <a:graphicFrameLocks noGrp="1"/>
           </p:cNvGraphicFramePr>
@@ -8701,7 +8869,7 @@
       </p:graphicFrame>
       <p:sp>
         <p:nvSpPr>
-          <p:cNvPr id="9" name="TextBox 8"/>
+          <p:cNvPr id="10" name="TextBox 9"/>
           <p:cNvSpPr txBox="1"/>
           <p:nvPr/>
         </p:nvSpPr>
@@ -8743,7 +8911,7 @@
       </p:sp>
       <p:graphicFrame>
         <p:nvGraphicFramePr>
-          <p:cNvPr id="10" name="Table 9"/>
+          <p:cNvPr id="11" name="Table 10"/>
           <p:cNvGraphicFramePr>
             <a:graphicFrameLocks noGrp="1"/>
           </p:cNvGraphicFramePr>
@@ -9185,7 +9353,7 @@
       </p:graphicFrame>
       <p:sp>
         <p:nvSpPr>
-          <p:cNvPr id="11" name="TextBox 10"/>
+          <p:cNvPr id="12" name="TextBox 11"/>
           <p:cNvSpPr txBox="1"/>
           <p:nvPr/>
         </p:nvSpPr>
@@ -9227,7 +9395,7 @@
       </p:sp>
       <p:sp>
         <p:nvSpPr>
-          <p:cNvPr id="12" name="Rectangle 11"/>
+          <p:cNvPr id="13" name="Rectangle 12"/>
           <p:cNvSpPr/>
           <p:nvPr/>
         </p:nvSpPr>
@@ -9276,7 +9444,7 @@
       </p:sp>
       <p:sp>
         <p:nvSpPr>
-          <p:cNvPr id="13" name="TextBox 12"/>
+          <p:cNvPr id="14" name="TextBox 13"/>
           <p:cNvSpPr txBox="1"/>
           <p:nvPr/>
         </p:nvSpPr>
@@ -9318,7 +9486,7 @@
       </p:sp>
       <p:sp>
         <p:nvSpPr>
-          <p:cNvPr id="14" name="TextBox 13"/>
+          <p:cNvPr id="15" name="TextBox 14"/>
           <p:cNvSpPr txBox="1"/>
           <p:nvPr/>
         </p:nvSpPr>
@@ -9353,14 +9521,14 @@
               <a:rPr>
                 <a:latin typeface="Inter"/>
               </a:rPr>
-              <a:t>TEST DATA — fictional portfolio for rendering tests only · Data as of 2026-06-30</a:t>
+              <a:t>Confidential — Investment Committee · Data as of 2026-06-30</a:t>
             </a:r>
           </a:p>
         </p:txBody>
       </p:sp>
       <p:sp>
         <p:nvSpPr>
-          <p:cNvPr id="15" name="TextBox 14"/>
+          <p:cNvPr id="16" name="TextBox 15"/>
           <p:cNvSpPr txBox="1"/>
           <p:nvPr/>
         </p:nvSpPr>
@@ -9475,6 +9643,48 @@
         </p:nvSpPr>
         <p:spPr>
           <a:xfrm>
+            <a:off x="5897880" y="310896"/>
+            <a:ext cx="4800600" cy="256032"/>
+          </a:xfrm>
+          <a:prstGeom prst="rect">
+            <a:avLst/>
+          </a:prstGeom>
+          <a:noFill/>
+        </p:spPr>
+        <p:txBody>
+          <a:bodyPr wrap="none" lIns="9144" rIns="9144" tIns="9144" bIns="9144" anchor="t">
+            <a:spAutoFit/>
+          </a:bodyPr>
+          <a:lstStyle/>
+          <a:p>
+            <a:pPr algn="r">
+              <a:spcAft>
+                <a:spcPts val="0"/>
+              </a:spcAft>
+              <a:defRPr sz="680" b="1">
+                <a:solidFill>
+                  <a:srgbClr val="4F6B00"/>
+                </a:solidFill>
+                <a:latin typeface="Inter"/>
+              </a:defRPr>
+            </a:pPr>
+            <a:r>
+              <a:rPr>
+                <a:latin typeface="Inter"/>
+              </a:rPr>
+              <a:t>Illustrative, Gradient Maintained — demo data, not the client's holdings or managers</a:t>
+            </a:r>
+          </a:p>
+        </p:txBody>
+      </p:sp>
+      <p:sp>
+        <p:nvSpPr>
+          <p:cNvPr id="4" name="TextBox 3"/>
+          <p:cNvSpPr txBox="1"/>
+          <p:nvPr/>
+        </p:nvSpPr>
+        <p:spPr>
+          <a:xfrm>
             <a:off x="640080" y="566928"/>
             <a:ext cx="10058400" cy="530352"/>
           </a:xfrm>
@@ -9511,7 +9721,7 @@
       </p:sp>
       <p:sp>
         <p:nvSpPr>
-          <p:cNvPr id="4" name="Rectangle 3"/>
+          <p:cNvPr id="5" name="Rectangle 4"/>
           <p:cNvSpPr/>
           <p:nvPr/>
         </p:nvSpPr>
@@ -9560,7 +9770,7 @@
       </p:sp>
       <p:sp>
         <p:nvSpPr>
-          <p:cNvPr id="5" name="Rectangle 4"/>
+          <p:cNvPr id="6" name="Rectangle 5"/>
           <p:cNvSpPr/>
           <p:nvPr/>
         </p:nvSpPr>
@@ -9609,7 +9819,7 @@
       </p:sp>
       <p:sp>
         <p:nvSpPr>
-          <p:cNvPr id="6" name="TextBox 5"/>
+          <p:cNvPr id="7" name="TextBox 6"/>
           <p:cNvSpPr txBox="1"/>
           <p:nvPr/>
         </p:nvSpPr>
@@ -9651,7 +9861,7 @@
       </p:sp>
       <p:graphicFrame>
         <p:nvGraphicFramePr>
-          <p:cNvPr id="7" name="Table 6"/>
+          <p:cNvPr id="8" name="Table 7"/>
           <p:cNvGraphicFramePr>
             <a:graphicFrameLocks noGrp="1"/>
           </p:cNvGraphicFramePr>
@@ -9901,7 +10111,7 @@
       </p:graphicFrame>
       <p:sp>
         <p:nvSpPr>
-          <p:cNvPr id="8" name="Rectangle 7"/>
+          <p:cNvPr id="9" name="Rectangle 8"/>
           <p:cNvSpPr/>
           <p:nvPr/>
         </p:nvSpPr>
@@ -9950,7 +10160,7 @@
       </p:sp>
       <p:sp>
         <p:nvSpPr>
-          <p:cNvPr id="9" name="TextBox 8"/>
+          <p:cNvPr id="10" name="TextBox 9"/>
           <p:cNvSpPr txBox="1"/>
           <p:nvPr/>
         </p:nvSpPr>
@@ -9992,7 +10202,7 @@
       </p:sp>
       <p:sp>
         <p:nvSpPr>
-          <p:cNvPr id="10" name="TextBox 9"/>
+          <p:cNvPr id="11" name="TextBox 10"/>
           <p:cNvSpPr txBox="1"/>
           <p:nvPr/>
         </p:nvSpPr>
@@ -10027,14 +10237,14 @@
               <a:rPr>
                 <a:latin typeface="Inter"/>
               </a:rPr>
-              <a:t>TEST DATA — fictional portfolio for rendering tests only · Data as of 2026-06-30</a:t>
+              <a:t>Confidential — Investment Committee · Data as of 2026-06-30</a:t>
             </a:r>
           </a:p>
         </p:txBody>
       </p:sp>
       <p:sp>
         <p:nvSpPr>
-          <p:cNvPr id="11" name="TextBox 10"/>
+          <p:cNvPr id="12" name="TextBox 11"/>
           <p:cNvSpPr txBox="1"/>
           <p:nvPr/>
         </p:nvSpPr>
@@ -10150,7 +10360,7 @@
         <p:spPr>
           <a:xfrm>
             <a:off x="640080" y="329184"/>
-            <a:ext cx="9875520" cy="182880"/>
+            <a:ext cx="5303520" cy="182880"/>
           </a:xfrm>
           <a:prstGeom prst="rect">
             <a:avLst/>
@@ -10191,6 +10401,48 @@
         </p:nvSpPr>
         <p:spPr>
           <a:xfrm>
+            <a:off x="5897880" y="310896"/>
+            <a:ext cx="4800600" cy="256032"/>
+          </a:xfrm>
+          <a:prstGeom prst="rect">
+            <a:avLst/>
+          </a:prstGeom>
+          <a:noFill/>
+        </p:spPr>
+        <p:txBody>
+          <a:bodyPr wrap="none" lIns="9144" rIns="9144" tIns="9144" bIns="9144" anchor="t">
+            <a:spAutoFit/>
+          </a:bodyPr>
+          <a:lstStyle/>
+          <a:p>
+            <a:pPr algn="r">
+              <a:spcAft>
+                <a:spcPts val="0"/>
+              </a:spcAft>
+              <a:defRPr sz="680" b="1">
+                <a:solidFill>
+                  <a:srgbClr val="4F6B00"/>
+                </a:solidFill>
+                <a:latin typeface="Inter"/>
+              </a:defRPr>
+            </a:pPr>
+            <a:r>
+              <a:rPr>
+                <a:latin typeface="Inter"/>
+              </a:rPr>
+              <a:t>Illustrative, Gradient Maintained — demo data, not the client's holdings or managers</a:t>
+            </a:r>
+          </a:p>
+        </p:txBody>
+      </p:sp>
+      <p:sp>
+        <p:nvSpPr>
+          <p:cNvPr id="5" name="TextBox 4"/>
+          <p:cNvSpPr txBox="1"/>
+          <p:nvPr/>
+        </p:nvSpPr>
+        <p:spPr>
+          <a:xfrm>
             <a:off x="640080" y="566928"/>
             <a:ext cx="10058400" cy="530352"/>
           </a:xfrm>
@@ -10227,7 +10479,7 @@
       </p:sp>
       <p:sp>
         <p:nvSpPr>
-          <p:cNvPr id="5" name="Rectangle 4"/>
+          <p:cNvPr id="6" name="Rectangle 5"/>
           <p:cNvSpPr/>
           <p:nvPr/>
         </p:nvSpPr>
@@ -10276,7 +10528,7 @@
       </p:sp>
       <p:sp>
         <p:nvSpPr>
-          <p:cNvPr id="6" name="Rectangle 5"/>
+          <p:cNvPr id="7" name="Rectangle 6"/>
           <p:cNvSpPr/>
           <p:nvPr/>
         </p:nvSpPr>
@@ -10325,7 +10577,7 @@
       </p:sp>
       <p:sp>
         <p:nvSpPr>
-          <p:cNvPr id="7" name="TextBox 6"/>
+          <p:cNvPr id="8" name="TextBox 7"/>
           <p:cNvSpPr txBox="1"/>
           <p:nvPr/>
         </p:nvSpPr>
@@ -10367,7 +10619,7 @@
       </p:sp>
       <p:sp>
         <p:nvSpPr>
-          <p:cNvPr id="8" name="Rectangle 7"/>
+          <p:cNvPr id="9" name="Rectangle 8"/>
           <p:cNvSpPr/>
           <p:nvPr/>
         </p:nvSpPr>
@@ -10416,7 +10668,7 @@
       </p:sp>
       <p:sp>
         <p:nvSpPr>
-          <p:cNvPr id="9" name="Rectangle 8"/>
+          <p:cNvPr id="10" name="Rectangle 9"/>
           <p:cNvSpPr/>
           <p:nvPr/>
         </p:nvSpPr>
@@ -10465,7 +10717,7 @@
       </p:sp>
       <p:sp>
         <p:nvSpPr>
-          <p:cNvPr id="10" name="TextBox 9"/>
+          <p:cNvPr id="11" name="TextBox 10"/>
           <p:cNvSpPr txBox="1"/>
           <p:nvPr/>
         </p:nvSpPr>
@@ -10507,7 +10759,7 @@
       </p:sp>
       <p:sp>
         <p:nvSpPr>
-          <p:cNvPr id="11" name="TextBox 10"/>
+          <p:cNvPr id="12" name="TextBox 11"/>
           <p:cNvSpPr txBox="1"/>
           <p:nvPr/>
         </p:nvSpPr>
@@ -10549,7 +10801,7 @@
       </p:sp>
       <p:sp>
         <p:nvSpPr>
-          <p:cNvPr id="12" name="TextBox 11"/>
+          <p:cNvPr id="13" name="TextBox 12"/>
           <p:cNvSpPr txBox="1"/>
           <p:nvPr/>
         </p:nvSpPr>
@@ -10591,7 +10843,7 @@
       </p:sp>
       <p:sp>
         <p:nvSpPr>
-          <p:cNvPr id="13" name="Rectangle 12"/>
+          <p:cNvPr id="14" name="Rectangle 13"/>
           <p:cNvSpPr/>
           <p:nvPr/>
         </p:nvSpPr>
@@ -10640,7 +10892,7 @@
       </p:sp>
       <p:sp>
         <p:nvSpPr>
-          <p:cNvPr id="14" name="Rectangle 13"/>
+          <p:cNvPr id="15" name="Rectangle 14"/>
           <p:cNvSpPr/>
           <p:nvPr/>
         </p:nvSpPr>
@@ -10689,7 +10941,7 @@
       </p:sp>
       <p:sp>
         <p:nvSpPr>
-          <p:cNvPr id="15" name="TextBox 14"/>
+          <p:cNvPr id="16" name="TextBox 15"/>
           <p:cNvSpPr txBox="1"/>
           <p:nvPr/>
         </p:nvSpPr>
@@ -10731,7 +10983,7 @@
       </p:sp>
       <p:sp>
         <p:nvSpPr>
-          <p:cNvPr id="16" name="TextBox 15"/>
+          <p:cNvPr id="17" name="TextBox 16"/>
           <p:cNvSpPr txBox="1"/>
           <p:nvPr/>
         </p:nvSpPr>
@@ -10773,7 +11025,7 @@
       </p:sp>
       <p:sp>
         <p:nvSpPr>
-          <p:cNvPr id="17" name="TextBox 16"/>
+          <p:cNvPr id="18" name="TextBox 17"/>
           <p:cNvSpPr txBox="1"/>
           <p:nvPr/>
         </p:nvSpPr>
@@ -10815,7 +11067,7 @@
       </p:sp>
       <p:sp>
         <p:nvSpPr>
-          <p:cNvPr id="18" name="Rectangle 17"/>
+          <p:cNvPr id="19" name="Rectangle 18"/>
           <p:cNvSpPr/>
           <p:nvPr/>
         </p:nvSpPr>
@@ -10864,7 +11116,7 @@
       </p:sp>
       <p:sp>
         <p:nvSpPr>
-          <p:cNvPr id="19" name="Rectangle 18"/>
+          <p:cNvPr id="20" name="Rectangle 19"/>
           <p:cNvSpPr/>
           <p:nvPr/>
         </p:nvSpPr>
@@ -10913,7 +11165,7 @@
       </p:sp>
       <p:sp>
         <p:nvSpPr>
-          <p:cNvPr id="20" name="TextBox 19"/>
+          <p:cNvPr id="21" name="TextBox 20"/>
           <p:cNvSpPr txBox="1"/>
           <p:nvPr/>
         </p:nvSpPr>
@@ -10955,7 +11207,7 @@
       </p:sp>
       <p:sp>
         <p:nvSpPr>
-          <p:cNvPr id="21" name="TextBox 20"/>
+          <p:cNvPr id="22" name="TextBox 21"/>
           <p:cNvSpPr txBox="1"/>
           <p:nvPr/>
         </p:nvSpPr>
@@ -10997,7 +11249,7 @@
       </p:sp>
       <p:sp>
         <p:nvSpPr>
-          <p:cNvPr id="22" name="TextBox 21"/>
+          <p:cNvPr id="23" name="TextBox 22"/>
           <p:cNvSpPr txBox="1"/>
           <p:nvPr/>
         </p:nvSpPr>
@@ -11039,7 +11291,7 @@
       </p:sp>
       <p:sp>
         <p:nvSpPr>
-          <p:cNvPr id="23" name="Rectangle 22"/>
+          <p:cNvPr id="24" name="Rectangle 23"/>
           <p:cNvSpPr/>
           <p:nvPr/>
         </p:nvSpPr>
@@ -11088,7 +11340,7 @@
       </p:sp>
       <p:sp>
         <p:nvSpPr>
-          <p:cNvPr id="24" name="Rectangle 23"/>
+          <p:cNvPr id="25" name="Rectangle 24"/>
           <p:cNvSpPr/>
           <p:nvPr/>
         </p:nvSpPr>
@@ -11137,7 +11389,7 @@
       </p:sp>
       <p:sp>
         <p:nvSpPr>
-          <p:cNvPr id="25" name="TextBox 24"/>
+          <p:cNvPr id="26" name="TextBox 25"/>
           <p:cNvSpPr txBox="1"/>
           <p:nvPr/>
         </p:nvSpPr>
@@ -11179,7 +11431,7 @@
       </p:sp>
       <p:sp>
         <p:nvSpPr>
-          <p:cNvPr id="26" name="TextBox 25"/>
+          <p:cNvPr id="27" name="TextBox 26"/>
           <p:cNvSpPr txBox="1"/>
           <p:nvPr/>
         </p:nvSpPr>
@@ -11221,7 +11473,7 @@
       </p:sp>
       <p:sp>
         <p:nvSpPr>
-          <p:cNvPr id="27" name="TextBox 26"/>
+          <p:cNvPr id="28" name="TextBox 27"/>
           <p:cNvSpPr txBox="1"/>
           <p:nvPr/>
         </p:nvSpPr>
@@ -11263,7 +11515,7 @@
       </p:sp>
       <p:sp>
         <p:nvSpPr>
-          <p:cNvPr id="28" name="Rectangle 27"/>
+          <p:cNvPr id="29" name="Rectangle 28"/>
           <p:cNvSpPr/>
           <p:nvPr/>
         </p:nvSpPr>
@@ -11312,7 +11564,7 @@
       </p:sp>
       <p:sp>
         <p:nvSpPr>
-          <p:cNvPr id="29" name="TextBox 28"/>
+          <p:cNvPr id="30" name="TextBox 29"/>
           <p:cNvSpPr txBox="1"/>
           <p:nvPr/>
         </p:nvSpPr>
@@ -11354,7 +11606,7 @@
       </p:sp>
       <p:sp>
         <p:nvSpPr>
-          <p:cNvPr id="30" name="TextBox 29"/>
+          <p:cNvPr id="31" name="TextBox 30"/>
           <p:cNvSpPr txBox="1"/>
           <p:nvPr/>
         </p:nvSpPr>
@@ -11389,14 +11641,14 @@
               <a:rPr>
                 <a:latin typeface="Inter"/>
               </a:rPr>
-              <a:t>TEST DATA — fictional portfolio for rendering tests only · Data as of 2026-06-30</a:t>
+              <a:t>Confidential — Investment Committee · Data as of 2026-06-30</a:t>
             </a:r>
           </a:p>
         </p:txBody>
       </p:sp>
       <p:sp>
         <p:nvSpPr>
-          <p:cNvPr id="31" name="TextBox 30"/>
+          <p:cNvPr id="32" name="TextBox 31"/>
           <p:cNvSpPr txBox="1"/>
           <p:nvPr/>
         </p:nvSpPr>
@@ -11512,7 +11764,7 @@
         <p:spPr>
           <a:xfrm>
             <a:off x="640080" y="329184"/>
-            <a:ext cx="9875520" cy="182880"/>
+            <a:ext cx="5303520" cy="182880"/>
           </a:xfrm>
           <a:prstGeom prst="rect">
             <a:avLst/>
@@ -11553,6 +11805,48 @@
         </p:nvSpPr>
         <p:spPr>
           <a:xfrm>
+            <a:off x="5897880" y="310896"/>
+            <a:ext cx="4800600" cy="256032"/>
+          </a:xfrm>
+          <a:prstGeom prst="rect">
+            <a:avLst/>
+          </a:prstGeom>
+          <a:noFill/>
+        </p:spPr>
+        <p:txBody>
+          <a:bodyPr wrap="none" lIns="9144" rIns="9144" tIns="9144" bIns="9144" anchor="t">
+            <a:spAutoFit/>
+          </a:bodyPr>
+          <a:lstStyle/>
+          <a:p>
+            <a:pPr algn="r">
+              <a:spcAft>
+                <a:spcPts val="0"/>
+              </a:spcAft>
+              <a:defRPr sz="680" b="1">
+                <a:solidFill>
+                  <a:srgbClr val="4F6B00"/>
+                </a:solidFill>
+                <a:latin typeface="Inter"/>
+              </a:defRPr>
+            </a:pPr>
+            <a:r>
+              <a:rPr>
+                <a:latin typeface="Inter"/>
+              </a:rPr>
+              <a:t>Illustrative, Gradient Maintained — demo data, not the client's holdings or managers</a:t>
+            </a:r>
+          </a:p>
+        </p:txBody>
+      </p:sp>
+      <p:sp>
+        <p:nvSpPr>
+          <p:cNvPr id="5" name="TextBox 4"/>
+          <p:cNvSpPr txBox="1"/>
+          <p:nvPr/>
+        </p:nvSpPr>
+        <p:spPr>
+          <a:xfrm>
             <a:off x="640080" y="566928"/>
             <a:ext cx="10058400" cy="530352"/>
           </a:xfrm>
@@ -11589,7 +11883,7 @@
       </p:sp>
       <p:sp>
         <p:nvSpPr>
-          <p:cNvPr id="5" name="Rectangle 4"/>
+          <p:cNvPr id="6" name="Rectangle 5"/>
           <p:cNvSpPr/>
           <p:nvPr/>
         </p:nvSpPr>
@@ -11638,7 +11932,7 @@
       </p:sp>
       <p:sp>
         <p:nvSpPr>
-          <p:cNvPr id="6" name="Rectangle 5"/>
+          <p:cNvPr id="7" name="Rectangle 6"/>
           <p:cNvSpPr/>
           <p:nvPr/>
         </p:nvSpPr>
@@ -11687,7 +11981,7 @@
       </p:sp>
       <p:sp>
         <p:nvSpPr>
-          <p:cNvPr id="7" name="TextBox 6"/>
+          <p:cNvPr id="8" name="TextBox 7"/>
           <p:cNvSpPr txBox="1"/>
           <p:nvPr/>
         </p:nvSpPr>
@@ -11729,7 +12023,7 @@
       </p:sp>
       <p:sp>
         <p:nvSpPr>
-          <p:cNvPr id="8" name="TextBox 7"/>
+          <p:cNvPr id="9" name="TextBox 8"/>
           <p:cNvSpPr txBox="1"/>
           <p:nvPr/>
         </p:nvSpPr>
@@ -11764,14 +12058,14 @@
               <a:rPr>
                 <a:latin typeface="Inter"/>
               </a:rPr>
-              <a:t>CREDIT SPREADS (TEST)</a:t>
+              <a:t>CREDIT SPREADS</a:t>
             </a:r>
           </a:p>
         </p:txBody>
       </p:sp>
       <p:graphicFrame>
         <p:nvGraphicFramePr>
-          <p:cNvPr id="9" name="Chart 8"/>
+          <p:cNvPr id="10" name="Chart 9"/>
           <p:cNvGraphicFramePr>
             <a:graphicFrameLocks noGrp="1"/>
           </p:cNvGraphicFramePr>
@@ -11789,7 +12083,7 @@
       </p:graphicFrame>
       <p:sp>
         <p:nvSpPr>
-          <p:cNvPr id="10" name="Rectangle 9"/>
+          <p:cNvPr id="11" name="Rectangle 10"/>
           <p:cNvSpPr/>
           <p:nvPr/>
         </p:nvSpPr>
@@ -11838,7 +12132,7 @@
       </p:sp>
       <p:sp>
         <p:nvSpPr>
-          <p:cNvPr id="11" name="TextBox 10"/>
+          <p:cNvPr id="12" name="TextBox 11"/>
           <p:cNvSpPr txBox="1"/>
           <p:nvPr/>
         </p:nvSpPr>
@@ -11873,14 +12167,14 @@
               <a:rPr>
                 <a:latin typeface="Inter"/>
               </a:rPr>
-              <a:t>Sources: none cited</a:t>
+              <a:t>Sources: S1</a:t>
             </a:r>
           </a:p>
         </p:txBody>
       </p:sp>
       <p:sp>
         <p:nvSpPr>
-          <p:cNvPr id="12" name="TextBox 11"/>
+          <p:cNvPr id="13" name="TextBox 12"/>
           <p:cNvSpPr txBox="1"/>
           <p:nvPr/>
         </p:nvSpPr>
@@ -11915,14 +12209,14 @@
               <a:rPr>
                 <a:latin typeface="Inter"/>
               </a:rPr>
-              <a:t>TEST DATA — fictional portfolio for rendering tests only · Data as of 2026-06-30</a:t>
+              <a:t>Confidential — Investment Committee · Data as of 2026-06-30</a:t>
             </a:r>
           </a:p>
         </p:txBody>
       </p:sp>
       <p:sp>
         <p:nvSpPr>
-          <p:cNvPr id="13" name="TextBox 12"/>
+          <p:cNvPr id="14" name="TextBox 13"/>
           <p:cNvSpPr txBox="1"/>
           <p:nvPr/>
         </p:nvSpPr>
@@ -12038,7 +12332,7 @@
         <p:spPr>
           <a:xfrm>
             <a:off x="640080" y="329184"/>
-            <a:ext cx="9875520" cy="182880"/>
+            <a:ext cx="5303520" cy="182880"/>
           </a:xfrm>
           <a:prstGeom prst="rect">
             <a:avLst/>
@@ -12079,6 +12373,48 @@
         </p:nvSpPr>
         <p:spPr>
           <a:xfrm>
+            <a:off x="5897880" y="310896"/>
+            <a:ext cx="4800600" cy="256032"/>
+          </a:xfrm>
+          <a:prstGeom prst="rect">
+            <a:avLst/>
+          </a:prstGeom>
+          <a:noFill/>
+        </p:spPr>
+        <p:txBody>
+          <a:bodyPr wrap="none" lIns="9144" rIns="9144" tIns="9144" bIns="9144" anchor="t">
+            <a:spAutoFit/>
+          </a:bodyPr>
+          <a:lstStyle/>
+          <a:p>
+            <a:pPr algn="r">
+              <a:spcAft>
+                <a:spcPts val="0"/>
+              </a:spcAft>
+              <a:defRPr sz="680" b="1">
+                <a:solidFill>
+                  <a:srgbClr val="4F6B00"/>
+                </a:solidFill>
+                <a:latin typeface="Inter"/>
+              </a:defRPr>
+            </a:pPr>
+            <a:r>
+              <a:rPr>
+                <a:latin typeface="Inter"/>
+              </a:rPr>
+              <a:t>Illustrative, Gradient Maintained — demo data, not the client's holdings or managers</a:t>
+            </a:r>
+          </a:p>
+        </p:txBody>
+      </p:sp>
+      <p:sp>
+        <p:nvSpPr>
+          <p:cNvPr id="5" name="TextBox 4"/>
+          <p:cNvSpPr txBox="1"/>
+          <p:nvPr/>
+        </p:nvSpPr>
+        <p:spPr>
+          <a:xfrm>
             <a:off x="640080" y="566928"/>
             <a:ext cx="10058400" cy="530352"/>
           </a:xfrm>
@@ -12115,7 +12451,7 @@
       </p:sp>
       <p:sp>
         <p:nvSpPr>
-          <p:cNvPr id="5" name="Rectangle 4"/>
+          <p:cNvPr id="6" name="Rectangle 5"/>
           <p:cNvSpPr/>
           <p:nvPr/>
         </p:nvSpPr>
@@ -12164,7 +12500,7 @@
       </p:sp>
       <p:sp>
         <p:nvSpPr>
-          <p:cNvPr id="6" name="Rectangle 5"/>
+          <p:cNvPr id="7" name="Rectangle 6"/>
           <p:cNvSpPr/>
           <p:nvPr/>
         </p:nvSpPr>
@@ -12213,7 +12549,7 @@
       </p:sp>
       <p:sp>
         <p:nvSpPr>
-          <p:cNvPr id="7" name="TextBox 6"/>
+          <p:cNvPr id="8" name="TextBox 7"/>
           <p:cNvSpPr txBox="1"/>
           <p:nvPr/>
         </p:nvSpPr>
@@ -12255,7 +12591,7 @@
       </p:sp>
       <p:sp>
         <p:nvSpPr>
-          <p:cNvPr id="8" name="TextBox 7"/>
+          <p:cNvPr id="9" name="TextBox 8"/>
           <p:cNvSpPr txBox="1"/>
           <p:nvPr/>
         </p:nvSpPr>
@@ -12297,7 +12633,7 @@
       </p:sp>
       <p:graphicFrame>
         <p:nvGraphicFramePr>
-          <p:cNvPr id="9" name="Table 8"/>
+          <p:cNvPr id="10" name="Table 9"/>
           <p:cNvGraphicFramePr>
             <a:graphicFrameLocks noGrp="1"/>
           </p:cNvGraphicFramePr>
@@ -12874,7 +13210,7 @@
       </p:graphicFrame>
       <p:sp>
         <p:nvSpPr>
-          <p:cNvPr id="10" name="Rectangle 9"/>
+          <p:cNvPr id="11" name="Rectangle 10"/>
           <p:cNvSpPr/>
           <p:nvPr/>
         </p:nvSpPr>
@@ -12923,7 +13259,7 @@
       </p:sp>
       <p:sp>
         <p:nvSpPr>
-          <p:cNvPr id="11" name="Rectangle 10"/>
+          <p:cNvPr id="12" name="Rectangle 11"/>
           <p:cNvSpPr/>
           <p:nvPr/>
         </p:nvSpPr>
@@ -12972,7 +13308,7 @@
       </p:sp>
       <p:sp>
         <p:nvSpPr>
-          <p:cNvPr id="12" name="TextBox 11"/>
+          <p:cNvPr id="13" name="TextBox 12"/>
           <p:cNvSpPr txBox="1"/>
           <p:nvPr/>
         </p:nvSpPr>
@@ -13014,7 +13350,7 @@
       </p:sp>
       <p:sp>
         <p:nvSpPr>
-          <p:cNvPr id="13" name="TextBox 12"/>
+          <p:cNvPr id="14" name="TextBox 13"/>
           <p:cNvSpPr txBox="1"/>
           <p:nvPr/>
         </p:nvSpPr>
@@ -13056,7 +13392,7 @@
       </p:sp>
       <p:sp>
         <p:nvSpPr>
-          <p:cNvPr id="14" name="TextBox 13"/>
+          <p:cNvPr id="15" name="TextBox 14"/>
           <p:cNvSpPr txBox="1"/>
           <p:nvPr/>
         </p:nvSpPr>
@@ -13098,7 +13434,7 @@
       </p:sp>
       <p:sp>
         <p:nvSpPr>
-          <p:cNvPr id="15" name="Rectangle 14"/>
+          <p:cNvPr id="16" name="Rectangle 15"/>
           <p:cNvSpPr/>
           <p:nvPr/>
         </p:nvSpPr>
@@ -13147,7 +13483,7 @@
       </p:sp>
       <p:sp>
         <p:nvSpPr>
-          <p:cNvPr id="16" name="TextBox 15"/>
+          <p:cNvPr id="17" name="TextBox 16"/>
           <p:cNvSpPr txBox="1"/>
           <p:nvPr/>
         </p:nvSpPr>
@@ -13189,7 +13525,7 @@
       </p:sp>
       <p:sp>
         <p:nvSpPr>
-          <p:cNvPr id="17" name="TextBox 16"/>
+          <p:cNvPr id="18" name="TextBox 17"/>
           <p:cNvSpPr txBox="1"/>
           <p:nvPr/>
         </p:nvSpPr>
@@ -13224,14 +13560,14 @@
               <a:rPr>
                 <a:latin typeface="Inter"/>
               </a:rPr>
-              <a:t>TEST DATA — fictional portfolio for rendering tests only · Data as of 2026-06-30</a:t>
+              <a:t>Confidential — Investment Committee · Data as of 2026-06-30</a:t>
             </a:r>
           </a:p>
         </p:txBody>
       </p:sp>
       <p:sp>
         <p:nvSpPr>
-          <p:cNvPr id="18" name="TextBox 17"/>
+          <p:cNvPr id="19" name="TextBox 18"/>
           <p:cNvSpPr txBox="1"/>
           <p:nvPr/>
         </p:nvSpPr>
@@ -13347,7 +13683,7 @@
         <p:spPr>
           <a:xfrm>
             <a:off x="640080" y="329184"/>
-            <a:ext cx="9875520" cy="182880"/>
+            <a:ext cx="5303520" cy="182880"/>
           </a:xfrm>
           <a:prstGeom prst="rect">
             <a:avLst/>
@@ -13388,6 +13724,48 @@
         </p:nvSpPr>
         <p:spPr>
           <a:xfrm>
+            <a:off x="5897880" y="310896"/>
+            <a:ext cx="4800600" cy="256032"/>
+          </a:xfrm>
+          <a:prstGeom prst="rect">
+            <a:avLst/>
+          </a:prstGeom>
+          <a:noFill/>
+        </p:spPr>
+        <p:txBody>
+          <a:bodyPr wrap="none" lIns="9144" rIns="9144" tIns="9144" bIns="9144" anchor="t">
+            <a:spAutoFit/>
+          </a:bodyPr>
+          <a:lstStyle/>
+          <a:p>
+            <a:pPr algn="r">
+              <a:spcAft>
+                <a:spcPts val="0"/>
+              </a:spcAft>
+              <a:defRPr sz="680" b="1">
+                <a:solidFill>
+                  <a:srgbClr val="4F6B00"/>
+                </a:solidFill>
+                <a:latin typeface="Inter"/>
+              </a:defRPr>
+            </a:pPr>
+            <a:r>
+              <a:rPr>
+                <a:latin typeface="Inter"/>
+              </a:rPr>
+              <a:t>Illustrative, Gradient Maintained — demo data, not the client's holdings or managers</a:t>
+            </a:r>
+          </a:p>
+        </p:txBody>
+      </p:sp>
+      <p:sp>
+        <p:nvSpPr>
+          <p:cNvPr id="5" name="TextBox 4"/>
+          <p:cNvSpPr txBox="1"/>
+          <p:nvPr/>
+        </p:nvSpPr>
+        <p:spPr>
+          <a:xfrm>
             <a:off x="640080" y="566928"/>
             <a:ext cx="10058400" cy="530352"/>
           </a:xfrm>
@@ -13424,7 +13802,7 @@
       </p:sp>
       <p:sp>
         <p:nvSpPr>
-          <p:cNvPr id="5" name="Rectangle 4"/>
+          <p:cNvPr id="6" name="Rectangle 5"/>
           <p:cNvSpPr/>
           <p:nvPr/>
         </p:nvSpPr>
@@ -13473,7 +13851,7 @@
       </p:sp>
       <p:sp>
         <p:nvSpPr>
-          <p:cNvPr id="6" name="Rectangle 5"/>
+          <p:cNvPr id="7" name="Rectangle 6"/>
           <p:cNvSpPr/>
           <p:nvPr/>
         </p:nvSpPr>
@@ -13522,7 +13900,7 @@
       </p:sp>
       <p:sp>
         <p:nvSpPr>
-          <p:cNvPr id="7" name="TextBox 6"/>
+          <p:cNvPr id="8" name="TextBox 7"/>
           <p:cNvSpPr txBox="1"/>
           <p:nvPr/>
         </p:nvSpPr>
@@ -13564,7 +13942,7 @@
       </p:sp>
       <p:sp>
         <p:nvSpPr>
-          <p:cNvPr id="8" name="TextBox 7"/>
+          <p:cNvPr id="9" name="TextBox 8"/>
           <p:cNvSpPr txBox="1"/>
           <p:nvPr/>
         </p:nvSpPr>
@@ -13606,7 +13984,7 @@
       </p:sp>
       <p:graphicFrame>
         <p:nvGraphicFramePr>
-          <p:cNvPr id="9" name="Chart 8"/>
+          <p:cNvPr id="10" name="Chart 9"/>
           <p:cNvGraphicFramePr>
             <a:graphicFrameLocks noGrp="1"/>
           </p:cNvGraphicFramePr>
@@ -13624,7 +14002,7 @@
       </p:graphicFrame>
       <p:sp>
         <p:nvSpPr>
-          <p:cNvPr id="10" name="Rectangle 9"/>
+          <p:cNvPr id="11" name="Rectangle 10"/>
           <p:cNvSpPr/>
           <p:nvPr/>
         </p:nvSpPr>
@@ -13673,7 +14051,7 @@
       </p:sp>
       <p:sp>
         <p:nvSpPr>
-          <p:cNvPr id="11" name="TextBox 10"/>
+          <p:cNvPr id="12" name="TextBox 11"/>
           <p:cNvSpPr txBox="1"/>
           <p:nvPr/>
         </p:nvSpPr>
@@ -13715,7 +14093,7 @@
       </p:sp>
       <p:sp>
         <p:nvSpPr>
-          <p:cNvPr id="12" name="TextBox 11"/>
+          <p:cNvPr id="13" name="TextBox 12"/>
           <p:cNvSpPr txBox="1"/>
           <p:nvPr/>
         </p:nvSpPr>
@@ -13750,14 +14128,14 @@
               <a:rPr>
                 <a:latin typeface="Inter"/>
               </a:rPr>
-              <a:t>TEST DATA — fictional portfolio for rendering tests only · Data as of 2026-06-30</a:t>
+              <a:t>Confidential — Investment Committee · Data as of 2026-06-30</a:t>
             </a:r>
           </a:p>
         </p:txBody>
       </p:sp>
       <p:sp>
         <p:nvSpPr>
-          <p:cNvPr id="13" name="TextBox 12"/>
+          <p:cNvPr id="14" name="TextBox 13"/>
           <p:cNvSpPr txBox="1"/>
           <p:nvPr/>
         </p:nvSpPr>
@@ -13873,7 +14251,7 @@
         <p:spPr>
           <a:xfrm>
             <a:off x="640080" y="329184"/>
-            <a:ext cx="9875520" cy="182880"/>
+            <a:ext cx="5303520" cy="182880"/>
           </a:xfrm>
           <a:prstGeom prst="rect">
             <a:avLst/>
@@ -13914,6 +14292,48 @@
         </p:nvSpPr>
         <p:spPr>
           <a:xfrm>
+            <a:off x="5897880" y="310896"/>
+            <a:ext cx="4800600" cy="256032"/>
+          </a:xfrm>
+          <a:prstGeom prst="rect">
+            <a:avLst/>
+          </a:prstGeom>
+          <a:noFill/>
+        </p:spPr>
+        <p:txBody>
+          <a:bodyPr wrap="none" lIns="9144" rIns="9144" tIns="9144" bIns="9144" anchor="t">
+            <a:spAutoFit/>
+          </a:bodyPr>
+          <a:lstStyle/>
+          <a:p>
+            <a:pPr algn="r">
+              <a:spcAft>
+                <a:spcPts val="0"/>
+              </a:spcAft>
+              <a:defRPr sz="680" b="1">
+                <a:solidFill>
+                  <a:srgbClr val="4F6B00"/>
+                </a:solidFill>
+                <a:latin typeface="Inter"/>
+              </a:defRPr>
+            </a:pPr>
+            <a:r>
+              <a:rPr>
+                <a:latin typeface="Inter"/>
+              </a:rPr>
+              <a:t>Illustrative, Gradient Maintained — demo data, not the client's holdings or managers</a:t>
+            </a:r>
+          </a:p>
+        </p:txBody>
+      </p:sp>
+      <p:sp>
+        <p:nvSpPr>
+          <p:cNvPr id="5" name="TextBox 4"/>
+          <p:cNvSpPr txBox="1"/>
+          <p:nvPr/>
+        </p:nvSpPr>
+        <p:spPr>
+          <a:xfrm>
             <a:off x="640080" y="566928"/>
             <a:ext cx="10058400" cy="530352"/>
           </a:xfrm>
@@ -13950,7 +14370,7 @@
       </p:sp>
       <p:sp>
         <p:nvSpPr>
-          <p:cNvPr id="5" name="Rectangle 4"/>
+          <p:cNvPr id="6" name="Rectangle 5"/>
           <p:cNvSpPr/>
           <p:nvPr/>
         </p:nvSpPr>
@@ -13999,7 +14419,7 @@
       </p:sp>
       <p:sp>
         <p:nvSpPr>
-          <p:cNvPr id="6" name="Rectangle 5"/>
+          <p:cNvPr id="7" name="Rectangle 6"/>
           <p:cNvSpPr/>
           <p:nvPr/>
         </p:nvSpPr>
@@ -14048,7 +14468,7 @@
       </p:sp>
       <p:sp>
         <p:nvSpPr>
-          <p:cNvPr id="7" name="TextBox 6"/>
+          <p:cNvPr id="8" name="TextBox 7"/>
           <p:cNvSpPr txBox="1"/>
           <p:nvPr/>
         </p:nvSpPr>
@@ -14090,7 +14510,7 @@
       </p:sp>
       <p:graphicFrame>
         <p:nvGraphicFramePr>
-          <p:cNvPr id="8" name="Table 7"/>
+          <p:cNvPr id="9" name="Table 8"/>
           <p:cNvGraphicFramePr>
             <a:graphicFrameLocks noGrp="1"/>
           </p:cNvGraphicFramePr>
@@ -14155,7 +14575,7 @@
                         <a:rPr>
                           <a:latin typeface="Inter"/>
                         </a:rPr>
-                        <a:t>2026 Strategic CMA (TEST) [S7]</a:t>
+                        <a:t>2026 Strategic CMA [S7]</a:t>
                       </a:r>
                     </a:p>
                   </a:txBody>
@@ -14396,7 +14816,7 @@
       </p:graphicFrame>
       <p:sp>
         <p:nvSpPr>
-          <p:cNvPr id="9" name="Rectangle 8"/>
+          <p:cNvPr id="10" name="Rectangle 9"/>
           <p:cNvSpPr/>
           <p:nvPr/>
         </p:nvSpPr>
@@ -14445,7 +14865,7 @@
       </p:sp>
       <p:sp>
         <p:nvSpPr>
-          <p:cNvPr id="10" name="TextBox 9"/>
+          <p:cNvPr id="11" name="TextBox 10"/>
           <p:cNvSpPr txBox="1"/>
           <p:nvPr/>
         </p:nvSpPr>
@@ -14487,7 +14907,7 @@
       </p:sp>
       <p:sp>
         <p:nvSpPr>
-          <p:cNvPr id="11" name="TextBox 10"/>
+          <p:cNvPr id="12" name="TextBox 11"/>
           <p:cNvSpPr txBox="1"/>
           <p:nvPr/>
         </p:nvSpPr>
@@ -14522,14 +14942,14 @@
               <a:rPr>
                 <a:latin typeface="Inter"/>
               </a:rPr>
-              <a:t>TEST DATA — fictional portfolio for rendering tests only · Data as of 2026-06-30</a:t>
+              <a:t>Confidential — Investment Committee · Data as of 2026-06-30</a:t>
             </a:r>
           </a:p>
         </p:txBody>
       </p:sp>
       <p:sp>
         <p:nvSpPr>
-          <p:cNvPr id="12" name="TextBox 11"/>
+          <p:cNvPr id="13" name="TextBox 12"/>
           <p:cNvSpPr txBox="1"/>
           <p:nvPr/>
         </p:nvSpPr>
@@ -14644,6 +15064,48 @@
         </p:nvSpPr>
         <p:spPr>
           <a:xfrm>
+            <a:off x="5897880" y="310896"/>
+            <a:ext cx="4800600" cy="256032"/>
+          </a:xfrm>
+          <a:prstGeom prst="rect">
+            <a:avLst/>
+          </a:prstGeom>
+          <a:noFill/>
+        </p:spPr>
+        <p:txBody>
+          <a:bodyPr wrap="none" lIns="9144" rIns="9144" tIns="9144" bIns="9144" anchor="t">
+            <a:spAutoFit/>
+          </a:bodyPr>
+          <a:lstStyle/>
+          <a:p>
+            <a:pPr algn="r">
+              <a:spcAft>
+                <a:spcPts val="0"/>
+              </a:spcAft>
+              <a:defRPr sz="680" b="1">
+                <a:solidFill>
+                  <a:srgbClr val="4F6B00"/>
+                </a:solidFill>
+                <a:latin typeface="Inter"/>
+              </a:defRPr>
+            </a:pPr>
+            <a:r>
+              <a:rPr>
+                <a:latin typeface="Inter"/>
+              </a:rPr>
+              <a:t>Illustrative, Gradient Maintained — demo data, not the client's holdings or managers</a:t>
+            </a:r>
+          </a:p>
+        </p:txBody>
+      </p:sp>
+      <p:sp>
+        <p:nvSpPr>
+          <p:cNvPr id="4" name="TextBox 3"/>
+          <p:cNvSpPr txBox="1"/>
+          <p:nvPr/>
+        </p:nvSpPr>
+        <p:spPr>
+          <a:xfrm>
             <a:off x="640080" y="566928"/>
             <a:ext cx="10058400" cy="530352"/>
           </a:xfrm>
@@ -14680,7 +15142,7 @@
       </p:sp>
       <p:sp>
         <p:nvSpPr>
-          <p:cNvPr id="4" name="Rectangle 3"/>
+          <p:cNvPr id="5" name="Rectangle 4"/>
           <p:cNvSpPr/>
           <p:nvPr/>
         </p:nvSpPr>
@@ -14729,7 +15191,7 @@
       </p:sp>
       <p:sp>
         <p:nvSpPr>
-          <p:cNvPr id="5" name="Rectangle 4"/>
+          <p:cNvPr id="6" name="Rectangle 5"/>
           <p:cNvSpPr/>
           <p:nvPr/>
         </p:nvSpPr>
@@ -14778,7 +15240,7 @@
       </p:sp>
       <p:sp>
         <p:nvSpPr>
-          <p:cNvPr id="6" name="TextBox 5"/>
+          <p:cNvPr id="7" name="TextBox 6"/>
           <p:cNvSpPr txBox="1"/>
           <p:nvPr/>
         </p:nvSpPr>
@@ -14820,7 +15282,7 @@
       </p:sp>
       <p:sp>
         <p:nvSpPr>
-          <p:cNvPr id="7" name="Rectangle 6"/>
+          <p:cNvPr id="8" name="Rectangle 7"/>
           <p:cNvSpPr/>
           <p:nvPr/>
         </p:nvSpPr>
@@ -14869,7 +15331,7 @@
       </p:sp>
       <p:sp>
         <p:nvSpPr>
-          <p:cNvPr id="8" name="Rectangle 7"/>
+          <p:cNvPr id="9" name="Rectangle 8"/>
           <p:cNvSpPr/>
           <p:nvPr/>
         </p:nvSpPr>
@@ -14918,7 +15380,7 @@
       </p:sp>
       <p:sp>
         <p:nvSpPr>
-          <p:cNvPr id="9" name="TextBox 8"/>
+          <p:cNvPr id="10" name="TextBox 9"/>
           <p:cNvSpPr txBox="1"/>
           <p:nvPr/>
         </p:nvSpPr>
@@ -14960,7 +15422,7 @@
       </p:sp>
       <p:sp>
         <p:nvSpPr>
-          <p:cNvPr id="10" name="TextBox 9"/>
+          <p:cNvPr id="11" name="TextBox 10"/>
           <p:cNvSpPr txBox="1"/>
           <p:nvPr/>
         </p:nvSpPr>
@@ -15002,7 +15464,7 @@
       </p:sp>
       <p:sp>
         <p:nvSpPr>
-          <p:cNvPr id="11" name="Rectangle 10"/>
+          <p:cNvPr id="12" name="Rectangle 11"/>
           <p:cNvSpPr/>
           <p:nvPr/>
         </p:nvSpPr>
@@ -15051,7 +15513,7 @@
       </p:sp>
       <p:sp>
         <p:nvSpPr>
-          <p:cNvPr id="12" name="Rectangle 11"/>
+          <p:cNvPr id="13" name="Rectangle 12"/>
           <p:cNvSpPr/>
           <p:nvPr/>
         </p:nvSpPr>
@@ -15100,7 +15562,7 @@
       </p:sp>
       <p:sp>
         <p:nvSpPr>
-          <p:cNvPr id="13" name="TextBox 12"/>
+          <p:cNvPr id="14" name="TextBox 13"/>
           <p:cNvSpPr txBox="1"/>
           <p:nvPr/>
         </p:nvSpPr>
@@ -15142,7 +15604,7 @@
       </p:sp>
       <p:sp>
         <p:nvSpPr>
-          <p:cNvPr id="14" name="TextBox 13"/>
+          <p:cNvPr id="15" name="TextBox 14"/>
           <p:cNvSpPr txBox="1"/>
           <p:nvPr/>
         </p:nvSpPr>
@@ -15184,7 +15646,7 @@
       </p:sp>
       <p:sp>
         <p:nvSpPr>
-          <p:cNvPr id="15" name="TextBox 14"/>
+          <p:cNvPr id="16" name="TextBox 15"/>
           <p:cNvSpPr txBox="1"/>
           <p:nvPr/>
         </p:nvSpPr>
@@ -15226,7 +15688,7 @@
       </p:sp>
       <p:sp>
         <p:nvSpPr>
-          <p:cNvPr id="16" name="Rectangle 15"/>
+          <p:cNvPr id="17" name="Rectangle 16"/>
           <p:cNvSpPr/>
           <p:nvPr/>
         </p:nvSpPr>
@@ -15275,7 +15737,7 @@
       </p:sp>
       <p:sp>
         <p:nvSpPr>
-          <p:cNvPr id="17" name="Rectangle 16"/>
+          <p:cNvPr id="18" name="Rectangle 17"/>
           <p:cNvSpPr/>
           <p:nvPr/>
         </p:nvSpPr>
@@ -15324,7 +15786,7 @@
       </p:sp>
       <p:sp>
         <p:nvSpPr>
-          <p:cNvPr id="18" name="TextBox 17"/>
+          <p:cNvPr id="19" name="TextBox 18"/>
           <p:cNvSpPr txBox="1"/>
           <p:nvPr/>
         </p:nvSpPr>
@@ -15366,7 +15828,7 @@
       </p:sp>
       <p:sp>
         <p:nvSpPr>
-          <p:cNvPr id="19" name="TextBox 18"/>
+          <p:cNvPr id="20" name="TextBox 19"/>
           <p:cNvSpPr txBox="1"/>
           <p:nvPr/>
         </p:nvSpPr>
@@ -15408,7 +15870,7 @@
       </p:sp>
       <p:sp>
         <p:nvSpPr>
-          <p:cNvPr id="20" name="TextBox 19"/>
+          <p:cNvPr id="21" name="TextBox 20"/>
           <p:cNvSpPr txBox="1"/>
           <p:nvPr/>
         </p:nvSpPr>
@@ -15450,7 +15912,7 @@
       </p:sp>
       <p:sp>
         <p:nvSpPr>
-          <p:cNvPr id="21" name="Rectangle 20"/>
+          <p:cNvPr id="22" name="Rectangle 21"/>
           <p:cNvSpPr/>
           <p:nvPr/>
         </p:nvSpPr>
@@ -15499,7 +15961,7 @@
       </p:sp>
       <p:sp>
         <p:nvSpPr>
-          <p:cNvPr id="22" name="Rectangle 21"/>
+          <p:cNvPr id="23" name="Rectangle 22"/>
           <p:cNvSpPr/>
           <p:nvPr/>
         </p:nvSpPr>
@@ -15548,7 +16010,7 @@
       </p:sp>
       <p:sp>
         <p:nvSpPr>
-          <p:cNvPr id="23" name="TextBox 22"/>
+          <p:cNvPr id="24" name="TextBox 23"/>
           <p:cNvSpPr txBox="1"/>
           <p:nvPr/>
         </p:nvSpPr>
@@ -15590,7 +16052,7 @@
       </p:sp>
       <p:sp>
         <p:nvSpPr>
-          <p:cNvPr id="24" name="TextBox 23"/>
+          <p:cNvPr id="25" name="TextBox 24"/>
           <p:cNvSpPr txBox="1"/>
           <p:nvPr/>
         </p:nvSpPr>
@@ -15632,7 +16094,7 @@
       </p:sp>
       <p:sp>
         <p:nvSpPr>
-          <p:cNvPr id="25" name="TextBox 24"/>
+          <p:cNvPr id="26" name="TextBox 25"/>
           <p:cNvSpPr txBox="1"/>
           <p:nvPr/>
         </p:nvSpPr>
@@ -15674,7 +16136,7 @@
       </p:sp>
       <p:sp>
         <p:nvSpPr>
-          <p:cNvPr id="26" name="Rectangle 25"/>
+          <p:cNvPr id="27" name="Rectangle 26"/>
           <p:cNvSpPr/>
           <p:nvPr/>
         </p:nvSpPr>
@@ -15723,7 +16185,7 @@
       </p:sp>
       <p:sp>
         <p:nvSpPr>
-          <p:cNvPr id="27" name="Rectangle 26"/>
+          <p:cNvPr id="28" name="Rectangle 27"/>
           <p:cNvSpPr/>
           <p:nvPr/>
         </p:nvSpPr>
@@ -15772,7 +16234,7 @@
       </p:sp>
       <p:sp>
         <p:nvSpPr>
-          <p:cNvPr id="28" name="TextBox 27"/>
+          <p:cNvPr id="29" name="TextBox 28"/>
           <p:cNvSpPr txBox="1"/>
           <p:nvPr/>
         </p:nvSpPr>
@@ -15814,7 +16276,7 @@
       </p:sp>
       <p:sp>
         <p:nvSpPr>
-          <p:cNvPr id="29" name="TextBox 28"/>
+          <p:cNvPr id="30" name="TextBox 29"/>
           <p:cNvSpPr txBox="1"/>
           <p:nvPr/>
         </p:nvSpPr>
@@ -15856,7 +16318,7 @@
       </p:sp>
       <p:sp>
         <p:nvSpPr>
-          <p:cNvPr id="30" name="TextBox 29"/>
+          <p:cNvPr id="31" name="TextBox 30"/>
           <p:cNvSpPr txBox="1"/>
           <p:nvPr/>
         </p:nvSpPr>
@@ -15898,7 +16360,7 @@
       </p:sp>
       <p:sp>
         <p:nvSpPr>
-          <p:cNvPr id="31" name="Rectangle 30"/>
+          <p:cNvPr id="32" name="Rectangle 31"/>
           <p:cNvSpPr/>
           <p:nvPr/>
         </p:nvSpPr>
@@ -15947,7 +16409,7 @@
       </p:sp>
       <p:sp>
         <p:nvSpPr>
-          <p:cNvPr id="32" name="TextBox 31"/>
+          <p:cNvPr id="33" name="TextBox 32"/>
           <p:cNvSpPr txBox="1"/>
           <p:nvPr/>
         </p:nvSpPr>
@@ -15989,7 +16451,7 @@
       </p:sp>
       <p:sp>
         <p:nvSpPr>
-          <p:cNvPr id="33" name="TextBox 32"/>
+          <p:cNvPr id="34" name="TextBox 33"/>
           <p:cNvSpPr txBox="1"/>
           <p:nvPr/>
         </p:nvSpPr>
@@ -16024,14 +16486,14 @@
               <a:rPr>
                 <a:latin typeface="Inter"/>
               </a:rPr>
-              <a:t>TEST DATA — fictional portfolio for rendering tests only · Data as of 2026-06-30</a:t>
+              <a:t>Confidential — Investment Committee · Data as of 2026-06-30</a:t>
             </a:r>
           </a:p>
         </p:txBody>
       </p:sp>
       <p:sp>
         <p:nvSpPr>
-          <p:cNvPr id="34" name="TextBox 33"/>
+          <p:cNvPr id="35" name="TextBox 34"/>
           <p:cNvSpPr txBox="1"/>
           <p:nvPr/>
         </p:nvSpPr>
@@ -16147,7 +16609,7 @@
         <p:spPr>
           <a:xfrm>
             <a:off x="640080" y="329184"/>
-            <a:ext cx="9875520" cy="182880"/>
+            <a:ext cx="5303520" cy="182880"/>
           </a:xfrm>
           <a:prstGeom prst="rect">
             <a:avLst/>
@@ -16188,6 +16650,48 @@
         </p:nvSpPr>
         <p:spPr>
           <a:xfrm>
+            <a:off x="5897880" y="310896"/>
+            <a:ext cx="4800600" cy="256032"/>
+          </a:xfrm>
+          <a:prstGeom prst="rect">
+            <a:avLst/>
+          </a:prstGeom>
+          <a:noFill/>
+        </p:spPr>
+        <p:txBody>
+          <a:bodyPr wrap="none" lIns="9144" rIns="9144" tIns="9144" bIns="9144" anchor="t">
+            <a:spAutoFit/>
+          </a:bodyPr>
+          <a:lstStyle/>
+          <a:p>
+            <a:pPr algn="r">
+              <a:spcAft>
+                <a:spcPts val="0"/>
+              </a:spcAft>
+              <a:defRPr sz="680" b="1">
+                <a:solidFill>
+                  <a:srgbClr val="4F6B00"/>
+                </a:solidFill>
+                <a:latin typeface="Inter"/>
+              </a:defRPr>
+            </a:pPr>
+            <a:r>
+              <a:rPr>
+                <a:latin typeface="Inter"/>
+              </a:rPr>
+              <a:t>Illustrative, Gradient Maintained — demo data, not the client's holdings or managers</a:t>
+            </a:r>
+          </a:p>
+        </p:txBody>
+      </p:sp>
+      <p:sp>
+        <p:nvSpPr>
+          <p:cNvPr id="5" name="TextBox 4"/>
+          <p:cNvSpPr txBox="1"/>
+          <p:nvPr/>
+        </p:nvSpPr>
+        <p:spPr>
+          <a:xfrm>
             <a:off x="640080" y="566928"/>
             <a:ext cx="10058400" cy="530352"/>
           </a:xfrm>
@@ -16224,7 +16728,7 @@
       </p:sp>
       <p:sp>
         <p:nvSpPr>
-          <p:cNvPr id="5" name="Rectangle 4"/>
+          <p:cNvPr id="6" name="Rectangle 5"/>
           <p:cNvSpPr/>
           <p:nvPr/>
         </p:nvSpPr>
@@ -16273,7 +16777,7 @@
       </p:sp>
       <p:sp>
         <p:nvSpPr>
-          <p:cNvPr id="6" name="Rectangle 5"/>
+          <p:cNvPr id="7" name="Rectangle 6"/>
           <p:cNvSpPr/>
           <p:nvPr/>
         </p:nvSpPr>
@@ -16322,7 +16826,7 @@
       </p:sp>
       <p:sp>
         <p:nvSpPr>
-          <p:cNvPr id="7" name="TextBox 6"/>
+          <p:cNvPr id="8" name="TextBox 7"/>
           <p:cNvSpPr txBox="1"/>
           <p:nvPr/>
         </p:nvSpPr>
@@ -16364,7 +16868,7 @@
       </p:sp>
       <p:sp>
         <p:nvSpPr>
-          <p:cNvPr id="8" name="TextBox 7"/>
+          <p:cNvPr id="9" name="TextBox 8"/>
           <p:cNvSpPr txBox="1"/>
           <p:nvPr/>
         </p:nvSpPr>
@@ -16399,14 +16903,14 @@
               <a:rPr>
                 <a:latin typeface="Inter"/>
               </a:rPr>
-              <a:t>FIXED-INCOME FORWARD ASSUMPTIONS (TEST)</a:t>
+              <a:t>FIXED-INCOME FORWARD ASSUMPTIONS</a:t>
             </a:r>
           </a:p>
         </p:txBody>
       </p:sp>
       <p:graphicFrame>
         <p:nvGraphicFramePr>
-          <p:cNvPr id="9" name="Table 8"/>
+          <p:cNvPr id="10" name="Table 9"/>
           <p:cNvGraphicFramePr>
             <a:graphicFrameLocks noGrp="1"/>
           </p:cNvGraphicFramePr>
@@ -16765,7 +17269,7 @@
       </p:graphicFrame>
       <p:sp>
         <p:nvSpPr>
-          <p:cNvPr id="10" name="Rectangle 9"/>
+          <p:cNvPr id="11" name="Rectangle 10"/>
           <p:cNvSpPr/>
           <p:nvPr/>
         </p:nvSpPr>
@@ -16814,7 +17318,7 @@
       </p:sp>
       <p:sp>
         <p:nvSpPr>
-          <p:cNvPr id="11" name="TextBox 10"/>
+          <p:cNvPr id="12" name="TextBox 11"/>
           <p:cNvSpPr txBox="1"/>
           <p:nvPr/>
         </p:nvSpPr>
@@ -16849,14 +17353,14 @@
               <a:rPr>
                 <a:latin typeface="Inter"/>
               </a:rPr>
-              <a:t>Sources: none cited</a:t>
+              <a:t>Sources: S1</a:t>
             </a:r>
           </a:p>
         </p:txBody>
       </p:sp>
       <p:sp>
         <p:nvSpPr>
-          <p:cNvPr id="12" name="TextBox 11"/>
+          <p:cNvPr id="13" name="TextBox 12"/>
           <p:cNvSpPr txBox="1"/>
           <p:nvPr/>
         </p:nvSpPr>
@@ -16891,14 +17395,14 @@
               <a:rPr>
                 <a:latin typeface="Inter"/>
               </a:rPr>
-              <a:t>TEST DATA — fictional portfolio for rendering tests only · Data as of 2026-06-30</a:t>
+              <a:t>Confidential — Investment Committee · Data as of 2026-06-30</a:t>
             </a:r>
           </a:p>
         </p:txBody>
       </p:sp>
       <p:sp>
         <p:nvSpPr>
-          <p:cNvPr id="13" name="TextBox 12"/>
+          <p:cNvPr id="14" name="TextBox 13"/>
           <p:cNvSpPr txBox="1"/>
           <p:nvPr/>
         </p:nvSpPr>
@@ -17014,7 +17518,7 @@
         <p:spPr>
           <a:xfrm>
             <a:off x="640080" y="329184"/>
-            <a:ext cx="9875520" cy="182880"/>
+            <a:ext cx="5303520" cy="182880"/>
           </a:xfrm>
           <a:prstGeom prst="rect">
             <a:avLst/>
@@ -17055,6 +17559,48 @@
         </p:nvSpPr>
         <p:spPr>
           <a:xfrm>
+            <a:off x="5897880" y="310896"/>
+            <a:ext cx="4800600" cy="256032"/>
+          </a:xfrm>
+          <a:prstGeom prst="rect">
+            <a:avLst/>
+          </a:prstGeom>
+          <a:noFill/>
+        </p:spPr>
+        <p:txBody>
+          <a:bodyPr wrap="none" lIns="9144" rIns="9144" tIns="9144" bIns="9144" anchor="t">
+            <a:spAutoFit/>
+          </a:bodyPr>
+          <a:lstStyle/>
+          <a:p>
+            <a:pPr algn="r">
+              <a:spcAft>
+                <a:spcPts val="0"/>
+              </a:spcAft>
+              <a:defRPr sz="680" b="1">
+                <a:solidFill>
+                  <a:srgbClr val="4F6B00"/>
+                </a:solidFill>
+                <a:latin typeface="Inter"/>
+              </a:defRPr>
+            </a:pPr>
+            <a:r>
+              <a:rPr>
+                <a:latin typeface="Inter"/>
+              </a:rPr>
+              <a:t>Illustrative, Gradient Maintained — demo data, not the client's holdings or managers</a:t>
+            </a:r>
+          </a:p>
+        </p:txBody>
+      </p:sp>
+      <p:sp>
+        <p:nvSpPr>
+          <p:cNvPr id="5" name="TextBox 4"/>
+          <p:cNvSpPr txBox="1"/>
+          <p:nvPr/>
+        </p:nvSpPr>
+        <p:spPr>
+          <a:xfrm>
             <a:off x="640080" y="566928"/>
             <a:ext cx="10058400" cy="530352"/>
           </a:xfrm>
@@ -17091,7 +17637,7 @@
       </p:sp>
       <p:sp>
         <p:nvSpPr>
-          <p:cNvPr id="5" name="Rectangle 4"/>
+          <p:cNvPr id="6" name="Rectangle 5"/>
           <p:cNvSpPr/>
           <p:nvPr/>
         </p:nvSpPr>
@@ -17140,7 +17686,7 @@
       </p:sp>
       <p:sp>
         <p:nvSpPr>
-          <p:cNvPr id="6" name="Rectangle 5"/>
+          <p:cNvPr id="7" name="Rectangle 6"/>
           <p:cNvSpPr/>
           <p:nvPr/>
         </p:nvSpPr>
@@ -17189,7 +17735,7 @@
       </p:sp>
       <p:sp>
         <p:nvSpPr>
-          <p:cNvPr id="7" name="TextBox 6"/>
+          <p:cNvPr id="8" name="TextBox 7"/>
           <p:cNvSpPr txBox="1"/>
           <p:nvPr/>
         </p:nvSpPr>
@@ -17231,7 +17777,7 @@
       </p:sp>
       <p:sp>
         <p:nvSpPr>
-          <p:cNvPr id="8" name="Rectangle 7"/>
+          <p:cNvPr id="9" name="Rectangle 8"/>
           <p:cNvSpPr/>
           <p:nvPr/>
         </p:nvSpPr>
@@ -17280,7 +17826,7 @@
       </p:sp>
       <p:sp>
         <p:nvSpPr>
-          <p:cNvPr id="9" name="Rectangle 8"/>
+          <p:cNvPr id="10" name="Rectangle 9"/>
           <p:cNvSpPr/>
           <p:nvPr/>
         </p:nvSpPr>
@@ -17329,7 +17875,7 @@
       </p:sp>
       <p:sp>
         <p:nvSpPr>
-          <p:cNvPr id="10" name="TextBox 9"/>
+          <p:cNvPr id="11" name="TextBox 10"/>
           <p:cNvSpPr txBox="1"/>
           <p:nvPr/>
         </p:nvSpPr>
@@ -17371,7 +17917,7 @@
       </p:sp>
       <p:sp>
         <p:nvSpPr>
-          <p:cNvPr id="11" name="TextBox 10"/>
+          <p:cNvPr id="12" name="TextBox 11"/>
           <p:cNvSpPr txBox="1"/>
           <p:nvPr/>
         </p:nvSpPr>
@@ -17413,7 +17959,7 @@
       </p:sp>
       <p:sp>
         <p:nvSpPr>
-          <p:cNvPr id="12" name="TextBox 11"/>
+          <p:cNvPr id="13" name="TextBox 12"/>
           <p:cNvSpPr txBox="1"/>
           <p:nvPr/>
         </p:nvSpPr>
@@ -17455,7 +18001,7 @@
       </p:sp>
       <p:sp>
         <p:nvSpPr>
-          <p:cNvPr id="13" name="Rectangle 12"/>
+          <p:cNvPr id="14" name="Rectangle 13"/>
           <p:cNvSpPr/>
           <p:nvPr/>
         </p:nvSpPr>
@@ -17504,7 +18050,7 @@
       </p:sp>
       <p:sp>
         <p:nvSpPr>
-          <p:cNvPr id="14" name="TextBox 13"/>
+          <p:cNvPr id="15" name="TextBox 14"/>
           <p:cNvSpPr txBox="1"/>
           <p:nvPr/>
         </p:nvSpPr>
@@ -17546,7 +18092,7 @@
       </p:sp>
       <p:sp>
         <p:nvSpPr>
-          <p:cNvPr id="15" name="TextBox 14"/>
+          <p:cNvPr id="16" name="TextBox 15"/>
           <p:cNvSpPr txBox="1"/>
           <p:nvPr/>
         </p:nvSpPr>
@@ -17581,14 +18127,14 @@
               <a:rPr>
                 <a:latin typeface="Inter"/>
               </a:rPr>
-              <a:t>TEST DATA — fictional portfolio for rendering tests only · Data as of 2026-06-30</a:t>
+              <a:t>Confidential — Investment Committee · Data as of 2026-06-30</a:t>
             </a:r>
           </a:p>
         </p:txBody>
       </p:sp>
       <p:sp>
         <p:nvSpPr>
-          <p:cNvPr id="16" name="TextBox 15"/>
+          <p:cNvPr id="17" name="TextBox 16"/>
           <p:cNvSpPr txBox="1"/>
           <p:nvPr/>
         </p:nvSpPr>
@@ -17703,6 +18249,48 @@
         </p:nvSpPr>
         <p:spPr>
           <a:xfrm>
+            <a:off x="5897880" y="310896"/>
+            <a:ext cx="4800600" cy="256032"/>
+          </a:xfrm>
+          <a:prstGeom prst="rect">
+            <a:avLst/>
+          </a:prstGeom>
+          <a:noFill/>
+        </p:spPr>
+        <p:txBody>
+          <a:bodyPr wrap="none" lIns="9144" rIns="9144" tIns="9144" bIns="9144" anchor="t">
+            <a:spAutoFit/>
+          </a:bodyPr>
+          <a:lstStyle/>
+          <a:p>
+            <a:pPr algn="r">
+              <a:spcAft>
+                <a:spcPts val="0"/>
+              </a:spcAft>
+              <a:defRPr sz="680" b="1">
+                <a:solidFill>
+                  <a:srgbClr val="4F6B00"/>
+                </a:solidFill>
+                <a:latin typeface="Inter"/>
+              </a:defRPr>
+            </a:pPr>
+            <a:r>
+              <a:rPr>
+                <a:latin typeface="Inter"/>
+              </a:rPr>
+              <a:t>Illustrative, Gradient Maintained — demo data, not the client's holdings or managers</a:t>
+            </a:r>
+          </a:p>
+        </p:txBody>
+      </p:sp>
+      <p:sp>
+        <p:nvSpPr>
+          <p:cNvPr id="4" name="TextBox 3"/>
+          <p:cNvSpPr txBox="1"/>
+          <p:nvPr/>
+        </p:nvSpPr>
+        <p:spPr>
+          <a:xfrm>
             <a:off x="640080" y="566928"/>
             <a:ext cx="10058400" cy="530352"/>
           </a:xfrm>
@@ -17739,7 +18327,7 @@
       </p:sp>
       <p:sp>
         <p:nvSpPr>
-          <p:cNvPr id="4" name="Rectangle 3"/>
+          <p:cNvPr id="5" name="Rectangle 4"/>
           <p:cNvSpPr/>
           <p:nvPr/>
         </p:nvSpPr>
@@ -17788,7 +18376,7 @@
       </p:sp>
       <p:sp>
         <p:nvSpPr>
-          <p:cNvPr id="5" name="Rectangle 4"/>
+          <p:cNvPr id="6" name="Rectangle 5"/>
           <p:cNvSpPr/>
           <p:nvPr/>
         </p:nvSpPr>
@@ -17837,7 +18425,7 @@
       </p:sp>
       <p:sp>
         <p:nvSpPr>
-          <p:cNvPr id="6" name="TextBox 5"/>
+          <p:cNvPr id="7" name="TextBox 6"/>
           <p:cNvSpPr txBox="1"/>
           <p:nvPr/>
         </p:nvSpPr>
@@ -17879,7 +18467,7 @@
       </p:sp>
       <p:sp>
         <p:nvSpPr>
-          <p:cNvPr id="7" name="TextBox 6"/>
+          <p:cNvPr id="8" name="TextBox 7"/>
           <p:cNvSpPr txBox="1"/>
           <p:nvPr/>
         </p:nvSpPr>
@@ -17914,14 +18502,14 @@
               <a:rPr>
                 <a:latin typeface="Inter"/>
               </a:rPr>
-              <a:t>LIQUIDITY COMPOSITION (TEST)</a:t>
+              <a:t>LIQUIDITY COMPOSITION</a:t>
             </a:r>
           </a:p>
         </p:txBody>
       </p:sp>
       <p:graphicFrame>
         <p:nvGraphicFramePr>
-          <p:cNvPr id="8" name="Chart 7"/>
+          <p:cNvPr id="9" name="Chart 8"/>
           <p:cNvGraphicFramePr>
             <a:graphicFrameLocks noGrp="1"/>
           </p:cNvGraphicFramePr>
@@ -17939,7 +18527,7 @@
       </p:graphicFrame>
       <p:sp>
         <p:nvSpPr>
-          <p:cNvPr id="9" name="Rectangle 8"/>
+          <p:cNvPr id="10" name="Rectangle 9"/>
           <p:cNvSpPr/>
           <p:nvPr/>
         </p:nvSpPr>
@@ -17988,7 +18576,7 @@
       </p:sp>
       <p:sp>
         <p:nvSpPr>
-          <p:cNvPr id="10" name="TextBox 9"/>
+          <p:cNvPr id="11" name="TextBox 10"/>
           <p:cNvSpPr txBox="1"/>
           <p:nvPr/>
         </p:nvSpPr>
@@ -18023,14 +18611,14 @@
               <a:rPr>
                 <a:latin typeface="Inter"/>
               </a:rPr>
-              <a:t>Sources: none cited</a:t>
+              <a:t>Sources: S1</a:t>
             </a:r>
           </a:p>
         </p:txBody>
       </p:sp>
       <p:sp>
         <p:nvSpPr>
-          <p:cNvPr id="11" name="TextBox 10"/>
+          <p:cNvPr id="12" name="TextBox 11"/>
           <p:cNvSpPr txBox="1"/>
           <p:nvPr/>
         </p:nvSpPr>
@@ -18065,14 +18653,14 @@
               <a:rPr>
                 <a:latin typeface="Inter"/>
               </a:rPr>
-              <a:t>TEST DATA — fictional portfolio for rendering tests only · Data as of 2026-06-30</a:t>
+              <a:t>Confidential — Investment Committee · Data as of 2026-06-30</a:t>
             </a:r>
           </a:p>
         </p:txBody>
       </p:sp>
       <p:sp>
         <p:nvSpPr>
-          <p:cNvPr id="12" name="TextBox 11"/>
+          <p:cNvPr id="13" name="TextBox 12"/>
           <p:cNvSpPr txBox="1"/>
           <p:nvPr/>
         </p:nvSpPr>
@@ -18187,6 +18775,48 @@
         </p:nvSpPr>
         <p:spPr>
           <a:xfrm>
+            <a:off x="5897880" y="310896"/>
+            <a:ext cx="4800600" cy="256032"/>
+          </a:xfrm>
+          <a:prstGeom prst="rect">
+            <a:avLst/>
+          </a:prstGeom>
+          <a:noFill/>
+        </p:spPr>
+        <p:txBody>
+          <a:bodyPr wrap="none" lIns="9144" rIns="9144" tIns="9144" bIns="9144" anchor="t">
+            <a:spAutoFit/>
+          </a:bodyPr>
+          <a:lstStyle/>
+          <a:p>
+            <a:pPr algn="r">
+              <a:spcAft>
+                <a:spcPts val="0"/>
+              </a:spcAft>
+              <a:defRPr sz="680" b="1">
+                <a:solidFill>
+                  <a:srgbClr val="4F6B00"/>
+                </a:solidFill>
+                <a:latin typeface="Inter"/>
+              </a:defRPr>
+            </a:pPr>
+            <a:r>
+              <a:rPr>
+                <a:latin typeface="Inter"/>
+              </a:rPr>
+              <a:t>Illustrative, Gradient Maintained — demo data, not the client's holdings or managers</a:t>
+            </a:r>
+          </a:p>
+        </p:txBody>
+      </p:sp>
+      <p:sp>
+        <p:nvSpPr>
+          <p:cNvPr id="4" name="TextBox 3"/>
+          <p:cNvSpPr txBox="1"/>
+          <p:nvPr/>
+        </p:nvSpPr>
+        <p:spPr>
+          <a:xfrm>
             <a:off x="640080" y="566928"/>
             <a:ext cx="10058400" cy="530352"/>
           </a:xfrm>
@@ -18223,7 +18853,7 @@
       </p:sp>
       <p:sp>
         <p:nvSpPr>
-          <p:cNvPr id="4" name="Rectangle 3"/>
+          <p:cNvPr id="5" name="Rectangle 4"/>
           <p:cNvSpPr/>
           <p:nvPr/>
         </p:nvSpPr>
@@ -18272,7 +18902,7 @@
       </p:sp>
       <p:sp>
         <p:nvSpPr>
-          <p:cNvPr id="5" name="Rectangle 4"/>
+          <p:cNvPr id="6" name="Rectangle 5"/>
           <p:cNvSpPr/>
           <p:nvPr/>
         </p:nvSpPr>
@@ -18321,7 +18951,7 @@
       </p:sp>
       <p:sp>
         <p:nvSpPr>
-          <p:cNvPr id="6" name="TextBox 5"/>
+          <p:cNvPr id="7" name="TextBox 6"/>
           <p:cNvSpPr txBox="1"/>
           <p:nvPr/>
         </p:nvSpPr>
@@ -18363,7 +18993,7 @@
       </p:sp>
       <p:sp>
         <p:nvSpPr>
-          <p:cNvPr id="7" name="TextBox 6"/>
+          <p:cNvPr id="8" name="TextBox 7"/>
           <p:cNvSpPr txBox="1"/>
           <p:nvPr/>
         </p:nvSpPr>
@@ -18405,7 +19035,7 @@
       </p:sp>
       <p:graphicFrame>
         <p:nvGraphicFramePr>
-          <p:cNvPr id="8" name="Table 7"/>
+          <p:cNvPr id="9" name="Table 8"/>
           <p:cNvGraphicFramePr>
             <a:graphicFrameLocks noGrp="1"/>
           </p:cNvGraphicFramePr>
@@ -18938,7 +19568,7 @@
                         <a:rPr>
                           <a:latin typeface="Inter"/>
                         </a:rPr>
-                        <a:t>● Not assessed</a:t>
+                        <a:t>● not assessed</a:t>
                       </a:r>
                     </a:p>
                   </a:txBody>
@@ -18982,7 +19612,7 @@
       </p:graphicFrame>
       <p:sp>
         <p:nvSpPr>
-          <p:cNvPr id="9" name="TextBox 8"/>
+          <p:cNvPr id="10" name="TextBox 9"/>
           <p:cNvSpPr txBox="1"/>
           <p:nvPr/>
         </p:nvSpPr>
@@ -19024,7 +19654,7 @@
       </p:sp>
       <p:graphicFrame>
         <p:nvGraphicFramePr>
-          <p:cNvPr id="10" name="Table 9"/>
+          <p:cNvPr id="11" name="Table 10"/>
           <p:cNvGraphicFramePr>
             <a:graphicFrameLocks noGrp="1"/>
           </p:cNvGraphicFramePr>
@@ -19464,7 +20094,7 @@
       </p:graphicFrame>
       <p:sp>
         <p:nvSpPr>
-          <p:cNvPr id="11" name="TextBox 10"/>
+          <p:cNvPr id="12" name="TextBox 11"/>
           <p:cNvSpPr txBox="1"/>
           <p:nvPr/>
         </p:nvSpPr>
@@ -19499,14 +20129,14 @@
               <a:rPr>
                 <a:latin typeface="Inter"/>
               </a:rPr>
-              <a:t>The connector does not return security-level duration, spread duration, yield, convexity or key-rate exposure for this fixture [S8].</a:t>
+              <a:t>The connector does not return security-level duration, spread duration, yield, convexity or key-rate exposure for this public sample [S8].</a:t>
             </a:r>
           </a:p>
         </p:txBody>
       </p:sp>
       <p:sp>
         <p:nvSpPr>
-          <p:cNvPr id="12" name="Rectangle 11"/>
+          <p:cNvPr id="13" name="Rectangle 12"/>
           <p:cNvSpPr/>
           <p:nvPr/>
         </p:nvSpPr>
@@ -19555,7 +20185,7 @@
       </p:sp>
       <p:sp>
         <p:nvSpPr>
-          <p:cNvPr id="13" name="TextBox 12"/>
+          <p:cNvPr id="14" name="TextBox 13"/>
           <p:cNvSpPr txBox="1"/>
           <p:nvPr/>
         </p:nvSpPr>
@@ -19590,14 +20220,14 @@
               <a:rPr>
                 <a:latin typeface="Inter"/>
               </a:rPr>
-              <a:t>Sources: S3 · S5 · S8</a:t>
+              <a:t>Sources: S1 · S3 · S5 · S8</a:t>
             </a:r>
           </a:p>
         </p:txBody>
       </p:sp>
       <p:sp>
         <p:nvSpPr>
-          <p:cNvPr id="14" name="TextBox 13"/>
+          <p:cNvPr id="15" name="TextBox 14"/>
           <p:cNvSpPr txBox="1"/>
           <p:nvPr/>
         </p:nvSpPr>
@@ -19632,14 +20262,14 @@
               <a:rPr>
                 <a:latin typeface="Inter"/>
               </a:rPr>
-              <a:t>TEST DATA — fictional portfolio for rendering tests only · Data as of 2026-06-30</a:t>
+              <a:t>Confidential — Investment Committee · Data as of 2026-06-30</a:t>
             </a:r>
           </a:p>
         </p:txBody>
       </p:sp>
       <p:sp>
         <p:nvSpPr>
-          <p:cNvPr id="15" name="TextBox 14"/>
+          <p:cNvPr id="16" name="TextBox 15"/>
           <p:cNvSpPr txBox="1"/>
           <p:nvPr/>
         </p:nvSpPr>
@@ -19754,6 +20384,48 @@
         </p:nvSpPr>
         <p:spPr>
           <a:xfrm>
+            <a:off x="5897880" y="310896"/>
+            <a:ext cx="4800600" cy="256032"/>
+          </a:xfrm>
+          <a:prstGeom prst="rect">
+            <a:avLst/>
+          </a:prstGeom>
+          <a:noFill/>
+        </p:spPr>
+        <p:txBody>
+          <a:bodyPr wrap="none" lIns="9144" rIns="9144" tIns="9144" bIns="9144" anchor="t">
+            <a:spAutoFit/>
+          </a:bodyPr>
+          <a:lstStyle/>
+          <a:p>
+            <a:pPr algn="r">
+              <a:spcAft>
+                <a:spcPts val="0"/>
+              </a:spcAft>
+              <a:defRPr sz="680" b="1">
+                <a:solidFill>
+                  <a:srgbClr val="4F6B00"/>
+                </a:solidFill>
+                <a:latin typeface="Inter"/>
+              </a:defRPr>
+            </a:pPr>
+            <a:r>
+              <a:rPr>
+                <a:latin typeface="Inter"/>
+              </a:rPr>
+              <a:t>Illustrative, Gradient Maintained — demo data, not the client's holdings or managers</a:t>
+            </a:r>
+          </a:p>
+        </p:txBody>
+      </p:sp>
+      <p:sp>
+        <p:nvSpPr>
+          <p:cNvPr id="4" name="TextBox 3"/>
+          <p:cNvSpPr txBox="1"/>
+          <p:nvPr/>
+        </p:nvSpPr>
+        <p:spPr>
+          <a:xfrm>
             <a:off x="640080" y="566928"/>
             <a:ext cx="10058400" cy="530352"/>
           </a:xfrm>
@@ -19790,7 +20462,7 @@
       </p:sp>
       <p:sp>
         <p:nvSpPr>
-          <p:cNvPr id="4" name="Rectangle 3"/>
+          <p:cNvPr id="5" name="Rectangle 4"/>
           <p:cNvSpPr/>
           <p:nvPr/>
         </p:nvSpPr>
@@ -19839,7 +20511,7 @@
       </p:sp>
       <p:sp>
         <p:nvSpPr>
-          <p:cNvPr id="5" name="Rectangle 4"/>
+          <p:cNvPr id="6" name="Rectangle 5"/>
           <p:cNvSpPr/>
           <p:nvPr/>
         </p:nvSpPr>
@@ -19888,7 +20560,7 @@
       </p:sp>
       <p:sp>
         <p:nvSpPr>
-          <p:cNvPr id="6" name="TextBox 5"/>
+          <p:cNvPr id="7" name="TextBox 6"/>
           <p:cNvSpPr txBox="1"/>
           <p:nvPr/>
         </p:nvSpPr>
@@ -19930,7 +20602,7 @@
       </p:sp>
       <p:sp>
         <p:nvSpPr>
-          <p:cNvPr id="7" name="TextBox 6"/>
+          <p:cNvPr id="8" name="TextBox 7"/>
           <p:cNvSpPr txBox="1"/>
           <p:nvPr/>
         </p:nvSpPr>
@@ -19972,7 +20644,7 @@
       </p:sp>
       <p:graphicFrame>
         <p:nvGraphicFramePr>
-          <p:cNvPr id="8" name="Chart 7"/>
+          <p:cNvPr id="9" name="Chart 8"/>
           <p:cNvGraphicFramePr>
             <a:graphicFrameLocks noGrp="1"/>
           </p:cNvGraphicFramePr>
@@ -19990,7 +20662,7 @@
       </p:graphicFrame>
       <p:sp>
         <p:nvSpPr>
-          <p:cNvPr id="9" name="Rectangle 8"/>
+          <p:cNvPr id="10" name="Rectangle 9"/>
           <p:cNvSpPr/>
           <p:nvPr/>
         </p:nvSpPr>
@@ -20039,7 +20711,7 @@
       </p:sp>
       <p:sp>
         <p:nvSpPr>
-          <p:cNvPr id="10" name="TextBox 9"/>
+          <p:cNvPr id="11" name="TextBox 10"/>
           <p:cNvSpPr txBox="1"/>
           <p:nvPr/>
         </p:nvSpPr>
@@ -20081,7 +20753,7 @@
       </p:sp>
       <p:sp>
         <p:nvSpPr>
-          <p:cNvPr id="11" name="TextBox 10"/>
+          <p:cNvPr id="12" name="TextBox 11"/>
           <p:cNvSpPr txBox="1"/>
           <p:nvPr/>
         </p:nvSpPr>
@@ -20116,14 +20788,14 @@
               <a:rPr>
                 <a:latin typeface="Inter"/>
               </a:rPr>
-              <a:t>TEST DATA — fictional portfolio for rendering tests only · Data as of 2026-06-30</a:t>
+              <a:t>Confidential — Investment Committee · Data as of 2026-06-30</a:t>
             </a:r>
           </a:p>
         </p:txBody>
       </p:sp>
       <p:sp>
         <p:nvSpPr>
-          <p:cNvPr id="12" name="TextBox 11"/>
+          <p:cNvPr id="13" name="TextBox 12"/>
           <p:cNvSpPr txBox="1"/>
           <p:nvPr/>
         </p:nvSpPr>
@@ -20238,6 +20910,48 @@
         </p:nvSpPr>
         <p:spPr>
           <a:xfrm>
+            <a:off x="5897880" y="310896"/>
+            <a:ext cx="4800600" cy="256032"/>
+          </a:xfrm>
+          <a:prstGeom prst="rect">
+            <a:avLst/>
+          </a:prstGeom>
+          <a:noFill/>
+        </p:spPr>
+        <p:txBody>
+          <a:bodyPr wrap="none" lIns="9144" rIns="9144" tIns="9144" bIns="9144" anchor="t">
+            <a:spAutoFit/>
+          </a:bodyPr>
+          <a:lstStyle/>
+          <a:p>
+            <a:pPr algn="r">
+              <a:spcAft>
+                <a:spcPts val="0"/>
+              </a:spcAft>
+              <a:defRPr sz="680" b="1">
+                <a:solidFill>
+                  <a:srgbClr val="4F6B00"/>
+                </a:solidFill>
+                <a:latin typeface="Inter"/>
+              </a:defRPr>
+            </a:pPr>
+            <a:r>
+              <a:rPr>
+                <a:latin typeface="Inter"/>
+              </a:rPr>
+              <a:t>Illustrative, Gradient Maintained — demo data, not the client's holdings or managers</a:t>
+            </a:r>
+          </a:p>
+        </p:txBody>
+      </p:sp>
+      <p:sp>
+        <p:nvSpPr>
+          <p:cNvPr id="4" name="TextBox 3"/>
+          <p:cNvSpPr txBox="1"/>
+          <p:nvPr/>
+        </p:nvSpPr>
+        <p:spPr>
+          <a:xfrm>
             <a:off x="640080" y="566928"/>
             <a:ext cx="10058400" cy="530352"/>
           </a:xfrm>
@@ -20274,7 +20988,7 @@
       </p:sp>
       <p:sp>
         <p:nvSpPr>
-          <p:cNvPr id="4" name="Rectangle 3"/>
+          <p:cNvPr id="5" name="Rectangle 4"/>
           <p:cNvSpPr/>
           <p:nvPr/>
         </p:nvSpPr>
@@ -20323,7 +21037,7 @@
       </p:sp>
       <p:sp>
         <p:nvSpPr>
-          <p:cNvPr id="5" name="Rectangle 4"/>
+          <p:cNvPr id="6" name="Rectangle 5"/>
           <p:cNvSpPr/>
           <p:nvPr/>
         </p:nvSpPr>
@@ -20372,7 +21086,7 @@
       </p:sp>
       <p:sp>
         <p:nvSpPr>
-          <p:cNvPr id="6" name="TextBox 5"/>
+          <p:cNvPr id="7" name="TextBox 6"/>
           <p:cNvSpPr txBox="1"/>
           <p:nvPr/>
         </p:nvSpPr>
@@ -20414,7 +21128,7 @@
       </p:sp>
       <p:sp>
         <p:nvSpPr>
-          <p:cNvPr id="7" name="TextBox 6"/>
+          <p:cNvPr id="8" name="TextBox 7"/>
           <p:cNvSpPr txBox="1"/>
           <p:nvPr/>
         </p:nvSpPr>
@@ -20456,7 +21170,7 @@
       </p:sp>
       <p:graphicFrame>
         <p:nvGraphicFramePr>
-          <p:cNvPr id="8" name="Table 7"/>
+          <p:cNvPr id="9" name="Table 8"/>
           <p:cNvGraphicFramePr>
             <a:graphicFrameLocks noGrp="1"/>
           </p:cNvGraphicFramePr>
@@ -21033,7 +21747,7 @@
       </p:graphicFrame>
       <p:sp>
         <p:nvSpPr>
-          <p:cNvPr id="9" name="Rectangle 8"/>
+          <p:cNvPr id="10" name="Rectangle 9"/>
           <p:cNvSpPr/>
           <p:nvPr/>
         </p:nvSpPr>
@@ -21082,7 +21796,7 @@
       </p:sp>
       <p:sp>
         <p:nvSpPr>
-          <p:cNvPr id="10" name="Rectangle 9"/>
+          <p:cNvPr id="11" name="Rectangle 10"/>
           <p:cNvSpPr/>
           <p:nvPr/>
         </p:nvSpPr>
@@ -21131,7 +21845,7 @@
       </p:sp>
       <p:sp>
         <p:nvSpPr>
-          <p:cNvPr id="11" name="TextBox 10"/>
+          <p:cNvPr id="12" name="TextBox 11"/>
           <p:cNvSpPr txBox="1"/>
           <p:nvPr/>
         </p:nvSpPr>
@@ -21173,7 +21887,7 @@
       </p:sp>
       <p:sp>
         <p:nvSpPr>
-          <p:cNvPr id="12" name="TextBox 11"/>
+          <p:cNvPr id="13" name="TextBox 12"/>
           <p:cNvSpPr txBox="1"/>
           <p:nvPr/>
         </p:nvSpPr>
@@ -21215,7 +21929,7 @@
       </p:sp>
       <p:sp>
         <p:nvSpPr>
-          <p:cNvPr id="13" name="Rectangle 12"/>
+          <p:cNvPr id="14" name="Rectangle 13"/>
           <p:cNvSpPr/>
           <p:nvPr/>
         </p:nvSpPr>
@@ -21264,7 +21978,7 @@
       </p:sp>
       <p:sp>
         <p:nvSpPr>
-          <p:cNvPr id="14" name="TextBox 13"/>
+          <p:cNvPr id="15" name="TextBox 14"/>
           <p:cNvSpPr txBox="1"/>
           <p:nvPr/>
         </p:nvSpPr>
@@ -21306,7 +22020,7 @@
       </p:sp>
       <p:sp>
         <p:nvSpPr>
-          <p:cNvPr id="15" name="TextBox 14"/>
+          <p:cNvPr id="16" name="TextBox 15"/>
           <p:cNvSpPr txBox="1"/>
           <p:nvPr/>
         </p:nvSpPr>
@@ -21341,14 +22055,14 @@
               <a:rPr>
                 <a:latin typeface="Inter"/>
               </a:rPr>
-              <a:t>TEST DATA — fictional portfolio for rendering tests only · Data as of 2026-06-30</a:t>
+              <a:t>Confidential — Investment Committee · Data as of 2026-06-30</a:t>
             </a:r>
           </a:p>
         </p:txBody>
       </p:sp>
       <p:sp>
         <p:nvSpPr>
-          <p:cNvPr id="16" name="TextBox 15"/>
+          <p:cNvPr id="17" name="TextBox 16"/>
           <p:cNvSpPr txBox="1"/>
           <p:nvPr/>
         </p:nvSpPr>
@@ -21463,6 +22177,48 @@
         </p:nvSpPr>
         <p:spPr>
           <a:xfrm>
+            <a:off x="5897880" y="310896"/>
+            <a:ext cx="4800600" cy="256032"/>
+          </a:xfrm>
+          <a:prstGeom prst="rect">
+            <a:avLst/>
+          </a:prstGeom>
+          <a:noFill/>
+        </p:spPr>
+        <p:txBody>
+          <a:bodyPr wrap="none" lIns="9144" rIns="9144" tIns="9144" bIns="9144" anchor="t">
+            <a:spAutoFit/>
+          </a:bodyPr>
+          <a:lstStyle/>
+          <a:p>
+            <a:pPr algn="r">
+              <a:spcAft>
+                <a:spcPts val="0"/>
+              </a:spcAft>
+              <a:defRPr sz="680" b="1">
+                <a:solidFill>
+                  <a:srgbClr val="4F6B00"/>
+                </a:solidFill>
+                <a:latin typeface="Inter"/>
+              </a:defRPr>
+            </a:pPr>
+            <a:r>
+              <a:rPr>
+                <a:latin typeface="Inter"/>
+              </a:rPr>
+              <a:t>Illustrative, Gradient Maintained — demo data, not the client's holdings or managers</a:t>
+            </a:r>
+          </a:p>
+        </p:txBody>
+      </p:sp>
+      <p:sp>
+        <p:nvSpPr>
+          <p:cNvPr id="4" name="TextBox 3"/>
+          <p:cNvSpPr txBox="1"/>
+          <p:nvPr/>
+        </p:nvSpPr>
+        <p:spPr>
+          <a:xfrm>
             <a:off x="640080" y="566928"/>
             <a:ext cx="10058400" cy="530352"/>
           </a:xfrm>
@@ -21499,7 +22255,7 @@
       </p:sp>
       <p:sp>
         <p:nvSpPr>
-          <p:cNvPr id="4" name="Rectangle 3"/>
+          <p:cNvPr id="5" name="Rectangle 4"/>
           <p:cNvSpPr/>
           <p:nvPr/>
         </p:nvSpPr>
@@ -21548,7 +22304,7 @@
       </p:sp>
       <p:sp>
         <p:nvSpPr>
-          <p:cNvPr id="5" name="Rectangle 4"/>
+          <p:cNvPr id="6" name="Rectangle 5"/>
           <p:cNvSpPr/>
           <p:nvPr/>
         </p:nvSpPr>
@@ -21597,7 +22353,7 @@
       </p:sp>
       <p:sp>
         <p:nvSpPr>
-          <p:cNvPr id="6" name="TextBox 5"/>
+          <p:cNvPr id="7" name="TextBox 6"/>
           <p:cNvSpPr txBox="1"/>
           <p:nvPr/>
         </p:nvSpPr>
@@ -21639,7 +22395,7 @@
       </p:sp>
       <p:sp>
         <p:nvSpPr>
-          <p:cNvPr id="7" name="TextBox 6"/>
+          <p:cNvPr id="8" name="TextBox 7"/>
           <p:cNvSpPr txBox="1"/>
           <p:nvPr/>
         </p:nvSpPr>
@@ -21681,7 +22437,7 @@
       </p:sp>
       <p:graphicFrame>
         <p:nvGraphicFramePr>
-          <p:cNvPr id="8" name="Table 7"/>
+          <p:cNvPr id="9" name="Table 8"/>
           <p:cNvGraphicFramePr>
             <a:graphicFrameLocks noGrp="1"/>
           </p:cNvGraphicFramePr>
@@ -22203,7 +22959,7 @@
       </p:graphicFrame>
       <p:sp>
         <p:nvSpPr>
-          <p:cNvPr id="9" name="TextBox 8"/>
+          <p:cNvPr id="10" name="TextBox 9"/>
           <p:cNvSpPr txBox="1"/>
           <p:nvPr/>
         </p:nvSpPr>
@@ -22245,7 +23001,7 @@
       </p:sp>
       <p:graphicFrame>
         <p:nvGraphicFramePr>
-          <p:cNvPr id="10" name="Table 9"/>
+          <p:cNvPr id="11" name="Table 10"/>
           <p:cNvGraphicFramePr>
             <a:graphicFrameLocks noGrp="1"/>
           </p:cNvGraphicFramePr>
@@ -22603,7 +23359,7 @@
       </p:graphicFrame>
       <p:sp>
         <p:nvSpPr>
-          <p:cNvPr id="11" name="TextBox 10"/>
+          <p:cNvPr id="12" name="TextBox 11"/>
           <p:cNvSpPr txBox="1"/>
           <p:nvPr/>
         </p:nvSpPr>
@@ -22683,7 +23439,7 @@
       </p:sp>
       <p:sp>
         <p:nvSpPr>
-          <p:cNvPr id="12" name="Rectangle 11"/>
+          <p:cNvPr id="13" name="Rectangle 12"/>
           <p:cNvSpPr/>
           <p:nvPr/>
         </p:nvSpPr>
@@ -22732,7 +23488,7 @@
       </p:sp>
       <p:sp>
         <p:nvSpPr>
-          <p:cNvPr id="13" name="TextBox 12"/>
+          <p:cNvPr id="14" name="TextBox 13"/>
           <p:cNvSpPr txBox="1"/>
           <p:nvPr/>
         </p:nvSpPr>
@@ -22774,7 +23530,7 @@
       </p:sp>
       <p:sp>
         <p:nvSpPr>
-          <p:cNvPr id="14" name="TextBox 13"/>
+          <p:cNvPr id="15" name="TextBox 14"/>
           <p:cNvSpPr txBox="1"/>
           <p:nvPr/>
         </p:nvSpPr>
@@ -22809,14 +23565,14 @@
               <a:rPr>
                 <a:latin typeface="Inter"/>
               </a:rPr>
-              <a:t>TEST DATA — fictional portfolio for rendering tests only · Data as of 2026-06-30</a:t>
+              <a:t>Confidential — Investment Committee · Data as of 2026-06-30</a:t>
             </a:r>
           </a:p>
         </p:txBody>
       </p:sp>
       <p:sp>
         <p:nvSpPr>
-          <p:cNvPr id="15" name="TextBox 14"/>
+          <p:cNvPr id="16" name="TextBox 15"/>
           <p:cNvSpPr txBox="1"/>
           <p:nvPr/>
         </p:nvSpPr>
@@ -22931,6 +23687,48 @@
         </p:nvSpPr>
         <p:spPr>
           <a:xfrm>
+            <a:off x="5897880" y="310896"/>
+            <a:ext cx="4800600" cy="256032"/>
+          </a:xfrm>
+          <a:prstGeom prst="rect">
+            <a:avLst/>
+          </a:prstGeom>
+          <a:noFill/>
+        </p:spPr>
+        <p:txBody>
+          <a:bodyPr wrap="none" lIns="9144" rIns="9144" tIns="9144" bIns="9144" anchor="t">
+            <a:spAutoFit/>
+          </a:bodyPr>
+          <a:lstStyle/>
+          <a:p>
+            <a:pPr algn="r">
+              <a:spcAft>
+                <a:spcPts val="0"/>
+              </a:spcAft>
+              <a:defRPr sz="680" b="1">
+                <a:solidFill>
+                  <a:srgbClr val="4F6B00"/>
+                </a:solidFill>
+                <a:latin typeface="Inter"/>
+              </a:defRPr>
+            </a:pPr>
+            <a:r>
+              <a:rPr>
+                <a:latin typeface="Inter"/>
+              </a:rPr>
+              <a:t>Illustrative, Gradient Maintained — demo data, not the client's holdings or managers</a:t>
+            </a:r>
+          </a:p>
+        </p:txBody>
+      </p:sp>
+      <p:sp>
+        <p:nvSpPr>
+          <p:cNvPr id="4" name="TextBox 3"/>
+          <p:cNvSpPr txBox="1"/>
+          <p:nvPr/>
+        </p:nvSpPr>
+        <p:spPr>
+          <a:xfrm>
             <a:off x="640080" y="566928"/>
             <a:ext cx="10058400" cy="530352"/>
           </a:xfrm>
@@ -22967,7 +23765,7 @@
       </p:sp>
       <p:sp>
         <p:nvSpPr>
-          <p:cNvPr id="4" name="Rectangle 3"/>
+          <p:cNvPr id="5" name="Rectangle 4"/>
           <p:cNvSpPr/>
           <p:nvPr/>
         </p:nvSpPr>
@@ -23016,7 +23814,7 @@
       </p:sp>
       <p:sp>
         <p:nvSpPr>
-          <p:cNvPr id="5" name="Rectangle 4"/>
+          <p:cNvPr id="6" name="Rectangle 5"/>
           <p:cNvSpPr/>
           <p:nvPr/>
         </p:nvSpPr>
@@ -23065,7 +23863,7 @@
       </p:sp>
       <p:sp>
         <p:nvSpPr>
-          <p:cNvPr id="6" name="TextBox 5"/>
+          <p:cNvPr id="7" name="TextBox 6"/>
           <p:cNvSpPr txBox="1"/>
           <p:nvPr/>
         </p:nvSpPr>
@@ -23107,7 +23905,7 @@
       </p:sp>
       <p:sp>
         <p:nvSpPr>
-          <p:cNvPr id="7" name="TextBox 6"/>
+          <p:cNvPr id="8" name="TextBox 7"/>
           <p:cNvSpPr txBox="1"/>
           <p:nvPr/>
         </p:nvSpPr>
@@ -23149,7 +23947,7 @@
       </p:sp>
       <p:graphicFrame>
         <p:nvGraphicFramePr>
-          <p:cNvPr id="8" name="Table 7"/>
+          <p:cNvPr id="9" name="Table 8"/>
           <p:cNvGraphicFramePr>
             <a:graphicFrameLocks noGrp="1"/>
           </p:cNvGraphicFramePr>
@@ -23726,7 +24524,7 @@
       </p:graphicFrame>
       <p:sp>
         <p:nvSpPr>
-          <p:cNvPr id="9" name="TextBox 8"/>
+          <p:cNvPr id="10" name="TextBox 9"/>
           <p:cNvSpPr txBox="1"/>
           <p:nvPr/>
         </p:nvSpPr>
@@ -23768,7 +24566,7 @@
       </p:sp>
       <p:graphicFrame>
         <p:nvGraphicFramePr>
-          <p:cNvPr id="10" name="Table 9"/>
+          <p:cNvPr id="11" name="Table 10"/>
           <p:cNvGraphicFramePr>
             <a:graphicFrameLocks noGrp="1"/>
           </p:cNvGraphicFramePr>
@@ -24345,7 +25143,7 @@
       </p:graphicFrame>
       <p:sp>
         <p:nvSpPr>
-          <p:cNvPr id="11" name="Rectangle 10"/>
+          <p:cNvPr id="12" name="Rectangle 11"/>
           <p:cNvSpPr/>
           <p:nvPr/>
         </p:nvSpPr>
@@ -24394,7 +25192,7 @@
       </p:sp>
       <p:sp>
         <p:nvSpPr>
-          <p:cNvPr id="12" name="TextBox 11"/>
+          <p:cNvPr id="13" name="TextBox 12"/>
           <p:cNvSpPr txBox="1"/>
           <p:nvPr/>
         </p:nvSpPr>
@@ -24436,7 +25234,7 @@
       </p:sp>
       <p:sp>
         <p:nvSpPr>
-          <p:cNvPr id="13" name="TextBox 12"/>
+          <p:cNvPr id="14" name="TextBox 13"/>
           <p:cNvSpPr txBox="1"/>
           <p:nvPr/>
         </p:nvSpPr>
@@ -24471,14 +25269,14 @@
               <a:rPr>
                 <a:latin typeface="Inter"/>
               </a:rPr>
-              <a:t>TEST DATA — fictional portfolio for rendering tests only · Data as of 2026-06-30</a:t>
+              <a:t>Confidential — Investment Committee · Data as of 2026-06-30</a:t>
             </a:r>
           </a:p>
         </p:txBody>
       </p:sp>
       <p:sp>
         <p:nvSpPr>
-          <p:cNvPr id="14" name="TextBox 13"/>
+          <p:cNvPr id="15" name="TextBox 14"/>
           <p:cNvSpPr txBox="1"/>
           <p:nvPr/>
         </p:nvSpPr>
@@ -24593,6 +25391,48 @@
         </p:nvSpPr>
         <p:spPr>
           <a:xfrm>
+            <a:off x="5897880" y="310896"/>
+            <a:ext cx="4800600" cy="256032"/>
+          </a:xfrm>
+          <a:prstGeom prst="rect">
+            <a:avLst/>
+          </a:prstGeom>
+          <a:noFill/>
+        </p:spPr>
+        <p:txBody>
+          <a:bodyPr wrap="none" lIns="9144" rIns="9144" tIns="9144" bIns="9144" anchor="t">
+            <a:spAutoFit/>
+          </a:bodyPr>
+          <a:lstStyle/>
+          <a:p>
+            <a:pPr algn="r">
+              <a:spcAft>
+                <a:spcPts val="0"/>
+              </a:spcAft>
+              <a:defRPr sz="680" b="1">
+                <a:solidFill>
+                  <a:srgbClr val="4F6B00"/>
+                </a:solidFill>
+                <a:latin typeface="Inter"/>
+              </a:defRPr>
+            </a:pPr>
+            <a:r>
+              <a:rPr>
+                <a:latin typeface="Inter"/>
+              </a:rPr>
+              <a:t>Illustrative, Gradient Maintained — demo data, not the client's holdings or managers</a:t>
+            </a:r>
+          </a:p>
+        </p:txBody>
+      </p:sp>
+      <p:sp>
+        <p:nvSpPr>
+          <p:cNvPr id="4" name="TextBox 3"/>
+          <p:cNvSpPr txBox="1"/>
+          <p:nvPr/>
+        </p:nvSpPr>
+        <p:spPr>
+          <a:xfrm>
             <a:off x="640080" y="566928"/>
             <a:ext cx="10058400" cy="530352"/>
           </a:xfrm>
@@ -24629,7 +25469,7 @@
       </p:sp>
       <p:sp>
         <p:nvSpPr>
-          <p:cNvPr id="4" name="Rectangle 3"/>
+          <p:cNvPr id="5" name="Rectangle 4"/>
           <p:cNvSpPr/>
           <p:nvPr/>
         </p:nvSpPr>
@@ -24678,7 +25518,7 @@
       </p:sp>
       <p:sp>
         <p:nvSpPr>
-          <p:cNvPr id="5" name="Rectangle 4"/>
+          <p:cNvPr id="6" name="Rectangle 5"/>
           <p:cNvSpPr/>
           <p:nvPr/>
         </p:nvSpPr>
@@ -24727,7 +25567,7 @@
       </p:sp>
       <p:sp>
         <p:nvSpPr>
-          <p:cNvPr id="6" name="TextBox 5"/>
+          <p:cNvPr id="7" name="TextBox 6"/>
           <p:cNvSpPr txBox="1"/>
           <p:nvPr/>
         </p:nvSpPr>
@@ -24769,7 +25609,7 @@
       </p:sp>
       <p:graphicFrame>
         <p:nvGraphicFramePr>
-          <p:cNvPr id="7" name="Table 6"/>
+          <p:cNvPr id="8" name="Table 7"/>
           <p:cNvGraphicFramePr>
             <a:graphicFrameLocks noGrp="1"/>
           </p:cNvGraphicFramePr>
@@ -24945,7 +25785,7 @@
                         <a:rPr>
                           <a:latin typeface="Inter"/>
                         </a:rPr>
-                        <a:t>Fictional TEST data [S2]</a:t>
+                        <a:t>Illustrative sample data [S2]</a:t>
                       </a:r>
                     </a:p>
                   </a:txBody>
@@ -25460,7 +26300,7 @@
       </p:graphicFrame>
       <p:sp>
         <p:nvSpPr>
-          <p:cNvPr id="8" name="Rectangle 7"/>
+          <p:cNvPr id="9" name="Rectangle 8"/>
           <p:cNvSpPr/>
           <p:nvPr/>
         </p:nvSpPr>
@@ -25509,7 +26349,7 @@
       </p:sp>
       <p:sp>
         <p:nvSpPr>
-          <p:cNvPr id="9" name="TextBox 8"/>
+          <p:cNvPr id="10" name="TextBox 9"/>
           <p:cNvSpPr txBox="1"/>
           <p:nvPr/>
         </p:nvSpPr>
@@ -25551,7 +26391,7 @@
       </p:sp>
       <p:sp>
         <p:nvSpPr>
-          <p:cNvPr id="10" name="TextBox 9"/>
+          <p:cNvPr id="11" name="TextBox 10"/>
           <p:cNvSpPr txBox="1"/>
           <p:nvPr/>
         </p:nvSpPr>
@@ -25586,14 +26426,14 @@
               <a:rPr>
                 <a:latin typeface="Inter"/>
               </a:rPr>
-              <a:t>TEST DATA — fictional portfolio for rendering tests only · Data as of 2026-06-30</a:t>
+              <a:t>Confidential — Investment Committee · Data as of 2026-06-30</a:t>
             </a:r>
           </a:p>
         </p:txBody>
       </p:sp>
       <p:sp>
         <p:nvSpPr>
-          <p:cNvPr id="11" name="TextBox 10"/>
+          <p:cNvPr id="12" name="TextBox 11"/>
           <p:cNvSpPr txBox="1"/>
           <p:nvPr/>
         </p:nvSpPr>
@@ -25708,6 +26548,48 @@
         </p:nvSpPr>
         <p:spPr>
           <a:xfrm>
+            <a:off x="5897880" y="310896"/>
+            <a:ext cx="4800600" cy="256032"/>
+          </a:xfrm>
+          <a:prstGeom prst="rect">
+            <a:avLst/>
+          </a:prstGeom>
+          <a:noFill/>
+        </p:spPr>
+        <p:txBody>
+          <a:bodyPr wrap="none" lIns="9144" rIns="9144" tIns="9144" bIns="9144" anchor="t">
+            <a:spAutoFit/>
+          </a:bodyPr>
+          <a:lstStyle/>
+          <a:p>
+            <a:pPr algn="r">
+              <a:spcAft>
+                <a:spcPts val="0"/>
+              </a:spcAft>
+              <a:defRPr sz="680" b="1">
+                <a:solidFill>
+                  <a:srgbClr val="4F6B00"/>
+                </a:solidFill>
+                <a:latin typeface="Inter"/>
+              </a:defRPr>
+            </a:pPr>
+            <a:r>
+              <a:rPr>
+                <a:latin typeface="Inter"/>
+              </a:rPr>
+              <a:t>Illustrative, Gradient Maintained — demo data, not the client's holdings or managers</a:t>
+            </a:r>
+          </a:p>
+        </p:txBody>
+      </p:sp>
+      <p:sp>
+        <p:nvSpPr>
+          <p:cNvPr id="4" name="TextBox 3"/>
+          <p:cNvSpPr txBox="1"/>
+          <p:nvPr/>
+        </p:nvSpPr>
+        <p:spPr>
+          <a:xfrm>
             <a:off x="640080" y="566928"/>
             <a:ext cx="10058400" cy="530352"/>
           </a:xfrm>
@@ -25737,14 +26619,14 @@
               <a:rPr>
                 <a:latin typeface="Inter"/>
               </a:rPr>
-              <a:t>Appendix A — Sources</a:t>
+              <a:t>Appendix — Sources and methods</a:t>
             </a:r>
           </a:p>
         </p:txBody>
       </p:sp>
       <p:sp>
         <p:nvSpPr>
-          <p:cNvPr id="4" name="Rectangle 3"/>
+          <p:cNvPr id="5" name="Rectangle 4"/>
           <p:cNvSpPr/>
           <p:nvPr/>
         </p:nvSpPr>
@@ -25793,7 +26675,7 @@
       </p:sp>
       <p:sp>
         <p:nvSpPr>
-          <p:cNvPr id="5" name="Rectangle 4"/>
+          <p:cNvPr id="6" name="Rectangle 5"/>
           <p:cNvSpPr/>
           <p:nvPr/>
         </p:nvSpPr>
@@ -25842,7 +26724,7 @@
       </p:sp>
       <p:sp>
         <p:nvSpPr>
-          <p:cNvPr id="6" name="TextBox 5"/>
+          <p:cNvPr id="7" name="TextBox 6"/>
           <p:cNvSpPr txBox="1"/>
           <p:nvPr/>
         </p:nvSpPr>
@@ -25884,7 +26766,7 @@
       </p:sp>
       <p:graphicFrame>
         <p:nvGraphicFramePr>
-          <p:cNvPr id="7" name="Table 6"/>
+          <p:cNvPr id="8" name="Table 7"/>
           <p:cNvGraphicFramePr>
             <a:graphicFrameLocks noGrp="1"/>
           </p:cNvGraphicFramePr>
@@ -25892,7 +26774,7 @@
         </p:nvGraphicFramePr>
         <p:xfrm>
           <a:off x="640080" y="1325880"/>
-          <a:ext cx="10908792" cy="4892040"/>
+          <a:ext cx="10908792" cy="4690872"/>
         </p:xfrm>
         <a:graphic>
           <a:graphicData uri="http://schemas.openxmlformats.org/drawingml/2006/table">
@@ -25902,15 +26784,16 @@
               </a:tblPr>
               <a:tblGrid>
                 <a:gridCol w="2011680"/>
-                <a:gridCol w="1271016"/>
-                <a:gridCol w="1271016"/>
-                <a:gridCol w="1271016"/>
-                <a:gridCol w="1271016"/>
-                <a:gridCol w="1271016"/>
-                <a:gridCol w="1271016"/>
-                <a:gridCol w="1271016"/>
+                <a:gridCol w="1112139"/>
+                <a:gridCol w="1112139"/>
+                <a:gridCol w="1112139"/>
+                <a:gridCol w="1112139"/>
+                <a:gridCol w="1112139"/>
+                <a:gridCol w="1112139"/>
+                <a:gridCol w="1112139"/>
+                <a:gridCol w="1112139"/>
               </a:tblGrid>
-              <a:tr h="543560">
+              <a:tr h="521208">
                 <a:tc>
                   <a:txBody>
                     <a:bodyPr/>
@@ -25982,6 +26865,33 @@
                         <a:rPr>
                           <a:latin typeface="Inter"/>
                         </a:rPr>
+                        <a:t>Basis</a:t>
+                      </a:r>
+                    </a:p>
+                  </a:txBody>
+                  <a:tcPr marL="54864" marR="54864" marT="27432" marB="27432" anchor="ctr">
+                    <a:solidFill>
+                      <a:srgbClr val="0D1117"/>
+                    </a:solidFill>
+                  </a:tcPr>
+                </a:tc>
+                <a:tc>
+                  <a:txBody>
+                    <a:bodyPr/>
+                    <a:lstStyle/>
+                    <a:p>
+                      <a:pPr>
+                        <a:defRPr sz="750" b="1">
+                          <a:solidFill>
+                            <a:srgbClr val="FFFFFF"/>
+                          </a:solidFill>
+                          <a:latin typeface="Inter"/>
+                        </a:defRPr>
+                      </a:pPr>
+                      <a:r>
+                        <a:rPr>
+                          <a:latin typeface="Inter"/>
+                        </a:rPr>
                         <a:t>Tool / view</a:t>
                       </a:r>
                     </a:p>
@@ -26128,7 +27038,7 @@
                   </a:tcPr>
                 </a:tc>
               </a:tr>
-              <a:tr h="543560">
+              <a:tr h="521208">
                 <a:tc>
                   <a:txBody>
                     <a:bodyPr/>
@@ -26200,6 +27110,33 @@
                         <a:rPr>
                           <a:latin typeface="Inter"/>
                         </a:rPr>
+                        <a:t>gradient_tool</a:t>
+                      </a:r>
+                    </a:p>
+                  </a:txBody>
+                  <a:tcPr marL="54864" marR="54864" marT="27432" marB="27432" anchor="ctr">
+                    <a:solidFill>
+                      <a:srgbClr val="FFFFFF"/>
+                    </a:solidFill>
+                  </a:tcPr>
+                </a:tc>
+                <a:tc>
+                  <a:txBody>
+                    <a:bodyPr/>
+                    <a:lstStyle/>
+                    <a:p>
+                      <a:pPr>
+                        <a:defRPr sz="650" b="0">
+                          <a:solidFill>
+                            <a:srgbClr val="0D1117"/>
+                          </a:solidFill>
+                          <a:latin typeface="Inter"/>
+                        </a:defRPr>
+                      </a:pPr>
+                      <a:r>
+                        <a:rPr>
+                          <a:latin typeface="Inter"/>
+                        </a:rPr>
                         <a:t>list_organizations; get_gradient_capabilities</a:t>
                       </a:r>
                     </a:p>
@@ -26281,7 +27218,7 @@
                         <a:rPr>
                           <a:latin typeface="Inter"/>
                         </a:rPr>
-                        <a:t>Fictional TEST data</a:t>
+                        <a:t>Illustrative sample data</a:t>
                       </a:r>
                     </a:p>
                   </a:txBody>
@@ -26335,7 +27272,7 @@
                         <a:rPr>
                           <a:latin typeface="Inter"/>
                         </a:rPr>
-                        <a:t>fi-s1</a:t>
+                        <a:t>sha256:aaaaaaaaaaaaaaaaaaaaaaaaaaaaaaaaaaaaaaaaaaaaaaaaaaaaaaaaaaaaaaaa</a:t>
                       </a:r>
                     </a:p>
                   </a:txBody>
@@ -26346,7 +27283,7 @@
                   </a:tcPr>
                 </a:tc>
               </a:tr>
-              <a:tr h="543560">
+              <a:tr h="521208">
                 <a:tc>
                   <a:txBody>
                     <a:bodyPr/>
@@ -26418,6 +27355,33 @@
                         <a:rPr>
                           <a:latin typeface="Inter"/>
                         </a:rPr>
+                        <a:t>gradient_tool</a:t>
+                      </a:r>
+                    </a:p>
+                  </a:txBody>
+                  <a:tcPr marL="54864" marR="54864" marT="27432" marB="27432" anchor="ctr">
+                    <a:solidFill>
+                      <a:srgbClr val="F5F7F9"/>
+                    </a:solidFill>
+                  </a:tcPr>
+                </a:tc>
+                <a:tc>
+                  <a:txBody>
+                    <a:bodyPr/>
+                    <a:lstStyle/>
+                    <a:p>
+                      <a:pPr>
+                        <a:defRPr sz="650" b="0">
+                          <a:solidFill>
+                            <a:srgbClr val="0D1117"/>
+                          </a:solidFill>
+                          <a:latin typeface="Inter"/>
+                        </a:defRPr>
+                      </a:pPr>
+                      <a:r>
+                        <a:rPr>
+                          <a:latin typeface="Inter"/>
+                        </a:rPr>
                         <a:t>list_portfolios; get_portfolio_structure</a:t>
                       </a:r>
                     </a:p>
@@ -26499,7 +27463,7 @@
                         <a:rPr>
                           <a:latin typeface="Inter"/>
                         </a:rPr>
-                        <a:t>Fictional TEST data</a:t>
+                        <a:t>Illustrative sample data</a:t>
                       </a:r>
                     </a:p>
                   </a:txBody>
@@ -26553,7 +27517,7 @@
                         <a:rPr>
                           <a:latin typeface="Inter"/>
                         </a:rPr>
-                        <a:t>fi-s2</a:t>
+                        <a:t>sha256:aaaaaaaaaaaaaaaaaaaaaaaaaaaaaaaaaaaaaaaaaaaaaaaaaaaaaaaaaaaaaaaa</a:t>
                       </a:r>
                     </a:p>
                   </a:txBody>
@@ -26564,7 +27528,7 @@
                   </a:tcPr>
                 </a:tc>
               </a:tr>
-              <a:tr h="543560">
+              <a:tr h="521208">
                 <a:tc>
                   <a:txBody>
                     <a:bodyPr/>
@@ -26636,6 +27600,33 @@
                         <a:rPr>
                           <a:latin typeface="Inter"/>
                         </a:rPr>
+                        <a:t>gradient_tool</a:t>
+                      </a:r>
+                    </a:p>
+                  </a:txBody>
+                  <a:tcPr marL="54864" marR="54864" marT="27432" marB="27432" anchor="ctr">
+                    <a:solidFill>
+                      <a:srgbClr val="FFFFFF"/>
+                    </a:solidFill>
+                  </a:tcPr>
+                </a:tc>
+                <a:tc>
+                  <a:txBody>
+                    <a:bodyPr/>
+                    <a:lstStyle/>
+                    <a:p>
+                      <a:pPr>
+                        <a:defRPr sz="650" b="0">
+                          <a:solidFill>
+                            <a:srgbClr val="0D1117"/>
+                          </a:solidFill>
+                          <a:latin typeface="Inter"/>
+                        </a:defRPr>
+                      </a:pPr>
+                      <a:r>
+                        <a:rPr>
+                          <a:latin typeface="Inter"/>
+                        </a:rPr>
                         <a:t>check_portfolio_policy</a:t>
                       </a:r>
                     </a:p>
@@ -26717,7 +27708,7 @@
                         <a:rPr>
                           <a:latin typeface="Inter"/>
                         </a:rPr>
-                        <a:t>Fictional TEST data</a:t>
+                        <a:t>Illustrative sample data</a:t>
                       </a:r>
                     </a:p>
                   </a:txBody>
@@ -26771,7 +27762,7 @@
                         <a:rPr>
                           <a:latin typeface="Inter"/>
                         </a:rPr>
-                        <a:t>fi-s3</a:t>
+                        <a:t>sha256:aaaaaaaaaaaaaaaaaaaaaaaaaaaaaaaaaaaaaaaaaaaaaaaaaaaaaaaaaaaaaaaa</a:t>
                       </a:r>
                     </a:p>
                   </a:txBody>
@@ -26782,7 +27773,7 @@
                   </a:tcPr>
                 </a:tc>
               </a:tr>
-              <a:tr h="543560">
+              <a:tr h="521208">
                 <a:tc>
                   <a:txBody>
                     <a:bodyPr/>
@@ -26854,6 +27845,33 @@
                         <a:rPr>
                           <a:latin typeface="Inter"/>
                         </a:rPr>
+                        <a:t>gradient_tool</a:t>
+                      </a:r>
+                    </a:p>
+                  </a:txBody>
+                  <a:tcPr marL="54864" marR="54864" marT="27432" marB="27432" anchor="ctr">
+                    <a:solidFill>
+                      <a:srgbClr val="F5F7F9"/>
+                    </a:solidFill>
+                  </a:tcPr>
+                </a:tc>
+                <a:tc>
+                  <a:txBody>
+                    <a:bodyPr/>
+                    <a:lstStyle/>
+                    <a:p>
+                      <a:pPr>
+                        <a:defRPr sz="650" b="0">
+                          <a:solidFill>
+                            <a:srgbClr val="0D1117"/>
+                          </a:solidFill>
+                          <a:latin typeface="Inter"/>
+                        </a:defRPr>
+                      </a:pPr>
+                      <a:r>
+                        <a:rPr>
+                          <a:latin typeface="Inter"/>
+                        </a:rPr>
                         <a:t>get_portfolio_exposure</a:t>
                       </a:r>
                     </a:p>
@@ -26935,7 +27953,7 @@
                         <a:rPr>
                           <a:latin typeface="Inter"/>
                         </a:rPr>
-                        <a:t>Fictional TEST data</a:t>
+                        <a:t>Illustrative sample data</a:t>
                       </a:r>
                     </a:p>
                   </a:txBody>
@@ -26989,7 +28007,7 @@
                         <a:rPr>
                           <a:latin typeface="Inter"/>
                         </a:rPr>
-                        <a:t>fi-s4</a:t>
+                        <a:t>sha256:aaaaaaaaaaaaaaaaaaaaaaaaaaaaaaaaaaaaaaaaaaaaaaaaaaaaaaaaaaaaaaaa</a:t>
                       </a:r>
                     </a:p>
                   </a:txBody>
@@ -27000,7 +28018,7 @@
                   </a:tcPr>
                 </a:tc>
               </a:tr>
-              <a:tr h="543560">
+              <a:tr h="521208">
                 <a:tc>
                   <a:txBody>
                     <a:bodyPr/>
@@ -27072,6 +28090,33 @@
                         <a:rPr>
                           <a:latin typeface="Inter"/>
                         </a:rPr>
+                        <a:t>gradient_tool</a:t>
+                      </a:r>
+                    </a:p>
+                  </a:txBody>
+                  <a:tcPr marL="54864" marR="54864" marT="27432" marB="27432" anchor="ctr">
+                    <a:solidFill>
+                      <a:srgbClr val="FFFFFF"/>
+                    </a:solidFill>
+                  </a:tcPr>
+                </a:tc>
+                <a:tc>
+                  <a:txBody>
+                    <a:bodyPr/>
+                    <a:lstStyle/>
+                    <a:p>
+                      <a:pPr>
+                        <a:defRPr sz="650" b="0">
+                          <a:solidFill>
+                            <a:srgbClr val="0D1117"/>
+                          </a:solidFill>
+                          <a:latin typeface="Inter"/>
+                        </a:defRPr>
+                      </a:pPr>
+                      <a:r>
+                        <a:rPr>
+                          <a:latin typeface="Inter"/>
+                        </a:rPr>
                         <a:t>get_portfolio_historical_returns; get_portfolio_attribution</a:t>
                       </a:r>
                     </a:p>
@@ -27153,7 +28198,7 @@
                         <a:rPr>
                           <a:latin typeface="Inter"/>
                         </a:rPr>
-                        <a:t>Fictional TEST data</a:t>
+                        <a:t>Illustrative sample data</a:t>
                       </a:r>
                     </a:p>
                   </a:txBody>
@@ -27207,7 +28252,7 @@
                         <a:rPr>
                           <a:latin typeface="Inter"/>
                         </a:rPr>
-                        <a:t>fi-s5</a:t>
+                        <a:t>sha256:aaaaaaaaaaaaaaaaaaaaaaaaaaaaaaaaaaaaaaaaaaaaaaaaaaaaaaaaaaaaaaaa</a:t>
                       </a:r>
                     </a:p>
                   </a:txBody>
@@ -27218,7 +28263,7 @@
                   </a:tcPr>
                 </a:tc>
               </a:tr>
-              <a:tr h="543560">
+              <a:tr h="521208">
                 <a:tc>
                   <a:txBody>
                     <a:bodyPr/>
@@ -27290,6 +28335,33 @@
                         <a:rPr>
                           <a:latin typeface="Inter"/>
                         </a:rPr>
+                        <a:t>gradient_tool</a:t>
+                      </a:r>
+                    </a:p>
+                  </a:txBody>
+                  <a:tcPr marL="54864" marR="54864" marT="27432" marB="27432" anchor="ctr">
+                    <a:solidFill>
+                      <a:srgbClr val="F5F7F9"/>
+                    </a:solidFill>
+                  </a:tcPr>
+                </a:tc>
+                <a:tc>
+                  <a:txBody>
+                    <a:bodyPr/>
+                    <a:lstStyle/>
+                    <a:p>
+                      <a:pPr>
+                        <a:defRPr sz="650" b="0">
+                          <a:solidFill>
+                            <a:srgbClr val="0D1117"/>
+                          </a:solidFill>
+                          <a:latin typeface="Inter"/>
+                        </a:defRPr>
+                      </a:pPr>
+                      <a:r>
+                        <a:rPr>
+                          <a:latin typeface="Inter"/>
+                        </a:rPr>
                         <a:t>get_macro_conditions</a:t>
                       </a:r>
                     </a:p>
@@ -27371,7 +28443,7 @@
                         <a:rPr>
                           <a:latin typeface="Inter"/>
                         </a:rPr>
-                        <a:t>Fictional TEST data</a:t>
+                        <a:t>Illustrative sample data</a:t>
                       </a:r>
                     </a:p>
                   </a:txBody>
@@ -27425,7 +28497,7 @@
                         <a:rPr>
                           <a:latin typeface="Inter"/>
                         </a:rPr>
-                        <a:t>fi-s6</a:t>
+                        <a:t>sha256:aaaaaaaaaaaaaaaaaaaaaaaaaaaaaaaaaaaaaaaaaaaaaaaaaaaaaaaaaaaaaaaa</a:t>
                       </a:r>
                     </a:p>
                   </a:txBody>
@@ -27436,7 +28508,7 @@
                   </a:tcPr>
                 </a:tc>
               </a:tr>
-              <a:tr h="543560">
+              <a:tr h="521208">
                 <a:tc>
                   <a:txBody>
                     <a:bodyPr/>
@@ -27508,6 +28580,33 @@
                         <a:rPr>
                           <a:latin typeface="Inter"/>
                         </a:rPr>
+                        <a:t>gradient_tool</a:t>
+                      </a:r>
+                    </a:p>
+                  </a:txBody>
+                  <a:tcPr marL="54864" marR="54864" marT="27432" marB="27432" anchor="ctr">
+                    <a:solidFill>
+                      <a:srgbClr val="FFFFFF"/>
+                    </a:solidFill>
+                  </a:tcPr>
+                </a:tc>
+                <a:tc>
+                  <a:txBody>
+                    <a:bodyPr/>
+                    <a:lstStyle/>
+                    <a:p>
+                      <a:pPr>
+                        <a:defRPr sz="650" b="0">
+                          <a:solidFill>
+                            <a:srgbClr val="0D1117"/>
+                          </a:solidFill>
+                          <a:latin typeface="Inter"/>
+                        </a:defRPr>
+                      </a:pPr>
+                      <a:r>
+                        <a:rPr>
+                          <a:latin typeface="Inter"/>
+                        </a:rPr>
                         <a:t>get_capital_market_assumptions</a:t>
                       </a:r>
                     </a:p>
@@ -27589,7 +28688,7 @@
                         <a:rPr>
                           <a:latin typeface="Inter"/>
                         </a:rPr>
-                        <a:t>Fictional TEST data</a:t>
+                        <a:t>Illustrative sample data</a:t>
                       </a:r>
                     </a:p>
                   </a:txBody>
@@ -27643,7 +28742,7 @@
                         <a:rPr>
                           <a:latin typeface="Inter"/>
                         </a:rPr>
-                        <a:t>fi-s7</a:t>
+                        <a:t>sha256:aaaaaaaaaaaaaaaaaaaaaaaaaaaaaaaaaaaaaaaaaaaaaaaaaaaaaaaaaaaaaaaa</a:t>
                       </a:r>
                     </a:p>
                   </a:txBody>
@@ -27654,7 +28753,7 @@
                   </a:tcPr>
                 </a:tc>
               </a:tr>
-              <a:tr h="543560">
+              <a:tr h="521208">
                 <a:tc>
                   <a:txBody>
                     <a:bodyPr/>
@@ -27726,7 +28825,7 @@
                         <a:rPr>
                           <a:latin typeface="Inter"/>
                         </a:rPr>
-                        <a:t>User document; coverage record</a:t>
+                        <a:t>gradient_tool</a:t>
                       </a:r>
                     </a:p>
                   </a:txBody>
@@ -27753,7 +28852,7 @@
                         <a:rPr>
                           <a:latin typeface="Inter"/>
                         </a:rPr>
-                        <a:t>fictional</a:t>
+                        <a:t>get_gradient_capabilities</a:t>
                       </a:r>
                     </a:p>
                   </a:txBody>
@@ -27780,6 +28879,33 @@
                         <a:rPr>
                           <a:latin typeface="Inter"/>
                         </a:rPr>
+                        <a:t>illustrative</a:t>
+                      </a:r>
+                    </a:p>
+                  </a:txBody>
+                  <a:tcPr marL="54864" marR="54864" marT="27432" marB="27432" anchor="ctr">
+                    <a:solidFill>
+                      <a:srgbClr val="F5F7F9"/>
+                    </a:solidFill>
+                  </a:tcPr>
+                </a:tc>
+                <a:tc>
+                  <a:txBody>
+                    <a:bodyPr/>
+                    <a:lstStyle/>
+                    <a:p>
+                      <a:pPr>
+                        <a:defRPr sz="650" b="0">
+                          <a:solidFill>
+                            <a:srgbClr val="0D1117"/>
+                          </a:solidFill>
+                          <a:latin typeface="Inter"/>
+                        </a:defRPr>
+                      </a:pPr>
+                      <a:r>
+                        <a:rPr>
+                          <a:latin typeface="Inter"/>
+                        </a:rPr>
                         <a:t>2026-06-30</a:t>
                       </a:r>
                     </a:p>
@@ -27807,7 +28933,7 @@
                         <a:rPr>
                           <a:latin typeface="Inter"/>
                         </a:rPr>
-                        <a:t>Fictional TEST data</a:t>
+                        <a:t>Illustrative sample data</a:t>
                       </a:r>
                     </a:p>
                   </a:txBody>
@@ -27861,7 +28987,7 @@
                         <a:rPr>
                           <a:latin typeface="Inter"/>
                         </a:rPr>
-                        <a:t>fi-s8</a:t>
+                        <a:t>sha256:aaaaaaaaaaaaaaaaaaaaaaaaaaaaaaaaaaaaaaaaaaaaaaaaaaaaaaaaaaaaaaaa</a:t>
                       </a:r>
                     </a:p>
                   </a:txBody>
@@ -27878,7 +29004,49 @@
       </p:graphicFrame>
       <p:sp>
         <p:nvSpPr>
-          <p:cNvPr id="8" name="Rectangle 7"/>
+          <p:cNvPr id="9" name="TextBox 8"/>
+          <p:cNvSpPr txBox="1"/>
+          <p:nvPr/>
+        </p:nvSpPr>
+        <p:spPr>
+          <a:xfrm>
+            <a:off x="640080" y="6035040"/>
+            <a:ext cx="10908792" cy="164592"/>
+          </a:xfrm>
+          <a:prstGeom prst="rect">
+            <a:avLst/>
+          </a:prstGeom>
+          <a:noFill/>
+        </p:spPr>
+        <p:txBody>
+          <a:bodyPr wrap="none" lIns="9144" rIns="9144" tIns="9144" bIns="9144" anchor="t">
+            <a:spAutoFit/>
+          </a:bodyPr>
+          <a:lstStyle/>
+          <a:p>
+            <a:pPr algn="l">
+              <a:spcAft>
+                <a:spcPts val="0"/>
+              </a:spcAft>
+              <a:defRPr sz="680" b="0">
+                <a:solidFill>
+                  <a:srgbClr val="8A94A1"/>
+                </a:solidFill>
+                <a:latin typeface="Inter"/>
+              </a:defRPr>
+            </a:pPr>
+            <a:r>
+              <a:rPr>
+                <a:latin typeface="Inter"/>
+              </a:rPr>
+              <a:t>Illustrative, Gradient Maintained — demo data, not the client's holdings or managers. All organizations, portfolios, managers and results in this public example are illustrative.</a:t>
+            </a:r>
+          </a:p>
+        </p:txBody>
+      </p:sp>
+      <p:sp>
+        <p:nvSpPr>
+          <p:cNvPr id="10" name="Rectangle 9"/>
           <p:cNvSpPr/>
           <p:nvPr/>
         </p:nvSpPr>
@@ -27927,7 +29095,7 @@
       </p:sp>
       <p:sp>
         <p:nvSpPr>
-          <p:cNvPr id="9" name="TextBox 8"/>
+          <p:cNvPr id="11" name="TextBox 10"/>
           <p:cNvSpPr txBox="1"/>
           <p:nvPr/>
         </p:nvSpPr>
@@ -27969,7 +29137,7 @@
       </p:sp>
       <p:sp>
         <p:nvSpPr>
-          <p:cNvPr id="10" name="TextBox 9"/>
+          <p:cNvPr id="12" name="TextBox 11"/>
           <p:cNvSpPr txBox="1"/>
           <p:nvPr/>
         </p:nvSpPr>
@@ -28004,14 +29172,14 @@
               <a:rPr>
                 <a:latin typeface="Inter"/>
               </a:rPr>
-              <a:t>TEST DATA — fictional portfolio for rendering tests only · Data as of 2026-06-30</a:t>
+              <a:t>Confidential — Investment Committee · Data as of 2026-06-30</a:t>
             </a:r>
           </a:p>
         </p:txBody>
       </p:sp>
       <p:sp>
         <p:nvSpPr>
-          <p:cNvPr id="11" name="TextBox 10"/>
+          <p:cNvPr id="13" name="TextBox 12"/>
           <p:cNvSpPr txBox="1"/>
           <p:nvPr/>
         </p:nvSpPr>
@@ -28126,6 +29294,48 @@
         </p:nvSpPr>
         <p:spPr>
           <a:xfrm>
+            <a:off x="5897880" y="310896"/>
+            <a:ext cx="4800600" cy="256032"/>
+          </a:xfrm>
+          <a:prstGeom prst="rect">
+            <a:avLst/>
+          </a:prstGeom>
+          <a:noFill/>
+        </p:spPr>
+        <p:txBody>
+          <a:bodyPr wrap="none" lIns="9144" rIns="9144" tIns="9144" bIns="9144" anchor="t">
+            <a:spAutoFit/>
+          </a:bodyPr>
+          <a:lstStyle/>
+          <a:p>
+            <a:pPr algn="r">
+              <a:spcAft>
+                <a:spcPts val="0"/>
+              </a:spcAft>
+              <a:defRPr sz="680" b="1">
+                <a:solidFill>
+                  <a:srgbClr val="4F6B00"/>
+                </a:solidFill>
+                <a:latin typeface="Inter"/>
+              </a:defRPr>
+            </a:pPr>
+            <a:r>
+              <a:rPr>
+                <a:latin typeface="Inter"/>
+              </a:rPr>
+              <a:t>Illustrative, Gradient Maintained — demo data, not the client's holdings or managers</a:t>
+            </a:r>
+          </a:p>
+        </p:txBody>
+      </p:sp>
+      <p:sp>
+        <p:nvSpPr>
+          <p:cNvPr id="4" name="TextBox 3"/>
+          <p:cNvSpPr txBox="1"/>
+          <p:nvPr/>
+        </p:nvSpPr>
+        <p:spPr>
+          <a:xfrm>
             <a:off x="640080" y="566928"/>
             <a:ext cx="10058400" cy="530352"/>
           </a:xfrm>
@@ -28162,7 +29372,7 @@
       </p:sp>
       <p:sp>
         <p:nvSpPr>
-          <p:cNvPr id="4" name="Rectangle 3"/>
+          <p:cNvPr id="5" name="Rectangle 4"/>
           <p:cNvSpPr/>
           <p:nvPr/>
         </p:nvSpPr>
@@ -28211,7 +29421,7 @@
       </p:sp>
       <p:sp>
         <p:nvSpPr>
-          <p:cNvPr id="5" name="Rectangle 4"/>
+          <p:cNvPr id="6" name="Rectangle 5"/>
           <p:cNvSpPr/>
           <p:nvPr/>
         </p:nvSpPr>
@@ -28260,7 +29470,7 @@
       </p:sp>
       <p:sp>
         <p:nvSpPr>
-          <p:cNvPr id="6" name="TextBox 5"/>
+          <p:cNvPr id="7" name="TextBox 6"/>
           <p:cNvSpPr txBox="1"/>
           <p:nvPr/>
         </p:nvSpPr>
@@ -28302,14 +29512,14 @@
       </p:sp>
       <p:sp>
         <p:nvSpPr>
-          <p:cNvPr id="7" name="Rectangle 6"/>
+          <p:cNvPr id="8" name="Rectangle 7"/>
           <p:cNvSpPr/>
           <p:nvPr/>
         </p:nvSpPr>
         <p:spPr>
           <a:xfrm>
             <a:off x="640080" y="1325880"/>
-            <a:ext cx="10908792" cy="784877"/>
+            <a:ext cx="10908792" cy="790104"/>
           </a:xfrm>
           <a:prstGeom prst="rect">
             <a:avLst/>
@@ -28351,14 +29561,14 @@
       </p:sp>
       <p:sp>
         <p:nvSpPr>
-          <p:cNvPr id="8" name="Rectangle 7"/>
+          <p:cNvPr id="9" name="Rectangle 8"/>
           <p:cNvSpPr/>
           <p:nvPr/>
         </p:nvSpPr>
         <p:spPr>
           <a:xfrm>
             <a:off x="640080" y="1325880"/>
-            <a:ext cx="54864" cy="784877"/>
+            <a:ext cx="54864" cy="790104"/>
           </a:xfrm>
           <a:prstGeom prst="rect">
             <a:avLst/>
@@ -28400,7 +29610,7 @@
       </p:sp>
       <p:sp>
         <p:nvSpPr>
-          <p:cNvPr id="9" name="TextBox 8"/>
+          <p:cNvPr id="10" name="TextBox 9"/>
           <p:cNvSpPr txBox="1"/>
           <p:nvPr/>
         </p:nvSpPr>
@@ -28442,14 +29652,14 @@
       </p:sp>
       <p:sp>
         <p:nvSpPr>
-          <p:cNvPr id="10" name="TextBox 9"/>
+          <p:cNvPr id="11" name="TextBox 10"/>
           <p:cNvSpPr txBox="1"/>
           <p:nvPr/>
         </p:nvSpPr>
         <p:spPr>
           <a:xfrm>
             <a:off x="804671" y="1719072"/>
-            <a:ext cx="10616184" cy="300245"/>
+            <a:ext cx="10616184" cy="305472"/>
           </a:xfrm>
           <a:prstGeom prst="rect">
             <a:avLst/>
@@ -28484,13 +29694,13 @@
       </p:sp>
       <p:sp>
         <p:nvSpPr>
-          <p:cNvPr id="11" name="TextBox 10"/>
+          <p:cNvPr id="12" name="TextBox 11"/>
           <p:cNvSpPr txBox="1"/>
           <p:nvPr/>
         </p:nvSpPr>
         <p:spPr>
           <a:xfrm>
-            <a:off x="640080" y="2220485"/>
+            <a:off x="640080" y="2225712"/>
             <a:ext cx="10908792" cy="201168"/>
           </a:xfrm>
           <a:prstGeom prst="rect">
@@ -28526,15 +29736,15 @@
       </p:sp>
       <p:graphicFrame>
         <p:nvGraphicFramePr>
-          <p:cNvPr id="12" name="Table 11"/>
+          <p:cNvPr id="13" name="Table 12"/>
           <p:cNvGraphicFramePr>
             <a:graphicFrameLocks noGrp="1"/>
           </p:cNvGraphicFramePr>
           <p:nvPr/>
         </p:nvGraphicFramePr>
         <p:xfrm>
-          <a:off x="640080" y="2494805"/>
-          <a:ext cx="10908792" cy="1266002"/>
+          <a:off x="640080" y="2500032"/>
+          <a:ext cx="10908792" cy="1276260"/>
         </p:xfrm>
         <a:graphic>
           <a:graphicData uri="http://schemas.openxmlformats.org/drawingml/2006/table">
@@ -28548,7 +29758,7 @@
                 <a:gridCol w="2965704"/>
                 <a:gridCol w="2965704"/>
               </a:tblGrid>
-              <a:tr h="316500">
+              <a:tr h="319065">
                 <a:tc>
                   <a:txBody>
                     <a:bodyPr/>
@@ -28658,7 +29868,7 @@
                   </a:tcPr>
                 </a:tc>
               </a:tr>
-              <a:tr h="316500">
+              <a:tr h="319065">
                 <a:tc>
                   <a:txBody>
                     <a:bodyPr/>
@@ -28768,7 +29978,7 @@
                   </a:tcPr>
                 </a:tc>
               </a:tr>
-              <a:tr h="316500">
+              <a:tr h="319065">
                 <a:tc>
                   <a:txBody>
                     <a:bodyPr/>
@@ -28878,7 +30088,7 @@
                   </a:tcPr>
                 </a:tc>
               </a:tr>
-              <a:tr h="316502">
+              <a:tr h="319065">
                 <a:tc>
                   <a:txBody>
                     <a:bodyPr/>
@@ -28994,14 +30204,14 @@
       </p:graphicFrame>
       <p:sp>
         <p:nvSpPr>
-          <p:cNvPr id="13" name="Rectangle 12"/>
+          <p:cNvPr id="14" name="Rectangle 13"/>
           <p:cNvSpPr/>
           <p:nvPr/>
         </p:nvSpPr>
         <p:spPr>
           <a:xfrm>
-            <a:off x="640080" y="3870536"/>
-            <a:ext cx="10908792" cy="784877"/>
+            <a:off x="640080" y="3886021"/>
+            <a:ext cx="10908792" cy="790104"/>
           </a:xfrm>
           <a:prstGeom prst="rect">
             <a:avLst/>
@@ -29043,14 +30253,14 @@
       </p:sp>
       <p:sp>
         <p:nvSpPr>
-          <p:cNvPr id="14" name="Rectangle 13"/>
+          <p:cNvPr id="15" name="Rectangle 14"/>
           <p:cNvSpPr/>
           <p:nvPr/>
         </p:nvSpPr>
         <p:spPr>
           <a:xfrm>
-            <a:off x="640080" y="3870536"/>
-            <a:ext cx="54864" cy="784877"/>
+            <a:off x="640080" y="3886021"/>
+            <a:ext cx="54864" cy="790104"/>
           </a:xfrm>
           <a:prstGeom prst="rect">
             <a:avLst/>
@@ -29092,13 +30302,13 @@
       </p:sp>
       <p:sp>
         <p:nvSpPr>
-          <p:cNvPr id="15" name="TextBox 14"/>
+          <p:cNvPr id="16" name="TextBox 15"/>
           <p:cNvSpPr txBox="1"/>
           <p:nvPr/>
         </p:nvSpPr>
         <p:spPr>
           <a:xfrm>
-            <a:off x="804671" y="3980264"/>
+            <a:off x="804671" y="3995749"/>
             <a:ext cx="10616184" cy="228600"/>
           </a:xfrm>
           <a:prstGeom prst="rect">
@@ -29134,14 +30344,14 @@
       </p:sp>
       <p:sp>
         <p:nvSpPr>
-          <p:cNvPr id="16" name="TextBox 15"/>
+          <p:cNvPr id="17" name="TextBox 16"/>
           <p:cNvSpPr txBox="1"/>
           <p:nvPr/>
         </p:nvSpPr>
         <p:spPr>
           <a:xfrm>
-            <a:off x="804671" y="4263728"/>
-            <a:ext cx="10616184" cy="300245"/>
+            <a:off x="804671" y="4279213"/>
+            <a:ext cx="10616184" cy="305472"/>
           </a:xfrm>
           <a:prstGeom prst="rect">
             <a:avLst/>
@@ -29176,14 +30386,14 @@
       </p:sp>
       <p:sp>
         <p:nvSpPr>
-          <p:cNvPr id="17" name="Rectangle 16"/>
+          <p:cNvPr id="18" name="Rectangle 17"/>
           <p:cNvSpPr/>
           <p:nvPr/>
         </p:nvSpPr>
         <p:spPr>
           <a:xfrm>
-            <a:off x="640080" y="4765141"/>
-            <a:ext cx="10908792" cy="1452778"/>
+            <a:off x="640080" y="4785854"/>
+            <a:ext cx="10908792" cy="1432065"/>
           </a:xfrm>
           <a:prstGeom prst="rect">
             <a:avLst/>
@@ -29225,14 +30435,14 @@
       </p:sp>
       <p:sp>
         <p:nvSpPr>
-          <p:cNvPr id="18" name="Rectangle 17"/>
+          <p:cNvPr id="19" name="Rectangle 18"/>
           <p:cNvSpPr/>
           <p:nvPr/>
         </p:nvSpPr>
         <p:spPr>
           <a:xfrm>
-            <a:off x="640080" y="4765141"/>
-            <a:ext cx="54864" cy="1452778"/>
+            <a:off x="640080" y="4785854"/>
+            <a:ext cx="54864" cy="1432065"/>
           </a:xfrm>
           <a:prstGeom prst="rect">
             <a:avLst/>
@@ -29274,13 +30484,13 @@
       </p:sp>
       <p:sp>
         <p:nvSpPr>
-          <p:cNvPr id="19" name="TextBox 18"/>
+          <p:cNvPr id="20" name="TextBox 19"/>
           <p:cNvSpPr txBox="1"/>
           <p:nvPr/>
         </p:nvSpPr>
         <p:spPr>
           <a:xfrm>
-            <a:off x="804671" y="4874869"/>
+            <a:off x="804671" y="4895582"/>
             <a:ext cx="10616184" cy="228600"/>
           </a:xfrm>
           <a:prstGeom prst="rect">
@@ -29316,14 +30526,14 @@
       </p:sp>
       <p:sp>
         <p:nvSpPr>
-          <p:cNvPr id="20" name="TextBox 19"/>
+          <p:cNvPr id="21" name="TextBox 20"/>
           <p:cNvSpPr txBox="1"/>
           <p:nvPr/>
         </p:nvSpPr>
         <p:spPr>
           <a:xfrm>
-            <a:off x="804671" y="5158333"/>
-            <a:ext cx="10616184" cy="968146"/>
+            <a:off x="804671" y="5179046"/>
+            <a:ext cx="10616184" cy="947433"/>
           </a:xfrm>
           <a:prstGeom prst="rect">
             <a:avLst/>
@@ -29351,14 +30561,14 @@
               <a:rPr>
                 <a:latin typeface="Inter"/>
               </a:rPr>
-              <a:t>Observation: The fictional TEST report carries a credit-allocation signal above the prior neutral baseline [S1]. Why it matters: This signal focuses oversight on the report's most decision-relevant condition. Uncertainty: Evidence coverage may exclude newer or more detailed observations. What would change the view: A governed refresh showing a different signal or breached threshold.</a:t>
+              <a:t>Observation: The sample report carries a credit-allocation signal above the prior neutral baseline [S1]. Why it matters: This signal focuses oversight on the report's most decision-relevant condition. Uncertainty: Evidence coverage may exclude newer or more detailed observations. What would change the view: A governed refresh showing a different signal or breached threshold.</a:t>
             </a:r>
           </a:p>
         </p:txBody>
       </p:sp>
       <p:sp>
         <p:nvSpPr>
-          <p:cNvPr id="21" name="Rectangle 20"/>
+          <p:cNvPr id="22" name="Rectangle 21"/>
           <p:cNvSpPr/>
           <p:nvPr/>
         </p:nvSpPr>
@@ -29407,7 +30617,7 @@
       </p:sp>
       <p:sp>
         <p:nvSpPr>
-          <p:cNvPr id="22" name="TextBox 21"/>
+          <p:cNvPr id="23" name="TextBox 22"/>
           <p:cNvSpPr txBox="1"/>
           <p:nvPr/>
         </p:nvSpPr>
@@ -29449,7 +30659,7 @@
       </p:sp>
       <p:sp>
         <p:nvSpPr>
-          <p:cNvPr id="23" name="TextBox 22"/>
+          <p:cNvPr id="24" name="TextBox 23"/>
           <p:cNvSpPr txBox="1"/>
           <p:nvPr/>
         </p:nvSpPr>
@@ -29484,14 +30694,14 @@
               <a:rPr>
                 <a:latin typeface="Inter"/>
               </a:rPr>
-              <a:t>TEST DATA — fictional portfolio for rendering tests only · Data as of 2026-06-30</a:t>
+              <a:t>Confidential — Investment Committee · Data as of 2026-06-30</a:t>
             </a:r>
           </a:p>
         </p:txBody>
       </p:sp>
       <p:sp>
         <p:nvSpPr>
-          <p:cNvPr id="24" name="TextBox 23"/>
+          <p:cNvPr id="25" name="TextBox 24"/>
           <p:cNvSpPr txBox="1"/>
           <p:nvPr/>
         </p:nvSpPr>
@@ -29606,6 +30816,48 @@
         </p:nvSpPr>
         <p:spPr>
           <a:xfrm>
+            <a:off x="5897880" y="310896"/>
+            <a:ext cx="4800600" cy="256032"/>
+          </a:xfrm>
+          <a:prstGeom prst="rect">
+            <a:avLst/>
+          </a:prstGeom>
+          <a:noFill/>
+        </p:spPr>
+        <p:txBody>
+          <a:bodyPr wrap="none" lIns="9144" rIns="9144" tIns="9144" bIns="9144" anchor="t">
+            <a:spAutoFit/>
+          </a:bodyPr>
+          <a:lstStyle/>
+          <a:p>
+            <a:pPr algn="r">
+              <a:spcAft>
+                <a:spcPts val="0"/>
+              </a:spcAft>
+              <a:defRPr sz="680" b="1">
+                <a:solidFill>
+                  <a:srgbClr val="4F6B00"/>
+                </a:solidFill>
+                <a:latin typeface="Inter"/>
+              </a:defRPr>
+            </a:pPr>
+            <a:r>
+              <a:rPr>
+                <a:latin typeface="Inter"/>
+              </a:rPr>
+              <a:t>Illustrative, Gradient Maintained — demo data, not the client's holdings or managers</a:t>
+            </a:r>
+          </a:p>
+        </p:txBody>
+      </p:sp>
+      <p:sp>
+        <p:nvSpPr>
+          <p:cNvPr id="4" name="TextBox 3"/>
+          <p:cNvSpPr txBox="1"/>
+          <p:nvPr/>
+        </p:nvSpPr>
+        <p:spPr>
+          <a:xfrm>
             <a:off x="640080" y="566928"/>
             <a:ext cx="10058400" cy="530352"/>
           </a:xfrm>
@@ -29635,14 +30887,14 @@
               <a:rPr>
                 <a:latin typeface="Inter"/>
               </a:rPr>
-              <a:t>Appendix B — Server Metric Methods and Disclosures</a:t>
+              <a:t>Appendix — Server Metric Methods and Disclosures</a:t>
             </a:r>
           </a:p>
         </p:txBody>
       </p:sp>
       <p:sp>
         <p:nvSpPr>
-          <p:cNvPr id="4" name="Rectangle 3"/>
+          <p:cNvPr id="5" name="Rectangle 4"/>
           <p:cNvSpPr/>
           <p:nvPr/>
         </p:nvSpPr>
@@ -29691,7 +30943,7 @@
       </p:sp>
       <p:sp>
         <p:nvSpPr>
-          <p:cNvPr id="5" name="Rectangle 4"/>
+          <p:cNvPr id="6" name="Rectangle 5"/>
           <p:cNvSpPr/>
           <p:nvPr/>
         </p:nvSpPr>
@@ -29740,7 +30992,7 @@
       </p:sp>
       <p:sp>
         <p:nvSpPr>
-          <p:cNvPr id="6" name="TextBox 5"/>
+          <p:cNvPr id="7" name="TextBox 6"/>
           <p:cNvSpPr txBox="1"/>
           <p:nvPr/>
         </p:nvSpPr>
@@ -29782,7 +31034,7 @@
       </p:sp>
       <p:sp>
         <p:nvSpPr>
-          <p:cNvPr id="7" name="TextBox 6"/>
+          <p:cNvPr id="8" name="TextBox 7"/>
           <p:cNvSpPr txBox="1"/>
           <p:nvPr/>
         </p:nvSpPr>
@@ -29824,7 +31076,7 @@
       </p:sp>
       <p:graphicFrame>
         <p:nvGraphicFramePr>
-          <p:cNvPr id="8" name="Table 7"/>
+          <p:cNvPr id="9" name="Table 8"/>
           <p:cNvGraphicFramePr>
             <a:graphicFrameLocks noGrp="1"/>
           </p:cNvGraphicFramePr>
@@ -30538,7 +31790,7 @@
       </p:graphicFrame>
       <p:sp>
         <p:nvSpPr>
-          <p:cNvPr id="9" name="Rectangle 8"/>
+          <p:cNvPr id="10" name="Rectangle 9"/>
           <p:cNvSpPr/>
           <p:nvPr/>
         </p:nvSpPr>
@@ -30587,7 +31839,7 @@
       </p:sp>
       <p:sp>
         <p:nvSpPr>
-          <p:cNvPr id="10" name="TextBox 9"/>
+          <p:cNvPr id="11" name="TextBox 10"/>
           <p:cNvSpPr txBox="1"/>
           <p:nvPr/>
         </p:nvSpPr>
@@ -30629,7 +31881,7 @@
       </p:sp>
       <p:sp>
         <p:nvSpPr>
-          <p:cNvPr id="11" name="TextBox 10"/>
+          <p:cNvPr id="12" name="TextBox 11"/>
           <p:cNvSpPr txBox="1"/>
           <p:nvPr/>
         </p:nvSpPr>
@@ -30664,14 +31916,14 @@
               <a:rPr>
                 <a:latin typeface="Inter"/>
               </a:rPr>
-              <a:t>TEST DATA — fictional portfolio for rendering tests only · Data as of 2026-06-30</a:t>
+              <a:t>Confidential — Investment Committee · Data as of 2026-06-30</a:t>
             </a:r>
           </a:p>
         </p:txBody>
       </p:sp>
       <p:sp>
         <p:nvSpPr>
-          <p:cNvPr id="12" name="TextBox 11"/>
+          <p:cNvPr id="13" name="TextBox 12"/>
           <p:cNvSpPr txBox="1"/>
           <p:nvPr/>
         </p:nvSpPr>
@@ -30786,6 +32038,48 @@
         </p:nvSpPr>
         <p:spPr>
           <a:xfrm>
+            <a:off x="5897880" y="310896"/>
+            <a:ext cx="4800600" cy="256032"/>
+          </a:xfrm>
+          <a:prstGeom prst="rect">
+            <a:avLst/>
+          </a:prstGeom>
+          <a:noFill/>
+        </p:spPr>
+        <p:txBody>
+          <a:bodyPr wrap="none" lIns="9144" rIns="9144" tIns="9144" bIns="9144" anchor="t">
+            <a:spAutoFit/>
+          </a:bodyPr>
+          <a:lstStyle/>
+          <a:p>
+            <a:pPr algn="r">
+              <a:spcAft>
+                <a:spcPts val="0"/>
+              </a:spcAft>
+              <a:defRPr sz="680" b="1">
+                <a:solidFill>
+                  <a:srgbClr val="4F6B00"/>
+                </a:solidFill>
+                <a:latin typeface="Inter"/>
+              </a:defRPr>
+            </a:pPr>
+            <a:r>
+              <a:rPr>
+                <a:latin typeface="Inter"/>
+              </a:rPr>
+              <a:t>Illustrative, Gradient Maintained — demo data, not the client's holdings or managers</a:t>
+            </a:r>
+          </a:p>
+        </p:txBody>
+      </p:sp>
+      <p:sp>
+        <p:nvSpPr>
+          <p:cNvPr id="4" name="TextBox 3"/>
+          <p:cNvSpPr txBox="1"/>
+          <p:nvPr/>
+        </p:nvSpPr>
+        <p:spPr>
+          <a:xfrm>
             <a:off x="640080" y="566928"/>
             <a:ext cx="10058400" cy="530352"/>
           </a:xfrm>
@@ -30822,7 +32116,7 @@
       </p:sp>
       <p:sp>
         <p:nvSpPr>
-          <p:cNvPr id="4" name="Rectangle 3"/>
+          <p:cNvPr id="5" name="Rectangle 4"/>
           <p:cNvSpPr/>
           <p:nvPr/>
         </p:nvSpPr>
@@ -30871,7 +32165,7 @@
       </p:sp>
       <p:sp>
         <p:nvSpPr>
-          <p:cNvPr id="5" name="Rectangle 4"/>
+          <p:cNvPr id="6" name="Rectangle 5"/>
           <p:cNvSpPr/>
           <p:nvPr/>
         </p:nvSpPr>
@@ -30920,7 +32214,7 @@
       </p:sp>
       <p:sp>
         <p:nvSpPr>
-          <p:cNvPr id="6" name="TextBox 5"/>
+          <p:cNvPr id="7" name="TextBox 6"/>
           <p:cNvSpPr txBox="1"/>
           <p:nvPr/>
         </p:nvSpPr>
@@ -30962,14 +32256,14 @@
       </p:sp>
       <p:sp>
         <p:nvSpPr>
-          <p:cNvPr id="7" name="Rectangle 6"/>
+          <p:cNvPr id="8" name="Rectangle 7"/>
           <p:cNvSpPr/>
           <p:nvPr/>
         </p:nvSpPr>
         <p:spPr>
           <a:xfrm>
             <a:off x="640080" y="1325880"/>
-            <a:ext cx="10908792" cy="2340125"/>
+            <a:ext cx="10908792" cy="2373284"/>
           </a:xfrm>
           <a:prstGeom prst="rect">
             <a:avLst/>
@@ -31011,14 +32305,14 @@
       </p:sp>
       <p:sp>
         <p:nvSpPr>
-          <p:cNvPr id="8" name="Rectangle 7"/>
+          <p:cNvPr id="9" name="Rectangle 8"/>
           <p:cNvSpPr/>
           <p:nvPr/>
         </p:nvSpPr>
         <p:spPr>
           <a:xfrm>
             <a:off x="640080" y="1325880"/>
-            <a:ext cx="54864" cy="2340125"/>
+            <a:ext cx="54864" cy="2373284"/>
           </a:xfrm>
           <a:prstGeom prst="rect">
             <a:avLst/>
@@ -31060,7 +32354,7 @@
       </p:sp>
       <p:sp>
         <p:nvSpPr>
-          <p:cNvPr id="9" name="TextBox 8"/>
+          <p:cNvPr id="10" name="TextBox 9"/>
           <p:cNvSpPr txBox="1"/>
           <p:nvPr/>
         </p:nvSpPr>
@@ -31102,14 +32396,14 @@
       </p:sp>
       <p:sp>
         <p:nvSpPr>
-          <p:cNvPr id="10" name="TextBox 9"/>
+          <p:cNvPr id="11" name="TextBox 10"/>
           <p:cNvSpPr txBox="1"/>
           <p:nvPr/>
         </p:nvSpPr>
         <p:spPr>
           <a:xfrm>
             <a:off x="804671" y="1719072"/>
-            <a:ext cx="10616184" cy="1855493"/>
+            <a:ext cx="10616184" cy="1888652"/>
           </a:xfrm>
           <a:prstGeom prst="rect">
             <a:avLst/>
@@ -31137,21 +32431,21 @@
               <a:rPr>
                 <a:latin typeface="Inter"/>
               </a:rPr>
-              <a:t>Observation: Fixed-income weight is 28.0% in the TEST evidence [S2]. Why it matters: This measure establishes the baseline for comparing later governed results. Uncertainty: The source basis may omit newer observations outside this fixture. What would change the view: A refreshed source report showing a change above 1%.</a:t>
+              <a:t>Observation: Fixed-income weight is 28.0% in the review evidence [S2]. Why it matters: This measure establishes the baseline for comparing later governed results. Uncertainty: The source basis may omit newer observations outside the reviewed evidence. What would change the view: A refreshed source report showing a change above 1%.</a:t>
             </a:r>
           </a:p>
         </p:txBody>
       </p:sp>
       <p:sp>
         <p:nvSpPr>
-          <p:cNvPr id="11" name="Rectangle 10"/>
+          <p:cNvPr id="12" name="Rectangle 11"/>
           <p:cNvSpPr/>
           <p:nvPr/>
         </p:nvSpPr>
         <p:spPr>
           <a:xfrm>
-            <a:off x="640080" y="3775733"/>
-            <a:ext cx="10908792" cy="2442186"/>
+            <a:off x="640080" y="3808892"/>
+            <a:ext cx="10908792" cy="2409027"/>
           </a:xfrm>
           <a:prstGeom prst="rect">
             <a:avLst/>
@@ -31193,14 +32487,14 @@
       </p:sp>
       <p:sp>
         <p:nvSpPr>
-          <p:cNvPr id="12" name="Rectangle 11"/>
+          <p:cNvPr id="13" name="Rectangle 12"/>
           <p:cNvSpPr/>
           <p:nvPr/>
         </p:nvSpPr>
         <p:spPr>
           <a:xfrm>
-            <a:off x="640080" y="3775733"/>
-            <a:ext cx="54864" cy="2442186"/>
+            <a:off x="640080" y="3808892"/>
+            <a:ext cx="54864" cy="2409027"/>
           </a:xfrm>
           <a:prstGeom prst="rect">
             <a:avLst/>
@@ -31242,13 +32536,13 @@
       </p:sp>
       <p:sp>
         <p:nvSpPr>
-          <p:cNvPr id="13" name="TextBox 12"/>
+          <p:cNvPr id="14" name="TextBox 13"/>
           <p:cNvSpPr txBox="1"/>
           <p:nvPr/>
         </p:nvSpPr>
         <p:spPr>
           <a:xfrm>
-            <a:off x="804671" y="3885461"/>
+            <a:off x="804671" y="3918620"/>
             <a:ext cx="10616184" cy="228600"/>
           </a:xfrm>
           <a:prstGeom prst="rect">
@@ -31284,14 +32578,14 @@
       </p:sp>
       <p:sp>
         <p:nvSpPr>
-          <p:cNvPr id="14" name="TextBox 13"/>
+          <p:cNvPr id="15" name="TextBox 14"/>
           <p:cNvSpPr txBox="1"/>
           <p:nvPr/>
         </p:nvSpPr>
         <p:spPr>
           <a:xfrm>
-            <a:off x="804671" y="4168925"/>
-            <a:ext cx="10616184" cy="1957554"/>
+            <a:off x="804671" y="4202084"/>
+            <a:ext cx="10616184" cy="1924395"/>
           </a:xfrm>
           <a:prstGeom prst="rect">
             <a:avLst/>
@@ -31319,14 +32613,14 @@
               <a:rPr>
                 <a:latin typeface="Inter"/>
               </a:rPr>
-              <a:t>Observation: Liquid share is 96.0% in the TEST evidence [S3]. Why it matters: This result determines which item receives priority in the next monitoring cycle. Uncertainty: Supporting coverage may omit later filings or corroborating detail. What would change the view: A new filing or report that resolves the item or changes it by 1%.</a:t>
+              <a:t>Observation: Liquid share is 96.0% in the review evidence [S3]. Why it matters: This result determines which item receives priority in the next monitoring cycle. Uncertainty: Supporting coverage may omit later filings or corroborating detail. What would change the view: A new filing or report that resolves the item or changes it by 1%.</a:t>
             </a:r>
           </a:p>
         </p:txBody>
       </p:sp>
       <p:sp>
         <p:nvSpPr>
-          <p:cNvPr id="15" name="Rectangle 14"/>
+          <p:cNvPr id="16" name="Rectangle 15"/>
           <p:cNvSpPr/>
           <p:nvPr/>
         </p:nvSpPr>
@@ -31375,7 +32669,7 @@
       </p:sp>
       <p:sp>
         <p:nvSpPr>
-          <p:cNvPr id="16" name="TextBox 15"/>
+          <p:cNvPr id="17" name="TextBox 16"/>
           <p:cNvSpPr txBox="1"/>
           <p:nvPr/>
         </p:nvSpPr>
@@ -31417,7 +32711,7 @@
       </p:sp>
       <p:sp>
         <p:nvSpPr>
-          <p:cNvPr id="17" name="TextBox 16"/>
+          <p:cNvPr id="18" name="TextBox 17"/>
           <p:cNvSpPr txBox="1"/>
           <p:nvPr/>
         </p:nvSpPr>
@@ -31452,14 +32746,14 @@
               <a:rPr>
                 <a:latin typeface="Inter"/>
               </a:rPr>
-              <a:t>TEST DATA — fictional portfolio for rendering tests only · Data as of 2026-06-30</a:t>
+              <a:t>Confidential — Investment Committee · Data as of 2026-06-30</a:t>
             </a:r>
           </a:p>
         </p:txBody>
       </p:sp>
       <p:sp>
         <p:nvSpPr>
-          <p:cNvPr id="18" name="TextBox 17"/>
+          <p:cNvPr id="19" name="TextBox 18"/>
           <p:cNvSpPr txBox="1"/>
           <p:nvPr/>
         </p:nvSpPr>
@@ -31574,6 +32868,48 @@
         </p:nvSpPr>
         <p:spPr>
           <a:xfrm>
+            <a:off x="5897880" y="310896"/>
+            <a:ext cx="4800600" cy="256032"/>
+          </a:xfrm>
+          <a:prstGeom prst="rect">
+            <a:avLst/>
+          </a:prstGeom>
+          <a:noFill/>
+        </p:spPr>
+        <p:txBody>
+          <a:bodyPr wrap="none" lIns="9144" rIns="9144" tIns="9144" bIns="9144" anchor="t">
+            <a:spAutoFit/>
+          </a:bodyPr>
+          <a:lstStyle/>
+          <a:p>
+            <a:pPr algn="r">
+              <a:spcAft>
+                <a:spcPts val="0"/>
+              </a:spcAft>
+              <a:defRPr sz="680" b="1">
+                <a:solidFill>
+                  <a:srgbClr val="4F6B00"/>
+                </a:solidFill>
+                <a:latin typeface="Inter"/>
+              </a:defRPr>
+            </a:pPr>
+            <a:r>
+              <a:rPr>
+                <a:latin typeface="Inter"/>
+              </a:rPr>
+              <a:t>Illustrative, Gradient Maintained — demo data, not the client's holdings or managers</a:t>
+            </a:r>
+          </a:p>
+        </p:txBody>
+      </p:sp>
+      <p:sp>
+        <p:nvSpPr>
+          <p:cNvPr id="4" name="TextBox 3"/>
+          <p:cNvSpPr txBox="1"/>
+          <p:nvPr/>
+        </p:nvSpPr>
+        <p:spPr>
+          <a:xfrm>
             <a:off x="640080" y="566928"/>
             <a:ext cx="10058400" cy="530352"/>
           </a:xfrm>
@@ -31610,7 +32946,7 @@
       </p:sp>
       <p:sp>
         <p:nvSpPr>
-          <p:cNvPr id="4" name="Rectangle 3"/>
+          <p:cNvPr id="5" name="Rectangle 4"/>
           <p:cNvSpPr/>
           <p:nvPr/>
         </p:nvSpPr>
@@ -31659,7 +32995,7 @@
       </p:sp>
       <p:sp>
         <p:nvSpPr>
-          <p:cNvPr id="5" name="Rectangle 4"/>
+          <p:cNvPr id="6" name="Rectangle 5"/>
           <p:cNvSpPr/>
           <p:nvPr/>
         </p:nvSpPr>
@@ -31708,7 +33044,7 @@
       </p:sp>
       <p:sp>
         <p:nvSpPr>
-          <p:cNvPr id="6" name="TextBox 5"/>
+          <p:cNvPr id="7" name="TextBox 6"/>
           <p:cNvSpPr txBox="1"/>
           <p:nvPr/>
         </p:nvSpPr>
@@ -31750,7 +33086,7 @@
       </p:sp>
       <p:graphicFrame>
         <p:nvGraphicFramePr>
-          <p:cNvPr id="7" name="Table 6"/>
+          <p:cNvPr id="8" name="Table 7"/>
           <p:cNvGraphicFramePr>
             <a:graphicFrameLocks noGrp="1"/>
           </p:cNvGraphicFramePr>
@@ -31815,7 +33151,7 @@
                         <a:rPr>
                           <a:latin typeface="Inter"/>
                         </a:rPr>
-                        <a:t>Northstar Total Fund (TEST) [S2]</a:t>
+                        <a:t>Northstar Total Fund [S2]</a:t>
                       </a:r>
                     </a:p>
                   </a:txBody>
@@ -31927,7 +33263,7 @@
                         <a:rPr>
                           <a:latin typeface="Inter"/>
                         </a:rPr>
-                        <a:t>Example Aggregate Bond Index (TEST) [S5]</a:t>
+                        <a:t>Northstar Aggregate Bond Index [S5]</a:t>
                       </a:r>
                     </a:p>
                   </a:txBody>
@@ -32095,7 +33431,7 @@
                         <a:rPr>
                           <a:latin typeface="Inter"/>
                         </a:rPr>
-                        <a:t>Fictional TEST data [S1] [S1]</a:t>
+                        <a:t>Illustrative sample data [S1] [S1]</a:t>
                       </a:r>
                     </a:p>
                   </a:txBody>
@@ -32112,7 +33448,7 @@
       </p:graphicFrame>
       <p:sp>
         <p:nvSpPr>
-          <p:cNvPr id="8" name="TextBox 7"/>
+          <p:cNvPr id="9" name="TextBox 8"/>
           <p:cNvSpPr txBox="1"/>
           <p:nvPr/>
         </p:nvSpPr>
@@ -32154,7 +33490,7 @@
       </p:sp>
       <p:graphicFrame>
         <p:nvGraphicFramePr>
-          <p:cNvPr id="9" name="Table 8"/>
+          <p:cNvPr id="10" name="Table 9"/>
           <p:cNvGraphicFramePr>
             <a:graphicFrameLocks noGrp="1"/>
           </p:cNvGraphicFramePr>
@@ -32731,7 +34067,7 @@
       </p:graphicFrame>
       <p:sp>
         <p:nvSpPr>
-          <p:cNvPr id="10" name="Rectangle 9"/>
+          <p:cNvPr id="11" name="Rectangle 10"/>
           <p:cNvSpPr/>
           <p:nvPr/>
         </p:nvSpPr>
@@ -32780,7 +34116,7 @@
       </p:sp>
       <p:sp>
         <p:nvSpPr>
-          <p:cNvPr id="11" name="TextBox 10"/>
+          <p:cNvPr id="12" name="TextBox 11"/>
           <p:cNvSpPr txBox="1"/>
           <p:nvPr/>
         </p:nvSpPr>
@@ -32822,7 +34158,7 @@
       </p:sp>
       <p:sp>
         <p:nvSpPr>
-          <p:cNvPr id="12" name="TextBox 11"/>
+          <p:cNvPr id="13" name="TextBox 12"/>
           <p:cNvSpPr txBox="1"/>
           <p:nvPr/>
         </p:nvSpPr>
@@ -32857,14 +34193,14 @@
               <a:rPr>
                 <a:latin typeface="Inter"/>
               </a:rPr>
-              <a:t>TEST DATA — fictional portfolio for rendering tests only · Data as of 2026-06-30</a:t>
+              <a:t>Confidential — Investment Committee · Data as of 2026-06-30</a:t>
             </a:r>
           </a:p>
         </p:txBody>
       </p:sp>
       <p:sp>
         <p:nvSpPr>
-          <p:cNvPr id="13" name="TextBox 12"/>
+          <p:cNvPr id="14" name="TextBox 13"/>
           <p:cNvSpPr txBox="1"/>
           <p:nvPr/>
         </p:nvSpPr>
@@ -32979,6 +34315,48 @@
         </p:nvSpPr>
         <p:spPr>
           <a:xfrm>
+            <a:off x="5897880" y="310896"/>
+            <a:ext cx="4800600" cy="256032"/>
+          </a:xfrm>
+          <a:prstGeom prst="rect">
+            <a:avLst/>
+          </a:prstGeom>
+          <a:noFill/>
+        </p:spPr>
+        <p:txBody>
+          <a:bodyPr wrap="none" lIns="9144" rIns="9144" tIns="9144" bIns="9144" anchor="t">
+            <a:spAutoFit/>
+          </a:bodyPr>
+          <a:lstStyle/>
+          <a:p>
+            <a:pPr algn="r">
+              <a:spcAft>
+                <a:spcPts val="0"/>
+              </a:spcAft>
+              <a:defRPr sz="680" b="1">
+                <a:solidFill>
+                  <a:srgbClr val="4F6B00"/>
+                </a:solidFill>
+                <a:latin typeface="Inter"/>
+              </a:defRPr>
+            </a:pPr>
+            <a:r>
+              <a:rPr>
+                <a:latin typeface="Inter"/>
+              </a:rPr>
+              <a:t>Illustrative, Gradient Maintained — demo data, not the client's holdings or managers</a:t>
+            </a:r>
+          </a:p>
+        </p:txBody>
+      </p:sp>
+      <p:sp>
+        <p:nvSpPr>
+          <p:cNvPr id="4" name="TextBox 3"/>
+          <p:cNvSpPr txBox="1"/>
+          <p:nvPr/>
+        </p:nvSpPr>
+        <p:spPr>
+          <a:xfrm>
             <a:off x="640080" y="566928"/>
             <a:ext cx="10058400" cy="530352"/>
           </a:xfrm>
@@ -33015,7 +34393,7 @@
       </p:sp>
       <p:sp>
         <p:nvSpPr>
-          <p:cNvPr id="4" name="Rectangle 3"/>
+          <p:cNvPr id="5" name="Rectangle 4"/>
           <p:cNvSpPr/>
           <p:nvPr/>
         </p:nvSpPr>
@@ -33064,7 +34442,7 @@
       </p:sp>
       <p:sp>
         <p:nvSpPr>
-          <p:cNvPr id="5" name="Rectangle 4"/>
+          <p:cNvPr id="6" name="Rectangle 5"/>
           <p:cNvSpPr/>
           <p:nvPr/>
         </p:nvSpPr>
@@ -33113,7 +34491,7 @@
       </p:sp>
       <p:sp>
         <p:nvSpPr>
-          <p:cNvPr id="6" name="TextBox 5"/>
+          <p:cNvPr id="7" name="TextBox 6"/>
           <p:cNvSpPr txBox="1"/>
           <p:nvPr/>
         </p:nvSpPr>
@@ -33155,7 +34533,7 @@
       </p:sp>
       <p:sp>
         <p:nvSpPr>
-          <p:cNvPr id="7" name="TextBox 6"/>
+          <p:cNvPr id="8" name="TextBox 7"/>
           <p:cNvSpPr txBox="1"/>
           <p:nvPr/>
         </p:nvSpPr>
@@ -33190,14 +34568,14 @@
               <a:rPr>
                 <a:latin typeface="Inter"/>
               </a:rPr>
-              <a:t>FIXED-INCOME ALLOCATION (TEST)</a:t>
+              <a:t>FIXED-INCOME ALLOCATION</a:t>
             </a:r>
           </a:p>
         </p:txBody>
       </p:sp>
       <p:graphicFrame>
         <p:nvGraphicFramePr>
-          <p:cNvPr id="8" name="Chart 7"/>
+          <p:cNvPr id="9" name="Chart 8"/>
           <p:cNvGraphicFramePr>
             <a:graphicFrameLocks noGrp="1"/>
           </p:cNvGraphicFramePr>
@@ -33215,7 +34593,7 @@
       </p:graphicFrame>
       <p:sp>
         <p:nvSpPr>
-          <p:cNvPr id="9" name="Rectangle 8"/>
+          <p:cNvPr id="10" name="Rectangle 9"/>
           <p:cNvSpPr/>
           <p:nvPr/>
         </p:nvSpPr>
@@ -33264,7 +34642,7 @@
       </p:sp>
       <p:sp>
         <p:nvSpPr>
-          <p:cNvPr id="10" name="TextBox 9"/>
+          <p:cNvPr id="11" name="TextBox 10"/>
           <p:cNvSpPr txBox="1"/>
           <p:nvPr/>
         </p:nvSpPr>
@@ -33299,14 +34677,14 @@
               <a:rPr>
                 <a:latin typeface="Inter"/>
               </a:rPr>
-              <a:t>Sources: none cited</a:t>
+              <a:t>Sources: S1</a:t>
             </a:r>
           </a:p>
         </p:txBody>
       </p:sp>
       <p:sp>
         <p:nvSpPr>
-          <p:cNvPr id="11" name="TextBox 10"/>
+          <p:cNvPr id="12" name="TextBox 11"/>
           <p:cNvSpPr txBox="1"/>
           <p:nvPr/>
         </p:nvSpPr>
@@ -33341,14 +34719,14 @@
               <a:rPr>
                 <a:latin typeface="Inter"/>
               </a:rPr>
-              <a:t>TEST DATA — fictional portfolio for rendering tests only · Data as of 2026-06-30</a:t>
+              <a:t>Confidential — Investment Committee · Data as of 2026-06-30</a:t>
             </a:r>
           </a:p>
         </p:txBody>
       </p:sp>
       <p:sp>
         <p:nvSpPr>
-          <p:cNvPr id="12" name="TextBox 11"/>
+          <p:cNvPr id="13" name="TextBox 12"/>
           <p:cNvSpPr txBox="1"/>
           <p:nvPr/>
         </p:nvSpPr>
@@ -33463,6 +34841,48 @@
         </p:nvSpPr>
         <p:spPr>
           <a:xfrm>
+            <a:off x="5897880" y="310896"/>
+            <a:ext cx="4800600" cy="256032"/>
+          </a:xfrm>
+          <a:prstGeom prst="rect">
+            <a:avLst/>
+          </a:prstGeom>
+          <a:noFill/>
+        </p:spPr>
+        <p:txBody>
+          <a:bodyPr wrap="none" lIns="9144" rIns="9144" tIns="9144" bIns="9144" anchor="t">
+            <a:spAutoFit/>
+          </a:bodyPr>
+          <a:lstStyle/>
+          <a:p>
+            <a:pPr algn="r">
+              <a:spcAft>
+                <a:spcPts val="0"/>
+              </a:spcAft>
+              <a:defRPr sz="680" b="1">
+                <a:solidFill>
+                  <a:srgbClr val="4F6B00"/>
+                </a:solidFill>
+                <a:latin typeface="Inter"/>
+              </a:defRPr>
+            </a:pPr>
+            <a:r>
+              <a:rPr>
+                <a:latin typeface="Inter"/>
+              </a:rPr>
+              <a:t>Illustrative, Gradient Maintained — demo data, not the client's holdings or managers</a:t>
+            </a:r>
+          </a:p>
+        </p:txBody>
+      </p:sp>
+      <p:sp>
+        <p:nvSpPr>
+          <p:cNvPr id="4" name="TextBox 3"/>
+          <p:cNvSpPr txBox="1"/>
+          <p:nvPr/>
+        </p:nvSpPr>
+        <p:spPr>
+          <a:xfrm>
             <a:off x="640080" y="566928"/>
             <a:ext cx="10058400" cy="530352"/>
           </a:xfrm>
@@ -33499,7 +34919,7 @@
       </p:sp>
       <p:sp>
         <p:nvSpPr>
-          <p:cNvPr id="4" name="Rectangle 3"/>
+          <p:cNvPr id="5" name="Rectangle 4"/>
           <p:cNvSpPr/>
           <p:nvPr/>
         </p:nvSpPr>
@@ -33548,7 +34968,7 @@
       </p:sp>
       <p:sp>
         <p:nvSpPr>
-          <p:cNvPr id="5" name="Rectangle 4"/>
+          <p:cNvPr id="6" name="Rectangle 5"/>
           <p:cNvSpPr/>
           <p:nvPr/>
         </p:nvSpPr>
@@ -33597,7 +35017,7 @@
       </p:sp>
       <p:sp>
         <p:nvSpPr>
-          <p:cNvPr id="6" name="TextBox 5"/>
+          <p:cNvPr id="7" name="TextBox 6"/>
           <p:cNvSpPr txBox="1"/>
           <p:nvPr/>
         </p:nvSpPr>
@@ -33639,7 +35059,7 @@
       </p:sp>
       <p:sp>
         <p:nvSpPr>
-          <p:cNvPr id="7" name="TextBox 6"/>
+          <p:cNvPr id="8" name="TextBox 7"/>
           <p:cNvSpPr txBox="1"/>
           <p:nvPr/>
         </p:nvSpPr>
@@ -33681,7 +35101,7 @@
       </p:sp>
       <p:graphicFrame>
         <p:nvGraphicFramePr>
-          <p:cNvPr id="8" name="Table 7"/>
+          <p:cNvPr id="9" name="Table 8"/>
           <p:cNvGraphicFramePr>
             <a:graphicFrameLocks noGrp="1"/>
           </p:cNvGraphicFramePr>
@@ -34367,7 +35787,7 @@
       </p:graphicFrame>
       <p:sp>
         <p:nvSpPr>
-          <p:cNvPr id="9" name="TextBox 8"/>
+          <p:cNvPr id="10" name="TextBox 9"/>
           <p:cNvSpPr txBox="1"/>
           <p:nvPr/>
         </p:nvSpPr>
@@ -34409,7 +35829,7 @@
       </p:sp>
       <p:sp>
         <p:nvSpPr>
-          <p:cNvPr id="10" name="Rectangle 9"/>
+          <p:cNvPr id="11" name="Rectangle 10"/>
           <p:cNvSpPr/>
           <p:nvPr/>
         </p:nvSpPr>
@@ -34458,7 +35878,7 @@
       </p:sp>
       <p:sp>
         <p:nvSpPr>
-          <p:cNvPr id="11" name="TextBox 10"/>
+          <p:cNvPr id="12" name="TextBox 11"/>
           <p:cNvSpPr txBox="1"/>
           <p:nvPr/>
         </p:nvSpPr>
@@ -34500,7 +35920,7 @@
       </p:sp>
       <p:sp>
         <p:nvSpPr>
-          <p:cNvPr id="12" name="TextBox 11"/>
+          <p:cNvPr id="13" name="TextBox 12"/>
           <p:cNvSpPr txBox="1"/>
           <p:nvPr/>
         </p:nvSpPr>
@@ -34535,14 +35955,14 @@
               <a:rPr>
                 <a:latin typeface="Inter"/>
               </a:rPr>
-              <a:t>TEST DATA — fictional portfolio for rendering tests only · Data as of 2026-06-30</a:t>
+              <a:t>Confidential — Investment Committee · Data as of 2026-06-30</a:t>
             </a:r>
           </a:p>
         </p:txBody>
       </p:sp>
       <p:sp>
         <p:nvSpPr>
-          <p:cNvPr id="13" name="TextBox 12"/>
+          <p:cNvPr id="14" name="TextBox 13"/>
           <p:cNvSpPr txBox="1"/>
           <p:nvPr/>
         </p:nvSpPr>
@@ -34658,7 +36078,7 @@
         <p:spPr>
           <a:xfrm>
             <a:off x="640080" y="329184"/>
-            <a:ext cx="9875520" cy="182880"/>
+            <a:ext cx="5303520" cy="182880"/>
           </a:xfrm>
           <a:prstGeom prst="rect">
             <a:avLst/>
@@ -34699,6 +36119,48 @@
         </p:nvSpPr>
         <p:spPr>
           <a:xfrm>
+            <a:off x="5897880" y="310896"/>
+            <a:ext cx="4800600" cy="256032"/>
+          </a:xfrm>
+          <a:prstGeom prst="rect">
+            <a:avLst/>
+          </a:prstGeom>
+          <a:noFill/>
+        </p:spPr>
+        <p:txBody>
+          <a:bodyPr wrap="none" lIns="9144" rIns="9144" tIns="9144" bIns="9144" anchor="t">
+            <a:spAutoFit/>
+          </a:bodyPr>
+          <a:lstStyle/>
+          <a:p>
+            <a:pPr algn="r">
+              <a:spcAft>
+                <a:spcPts val="0"/>
+              </a:spcAft>
+              <a:defRPr sz="680" b="1">
+                <a:solidFill>
+                  <a:srgbClr val="4F6B00"/>
+                </a:solidFill>
+                <a:latin typeface="Inter"/>
+              </a:defRPr>
+            </a:pPr>
+            <a:r>
+              <a:rPr>
+                <a:latin typeface="Inter"/>
+              </a:rPr>
+              <a:t>Illustrative, Gradient Maintained — demo data, not the client's holdings or managers</a:t>
+            </a:r>
+          </a:p>
+        </p:txBody>
+      </p:sp>
+      <p:sp>
+        <p:nvSpPr>
+          <p:cNvPr id="5" name="TextBox 4"/>
+          <p:cNvSpPr txBox="1"/>
+          <p:nvPr/>
+        </p:nvSpPr>
+        <p:spPr>
+          <a:xfrm>
             <a:off x="640080" y="566928"/>
             <a:ext cx="10058400" cy="530352"/>
           </a:xfrm>
@@ -34735,7 +36197,7 @@
       </p:sp>
       <p:sp>
         <p:nvSpPr>
-          <p:cNvPr id="5" name="Rectangle 4"/>
+          <p:cNvPr id="6" name="Rectangle 5"/>
           <p:cNvSpPr/>
           <p:nvPr/>
         </p:nvSpPr>
@@ -34784,7 +36246,7 @@
       </p:sp>
       <p:sp>
         <p:nvSpPr>
-          <p:cNvPr id="6" name="Rectangle 5"/>
+          <p:cNvPr id="7" name="Rectangle 6"/>
           <p:cNvSpPr/>
           <p:nvPr/>
         </p:nvSpPr>
@@ -34833,7 +36295,7 @@
       </p:sp>
       <p:sp>
         <p:nvSpPr>
-          <p:cNvPr id="7" name="TextBox 6"/>
+          <p:cNvPr id="8" name="TextBox 7"/>
           <p:cNvSpPr txBox="1"/>
           <p:nvPr/>
         </p:nvSpPr>
@@ -34875,7 +36337,7 @@
       </p:sp>
       <p:sp>
         <p:nvSpPr>
-          <p:cNvPr id="8" name="TextBox 7"/>
+          <p:cNvPr id="9" name="TextBox 8"/>
           <p:cNvSpPr txBox="1"/>
           <p:nvPr/>
         </p:nvSpPr>
@@ -34917,7 +36379,7 @@
       </p:sp>
       <p:sp>
         <p:nvSpPr>
-          <p:cNvPr id="9" name="TextBox 8"/>
+          <p:cNvPr id="10" name="TextBox 9"/>
           <p:cNvSpPr txBox="1"/>
           <p:nvPr/>
         </p:nvSpPr>
@@ -34959,7 +36421,7 @@
       </p:sp>
       <p:sp>
         <p:nvSpPr>
-          <p:cNvPr id="10" name="Rectangle 9"/>
+          <p:cNvPr id="11" name="Rectangle 10"/>
           <p:cNvSpPr/>
           <p:nvPr/>
         </p:nvSpPr>
@@ -35008,7 +36470,7 @@
       </p:sp>
       <p:sp>
         <p:nvSpPr>
-          <p:cNvPr id="11" name="Oval 10"/>
+          <p:cNvPr id="12" name="Oval 11"/>
           <p:cNvSpPr/>
           <p:nvPr/>
         </p:nvSpPr>
@@ -35057,7 +36519,7 @@
       </p:sp>
       <p:sp>
         <p:nvSpPr>
-          <p:cNvPr id="12" name="Rectangle 11"/>
+          <p:cNvPr id="13" name="Rectangle 12"/>
           <p:cNvSpPr/>
           <p:nvPr/>
         </p:nvSpPr>
@@ -35106,7 +36568,7 @@
       </p:sp>
       <p:sp>
         <p:nvSpPr>
-          <p:cNvPr id="13" name="TextBox 12"/>
+          <p:cNvPr id="14" name="TextBox 13"/>
           <p:cNvSpPr txBox="1"/>
           <p:nvPr/>
         </p:nvSpPr>
@@ -35148,7 +36610,7 @@
       </p:sp>
       <p:sp>
         <p:nvSpPr>
-          <p:cNvPr id="14" name="Rectangle 13"/>
+          <p:cNvPr id="15" name="Rectangle 14"/>
           <p:cNvSpPr/>
           <p:nvPr/>
         </p:nvSpPr>
@@ -35197,7 +36659,7 @@
       </p:sp>
       <p:sp>
         <p:nvSpPr>
-          <p:cNvPr id="15" name="Oval 14"/>
+          <p:cNvPr id="16" name="Oval 15"/>
           <p:cNvSpPr/>
           <p:nvPr/>
         </p:nvSpPr>
@@ -35246,7 +36708,7 @@
       </p:sp>
       <p:sp>
         <p:nvSpPr>
-          <p:cNvPr id="16" name="Rectangle 15"/>
+          <p:cNvPr id="17" name="Rectangle 16"/>
           <p:cNvSpPr/>
           <p:nvPr/>
         </p:nvSpPr>
@@ -35295,7 +36757,7 @@
       </p:sp>
       <p:sp>
         <p:nvSpPr>
-          <p:cNvPr id="17" name="TextBox 16"/>
+          <p:cNvPr id="18" name="TextBox 17"/>
           <p:cNvSpPr txBox="1"/>
           <p:nvPr/>
         </p:nvSpPr>
@@ -35337,7 +36799,7 @@
       </p:sp>
       <p:sp>
         <p:nvSpPr>
-          <p:cNvPr id="18" name="Rectangle 17"/>
+          <p:cNvPr id="19" name="Rectangle 18"/>
           <p:cNvSpPr/>
           <p:nvPr/>
         </p:nvSpPr>
@@ -35386,7 +36848,7 @@
       </p:sp>
       <p:sp>
         <p:nvSpPr>
-          <p:cNvPr id="19" name="Oval 18"/>
+          <p:cNvPr id="20" name="Oval 19"/>
           <p:cNvSpPr/>
           <p:nvPr/>
         </p:nvSpPr>
@@ -35435,7 +36897,7 @@
       </p:sp>
       <p:sp>
         <p:nvSpPr>
-          <p:cNvPr id="20" name="Rectangle 19"/>
+          <p:cNvPr id="21" name="Rectangle 20"/>
           <p:cNvSpPr/>
           <p:nvPr/>
         </p:nvSpPr>
@@ -35484,7 +36946,7 @@
       </p:sp>
       <p:sp>
         <p:nvSpPr>
-          <p:cNvPr id="21" name="Rectangle 20"/>
+          <p:cNvPr id="22" name="Rectangle 21"/>
           <p:cNvSpPr/>
           <p:nvPr/>
         </p:nvSpPr>
@@ -35533,7 +36995,7 @@
       </p:sp>
       <p:sp>
         <p:nvSpPr>
-          <p:cNvPr id="22" name="TextBox 21"/>
+          <p:cNvPr id="23" name="TextBox 22"/>
           <p:cNvSpPr txBox="1"/>
           <p:nvPr/>
         </p:nvSpPr>
@@ -35568,14 +37030,14 @@
               <a:rPr>
                 <a:latin typeface="Inter"/>
               </a:rPr>
-              <a:t>Sources: none cited</a:t>
+              <a:t>Sources: S1</a:t>
             </a:r>
           </a:p>
         </p:txBody>
       </p:sp>
       <p:sp>
         <p:nvSpPr>
-          <p:cNvPr id="23" name="TextBox 22"/>
+          <p:cNvPr id="24" name="TextBox 23"/>
           <p:cNvSpPr txBox="1"/>
           <p:nvPr/>
         </p:nvSpPr>
@@ -35610,14 +37072,14 @@
               <a:rPr>
                 <a:latin typeface="Inter"/>
               </a:rPr>
-              <a:t>TEST DATA — fictional portfolio for rendering tests only · Data as of 2026-06-30</a:t>
+              <a:t>Confidential — Investment Committee · Data as of 2026-06-30</a:t>
             </a:r>
           </a:p>
         </p:txBody>
       </p:sp>
       <p:sp>
         <p:nvSpPr>
-          <p:cNvPr id="24" name="TextBox 23"/>
+          <p:cNvPr id="25" name="TextBox 24"/>
           <p:cNvSpPr txBox="1"/>
           <p:nvPr/>
         </p:nvSpPr>
@@ -35733,7 +37195,7 @@
         <p:spPr>
           <a:xfrm>
             <a:off x="640080" y="329184"/>
-            <a:ext cx="9875520" cy="182880"/>
+            <a:ext cx="5303520" cy="182880"/>
           </a:xfrm>
           <a:prstGeom prst="rect">
             <a:avLst/>
@@ -35774,6 +37236,48 @@
         </p:nvSpPr>
         <p:spPr>
           <a:xfrm>
+            <a:off x="5897880" y="310896"/>
+            <a:ext cx="4800600" cy="256032"/>
+          </a:xfrm>
+          <a:prstGeom prst="rect">
+            <a:avLst/>
+          </a:prstGeom>
+          <a:noFill/>
+        </p:spPr>
+        <p:txBody>
+          <a:bodyPr wrap="none" lIns="9144" rIns="9144" tIns="9144" bIns="9144" anchor="t">
+            <a:spAutoFit/>
+          </a:bodyPr>
+          <a:lstStyle/>
+          <a:p>
+            <a:pPr algn="r">
+              <a:spcAft>
+                <a:spcPts val="0"/>
+              </a:spcAft>
+              <a:defRPr sz="680" b="1">
+                <a:solidFill>
+                  <a:srgbClr val="4F6B00"/>
+                </a:solidFill>
+                <a:latin typeface="Inter"/>
+              </a:defRPr>
+            </a:pPr>
+            <a:r>
+              <a:rPr>
+                <a:latin typeface="Inter"/>
+              </a:rPr>
+              <a:t>Illustrative, Gradient Maintained — demo data, not the client's holdings or managers</a:t>
+            </a:r>
+          </a:p>
+        </p:txBody>
+      </p:sp>
+      <p:sp>
+        <p:nvSpPr>
+          <p:cNvPr id="5" name="TextBox 4"/>
+          <p:cNvSpPr txBox="1"/>
+          <p:nvPr/>
+        </p:nvSpPr>
+        <p:spPr>
+          <a:xfrm>
             <a:off x="640080" y="566928"/>
             <a:ext cx="10058400" cy="530352"/>
           </a:xfrm>
@@ -35810,7 +37314,7 @@
       </p:sp>
       <p:sp>
         <p:nvSpPr>
-          <p:cNvPr id="5" name="Rectangle 4"/>
+          <p:cNvPr id="6" name="Rectangle 5"/>
           <p:cNvSpPr/>
           <p:nvPr/>
         </p:nvSpPr>
@@ -35859,7 +37363,7 @@
       </p:sp>
       <p:sp>
         <p:nvSpPr>
-          <p:cNvPr id="6" name="Rectangle 5"/>
+          <p:cNvPr id="7" name="Rectangle 6"/>
           <p:cNvSpPr/>
           <p:nvPr/>
         </p:nvSpPr>
@@ -35908,7 +37412,7 @@
       </p:sp>
       <p:sp>
         <p:nvSpPr>
-          <p:cNvPr id="7" name="TextBox 6"/>
+          <p:cNvPr id="8" name="TextBox 7"/>
           <p:cNvSpPr txBox="1"/>
           <p:nvPr/>
         </p:nvSpPr>
@@ -35950,7 +37454,7 @@
       </p:sp>
       <p:sp>
         <p:nvSpPr>
-          <p:cNvPr id="8" name="TextBox 7"/>
+          <p:cNvPr id="9" name="TextBox 8"/>
           <p:cNvSpPr txBox="1"/>
           <p:nvPr/>
         </p:nvSpPr>
@@ -35992,7 +37496,7 @@
       </p:sp>
       <p:graphicFrame>
         <p:nvGraphicFramePr>
-          <p:cNvPr id="9" name="Chart 8"/>
+          <p:cNvPr id="10" name="Chart 9"/>
           <p:cNvGraphicFramePr>
             <a:graphicFrameLocks noGrp="1"/>
           </p:cNvGraphicFramePr>
@@ -36010,7 +37514,7 @@
       </p:graphicFrame>
       <p:sp>
         <p:nvSpPr>
-          <p:cNvPr id="10" name="Rectangle 9"/>
+          <p:cNvPr id="11" name="Rectangle 10"/>
           <p:cNvSpPr/>
           <p:nvPr/>
         </p:nvSpPr>
@@ -36059,7 +37563,7 @@
       </p:sp>
       <p:sp>
         <p:nvSpPr>
-          <p:cNvPr id="11" name="TextBox 10"/>
+          <p:cNvPr id="12" name="TextBox 11"/>
           <p:cNvSpPr txBox="1"/>
           <p:nvPr/>
         </p:nvSpPr>
@@ -36094,14 +37598,14 @@
               <a:rPr>
                 <a:latin typeface="Inter"/>
               </a:rPr>
-              <a:t>Sources: none cited</a:t>
+              <a:t>Sources: S1</a:t>
             </a:r>
           </a:p>
         </p:txBody>
       </p:sp>
       <p:sp>
         <p:nvSpPr>
-          <p:cNvPr id="12" name="TextBox 11"/>
+          <p:cNvPr id="13" name="TextBox 12"/>
           <p:cNvSpPr txBox="1"/>
           <p:nvPr/>
         </p:nvSpPr>
@@ -36136,14 +37640,14 @@
               <a:rPr>
                 <a:latin typeface="Inter"/>
               </a:rPr>
-              <a:t>TEST DATA — fictional portfolio for rendering tests only · Data as of 2026-06-30</a:t>
+              <a:t>Confidential — Investment Committee · Data as of 2026-06-30</a:t>
             </a:r>
           </a:p>
         </p:txBody>
       </p:sp>
       <p:sp>
         <p:nvSpPr>
-          <p:cNvPr id="13" name="TextBox 12"/>
+          <p:cNvPr id="14" name="TextBox 13"/>
           <p:cNvSpPr txBox="1"/>
           <p:nvPr/>
         </p:nvSpPr>

--- a/plugins/gradient-cio/assets/examples/gradient-portfolio-construction-fixed-income.pptx
+++ b/plugins/gradient-cio/assets/examples/gradient-portfolio-construction-fixed-income.pptx
@@ -35,6 +35,7 @@
     <ns0:sldId id="283" ns1:id="rId34"/>
     <ns0:sldId id="284" ns1:id="rId35"/>
     <ns0:sldId id="285" ns1:id="rId36"/>
+    <ns0:sldId id="286" ns1:id="rId37"/>
   </ns0:sldIdLst>
   <ns0:sldSz cx="12191695" cy="6858000" type="screen16x9"/>
   <ns0:notesSz cx="6858000" cy="9144000"/>
@@ -5062,224 +5063,7 @@
       </p:sp>
       <p:sp>
         <p:nvSpPr>
-          <p:cNvPr id="17" name="Rectangle 16"/>
-          <p:cNvSpPr/>
-          <p:nvPr/>
-        </p:nvSpPr>
-        <p:spPr>
-          <a:xfrm>
-            <a:off x="685800" y="5687568"/>
-            <a:ext cx="3337560" cy="530352"/>
-          </a:xfrm>
-          <a:prstGeom prst="rect">
-            <a:avLst/>
-          </a:prstGeom>
-          <a:solidFill>
-            <a:srgbClr val="F2A93B"/>
-          </a:solidFill>
-          <a:ln>
-            <a:solidFill>
-              <a:srgbClr val="F2A93B"/>
-            </a:solidFill>
-          </a:ln>
-        </p:spPr>
-        <p:style>
-          <a:lnRef idx="1">
-            <a:schemeClr val="accent1"/>
-          </a:lnRef>
-          <a:fillRef idx="3">
-            <a:schemeClr val="accent1"/>
-          </a:fillRef>
-          <a:effectRef idx="2">
-            <a:schemeClr val="accent1"/>
-          </a:effectRef>
-          <a:fontRef idx="minor">
-            <a:schemeClr val="lt1"/>
-          </a:fontRef>
-        </p:style>
-        <p:txBody>
-          <a:bodyPr rtlCol="0" anchor="ctr"/>
-          <a:lstStyle/>
-          <a:p>
-            <a:pPr algn="ctr">
-              <a:defRPr>
-                <a:latin typeface="Inter"/>
-              </a:defRPr>
-            </a:pPr>
-          </a:p>
-        </p:txBody>
-      </p:sp>
-      <p:sp>
-        <p:nvSpPr>
-          <p:cNvPr id="18" name="TextBox 17"/>
-          <p:cNvSpPr txBox="1"/>
-          <p:nvPr/>
-        </p:nvSpPr>
-        <p:spPr>
-          <a:xfrm>
-            <a:off x="822960" y="5760720"/>
-            <a:ext cx="3063240" cy="128016"/>
-          </a:xfrm>
-          <a:prstGeom prst="rect">
-            <a:avLst/>
-          </a:prstGeom>
-          <a:noFill/>
-        </p:spPr>
-        <p:txBody>
-          <a:bodyPr wrap="none" lIns="9144" rIns="9144" tIns="9144" bIns="9144" anchor="t">
-            <a:spAutoFit/>
-          </a:bodyPr>
-          <a:lstStyle/>
-          <a:p>
-            <a:pPr algn="l">
-              <a:spcAft>
-                <a:spcPts val="0"/>
-              </a:spcAft>
-              <a:defRPr sz="620" b="1">
-                <a:solidFill>
-                  <a:srgbClr val="0D1117"/>
-                </a:solidFill>
-                <a:latin typeface="Inter"/>
-              </a:defRPr>
-            </a:pPr>
-            <a:r>
-              <a:rPr>
-                <a:latin typeface="Inter"/>
-              </a:rPr>
-              <a:t>OVERALL VIEW</a:t>
-            </a:r>
-          </a:p>
-        </p:txBody>
-      </p:sp>
-      <p:sp>
-        <p:nvSpPr>
-          <p:cNvPr id="19" name="TextBox 18"/>
-          <p:cNvSpPr txBox="1"/>
-          <p:nvPr/>
-        </p:nvSpPr>
-        <p:spPr>
-          <a:xfrm>
-            <a:off x="822960" y="5916168"/>
-            <a:ext cx="3063240" cy="182880"/>
-          </a:xfrm>
-          <a:prstGeom prst="rect">
-            <a:avLst/>
-          </a:prstGeom>
-          <a:noFill/>
-        </p:spPr>
-        <p:txBody>
-          <a:bodyPr wrap="none" lIns="9144" rIns="9144" tIns="9144" bIns="9144" anchor="t">
-            <a:spAutoFit/>
-          </a:bodyPr>
-          <a:lstStyle/>
-          <a:p>
-            <a:pPr algn="l">
-              <a:spcAft>
-                <a:spcPts val="0"/>
-              </a:spcAft>
-              <a:defRPr sz="900" b="1">
-                <a:solidFill>
-                  <a:srgbClr val="0D1117"/>
-                </a:solidFill>
-                <a:latin typeface="Inter"/>
-              </a:defRPr>
-            </a:pPr>
-            <a:r>
-              <a:rPr>
-                <a:latin typeface="Inter"/>
-              </a:rPr>
-              <a:t>Credit allocation proposed</a:t>
-            </a:r>
-          </a:p>
-        </p:txBody>
-      </p:sp>
-      <p:sp>
-        <p:nvSpPr>
-          <p:cNvPr id="20" name="TextBox 19"/>
-          <p:cNvSpPr txBox="1"/>
-          <p:nvPr/>
-        </p:nvSpPr>
-        <p:spPr>
-          <a:xfrm>
-            <a:off x="4297680" y="5733288"/>
-            <a:ext cx="3108960" cy="164592"/>
-          </a:xfrm>
-          <a:prstGeom prst="rect">
-            <a:avLst/>
-          </a:prstGeom>
-          <a:noFill/>
-        </p:spPr>
-        <p:txBody>
-          <a:bodyPr wrap="none" lIns="9144" rIns="9144" tIns="9144" bIns="9144" anchor="t">
-            <a:spAutoFit/>
-          </a:bodyPr>
-          <a:lstStyle/>
-          <a:p>
-            <a:pPr algn="l">
-              <a:spcAft>
-                <a:spcPts val="0"/>
-              </a:spcAft>
-              <a:defRPr sz="650" b="1">
-                <a:solidFill>
-                  <a:srgbClr val="8A94A1"/>
-                </a:solidFill>
-                <a:latin typeface="Inter"/>
-              </a:defRPr>
-            </a:pPr>
-            <a:r>
-              <a:rPr>
-                <a:latin typeface="Inter"/>
-              </a:rPr>
-              <a:t>SCOPE REVIEWED</a:t>
-            </a:r>
-          </a:p>
-        </p:txBody>
-      </p:sp>
-      <p:sp>
-        <p:nvSpPr>
-          <p:cNvPr id="21" name="TextBox 20"/>
-          <p:cNvSpPr txBox="1"/>
-          <p:nvPr/>
-        </p:nvSpPr>
-        <p:spPr>
-          <a:xfrm>
-            <a:off x="4297680" y="5934456"/>
-            <a:ext cx="3108960" cy="201168"/>
-          </a:xfrm>
-          <a:prstGeom prst="rect">
-            <a:avLst/>
-          </a:prstGeom>
-          <a:noFill/>
-        </p:spPr>
-        <p:txBody>
-          <a:bodyPr wrap="none" lIns="9144" rIns="9144" tIns="9144" bIns="9144" anchor="t">
-            <a:spAutoFit/>
-          </a:bodyPr>
-          <a:lstStyle/>
-          <a:p>
-            <a:pPr algn="l">
-              <a:spcAft>
-                <a:spcPts val="0"/>
-              </a:spcAft>
-              <a:defRPr sz="800" b="1">
-                <a:solidFill>
-                  <a:srgbClr val="FFFFFF"/>
-                </a:solidFill>
-                <a:latin typeface="Inter"/>
-              </a:defRPr>
-            </a:pPr>
-            <a:r>
-              <a:rPr>
-                <a:latin typeface="Inter"/>
-              </a:rPr>
-              <a:t>8 of 9 · Partial</a:t>
-            </a:r>
-          </a:p>
-        </p:txBody>
-      </p:sp>
-      <p:sp>
-        <p:nvSpPr>
-          <p:cNvPr id="22" name="TextBox 21"/>
+          <p:cNvPr id="17" name="TextBox 16"/>
           <p:cNvSpPr txBox="1"/>
           <p:nvPr/>
         </p:nvSpPr>
@@ -5321,7 +5105,7 @@
       </p:sp>
       <p:sp>
         <p:nvSpPr>
-          <p:cNvPr id="23" name="TextBox 22"/>
+          <p:cNvPr id="18" name="TextBox 17"/>
           <p:cNvSpPr txBox="1"/>
           <p:nvPr/>
         </p:nvSpPr>
@@ -5363,7 +5147,7 @@
       </p:sp>
       <p:sp>
         <p:nvSpPr>
-          <p:cNvPr id="24" name="TextBox 23"/>
+          <p:cNvPr id="19" name="TextBox 18"/>
           <p:cNvSpPr txBox="1"/>
           <p:nvPr/>
         </p:nvSpPr>
@@ -5479,7 +5263,7 @@
         <p:spPr>
           <a:xfrm>
             <a:off x="640080" y="329184"/>
-            <a:ext cx="5303520" cy="182880"/>
+            <a:ext cx="9875520" cy="182880"/>
           </a:xfrm>
           <a:prstGeom prst="rect">
             <a:avLst/>
@@ -5520,48 +5304,6 @@
         </p:nvSpPr>
         <p:spPr>
           <a:xfrm>
-            <a:off x="5897880" y="310896"/>
-            <a:ext cx="4800600" cy="256032"/>
-          </a:xfrm>
-          <a:prstGeom prst="rect">
-            <a:avLst/>
-          </a:prstGeom>
-          <a:noFill/>
-        </p:spPr>
-        <p:txBody>
-          <a:bodyPr wrap="none" lIns="9144" rIns="9144" tIns="9144" bIns="9144" anchor="t">
-            <a:spAutoFit/>
-          </a:bodyPr>
-          <a:lstStyle/>
-          <a:p>
-            <a:pPr algn="r">
-              <a:spcAft>
-                <a:spcPts val="0"/>
-              </a:spcAft>
-              <a:defRPr sz="680" b="1">
-                <a:solidFill>
-                  <a:srgbClr val="4F6B00"/>
-                </a:solidFill>
-                <a:latin typeface="Inter"/>
-              </a:defRPr>
-            </a:pPr>
-            <a:r>
-              <a:rPr>
-                <a:latin typeface="Inter"/>
-              </a:rPr>
-              <a:t>Illustrative, Gradient Maintained — demo data, not the client's holdings or managers</a:t>
-            </a:r>
-          </a:p>
-        </p:txBody>
-      </p:sp>
-      <p:sp>
-        <p:nvSpPr>
-          <p:cNvPr id="5" name="TextBox 4"/>
-          <p:cNvSpPr txBox="1"/>
-          <p:nvPr/>
-        </p:nvSpPr>
-        <p:spPr>
-          <a:xfrm>
             <a:off x="640080" y="566928"/>
             <a:ext cx="10058400" cy="530352"/>
           </a:xfrm>
@@ -5598,7 +5340,7 @@
       </p:sp>
       <p:sp>
         <p:nvSpPr>
-          <p:cNvPr id="6" name="Rectangle 5"/>
+          <p:cNvPr id="5" name="Rectangle 4"/>
           <p:cNvSpPr/>
           <p:nvPr/>
         </p:nvSpPr>
@@ -5647,7 +5389,7 @@
       </p:sp>
       <p:sp>
         <p:nvSpPr>
-          <p:cNvPr id="7" name="Rectangle 6"/>
+          <p:cNvPr id="6" name="Rectangle 5"/>
           <p:cNvSpPr/>
           <p:nvPr/>
         </p:nvSpPr>
@@ -5696,7 +5438,7 @@
       </p:sp>
       <p:sp>
         <p:nvSpPr>
-          <p:cNvPr id="8" name="TextBox 7"/>
+          <p:cNvPr id="7" name="TextBox 6"/>
           <p:cNvSpPr txBox="1"/>
           <p:nvPr/>
         </p:nvSpPr>
@@ -5738,7 +5480,7 @@
       </p:sp>
       <p:sp>
         <p:nvSpPr>
-          <p:cNvPr id="9" name="TextBox 8"/>
+          <p:cNvPr id="8" name="TextBox 7"/>
           <p:cNvSpPr txBox="1"/>
           <p:nvPr/>
         </p:nvSpPr>
@@ -5780,7 +5522,7 @@
       </p:sp>
       <p:graphicFrame>
         <p:nvGraphicFramePr>
-          <p:cNvPr id="10" name="Chart 9"/>
+          <p:cNvPr id="9" name="Chart 8"/>
           <p:cNvGraphicFramePr>
             <a:graphicFrameLocks noGrp="1"/>
           </p:cNvGraphicFramePr>
@@ -5798,7 +5540,7 @@
       </p:graphicFrame>
       <p:sp>
         <p:nvSpPr>
-          <p:cNvPr id="11" name="Rectangle 10"/>
+          <p:cNvPr id="10" name="Rectangle 9"/>
           <p:cNvSpPr/>
           <p:nvPr/>
         </p:nvSpPr>
@@ -5847,7 +5589,7 @@
       </p:sp>
       <p:sp>
         <p:nvSpPr>
-          <p:cNvPr id="12" name="TextBox 11"/>
+          <p:cNvPr id="11" name="TextBox 10"/>
           <p:cNvSpPr txBox="1"/>
           <p:nvPr/>
         </p:nvSpPr>
@@ -5889,7 +5631,7 @@
       </p:sp>
       <p:sp>
         <p:nvSpPr>
-          <p:cNvPr id="13" name="TextBox 12"/>
+          <p:cNvPr id="12" name="TextBox 11"/>
           <p:cNvSpPr txBox="1"/>
           <p:nvPr/>
         </p:nvSpPr>
@@ -5931,7 +5673,7 @@
       </p:sp>
       <p:sp>
         <p:nvSpPr>
-          <p:cNvPr id="14" name="TextBox 13"/>
+          <p:cNvPr id="13" name="TextBox 12"/>
           <p:cNvSpPr txBox="1"/>
           <p:nvPr/>
         </p:nvSpPr>
@@ -6047,7 +5789,7 @@
         <p:spPr>
           <a:xfrm>
             <a:off x="640080" y="329184"/>
-            <a:ext cx="5303520" cy="182880"/>
+            <a:ext cx="9875520" cy="182880"/>
           </a:xfrm>
           <a:prstGeom prst="rect">
             <a:avLst/>
@@ -6088,48 +5830,6 @@
         </p:nvSpPr>
         <p:spPr>
           <a:xfrm>
-            <a:off x="5897880" y="310896"/>
-            <a:ext cx="4800600" cy="256032"/>
-          </a:xfrm>
-          <a:prstGeom prst="rect">
-            <a:avLst/>
-          </a:prstGeom>
-          <a:noFill/>
-        </p:spPr>
-        <p:txBody>
-          <a:bodyPr wrap="none" lIns="9144" rIns="9144" tIns="9144" bIns="9144" anchor="t">
-            <a:spAutoFit/>
-          </a:bodyPr>
-          <a:lstStyle/>
-          <a:p>
-            <a:pPr algn="r">
-              <a:spcAft>
-                <a:spcPts val="0"/>
-              </a:spcAft>
-              <a:defRPr sz="680" b="1">
-                <a:solidFill>
-                  <a:srgbClr val="4F6B00"/>
-                </a:solidFill>
-                <a:latin typeface="Inter"/>
-              </a:defRPr>
-            </a:pPr>
-            <a:r>
-              <a:rPr>
-                <a:latin typeface="Inter"/>
-              </a:rPr>
-              <a:t>Illustrative, Gradient Maintained — demo data, not the client's holdings or managers</a:t>
-            </a:r>
-          </a:p>
-        </p:txBody>
-      </p:sp>
-      <p:sp>
-        <p:nvSpPr>
-          <p:cNvPr id="5" name="TextBox 4"/>
-          <p:cNvSpPr txBox="1"/>
-          <p:nvPr/>
-        </p:nvSpPr>
-        <p:spPr>
-          <a:xfrm>
             <a:off x="640080" y="566928"/>
             <a:ext cx="10058400" cy="530352"/>
           </a:xfrm>
@@ -6166,7 +5866,7 @@
       </p:sp>
       <p:sp>
         <p:nvSpPr>
-          <p:cNvPr id="6" name="Rectangle 5"/>
+          <p:cNvPr id="5" name="Rectangle 4"/>
           <p:cNvSpPr/>
           <p:nvPr/>
         </p:nvSpPr>
@@ -6215,7 +5915,7 @@
       </p:sp>
       <p:sp>
         <p:nvSpPr>
-          <p:cNvPr id="7" name="Rectangle 6"/>
+          <p:cNvPr id="6" name="Rectangle 5"/>
           <p:cNvSpPr/>
           <p:nvPr/>
         </p:nvSpPr>
@@ -6264,7 +5964,7 @@
       </p:sp>
       <p:sp>
         <p:nvSpPr>
-          <p:cNvPr id="8" name="TextBox 7"/>
+          <p:cNvPr id="7" name="TextBox 6"/>
           <p:cNvSpPr txBox="1"/>
           <p:nvPr/>
         </p:nvSpPr>
@@ -6306,7 +6006,7 @@
       </p:sp>
       <p:sp>
         <p:nvSpPr>
-          <p:cNvPr id="9" name="TextBox 8"/>
+          <p:cNvPr id="8" name="TextBox 7"/>
           <p:cNvSpPr txBox="1"/>
           <p:nvPr/>
         </p:nvSpPr>
@@ -6348,7 +6048,7 @@
       </p:sp>
       <p:graphicFrame>
         <p:nvGraphicFramePr>
-          <p:cNvPr id="10" name="Table 9"/>
+          <p:cNvPr id="9" name="Table 8"/>
           <p:cNvGraphicFramePr>
             <a:graphicFrameLocks noGrp="1"/>
           </p:cNvGraphicFramePr>
@@ -7034,7 +6734,7 @@
       </p:graphicFrame>
       <p:sp>
         <p:nvSpPr>
-          <p:cNvPr id="11" name="Rectangle 10"/>
+          <p:cNvPr id="10" name="Rectangle 9"/>
           <p:cNvSpPr/>
           <p:nvPr/>
         </p:nvSpPr>
@@ -7083,7 +6783,7 @@
       </p:sp>
       <p:sp>
         <p:nvSpPr>
-          <p:cNvPr id="12" name="Rectangle 11"/>
+          <p:cNvPr id="11" name="Rectangle 10"/>
           <p:cNvSpPr/>
           <p:nvPr/>
         </p:nvSpPr>
@@ -7132,7 +6832,7 @@
       </p:sp>
       <p:sp>
         <p:nvSpPr>
-          <p:cNvPr id="13" name="TextBox 12"/>
+          <p:cNvPr id="12" name="TextBox 11"/>
           <p:cNvSpPr txBox="1"/>
           <p:nvPr/>
         </p:nvSpPr>
@@ -7174,7 +6874,7 @@
       </p:sp>
       <p:sp>
         <p:nvSpPr>
-          <p:cNvPr id="14" name="TextBox 13"/>
+          <p:cNvPr id="13" name="TextBox 12"/>
           <p:cNvSpPr txBox="1"/>
           <p:nvPr/>
         </p:nvSpPr>
@@ -7216,7 +6916,7 @@
       </p:sp>
       <p:sp>
         <p:nvSpPr>
-          <p:cNvPr id="15" name="TextBox 14"/>
+          <p:cNvPr id="14" name="TextBox 13"/>
           <p:cNvSpPr txBox="1"/>
           <p:nvPr/>
         </p:nvSpPr>
@@ -7258,7 +6958,7 @@
       </p:sp>
       <p:sp>
         <p:nvSpPr>
-          <p:cNvPr id="16" name="Rectangle 15"/>
+          <p:cNvPr id="15" name="Rectangle 14"/>
           <p:cNvSpPr/>
           <p:nvPr/>
         </p:nvSpPr>
@@ -7307,7 +7007,7 @@
       </p:sp>
       <p:sp>
         <p:nvSpPr>
-          <p:cNvPr id="17" name="TextBox 16"/>
+          <p:cNvPr id="16" name="TextBox 15"/>
           <p:cNvSpPr txBox="1"/>
           <p:nvPr/>
         </p:nvSpPr>
@@ -7349,7 +7049,7 @@
       </p:sp>
       <p:sp>
         <p:nvSpPr>
-          <p:cNvPr id="18" name="TextBox 17"/>
+          <p:cNvPr id="17" name="TextBox 16"/>
           <p:cNvSpPr txBox="1"/>
           <p:nvPr/>
         </p:nvSpPr>
@@ -7391,7 +7091,7 @@
       </p:sp>
       <p:sp>
         <p:nvSpPr>
-          <p:cNvPr id="19" name="TextBox 18"/>
+          <p:cNvPr id="18" name="TextBox 17"/>
           <p:cNvSpPr txBox="1"/>
           <p:nvPr/>
         </p:nvSpPr>
@@ -7506,48 +7206,6 @@
         </p:nvSpPr>
         <p:spPr>
           <a:xfrm>
-            <a:off x="5897880" y="310896"/>
-            <a:ext cx="4800600" cy="256032"/>
-          </a:xfrm>
-          <a:prstGeom prst="rect">
-            <a:avLst/>
-          </a:prstGeom>
-          <a:noFill/>
-        </p:spPr>
-        <p:txBody>
-          <a:bodyPr wrap="none" lIns="9144" rIns="9144" tIns="9144" bIns="9144" anchor="t">
-            <a:spAutoFit/>
-          </a:bodyPr>
-          <a:lstStyle/>
-          <a:p>
-            <a:pPr algn="r">
-              <a:spcAft>
-                <a:spcPts val="0"/>
-              </a:spcAft>
-              <a:defRPr sz="680" b="1">
-                <a:solidFill>
-                  <a:srgbClr val="4F6B00"/>
-                </a:solidFill>
-                <a:latin typeface="Inter"/>
-              </a:defRPr>
-            </a:pPr>
-            <a:r>
-              <a:rPr>
-                <a:latin typeface="Inter"/>
-              </a:rPr>
-              <a:t>Illustrative, Gradient Maintained — demo data, not the client's holdings or managers</a:t>
-            </a:r>
-          </a:p>
-        </p:txBody>
-      </p:sp>
-      <p:sp>
-        <p:nvSpPr>
-          <p:cNvPr id="4" name="TextBox 3"/>
-          <p:cNvSpPr txBox="1"/>
-          <p:nvPr/>
-        </p:nvSpPr>
-        <p:spPr>
-          <a:xfrm>
             <a:off x="640080" y="566928"/>
             <a:ext cx="10058400" cy="530352"/>
           </a:xfrm>
@@ -7584,7 +7242,7 @@
       </p:sp>
       <p:sp>
         <p:nvSpPr>
-          <p:cNvPr id="5" name="Rectangle 4"/>
+          <p:cNvPr id="4" name="Rectangle 3"/>
           <p:cNvSpPr/>
           <p:nvPr/>
         </p:nvSpPr>
@@ -7633,7 +7291,7 @@
       </p:sp>
       <p:sp>
         <p:nvSpPr>
-          <p:cNvPr id="6" name="Rectangle 5"/>
+          <p:cNvPr id="5" name="Rectangle 4"/>
           <p:cNvSpPr/>
           <p:nvPr/>
         </p:nvSpPr>
@@ -7682,7 +7340,7 @@
       </p:sp>
       <p:sp>
         <p:nvSpPr>
-          <p:cNvPr id="7" name="TextBox 6"/>
+          <p:cNvPr id="6" name="TextBox 5"/>
           <p:cNvSpPr txBox="1"/>
           <p:nvPr/>
         </p:nvSpPr>
@@ -7724,7 +7382,7 @@
       </p:sp>
       <p:sp>
         <p:nvSpPr>
-          <p:cNvPr id="8" name="TextBox 7"/>
+          <p:cNvPr id="7" name="TextBox 6"/>
           <p:cNvSpPr txBox="1"/>
           <p:nvPr/>
         </p:nvSpPr>
@@ -7766,7 +7424,7 @@
       </p:sp>
       <p:graphicFrame>
         <p:nvGraphicFramePr>
-          <p:cNvPr id="9" name="Chart 8"/>
+          <p:cNvPr id="8" name="Chart 7"/>
           <p:cNvGraphicFramePr>
             <a:graphicFrameLocks noGrp="1"/>
           </p:cNvGraphicFramePr>
@@ -7784,7 +7442,7 @@
       </p:graphicFrame>
       <p:sp>
         <p:nvSpPr>
-          <p:cNvPr id="10" name="Rectangle 9"/>
+          <p:cNvPr id="9" name="Rectangle 8"/>
           <p:cNvSpPr/>
           <p:nvPr/>
         </p:nvSpPr>
@@ -7833,7 +7491,7 @@
       </p:sp>
       <p:sp>
         <p:nvSpPr>
-          <p:cNvPr id="11" name="TextBox 10"/>
+          <p:cNvPr id="10" name="TextBox 9"/>
           <p:cNvSpPr txBox="1"/>
           <p:nvPr/>
         </p:nvSpPr>
@@ -7875,7 +7533,7 @@
       </p:sp>
       <p:sp>
         <p:nvSpPr>
-          <p:cNvPr id="12" name="TextBox 11"/>
+          <p:cNvPr id="11" name="TextBox 10"/>
           <p:cNvSpPr txBox="1"/>
           <p:nvPr/>
         </p:nvSpPr>
@@ -7917,7 +7575,7 @@
       </p:sp>
       <p:sp>
         <p:nvSpPr>
-          <p:cNvPr id="13" name="TextBox 12"/>
+          <p:cNvPr id="12" name="TextBox 11"/>
           <p:cNvSpPr txBox="1"/>
           <p:nvPr/>
         </p:nvSpPr>
@@ -8032,48 +7690,6 @@
         </p:nvSpPr>
         <p:spPr>
           <a:xfrm>
-            <a:off x="5897880" y="310896"/>
-            <a:ext cx="4800600" cy="256032"/>
-          </a:xfrm>
-          <a:prstGeom prst="rect">
-            <a:avLst/>
-          </a:prstGeom>
-          <a:noFill/>
-        </p:spPr>
-        <p:txBody>
-          <a:bodyPr wrap="none" lIns="9144" rIns="9144" tIns="9144" bIns="9144" anchor="t">
-            <a:spAutoFit/>
-          </a:bodyPr>
-          <a:lstStyle/>
-          <a:p>
-            <a:pPr algn="r">
-              <a:spcAft>
-                <a:spcPts val="0"/>
-              </a:spcAft>
-              <a:defRPr sz="680" b="1">
-                <a:solidFill>
-                  <a:srgbClr val="4F6B00"/>
-                </a:solidFill>
-                <a:latin typeface="Inter"/>
-              </a:defRPr>
-            </a:pPr>
-            <a:r>
-              <a:rPr>
-                <a:latin typeface="Inter"/>
-              </a:rPr>
-              <a:t>Illustrative, Gradient Maintained — demo data, not the client's holdings or managers</a:t>
-            </a:r>
-          </a:p>
-        </p:txBody>
-      </p:sp>
-      <p:sp>
-        <p:nvSpPr>
-          <p:cNvPr id="4" name="TextBox 3"/>
-          <p:cNvSpPr txBox="1"/>
-          <p:nvPr/>
-        </p:nvSpPr>
-        <p:spPr>
-          <a:xfrm>
             <a:off x="640080" y="566928"/>
             <a:ext cx="10058400" cy="530352"/>
           </a:xfrm>
@@ -8110,7 +7726,7 @@
       </p:sp>
       <p:sp>
         <p:nvSpPr>
-          <p:cNvPr id="5" name="Rectangle 4"/>
+          <p:cNvPr id="4" name="Rectangle 3"/>
           <p:cNvSpPr/>
           <p:nvPr/>
         </p:nvSpPr>
@@ -8159,7 +7775,7 @@
       </p:sp>
       <p:sp>
         <p:nvSpPr>
-          <p:cNvPr id="6" name="Rectangle 5"/>
+          <p:cNvPr id="5" name="Rectangle 4"/>
           <p:cNvSpPr/>
           <p:nvPr/>
         </p:nvSpPr>
@@ -8208,7 +7824,7 @@
       </p:sp>
       <p:sp>
         <p:nvSpPr>
-          <p:cNvPr id="7" name="TextBox 6"/>
+          <p:cNvPr id="6" name="TextBox 5"/>
           <p:cNvSpPr txBox="1"/>
           <p:nvPr/>
         </p:nvSpPr>
@@ -8250,7 +7866,7 @@
       </p:sp>
       <p:sp>
         <p:nvSpPr>
-          <p:cNvPr id="8" name="TextBox 7"/>
+          <p:cNvPr id="7" name="TextBox 6"/>
           <p:cNvSpPr txBox="1"/>
           <p:nvPr/>
         </p:nvSpPr>
@@ -8292,7 +7908,7 @@
       </p:sp>
       <p:graphicFrame>
         <p:nvGraphicFramePr>
-          <p:cNvPr id="9" name="Table 8"/>
+          <p:cNvPr id="8" name="Table 7"/>
           <p:cNvGraphicFramePr>
             <a:graphicFrameLocks noGrp="1"/>
           </p:cNvGraphicFramePr>
@@ -8869,7 +8485,7 @@
       </p:graphicFrame>
       <p:sp>
         <p:nvSpPr>
-          <p:cNvPr id="10" name="TextBox 9"/>
+          <p:cNvPr id="9" name="TextBox 8"/>
           <p:cNvSpPr txBox="1"/>
           <p:nvPr/>
         </p:nvSpPr>
@@ -8911,7 +8527,7 @@
       </p:sp>
       <p:graphicFrame>
         <p:nvGraphicFramePr>
-          <p:cNvPr id="11" name="Table 10"/>
+          <p:cNvPr id="10" name="Table 9"/>
           <p:cNvGraphicFramePr>
             <a:graphicFrameLocks noGrp="1"/>
           </p:cNvGraphicFramePr>
@@ -9353,7 +8969,7 @@
       </p:graphicFrame>
       <p:sp>
         <p:nvSpPr>
-          <p:cNvPr id="12" name="TextBox 11"/>
+          <p:cNvPr id="11" name="TextBox 10"/>
           <p:cNvSpPr txBox="1"/>
           <p:nvPr/>
         </p:nvSpPr>
@@ -9395,7 +9011,7 @@
       </p:sp>
       <p:sp>
         <p:nvSpPr>
-          <p:cNvPr id="13" name="Rectangle 12"/>
+          <p:cNvPr id="12" name="Rectangle 11"/>
           <p:cNvSpPr/>
           <p:nvPr/>
         </p:nvSpPr>
@@ -9444,7 +9060,7 @@
       </p:sp>
       <p:sp>
         <p:nvSpPr>
-          <p:cNvPr id="14" name="TextBox 13"/>
+          <p:cNvPr id="13" name="TextBox 12"/>
           <p:cNvSpPr txBox="1"/>
           <p:nvPr/>
         </p:nvSpPr>
@@ -9486,7 +9102,7 @@
       </p:sp>
       <p:sp>
         <p:nvSpPr>
-          <p:cNvPr id="15" name="TextBox 14"/>
+          <p:cNvPr id="14" name="TextBox 13"/>
           <p:cNvSpPr txBox="1"/>
           <p:nvPr/>
         </p:nvSpPr>
@@ -9528,7 +9144,7 @@
       </p:sp>
       <p:sp>
         <p:nvSpPr>
-          <p:cNvPr id="16" name="TextBox 15"/>
+          <p:cNvPr id="15" name="TextBox 14"/>
           <p:cNvSpPr txBox="1"/>
           <p:nvPr/>
         </p:nvSpPr>
@@ -9643,48 +9259,6 @@
         </p:nvSpPr>
         <p:spPr>
           <a:xfrm>
-            <a:off x="5897880" y="310896"/>
-            <a:ext cx="4800600" cy="256032"/>
-          </a:xfrm>
-          <a:prstGeom prst="rect">
-            <a:avLst/>
-          </a:prstGeom>
-          <a:noFill/>
-        </p:spPr>
-        <p:txBody>
-          <a:bodyPr wrap="none" lIns="9144" rIns="9144" tIns="9144" bIns="9144" anchor="t">
-            <a:spAutoFit/>
-          </a:bodyPr>
-          <a:lstStyle/>
-          <a:p>
-            <a:pPr algn="r">
-              <a:spcAft>
-                <a:spcPts val="0"/>
-              </a:spcAft>
-              <a:defRPr sz="680" b="1">
-                <a:solidFill>
-                  <a:srgbClr val="4F6B00"/>
-                </a:solidFill>
-                <a:latin typeface="Inter"/>
-              </a:defRPr>
-            </a:pPr>
-            <a:r>
-              <a:rPr>
-                <a:latin typeface="Inter"/>
-              </a:rPr>
-              <a:t>Illustrative, Gradient Maintained — demo data, not the client's holdings or managers</a:t>
-            </a:r>
-          </a:p>
-        </p:txBody>
-      </p:sp>
-      <p:sp>
-        <p:nvSpPr>
-          <p:cNvPr id="4" name="TextBox 3"/>
-          <p:cNvSpPr txBox="1"/>
-          <p:nvPr/>
-        </p:nvSpPr>
-        <p:spPr>
-          <a:xfrm>
             <a:off x="640080" y="566928"/>
             <a:ext cx="10058400" cy="530352"/>
           </a:xfrm>
@@ -9721,7 +9295,7 @@
       </p:sp>
       <p:sp>
         <p:nvSpPr>
-          <p:cNvPr id="5" name="Rectangle 4"/>
+          <p:cNvPr id="4" name="Rectangle 3"/>
           <p:cNvSpPr/>
           <p:nvPr/>
         </p:nvSpPr>
@@ -9770,7 +9344,7 @@
       </p:sp>
       <p:sp>
         <p:nvSpPr>
-          <p:cNvPr id="6" name="Rectangle 5"/>
+          <p:cNvPr id="5" name="Rectangle 4"/>
           <p:cNvSpPr/>
           <p:nvPr/>
         </p:nvSpPr>
@@ -9819,7 +9393,7 @@
       </p:sp>
       <p:sp>
         <p:nvSpPr>
-          <p:cNvPr id="7" name="TextBox 6"/>
+          <p:cNvPr id="6" name="TextBox 5"/>
           <p:cNvSpPr txBox="1"/>
           <p:nvPr/>
         </p:nvSpPr>
@@ -9861,7 +9435,7 @@
       </p:sp>
       <p:graphicFrame>
         <p:nvGraphicFramePr>
-          <p:cNvPr id="8" name="Table 7"/>
+          <p:cNvPr id="7" name="Table 6"/>
           <p:cNvGraphicFramePr>
             <a:graphicFrameLocks noGrp="1"/>
           </p:cNvGraphicFramePr>
@@ -10111,7 +9685,7 @@
       </p:graphicFrame>
       <p:sp>
         <p:nvSpPr>
-          <p:cNvPr id="9" name="Rectangle 8"/>
+          <p:cNvPr id="8" name="Rectangle 7"/>
           <p:cNvSpPr/>
           <p:nvPr/>
         </p:nvSpPr>
@@ -10160,7 +9734,7 @@
       </p:sp>
       <p:sp>
         <p:nvSpPr>
-          <p:cNvPr id="10" name="TextBox 9"/>
+          <p:cNvPr id="9" name="TextBox 8"/>
           <p:cNvSpPr txBox="1"/>
           <p:nvPr/>
         </p:nvSpPr>
@@ -10202,7 +9776,7 @@
       </p:sp>
       <p:sp>
         <p:nvSpPr>
-          <p:cNvPr id="11" name="TextBox 10"/>
+          <p:cNvPr id="10" name="TextBox 9"/>
           <p:cNvSpPr txBox="1"/>
           <p:nvPr/>
         </p:nvSpPr>
@@ -10244,7 +9818,7 @@
       </p:sp>
       <p:sp>
         <p:nvSpPr>
-          <p:cNvPr id="12" name="TextBox 11"/>
+          <p:cNvPr id="11" name="TextBox 10"/>
           <p:cNvSpPr txBox="1"/>
           <p:nvPr/>
         </p:nvSpPr>
@@ -10360,7 +9934,7 @@
         <p:spPr>
           <a:xfrm>
             <a:off x="640080" y="329184"/>
-            <a:ext cx="5303520" cy="182880"/>
+            <a:ext cx="9875520" cy="182880"/>
           </a:xfrm>
           <a:prstGeom prst="rect">
             <a:avLst/>
@@ -10401,48 +9975,6 @@
         </p:nvSpPr>
         <p:spPr>
           <a:xfrm>
-            <a:off x="5897880" y="310896"/>
-            <a:ext cx="4800600" cy="256032"/>
-          </a:xfrm>
-          <a:prstGeom prst="rect">
-            <a:avLst/>
-          </a:prstGeom>
-          <a:noFill/>
-        </p:spPr>
-        <p:txBody>
-          <a:bodyPr wrap="none" lIns="9144" rIns="9144" tIns="9144" bIns="9144" anchor="t">
-            <a:spAutoFit/>
-          </a:bodyPr>
-          <a:lstStyle/>
-          <a:p>
-            <a:pPr algn="r">
-              <a:spcAft>
-                <a:spcPts val="0"/>
-              </a:spcAft>
-              <a:defRPr sz="680" b="1">
-                <a:solidFill>
-                  <a:srgbClr val="4F6B00"/>
-                </a:solidFill>
-                <a:latin typeface="Inter"/>
-              </a:defRPr>
-            </a:pPr>
-            <a:r>
-              <a:rPr>
-                <a:latin typeface="Inter"/>
-              </a:rPr>
-              <a:t>Illustrative, Gradient Maintained — demo data, not the client's holdings or managers</a:t>
-            </a:r>
-          </a:p>
-        </p:txBody>
-      </p:sp>
-      <p:sp>
-        <p:nvSpPr>
-          <p:cNvPr id="5" name="TextBox 4"/>
-          <p:cNvSpPr txBox="1"/>
-          <p:nvPr/>
-        </p:nvSpPr>
-        <p:spPr>
-          <a:xfrm>
             <a:off x="640080" y="566928"/>
             <a:ext cx="10058400" cy="530352"/>
           </a:xfrm>
@@ -10479,7 +10011,7 @@
       </p:sp>
       <p:sp>
         <p:nvSpPr>
-          <p:cNvPr id="6" name="Rectangle 5"/>
+          <p:cNvPr id="5" name="Rectangle 4"/>
           <p:cNvSpPr/>
           <p:nvPr/>
         </p:nvSpPr>
@@ -10528,7 +10060,7 @@
       </p:sp>
       <p:sp>
         <p:nvSpPr>
-          <p:cNvPr id="7" name="Rectangle 6"/>
+          <p:cNvPr id="6" name="Rectangle 5"/>
           <p:cNvSpPr/>
           <p:nvPr/>
         </p:nvSpPr>
@@ -10577,7 +10109,7 @@
       </p:sp>
       <p:sp>
         <p:nvSpPr>
-          <p:cNvPr id="8" name="TextBox 7"/>
+          <p:cNvPr id="7" name="TextBox 6"/>
           <p:cNvSpPr txBox="1"/>
           <p:nvPr/>
         </p:nvSpPr>
@@ -10619,7 +10151,7 @@
       </p:sp>
       <p:sp>
         <p:nvSpPr>
-          <p:cNvPr id="9" name="Rectangle 8"/>
+          <p:cNvPr id="8" name="Rectangle 7"/>
           <p:cNvSpPr/>
           <p:nvPr/>
         </p:nvSpPr>
@@ -10668,7 +10200,7 @@
       </p:sp>
       <p:sp>
         <p:nvSpPr>
-          <p:cNvPr id="10" name="Rectangle 9"/>
+          <p:cNvPr id="9" name="Rectangle 8"/>
           <p:cNvSpPr/>
           <p:nvPr/>
         </p:nvSpPr>
@@ -10717,7 +10249,7 @@
       </p:sp>
       <p:sp>
         <p:nvSpPr>
-          <p:cNvPr id="11" name="TextBox 10"/>
+          <p:cNvPr id="10" name="TextBox 9"/>
           <p:cNvSpPr txBox="1"/>
           <p:nvPr/>
         </p:nvSpPr>
@@ -10759,7 +10291,7 @@
       </p:sp>
       <p:sp>
         <p:nvSpPr>
-          <p:cNvPr id="12" name="TextBox 11"/>
+          <p:cNvPr id="11" name="TextBox 10"/>
           <p:cNvSpPr txBox="1"/>
           <p:nvPr/>
         </p:nvSpPr>
@@ -10801,7 +10333,7 @@
       </p:sp>
       <p:sp>
         <p:nvSpPr>
-          <p:cNvPr id="13" name="TextBox 12"/>
+          <p:cNvPr id="12" name="TextBox 11"/>
           <p:cNvSpPr txBox="1"/>
           <p:nvPr/>
         </p:nvSpPr>
@@ -10843,7 +10375,7 @@
       </p:sp>
       <p:sp>
         <p:nvSpPr>
-          <p:cNvPr id="14" name="Rectangle 13"/>
+          <p:cNvPr id="13" name="Rectangle 12"/>
           <p:cNvSpPr/>
           <p:nvPr/>
         </p:nvSpPr>
@@ -10892,7 +10424,7 @@
       </p:sp>
       <p:sp>
         <p:nvSpPr>
-          <p:cNvPr id="15" name="Rectangle 14"/>
+          <p:cNvPr id="14" name="Rectangle 13"/>
           <p:cNvSpPr/>
           <p:nvPr/>
         </p:nvSpPr>
@@ -10941,7 +10473,7 @@
       </p:sp>
       <p:sp>
         <p:nvSpPr>
-          <p:cNvPr id="16" name="TextBox 15"/>
+          <p:cNvPr id="15" name="TextBox 14"/>
           <p:cNvSpPr txBox="1"/>
           <p:nvPr/>
         </p:nvSpPr>
@@ -10983,7 +10515,7 @@
       </p:sp>
       <p:sp>
         <p:nvSpPr>
-          <p:cNvPr id="17" name="TextBox 16"/>
+          <p:cNvPr id="16" name="TextBox 15"/>
           <p:cNvSpPr txBox="1"/>
           <p:nvPr/>
         </p:nvSpPr>
@@ -11025,7 +10557,7 @@
       </p:sp>
       <p:sp>
         <p:nvSpPr>
-          <p:cNvPr id="18" name="TextBox 17"/>
+          <p:cNvPr id="17" name="TextBox 16"/>
           <p:cNvSpPr txBox="1"/>
           <p:nvPr/>
         </p:nvSpPr>
@@ -11067,7 +10599,7 @@
       </p:sp>
       <p:sp>
         <p:nvSpPr>
-          <p:cNvPr id="19" name="Rectangle 18"/>
+          <p:cNvPr id="18" name="Rectangle 17"/>
           <p:cNvSpPr/>
           <p:nvPr/>
         </p:nvSpPr>
@@ -11116,7 +10648,7 @@
       </p:sp>
       <p:sp>
         <p:nvSpPr>
-          <p:cNvPr id="20" name="Rectangle 19"/>
+          <p:cNvPr id="19" name="Rectangle 18"/>
           <p:cNvSpPr/>
           <p:nvPr/>
         </p:nvSpPr>
@@ -11165,7 +10697,7 @@
       </p:sp>
       <p:sp>
         <p:nvSpPr>
-          <p:cNvPr id="21" name="TextBox 20"/>
+          <p:cNvPr id="20" name="TextBox 19"/>
           <p:cNvSpPr txBox="1"/>
           <p:nvPr/>
         </p:nvSpPr>
@@ -11207,7 +10739,7 @@
       </p:sp>
       <p:sp>
         <p:nvSpPr>
-          <p:cNvPr id="22" name="TextBox 21"/>
+          <p:cNvPr id="21" name="TextBox 20"/>
           <p:cNvSpPr txBox="1"/>
           <p:nvPr/>
         </p:nvSpPr>
@@ -11249,7 +10781,7 @@
       </p:sp>
       <p:sp>
         <p:nvSpPr>
-          <p:cNvPr id="23" name="TextBox 22"/>
+          <p:cNvPr id="22" name="TextBox 21"/>
           <p:cNvSpPr txBox="1"/>
           <p:nvPr/>
         </p:nvSpPr>
@@ -11291,7 +10823,7 @@
       </p:sp>
       <p:sp>
         <p:nvSpPr>
-          <p:cNvPr id="24" name="Rectangle 23"/>
+          <p:cNvPr id="23" name="Rectangle 22"/>
           <p:cNvSpPr/>
           <p:nvPr/>
         </p:nvSpPr>
@@ -11340,7 +10872,7 @@
       </p:sp>
       <p:sp>
         <p:nvSpPr>
-          <p:cNvPr id="25" name="Rectangle 24"/>
+          <p:cNvPr id="24" name="Rectangle 23"/>
           <p:cNvSpPr/>
           <p:nvPr/>
         </p:nvSpPr>
@@ -11389,7 +10921,7 @@
       </p:sp>
       <p:sp>
         <p:nvSpPr>
-          <p:cNvPr id="26" name="TextBox 25"/>
+          <p:cNvPr id="25" name="TextBox 24"/>
           <p:cNvSpPr txBox="1"/>
           <p:nvPr/>
         </p:nvSpPr>
@@ -11431,7 +10963,7 @@
       </p:sp>
       <p:sp>
         <p:nvSpPr>
-          <p:cNvPr id="27" name="TextBox 26"/>
+          <p:cNvPr id="26" name="TextBox 25"/>
           <p:cNvSpPr txBox="1"/>
           <p:nvPr/>
         </p:nvSpPr>
@@ -11473,7 +11005,7 @@
       </p:sp>
       <p:sp>
         <p:nvSpPr>
-          <p:cNvPr id="28" name="TextBox 27"/>
+          <p:cNvPr id="27" name="TextBox 26"/>
           <p:cNvSpPr txBox="1"/>
           <p:nvPr/>
         </p:nvSpPr>
@@ -11515,7 +11047,7 @@
       </p:sp>
       <p:sp>
         <p:nvSpPr>
-          <p:cNvPr id="29" name="Rectangle 28"/>
+          <p:cNvPr id="28" name="Rectangle 27"/>
           <p:cNvSpPr/>
           <p:nvPr/>
         </p:nvSpPr>
@@ -11564,7 +11096,7 @@
       </p:sp>
       <p:sp>
         <p:nvSpPr>
-          <p:cNvPr id="30" name="TextBox 29"/>
+          <p:cNvPr id="29" name="TextBox 28"/>
           <p:cNvSpPr txBox="1"/>
           <p:nvPr/>
         </p:nvSpPr>
@@ -11606,7 +11138,7 @@
       </p:sp>
       <p:sp>
         <p:nvSpPr>
-          <p:cNvPr id="31" name="TextBox 30"/>
+          <p:cNvPr id="30" name="TextBox 29"/>
           <p:cNvSpPr txBox="1"/>
           <p:nvPr/>
         </p:nvSpPr>
@@ -11648,7 +11180,7 @@
       </p:sp>
       <p:sp>
         <p:nvSpPr>
-          <p:cNvPr id="32" name="TextBox 31"/>
+          <p:cNvPr id="31" name="TextBox 30"/>
           <p:cNvSpPr txBox="1"/>
           <p:nvPr/>
         </p:nvSpPr>
@@ -11764,7 +11296,7 @@
         <p:spPr>
           <a:xfrm>
             <a:off x="640080" y="329184"/>
-            <a:ext cx="5303520" cy="182880"/>
+            <a:ext cx="9875520" cy="182880"/>
           </a:xfrm>
           <a:prstGeom prst="rect">
             <a:avLst/>
@@ -11805,48 +11337,6 @@
         </p:nvSpPr>
         <p:spPr>
           <a:xfrm>
-            <a:off x="5897880" y="310896"/>
-            <a:ext cx="4800600" cy="256032"/>
-          </a:xfrm>
-          <a:prstGeom prst="rect">
-            <a:avLst/>
-          </a:prstGeom>
-          <a:noFill/>
-        </p:spPr>
-        <p:txBody>
-          <a:bodyPr wrap="none" lIns="9144" rIns="9144" tIns="9144" bIns="9144" anchor="t">
-            <a:spAutoFit/>
-          </a:bodyPr>
-          <a:lstStyle/>
-          <a:p>
-            <a:pPr algn="r">
-              <a:spcAft>
-                <a:spcPts val="0"/>
-              </a:spcAft>
-              <a:defRPr sz="680" b="1">
-                <a:solidFill>
-                  <a:srgbClr val="4F6B00"/>
-                </a:solidFill>
-                <a:latin typeface="Inter"/>
-              </a:defRPr>
-            </a:pPr>
-            <a:r>
-              <a:rPr>
-                <a:latin typeface="Inter"/>
-              </a:rPr>
-              <a:t>Illustrative, Gradient Maintained — demo data, not the client's holdings or managers</a:t>
-            </a:r>
-          </a:p>
-        </p:txBody>
-      </p:sp>
-      <p:sp>
-        <p:nvSpPr>
-          <p:cNvPr id="5" name="TextBox 4"/>
-          <p:cNvSpPr txBox="1"/>
-          <p:nvPr/>
-        </p:nvSpPr>
-        <p:spPr>
-          <a:xfrm>
             <a:off x="640080" y="566928"/>
             <a:ext cx="10058400" cy="530352"/>
           </a:xfrm>
@@ -11883,7 +11373,7 @@
       </p:sp>
       <p:sp>
         <p:nvSpPr>
-          <p:cNvPr id="6" name="Rectangle 5"/>
+          <p:cNvPr id="5" name="Rectangle 4"/>
           <p:cNvSpPr/>
           <p:nvPr/>
         </p:nvSpPr>
@@ -11932,7 +11422,7 @@
       </p:sp>
       <p:sp>
         <p:nvSpPr>
-          <p:cNvPr id="7" name="Rectangle 6"/>
+          <p:cNvPr id="6" name="Rectangle 5"/>
           <p:cNvSpPr/>
           <p:nvPr/>
         </p:nvSpPr>
@@ -11981,7 +11471,7 @@
       </p:sp>
       <p:sp>
         <p:nvSpPr>
-          <p:cNvPr id="8" name="TextBox 7"/>
+          <p:cNvPr id="7" name="TextBox 6"/>
           <p:cNvSpPr txBox="1"/>
           <p:nvPr/>
         </p:nvSpPr>
@@ -12023,7 +11513,7 @@
       </p:sp>
       <p:sp>
         <p:nvSpPr>
-          <p:cNvPr id="9" name="TextBox 8"/>
+          <p:cNvPr id="8" name="TextBox 7"/>
           <p:cNvSpPr txBox="1"/>
           <p:nvPr/>
         </p:nvSpPr>
@@ -12065,7 +11555,7 @@
       </p:sp>
       <p:graphicFrame>
         <p:nvGraphicFramePr>
-          <p:cNvPr id="10" name="Chart 9"/>
+          <p:cNvPr id="9" name="Chart 8"/>
           <p:cNvGraphicFramePr>
             <a:graphicFrameLocks noGrp="1"/>
           </p:cNvGraphicFramePr>
@@ -12083,7 +11573,7 @@
       </p:graphicFrame>
       <p:sp>
         <p:nvSpPr>
-          <p:cNvPr id="11" name="Rectangle 10"/>
+          <p:cNvPr id="10" name="Rectangle 9"/>
           <p:cNvSpPr/>
           <p:nvPr/>
         </p:nvSpPr>
@@ -12132,7 +11622,7 @@
       </p:sp>
       <p:sp>
         <p:nvSpPr>
-          <p:cNvPr id="12" name="TextBox 11"/>
+          <p:cNvPr id="11" name="TextBox 10"/>
           <p:cNvSpPr txBox="1"/>
           <p:nvPr/>
         </p:nvSpPr>
@@ -12174,7 +11664,7 @@
       </p:sp>
       <p:sp>
         <p:nvSpPr>
-          <p:cNvPr id="13" name="TextBox 12"/>
+          <p:cNvPr id="12" name="TextBox 11"/>
           <p:cNvSpPr txBox="1"/>
           <p:nvPr/>
         </p:nvSpPr>
@@ -12216,7 +11706,7 @@
       </p:sp>
       <p:sp>
         <p:nvSpPr>
-          <p:cNvPr id="14" name="TextBox 13"/>
+          <p:cNvPr id="13" name="TextBox 12"/>
           <p:cNvSpPr txBox="1"/>
           <p:nvPr/>
         </p:nvSpPr>
@@ -12332,7 +11822,7 @@
         <p:spPr>
           <a:xfrm>
             <a:off x="640080" y="329184"/>
-            <a:ext cx="5303520" cy="182880"/>
+            <a:ext cx="9875520" cy="182880"/>
           </a:xfrm>
           <a:prstGeom prst="rect">
             <a:avLst/>
@@ -12373,48 +11863,6 @@
         </p:nvSpPr>
         <p:spPr>
           <a:xfrm>
-            <a:off x="5897880" y="310896"/>
-            <a:ext cx="4800600" cy="256032"/>
-          </a:xfrm>
-          <a:prstGeom prst="rect">
-            <a:avLst/>
-          </a:prstGeom>
-          <a:noFill/>
-        </p:spPr>
-        <p:txBody>
-          <a:bodyPr wrap="none" lIns="9144" rIns="9144" tIns="9144" bIns="9144" anchor="t">
-            <a:spAutoFit/>
-          </a:bodyPr>
-          <a:lstStyle/>
-          <a:p>
-            <a:pPr algn="r">
-              <a:spcAft>
-                <a:spcPts val="0"/>
-              </a:spcAft>
-              <a:defRPr sz="680" b="1">
-                <a:solidFill>
-                  <a:srgbClr val="4F6B00"/>
-                </a:solidFill>
-                <a:latin typeface="Inter"/>
-              </a:defRPr>
-            </a:pPr>
-            <a:r>
-              <a:rPr>
-                <a:latin typeface="Inter"/>
-              </a:rPr>
-              <a:t>Illustrative, Gradient Maintained — demo data, not the client's holdings or managers</a:t>
-            </a:r>
-          </a:p>
-        </p:txBody>
-      </p:sp>
-      <p:sp>
-        <p:nvSpPr>
-          <p:cNvPr id="5" name="TextBox 4"/>
-          <p:cNvSpPr txBox="1"/>
-          <p:nvPr/>
-        </p:nvSpPr>
-        <p:spPr>
-          <a:xfrm>
             <a:off x="640080" y="566928"/>
             <a:ext cx="10058400" cy="530352"/>
           </a:xfrm>
@@ -12451,7 +11899,7 @@
       </p:sp>
       <p:sp>
         <p:nvSpPr>
-          <p:cNvPr id="6" name="Rectangle 5"/>
+          <p:cNvPr id="5" name="Rectangle 4"/>
           <p:cNvSpPr/>
           <p:nvPr/>
         </p:nvSpPr>
@@ -12500,7 +11948,7 @@
       </p:sp>
       <p:sp>
         <p:nvSpPr>
-          <p:cNvPr id="7" name="Rectangle 6"/>
+          <p:cNvPr id="6" name="Rectangle 5"/>
           <p:cNvSpPr/>
           <p:nvPr/>
         </p:nvSpPr>
@@ -12549,7 +11997,7 @@
       </p:sp>
       <p:sp>
         <p:nvSpPr>
-          <p:cNvPr id="8" name="TextBox 7"/>
+          <p:cNvPr id="7" name="TextBox 6"/>
           <p:cNvSpPr txBox="1"/>
           <p:nvPr/>
         </p:nvSpPr>
@@ -12591,7 +12039,7 @@
       </p:sp>
       <p:sp>
         <p:nvSpPr>
-          <p:cNvPr id="9" name="TextBox 8"/>
+          <p:cNvPr id="8" name="TextBox 7"/>
           <p:cNvSpPr txBox="1"/>
           <p:nvPr/>
         </p:nvSpPr>
@@ -12633,7 +12081,7 @@
       </p:sp>
       <p:graphicFrame>
         <p:nvGraphicFramePr>
-          <p:cNvPr id="10" name="Table 9"/>
+          <p:cNvPr id="9" name="Table 8"/>
           <p:cNvGraphicFramePr>
             <a:graphicFrameLocks noGrp="1"/>
           </p:cNvGraphicFramePr>
@@ -13210,7 +12658,7 @@
       </p:graphicFrame>
       <p:sp>
         <p:nvSpPr>
-          <p:cNvPr id="11" name="Rectangle 10"/>
+          <p:cNvPr id="10" name="Rectangle 9"/>
           <p:cNvSpPr/>
           <p:nvPr/>
         </p:nvSpPr>
@@ -13259,7 +12707,7 @@
       </p:sp>
       <p:sp>
         <p:nvSpPr>
-          <p:cNvPr id="12" name="Rectangle 11"/>
+          <p:cNvPr id="11" name="Rectangle 10"/>
           <p:cNvSpPr/>
           <p:nvPr/>
         </p:nvSpPr>
@@ -13308,7 +12756,7 @@
       </p:sp>
       <p:sp>
         <p:nvSpPr>
-          <p:cNvPr id="13" name="TextBox 12"/>
+          <p:cNvPr id="12" name="TextBox 11"/>
           <p:cNvSpPr txBox="1"/>
           <p:nvPr/>
         </p:nvSpPr>
@@ -13350,7 +12798,7 @@
       </p:sp>
       <p:sp>
         <p:nvSpPr>
-          <p:cNvPr id="14" name="TextBox 13"/>
+          <p:cNvPr id="13" name="TextBox 12"/>
           <p:cNvSpPr txBox="1"/>
           <p:nvPr/>
         </p:nvSpPr>
@@ -13392,7 +12840,7 @@
       </p:sp>
       <p:sp>
         <p:nvSpPr>
-          <p:cNvPr id="15" name="TextBox 14"/>
+          <p:cNvPr id="14" name="TextBox 13"/>
           <p:cNvSpPr txBox="1"/>
           <p:nvPr/>
         </p:nvSpPr>
@@ -13434,7 +12882,7 @@
       </p:sp>
       <p:sp>
         <p:nvSpPr>
-          <p:cNvPr id="16" name="Rectangle 15"/>
+          <p:cNvPr id="15" name="Rectangle 14"/>
           <p:cNvSpPr/>
           <p:nvPr/>
         </p:nvSpPr>
@@ -13483,7 +12931,7 @@
       </p:sp>
       <p:sp>
         <p:nvSpPr>
-          <p:cNvPr id="17" name="TextBox 16"/>
+          <p:cNvPr id="16" name="TextBox 15"/>
           <p:cNvSpPr txBox="1"/>
           <p:nvPr/>
         </p:nvSpPr>
@@ -13525,7 +12973,7 @@
       </p:sp>
       <p:sp>
         <p:nvSpPr>
-          <p:cNvPr id="18" name="TextBox 17"/>
+          <p:cNvPr id="17" name="TextBox 16"/>
           <p:cNvSpPr txBox="1"/>
           <p:nvPr/>
         </p:nvSpPr>
@@ -13567,7 +13015,7 @@
       </p:sp>
       <p:sp>
         <p:nvSpPr>
-          <p:cNvPr id="19" name="TextBox 18"/>
+          <p:cNvPr id="18" name="TextBox 17"/>
           <p:cNvSpPr txBox="1"/>
           <p:nvPr/>
         </p:nvSpPr>
@@ -13683,7 +13131,7 @@
         <p:spPr>
           <a:xfrm>
             <a:off x="640080" y="329184"/>
-            <a:ext cx="5303520" cy="182880"/>
+            <a:ext cx="9875520" cy="182880"/>
           </a:xfrm>
           <a:prstGeom prst="rect">
             <a:avLst/>
@@ -13724,48 +13172,6 @@
         </p:nvSpPr>
         <p:spPr>
           <a:xfrm>
-            <a:off x="5897880" y="310896"/>
-            <a:ext cx="4800600" cy="256032"/>
-          </a:xfrm>
-          <a:prstGeom prst="rect">
-            <a:avLst/>
-          </a:prstGeom>
-          <a:noFill/>
-        </p:spPr>
-        <p:txBody>
-          <a:bodyPr wrap="none" lIns="9144" rIns="9144" tIns="9144" bIns="9144" anchor="t">
-            <a:spAutoFit/>
-          </a:bodyPr>
-          <a:lstStyle/>
-          <a:p>
-            <a:pPr algn="r">
-              <a:spcAft>
-                <a:spcPts val="0"/>
-              </a:spcAft>
-              <a:defRPr sz="680" b="1">
-                <a:solidFill>
-                  <a:srgbClr val="4F6B00"/>
-                </a:solidFill>
-                <a:latin typeface="Inter"/>
-              </a:defRPr>
-            </a:pPr>
-            <a:r>
-              <a:rPr>
-                <a:latin typeface="Inter"/>
-              </a:rPr>
-              <a:t>Illustrative, Gradient Maintained — demo data, not the client's holdings or managers</a:t>
-            </a:r>
-          </a:p>
-        </p:txBody>
-      </p:sp>
-      <p:sp>
-        <p:nvSpPr>
-          <p:cNvPr id="5" name="TextBox 4"/>
-          <p:cNvSpPr txBox="1"/>
-          <p:nvPr/>
-        </p:nvSpPr>
-        <p:spPr>
-          <a:xfrm>
             <a:off x="640080" y="566928"/>
             <a:ext cx="10058400" cy="530352"/>
           </a:xfrm>
@@ -13802,7 +13208,7 @@
       </p:sp>
       <p:sp>
         <p:nvSpPr>
-          <p:cNvPr id="6" name="Rectangle 5"/>
+          <p:cNvPr id="5" name="Rectangle 4"/>
           <p:cNvSpPr/>
           <p:nvPr/>
         </p:nvSpPr>
@@ -13851,7 +13257,7 @@
       </p:sp>
       <p:sp>
         <p:nvSpPr>
-          <p:cNvPr id="7" name="Rectangle 6"/>
+          <p:cNvPr id="6" name="Rectangle 5"/>
           <p:cNvSpPr/>
           <p:nvPr/>
         </p:nvSpPr>
@@ -13900,7 +13306,7 @@
       </p:sp>
       <p:sp>
         <p:nvSpPr>
-          <p:cNvPr id="8" name="TextBox 7"/>
+          <p:cNvPr id="7" name="TextBox 6"/>
           <p:cNvSpPr txBox="1"/>
           <p:nvPr/>
         </p:nvSpPr>
@@ -13942,7 +13348,7 @@
       </p:sp>
       <p:sp>
         <p:nvSpPr>
-          <p:cNvPr id="9" name="TextBox 8"/>
+          <p:cNvPr id="8" name="TextBox 7"/>
           <p:cNvSpPr txBox="1"/>
           <p:nvPr/>
         </p:nvSpPr>
@@ -13984,7 +13390,7 @@
       </p:sp>
       <p:graphicFrame>
         <p:nvGraphicFramePr>
-          <p:cNvPr id="10" name="Chart 9"/>
+          <p:cNvPr id="9" name="Chart 8"/>
           <p:cNvGraphicFramePr>
             <a:graphicFrameLocks noGrp="1"/>
           </p:cNvGraphicFramePr>
@@ -14002,7 +13408,7 @@
       </p:graphicFrame>
       <p:sp>
         <p:nvSpPr>
-          <p:cNvPr id="11" name="Rectangle 10"/>
+          <p:cNvPr id="10" name="Rectangle 9"/>
           <p:cNvSpPr/>
           <p:nvPr/>
         </p:nvSpPr>
@@ -14051,7 +13457,7 @@
       </p:sp>
       <p:sp>
         <p:nvSpPr>
-          <p:cNvPr id="12" name="TextBox 11"/>
+          <p:cNvPr id="11" name="TextBox 10"/>
           <p:cNvSpPr txBox="1"/>
           <p:nvPr/>
         </p:nvSpPr>
@@ -14093,7 +13499,7 @@
       </p:sp>
       <p:sp>
         <p:nvSpPr>
-          <p:cNvPr id="13" name="TextBox 12"/>
+          <p:cNvPr id="12" name="TextBox 11"/>
           <p:cNvSpPr txBox="1"/>
           <p:nvPr/>
         </p:nvSpPr>
@@ -14135,7 +13541,7 @@
       </p:sp>
       <p:sp>
         <p:nvSpPr>
-          <p:cNvPr id="14" name="TextBox 13"/>
+          <p:cNvPr id="13" name="TextBox 12"/>
           <p:cNvSpPr txBox="1"/>
           <p:nvPr/>
         </p:nvSpPr>
@@ -14251,7 +13657,7 @@
         <p:spPr>
           <a:xfrm>
             <a:off x="640080" y="329184"/>
-            <a:ext cx="5303520" cy="182880"/>
+            <a:ext cx="9875520" cy="182880"/>
           </a:xfrm>
           <a:prstGeom prst="rect">
             <a:avLst/>
@@ -14292,48 +13698,6 @@
         </p:nvSpPr>
         <p:spPr>
           <a:xfrm>
-            <a:off x="5897880" y="310896"/>
-            <a:ext cx="4800600" cy="256032"/>
-          </a:xfrm>
-          <a:prstGeom prst="rect">
-            <a:avLst/>
-          </a:prstGeom>
-          <a:noFill/>
-        </p:spPr>
-        <p:txBody>
-          <a:bodyPr wrap="none" lIns="9144" rIns="9144" tIns="9144" bIns="9144" anchor="t">
-            <a:spAutoFit/>
-          </a:bodyPr>
-          <a:lstStyle/>
-          <a:p>
-            <a:pPr algn="r">
-              <a:spcAft>
-                <a:spcPts val="0"/>
-              </a:spcAft>
-              <a:defRPr sz="680" b="1">
-                <a:solidFill>
-                  <a:srgbClr val="4F6B00"/>
-                </a:solidFill>
-                <a:latin typeface="Inter"/>
-              </a:defRPr>
-            </a:pPr>
-            <a:r>
-              <a:rPr>
-                <a:latin typeface="Inter"/>
-              </a:rPr>
-              <a:t>Illustrative, Gradient Maintained — demo data, not the client's holdings or managers</a:t>
-            </a:r>
-          </a:p>
-        </p:txBody>
-      </p:sp>
-      <p:sp>
-        <p:nvSpPr>
-          <p:cNvPr id="5" name="TextBox 4"/>
-          <p:cNvSpPr txBox="1"/>
-          <p:nvPr/>
-        </p:nvSpPr>
-        <p:spPr>
-          <a:xfrm>
             <a:off x="640080" y="566928"/>
             <a:ext cx="10058400" cy="530352"/>
           </a:xfrm>
@@ -14370,7 +13734,7 @@
       </p:sp>
       <p:sp>
         <p:nvSpPr>
-          <p:cNvPr id="6" name="Rectangle 5"/>
+          <p:cNvPr id="5" name="Rectangle 4"/>
           <p:cNvSpPr/>
           <p:nvPr/>
         </p:nvSpPr>
@@ -14419,7 +13783,7 @@
       </p:sp>
       <p:sp>
         <p:nvSpPr>
-          <p:cNvPr id="7" name="Rectangle 6"/>
+          <p:cNvPr id="6" name="Rectangle 5"/>
           <p:cNvSpPr/>
           <p:nvPr/>
         </p:nvSpPr>
@@ -14468,7 +13832,7 @@
       </p:sp>
       <p:sp>
         <p:nvSpPr>
-          <p:cNvPr id="8" name="TextBox 7"/>
+          <p:cNvPr id="7" name="TextBox 6"/>
           <p:cNvSpPr txBox="1"/>
           <p:nvPr/>
         </p:nvSpPr>
@@ -14510,7 +13874,7 @@
       </p:sp>
       <p:graphicFrame>
         <p:nvGraphicFramePr>
-          <p:cNvPr id="9" name="Table 8"/>
+          <p:cNvPr id="8" name="Table 7"/>
           <p:cNvGraphicFramePr>
             <a:graphicFrameLocks noGrp="1"/>
           </p:cNvGraphicFramePr>
@@ -14816,7 +14180,7 @@
       </p:graphicFrame>
       <p:sp>
         <p:nvSpPr>
-          <p:cNvPr id="10" name="Rectangle 9"/>
+          <p:cNvPr id="9" name="Rectangle 8"/>
           <p:cNvSpPr/>
           <p:nvPr/>
         </p:nvSpPr>
@@ -14865,7 +14229,7 @@
       </p:sp>
       <p:sp>
         <p:nvSpPr>
-          <p:cNvPr id="11" name="TextBox 10"/>
+          <p:cNvPr id="10" name="TextBox 9"/>
           <p:cNvSpPr txBox="1"/>
           <p:nvPr/>
         </p:nvSpPr>
@@ -14907,7 +14271,7 @@
       </p:sp>
       <p:sp>
         <p:nvSpPr>
-          <p:cNvPr id="12" name="TextBox 11"/>
+          <p:cNvPr id="11" name="TextBox 10"/>
           <p:cNvSpPr txBox="1"/>
           <p:nvPr/>
         </p:nvSpPr>
@@ -14949,7 +14313,7 @@
       </p:sp>
       <p:sp>
         <p:nvSpPr>
-          <p:cNvPr id="13" name="TextBox 12"/>
+          <p:cNvPr id="12" name="TextBox 11"/>
           <p:cNvSpPr txBox="1"/>
           <p:nvPr/>
         </p:nvSpPr>
@@ -15064,48 +14428,6 @@
         </p:nvSpPr>
         <p:spPr>
           <a:xfrm>
-            <a:off x="5897880" y="310896"/>
-            <a:ext cx="4800600" cy="256032"/>
-          </a:xfrm>
-          <a:prstGeom prst="rect">
-            <a:avLst/>
-          </a:prstGeom>
-          <a:noFill/>
-        </p:spPr>
-        <p:txBody>
-          <a:bodyPr wrap="none" lIns="9144" rIns="9144" tIns="9144" bIns="9144" anchor="t">
-            <a:spAutoFit/>
-          </a:bodyPr>
-          <a:lstStyle/>
-          <a:p>
-            <a:pPr algn="r">
-              <a:spcAft>
-                <a:spcPts val="0"/>
-              </a:spcAft>
-              <a:defRPr sz="680" b="1">
-                <a:solidFill>
-                  <a:srgbClr val="4F6B00"/>
-                </a:solidFill>
-                <a:latin typeface="Inter"/>
-              </a:defRPr>
-            </a:pPr>
-            <a:r>
-              <a:rPr>
-                <a:latin typeface="Inter"/>
-              </a:rPr>
-              <a:t>Illustrative, Gradient Maintained — demo data, not the client's holdings or managers</a:t>
-            </a:r>
-          </a:p>
-        </p:txBody>
-      </p:sp>
-      <p:sp>
-        <p:nvSpPr>
-          <p:cNvPr id="4" name="TextBox 3"/>
-          <p:cNvSpPr txBox="1"/>
-          <p:nvPr/>
-        </p:nvSpPr>
-        <p:spPr>
-          <a:xfrm>
             <a:off x="640080" y="566928"/>
             <a:ext cx="10058400" cy="530352"/>
           </a:xfrm>
@@ -15142,7 +14464,7 @@
       </p:sp>
       <p:sp>
         <p:nvSpPr>
-          <p:cNvPr id="5" name="Rectangle 4"/>
+          <p:cNvPr id="4" name="Rectangle 3"/>
           <p:cNvSpPr/>
           <p:nvPr/>
         </p:nvSpPr>
@@ -15191,7 +14513,7 @@
       </p:sp>
       <p:sp>
         <p:nvSpPr>
-          <p:cNvPr id="6" name="Rectangle 5"/>
+          <p:cNvPr id="5" name="Rectangle 4"/>
           <p:cNvSpPr/>
           <p:nvPr/>
         </p:nvSpPr>
@@ -15240,7 +14562,7 @@
       </p:sp>
       <p:sp>
         <p:nvSpPr>
-          <p:cNvPr id="7" name="TextBox 6"/>
+          <p:cNvPr id="6" name="TextBox 5"/>
           <p:cNvSpPr txBox="1"/>
           <p:nvPr/>
         </p:nvSpPr>
@@ -15282,14 +14604,105 @@
       </p:sp>
       <p:sp>
         <p:nvSpPr>
-          <p:cNvPr id="8" name="Rectangle 7"/>
+          <p:cNvPr id="7" name="Rectangle 6"/>
           <p:cNvSpPr/>
           <p:nvPr/>
         </p:nvSpPr>
         <p:spPr>
           <a:xfrm>
-            <a:off x="640080" y="1325880"/>
-            <a:ext cx="10908792" cy="2430948"/>
+            <a:off x="640080" y="1399032"/>
+            <a:ext cx="73152" cy="972105"/>
+          </a:xfrm>
+          <a:prstGeom prst="rect">
+            <a:avLst/>
+          </a:prstGeom>
+          <a:solidFill>
+            <a:srgbClr val="F2A93B"/>
+          </a:solidFill>
+          <a:ln>
+            <a:solidFill>
+              <a:srgbClr val="F2A93B"/>
+            </a:solidFill>
+          </a:ln>
+        </p:spPr>
+        <p:style>
+          <a:lnRef idx="1">
+            <a:schemeClr val="accent1"/>
+          </a:lnRef>
+          <a:fillRef idx="3">
+            <a:schemeClr val="accent1"/>
+          </a:fillRef>
+          <a:effectRef idx="2">
+            <a:schemeClr val="accent1"/>
+          </a:effectRef>
+          <a:fontRef idx="minor">
+            <a:schemeClr val="lt1"/>
+          </a:fontRef>
+        </p:style>
+        <p:txBody>
+          <a:bodyPr rtlCol="0" anchor="ctr"/>
+          <a:lstStyle/>
+          <a:p>
+            <a:pPr algn="ctr">
+              <a:defRPr>
+                <a:latin typeface="Inter"/>
+              </a:defRPr>
+            </a:pPr>
+          </a:p>
+        </p:txBody>
+      </p:sp>
+      <p:sp>
+        <p:nvSpPr>
+          <p:cNvPr id="8" name="TextBox 7"/>
+          <p:cNvSpPr txBox="1"/>
+          <p:nvPr/>
+        </p:nvSpPr>
+        <p:spPr>
+          <a:xfrm>
+            <a:off x="896112" y="1371600"/>
+            <a:ext cx="10588752" cy="648677"/>
+          </a:xfrm>
+          <a:prstGeom prst="rect">
+            <a:avLst/>
+          </a:prstGeom>
+          <a:noFill/>
+        </p:spPr>
+        <p:txBody>
+          <a:bodyPr wrap="none" lIns="9144" rIns="9144" tIns="9144" bIns="9144" anchor="t">
+            <a:spAutoFit/>
+          </a:bodyPr>
+          <a:lstStyle/>
+          <a:p>
+            <a:pPr algn="l">
+              <a:spcAft>
+                <a:spcPts val="0"/>
+              </a:spcAft>
+              <a:defRPr sz="1800" b="1">
+                <a:solidFill>
+                  <a:srgbClr val="0D1117"/>
+                </a:solidFill>
+                <a:latin typeface="Inter"/>
+              </a:defRPr>
+            </a:pPr>
+            <a:r>
+              <a:rPr>
+                <a:latin typeface="Inter"/>
+              </a:rPr>
+              <a:t>Shift 3.0pp from core-plus credit to core bonds</a:t>
+            </a:r>
+          </a:p>
+        </p:txBody>
+      </p:sp>
+      <p:sp>
+        <p:nvSpPr>
+          <p:cNvPr id="9" name="Rectangle 8"/>
+          <p:cNvSpPr/>
+          <p:nvPr/>
+        </p:nvSpPr>
+        <p:spPr>
+          <a:xfrm>
+            <a:off x="640080" y="2554017"/>
+            <a:ext cx="10908792" cy="1806660"/>
           </a:xfrm>
           <a:prstGeom prst="rect">
             <a:avLst/>
@@ -15331,14 +14744,14 @@
       </p:sp>
       <p:sp>
         <p:nvSpPr>
-          <p:cNvPr id="9" name="Rectangle 8"/>
+          <p:cNvPr id="10" name="Rectangle 9"/>
           <p:cNvSpPr/>
           <p:nvPr/>
         </p:nvSpPr>
         <p:spPr>
           <a:xfrm>
-            <a:off x="640080" y="1325880"/>
-            <a:ext cx="54864" cy="2430948"/>
+            <a:off x="640080" y="2554017"/>
+            <a:ext cx="54864" cy="1806660"/>
           </a:xfrm>
           <a:prstGeom prst="rect">
             <a:avLst/>
@@ -15380,13 +14793,13 @@
       </p:sp>
       <p:sp>
         <p:nvSpPr>
-          <p:cNvPr id="10" name="TextBox 9"/>
+          <p:cNvPr id="11" name="TextBox 10"/>
           <p:cNvSpPr txBox="1"/>
           <p:nvPr/>
         </p:nvSpPr>
         <p:spPr>
           <a:xfrm>
-            <a:off x="804671" y="1435607"/>
+            <a:off x="804671" y="2663745"/>
             <a:ext cx="10616184" cy="228600"/>
           </a:xfrm>
           <a:prstGeom prst="rect">
@@ -15422,14 +14835,14 @@
       </p:sp>
       <p:sp>
         <p:nvSpPr>
-          <p:cNvPr id="11" name="TextBox 10"/>
+          <p:cNvPr id="12" name="TextBox 11"/>
           <p:cNvSpPr txBox="1"/>
           <p:nvPr/>
         </p:nvSpPr>
         <p:spPr>
           <a:xfrm>
-            <a:off x="804671" y="1719072"/>
-            <a:ext cx="10616184" cy="1946316"/>
+            <a:off x="804671" y="2947209"/>
+            <a:ext cx="10616184" cy="1322028"/>
           </a:xfrm>
           <a:prstGeom prst="rect">
             <a:avLst/>
@@ -15464,14 +14877,14 @@
       </p:sp>
       <p:sp>
         <p:nvSpPr>
-          <p:cNvPr id="12" name="Rectangle 11"/>
+          <p:cNvPr id="13" name="Rectangle 12"/>
           <p:cNvSpPr/>
           <p:nvPr/>
         </p:nvSpPr>
         <p:spPr>
           <a:xfrm>
-            <a:off x="640080" y="3866556"/>
-            <a:ext cx="2644902" cy="2351363"/>
+            <a:off x="640080" y="4470405"/>
+            <a:ext cx="2644902" cy="1747514"/>
           </a:xfrm>
           <a:prstGeom prst="rect">
             <a:avLst/>
@@ -15513,13 +14926,13 @@
       </p:sp>
       <p:sp>
         <p:nvSpPr>
-          <p:cNvPr id="13" name="Rectangle 12"/>
+          <p:cNvPr id="14" name="Rectangle 13"/>
           <p:cNvSpPr/>
           <p:nvPr/>
         </p:nvSpPr>
         <p:spPr>
           <a:xfrm>
-            <a:off x="640080" y="3866556"/>
+            <a:off x="640080" y="4470405"/>
             <a:ext cx="2644902" cy="45720"/>
           </a:xfrm>
           <a:prstGeom prst="rect">
@@ -15562,13 +14975,13 @@
       </p:sp>
       <p:sp>
         <p:nvSpPr>
-          <p:cNvPr id="14" name="TextBox 13"/>
+          <p:cNvPr id="15" name="TextBox 14"/>
           <p:cNvSpPr txBox="1"/>
           <p:nvPr/>
         </p:nvSpPr>
         <p:spPr>
           <a:xfrm>
-            <a:off x="749808" y="3994572"/>
+            <a:off x="749808" y="4598421"/>
             <a:ext cx="2425446" cy="201168"/>
           </a:xfrm>
           <a:prstGeom prst="rect">
@@ -15604,13 +15017,13 @@
       </p:sp>
       <p:sp>
         <p:nvSpPr>
-          <p:cNvPr id="15" name="TextBox 14"/>
+          <p:cNvPr id="16" name="TextBox 15"/>
           <p:cNvSpPr txBox="1"/>
           <p:nvPr/>
         </p:nvSpPr>
         <p:spPr>
           <a:xfrm>
-            <a:off x="749808" y="4250604"/>
+            <a:off x="749808" y="4854453"/>
             <a:ext cx="2425446" cy="475488"/>
           </a:xfrm>
           <a:prstGeom prst="rect">
@@ -15646,7 +15059,7 @@
       </p:sp>
       <p:sp>
         <p:nvSpPr>
-          <p:cNvPr id="16" name="TextBox 15"/>
+          <p:cNvPr id="17" name="TextBox 16"/>
           <p:cNvSpPr txBox="1"/>
           <p:nvPr/>
         </p:nvSpPr>
@@ -15688,14 +15101,14 @@
       </p:sp>
       <p:sp>
         <p:nvSpPr>
-          <p:cNvPr id="17" name="Rectangle 16"/>
+          <p:cNvPr id="18" name="Rectangle 17"/>
           <p:cNvSpPr/>
           <p:nvPr/>
         </p:nvSpPr>
         <p:spPr>
           <a:xfrm>
-            <a:off x="3394710" y="3866556"/>
-            <a:ext cx="2644902" cy="2351363"/>
+            <a:off x="3394710" y="4470405"/>
+            <a:ext cx="2644902" cy="1747514"/>
           </a:xfrm>
           <a:prstGeom prst="rect">
             <a:avLst/>
@@ -15737,13 +15150,13 @@
       </p:sp>
       <p:sp>
         <p:nvSpPr>
-          <p:cNvPr id="18" name="Rectangle 17"/>
+          <p:cNvPr id="19" name="Rectangle 18"/>
           <p:cNvSpPr/>
           <p:nvPr/>
         </p:nvSpPr>
         <p:spPr>
           <a:xfrm>
-            <a:off x="3394710" y="3866556"/>
+            <a:off x="3394710" y="4470405"/>
             <a:ext cx="2644902" cy="45720"/>
           </a:xfrm>
           <a:prstGeom prst="rect">
@@ -15786,13 +15199,13 @@
       </p:sp>
       <p:sp>
         <p:nvSpPr>
-          <p:cNvPr id="19" name="TextBox 18"/>
+          <p:cNvPr id="20" name="TextBox 19"/>
           <p:cNvSpPr txBox="1"/>
           <p:nvPr/>
         </p:nvSpPr>
         <p:spPr>
           <a:xfrm>
-            <a:off x="3504438" y="3994572"/>
+            <a:off x="3504438" y="4598421"/>
             <a:ext cx="2425446" cy="201168"/>
           </a:xfrm>
           <a:prstGeom prst="rect">
@@ -15828,13 +15241,13 @@
       </p:sp>
       <p:sp>
         <p:nvSpPr>
-          <p:cNvPr id="20" name="TextBox 19"/>
+          <p:cNvPr id="21" name="TextBox 20"/>
           <p:cNvSpPr txBox="1"/>
           <p:nvPr/>
         </p:nvSpPr>
         <p:spPr>
           <a:xfrm>
-            <a:off x="3504438" y="4250604"/>
+            <a:off x="3504438" y="4854453"/>
             <a:ext cx="2425446" cy="475488"/>
           </a:xfrm>
           <a:prstGeom prst="rect">
@@ -15870,7 +15283,7 @@
       </p:sp>
       <p:sp>
         <p:nvSpPr>
-          <p:cNvPr id="21" name="TextBox 20"/>
+          <p:cNvPr id="22" name="TextBox 21"/>
           <p:cNvSpPr txBox="1"/>
           <p:nvPr/>
         </p:nvSpPr>
@@ -15912,14 +15325,14 @@
       </p:sp>
       <p:sp>
         <p:nvSpPr>
-          <p:cNvPr id="22" name="Rectangle 21"/>
+          <p:cNvPr id="23" name="Rectangle 22"/>
           <p:cNvSpPr/>
           <p:nvPr/>
         </p:nvSpPr>
         <p:spPr>
           <a:xfrm>
-            <a:off x="6149340" y="3866556"/>
-            <a:ext cx="2644902" cy="2351363"/>
+            <a:off x="6149340" y="4470405"/>
+            <a:ext cx="2644902" cy="1747514"/>
           </a:xfrm>
           <a:prstGeom prst="rect">
             <a:avLst/>
@@ -15961,13 +15374,13 @@
       </p:sp>
       <p:sp>
         <p:nvSpPr>
-          <p:cNvPr id="23" name="Rectangle 22"/>
+          <p:cNvPr id="24" name="Rectangle 23"/>
           <p:cNvSpPr/>
           <p:nvPr/>
         </p:nvSpPr>
         <p:spPr>
           <a:xfrm>
-            <a:off x="6149340" y="3866556"/>
+            <a:off x="6149340" y="4470405"/>
             <a:ext cx="2644902" cy="45720"/>
           </a:xfrm>
           <a:prstGeom prst="rect">
@@ -16010,13 +15423,13 @@
       </p:sp>
       <p:sp>
         <p:nvSpPr>
-          <p:cNvPr id="24" name="TextBox 23"/>
+          <p:cNvPr id="25" name="TextBox 24"/>
           <p:cNvSpPr txBox="1"/>
           <p:nvPr/>
         </p:nvSpPr>
         <p:spPr>
           <a:xfrm>
-            <a:off x="6259068" y="3994572"/>
+            <a:off x="6259068" y="4598421"/>
             <a:ext cx="2425446" cy="201168"/>
           </a:xfrm>
           <a:prstGeom prst="rect">
@@ -16052,13 +15465,13 @@
       </p:sp>
       <p:sp>
         <p:nvSpPr>
-          <p:cNvPr id="25" name="TextBox 24"/>
+          <p:cNvPr id="26" name="TextBox 25"/>
           <p:cNvSpPr txBox="1"/>
           <p:nvPr/>
         </p:nvSpPr>
         <p:spPr>
           <a:xfrm>
-            <a:off x="6259068" y="4250604"/>
+            <a:off x="6259068" y="4854453"/>
             <a:ext cx="2425446" cy="475488"/>
           </a:xfrm>
           <a:prstGeom prst="rect">
@@ -16094,7 +15507,7 @@
       </p:sp>
       <p:sp>
         <p:nvSpPr>
-          <p:cNvPr id="26" name="TextBox 25"/>
+          <p:cNvPr id="27" name="TextBox 26"/>
           <p:cNvSpPr txBox="1"/>
           <p:nvPr/>
         </p:nvSpPr>
@@ -16136,14 +15549,14 @@
       </p:sp>
       <p:sp>
         <p:nvSpPr>
-          <p:cNvPr id="27" name="Rectangle 26"/>
+          <p:cNvPr id="28" name="Rectangle 27"/>
           <p:cNvSpPr/>
           <p:nvPr/>
         </p:nvSpPr>
         <p:spPr>
           <a:xfrm>
-            <a:off x="8903970" y="3866556"/>
-            <a:ext cx="2644902" cy="2351363"/>
+            <a:off x="8903970" y="4470405"/>
+            <a:ext cx="2644902" cy="1747514"/>
           </a:xfrm>
           <a:prstGeom prst="rect">
             <a:avLst/>
@@ -16185,13 +15598,13 @@
       </p:sp>
       <p:sp>
         <p:nvSpPr>
-          <p:cNvPr id="28" name="Rectangle 27"/>
+          <p:cNvPr id="29" name="Rectangle 28"/>
           <p:cNvSpPr/>
           <p:nvPr/>
         </p:nvSpPr>
         <p:spPr>
           <a:xfrm>
-            <a:off x="8903970" y="3866556"/>
+            <a:off x="8903970" y="4470405"/>
             <a:ext cx="2644902" cy="45720"/>
           </a:xfrm>
           <a:prstGeom prst="rect">
@@ -16234,13 +15647,13 @@
       </p:sp>
       <p:sp>
         <p:nvSpPr>
-          <p:cNvPr id="29" name="TextBox 28"/>
+          <p:cNvPr id="30" name="TextBox 29"/>
           <p:cNvSpPr txBox="1"/>
           <p:nvPr/>
         </p:nvSpPr>
         <p:spPr>
           <a:xfrm>
-            <a:off x="9013698" y="3994572"/>
+            <a:off x="9013698" y="4598421"/>
             <a:ext cx="2425446" cy="201168"/>
           </a:xfrm>
           <a:prstGeom prst="rect">
@@ -16276,13 +15689,13 @@
       </p:sp>
       <p:sp>
         <p:nvSpPr>
-          <p:cNvPr id="30" name="TextBox 29"/>
+          <p:cNvPr id="31" name="TextBox 30"/>
           <p:cNvSpPr txBox="1"/>
           <p:nvPr/>
         </p:nvSpPr>
         <p:spPr>
           <a:xfrm>
-            <a:off x="9013698" y="4250604"/>
+            <a:off x="9013698" y="4854453"/>
             <a:ext cx="2425446" cy="475488"/>
           </a:xfrm>
           <a:prstGeom prst="rect">
@@ -16318,7 +15731,7 @@
       </p:sp>
       <p:sp>
         <p:nvSpPr>
-          <p:cNvPr id="31" name="TextBox 30"/>
+          <p:cNvPr id="32" name="TextBox 31"/>
           <p:cNvSpPr txBox="1"/>
           <p:nvPr/>
         </p:nvSpPr>
@@ -16360,7 +15773,7 @@
       </p:sp>
       <p:sp>
         <p:nvSpPr>
-          <p:cNvPr id="32" name="Rectangle 31"/>
+          <p:cNvPr id="33" name="Rectangle 32"/>
           <p:cNvSpPr/>
           <p:nvPr/>
         </p:nvSpPr>
@@ -16409,7 +15822,7 @@
       </p:sp>
       <p:sp>
         <p:nvSpPr>
-          <p:cNvPr id="33" name="TextBox 32"/>
+          <p:cNvPr id="34" name="TextBox 33"/>
           <p:cNvSpPr txBox="1"/>
           <p:nvPr/>
         </p:nvSpPr>
@@ -16451,7 +15864,7 @@
       </p:sp>
       <p:sp>
         <p:nvSpPr>
-          <p:cNvPr id="34" name="TextBox 33"/>
+          <p:cNvPr id="35" name="TextBox 34"/>
           <p:cNvSpPr txBox="1"/>
           <p:nvPr/>
         </p:nvSpPr>
@@ -16493,7 +15906,7 @@
       </p:sp>
       <p:sp>
         <p:nvSpPr>
-          <p:cNvPr id="35" name="TextBox 34"/>
+          <p:cNvPr id="36" name="TextBox 35"/>
           <p:cNvSpPr txBox="1"/>
           <p:nvPr/>
         </p:nvSpPr>
@@ -16609,7 +16022,7 @@
         <p:spPr>
           <a:xfrm>
             <a:off x="640080" y="329184"/>
-            <a:ext cx="5303520" cy="182880"/>
+            <a:ext cx="9875520" cy="182880"/>
           </a:xfrm>
           <a:prstGeom prst="rect">
             <a:avLst/>
@@ -16650,48 +16063,6 @@
         </p:nvSpPr>
         <p:spPr>
           <a:xfrm>
-            <a:off x="5897880" y="310896"/>
-            <a:ext cx="4800600" cy="256032"/>
-          </a:xfrm>
-          <a:prstGeom prst="rect">
-            <a:avLst/>
-          </a:prstGeom>
-          <a:noFill/>
-        </p:spPr>
-        <p:txBody>
-          <a:bodyPr wrap="none" lIns="9144" rIns="9144" tIns="9144" bIns="9144" anchor="t">
-            <a:spAutoFit/>
-          </a:bodyPr>
-          <a:lstStyle/>
-          <a:p>
-            <a:pPr algn="r">
-              <a:spcAft>
-                <a:spcPts val="0"/>
-              </a:spcAft>
-              <a:defRPr sz="680" b="1">
-                <a:solidFill>
-                  <a:srgbClr val="4F6B00"/>
-                </a:solidFill>
-                <a:latin typeface="Inter"/>
-              </a:defRPr>
-            </a:pPr>
-            <a:r>
-              <a:rPr>
-                <a:latin typeface="Inter"/>
-              </a:rPr>
-              <a:t>Illustrative, Gradient Maintained — demo data, not the client's holdings or managers</a:t>
-            </a:r>
-          </a:p>
-        </p:txBody>
-      </p:sp>
-      <p:sp>
-        <p:nvSpPr>
-          <p:cNvPr id="5" name="TextBox 4"/>
-          <p:cNvSpPr txBox="1"/>
-          <p:nvPr/>
-        </p:nvSpPr>
-        <p:spPr>
-          <a:xfrm>
             <a:off x="640080" y="566928"/>
             <a:ext cx="10058400" cy="530352"/>
           </a:xfrm>
@@ -16728,7 +16099,7 @@
       </p:sp>
       <p:sp>
         <p:nvSpPr>
-          <p:cNvPr id="6" name="Rectangle 5"/>
+          <p:cNvPr id="5" name="Rectangle 4"/>
           <p:cNvSpPr/>
           <p:nvPr/>
         </p:nvSpPr>
@@ -16777,7 +16148,7 @@
       </p:sp>
       <p:sp>
         <p:nvSpPr>
-          <p:cNvPr id="7" name="Rectangle 6"/>
+          <p:cNvPr id="6" name="Rectangle 5"/>
           <p:cNvSpPr/>
           <p:nvPr/>
         </p:nvSpPr>
@@ -16826,7 +16197,7 @@
       </p:sp>
       <p:sp>
         <p:nvSpPr>
-          <p:cNvPr id="8" name="TextBox 7"/>
+          <p:cNvPr id="7" name="TextBox 6"/>
           <p:cNvSpPr txBox="1"/>
           <p:nvPr/>
         </p:nvSpPr>
@@ -16868,7 +16239,7 @@
       </p:sp>
       <p:sp>
         <p:nvSpPr>
-          <p:cNvPr id="9" name="TextBox 8"/>
+          <p:cNvPr id="8" name="TextBox 7"/>
           <p:cNvSpPr txBox="1"/>
           <p:nvPr/>
         </p:nvSpPr>
@@ -16910,7 +16281,7 @@
       </p:sp>
       <p:graphicFrame>
         <p:nvGraphicFramePr>
-          <p:cNvPr id="10" name="Table 9"/>
+          <p:cNvPr id="9" name="Table 8"/>
           <p:cNvGraphicFramePr>
             <a:graphicFrameLocks noGrp="1"/>
           </p:cNvGraphicFramePr>
@@ -17269,7 +16640,7 @@
       </p:graphicFrame>
       <p:sp>
         <p:nvSpPr>
-          <p:cNvPr id="11" name="Rectangle 10"/>
+          <p:cNvPr id="10" name="Rectangle 9"/>
           <p:cNvSpPr/>
           <p:nvPr/>
         </p:nvSpPr>
@@ -17318,7 +16689,7 @@
       </p:sp>
       <p:sp>
         <p:nvSpPr>
-          <p:cNvPr id="12" name="TextBox 11"/>
+          <p:cNvPr id="11" name="TextBox 10"/>
           <p:cNvSpPr txBox="1"/>
           <p:nvPr/>
         </p:nvSpPr>
@@ -17360,7 +16731,7 @@
       </p:sp>
       <p:sp>
         <p:nvSpPr>
-          <p:cNvPr id="13" name="TextBox 12"/>
+          <p:cNvPr id="12" name="TextBox 11"/>
           <p:cNvSpPr txBox="1"/>
           <p:nvPr/>
         </p:nvSpPr>
@@ -17402,7 +16773,7 @@
       </p:sp>
       <p:sp>
         <p:nvSpPr>
-          <p:cNvPr id="14" name="TextBox 13"/>
+          <p:cNvPr id="13" name="TextBox 12"/>
           <p:cNvSpPr txBox="1"/>
           <p:nvPr/>
         </p:nvSpPr>
@@ -17518,7 +16889,7 @@
         <p:spPr>
           <a:xfrm>
             <a:off x="640080" y="329184"/>
-            <a:ext cx="5303520" cy="182880"/>
+            <a:ext cx="9875520" cy="182880"/>
           </a:xfrm>
           <a:prstGeom prst="rect">
             <a:avLst/>
@@ -17559,48 +16930,6 @@
         </p:nvSpPr>
         <p:spPr>
           <a:xfrm>
-            <a:off x="5897880" y="310896"/>
-            <a:ext cx="4800600" cy="256032"/>
-          </a:xfrm>
-          <a:prstGeom prst="rect">
-            <a:avLst/>
-          </a:prstGeom>
-          <a:noFill/>
-        </p:spPr>
-        <p:txBody>
-          <a:bodyPr wrap="none" lIns="9144" rIns="9144" tIns="9144" bIns="9144" anchor="t">
-            <a:spAutoFit/>
-          </a:bodyPr>
-          <a:lstStyle/>
-          <a:p>
-            <a:pPr algn="r">
-              <a:spcAft>
-                <a:spcPts val="0"/>
-              </a:spcAft>
-              <a:defRPr sz="680" b="1">
-                <a:solidFill>
-                  <a:srgbClr val="4F6B00"/>
-                </a:solidFill>
-                <a:latin typeface="Inter"/>
-              </a:defRPr>
-            </a:pPr>
-            <a:r>
-              <a:rPr>
-                <a:latin typeface="Inter"/>
-              </a:rPr>
-              <a:t>Illustrative, Gradient Maintained — demo data, not the client's holdings or managers</a:t>
-            </a:r>
-          </a:p>
-        </p:txBody>
-      </p:sp>
-      <p:sp>
-        <p:nvSpPr>
-          <p:cNvPr id="5" name="TextBox 4"/>
-          <p:cNvSpPr txBox="1"/>
-          <p:nvPr/>
-        </p:nvSpPr>
-        <p:spPr>
-          <a:xfrm>
             <a:off x="640080" y="566928"/>
             <a:ext cx="10058400" cy="530352"/>
           </a:xfrm>
@@ -17637,7 +16966,7 @@
       </p:sp>
       <p:sp>
         <p:nvSpPr>
-          <p:cNvPr id="6" name="Rectangle 5"/>
+          <p:cNvPr id="5" name="Rectangle 4"/>
           <p:cNvSpPr/>
           <p:nvPr/>
         </p:nvSpPr>
@@ -17686,7 +17015,7 @@
       </p:sp>
       <p:sp>
         <p:nvSpPr>
-          <p:cNvPr id="7" name="Rectangle 6"/>
+          <p:cNvPr id="6" name="Rectangle 5"/>
           <p:cNvSpPr/>
           <p:nvPr/>
         </p:nvSpPr>
@@ -17735,7 +17064,7 @@
       </p:sp>
       <p:sp>
         <p:nvSpPr>
-          <p:cNvPr id="8" name="TextBox 7"/>
+          <p:cNvPr id="7" name="TextBox 6"/>
           <p:cNvSpPr txBox="1"/>
           <p:nvPr/>
         </p:nvSpPr>
@@ -17777,7 +17106,7 @@
       </p:sp>
       <p:sp>
         <p:nvSpPr>
-          <p:cNvPr id="9" name="Rectangle 8"/>
+          <p:cNvPr id="8" name="Rectangle 7"/>
           <p:cNvSpPr/>
           <p:nvPr/>
         </p:nvSpPr>
@@ -17826,7 +17155,7 @@
       </p:sp>
       <p:sp>
         <p:nvSpPr>
-          <p:cNvPr id="10" name="Rectangle 9"/>
+          <p:cNvPr id="9" name="Rectangle 8"/>
           <p:cNvSpPr/>
           <p:nvPr/>
         </p:nvSpPr>
@@ -17875,7 +17204,7 @@
       </p:sp>
       <p:sp>
         <p:nvSpPr>
-          <p:cNvPr id="11" name="TextBox 10"/>
+          <p:cNvPr id="10" name="TextBox 9"/>
           <p:cNvSpPr txBox="1"/>
           <p:nvPr/>
         </p:nvSpPr>
@@ -17917,7 +17246,7 @@
       </p:sp>
       <p:sp>
         <p:nvSpPr>
-          <p:cNvPr id="12" name="TextBox 11"/>
+          <p:cNvPr id="11" name="TextBox 10"/>
           <p:cNvSpPr txBox="1"/>
           <p:nvPr/>
         </p:nvSpPr>
@@ -17959,7 +17288,7 @@
       </p:sp>
       <p:sp>
         <p:nvSpPr>
-          <p:cNvPr id="13" name="TextBox 12"/>
+          <p:cNvPr id="12" name="TextBox 11"/>
           <p:cNvSpPr txBox="1"/>
           <p:nvPr/>
         </p:nvSpPr>
@@ -18001,7 +17330,7 @@
       </p:sp>
       <p:sp>
         <p:nvSpPr>
-          <p:cNvPr id="14" name="Rectangle 13"/>
+          <p:cNvPr id="13" name="Rectangle 12"/>
           <p:cNvSpPr/>
           <p:nvPr/>
         </p:nvSpPr>
@@ -18050,7 +17379,7 @@
       </p:sp>
       <p:sp>
         <p:nvSpPr>
-          <p:cNvPr id="15" name="TextBox 14"/>
+          <p:cNvPr id="14" name="TextBox 13"/>
           <p:cNvSpPr txBox="1"/>
           <p:nvPr/>
         </p:nvSpPr>
@@ -18092,7 +17421,7 @@
       </p:sp>
       <p:sp>
         <p:nvSpPr>
-          <p:cNvPr id="16" name="TextBox 15"/>
+          <p:cNvPr id="15" name="TextBox 14"/>
           <p:cNvSpPr txBox="1"/>
           <p:nvPr/>
         </p:nvSpPr>
@@ -18134,7 +17463,7 @@
       </p:sp>
       <p:sp>
         <p:nvSpPr>
-          <p:cNvPr id="17" name="TextBox 16"/>
+          <p:cNvPr id="16" name="TextBox 15"/>
           <p:cNvSpPr txBox="1"/>
           <p:nvPr/>
         </p:nvSpPr>
@@ -18249,48 +17578,6 @@
         </p:nvSpPr>
         <p:spPr>
           <a:xfrm>
-            <a:off x="5897880" y="310896"/>
-            <a:ext cx="4800600" cy="256032"/>
-          </a:xfrm>
-          <a:prstGeom prst="rect">
-            <a:avLst/>
-          </a:prstGeom>
-          <a:noFill/>
-        </p:spPr>
-        <p:txBody>
-          <a:bodyPr wrap="none" lIns="9144" rIns="9144" tIns="9144" bIns="9144" anchor="t">
-            <a:spAutoFit/>
-          </a:bodyPr>
-          <a:lstStyle/>
-          <a:p>
-            <a:pPr algn="r">
-              <a:spcAft>
-                <a:spcPts val="0"/>
-              </a:spcAft>
-              <a:defRPr sz="680" b="1">
-                <a:solidFill>
-                  <a:srgbClr val="4F6B00"/>
-                </a:solidFill>
-                <a:latin typeface="Inter"/>
-              </a:defRPr>
-            </a:pPr>
-            <a:r>
-              <a:rPr>
-                <a:latin typeface="Inter"/>
-              </a:rPr>
-              <a:t>Illustrative, Gradient Maintained — demo data, not the client's holdings or managers</a:t>
-            </a:r>
-          </a:p>
-        </p:txBody>
-      </p:sp>
-      <p:sp>
-        <p:nvSpPr>
-          <p:cNvPr id="4" name="TextBox 3"/>
-          <p:cNvSpPr txBox="1"/>
-          <p:nvPr/>
-        </p:nvSpPr>
-        <p:spPr>
-          <a:xfrm>
             <a:off x="640080" y="566928"/>
             <a:ext cx="10058400" cy="530352"/>
           </a:xfrm>
@@ -18327,7 +17614,7 @@
       </p:sp>
       <p:sp>
         <p:nvSpPr>
-          <p:cNvPr id="5" name="Rectangle 4"/>
+          <p:cNvPr id="4" name="Rectangle 3"/>
           <p:cNvSpPr/>
           <p:nvPr/>
         </p:nvSpPr>
@@ -18376,7 +17663,7 @@
       </p:sp>
       <p:sp>
         <p:nvSpPr>
-          <p:cNvPr id="6" name="Rectangle 5"/>
+          <p:cNvPr id="5" name="Rectangle 4"/>
           <p:cNvSpPr/>
           <p:nvPr/>
         </p:nvSpPr>
@@ -18425,7 +17712,7 @@
       </p:sp>
       <p:sp>
         <p:nvSpPr>
-          <p:cNvPr id="7" name="TextBox 6"/>
+          <p:cNvPr id="6" name="TextBox 5"/>
           <p:cNvSpPr txBox="1"/>
           <p:nvPr/>
         </p:nvSpPr>
@@ -18467,7 +17754,7 @@
       </p:sp>
       <p:sp>
         <p:nvSpPr>
-          <p:cNvPr id="8" name="TextBox 7"/>
+          <p:cNvPr id="7" name="TextBox 6"/>
           <p:cNvSpPr txBox="1"/>
           <p:nvPr/>
         </p:nvSpPr>
@@ -18509,7 +17796,7 @@
       </p:sp>
       <p:graphicFrame>
         <p:nvGraphicFramePr>
-          <p:cNvPr id="9" name="Chart 8"/>
+          <p:cNvPr id="8" name="Chart 7"/>
           <p:cNvGraphicFramePr>
             <a:graphicFrameLocks noGrp="1"/>
           </p:cNvGraphicFramePr>
@@ -18527,7 +17814,7 @@
       </p:graphicFrame>
       <p:sp>
         <p:nvSpPr>
-          <p:cNvPr id="10" name="Rectangle 9"/>
+          <p:cNvPr id="9" name="Rectangle 8"/>
           <p:cNvSpPr/>
           <p:nvPr/>
         </p:nvSpPr>
@@ -18576,7 +17863,7 @@
       </p:sp>
       <p:sp>
         <p:nvSpPr>
-          <p:cNvPr id="11" name="TextBox 10"/>
+          <p:cNvPr id="10" name="TextBox 9"/>
           <p:cNvSpPr txBox="1"/>
           <p:nvPr/>
         </p:nvSpPr>
@@ -18618,7 +17905,7 @@
       </p:sp>
       <p:sp>
         <p:nvSpPr>
-          <p:cNvPr id="12" name="TextBox 11"/>
+          <p:cNvPr id="11" name="TextBox 10"/>
           <p:cNvSpPr txBox="1"/>
           <p:nvPr/>
         </p:nvSpPr>
@@ -18660,7 +17947,7 @@
       </p:sp>
       <p:sp>
         <p:nvSpPr>
-          <p:cNvPr id="13" name="TextBox 12"/>
+          <p:cNvPr id="12" name="TextBox 11"/>
           <p:cNvSpPr txBox="1"/>
           <p:nvPr/>
         </p:nvSpPr>
@@ -18775,48 +18062,6 @@
         </p:nvSpPr>
         <p:spPr>
           <a:xfrm>
-            <a:off x="5897880" y="310896"/>
-            <a:ext cx="4800600" cy="256032"/>
-          </a:xfrm>
-          <a:prstGeom prst="rect">
-            <a:avLst/>
-          </a:prstGeom>
-          <a:noFill/>
-        </p:spPr>
-        <p:txBody>
-          <a:bodyPr wrap="none" lIns="9144" rIns="9144" tIns="9144" bIns="9144" anchor="t">
-            <a:spAutoFit/>
-          </a:bodyPr>
-          <a:lstStyle/>
-          <a:p>
-            <a:pPr algn="r">
-              <a:spcAft>
-                <a:spcPts val="0"/>
-              </a:spcAft>
-              <a:defRPr sz="680" b="1">
-                <a:solidFill>
-                  <a:srgbClr val="4F6B00"/>
-                </a:solidFill>
-                <a:latin typeface="Inter"/>
-              </a:defRPr>
-            </a:pPr>
-            <a:r>
-              <a:rPr>
-                <a:latin typeface="Inter"/>
-              </a:rPr>
-              <a:t>Illustrative, Gradient Maintained — demo data, not the client's holdings or managers</a:t>
-            </a:r>
-          </a:p>
-        </p:txBody>
-      </p:sp>
-      <p:sp>
-        <p:nvSpPr>
-          <p:cNvPr id="4" name="TextBox 3"/>
-          <p:cNvSpPr txBox="1"/>
-          <p:nvPr/>
-        </p:nvSpPr>
-        <p:spPr>
-          <a:xfrm>
             <a:off x="640080" y="566928"/>
             <a:ext cx="10058400" cy="530352"/>
           </a:xfrm>
@@ -18853,7 +18098,7 @@
       </p:sp>
       <p:sp>
         <p:nvSpPr>
-          <p:cNvPr id="5" name="Rectangle 4"/>
+          <p:cNvPr id="4" name="Rectangle 3"/>
           <p:cNvSpPr/>
           <p:nvPr/>
         </p:nvSpPr>
@@ -18902,7 +18147,7 @@
       </p:sp>
       <p:sp>
         <p:nvSpPr>
-          <p:cNvPr id="6" name="Rectangle 5"/>
+          <p:cNvPr id="5" name="Rectangle 4"/>
           <p:cNvSpPr/>
           <p:nvPr/>
         </p:nvSpPr>
@@ -18951,7 +18196,7 @@
       </p:sp>
       <p:sp>
         <p:nvSpPr>
-          <p:cNvPr id="7" name="TextBox 6"/>
+          <p:cNvPr id="6" name="TextBox 5"/>
           <p:cNvSpPr txBox="1"/>
           <p:nvPr/>
         </p:nvSpPr>
@@ -18993,7 +18238,7 @@
       </p:sp>
       <p:sp>
         <p:nvSpPr>
-          <p:cNvPr id="8" name="TextBox 7"/>
+          <p:cNvPr id="7" name="TextBox 6"/>
           <p:cNvSpPr txBox="1"/>
           <p:nvPr/>
         </p:nvSpPr>
@@ -19035,7 +18280,7 @@
       </p:sp>
       <p:graphicFrame>
         <p:nvGraphicFramePr>
-          <p:cNvPr id="9" name="Table 8"/>
+          <p:cNvPr id="8" name="Table 7"/>
           <p:cNvGraphicFramePr>
             <a:graphicFrameLocks noGrp="1"/>
           </p:cNvGraphicFramePr>
@@ -19568,7 +18813,7 @@
                         <a:rPr>
                           <a:latin typeface="Inter"/>
                         </a:rPr>
-                        <a:t>● not assessed</a:t>
+                        <a:t>● Not assessed</a:t>
                       </a:r>
                     </a:p>
                   </a:txBody>
@@ -19612,7 +18857,7 @@
       </p:graphicFrame>
       <p:sp>
         <p:nvSpPr>
-          <p:cNvPr id="10" name="TextBox 9"/>
+          <p:cNvPr id="9" name="TextBox 8"/>
           <p:cNvSpPr txBox="1"/>
           <p:nvPr/>
         </p:nvSpPr>
@@ -19654,7 +18899,7 @@
       </p:sp>
       <p:graphicFrame>
         <p:nvGraphicFramePr>
-          <p:cNvPr id="11" name="Table 10"/>
+          <p:cNvPr id="10" name="Table 9"/>
           <p:cNvGraphicFramePr>
             <a:graphicFrameLocks noGrp="1"/>
           </p:cNvGraphicFramePr>
@@ -20094,7 +19339,7 @@
       </p:graphicFrame>
       <p:sp>
         <p:nvSpPr>
-          <p:cNvPr id="12" name="TextBox 11"/>
+          <p:cNvPr id="11" name="TextBox 10"/>
           <p:cNvSpPr txBox="1"/>
           <p:nvPr/>
         </p:nvSpPr>
@@ -20136,7 +19381,7 @@
       </p:sp>
       <p:sp>
         <p:nvSpPr>
-          <p:cNvPr id="13" name="Rectangle 12"/>
+          <p:cNvPr id="12" name="Rectangle 11"/>
           <p:cNvSpPr/>
           <p:nvPr/>
         </p:nvSpPr>
@@ -20185,7 +19430,7 @@
       </p:sp>
       <p:sp>
         <p:nvSpPr>
-          <p:cNvPr id="14" name="TextBox 13"/>
+          <p:cNvPr id="13" name="TextBox 12"/>
           <p:cNvSpPr txBox="1"/>
           <p:nvPr/>
         </p:nvSpPr>
@@ -20227,7 +19472,7 @@
       </p:sp>
       <p:sp>
         <p:nvSpPr>
-          <p:cNvPr id="15" name="TextBox 14"/>
+          <p:cNvPr id="14" name="TextBox 13"/>
           <p:cNvSpPr txBox="1"/>
           <p:nvPr/>
         </p:nvSpPr>
@@ -20269,7 +19514,7 @@
       </p:sp>
       <p:sp>
         <p:nvSpPr>
-          <p:cNvPr id="16" name="TextBox 15"/>
+          <p:cNvPr id="15" name="TextBox 14"/>
           <p:cNvSpPr txBox="1"/>
           <p:nvPr/>
         </p:nvSpPr>
@@ -20384,48 +19629,6 @@
         </p:nvSpPr>
         <p:spPr>
           <a:xfrm>
-            <a:off x="5897880" y="310896"/>
-            <a:ext cx="4800600" cy="256032"/>
-          </a:xfrm>
-          <a:prstGeom prst="rect">
-            <a:avLst/>
-          </a:prstGeom>
-          <a:noFill/>
-        </p:spPr>
-        <p:txBody>
-          <a:bodyPr wrap="none" lIns="9144" rIns="9144" tIns="9144" bIns="9144" anchor="t">
-            <a:spAutoFit/>
-          </a:bodyPr>
-          <a:lstStyle/>
-          <a:p>
-            <a:pPr algn="r">
-              <a:spcAft>
-                <a:spcPts val="0"/>
-              </a:spcAft>
-              <a:defRPr sz="680" b="1">
-                <a:solidFill>
-                  <a:srgbClr val="4F6B00"/>
-                </a:solidFill>
-                <a:latin typeface="Inter"/>
-              </a:defRPr>
-            </a:pPr>
-            <a:r>
-              <a:rPr>
-                <a:latin typeface="Inter"/>
-              </a:rPr>
-              <a:t>Illustrative, Gradient Maintained — demo data, not the client's holdings or managers</a:t>
-            </a:r>
-          </a:p>
-        </p:txBody>
-      </p:sp>
-      <p:sp>
-        <p:nvSpPr>
-          <p:cNvPr id="4" name="TextBox 3"/>
-          <p:cNvSpPr txBox="1"/>
-          <p:nvPr/>
-        </p:nvSpPr>
-        <p:spPr>
-          <a:xfrm>
             <a:off x="640080" y="566928"/>
             <a:ext cx="10058400" cy="530352"/>
           </a:xfrm>
@@ -20462,7 +19665,7 @@
       </p:sp>
       <p:sp>
         <p:nvSpPr>
-          <p:cNvPr id="5" name="Rectangle 4"/>
+          <p:cNvPr id="4" name="Rectangle 3"/>
           <p:cNvSpPr/>
           <p:nvPr/>
         </p:nvSpPr>
@@ -20511,7 +19714,7 @@
       </p:sp>
       <p:sp>
         <p:nvSpPr>
-          <p:cNvPr id="6" name="Rectangle 5"/>
+          <p:cNvPr id="5" name="Rectangle 4"/>
           <p:cNvSpPr/>
           <p:nvPr/>
         </p:nvSpPr>
@@ -20560,7 +19763,7 @@
       </p:sp>
       <p:sp>
         <p:nvSpPr>
-          <p:cNvPr id="7" name="TextBox 6"/>
+          <p:cNvPr id="6" name="TextBox 5"/>
           <p:cNvSpPr txBox="1"/>
           <p:nvPr/>
         </p:nvSpPr>
@@ -20602,7 +19805,7 @@
       </p:sp>
       <p:sp>
         <p:nvSpPr>
-          <p:cNvPr id="8" name="TextBox 7"/>
+          <p:cNvPr id="7" name="TextBox 6"/>
           <p:cNvSpPr txBox="1"/>
           <p:nvPr/>
         </p:nvSpPr>
@@ -20644,7 +19847,7 @@
       </p:sp>
       <p:graphicFrame>
         <p:nvGraphicFramePr>
-          <p:cNvPr id="9" name="Chart 8"/>
+          <p:cNvPr id="8" name="Chart 7"/>
           <p:cNvGraphicFramePr>
             <a:graphicFrameLocks noGrp="1"/>
           </p:cNvGraphicFramePr>
@@ -20662,7 +19865,7 @@
       </p:graphicFrame>
       <p:sp>
         <p:nvSpPr>
-          <p:cNvPr id="10" name="Rectangle 9"/>
+          <p:cNvPr id="9" name="Rectangle 8"/>
           <p:cNvSpPr/>
           <p:nvPr/>
         </p:nvSpPr>
@@ -20711,7 +19914,7 @@
       </p:sp>
       <p:sp>
         <p:nvSpPr>
-          <p:cNvPr id="11" name="TextBox 10"/>
+          <p:cNvPr id="10" name="TextBox 9"/>
           <p:cNvSpPr txBox="1"/>
           <p:nvPr/>
         </p:nvSpPr>
@@ -20753,7 +19956,7 @@
       </p:sp>
       <p:sp>
         <p:nvSpPr>
-          <p:cNvPr id="12" name="TextBox 11"/>
+          <p:cNvPr id="11" name="TextBox 10"/>
           <p:cNvSpPr txBox="1"/>
           <p:nvPr/>
         </p:nvSpPr>
@@ -20795,7 +19998,7 @@
       </p:sp>
       <p:sp>
         <p:nvSpPr>
-          <p:cNvPr id="13" name="TextBox 12"/>
+          <p:cNvPr id="12" name="TextBox 11"/>
           <p:cNvSpPr txBox="1"/>
           <p:nvPr/>
         </p:nvSpPr>
@@ -20910,48 +20113,6 @@
         </p:nvSpPr>
         <p:spPr>
           <a:xfrm>
-            <a:off x="5897880" y="310896"/>
-            <a:ext cx="4800600" cy="256032"/>
-          </a:xfrm>
-          <a:prstGeom prst="rect">
-            <a:avLst/>
-          </a:prstGeom>
-          <a:noFill/>
-        </p:spPr>
-        <p:txBody>
-          <a:bodyPr wrap="none" lIns="9144" rIns="9144" tIns="9144" bIns="9144" anchor="t">
-            <a:spAutoFit/>
-          </a:bodyPr>
-          <a:lstStyle/>
-          <a:p>
-            <a:pPr algn="r">
-              <a:spcAft>
-                <a:spcPts val="0"/>
-              </a:spcAft>
-              <a:defRPr sz="680" b="1">
-                <a:solidFill>
-                  <a:srgbClr val="4F6B00"/>
-                </a:solidFill>
-                <a:latin typeface="Inter"/>
-              </a:defRPr>
-            </a:pPr>
-            <a:r>
-              <a:rPr>
-                <a:latin typeface="Inter"/>
-              </a:rPr>
-              <a:t>Illustrative, Gradient Maintained — demo data, not the client's holdings or managers</a:t>
-            </a:r>
-          </a:p>
-        </p:txBody>
-      </p:sp>
-      <p:sp>
-        <p:nvSpPr>
-          <p:cNvPr id="4" name="TextBox 3"/>
-          <p:cNvSpPr txBox="1"/>
-          <p:nvPr/>
-        </p:nvSpPr>
-        <p:spPr>
-          <a:xfrm>
             <a:off x="640080" y="566928"/>
             <a:ext cx="10058400" cy="530352"/>
           </a:xfrm>
@@ -20988,7 +20149,7 @@
       </p:sp>
       <p:sp>
         <p:nvSpPr>
-          <p:cNvPr id="5" name="Rectangle 4"/>
+          <p:cNvPr id="4" name="Rectangle 3"/>
           <p:cNvSpPr/>
           <p:nvPr/>
         </p:nvSpPr>
@@ -21037,7 +20198,7 @@
       </p:sp>
       <p:sp>
         <p:nvSpPr>
-          <p:cNvPr id="6" name="Rectangle 5"/>
+          <p:cNvPr id="5" name="Rectangle 4"/>
           <p:cNvSpPr/>
           <p:nvPr/>
         </p:nvSpPr>
@@ -21086,7 +20247,7 @@
       </p:sp>
       <p:sp>
         <p:nvSpPr>
-          <p:cNvPr id="7" name="TextBox 6"/>
+          <p:cNvPr id="6" name="TextBox 5"/>
           <p:cNvSpPr txBox="1"/>
           <p:nvPr/>
         </p:nvSpPr>
@@ -21128,7 +20289,7 @@
       </p:sp>
       <p:sp>
         <p:nvSpPr>
-          <p:cNvPr id="8" name="TextBox 7"/>
+          <p:cNvPr id="7" name="TextBox 6"/>
           <p:cNvSpPr txBox="1"/>
           <p:nvPr/>
         </p:nvSpPr>
@@ -21170,7 +20331,7 @@
       </p:sp>
       <p:graphicFrame>
         <p:nvGraphicFramePr>
-          <p:cNvPr id="9" name="Table 8"/>
+          <p:cNvPr id="8" name="Table 7"/>
           <p:cNvGraphicFramePr>
             <a:graphicFrameLocks noGrp="1"/>
           </p:cNvGraphicFramePr>
@@ -21747,7 +20908,7 @@
       </p:graphicFrame>
       <p:sp>
         <p:nvSpPr>
-          <p:cNvPr id="10" name="Rectangle 9"/>
+          <p:cNvPr id="9" name="Rectangle 8"/>
           <p:cNvSpPr/>
           <p:nvPr/>
         </p:nvSpPr>
@@ -21796,7 +20957,7 @@
       </p:sp>
       <p:sp>
         <p:nvSpPr>
-          <p:cNvPr id="11" name="Rectangle 10"/>
+          <p:cNvPr id="10" name="Rectangle 9"/>
           <p:cNvSpPr/>
           <p:nvPr/>
         </p:nvSpPr>
@@ -21845,7 +21006,7 @@
       </p:sp>
       <p:sp>
         <p:nvSpPr>
-          <p:cNvPr id="12" name="TextBox 11"/>
+          <p:cNvPr id="11" name="TextBox 10"/>
           <p:cNvSpPr txBox="1"/>
           <p:nvPr/>
         </p:nvSpPr>
@@ -21887,7 +21048,7 @@
       </p:sp>
       <p:sp>
         <p:nvSpPr>
-          <p:cNvPr id="13" name="TextBox 12"/>
+          <p:cNvPr id="12" name="TextBox 11"/>
           <p:cNvSpPr txBox="1"/>
           <p:nvPr/>
         </p:nvSpPr>
@@ -21929,7 +21090,7 @@
       </p:sp>
       <p:sp>
         <p:nvSpPr>
-          <p:cNvPr id="14" name="Rectangle 13"/>
+          <p:cNvPr id="13" name="Rectangle 12"/>
           <p:cNvSpPr/>
           <p:nvPr/>
         </p:nvSpPr>
@@ -21978,7 +21139,7 @@
       </p:sp>
       <p:sp>
         <p:nvSpPr>
-          <p:cNvPr id="15" name="TextBox 14"/>
+          <p:cNvPr id="14" name="TextBox 13"/>
           <p:cNvSpPr txBox="1"/>
           <p:nvPr/>
         </p:nvSpPr>
@@ -22020,7 +21181,7 @@
       </p:sp>
       <p:sp>
         <p:nvSpPr>
-          <p:cNvPr id="16" name="TextBox 15"/>
+          <p:cNvPr id="15" name="TextBox 14"/>
           <p:cNvSpPr txBox="1"/>
           <p:nvPr/>
         </p:nvSpPr>
@@ -22062,7 +21223,7 @@
       </p:sp>
       <p:sp>
         <p:nvSpPr>
-          <p:cNvPr id="17" name="TextBox 16"/>
+          <p:cNvPr id="16" name="TextBox 15"/>
           <p:cNvSpPr txBox="1"/>
           <p:nvPr/>
         </p:nvSpPr>
@@ -22177,48 +21338,6 @@
         </p:nvSpPr>
         <p:spPr>
           <a:xfrm>
-            <a:off x="5897880" y="310896"/>
-            <a:ext cx="4800600" cy="256032"/>
-          </a:xfrm>
-          <a:prstGeom prst="rect">
-            <a:avLst/>
-          </a:prstGeom>
-          <a:noFill/>
-        </p:spPr>
-        <p:txBody>
-          <a:bodyPr wrap="none" lIns="9144" rIns="9144" tIns="9144" bIns="9144" anchor="t">
-            <a:spAutoFit/>
-          </a:bodyPr>
-          <a:lstStyle/>
-          <a:p>
-            <a:pPr algn="r">
-              <a:spcAft>
-                <a:spcPts val="0"/>
-              </a:spcAft>
-              <a:defRPr sz="680" b="1">
-                <a:solidFill>
-                  <a:srgbClr val="4F6B00"/>
-                </a:solidFill>
-                <a:latin typeface="Inter"/>
-              </a:defRPr>
-            </a:pPr>
-            <a:r>
-              <a:rPr>
-                <a:latin typeface="Inter"/>
-              </a:rPr>
-              <a:t>Illustrative, Gradient Maintained — demo data, not the client's holdings or managers</a:t>
-            </a:r>
-          </a:p>
-        </p:txBody>
-      </p:sp>
-      <p:sp>
-        <p:nvSpPr>
-          <p:cNvPr id="4" name="TextBox 3"/>
-          <p:cNvSpPr txBox="1"/>
-          <p:nvPr/>
-        </p:nvSpPr>
-        <p:spPr>
-          <a:xfrm>
             <a:off x="640080" y="566928"/>
             <a:ext cx="10058400" cy="530352"/>
           </a:xfrm>
@@ -22255,7 +21374,7 @@
       </p:sp>
       <p:sp>
         <p:nvSpPr>
-          <p:cNvPr id="5" name="Rectangle 4"/>
+          <p:cNvPr id="4" name="Rectangle 3"/>
           <p:cNvSpPr/>
           <p:nvPr/>
         </p:nvSpPr>
@@ -22304,7 +21423,7 @@
       </p:sp>
       <p:sp>
         <p:nvSpPr>
-          <p:cNvPr id="6" name="Rectangle 5"/>
+          <p:cNvPr id="5" name="Rectangle 4"/>
           <p:cNvSpPr/>
           <p:nvPr/>
         </p:nvSpPr>
@@ -22353,7 +21472,7 @@
       </p:sp>
       <p:sp>
         <p:nvSpPr>
-          <p:cNvPr id="7" name="TextBox 6"/>
+          <p:cNvPr id="6" name="TextBox 5"/>
           <p:cNvSpPr txBox="1"/>
           <p:nvPr/>
         </p:nvSpPr>
@@ -22395,7 +21514,7 @@
       </p:sp>
       <p:sp>
         <p:nvSpPr>
-          <p:cNvPr id="8" name="TextBox 7"/>
+          <p:cNvPr id="7" name="TextBox 6"/>
           <p:cNvSpPr txBox="1"/>
           <p:nvPr/>
         </p:nvSpPr>
@@ -22437,7 +21556,7 @@
       </p:sp>
       <p:graphicFrame>
         <p:nvGraphicFramePr>
-          <p:cNvPr id="9" name="Table 8"/>
+          <p:cNvPr id="8" name="Table 7"/>
           <p:cNvGraphicFramePr>
             <a:graphicFrameLocks noGrp="1"/>
           </p:cNvGraphicFramePr>
@@ -22959,7 +22078,7 @@
       </p:graphicFrame>
       <p:sp>
         <p:nvSpPr>
-          <p:cNvPr id="10" name="TextBox 9"/>
+          <p:cNvPr id="9" name="TextBox 8"/>
           <p:cNvSpPr txBox="1"/>
           <p:nvPr/>
         </p:nvSpPr>
@@ -23001,7 +22120,7 @@
       </p:sp>
       <p:graphicFrame>
         <p:nvGraphicFramePr>
-          <p:cNvPr id="11" name="Table 10"/>
+          <p:cNvPr id="10" name="Table 9"/>
           <p:cNvGraphicFramePr>
             <a:graphicFrameLocks noGrp="1"/>
           </p:cNvGraphicFramePr>
@@ -23359,7 +22478,7 @@
       </p:graphicFrame>
       <p:sp>
         <p:nvSpPr>
-          <p:cNvPr id="12" name="TextBox 11"/>
+          <p:cNvPr id="11" name="TextBox 10"/>
           <p:cNvSpPr txBox="1"/>
           <p:nvPr/>
         </p:nvSpPr>
@@ -23439,7 +22558,7 @@
       </p:sp>
       <p:sp>
         <p:nvSpPr>
-          <p:cNvPr id="13" name="Rectangle 12"/>
+          <p:cNvPr id="12" name="Rectangle 11"/>
           <p:cNvSpPr/>
           <p:nvPr/>
         </p:nvSpPr>
@@ -23488,7 +22607,7 @@
       </p:sp>
       <p:sp>
         <p:nvSpPr>
-          <p:cNvPr id="14" name="TextBox 13"/>
+          <p:cNvPr id="13" name="TextBox 12"/>
           <p:cNvSpPr txBox="1"/>
           <p:nvPr/>
         </p:nvSpPr>
@@ -23530,7 +22649,7 @@
       </p:sp>
       <p:sp>
         <p:nvSpPr>
-          <p:cNvPr id="15" name="TextBox 14"/>
+          <p:cNvPr id="14" name="TextBox 13"/>
           <p:cNvSpPr txBox="1"/>
           <p:nvPr/>
         </p:nvSpPr>
@@ -23572,7 +22691,7 @@
       </p:sp>
       <p:sp>
         <p:nvSpPr>
-          <p:cNvPr id="16" name="TextBox 15"/>
+          <p:cNvPr id="15" name="TextBox 14"/>
           <p:cNvSpPr txBox="1"/>
           <p:nvPr/>
         </p:nvSpPr>
@@ -23687,48 +22806,6 @@
         </p:nvSpPr>
         <p:spPr>
           <a:xfrm>
-            <a:off x="5897880" y="310896"/>
-            <a:ext cx="4800600" cy="256032"/>
-          </a:xfrm>
-          <a:prstGeom prst="rect">
-            <a:avLst/>
-          </a:prstGeom>
-          <a:noFill/>
-        </p:spPr>
-        <p:txBody>
-          <a:bodyPr wrap="none" lIns="9144" rIns="9144" tIns="9144" bIns="9144" anchor="t">
-            <a:spAutoFit/>
-          </a:bodyPr>
-          <a:lstStyle/>
-          <a:p>
-            <a:pPr algn="r">
-              <a:spcAft>
-                <a:spcPts val="0"/>
-              </a:spcAft>
-              <a:defRPr sz="680" b="1">
-                <a:solidFill>
-                  <a:srgbClr val="4F6B00"/>
-                </a:solidFill>
-                <a:latin typeface="Inter"/>
-              </a:defRPr>
-            </a:pPr>
-            <a:r>
-              <a:rPr>
-                <a:latin typeface="Inter"/>
-              </a:rPr>
-              <a:t>Illustrative, Gradient Maintained — demo data, not the client's holdings or managers</a:t>
-            </a:r>
-          </a:p>
-        </p:txBody>
-      </p:sp>
-      <p:sp>
-        <p:nvSpPr>
-          <p:cNvPr id="4" name="TextBox 3"/>
-          <p:cNvSpPr txBox="1"/>
-          <p:nvPr/>
-        </p:nvSpPr>
-        <p:spPr>
-          <a:xfrm>
             <a:off x="640080" y="566928"/>
             <a:ext cx="10058400" cy="530352"/>
           </a:xfrm>
@@ -23765,7 +22842,7 @@
       </p:sp>
       <p:sp>
         <p:nvSpPr>
-          <p:cNvPr id="5" name="Rectangle 4"/>
+          <p:cNvPr id="4" name="Rectangle 3"/>
           <p:cNvSpPr/>
           <p:nvPr/>
         </p:nvSpPr>
@@ -23814,7 +22891,7 @@
       </p:sp>
       <p:sp>
         <p:nvSpPr>
-          <p:cNvPr id="6" name="Rectangle 5"/>
+          <p:cNvPr id="5" name="Rectangle 4"/>
           <p:cNvSpPr/>
           <p:nvPr/>
         </p:nvSpPr>
@@ -23863,7 +22940,7 @@
       </p:sp>
       <p:sp>
         <p:nvSpPr>
-          <p:cNvPr id="7" name="TextBox 6"/>
+          <p:cNvPr id="6" name="TextBox 5"/>
           <p:cNvSpPr txBox="1"/>
           <p:nvPr/>
         </p:nvSpPr>
@@ -23905,7 +22982,7 @@
       </p:sp>
       <p:sp>
         <p:nvSpPr>
-          <p:cNvPr id="8" name="TextBox 7"/>
+          <p:cNvPr id="7" name="TextBox 6"/>
           <p:cNvSpPr txBox="1"/>
           <p:nvPr/>
         </p:nvSpPr>
@@ -23947,7 +23024,7 @@
       </p:sp>
       <p:graphicFrame>
         <p:nvGraphicFramePr>
-          <p:cNvPr id="9" name="Table 8"/>
+          <p:cNvPr id="8" name="Table 7"/>
           <p:cNvGraphicFramePr>
             <a:graphicFrameLocks noGrp="1"/>
           </p:cNvGraphicFramePr>
@@ -24524,7 +23601,7 @@
       </p:graphicFrame>
       <p:sp>
         <p:nvSpPr>
-          <p:cNvPr id="10" name="TextBox 9"/>
+          <p:cNvPr id="9" name="TextBox 8"/>
           <p:cNvSpPr txBox="1"/>
           <p:nvPr/>
         </p:nvSpPr>
@@ -24566,7 +23643,7 @@
       </p:sp>
       <p:graphicFrame>
         <p:nvGraphicFramePr>
-          <p:cNvPr id="11" name="Table 10"/>
+          <p:cNvPr id="10" name="Table 9"/>
           <p:cNvGraphicFramePr>
             <a:graphicFrameLocks noGrp="1"/>
           </p:cNvGraphicFramePr>
@@ -25143,7 +24220,7 @@
       </p:graphicFrame>
       <p:sp>
         <p:nvSpPr>
-          <p:cNvPr id="12" name="Rectangle 11"/>
+          <p:cNvPr id="11" name="Rectangle 10"/>
           <p:cNvSpPr/>
           <p:nvPr/>
         </p:nvSpPr>
@@ -25192,7 +24269,7 @@
       </p:sp>
       <p:sp>
         <p:nvSpPr>
-          <p:cNvPr id="13" name="TextBox 12"/>
+          <p:cNvPr id="12" name="TextBox 11"/>
           <p:cNvSpPr txBox="1"/>
           <p:nvPr/>
         </p:nvSpPr>
@@ -25234,7 +24311,7 @@
       </p:sp>
       <p:sp>
         <p:nvSpPr>
-          <p:cNvPr id="14" name="TextBox 13"/>
+          <p:cNvPr id="13" name="TextBox 12"/>
           <p:cNvSpPr txBox="1"/>
           <p:nvPr/>
         </p:nvSpPr>
@@ -25276,7 +24353,7 @@
       </p:sp>
       <p:sp>
         <p:nvSpPr>
-          <p:cNvPr id="15" name="TextBox 14"/>
+          <p:cNvPr id="14" name="TextBox 13"/>
           <p:cNvSpPr txBox="1"/>
           <p:nvPr/>
         </p:nvSpPr>
@@ -25391,48 +24468,6 @@
         </p:nvSpPr>
         <p:spPr>
           <a:xfrm>
-            <a:off x="5897880" y="310896"/>
-            <a:ext cx="4800600" cy="256032"/>
-          </a:xfrm>
-          <a:prstGeom prst="rect">
-            <a:avLst/>
-          </a:prstGeom>
-          <a:noFill/>
-        </p:spPr>
-        <p:txBody>
-          <a:bodyPr wrap="none" lIns="9144" rIns="9144" tIns="9144" bIns="9144" anchor="t">
-            <a:spAutoFit/>
-          </a:bodyPr>
-          <a:lstStyle/>
-          <a:p>
-            <a:pPr algn="r">
-              <a:spcAft>
-                <a:spcPts val="0"/>
-              </a:spcAft>
-              <a:defRPr sz="680" b="1">
-                <a:solidFill>
-                  <a:srgbClr val="4F6B00"/>
-                </a:solidFill>
-                <a:latin typeface="Inter"/>
-              </a:defRPr>
-            </a:pPr>
-            <a:r>
-              <a:rPr>
-                <a:latin typeface="Inter"/>
-              </a:rPr>
-              <a:t>Illustrative, Gradient Maintained — demo data, not the client's holdings or managers</a:t>
-            </a:r>
-          </a:p>
-        </p:txBody>
-      </p:sp>
-      <p:sp>
-        <p:nvSpPr>
-          <p:cNvPr id="4" name="TextBox 3"/>
-          <p:cNvSpPr txBox="1"/>
-          <p:nvPr/>
-        </p:nvSpPr>
-        <p:spPr>
-          <a:xfrm>
             <a:off x="640080" y="566928"/>
             <a:ext cx="10058400" cy="530352"/>
           </a:xfrm>
@@ -25469,7 +24504,7 @@
       </p:sp>
       <p:sp>
         <p:nvSpPr>
-          <p:cNvPr id="5" name="Rectangle 4"/>
+          <p:cNvPr id="4" name="Rectangle 3"/>
           <p:cNvSpPr/>
           <p:nvPr/>
         </p:nvSpPr>
@@ -25518,7 +24553,7 @@
       </p:sp>
       <p:sp>
         <p:nvSpPr>
-          <p:cNvPr id="6" name="Rectangle 5"/>
+          <p:cNvPr id="5" name="Rectangle 4"/>
           <p:cNvSpPr/>
           <p:nvPr/>
         </p:nvSpPr>
@@ -25567,7 +24602,7 @@
       </p:sp>
       <p:sp>
         <p:nvSpPr>
-          <p:cNvPr id="7" name="TextBox 6"/>
+          <p:cNvPr id="6" name="TextBox 5"/>
           <p:cNvSpPr txBox="1"/>
           <p:nvPr/>
         </p:nvSpPr>
@@ -25609,7 +24644,7 @@
       </p:sp>
       <p:graphicFrame>
         <p:nvGraphicFramePr>
-          <p:cNvPr id="8" name="Table 7"/>
+          <p:cNvPr id="7" name="Table 6"/>
           <p:cNvGraphicFramePr>
             <a:graphicFrameLocks noGrp="1"/>
           </p:cNvGraphicFramePr>
@@ -25758,7 +24793,7 @@
                         <a:rPr>
                           <a:latin typeface="Inter"/>
                         </a:rPr>
-                        <a:t>● available</a:t>
+                        <a:t>● Available</a:t>
                       </a:r>
                     </a:p>
                   </a:txBody>
@@ -25841,7 +24876,7 @@
                         <a:rPr>
                           <a:latin typeface="Inter"/>
                         </a:rPr>
-                        <a:t>● available</a:t>
+                        <a:t>● Available</a:t>
                       </a:r>
                     </a:p>
                   </a:txBody>
@@ -25924,7 +24959,7 @@
                         <a:rPr>
                           <a:latin typeface="Inter"/>
                         </a:rPr>
-                        <a:t>● available</a:t>
+                        <a:t>● Available</a:t>
                       </a:r>
                     </a:p>
                   </a:txBody>
@@ -26007,7 +25042,7 @@
                         <a:rPr>
                           <a:latin typeface="Inter"/>
                         </a:rPr>
-                        <a:t>● available</a:t>
+                        <a:t>● Available</a:t>
                       </a:r>
                     </a:p>
                   </a:txBody>
@@ -26090,7 +25125,7 @@
                         <a:rPr>
                           <a:latin typeface="Inter"/>
                         </a:rPr>
-                        <a:t>● available</a:t>
+                        <a:t>● Available</a:t>
                       </a:r>
                     </a:p>
                   </a:txBody>
@@ -26173,7 +25208,7 @@
                         <a:rPr>
                           <a:latin typeface="Inter"/>
                         </a:rPr>
-                        <a:t>● available</a:t>
+                        <a:t>● Available</a:t>
                       </a:r>
                     </a:p>
                   </a:txBody>
@@ -26256,7 +25291,7 @@
                         <a:rPr>
                           <a:latin typeface="Inter"/>
                         </a:rPr>
-                        <a:t>● unavailable</a:t>
+                        <a:t>● Not available</a:t>
                       </a:r>
                     </a:p>
                   </a:txBody>
@@ -26300,7 +25335,7 @@
       </p:graphicFrame>
       <p:sp>
         <p:nvSpPr>
-          <p:cNvPr id="9" name="Rectangle 8"/>
+          <p:cNvPr id="8" name="Rectangle 7"/>
           <p:cNvSpPr/>
           <p:nvPr/>
         </p:nvSpPr>
@@ -26349,7 +25384,7 @@
       </p:sp>
       <p:sp>
         <p:nvSpPr>
-          <p:cNvPr id="10" name="TextBox 9"/>
+          <p:cNvPr id="9" name="TextBox 8"/>
           <p:cNvSpPr txBox="1"/>
           <p:nvPr/>
         </p:nvSpPr>
@@ -26391,7 +25426,7 @@
       </p:sp>
       <p:sp>
         <p:nvSpPr>
-          <p:cNvPr id="11" name="TextBox 10"/>
+          <p:cNvPr id="10" name="TextBox 9"/>
           <p:cNvSpPr txBox="1"/>
           <p:nvPr/>
         </p:nvSpPr>
@@ -26433,7 +25468,7 @@
       </p:sp>
       <p:sp>
         <p:nvSpPr>
-          <p:cNvPr id="12" name="TextBox 11"/>
+          <p:cNvPr id="11" name="TextBox 10"/>
           <p:cNvSpPr txBox="1"/>
           <p:nvPr/>
         </p:nvSpPr>
@@ -26548,48 +25583,6 @@
         </p:nvSpPr>
         <p:spPr>
           <a:xfrm>
-            <a:off x="5897880" y="310896"/>
-            <a:ext cx="4800600" cy="256032"/>
-          </a:xfrm>
-          <a:prstGeom prst="rect">
-            <a:avLst/>
-          </a:prstGeom>
-          <a:noFill/>
-        </p:spPr>
-        <p:txBody>
-          <a:bodyPr wrap="none" lIns="9144" rIns="9144" tIns="9144" bIns="9144" anchor="t">
-            <a:spAutoFit/>
-          </a:bodyPr>
-          <a:lstStyle/>
-          <a:p>
-            <a:pPr algn="r">
-              <a:spcAft>
-                <a:spcPts val="0"/>
-              </a:spcAft>
-              <a:defRPr sz="680" b="1">
-                <a:solidFill>
-                  <a:srgbClr val="4F6B00"/>
-                </a:solidFill>
-                <a:latin typeface="Inter"/>
-              </a:defRPr>
-            </a:pPr>
-            <a:r>
-              <a:rPr>
-                <a:latin typeface="Inter"/>
-              </a:rPr>
-              <a:t>Illustrative, Gradient Maintained — demo data, not the client's holdings or managers</a:t>
-            </a:r>
-          </a:p>
-        </p:txBody>
-      </p:sp>
-      <p:sp>
-        <p:nvSpPr>
-          <p:cNvPr id="4" name="TextBox 3"/>
-          <p:cNvSpPr txBox="1"/>
-          <p:nvPr/>
-        </p:nvSpPr>
-        <p:spPr>
-          <a:xfrm>
             <a:off x="640080" y="566928"/>
             <a:ext cx="10058400" cy="530352"/>
           </a:xfrm>
@@ -26626,7 +25619,7 @@
       </p:sp>
       <p:sp>
         <p:nvSpPr>
-          <p:cNvPr id="5" name="Rectangle 4"/>
+          <p:cNvPr id="4" name="Rectangle 3"/>
           <p:cNvSpPr/>
           <p:nvPr/>
         </p:nvSpPr>
@@ -26675,7 +25668,7 @@
       </p:sp>
       <p:sp>
         <p:nvSpPr>
-          <p:cNvPr id="6" name="Rectangle 5"/>
+          <p:cNvPr id="5" name="Rectangle 4"/>
           <p:cNvSpPr/>
           <p:nvPr/>
         </p:nvSpPr>
@@ -26724,7 +25717,7 @@
       </p:sp>
       <p:sp>
         <p:nvSpPr>
-          <p:cNvPr id="7" name="TextBox 6"/>
+          <p:cNvPr id="6" name="TextBox 5"/>
           <p:cNvSpPr txBox="1"/>
           <p:nvPr/>
         </p:nvSpPr>
@@ -26766,7 +25759,7 @@
       </p:sp>
       <p:graphicFrame>
         <p:nvGraphicFramePr>
-          <p:cNvPr id="8" name="Table 7"/>
+          <p:cNvPr id="7" name="Table 6"/>
           <p:cNvGraphicFramePr>
             <a:graphicFrameLocks noGrp="1"/>
           </p:cNvGraphicFramePr>
@@ -26784,14 +25777,10 @@
               </a:tblPr>
               <a:tblGrid>
                 <a:gridCol w="2011680"/>
-                <a:gridCol w="1112139"/>
-                <a:gridCol w="1112139"/>
-                <a:gridCol w="1112139"/>
-                <a:gridCol w="1112139"/>
-                <a:gridCol w="1112139"/>
-                <a:gridCol w="1112139"/>
-                <a:gridCol w="1112139"/>
-                <a:gridCol w="1112139"/>
+                <a:gridCol w="2224278"/>
+                <a:gridCol w="2224278"/>
+                <a:gridCol w="2224278"/>
+                <a:gridCol w="2224278"/>
               </a:tblGrid>
               <a:tr h="521208">
                 <a:tc>
@@ -26865,7 +25854,7 @@
                         <a:rPr>
                           <a:latin typeface="Inter"/>
                         </a:rPr>
-                        <a:t>Basis</a:t>
+                        <a:t>Source</a:t>
                       </a:r>
                     </a:p>
                   </a:txBody>
@@ -26892,7 +25881,7 @@
                         <a:rPr>
                           <a:latin typeface="Inter"/>
                         </a:rPr>
-                        <a:t>Tool / view</a:t>
+                        <a:t>As of</a:t>
                       </a:r>
                     </a:p>
                   </a:txBody>
@@ -26919,115 +25908,7 @@
                         <a:rPr>
                           <a:latin typeface="Inter"/>
                         </a:rPr>
-                        <a:t>Key parameters</a:t>
-                      </a:r>
-                    </a:p>
-                  </a:txBody>
-                  <a:tcPr marL="54864" marR="54864" marT="27432" marB="27432" anchor="ctr">
-                    <a:solidFill>
-                      <a:srgbClr val="0D1117"/>
-                    </a:solidFill>
-                  </a:tcPr>
-                </a:tc>
-                <a:tc>
-                  <a:txBody>
-                    <a:bodyPr/>
-                    <a:lstStyle/>
-                    <a:p>
-                      <a:pPr>
-                        <a:defRPr sz="750" b="1">
-                          <a:solidFill>
-                            <a:srgbClr val="FFFFFF"/>
-                          </a:solidFill>
-                          <a:latin typeface="Inter"/>
-                        </a:defRPr>
-                      </a:pPr>
-                      <a:r>
-                        <a:rPr>
-                          <a:latin typeface="Inter"/>
-                        </a:rPr>
-                        <a:t>As of</a:t>
-                      </a:r>
-                    </a:p>
-                  </a:txBody>
-                  <a:tcPr marL="54864" marR="54864" marT="27432" marB="27432" anchor="ctr">
-                    <a:solidFill>
-                      <a:srgbClr val="0D1117"/>
-                    </a:solidFill>
-                  </a:tcPr>
-                </a:tc>
-                <a:tc>
-                  <a:txBody>
-                    <a:bodyPr/>
-                    <a:lstStyle/>
-                    <a:p>
-                      <a:pPr>
-                        <a:defRPr sz="750" b="1">
-                          <a:solidFill>
-                            <a:srgbClr val="FFFFFF"/>
-                          </a:solidFill>
-                          <a:latin typeface="Inter"/>
-                        </a:defRPr>
-                      </a:pPr>
-                      <a:r>
-                        <a:rPr>
-                          <a:latin typeface="Inter"/>
-                        </a:rPr>
-                        <a:t>Data scope</a:t>
-                      </a:r>
-                    </a:p>
-                  </a:txBody>
-                  <a:tcPr marL="54864" marR="54864" marT="27432" marB="27432" anchor="ctr">
-                    <a:solidFill>
-                      <a:srgbClr val="0D1117"/>
-                    </a:solidFill>
-                  </a:tcPr>
-                </a:tc>
-                <a:tc>
-                  <a:txBody>
-                    <a:bodyPr/>
-                    <a:lstStyle/>
-                    <a:p>
-                      <a:pPr>
-                        <a:defRPr sz="750" b="1">
-                          <a:solidFill>
-                            <a:srgbClr val="FFFFFF"/>
-                          </a:solidFill>
-                          <a:latin typeface="Inter"/>
-                        </a:defRPr>
-                      </a:pPr>
-                      <a:r>
-                        <a:rPr>
-                          <a:latin typeface="Inter"/>
-                        </a:rPr>
-                        <a:t>Validation</a:t>
-                      </a:r>
-                    </a:p>
-                  </a:txBody>
-                  <a:tcPr marL="54864" marR="54864" marT="27432" marB="27432" anchor="ctr">
-                    <a:solidFill>
-                      <a:srgbClr val="0D1117"/>
-                    </a:solidFill>
-                  </a:tcPr>
-                </a:tc>
-                <a:tc>
-                  <a:txBody>
-                    <a:bodyPr/>
-                    <a:lstStyle/>
-                    <a:p>
-                      <a:pPr>
-                        <a:defRPr sz="750" b="1">
-                          <a:solidFill>
-                            <a:srgbClr val="FFFFFF"/>
-                          </a:solidFill>
-                          <a:latin typeface="Inter"/>
-                        </a:defRPr>
-                      </a:pPr>
-                      <a:r>
-                        <a:rPr>
-                          <a:latin typeface="Inter"/>
-                        </a:rPr>
-                        <a:t>Digest</a:t>
+                        <a:t>Check</a:t>
                       </a:r>
                     </a:p>
                   </a:txBody>
@@ -27045,7 +25926,7 @@
                     <a:lstStyle/>
                     <a:p>
                       <a:pPr>
-                        <a:defRPr sz="650" b="1">
+                        <a:defRPr sz="720" b="1">
                           <a:solidFill>
                             <a:srgbClr val="0D1117"/>
                           </a:solidFill>
@@ -27072,7 +25953,7 @@
                     <a:lstStyle/>
                     <a:p>
                       <a:pPr>
-                        <a:defRPr sz="650" b="0">
+                        <a:defRPr sz="720" b="0">
                           <a:solidFill>
                             <a:srgbClr val="0D1117"/>
                           </a:solidFill>
@@ -27099,7 +25980,7 @@
                     <a:lstStyle/>
                     <a:p>
                       <a:pPr>
-                        <a:defRPr sz="650" b="0">
+                        <a:defRPr sz="720" b="0">
                           <a:solidFill>
                             <a:srgbClr val="0D1117"/>
                           </a:solidFill>
@@ -27110,7 +25991,7 @@
                         <a:rPr>
                           <a:latin typeface="Inter"/>
                         </a:rPr>
-                        <a:t>gradient_tool</a:t>
+                        <a:t>list_organizations; get_gradient_capabilities</a:t>
                       </a:r>
                     </a:p>
                   </a:txBody>
@@ -27126,7 +26007,7 @@
                     <a:lstStyle/>
                     <a:p>
                       <a:pPr>
-                        <a:defRPr sz="650" b="0">
+                        <a:defRPr sz="720" b="0">
                           <a:solidFill>
                             <a:srgbClr val="0D1117"/>
                           </a:solidFill>
@@ -27137,7 +26018,7 @@
                         <a:rPr>
                           <a:latin typeface="Inter"/>
                         </a:rPr>
-                        <a:t>list_organizations; get_gradient_capabilities</a:t>
+                        <a:t>2026-06-30</a:t>
                       </a:r>
                     </a:p>
                   </a:txBody>
@@ -27153,132 +26034,24 @@
                     <a:lstStyle/>
                     <a:p>
                       <a:pPr>
-                        <a:defRPr sz="650" b="0">
-                          <a:solidFill>
-                            <a:srgbClr val="0D1117"/>
-                          </a:solidFill>
-                          <a:latin typeface="Inter"/>
-                        </a:defRPr>
-                      </a:pPr>
-                      <a:r>
-                        <a:rPr>
-                          <a:latin typeface="Inter"/>
-                        </a:rPr>
-                        <a:t>organization=test</a:t>
-                      </a:r>
-                    </a:p>
-                  </a:txBody>
-                  <a:tcPr marL="54864" marR="54864" marT="27432" marB="27432" anchor="ctr">
-                    <a:solidFill>
-                      <a:srgbClr val="FFFFFF"/>
-                    </a:solidFill>
-                  </a:tcPr>
-                </a:tc>
-                <a:tc>
-                  <a:txBody>
-                    <a:bodyPr/>
-                    <a:lstStyle/>
-                    <a:p>
-                      <a:pPr>
-                        <a:defRPr sz="650" b="0">
-                          <a:solidFill>
-                            <a:srgbClr val="0D1117"/>
-                          </a:solidFill>
-                          <a:latin typeface="Inter"/>
-                        </a:defRPr>
-                      </a:pPr>
-                      <a:r>
-                        <a:rPr>
-                          <a:latin typeface="Inter"/>
-                        </a:rPr>
-                        <a:t>2026-06-30</a:t>
-                      </a:r>
-                    </a:p>
-                  </a:txBody>
-                  <a:tcPr marL="54864" marR="54864" marT="27432" marB="27432" anchor="ctr">
-                    <a:solidFill>
-                      <a:srgbClr val="FFFFFF"/>
-                    </a:solidFill>
-                  </a:tcPr>
-                </a:tc>
-                <a:tc>
-                  <a:txBody>
-                    <a:bodyPr/>
-                    <a:lstStyle/>
-                    <a:p>
-                      <a:pPr>
-                        <a:defRPr sz="650" b="0">
-                          <a:solidFill>
-                            <a:srgbClr val="0D1117"/>
-                          </a:solidFill>
-                          <a:latin typeface="Inter"/>
-                        </a:defRPr>
-                      </a:pPr>
-                      <a:r>
-                        <a:rPr>
-                          <a:latin typeface="Inter"/>
-                        </a:rPr>
-                        <a:t>Illustrative sample data</a:t>
-                      </a:r>
-                    </a:p>
-                  </a:txBody>
-                  <a:tcPr marL="54864" marR="54864" marT="27432" marB="27432" anchor="ctr">
-                    <a:solidFill>
-                      <a:srgbClr val="FFFFFF"/>
-                    </a:solidFill>
-                  </a:tcPr>
-                </a:tc>
-                <a:tc>
-                  <a:txBody>
-                    <a:bodyPr/>
-                    <a:lstStyle/>
-                    <a:p>
-                      <a:pPr>
-                        <a:defRPr sz="650" b="0">
-                          <a:solidFill>
-                            <a:srgbClr val="0D1117"/>
-                          </a:solidFill>
-                          <a:latin typeface="Inter"/>
-                        </a:defRPr>
-                      </a:pPr>
-                      <a:r>
-                        <a:rPr>
-                          <a:latin typeface="Inter"/>
-                        </a:rPr>
-                        <a:t>passed</a:t>
-                      </a:r>
-                    </a:p>
-                  </a:txBody>
-                  <a:tcPr marL="54864" marR="54864" marT="27432" marB="27432" anchor="ctr">
-                    <a:solidFill>
-                      <a:srgbClr val="FFFFFF"/>
-                    </a:solidFill>
-                  </a:tcPr>
-                </a:tc>
-                <a:tc>
-                  <a:txBody>
-                    <a:bodyPr/>
-                    <a:lstStyle/>
-                    <a:p>
-                      <a:pPr>
-                        <a:defRPr sz="650" b="0">
-                          <a:solidFill>
-                            <a:srgbClr val="0D1117"/>
-                          </a:solidFill>
-                          <a:latin typeface="Inter"/>
-                        </a:defRPr>
-                      </a:pPr>
-                      <a:r>
-                        <a:rPr>
-                          <a:latin typeface="Inter"/>
-                        </a:rPr>
-                        <a:t>sha256:aaaaaaaaaaaaaaaaaaaaaaaaaaaaaaaaaaaaaaaaaaaaaaaaaaaaaaaaaaaaaaaa</a:t>
-                      </a:r>
-                    </a:p>
-                  </a:txBody>
-                  <a:tcPr marL="54864" marR="54864" marT="27432" marB="27432" anchor="ctr">
-                    <a:solidFill>
-                      <a:srgbClr val="FFFFFF"/>
+                        <a:defRPr sz="720" b="1">
+                          <a:solidFill>
+                            <a:srgbClr val="C6F432"/>
+                          </a:solidFill>
+                          <a:latin typeface="Inter"/>
+                        </a:defRPr>
+                      </a:pPr>
+                      <a:r>
+                        <a:rPr>
+                          <a:latin typeface="Inter"/>
+                        </a:rPr>
+                        <a:t>● Passed</a:t>
+                      </a:r>
+                    </a:p>
+                  </a:txBody>
+                  <a:tcPr marL="54864" marR="54864" marT="27432" marB="27432" anchor="ctr">
+                    <a:solidFill>
+                      <a:srgbClr val="F5F7F9"/>
                     </a:solidFill>
                   </a:tcPr>
                 </a:tc>
@@ -27290,7 +26063,7 @@
                     <a:lstStyle/>
                     <a:p>
                       <a:pPr>
-                        <a:defRPr sz="650" b="1">
+                        <a:defRPr sz="720" b="1">
                           <a:solidFill>
                             <a:srgbClr val="0D1117"/>
                           </a:solidFill>
@@ -27317,7 +26090,7 @@
                     <a:lstStyle/>
                     <a:p>
                       <a:pPr>
-                        <a:defRPr sz="650" b="0">
+                        <a:defRPr sz="720" b="0">
                           <a:solidFill>
                             <a:srgbClr val="0D1117"/>
                           </a:solidFill>
@@ -27344,7 +26117,7 @@
                     <a:lstStyle/>
                     <a:p>
                       <a:pPr>
-                        <a:defRPr sz="650" b="0">
+                        <a:defRPr sz="720" b="0">
                           <a:solidFill>
                             <a:srgbClr val="0D1117"/>
                           </a:solidFill>
@@ -27355,7 +26128,7 @@
                         <a:rPr>
                           <a:latin typeface="Inter"/>
                         </a:rPr>
-                        <a:t>gradient_tool</a:t>
+                        <a:t>list_portfolios; get_portfolio_structure</a:t>
                       </a:r>
                     </a:p>
                   </a:txBody>
@@ -27371,7 +26144,7 @@
                     <a:lstStyle/>
                     <a:p>
                       <a:pPr>
-                        <a:defRPr sz="650" b="0">
+                        <a:defRPr sz="720" b="0">
                           <a:solidFill>
                             <a:srgbClr val="0D1117"/>
                           </a:solidFill>
@@ -27382,7 +26155,7 @@
                         <a:rPr>
                           <a:latin typeface="Inter"/>
                         </a:rPr>
-                        <a:t>list_portfolios; get_portfolio_structure</a:t>
+                        <a:t>2026-06-30</a:t>
                       </a:r>
                     </a:p>
                   </a:txBody>
@@ -27398,126 +26171,18 @@
                     <a:lstStyle/>
                     <a:p>
                       <a:pPr>
-                        <a:defRPr sz="650" b="0">
-                          <a:solidFill>
-                            <a:srgbClr val="0D1117"/>
-                          </a:solidFill>
-                          <a:latin typeface="Inter"/>
-                        </a:defRPr>
-                      </a:pPr>
-                      <a:r>
-                        <a:rPr>
-                          <a:latin typeface="Inter"/>
-                        </a:rPr>
-                        <a:t>allocation_tree</a:t>
-                      </a:r>
-                    </a:p>
-                  </a:txBody>
-                  <a:tcPr marL="54864" marR="54864" marT="27432" marB="27432" anchor="ctr">
-                    <a:solidFill>
-                      <a:srgbClr val="F5F7F9"/>
-                    </a:solidFill>
-                  </a:tcPr>
-                </a:tc>
-                <a:tc>
-                  <a:txBody>
-                    <a:bodyPr/>
-                    <a:lstStyle/>
-                    <a:p>
-                      <a:pPr>
-                        <a:defRPr sz="650" b="0">
-                          <a:solidFill>
-                            <a:srgbClr val="0D1117"/>
-                          </a:solidFill>
-                          <a:latin typeface="Inter"/>
-                        </a:defRPr>
-                      </a:pPr>
-                      <a:r>
-                        <a:rPr>
-                          <a:latin typeface="Inter"/>
-                        </a:rPr>
-                        <a:t>2026-06-30</a:t>
-                      </a:r>
-                    </a:p>
-                  </a:txBody>
-                  <a:tcPr marL="54864" marR="54864" marT="27432" marB="27432" anchor="ctr">
-                    <a:solidFill>
-                      <a:srgbClr val="F5F7F9"/>
-                    </a:solidFill>
-                  </a:tcPr>
-                </a:tc>
-                <a:tc>
-                  <a:txBody>
-                    <a:bodyPr/>
-                    <a:lstStyle/>
-                    <a:p>
-                      <a:pPr>
-                        <a:defRPr sz="650" b="0">
-                          <a:solidFill>
-                            <a:srgbClr val="0D1117"/>
-                          </a:solidFill>
-                          <a:latin typeface="Inter"/>
-                        </a:defRPr>
-                      </a:pPr>
-                      <a:r>
-                        <a:rPr>
-                          <a:latin typeface="Inter"/>
-                        </a:rPr>
-                        <a:t>Illustrative sample data</a:t>
-                      </a:r>
-                    </a:p>
-                  </a:txBody>
-                  <a:tcPr marL="54864" marR="54864" marT="27432" marB="27432" anchor="ctr">
-                    <a:solidFill>
-                      <a:srgbClr val="F5F7F9"/>
-                    </a:solidFill>
-                  </a:tcPr>
-                </a:tc>
-                <a:tc>
-                  <a:txBody>
-                    <a:bodyPr/>
-                    <a:lstStyle/>
-                    <a:p>
-                      <a:pPr>
-                        <a:defRPr sz="650" b="0">
-                          <a:solidFill>
-                            <a:srgbClr val="0D1117"/>
-                          </a:solidFill>
-                          <a:latin typeface="Inter"/>
-                        </a:defRPr>
-                      </a:pPr>
-                      <a:r>
-                        <a:rPr>
-                          <a:latin typeface="Inter"/>
-                        </a:rPr>
-                        <a:t>passed</a:t>
-                      </a:r>
-                    </a:p>
-                  </a:txBody>
-                  <a:tcPr marL="54864" marR="54864" marT="27432" marB="27432" anchor="ctr">
-                    <a:solidFill>
-                      <a:srgbClr val="F5F7F9"/>
-                    </a:solidFill>
-                  </a:tcPr>
-                </a:tc>
-                <a:tc>
-                  <a:txBody>
-                    <a:bodyPr/>
-                    <a:lstStyle/>
-                    <a:p>
-                      <a:pPr>
-                        <a:defRPr sz="650" b="0">
-                          <a:solidFill>
-                            <a:srgbClr val="0D1117"/>
-                          </a:solidFill>
-                          <a:latin typeface="Inter"/>
-                        </a:defRPr>
-                      </a:pPr>
-                      <a:r>
-                        <a:rPr>
-                          <a:latin typeface="Inter"/>
-                        </a:rPr>
-                        <a:t>sha256:aaaaaaaaaaaaaaaaaaaaaaaaaaaaaaaaaaaaaaaaaaaaaaaaaaaaaaaaaaaaaaaa</a:t>
+                        <a:defRPr sz="720" b="1">
+                          <a:solidFill>
+                            <a:srgbClr val="C6F432"/>
+                          </a:solidFill>
+                          <a:latin typeface="Inter"/>
+                        </a:defRPr>
+                      </a:pPr>
+                      <a:r>
+                        <a:rPr>
+                          <a:latin typeface="Inter"/>
+                        </a:rPr>
+                        <a:t>● Passed</a:t>
                       </a:r>
                     </a:p>
                   </a:txBody>
@@ -27535,7 +26200,7 @@
                     <a:lstStyle/>
                     <a:p>
                       <a:pPr>
-                        <a:defRPr sz="650" b="1">
+                        <a:defRPr sz="720" b="1">
                           <a:solidFill>
                             <a:srgbClr val="0D1117"/>
                           </a:solidFill>
@@ -27562,7 +26227,7 @@
                     <a:lstStyle/>
                     <a:p>
                       <a:pPr>
-                        <a:defRPr sz="650" b="0">
+                        <a:defRPr sz="720" b="0">
                           <a:solidFill>
                             <a:srgbClr val="0D1117"/>
                           </a:solidFill>
@@ -27589,7 +26254,7 @@
                     <a:lstStyle/>
                     <a:p>
                       <a:pPr>
-                        <a:defRPr sz="650" b="0">
+                        <a:defRPr sz="720" b="0">
                           <a:solidFill>
                             <a:srgbClr val="0D1117"/>
                           </a:solidFill>
@@ -27600,7 +26265,7 @@
                         <a:rPr>
                           <a:latin typeface="Inter"/>
                         </a:rPr>
-                        <a:t>gradient_tool</a:t>
+                        <a:t>check_portfolio_policy</a:t>
                       </a:r>
                     </a:p>
                   </a:txBody>
@@ -27616,7 +26281,7 @@
                     <a:lstStyle/>
                     <a:p>
                       <a:pPr>
-                        <a:defRPr sz="650" b="0">
+                        <a:defRPr sz="720" b="0">
                           <a:solidFill>
                             <a:srgbClr val="0D1117"/>
                           </a:solidFill>
@@ -27627,7 +26292,7 @@
                         <a:rPr>
                           <a:latin typeface="Inter"/>
                         </a:rPr>
-                        <a:t>check_portfolio_policy</a:t>
+                        <a:t>2026-06-30</a:t>
                       </a:r>
                     </a:p>
                   </a:txBody>
@@ -27643,132 +26308,24 @@
                     <a:lstStyle/>
                     <a:p>
                       <a:pPr>
-                        <a:defRPr sz="650" b="0">
-                          <a:solidFill>
-                            <a:srgbClr val="0D1117"/>
-                          </a:solidFill>
-                          <a:latin typeface="Inter"/>
-                        </a:defRPr>
-                      </a:pPr>
-                      <a:r>
-                        <a:rPr>
-                          <a:latin typeface="Inter"/>
-                        </a:rPr>
-                        <a:t>portfolio=test</a:t>
-                      </a:r>
-                    </a:p>
-                  </a:txBody>
-                  <a:tcPr marL="54864" marR="54864" marT="27432" marB="27432" anchor="ctr">
-                    <a:solidFill>
-                      <a:srgbClr val="FFFFFF"/>
-                    </a:solidFill>
-                  </a:tcPr>
-                </a:tc>
-                <a:tc>
-                  <a:txBody>
-                    <a:bodyPr/>
-                    <a:lstStyle/>
-                    <a:p>
-                      <a:pPr>
-                        <a:defRPr sz="650" b="0">
-                          <a:solidFill>
-                            <a:srgbClr val="0D1117"/>
-                          </a:solidFill>
-                          <a:latin typeface="Inter"/>
-                        </a:defRPr>
-                      </a:pPr>
-                      <a:r>
-                        <a:rPr>
-                          <a:latin typeface="Inter"/>
-                        </a:rPr>
-                        <a:t>2026-06-30</a:t>
-                      </a:r>
-                    </a:p>
-                  </a:txBody>
-                  <a:tcPr marL="54864" marR="54864" marT="27432" marB="27432" anchor="ctr">
-                    <a:solidFill>
-                      <a:srgbClr val="FFFFFF"/>
-                    </a:solidFill>
-                  </a:tcPr>
-                </a:tc>
-                <a:tc>
-                  <a:txBody>
-                    <a:bodyPr/>
-                    <a:lstStyle/>
-                    <a:p>
-                      <a:pPr>
-                        <a:defRPr sz="650" b="0">
-                          <a:solidFill>
-                            <a:srgbClr val="0D1117"/>
-                          </a:solidFill>
-                          <a:latin typeface="Inter"/>
-                        </a:defRPr>
-                      </a:pPr>
-                      <a:r>
-                        <a:rPr>
-                          <a:latin typeface="Inter"/>
-                        </a:rPr>
-                        <a:t>Illustrative sample data</a:t>
-                      </a:r>
-                    </a:p>
-                  </a:txBody>
-                  <a:tcPr marL="54864" marR="54864" marT="27432" marB="27432" anchor="ctr">
-                    <a:solidFill>
-                      <a:srgbClr val="FFFFFF"/>
-                    </a:solidFill>
-                  </a:tcPr>
-                </a:tc>
-                <a:tc>
-                  <a:txBody>
-                    <a:bodyPr/>
-                    <a:lstStyle/>
-                    <a:p>
-                      <a:pPr>
-                        <a:defRPr sz="650" b="0">
-                          <a:solidFill>
-                            <a:srgbClr val="0D1117"/>
-                          </a:solidFill>
-                          <a:latin typeface="Inter"/>
-                        </a:defRPr>
-                      </a:pPr>
-                      <a:r>
-                        <a:rPr>
-                          <a:latin typeface="Inter"/>
-                        </a:rPr>
-                        <a:t>passed</a:t>
-                      </a:r>
-                    </a:p>
-                  </a:txBody>
-                  <a:tcPr marL="54864" marR="54864" marT="27432" marB="27432" anchor="ctr">
-                    <a:solidFill>
-                      <a:srgbClr val="FFFFFF"/>
-                    </a:solidFill>
-                  </a:tcPr>
-                </a:tc>
-                <a:tc>
-                  <a:txBody>
-                    <a:bodyPr/>
-                    <a:lstStyle/>
-                    <a:p>
-                      <a:pPr>
-                        <a:defRPr sz="650" b="0">
-                          <a:solidFill>
-                            <a:srgbClr val="0D1117"/>
-                          </a:solidFill>
-                          <a:latin typeface="Inter"/>
-                        </a:defRPr>
-                      </a:pPr>
-                      <a:r>
-                        <a:rPr>
-                          <a:latin typeface="Inter"/>
-                        </a:rPr>
-                        <a:t>sha256:aaaaaaaaaaaaaaaaaaaaaaaaaaaaaaaaaaaaaaaaaaaaaaaaaaaaaaaaaaaaaaaa</a:t>
-                      </a:r>
-                    </a:p>
-                  </a:txBody>
-                  <a:tcPr marL="54864" marR="54864" marT="27432" marB="27432" anchor="ctr">
-                    <a:solidFill>
-                      <a:srgbClr val="FFFFFF"/>
+                        <a:defRPr sz="720" b="1">
+                          <a:solidFill>
+                            <a:srgbClr val="C6F432"/>
+                          </a:solidFill>
+                          <a:latin typeface="Inter"/>
+                        </a:defRPr>
+                      </a:pPr>
+                      <a:r>
+                        <a:rPr>
+                          <a:latin typeface="Inter"/>
+                        </a:rPr>
+                        <a:t>● Passed</a:t>
+                      </a:r>
+                    </a:p>
+                  </a:txBody>
+                  <a:tcPr marL="54864" marR="54864" marT="27432" marB="27432" anchor="ctr">
+                    <a:solidFill>
+                      <a:srgbClr val="F5F7F9"/>
                     </a:solidFill>
                   </a:tcPr>
                 </a:tc>
@@ -27780,7 +26337,7 @@
                     <a:lstStyle/>
                     <a:p>
                       <a:pPr>
-                        <a:defRPr sz="650" b="1">
+                        <a:defRPr sz="720" b="1">
                           <a:solidFill>
                             <a:srgbClr val="0D1117"/>
                           </a:solidFill>
@@ -27807,7 +26364,7 @@
                     <a:lstStyle/>
                     <a:p>
                       <a:pPr>
-                        <a:defRPr sz="650" b="0">
+                        <a:defRPr sz="720" b="0">
                           <a:solidFill>
                             <a:srgbClr val="0D1117"/>
                           </a:solidFill>
@@ -27834,7 +26391,7 @@
                     <a:lstStyle/>
                     <a:p>
                       <a:pPr>
-                        <a:defRPr sz="650" b="0">
+                        <a:defRPr sz="720" b="0">
                           <a:solidFill>
                             <a:srgbClr val="0D1117"/>
                           </a:solidFill>
@@ -27845,7 +26402,7 @@
                         <a:rPr>
                           <a:latin typeface="Inter"/>
                         </a:rPr>
-                        <a:t>gradient_tool</a:t>
+                        <a:t>get_portfolio_exposure</a:t>
                       </a:r>
                     </a:p>
                   </a:txBody>
@@ -27861,7 +26418,7 @@
                     <a:lstStyle/>
                     <a:p>
                       <a:pPr>
-                        <a:defRPr sz="650" b="0">
+                        <a:defRPr sz="720" b="0">
                           <a:solidFill>
                             <a:srgbClr val="0D1117"/>
                           </a:solidFill>
@@ -27872,7 +26429,7 @@
                         <a:rPr>
                           <a:latin typeface="Inter"/>
                         </a:rPr>
-                        <a:t>get_portfolio_exposure</a:t>
+                        <a:t>2026-06-30</a:t>
                       </a:r>
                     </a:p>
                   </a:txBody>
@@ -27888,126 +26445,18 @@
                     <a:lstStyle/>
                     <a:p>
                       <a:pPr>
-                        <a:defRPr sz="650" b="0">
-                          <a:solidFill>
-                            <a:srgbClr val="0D1117"/>
-                          </a:solidFill>
-                          <a:latin typeface="Inter"/>
-                        </a:defRPr>
-                      </a:pPr>
-                      <a:r>
-                        <a:rPr>
-                          <a:latin typeface="Inter"/>
-                        </a:rPr>
-                        <a:t>fixed_income</a:t>
-                      </a:r>
-                    </a:p>
-                  </a:txBody>
-                  <a:tcPr marL="54864" marR="54864" marT="27432" marB="27432" anchor="ctr">
-                    <a:solidFill>
-                      <a:srgbClr val="F5F7F9"/>
-                    </a:solidFill>
-                  </a:tcPr>
-                </a:tc>
-                <a:tc>
-                  <a:txBody>
-                    <a:bodyPr/>
-                    <a:lstStyle/>
-                    <a:p>
-                      <a:pPr>
-                        <a:defRPr sz="650" b="0">
-                          <a:solidFill>
-                            <a:srgbClr val="0D1117"/>
-                          </a:solidFill>
-                          <a:latin typeface="Inter"/>
-                        </a:defRPr>
-                      </a:pPr>
-                      <a:r>
-                        <a:rPr>
-                          <a:latin typeface="Inter"/>
-                        </a:rPr>
-                        <a:t>2026-06-30</a:t>
-                      </a:r>
-                    </a:p>
-                  </a:txBody>
-                  <a:tcPr marL="54864" marR="54864" marT="27432" marB="27432" anchor="ctr">
-                    <a:solidFill>
-                      <a:srgbClr val="F5F7F9"/>
-                    </a:solidFill>
-                  </a:tcPr>
-                </a:tc>
-                <a:tc>
-                  <a:txBody>
-                    <a:bodyPr/>
-                    <a:lstStyle/>
-                    <a:p>
-                      <a:pPr>
-                        <a:defRPr sz="650" b="0">
-                          <a:solidFill>
-                            <a:srgbClr val="0D1117"/>
-                          </a:solidFill>
-                          <a:latin typeface="Inter"/>
-                        </a:defRPr>
-                      </a:pPr>
-                      <a:r>
-                        <a:rPr>
-                          <a:latin typeface="Inter"/>
-                        </a:rPr>
-                        <a:t>Illustrative sample data</a:t>
-                      </a:r>
-                    </a:p>
-                  </a:txBody>
-                  <a:tcPr marL="54864" marR="54864" marT="27432" marB="27432" anchor="ctr">
-                    <a:solidFill>
-                      <a:srgbClr val="F5F7F9"/>
-                    </a:solidFill>
-                  </a:tcPr>
-                </a:tc>
-                <a:tc>
-                  <a:txBody>
-                    <a:bodyPr/>
-                    <a:lstStyle/>
-                    <a:p>
-                      <a:pPr>
-                        <a:defRPr sz="650" b="0">
-                          <a:solidFill>
-                            <a:srgbClr val="0D1117"/>
-                          </a:solidFill>
-                          <a:latin typeface="Inter"/>
-                        </a:defRPr>
-                      </a:pPr>
-                      <a:r>
-                        <a:rPr>
-                          <a:latin typeface="Inter"/>
-                        </a:rPr>
-                        <a:t>passed</a:t>
-                      </a:r>
-                    </a:p>
-                  </a:txBody>
-                  <a:tcPr marL="54864" marR="54864" marT="27432" marB="27432" anchor="ctr">
-                    <a:solidFill>
-                      <a:srgbClr val="F5F7F9"/>
-                    </a:solidFill>
-                  </a:tcPr>
-                </a:tc>
-                <a:tc>
-                  <a:txBody>
-                    <a:bodyPr/>
-                    <a:lstStyle/>
-                    <a:p>
-                      <a:pPr>
-                        <a:defRPr sz="650" b="0">
-                          <a:solidFill>
-                            <a:srgbClr val="0D1117"/>
-                          </a:solidFill>
-                          <a:latin typeface="Inter"/>
-                        </a:defRPr>
-                      </a:pPr>
-                      <a:r>
-                        <a:rPr>
-                          <a:latin typeface="Inter"/>
-                        </a:rPr>
-                        <a:t>sha256:aaaaaaaaaaaaaaaaaaaaaaaaaaaaaaaaaaaaaaaaaaaaaaaaaaaaaaaaaaaaaaaa</a:t>
+                        <a:defRPr sz="720" b="1">
+                          <a:solidFill>
+                            <a:srgbClr val="C6F432"/>
+                          </a:solidFill>
+                          <a:latin typeface="Inter"/>
+                        </a:defRPr>
+                      </a:pPr>
+                      <a:r>
+                        <a:rPr>
+                          <a:latin typeface="Inter"/>
+                        </a:rPr>
+                        <a:t>● Passed</a:t>
                       </a:r>
                     </a:p>
                   </a:txBody>
@@ -28025,7 +26474,7 @@
                     <a:lstStyle/>
                     <a:p>
                       <a:pPr>
-                        <a:defRPr sz="650" b="1">
+                        <a:defRPr sz="720" b="1">
                           <a:solidFill>
                             <a:srgbClr val="0D1117"/>
                           </a:solidFill>
@@ -28052,7 +26501,7 @@
                     <a:lstStyle/>
                     <a:p>
                       <a:pPr>
-                        <a:defRPr sz="650" b="0">
+                        <a:defRPr sz="720" b="0">
                           <a:solidFill>
                             <a:srgbClr val="0D1117"/>
                           </a:solidFill>
@@ -28079,7 +26528,7 @@
                     <a:lstStyle/>
                     <a:p>
                       <a:pPr>
-                        <a:defRPr sz="650" b="0">
+                        <a:defRPr sz="720" b="0">
                           <a:solidFill>
                             <a:srgbClr val="0D1117"/>
                           </a:solidFill>
@@ -28090,7 +26539,7 @@
                         <a:rPr>
                           <a:latin typeface="Inter"/>
                         </a:rPr>
-                        <a:t>gradient_tool</a:t>
+                        <a:t>get_portfolio_historical_returns; get_portfolio_attribution</a:t>
                       </a:r>
                     </a:p>
                   </a:txBody>
@@ -28106,7 +26555,7 @@
                     <a:lstStyle/>
                     <a:p>
                       <a:pPr>
-                        <a:defRPr sz="650" b="0">
+                        <a:defRPr sz="720" b="0">
                           <a:solidFill>
                             <a:srgbClr val="0D1117"/>
                           </a:solidFill>
@@ -28117,7 +26566,7 @@
                         <a:rPr>
                           <a:latin typeface="Inter"/>
                         </a:rPr>
-                        <a:t>get_portfolio_historical_returns; get_portfolio_attribution</a:t>
+                        <a:t>2026-06-30</a:t>
                       </a:r>
                     </a:p>
                   </a:txBody>
@@ -28133,132 +26582,24 @@
                     <a:lstStyle/>
                     <a:p>
                       <a:pPr>
-                        <a:defRPr sz="650" b="0">
-                          <a:solidFill>
-                            <a:srgbClr val="0D1117"/>
-                          </a:solidFill>
-                          <a:latin typeface="Inter"/>
-                        </a:defRPr>
-                      </a:pPr>
-                      <a:r>
-                        <a:rPr>
-                          <a:latin typeface="Inter"/>
-                        </a:rPr>
-                        <a:t>all sections</a:t>
-                      </a:r>
-                    </a:p>
-                  </a:txBody>
-                  <a:tcPr marL="54864" marR="54864" marT="27432" marB="27432" anchor="ctr">
-                    <a:solidFill>
-                      <a:srgbClr val="FFFFFF"/>
-                    </a:solidFill>
-                  </a:tcPr>
-                </a:tc>
-                <a:tc>
-                  <a:txBody>
-                    <a:bodyPr/>
-                    <a:lstStyle/>
-                    <a:p>
-                      <a:pPr>
-                        <a:defRPr sz="650" b="0">
-                          <a:solidFill>
-                            <a:srgbClr val="0D1117"/>
-                          </a:solidFill>
-                          <a:latin typeface="Inter"/>
-                        </a:defRPr>
-                      </a:pPr>
-                      <a:r>
-                        <a:rPr>
-                          <a:latin typeface="Inter"/>
-                        </a:rPr>
-                        <a:t>2026-06-30</a:t>
-                      </a:r>
-                    </a:p>
-                  </a:txBody>
-                  <a:tcPr marL="54864" marR="54864" marT="27432" marB="27432" anchor="ctr">
-                    <a:solidFill>
-                      <a:srgbClr val="FFFFFF"/>
-                    </a:solidFill>
-                  </a:tcPr>
-                </a:tc>
-                <a:tc>
-                  <a:txBody>
-                    <a:bodyPr/>
-                    <a:lstStyle/>
-                    <a:p>
-                      <a:pPr>
-                        <a:defRPr sz="650" b="0">
-                          <a:solidFill>
-                            <a:srgbClr val="0D1117"/>
-                          </a:solidFill>
-                          <a:latin typeface="Inter"/>
-                        </a:defRPr>
-                      </a:pPr>
-                      <a:r>
-                        <a:rPr>
-                          <a:latin typeface="Inter"/>
-                        </a:rPr>
-                        <a:t>Illustrative sample data</a:t>
-                      </a:r>
-                    </a:p>
-                  </a:txBody>
-                  <a:tcPr marL="54864" marR="54864" marT="27432" marB="27432" anchor="ctr">
-                    <a:solidFill>
-                      <a:srgbClr val="FFFFFF"/>
-                    </a:solidFill>
-                  </a:tcPr>
-                </a:tc>
-                <a:tc>
-                  <a:txBody>
-                    <a:bodyPr/>
-                    <a:lstStyle/>
-                    <a:p>
-                      <a:pPr>
-                        <a:defRPr sz="650" b="0">
-                          <a:solidFill>
-                            <a:srgbClr val="0D1117"/>
-                          </a:solidFill>
-                          <a:latin typeface="Inter"/>
-                        </a:defRPr>
-                      </a:pPr>
-                      <a:r>
-                        <a:rPr>
-                          <a:latin typeface="Inter"/>
-                        </a:rPr>
-                        <a:t>passed</a:t>
-                      </a:r>
-                    </a:p>
-                  </a:txBody>
-                  <a:tcPr marL="54864" marR="54864" marT="27432" marB="27432" anchor="ctr">
-                    <a:solidFill>
-                      <a:srgbClr val="FFFFFF"/>
-                    </a:solidFill>
-                  </a:tcPr>
-                </a:tc>
-                <a:tc>
-                  <a:txBody>
-                    <a:bodyPr/>
-                    <a:lstStyle/>
-                    <a:p>
-                      <a:pPr>
-                        <a:defRPr sz="650" b="0">
-                          <a:solidFill>
-                            <a:srgbClr val="0D1117"/>
-                          </a:solidFill>
-                          <a:latin typeface="Inter"/>
-                        </a:defRPr>
-                      </a:pPr>
-                      <a:r>
-                        <a:rPr>
-                          <a:latin typeface="Inter"/>
-                        </a:rPr>
-                        <a:t>sha256:aaaaaaaaaaaaaaaaaaaaaaaaaaaaaaaaaaaaaaaaaaaaaaaaaaaaaaaaaaaaaaaa</a:t>
-                      </a:r>
-                    </a:p>
-                  </a:txBody>
-                  <a:tcPr marL="54864" marR="54864" marT="27432" marB="27432" anchor="ctr">
-                    <a:solidFill>
-                      <a:srgbClr val="FFFFFF"/>
+                        <a:defRPr sz="720" b="1">
+                          <a:solidFill>
+                            <a:srgbClr val="C6F432"/>
+                          </a:solidFill>
+                          <a:latin typeface="Inter"/>
+                        </a:defRPr>
+                      </a:pPr>
+                      <a:r>
+                        <a:rPr>
+                          <a:latin typeface="Inter"/>
+                        </a:rPr>
+                        <a:t>● Passed</a:t>
+                      </a:r>
+                    </a:p>
+                  </a:txBody>
+                  <a:tcPr marL="54864" marR="54864" marT="27432" marB="27432" anchor="ctr">
+                    <a:solidFill>
+                      <a:srgbClr val="F5F7F9"/>
                     </a:solidFill>
                   </a:tcPr>
                 </a:tc>
@@ -28270,7 +26611,7 @@
                     <a:lstStyle/>
                     <a:p>
                       <a:pPr>
-                        <a:defRPr sz="650" b="1">
+                        <a:defRPr sz="720" b="1">
                           <a:solidFill>
                             <a:srgbClr val="0D1117"/>
                           </a:solidFill>
@@ -28297,7 +26638,7 @@
                     <a:lstStyle/>
                     <a:p>
                       <a:pPr>
-                        <a:defRPr sz="650" b="0">
+                        <a:defRPr sz="720" b="0">
                           <a:solidFill>
                             <a:srgbClr val="0D1117"/>
                           </a:solidFill>
@@ -28324,7 +26665,7 @@
                     <a:lstStyle/>
                     <a:p>
                       <a:pPr>
-                        <a:defRPr sz="650" b="0">
+                        <a:defRPr sz="720" b="0">
                           <a:solidFill>
                             <a:srgbClr val="0D1117"/>
                           </a:solidFill>
@@ -28335,7 +26676,7 @@
                         <a:rPr>
                           <a:latin typeface="Inter"/>
                         </a:rPr>
-                        <a:t>gradient_tool</a:t>
+                        <a:t>get_macro_conditions</a:t>
                       </a:r>
                     </a:p>
                   </a:txBody>
@@ -28351,7 +26692,7 @@
                     <a:lstStyle/>
                     <a:p>
                       <a:pPr>
-                        <a:defRPr sz="650" b="0">
+                        <a:defRPr sz="720" b="0">
                           <a:solidFill>
                             <a:srgbClr val="0D1117"/>
                           </a:solidFill>
@@ -28362,7 +26703,7 @@
                         <a:rPr>
                           <a:latin typeface="Inter"/>
                         </a:rPr>
-                        <a:t>get_macro_conditions</a:t>
+                        <a:t>2026-06-30</a:t>
                       </a:r>
                     </a:p>
                   </a:txBody>
@@ -28378,126 +26719,18 @@
                     <a:lstStyle/>
                     <a:p>
                       <a:pPr>
-                        <a:defRPr sz="650" b="0">
-                          <a:solidFill>
-                            <a:srgbClr val="0D1117"/>
-                          </a:solidFill>
-                          <a:latin typeface="Inter"/>
-                        </a:defRPr>
-                      </a:pPr>
-                      <a:r>
-                        <a:rPr>
-                          <a:latin typeface="Inter"/>
-                        </a:rPr>
-                        <a:t>credit_spreads</a:t>
-                      </a:r>
-                    </a:p>
-                  </a:txBody>
-                  <a:tcPr marL="54864" marR="54864" marT="27432" marB="27432" anchor="ctr">
-                    <a:solidFill>
-                      <a:srgbClr val="F5F7F9"/>
-                    </a:solidFill>
-                  </a:tcPr>
-                </a:tc>
-                <a:tc>
-                  <a:txBody>
-                    <a:bodyPr/>
-                    <a:lstStyle/>
-                    <a:p>
-                      <a:pPr>
-                        <a:defRPr sz="650" b="0">
-                          <a:solidFill>
-                            <a:srgbClr val="0D1117"/>
-                          </a:solidFill>
-                          <a:latin typeface="Inter"/>
-                        </a:defRPr>
-                      </a:pPr>
-                      <a:r>
-                        <a:rPr>
-                          <a:latin typeface="Inter"/>
-                        </a:rPr>
-                        <a:t>2026-06-30</a:t>
-                      </a:r>
-                    </a:p>
-                  </a:txBody>
-                  <a:tcPr marL="54864" marR="54864" marT="27432" marB="27432" anchor="ctr">
-                    <a:solidFill>
-                      <a:srgbClr val="F5F7F9"/>
-                    </a:solidFill>
-                  </a:tcPr>
-                </a:tc>
-                <a:tc>
-                  <a:txBody>
-                    <a:bodyPr/>
-                    <a:lstStyle/>
-                    <a:p>
-                      <a:pPr>
-                        <a:defRPr sz="650" b="0">
-                          <a:solidFill>
-                            <a:srgbClr val="0D1117"/>
-                          </a:solidFill>
-                          <a:latin typeface="Inter"/>
-                        </a:defRPr>
-                      </a:pPr>
-                      <a:r>
-                        <a:rPr>
-                          <a:latin typeface="Inter"/>
-                        </a:rPr>
-                        <a:t>Illustrative sample data</a:t>
-                      </a:r>
-                    </a:p>
-                  </a:txBody>
-                  <a:tcPr marL="54864" marR="54864" marT="27432" marB="27432" anchor="ctr">
-                    <a:solidFill>
-                      <a:srgbClr val="F5F7F9"/>
-                    </a:solidFill>
-                  </a:tcPr>
-                </a:tc>
-                <a:tc>
-                  <a:txBody>
-                    <a:bodyPr/>
-                    <a:lstStyle/>
-                    <a:p>
-                      <a:pPr>
-                        <a:defRPr sz="650" b="0">
-                          <a:solidFill>
-                            <a:srgbClr val="0D1117"/>
-                          </a:solidFill>
-                          <a:latin typeface="Inter"/>
-                        </a:defRPr>
-                      </a:pPr>
-                      <a:r>
-                        <a:rPr>
-                          <a:latin typeface="Inter"/>
-                        </a:rPr>
-                        <a:t>passed</a:t>
-                      </a:r>
-                    </a:p>
-                  </a:txBody>
-                  <a:tcPr marL="54864" marR="54864" marT="27432" marB="27432" anchor="ctr">
-                    <a:solidFill>
-                      <a:srgbClr val="F5F7F9"/>
-                    </a:solidFill>
-                  </a:tcPr>
-                </a:tc>
-                <a:tc>
-                  <a:txBody>
-                    <a:bodyPr/>
-                    <a:lstStyle/>
-                    <a:p>
-                      <a:pPr>
-                        <a:defRPr sz="650" b="0">
-                          <a:solidFill>
-                            <a:srgbClr val="0D1117"/>
-                          </a:solidFill>
-                          <a:latin typeface="Inter"/>
-                        </a:defRPr>
-                      </a:pPr>
-                      <a:r>
-                        <a:rPr>
-                          <a:latin typeface="Inter"/>
-                        </a:rPr>
-                        <a:t>sha256:aaaaaaaaaaaaaaaaaaaaaaaaaaaaaaaaaaaaaaaaaaaaaaaaaaaaaaaaaaaaaaaa</a:t>
+                        <a:defRPr sz="720" b="1">
+                          <a:solidFill>
+                            <a:srgbClr val="C6F432"/>
+                          </a:solidFill>
+                          <a:latin typeface="Inter"/>
+                        </a:defRPr>
+                      </a:pPr>
+                      <a:r>
+                        <a:rPr>
+                          <a:latin typeface="Inter"/>
+                        </a:rPr>
+                        <a:t>● Passed</a:t>
                       </a:r>
                     </a:p>
                   </a:txBody>
@@ -28515,7 +26748,7 @@
                     <a:lstStyle/>
                     <a:p>
                       <a:pPr>
-                        <a:defRPr sz="650" b="1">
+                        <a:defRPr sz="720" b="1">
                           <a:solidFill>
                             <a:srgbClr val="0D1117"/>
                           </a:solidFill>
@@ -28542,7 +26775,7 @@
                     <a:lstStyle/>
                     <a:p>
                       <a:pPr>
-                        <a:defRPr sz="650" b="0">
+                        <a:defRPr sz="720" b="0">
                           <a:solidFill>
                             <a:srgbClr val="0D1117"/>
                           </a:solidFill>
@@ -28569,7 +26802,7 @@
                     <a:lstStyle/>
                     <a:p>
                       <a:pPr>
-                        <a:defRPr sz="650" b="0">
+                        <a:defRPr sz="720" b="0">
                           <a:solidFill>
                             <a:srgbClr val="0D1117"/>
                           </a:solidFill>
@@ -28580,7 +26813,7 @@
                         <a:rPr>
                           <a:latin typeface="Inter"/>
                         </a:rPr>
-                        <a:t>gradient_tool</a:t>
+                        <a:t>get_capital_market_assumptions</a:t>
                       </a:r>
                     </a:p>
                   </a:txBody>
@@ -28596,7 +26829,7 @@
                     <a:lstStyle/>
                     <a:p>
                       <a:pPr>
-                        <a:defRPr sz="650" b="0">
+                        <a:defRPr sz="720" b="0">
                           <a:solidFill>
                             <a:srgbClr val="0D1117"/>
                           </a:solidFill>
@@ -28607,7 +26840,7 @@
                         <a:rPr>
                           <a:latin typeface="Inter"/>
                         </a:rPr>
-                        <a:t>get_capital_market_assumptions</a:t>
+                        <a:t>2026-06-15</a:t>
                       </a:r>
                     </a:p>
                   </a:txBody>
@@ -28623,132 +26856,24 @@
                     <a:lstStyle/>
                     <a:p>
                       <a:pPr>
-                        <a:defRPr sz="650" b="0">
-                          <a:solidFill>
-                            <a:srgbClr val="0D1117"/>
-                          </a:solidFill>
-                          <a:latin typeface="Inter"/>
-                        </a:defRPr>
-                      </a:pPr>
-                      <a:r>
-                        <a:rPr>
-                          <a:latin typeface="Inter"/>
-                        </a:rPr>
-                        <a:t>baseline</a:t>
-                      </a:r>
-                    </a:p>
-                  </a:txBody>
-                  <a:tcPr marL="54864" marR="54864" marT="27432" marB="27432" anchor="ctr">
-                    <a:solidFill>
-                      <a:srgbClr val="FFFFFF"/>
-                    </a:solidFill>
-                  </a:tcPr>
-                </a:tc>
-                <a:tc>
-                  <a:txBody>
-                    <a:bodyPr/>
-                    <a:lstStyle/>
-                    <a:p>
-                      <a:pPr>
-                        <a:defRPr sz="650" b="0">
-                          <a:solidFill>
-                            <a:srgbClr val="0D1117"/>
-                          </a:solidFill>
-                          <a:latin typeface="Inter"/>
-                        </a:defRPr>
-                      </a:pPr>
-                      <a:r>
-                        <a:rPr>
-                          <a:latin typeface="Inter"/>
-                        </a:rPr>
-                        <a:t>2026-06-15</a:t>
-                      </a:r>
-                    </a:p>
-                  </a:txBody>
-                  <a:tcPr marL="54864" marR="54864" marT="27432" marB="27432" anchor="ctr">
-                    <a:solidFill>
-                      <a:srgbClr val="FFFFFF"/>
-                    </a:solidFill>
-                  </a:tcPr>
-                </a:tc>
-                <a:tc>
-                  <a:txBody>
-                    <a:bodyPr/>
-                    <a:lstStyle/>
-                    <a:p>
-                      <a:pPr>
-                        <a:defRPr sz="650" b="0">
-                          <a:solidFill>
-                            <a:srgbClr val="0D1117"/>
-                          </a:solidFill>
-                          <a:latin typeface="Inter"/>
-                        </a:defRPr>
-                      </a:pPr>
-                      <a:r>
-                        <a:rPr>
-                          <a:latin typeface="Inter"/>
-                        </a:rPr>
-                        <a:t>Illustrative sample data</a:t>
-                      </a:r>
-                    </a:p>
-                  </a:txBody>
-                  <a:tcPr marL="54864" marR="54864" marT="27432" marB="27432" anchor="ctr">
-                    <a:solidFill>
-                      <a:srgbClr val="FFFFFF"/>
-                    </a:solidFill>
-                  </a:tcPr>
-                </a:tc>
-                <a:tc>
-                  <a:txBody>
-                    <a:bodyPr/>
-                    <a:lstStyle/>
-                    <a:p>
-                      <a:pPr>
-                        <a:defRPr sz="650" b="0">
-                          <a:solidFill>
-                            <a:srgbClr val="0D1117"/>
-                          </a:solidFill>
-                          <a:latin typeface="Inter"/>
-                        </a:defRPr>
-                      </a:pPr>
-                      <a:r>
-                        <a:rPr>
-                          <a:latin typeface="Inter"/>
-                        </a:rPr>
-                        <a:t>passed</a:t>
-                      </a:r>
-                    </a:p>
-                  </a:txBody>
-                  <a:tcPr marL="54864" marR="54864" marT="27432" marB="27432" anchor="ctr">
-                    <a:solidFill>
-                      <a:srgbClr val="FFFFFF"/>
-                    </a:solidFill>
-                  </a:tcPr>
-                </a:tc>
-                <a:tc>
-                  <a:txBody>
-                    <a:bodyPr/>
-                    <a:lstStyle/>
-                    <a:p>
-                      <a:pPr>
-                        <a:defRPr sz="650" b="0">
-                          <a:solidFill>
-                            <a:srgbClr val="0D1117"/>
-                          </a:solidFill>
-                          <a:latin typeface="Inter"/>
-                        </a:defRPr>
-                      </a:pPr>
-                      <a:r>
-                        <a:rPr>
-                          <a:latin typeface="Inter"/>
-                        </a:rPr>
-                        <a:t>sha256:aaaaaaaaaaaaaaaaaaaaaaaaaaaaaaaaaaaaaaaaaaaaaaaaaaaaaaaaaaaaaaaa</a:t>
-                      </a:r>
-                    </a:p>
-                  </a:txBody>
-                  <a:tcPr marL="54864" marR="54864" marT="27432" marB="27432" anchor="ctr">
-                    <a:solidFill>
-                      <a:srgbClr val="FFFFFF"/>
+                        <a:defRPr sz="720" b="1">
+                          <a:solidFill>
+                            <a:srgbClr val="C6F432"/>
+                          </a:solidFill>
+                          <a:latin typeface="Inter"/>
+                        </a:defRPr>
+                      </a:pPr>
+                      <a:r>
+                        <a:rPr>
+                          <a:latin typeface="Inter"/>
+                        </a:rPr>
+                        <a:t>● Passed</a:t>
+                      </a:r>
+                    </a:p>
+                  </a:txBody>
+                  <a:tcPr marL="54864" marR="54864" marT="27432" marB="27432" anchor="ctr">
+                    <a:solidFill>
+                      <a:srgbClr val="F5F7F9"/>
                     </a:solidFill>
                   </a:tcPr>
                 </a:tc>
@@ -28760,7 +26885,7 @@
                     <a:lstStyle/>
                     <a:p>
                       <a:pPr>
-                        <a:defRPr sz="650" b="1">
+                        <a:defRPr sz="720" b="1">
                           <a:solidFill>
                             <a:srgbClr val="0D1117"/>
                           </a:solidFill>
@@ -28787,7 +26912,7 @@
                     <a:lstStyle/>
                     <a:p>
                       <a:pPr>
-                        <a:defRPr sz="650" b="0">
+                        <a:defRPr sz="720" b="0">
                           <a:solidFill>
                             <a:srgbClr val="0D1117"/>
                           </a:solidFill>
@@ -28814,7 +26939,7 @@
                     <a:lstStyle/>
                     <a:p>
                       <a:pPr>
-                        <a:defRPr sz="650" b="0">
+                        <a:defRPr sz="720" b="0">
                           <a:solidFill>
                             <a:srgbClr val="0D1117"/>
                           </a:solidFill>
@@ -28825,7 +26950,7 @@
                         <a:rPr>
                           <a:latin typeface="Inter"/>
                         </a:rPr>
-                        <a:t>gradient_tool</a:t>
+                        <a:t>get_gradient_capabilities</a:t>
                       </a:r>
                     </a:p>
                   </a:txBody>
@@ -28841,7 +26966,7 @@
                     <a:lstStyle/>
                     <a:p>
                       <a:pPr>
-                        <a:defRPr sz="650" b="0">
+                        <a:defRPr sz="720" b="0">
                           <a:solidFill>
                             <a:srgbClr val="0D1117"/>
                           </a:solidFill>
@@ -28852,7 +26977,7 @@
                         <a:rPr>
                           <a:latin typeface="Inter"/>
                         </a:rPr>
-                        <a:t>get_gradient_capabilities</a:t>
+                        <a:t>2026-06-30</a:t>
                       </a:r>
                     </a:p>
                   </a:txBody>
@@ -28868,126 +26993,18 @@
                     <a:lstStyle/>
                     <a:p>
                       <a:pPr>
-                        <a:defRPr sz="650" b="0">
-                          <a:solidFill>
-                            <a:srgbClr val="0D1117"/>
-                          </a:solidFill>
-                          <a:latin typeface="Inter"/>
-                        </a:defRPr>
-                      </a:pPr>
-                      <a:r>
-                        <a:rPr>
-                          <a:latin typeface="Inter"/>
-                        </a:rPr>
-                        <a:t>illustrative</a:t>
-                      </a:r>
-                    </a:p>
-                  </a:txBody>
-                  <a:tcPr marL="54864" marR="54864" marT="27432" marB="27432" anchor="ctr">
-                    <a:solidFill>
-                      <a:srgbClr val="F5F7F9"/>
-                    </a:solidFill>
-                  </a:tcPr>
-                </a:tc>
-                <a:tc>
-                  <a:txBody>
-                    <a:bodyPr/>
-                    <a:lstStyle/>
-                    <a:p>
-                      <a:pPr>
-                        <a:defRPr sz="650" b="0">
-                          <a:solidFill>
-                            <a:srgbClr val="0D1117"/>
-                          </a:solidFill>
-                          <a:latin typeface="Inter"/>
-                        </a:defRPr>
-                      </a:pPr>
-                      <a:r>
-                        <a:rPr>
-                          <a:latin typeface="Inter"/>
-                        </a:rPr>
-                        <a:t>2026-06-30</a:t>
-                      </a:r>
-                    </a:p>
-                  </a:txBody>
-                  <a:tcPr marL="54864" marR="54864" marT="27432" marB="27432" anchor="ctr">
-                    <a:solidFill>
-                      <a:srgbClr val="F5F7F9"/>
-                    </a:solidFill>
-                  </a:tcPr>
-                </a:tc>
-                <a:tc>
-                  <a:txBody>
-                    <a:bodyPr/>
-                    <a:lstStyle/>
-                    <a:p>
-                      <a:pPr>
-                        <a:defRPr sz="650" b="0">
-                          <a:solidFill>
-                            <a:srgbClr val="0D1117"/>
-                          </a:solidFill>
-                          <a:latin typeface="Inter"/>
-                        </a:defRPr>
-                      </a:pPr>
-                      <a:r>
-                        <a:rPr>
-                          <a:latin typeface="Inter"/>
-                        </a:rPr>
-                        <a:t>Illustrative sample data</a:t>
-                      </a:r>
-                    </a:p>
-                  </a:txBody>
-                  <a:tcPr marL="54864" marR="54864" marT="27432" marB="27432" anchor="ctr">
-                    <a:solidFill>
-                      <a:srgbClr val="F5F7F9"/>
-                    </a:solidFill>
-                  </a:tcPr>
-                </a:tc>
-                <a:tc>
-                  <a:txBody>
-                    <a:bodyPr/>
-                    <a:lstStyle/>
-                    <a:p>
-                      <a:pPr>
-                        <a:defRPr sz="650" b="0">
-                          <a:solidFill>
-                            <a:srgbClr val="0D1117"/>
-                          </a:solidFill>
-                          <a:latin typeface="Inter"/>
-                        </a:defRPr>
-                      </a:pPr>
-                      <a:r>
-                        <a:rPr>
-                          <a:latin typeface="Inter"/>
-                        </a:rPr>
-                        <a:t>advisory</a:t>
-                      </a:r>
-                    </a:p>
-                  </a:txBody>
-                  <a:tcPr marL="54864" marR="54864" marT="27432" marB="27432" anchor="ctr">
-                    <a:solidFill>
-                      <a:srgbClr val="F5F7F9"/>
-                    </a:solidFill>
-                  </a:tcPr>
-                </a:tc>
-                <a:tc>
-                  <a:txBody>
-                    <a:bodyPr/>
-                    <a:lstStyle/>
-                    <a:p>
-                      <a:pPr>
-                        <a:defRPr sz="650" b="0">
-                          <a:solidFill>
-                            <a:srgbClr val="0D1117"/>
-                          </a:solidFill>
-                          <a:latin typeface="Inter"/>
-                        </a:defRPr>
-                      </a:pPr>
-                      <a:r>
-                        <a:rPr>
-                          <a:latin typeface="Inter"/>
-                        </a:rPr>
-                        <a:t>sha256:aaaaaaaaaaaaaaaaaaaaaaaaaaaaaaaaaaaaaaaaaaaaaaaaaaaaaaaaaaaaaaaa</a:t>
+                        <a:defRPr sz="720" b="1">
+                          <a:solidFill>
+                            <a:srgbClr val="F2A93B"/>
+                          </a:solidFill>
+                          <a:latin typeface="Inter"/>
+                        </a:defRPr>
+                      </a:pPr>
+                      <a:r>
+                        <a:rPr>
+                          <a:latin typeface="Inter"/>
+                        </a:rPr>
+                        <a:t>● Advisory</a:t>
                       </a:r>
                     </a:p>
                   </a:txBody>
@@ -29004,7 +27021,7 @@
       </p:graphicFrame>
       <p:sp>
         <p:nvSpPr>
-          <p:cNvPr id="9" name="TextBox 8"/>
+          <p:cNvPr id="8" name="TextBox 7"/>
           <p:cNvSpPr txBox="1"/>
           <p:nvPr/>
         </p:nvSpPr>
@@ -29046,7 +27063,7 @@
       </p:sp>
       <p:sp>
         <p:nvSpPr>
-          <p:cNvPr id="10" name="Rectangle 9"/>
+          <p:cNvPr id="9" name="Rectangle 8"/>
           <p:cNvSpPr/>
           <p:nvPr/>
         </p:nvSpPr>
@@ -29095,7 +27112,7 @@
       </p:sp>
       <p:sp>
         <p:nvSpPr>
-          <p:cNvPr id="11" name="TextBox 10"/>
+          <p:cNvPr id="10" name="TextBox 9"/>
           <p:cNvSpPr txBox="1"/>
           <p:nvPr/>
         </p:nvSpPr>
@@ -29137,7 +27154,7 @@
       </p:sp>
       <p:sp>
         <p:nvSpPr>
-          <p:cNvPr id="12" name="TextBox 11"/>
+          <p:cNvPr id="11" name="TextBox 10"/>
           <p:cNvSpPr txBox="1"/>
           <p:nvPr/>
         </p:nvSpPr>
@@ -29179,7 +27196,7 @@
       </p:sp>
       <p:sp>
         <p:nvSpPr>
-          <p:cNvPr id="13" name="TextBox 12"/>
+          <p:cNvPr id="12" name="TextBox 11"/>
           <p:cNvSpPr txBox="1"/>
           <p:nvPr/>
         </p:nvSpPr>
@@ -29294,48 +27311,6 @@
         </p:nvSpPr>
         <p:spPr>
           <a:xfrm>
-            <a:off x="5897880" y="310896"/>
-            <a:ext cx="4800600" cy="256032"/>
-          </a:xfrm>
-          <a:prstGeom prst="rect">
-            <a:avLst/>
-          </a:prstGeom>
-          <a:noFill/>
-        </p:spPr>
-        <p:txBody>
-          <a:bodyPr wrap="none" lIns="9144" rIns="9144" tIns="9144" bIns="9144" anchor="t">
-            <a:spAutoFit/>
-          </a:bodyPr>
-          <a:lstStyle/>
-          <a:p>
-            <a:pPr algn="r">
-              <a:spcAft>
-                <a:spcPts val="0"/>
-              </a:spcAft>
-              <a:defRPr sz="680" b="1">
-                <a:solidFill>
-                  <a:srgbClr val="4F6B00"/>
-                </a:solidFill>
-                <a:latin typeface="Inter"/>
-              </a:defRPr>
-            </a:pPr>
-            <a:r>
-              <a:rPr>
-                <a:latin typeface="Inter"/>
-              </a:rPr>
-              <a:t>Illustrative, Gradient Maintained — demo data, not the client's holdings or managers</a:t>
-            </a:r>
-          </a:p>
-        </p:txBody>
-      </p:sp>
-      <p:sp>
-        <p:nvSpPr>
-          <p:cNvPr id="4" name="TextBox 3"/>
-          <p:cNvSpPr txBox="1"/>
-          <p:nvPr/>
-        </p:nvSpPr>
-        <p:spPr>
-          <a:xfrm>
             <a:off x="640080" y="566928"/>
             <a:ext cx="10058400" cy="530352"/>
           </a:xfrm>
@@ -29372,7 +27347,7 @@
       </p:sp>
       <p:sp>
         <p:nvSpPr>
-          <p:cNvPr id="5" name="Rectangle 4"/>
+          <p:cNvPr id="4" name="Rectangle 3"/>
           <p:cNvSpPr/>
           <p:nvPr/>
         </p:nvSpPr>
@@ -29421,7 +27396,7 @@
       </p:sp>
       <p:sp>
         <p:nvSpPr>
-          <p:cNvPr id="6" name="Rectangle 5"/>
+          <p:cNvPr id="5" name="Rectangle 4"/>
           <p:cNvSpPr/>
           <p:nvPr/>
         </p:nvSpPr>
@@ -29470,7 +27445,7 @@
       </p:sp>
       <p:sp>
         <p:nvSpPr>
-          <p:cNvPr id="7" name="TextBox 6"/>
+          <p:cNvPr id="6" name="TextBox 5"/>
           <p:cNvSpPr txBox="1"/>
           <p:nvPr/>
         </p:nvSpPr>
@@ -29512,14 +27487,14 @@
       </p:sp>
       <p:sp>
         <p:nvSpPr>
-          <p:cNvPr id="8" name="Rectangle 7"/>
+          <p:cNvPr id="7" name="Rectangle 6"/>
           <p:cNvSpPr/>
           <p:nvPr/>
         </p:nvSpPr>
         <p:spPr>
           <a:xfrm>
             <a:off x="640080" y="1325880"/>
-            <a:ext cx="10908792" cy="790104"/>
+            <a:ext cx="10908792" cy="798077"/>
           </a:xfrm>
           <a:prstGeom prst="rect">
             <a:avLst/>
@@ -29561,14 +27536,14 @@
       </p:sp>
       <p:sp>
         <p:nvSpPr>
-          <p:cNvPr id="9" name="Rectangle 8"/>
+          <p:cNvPr id="8" name="Rectangle 7"/>
           <p:cNvSpPr/>
           <p:nvPr/>
         </p:nvSpPr>
         <p:spPr>
           <a:xfrm>
             <a:off x="640080" y="1325880"/>
-            <a:ext cx="54864" cy="790104"/>
+            <a:ext cx="54864" cy="798077"/>
           </a:xfrm>
           <a:prstGeom prst="rect">
             <a:avLst/>
@@ -29610,7 +27585,7 @@
       </p:sp>
       <p:sp>
         <p:nvSpPr>
-          <p:cNvPr id="10" name="TextBox 9"/>
+          <p:cNvPr id="9" name="TextBox 8"/>
           <p:cNvSpPr txBox="1"/>
           <p:nvPr/>
         </p:nvSpPr>
@@ -29652,14 +27627,14 @@
       </p:sp>
       <p:sp>
         <p:nvSpPr>
-          <p:cNvPr id="11" name="TextBox 10"/>
+          <p:cNvPr id="10" name="TextBox 9"/>
           <p:cNvSpPr txBox="1"/>
           <p:nvPr/>
         </p:nvSpPr>
         <p:spPr>
           <a:xfrm>
             <a:off x="804671" y="1719072"/>
-            <a:ext cx="10616184" cy="305472"/>
+            <a:ext cx="10616184" cy="313445"/>
           </a:xfrm>
           <a:prstGeom prst="rect">
             <a:avLst/>
@@ -29694,13 +27669,13 @@
       </p:sp>
       <p:sp>
         <p:nvSpPr>
-          <p:cNvPr id="12" name="TextBox 11"/>
+          <p:cNvPr id="11" name="TextBox 10"/>
           <p:cNvSpPr txBox="1"/>
           <p:nvPr/>
         </p:nvSpPr>
         <p:spPr>
           <a:xfrm>
-            <a:off x="640080" y="2225712"/>
+            <a:off x="640080" y="2233685"/>
             <a:ext cx="10908792" cy="201168"/>
           </a:xfrm>
           <a:prstGeom prst="rect">
@@ -29736,15 +27711,15 @@
       </p:sp>
       <p:graphicFrame>
         <p:nvGraphicFramePr>
-          <p:cNvPr id="13" name="Table 12"/>
+          <p:cNvPr id="12" name="Table 11"/>
           <p:cNvGraphicFramePr>
             <a:graphicFrameLocks noGrp="1"/>
           </p:cNvGraphicFramePr>
           <p:nvPr/>
         </p:nvGraphicFramePr>
         <p:xfrm>
-          <a:off x="640080" y="2500032"/>
-          <a:ext cx="10908792" cy="1276260"/>
+          <a:off x="640080" y="2508005"/>
+          <a:ext cx="10908792" cy="1291907"/>
         </p:xfrm>
         <a:graphic>
           <a:graphicData uri="http://schemas.openxmlformats.org/drawingml/2006/table">
@@ -29758,7 +27733,7 @@
                 <a:gridCol w="2965704"/>
                 <a:gridCol w="2965704"/>
               </a:tblGrid>
-              <a:tr h="319065">
+              <a:tr h="322976">
                 <a:tc>
                   <a:txBody>
                     <a:bodyPr/>
@@ -29868,7 +27843,7 @@
                   </a:tcPr>
                 </a:tc>
               </a:tr>
-              <a:tr h="319065">
+              <a:tr h="322976">
                 <a:tc>
                   <a:txBody>
                     <a:bodyPr/>
@@ -29978,7 +27953,7 @@
                   </a:tcPr>
                 </a:tc>
               </a:tr>
-              <a:tr h="319065">
+              <a:tr h="322976">
                 <a:tc>
                   <a:txBody>
                     <a:bodyPr/>
@@ -30088,7 +28063,7 @@
                   </a:tcPr>
                 </a:tc>
               </a:tr>
-              <a:tr h="319065">
+              <a:tr h="322979">
                 <a:tc>
                   <a:txBody>
                     <a:bodyPr/>
@@ -30204,14 +28179,14 @@
       </p:graphicFrame>
       <p:sp>
         <p:nvSpPr>
-          <p:cNvPr id="14" name="Rectangle 13"/>
+          <p:cNvPr id="13" name="Rectangle 12"/>
           <p:cNvSpPr/>
           <p:nvPr/>
         </p:nvSpPr>
         <p:spPr>
           <a:xfrm>
-            <a:off x="640080" y="3886021"/>
-            <a:ext cx="10908792" cy="790104"/>
+            <a:off x="640080" y="3909641"/>
+            <a:ext cx="10908792" cy="798077"/>
           </a:xfrm>
           <a:prstGeom prst="rect">
             <a:avLst/>
@@ -30253,14 +28228,14 @@
       </p:sp>
       <p:sp>
         <p:nvSpPr>
-          <p:cNvPr id="15" name="Rectangle 14"/>
+          <p:cNvPr id="14" name="Rectangle 13"/>
           <p:cNvSpPr/>
           <p:nvPr/>
         </p:nvSpPr>
         <p:spPr>
           <a:xfrm>
-            <a:off x="640080" y="3886021"/>
-            <a:ext cx="54864" cy="790104"/>
+            <a:off x="640080" y="3909641"/>
+            <a:ext cx="54864" cy="798077"/>
           </a:xfrm>
           <a:prstGeom prst="rect">
             <a:avLst/>
@@ -30302,13 +28277,13 @@
       </p:sp>
       <p:sp>
         <p:nvSpPr>
-          <p:cNvPr id="16" name="TextBox 15"/>
+          <p:cNvPr id="15" name="TextBox 14"/>
           <p:cNvSpPr txBox="1"/>
           <p:nvPr/>
         </p:nvSpPr>
         <p:spPr>
           <a:xfrm>
-            <a:off x="804671" y="3995749"/>
+            <a:off x="804671" y="4019369"/>
             <a:ext cx="10616184" cy="228600"/>
           </a:xfrm>
           <a:prstGeom prst="rect">
@@ -30344,14 +28319,14 @@
       </p:sp>
       <p:sp>
         <p:nvSpPr>
-          <p:cNvPr id="17" name="TextBox 16"/>
+          <p:cNvPr id="16" name="TextBox 15"/>
           <p:cNvSpPr txBox="1"/>
           <p:nvPr/>
         </p:nvSpPr>
         <p:spPr>
           <a:xfrm>
-            <a:off x="804671" y="4279213"/>
-            <a:ext cx="10616184" cy="305472"/>
+            <a:off x="804671" y="4302833"/>
+            <a:ext cx="10616184" cy="313445"/>
           </a:xfrm>
           <a:prstGeom prst="rect">
             <a:avLst/>
@@ -30386,14 +28361,14 @@
       </p:sp>
       <p:sp>
         <p:nvSpPr>
-          <p:cNvPr id="18" name="Rectangle 17"/>
+          <p:cNvPr id="17" name="Rectangle 16"/>
           <p:cNvSpPr/>
           <p:nvPr/>
         </p:nvSpPr>
         <p:spPr>
           <a:xfrm>
-            <a:off x="640080" y="4785854"/>
-            <a:ext cx="10908792" cy="1432065"/>
+            <a:off x="640080" y="4817447"/>
+            <a:ext cx="10908792" cy="1400472"/>
           </a:xfrm>
           <a:prstGeom prst="rect">
             <a:avLst/>
@@ -30435,14 +28410,14 @@
       </p:sp>
       <p:sp>
         <p:nvSpPr>
-          <p:cNvPr id="19" name="Rectangle 18"/>
+          <p:cNvPr id="18" name="Rectangle 17"/>
           <p:cNvSpPr/>
           <p:nvPr/>
         </p:nvSpPr>
         <p:spPr>
           <a:xfrm>
-            <a:off x="640080" y="4785854"/>
-            <a:ext cx="54864" cy="1432065"/>
+            <a:off x="640080" y="4817447"/>
+            <a:ext cx="54864" cy="1400472"/>
           </a:xfrm>
           <a:prstGeom prst="rect">
             <a:avLst/>
@@ -30484,13 +28459,13 @@
       </p:sp>
       <p:sp>
         <p:nvSpPr>
-          <p:cNvPr id="20" name="TextBox 19"/>
+          <p:cNvPr id="19" name="TextBox 18"/>
           <p:cNvSpPr txBox="1"/>
           <p:nvPr/>
         </p:nvSpPr>
         <p:spPr>
           <a:xfrm>
-            <a:off x="804671" y="4895582"/>
+            <a:off x="804671" y="4927175"/>
             <a:ext cx="10616184" cy="228600"/>
           </a:xfrm>
           <a:prstGeom prst="rect">
@@ -30519,21 +28494,21 @@
               <a:rPr>
                 <a:latin typeface="Inter"/>
               </a:rPr>
-              <a:t>Key judgment — headline signal</a:t>
+              <a:t>Key judgment — Credit shift</a:t>
             </a:r>
           </a:p>
         </p:txBody>
       </p:sp>
       <p:sp>
         <p:nvSpPr>
-          <p:cNvPr id="21" name="TextBox 20"/>
+          <p:cNvPr id="20" name="TextBox 19"/>
           <p:cNvSpPr txBox="1"/>
           <p:nvPr/>
         </p:nvSpPr>
         <p:spPr>
           <a:xfrm>
-            <a:off x="804671" y="5179046"/>
-            <a:ext cx="10616184" cy="947433"/>
+            <a:off x="804671" y="5210639"/>
+            <a:ext cx="10616184" cy="915840"/>
           </a:xfrm>
           <a:prstGeom prst="rect">
             <a:avLst/>
@@ -30561,14 +28536,14 @@
               <a:rPr>
                 <a:latin typeface="Inter"/>
               </a:rPr>
-              <a:t>Observation: The sample report carries a credit-allocation signal above the prior neutral baseline [S1]. Why it matters: This signal focuses oversight on the report's most decision-relevant condition. Uncertainty: Evidence coverage may exclude newer or more detailed observations. What would change the view: A governed refresh showing a different signal or breached threshold.</a:t>
+              <a:t>Observation: The proposal moves 3.0pp from core-plus credit to core government and investment-grade bonds [S1]. Why it matters: It lowers credit spread risk while keeping the fixed-income weight unchanged. Uncertainty: Security-level duration and transaction costs are not yet confirmed. What would change the view: Confirmed costs above the expected yield give-up.</a:t>
             </a:r>
           </a:p>
         </p:txBody>
       </p:sp>
       <p:sp>
         <p:nvSpPr>
-          <p:cNvPr id="22" name="Rectangle 21"/>
+          <p:cNvPr id="21" name="Rectangle 20"/>
           <p:cNvSpPr/>
           <p:nvPr/>
         </p:nvSpPr>
@@ -30617,7 +28592,7 @@
       </p:sp>
       <p:sp>
         <p:nvSpPr>
-          <p:cNvPr id="23" name="TextBox 22"/>
+          <p:cNvPr id="22" name="TextBox 21"/>
           <p:cNvSpPr txBox="1"/>
           <p:nvPr/>
         </p:nvSpPr>
@@ -30659,7 +28634,7 @@
       </p:sp>
       <p:sp>
         <p:nvSpPr>
-          <p:cNvPr id="24" name="TextBox 23"/>
+          <p:cNvPr id="23" name="TextBox 22"/>
           <p:cNvSpPr txBox="1"/>
           <p:nvPr/>
         </p:nvSpPr>
@@ -30701,7 +28676,7 @@
       </p:sp>
       <p:sp>
         <p:nvSpPr>
-          <p:cNvPr id="25" name="TextBox 24"/>
+          <p:cNvPr id="24" name="TextBox 23"/>
           <p:cNvSpPr txBox="1"/>
           <p:nvPr/>
         </p:nvSpPr>
@@ -30816,48 +28791,6 @@
         </p:nvSpPr>
         <p:spPr>
           <a:xfrm>
-            <a:off x="5897880" y="310896"/>
-            <a:ext cx="4800600" cy="256032"/>
-          </a:xfrm>
-          <a:prstGeom prst="rect">
-            <a:avLst/>
-          </a:prstGeom>
-          <a:noFill/>
-        </p:spPr>
-        <p:txBody>
-          <a:bodyPr wrap="none" lIns="9144" rIns="9144" tIns="9144" bIns="9144" anchor="t">
-            <a:spAutoFit/>
-          </a:bodyPr>
-          <a:lstStyle/>
-          <a:p>
-            <a:pPr algn="r">
-              <a:spcAft>
-                <a:spcPts val="0"/>
-              </a:spcAft>
-              <a:defRPr sz="680" b="1">
-                <a:solidFill>
-                  <a:srgbClr val="4F6B00"/>
-                </a:solidFill>
-                <a:latin typeface="Inter"/>
-              </a:defRPr>
-            </a:pPr>
-            <a:r>
-              <a:rPr>
-                <a:latin typeface="Inter"/>
-              </a:rPr>
-              <a:t>Illustrative, Gradient Maintained — demo data, not the client's holdings or managers</a:t>
-            </a:r>
-          </a:p>
-        </p:txBody>
-      </p:sp>
-      <p:sp>
-        <p:nvSpPr>
-          <p:cNvPr id="4" name="TextBox 3"/>
-          <p:cNvSpPr txBox="1"/>
-          <p:nvPr/>
-        </p:nvSpPr>
-        <p:spPr>
-          <a:xfrm>
             <a:off x="640080" y="566928"/>
             <a:ext cx="10058400" cy="530352"/>
           </a:xfrm>
@@ -30887,14 +28820,14 @@
               <a:rPr>
                 <a:latin typeface="Inter"/>
               </a:rPr>
-              <a:t>Appendix — Server Metric Methods and Disclosures</a:t>
+              <a:t>Appendix — Sources and methods — continued</a:t>
             </a:r>
           </a:p>
         </p:txBody>
       </p:sp>
       <p:sp>
         <p:nvSpPr>
-          <p:cNvPr id="5" name="Rectangle 4"/>
+          <p:cNvPr id="4" name="Rectangle 3"/>
           <p:cNvSpPr/>
           <p:nvPr/>
         </p:nvSpPr>
@@ -30943,7 +28876,7 @@
       </p:sp>
       <p:sp>
         <p:nvSpPr>
-          <p:cNvPr id="6" name="Rectangle 5"/>
+          <p:cNvPr id="5" name="Rectangle 4"/>
           <p:cNvSpPr/>
           <p:nvPr/>
         </p:nvSpPr>
@@ -30992,7 +28925,7 @@
       </p:sp>
       <p:sp>
         <p:nvSpPr>
-          <p:cNvPr id="7" name="TextBox 6"/>
+          <p:cNvPr id="6" name="TextBox 5"/>
           <p:cNvSpPr txBox="1"/>
           <p:nvPr/>
         </p:nvSpPr>
@@ -31027,14 +28960,14 @@
               <a:rPr>
                 <a:latin typeface="Inter"/>
               </a:rPr>
-              <a:t>B</a:t>
+              <a:t>A</a:t>
             </a:r>
           </a:p>
         </p:txBody>
       </p:sp>
       <p:sp>
         <p:nvSpPr>
-          <p:cNvPr id="8" name="TextBox 7"/>
+          <p:cNvPr id="7" name="TextBox 6"/>
           <p:cNvSpPr txBox="1"/>
           <p:nvPr/>
         </p:nvSpPr>
@@ -31069,6 +29002,1288 @@
               <a:rPr>
                 <a:latin typeface="Inter"/>
               </a:rPr>
+              <a:t>SOURCE AUDIT TRAIL</a:t>
+            </a:r>
+          </a:p>
+        </p:txBody>
+      </p:sp>
+      <p:graphicFrame>
+        <p:nvGraphicFramePr>
+          <p:cNvPr id="8" name="Table 7"/>
+          <p:cNvGraphicFramePr>
+            <a:graphicFrameLocks noGrp="1"/>
+          </p:cNvGraphicFramePr>
+          <p:nvPr/>
+        </p:nvGraphicFramePr>
+        <p:xfrm>
+          <a:off x="640080" y="1600200"/>
+          <a:ext cx="10908792" cy="4416552"/>
+        </p:xfrm>
+        <a:graphic>
+          <a:graphicData uri="http://schemas.openxmlformats.org/drawingml/2006/table">
+            <a:tbl>
+              <a:tblPr firstRow="1" bandRow="1">
+                <a:tableStyleId>{5C22544A-7EE6-4342-B048-85BDC9FD1C3A}</a:tableStyleId>
+              </a:tblPr>
+              <a:tblGrid>
+                <a:gridCol w="2011680"/>
+                <a:gridCol w="4448556"/>
+                <a:gridCol w="4448556"/>
+              </a:tblGrid>
+              <a:tr h="490728">
+                <a:tc>
+                  <a:txBody>
+                    <a:bodyPr/>
+                    <a:lstStyle/>
+                    <a:p>
+                      <a:pPr>
+                        <a:defRPr sz="750" b="1">
+                          <a:solidFill>
+                            <a:srgbClr val="FFFFFF"/>
+                          </a:solidFill>
+                          <a:latin typeface="Inter"/>
+                        </a:defRPr>
+                      </a:pPr>
+                      <a:r>
+                        <a:rPr>
+                          <a:latin typeface="Inter"/>
+                        </a:rPr>
+                        <a:t>Tag</a:t>
+                      </a:r>
+                    </a:p>
+                  </a:txBody>
+                  <a:tcPr marL="54864" marR="54864" marT="27432" marB="27432" anchor="ctr">
+                    <a:solidFill>
+                      <a:srgbClr val="0D1117"/>
+                    </a:solidFill>
+                  </a:tcPr>
+                </a:tc>
+                <a:tc>
+                  <a:txBody>
+                    <a:bodyPr/>
+                    <a:lstStyle/>
+                    <a:p>
+                      <a:pPr>
+                        <a:defRPr sz="750" b="1">
+                          <a:solidFill>
+                            <a:srgbClr val="FFFFFF"/>
+                          </a:solidFill>
+                          <a:latin typeface="Inter"/>
+                        </a:defRPr>
+                      </a:pPr>
+                      <a:r>
+                        <a:rPr>
+                          <a:latin typeface="Inter"/>
+                        </a:rPr>
+                        <a:t>Key parameters</a:t>
+                      </a:r>
+                    </a:p>
+                  </a:txBody>
+                  <a:tcPr marL="54864" marR="54864" marT="27432" marB="27432" anchor="ctr">
+                    <a:solidFill>
+                      <a:srgbClr val="0D1117"/>
+                    </a:solidFill>
+                  </a:tcPr>
+                </a:tc>
+                <a:tc>
+                  <a:txBody>
+                    <a:bodyPr/>
+                    <a:lstStyle/>
+                    <a:p>
+                      <a:pPr>
+                        <a:defRPr sz="750" b="1">
+                          <a:solidFill>
+                            <a:srgbClr val="FFFFFF"/>
+                          </a:solidFill>
+                          <a:latin typeface="Inter"/>
+                        </a:defRPr>
+                      </a:pPr>
+                      <a:r>
+                        <a:rPr>
+                          <a:latin typeface="Inter"/>
+                        </a:rPr>
+                        <a:t>Digest</a:t>
+                      </a:r>
+                    </a:p>
+                  </a:txBody>
+                  <a:tcPr marL="54864" marR="54864" marT="27432" marB="27432" anchor="ctr">
+                    <a:solidFill>
+                      <a:srgbClr val="0D1117"/>
+                    </a:solidFill>
+                  </a:tcPr>
+                </a:tc>
+              </a:tr>
+              <a:tr h="490728">
+                <a:tc>
+                  <a:txBody>
+                    <a:bodyPr/>
+                    <a:lstStyle/>
+                    <a:p>
+                      <a:pPr>
+                        <a:defRPr sz="800" b="1">
+                          <a:solidFill>
+                            <a:srgbClr val="0D1117"/>
+                          </a:solidFill>
+                          <a:latin typeface="Inter"/>
+                        </a:defRPr>
+                      </a:pPr>
+                      <a:r>
+                        <a:rPr>
+                          <a:latin typeface="Inter"/>
+                        </a:rPr>
+                        <a:t>S1</a:t>
+                      </a:r>
+                    </a:p>
+                  </a:txBody>
+                  <a:tcPr marL="54864" marR="54864" marT="27432" marB="27432" anchor="ctr">
+                    <a:solidFill>
+                      <a:srgbClr val="FFFFFF"/>
+                    </a:solidFill>
+                  </a:tcPr>
+                </a:tc>
+                <a:tc>
+                  <a:txBody>
+                    <a:bodyPr/>
+                    <a:lstStyle/>
+                    <a:p>
+                      <a:pPr>
+                        <a:defRPr sz="800" b="0">
+                          <a:solidFill>
+                            <a:srgbClr val="0D1117"/>
+                          </a:solidFill>
+                          <a:latin typeface="Inter"/>
+                        </a:defRPr>
+                      </a:pPr>
+                      <a:r>
+                        <a:rPr>
+                          <a:latin typeface="Inter"/>
+                        </a:rPr>
+                        <a:t>organization=test</a:t>
+                      </a:r>
+                    </a:p>
+                  </a:txBody>
+                  <a:tcPr marL="54864" marR="54864" marT="27432" marB="27432" anchor="ctr">
+                    <a:solidFill>
+                      <a:srgbClr val="FFFFFF"/>
+                    </a:solidFill>
+                  </a:tcPr>
+                </a:tc>
+                <a:tc>
+                  <a:txBody>
+                    <a:bodyPr/>
+                    <a:lstStyle/>
+                    <a:p>
+                      <a:pPr>
+                        <a:defRPr sz="800" b="0">
+                          <a:solidFill>
+                            <a:srgbClr val="0D1117"/>
+                          </a:solidFill>
+                          <a:latin typeface="Inter"/>
+                        </a:defRPr>
+                      </a:pPr>
+                      <a:r>
+                        <a:rPr>
+                          <a:latin typeface="Inter"/>
+                        </a:rPr>
+                        <a:t>sha256:aaaaaaaaaaaaaaaaaaaaaaaaaaaaaaaaaaaaaaaaaaaaaaaaaaaaaaaaaaaaaaaa</a:t>
+                      </a:r>
+                    </a:p>
+                  </a:txBody>
+                  <a:tcPr marL="54864" marR="54864" marT="27432" marB="27432" anchor="ctr">
+                    <a:solidFill>
+                      <a:srgbClr val="FFFFFF"/>
+                    </a:solidFill>
+                  </a:tcPr>
+                </a:tc>
+              </a:tr>
+              <a:tr h="490728">
+                <a:tc>
+                  <a:txBody>
+                    <a:bodyPr/>
+                    <a:lstStyle/>
+                    <a:p>
+                      <a:pPr>
+                        <a:defRPr sz="800" b="1">
+                          <a:solidFill>
+                            <a:srgbClr val="0D1117"/>
+                          </a:solidFill>
+                          <a:latin typeface="Inter"/>
+                        </a:defRPr>
+                      </a:pPr>
+                      <a:r>
+                        <a:rPr>
+                          <a:latin typeface="Inter"/>
+                        </a:rPr>
+                        <a:t>S2</a:t>
+                      </a:r>
+                    </a:p>
+                  </a:txBody>
+                  <a:tcPr marL="54864" marR="54864" marT="27432" marB="27432" anchor="ctr">
+                    <a:solidFill>
+                      <a:srgbClr val="F5F7F9"/>
+                    </a:solidFill>
+                  </a:tcPr>
+                </a:tc>
+                <a:tc>
+                  <a:txBody>
+                    <a:bodyPr/>
+                    <a:lstStyle/>
+                    <a:p>
+                      <a:pPr>
+                        <a:defRPr sz="800" b="0">
+                          <a:solidFill>
+                            <a:srgbClr val="0D1117"/>
+                          </a:solidFill>
+                          <a:latin typeface="Inter"/>
+                        </a:defRPr>
+                      </a:pPr>
+                      <a:r>
+                        <a:rPr>
+                          <a:latin typeface="Inter"/>
+                        </a:rPr>
+                        <a:t>allocation_tree</a:t>
+                      </a:r>
+                    </a:p>
+                  </a:txBody>
+                  <a:tcPr marL="54864" marR="54864" marT="27432" marB="27432" anchor="ctr">
+                    <a:solidFill>
+                      <a:srgbClr val="F5F7F9"/>
+                    </a:solidFill>
+                  </a:tcPr>
+                </a:tc>
+                <a:tc>
+                  <a:txBody>
+                    <a:bodyPr/>
+                    <a:lstStyle/>
+                    <a:p>
+                      <a:pPr>
+                        <a:defRPr sz="800" b="0">
+                          <a:solidFill>
+                            <a:srgbClr val="0D1117"/>
+                          </a:solidFill>
+                          <a:latin typeface="Inter"/>
+                        </a:defRPr>
+                      </a:pPr>
+                      <a:r>
+                        <a:rPr>
+                          <a:latin typeface="Inter"/>
+                        </a:rPr>
+                        <a:t>sha256:aaaaaaaaaaaaaaaaaaaaaaaaaaaaaaaaaaaaaaaaaaaaaaaaaaaaaaaaaaaaaaaa</a:t>
+                      </a:r>
+                    </a:p>
+                  </a:txBody>
+                  <a:tcPr marL="54864" marR="54864" marT="27432" marB="27432" anchor="ctr">
+                    <a:solidFill>
+                      <a:srgbClr val="F5F7F9"/>
+                    </a:solidFill>
+                  </a:tcPr>
+                </a:tc>
+              </a:tr>
+              <a:tr h="490728">
+                <a:tc>
+                  <a:txBody>
+                    <a:bodyPr/>
+                    <a:lstStyle/>
+                    <a:p>
+                      <a:pPr>
+                        <a:defRPr sz="800" b="1">
+                          <a:solidFill>
+                            <a:srgbClr val="0D1117"/>
+                          </a:solidFill>
+                          <a:latin typeface="Inter"/>
+                        </a:defRPr>
+                      </a:pPr>
+                      <a:r>
+                        <a:rPr>
+                          <a:latin typeface="Inter"/>
+                        </a:rPr>
+                        <a:t>S3</a:t>
+                      </a:r>
+                    </a:p>
+                  </a:txBody>
+                  <a:tcPr marL="54864" marR="54864" marT="27432" marB="27432" anchor="ctr">
+                    <a:solidFill>
+                      <a:srgbClr val="FFFFFF"/>
+                    </a:solidFill>
+                  </a:tcPr>
+                </a:tc>
+                <a:tc>
+                  <a:txBody>
+                    <a:bodyPr/>
+                    <a:lstStyle/>
+                    <a:p>
+                      <a:pPr>
+                        <a:defRPr sz="800" b="0">
+                          <a:solidFill>
+                            <a:srgbClr val="0D1117"/>
+                          </a:solidFill>
+                          <a:latin typeface="Inter"/>
+                        </a:defRPr>
+                      </a:pPr>
+                      <a:r>
+                        <a:rPr>
+                          <a:latin typeface="Inter"/>
+                        </a:rPr>
+                        <a:t>portfolio=test</a:t>
+                      </a:r>
+                    </a:p>
+                  </a:txBody>
+                  <a:tcPr marL="54864" marR="54864" marT="27432" marB="27432" anchor="ctr">
+                    <a:solidFill>
+                      <a:srgbClr val="FFFFFF"/>
+                    </a:solidFill>
+                  </a:tcPr>
+                </a:tc>
+                <a:tc>
+                  <a:txBody>
+                    <a:bodyPr/>
+                    <a:lstStyle/>
+                    <a:p>
+                      <a:pPr>
+                        <a:defRPr sz="800" b="0">
+                          <a:solidFill>
+                            <a:srgbClr val="0D1117"/>
+                          </a:solidFill>
+                          <a:latin typeface="Inter"/>
+                        </a:defRPr>
+                      </a:pPr>
+                      <a:r>
+                        <a:rPr>
+                          <a:latin typeface="Inter"/>
+                        </a:rPr>
+                        <a:t>sha256:aaaaaaaaaaaaaaaaaaaaaaaaaaaaaaaaaaaaaaaaaaaaaaaaaaaaaaaaaaaaaaaa</a:t>
+                      </a:r>
+                    </a:p>
+                  </a:txBody>
+                  <a:tcPr marL="54864" marR="54864" marT="27432" marB="27432" anchor="ctr">
+                    <a:solidFill>
+                      <a:srgbClr val="FFFFFF"/>
+                    </a:solidFill>
+                  </a:tcPr>
+                </a:tc>
+              </a:tr>
+              <a:tr h="490728">
+                <a:tc>
+                  <a:txBody>
+                    <a:bodyPr/>
+                    <a:lstStyle/>
+                    <a:p>
+                      <a:pPr>
+                        <a:defRPr sz="800" b="1">
+                          <a:solidFill>
+                            <a:srgbClr val="0D1117"/>
+                          </a:solidFill>
+                          <a:latin typeface="Inter"/>
+                        </a:defRPr>
+                      </a:pPr>
+                      <a:r>
+                        <a:rPr>
+                          <a:latin typeface="Inter"/>
+                        </a:rPr>
+                        <a:t>S4</a:t>
+                      </a:r>
+                    </a:p>
+                  </a:txBody>
+                  <a:tcPr marL="54864" marR="54864" marT="27432" marB="27432" anchor="ctr">
+                    <a:solidFill>
+                      <a:srgbClr val="F5F7F9"/>
+                    </a:solidFill>
+                  </a:tcPr>
+                </a:tc>
+                <a:tc>
+                  <a:txBody>
+                    <a:bodyPr/>
+                    <a:lstStyle/>
+                    <a:p>
+                      <a:pPr>
+                        <a:defRPr sz="800" b="0">
+                          <a:solidFill>
+                            <a:srgbClr val="0D1117"/>
+                          </a:solidFill>
+                          <a:latin typeface="Inter"/>
+                        </a:defRPr>
+                      </a:pPr>
+                      <a:r>
+                        <a:rPr>
+                          <a:latin typeface="Inter"/>
+                        </a:rPr>
+                        <a:t>fixed_income</a:t>
+                      </a:r>
+                    </a:p>
+                  </a:txBody>
+                  <a:tcPr marL="54864" marR="54864" marT="27432" marB="27432" anchor="ctr">
+                    <a:solidFill>
+                      <a:srgbClr val="F5F7F9"/>
+                    </a:solidFill>
+                  </a:tcPr>
+                </a:tc>
+                <a:tc>
+                  <a:txBody>
+                    <a:bodyPr/>
+                    <a:lstStyle/>
+                    <a:p>
+                      <a:pPr>
+                        <a:defRPr sz="800" b="0">
+                          <a:solidFill>
+                            <a:srgbClr val="0D1117"/>
+                          </a:solidFill>
+                          <a:latin typeface="Inter"/>
+                        </a:defRPr>
+                      </a:pPr>
+                      <a:r>
+                        <a:rPr>
+                          <a:latin typeface="Inter"/>
+                        </a:rPr>
+                        <a:t>sha256:aaaaaaaaaaaaaaaaaaaaaaaaaaaaaaaaaaaaaaaaaaaaaaaaaaaaaaaaaaaaaaaa</a:t>
+                      </a:r>
+                    </a:p>
+                  </a:txBody>
+                  <a:tcPr marL="54864" marR="54864" marT="27432" marB="27432" anchor="ctr">
+                    <a:solidFill>
+                      <a:srgbClr val="F5F7F9"/>
+                    </a:solidFill>
+                  </a:tcPr>
+                </a:tc>
+              </a:tr>
+              <a:tr h="490728">
+                <a:tc>
+                  <a:txBody>
+                    <a:bodyPr/>
+                    <a:lstStyle/>
+                    <a:p>
+                      <a:pPr>
+                        <a:defRPr sz="800" b="1">
+                          <a:solidFill>
+                            <a:srgbClr val="0D1117"/>
+                          </a:solidFill>
+                          <a:latin typeface="Inter"/>
+                        </a:defRPr>
+                      </a:pPr>
+                      <a:r>
+                        <a:rPr>
+                          <a:latin typeface="Inter"/>
+                        </a:rPr>
+                        <a:t>S5</a:t>
+                      </a:r>
+                    </a:p>
+                  </a:txBody>
+                  <a:tcPr marL="54864" marR="54864" marT="27432" marB="27432" anchor="ctr">
+                    <a:solidFill>
+                      <a:srgbClr val="FFFFFF"/>
+                    </a:solidFill>
+                  </a:tcPr>
+                </a:tc>
+                <a:tc>
+                  <a:txBody>
+                    <a:bodyPr/>
+                    <a:lstStyle/>
+                    <a:p>
+                      <a:pPr>
+                        <a:defRPr sz="800" b="0">
+                          <a:solidFill>
+                            <a:srgbClr val="0D1117"/>
+                          </a:solidFill>
+                          <a:latin typeface="Inter"/>
+                        </a:defRPr>
+                      </a:pPr>
+                      <a:r>
+                        <a:rPr>
+                          <a:latin typeface="Inter"/>
+                        </a:rPr>
+                        <a:t>all sections</a:t>
+                      </a:r>
+                    </a:p>
+                  </a:txBody>
+                  <a:tcPr marL="54864" marR="54864" marT="27432" marB="27432" anchor="ctr">
+                    <a:solidFill>
+                      <a:srgbClr val="FFFFFF"/>
+                    </a:solidFill>
+                  </a:tcPr>
+                </a:tc>
+                <a:tc>
+                  <a:txBody>
+                    <a:bodyPr/>
+                    <a:lstStyle/>
+                    <a:p>
+                      <a:pPr>
+                        <a:defRPr sz="800" b="0">
+                          <a:solidFill>
+                            <a:srgbClr val="0D1117"/>
+                          </a:solidFill>
+                          <a:latin typeface="Inter"/>
+                        </a:defRPr>
+                      </a:pPr>
+                      <a:r>
+                        <a:rPr>
+                          <a:latin typeface="Inter"/>
+                        </a:rPr>
+                        <a:t>sha256:aaaaaaaaaaaaaaaaaaaaaaaaaaaaaaaaaaaaaaaaaaaaaaaaaaaaaaaaaaaaaaaa</a:t>
+                      </a:r>
+                    </a:p>
+                  </a:txBody>
+                  <a:tcPr marL="54864" marR="54864" marT="27432" marB="27432" anchor="ctr">
+                    <a:solidFill>
+                      <a:srgbClr val="FFFFFF"/>
+                    </a:solidFill>
+                  </a:tcPr>
+                </a:tc>
+              </a:tr>
+              <a:tr h="490728">
+                <a:tc>
+                  <a:txBody>
+                    <a:bodyPr/>
+                    <a:lstStyle/>
+                    <a:p>
+                      <a:pPr>
+                        <a:defRPr sz="800" b="1">
+                          <a:solidFill>
+                            <a:srgbClr val="0D1117"/>
+                          </a:solidFill>
+                          <a:latin typeface="Inter"/>
+                        </a:defRPr>
+                      </a:pPr>
+                      <a:r>
+                        <a:rPr>
+                          <a:latin typeface="Inter"/>
+                        </a:rPr>
+                        <a:t>S6</a:t>
+                      </a:r>
+                    </a:p>
+                  </a:txBody>
+                  <a:tcPr marL="54864" marR="54864" marT="27432" marB="27432" anchor="ctr">
+                    <a:solidFill>
+                      <a:srgbClr val="F5F7F9"/>
+                    </a:solidFill>
+                  </a:tcPr>
+                </a:tc>
+                <a:tc>
+                  <a:txBody>
+                    <a:bodyPr/>
+                    <a:lstStyle/>
+                    <a:p>
+                      <a:pPr>
+                        <a:defRPr sz="800" b="0">
+                          <a:solidFill>
+                            <a:srgbClr val="0D1117"/>
+                          </a:solidFill>
+                          <a:latin typeface="Inter"/>
+                        </a:defRPr>
+                      </a:pPr>
+                      <a:r>
+                        <a:rPr>
+                          <a:latin typeface="Inter"/>
+                        </a:rPr>
+                        <a:t>credit_spreads</a:t>
+                      </a:r>
+                    </a:p>
+                  </a:txBody>
+                  <a:tcPr marL="54864" marR="54864" marT="27432" marB="27432" anchor="ctr">
+                    <a:solidFill>
+                      <a:srgbClr val="F5F7F9"/>
+                    </a:solidFill>
+                  </a:tcPr>
+                </a:tc>
+                <a:tc>
+                  <a:txBody>
+                    <a:bodyPr/>
+                    <a:lstStyle/>
+                    <a:p>
+                      <a:pPr>
+                        <a:defRPr sz="800" b="0">
+                          <a:solidFill>
+                            <a:srgbClr val="0D1117"/>
+                          </a:solidFill>
+                          <a:latin typeface="Inter"/>
+                        </a:defRPr>
+                      </a:pPr>
+                      <a:r>
+                        <a:rPr>
+                          <a:latin typeface="Inter"/>
+                        </a:rPr>
+                        <a:t>sha256:aaaaaaaaaaaaaaaaaaaaaaaaaaaaaaaaaaaaaaaaaaaaaaaaaaaaaaaaaaaaaaaa</a:t>
+                      </a:r>
+                    </a:p>
+                  </a:txBody>
+                  <a:tcPr marL="54864" marR="54864" marT="27432" marB="27432" anchor="ctr">
+                    <a:solidFill>
+                      <a:srgbClr val="F5F7F9"/>
+                    </a:solidFill>
+                  </a:tcPr>
+                </a:tc>
+              </a:tr>
+              <a:tr h="490728">
+                <a:tc>
+                  <a:txBody>
+                    <a:bodyPr/>
+                    <a:lstStyle/>
+                    <a:p>
+                      <a:pPr>
+                        <a:defRPr sz="800" b="1">
+                          <a:solidFill>
+                            <a:srgbClr val="0D1117"/>
+                          </a:solidFill>
+                          <a:latin typeface="Inter"/>
+                        </a:defRPr>
+                      </a:pPr>
+                      <a:r>
+                        <a:rPr>
+                          <a:latin typeface="Inter"/>
+                        </a:rPr>
+                        <a:t>S7</a:t>
+                      </a:r>
+                    </a:p>
+                  </a:txBody>
+                  <a:tcPr marL="54864" marR="54864" marT="27432" marB="27432" anchor="ctr">
+                    <a:solidFill>
+                      <a:srgbClr val="FFFFFF"/>
+                    </a:solidFill>
+                  </a:tcPr>
+                </a:tc>
+                <a:tc>
+                  <a:txBody>
+                    <a:bodyPr/>
+                    <a:lstStyle/>
+                    <a:p>
+                      <a:pPr>
+                        <a:defRPr sz="800" b="0">
+                          <a:solidFill>
+                            <a:srgbClr val="0D1117"/>
+                          </a:solidFill>
+                          <a:latin typeface="Inter"/>
+                        </a:defRPr>
+                      </a:pPr>
+                      <a:r>
+                        <a:rPr>
+                          <a:latin typeface="Inter"/>
+                        </a:rPr>
+                        <a:t>baseline</a:t>
+                      </a:r>
+                    </a:p>
+                  </a:txBody>
+                  <a:tcPr marL="54864" marR="54864" marT="27432" marB="27432" anchor="ctr">
+                    <a:solidFill>
+                      <a:srgbClr val="FFFFFF"/>
+                    </a:solidFill>
+                  </a:tcPr>
+                </a:tc>
+                <a:tc>
+                  <a:txBody>
+                    <a:bodyPr/>
+                    <a:lstStyle/>
+                    <a:p>
+                      <a:pPr>
+                        <a:defRPr sz="800" b="0">
+                          <a:solidFill>
+                            <a:srgbClr val="0D1117"/>
+                          </a:solidFill>
+                          <a:latin typeface="Inter"/>
+                        </a:defRPr>
+                      </a:pPr>
+                      <a:r>
+                        <a:rPr>
+                          <a:latin typeface="Inter"/>
+                        </a:rPr>
+                        <a:t>sha256:aaaaaaaaaaaaaaaaaaaaaaaaaaaaaaaaaaaaaaaaaaaaaaaaaaaaaaaaaaaaaaaa</a:t>
+                      </a:r>
+                    </a:p>
+                  </a:txBody>
+                  <a:tcPr marL="54864" marR="54864" marT="27432" marB="27432" anchor="ctr">
+                    <a:solidFill>
+                      <a:srgbClr val="FFFFFF"/>
+                    </a:solidFill>
+                  </a:tcPr>
+                </a:tc>
+              </a:tr>
+              <a:tr h="490728">
+                <a:tc>
+                  <a:txBody>
+                    <a:bodyPr/>
+                    <a:lstStyle/>
+                    <a:p>
+                      <a:pPr>
+                        <a:defRPr sz="800" b="1">
+                          <a:solidFill>
+                            <a:srgbClr val="0D1117"/>
+                          </a:solidFill>
+                          <a:latin typeface="Inter"/>
+                        </a:defRPr>
+                      </a:pPr>
+                      <a:r>
+                        <a:rPr>
+                          <a:latin typeface="Inter"/>
+                        </a:rPr>
+                        <a:t>S8</a:t>
+                      </a:r>
+                    </a:p>
+                  </a:txBody>
+                  <a:tcPr marL="54864" marR="54864" marT="27432" marB="27432" anchor="ctr">
+                    <a:solidFill>
+                      <a:srgbClr val="F5F7F9"/>
+                    </a:solidFill>
+                  </a:tcPr>
+                </a:tc>
+                <a:tc>
+                  <a:txBody>
+                    <a:bodyPr/>
+                    <a:lstStyle/>
+                    <a:p>
+                      <a:pPr>
+                        <a:defRPr sz="800" b="0">
+                          <a:solidFill>
+                            <a:srgbClr val="0D1117"/>
+                          </a:solidFill>
+                          <a:latin typeface="Inter"/>
+                        </a:defRPr>
+                      </a:pPr>
+                      <a:r>
+                        <a:rPr>
+                          <a:latin typeface="Inter"/>
+                        </a:rPr>
+                        <a:t>illustrative</a:t>
+                      </a:r>
+                    </a:p>
+                  </a:txBody>
+                  <a:tcPr marL="54864" marR="54864" marT="27432" marB="27432" anchor="ctr">
+                    <a:solidFill>
+                      <a:srgbClr val="F5F7F9"/>
+                    </a:solidFill>
+                  </a:tcPr>
+                </a:tc>
+                <a:tc>
+                  <a:txBody>
+                    <a:bodyPr/>
+                    <a:lstStyle/>
+                    <a:p>
+                      <a:pPr>
+                        <a:defRPr sz="800" b="0">
+                          <a:solidFill>
+                            <a:srgbClr val="0D1117"/>
+                          </a:solidFill>
+                          <a:latin typeface="Inter"/>
+                        </a:defRPr>
+                      </a:pPr>
+                      <a:r>
+                        <a:rPr>
+                          <a:latin typeface="Inter"/>
+                        </a:rPr>
+                        <a:t>sha256:aaaaaaaaaaaaaaaaaaaaaaaaaaaaaaaaaaaaaaaaaaaaaaaaaaaaaaaaaaaaaaaa</a:t>
+                      </a:r>
+                    </a:p>
+                  </a:txBody>
+                  <a:tcPr marL="54864" marR="54864" marT="27432" marB="27432" anchor="ctr">
+                    <a:solidFill>
+                      <a:srgbClr val="F5F7F9"/>
+                    </a:solidFill>
+                  </a:tcPr>
+                </a:tc>
+              </a:tr>
+            </a:tbl>
+          </a:graphicData>
+        </a:graphic>
+      </p:graphicFrame>
+      <p:sp>
+        <p:nvSpPr>
+          <p:cNvPr id="9" name="TextBox 8"/>
+          <p:cNvSpPr txBox="1"/>
+          <p:nvPr/>
+        </p:nvSpPr>
+        <p:spPr>
+          <a:xfrm>
+            <a:off x="640080" y="6035040"/>
+            <a:ext cx="10908792" cy="164592"/>
+          </a:xfrm>
+          <a:prstGeom prst="rect">
+            <a:avLst/>
+          </a:prstGeom>
+          <a:noFill/>
+        </p:spPr>
+        <p:txBody>
+          <a:bodyPr wrap="none" lIns="9144" rIns="9144" tIns="9144" bIns="9144" anchor="t">
+            <a:spAutoFit/>
+          </a:bodyPr>
+          <a:lstStyle/>
+          <a:p>
+            <a:pPr algn="l">
+              <a:spcAft>
+                <a:spcPts val="0"/>
+              </a:spcAft>
+              <a:defRPr sz="680" b="0">
+                <a:solidFill>
+                  <a:srgbClr val="8A94A1"/>
+                </a:solidFill>
+                <a:latin typeface="Inter"/>
+              </a:defRPr>
+            </a:pPr>
+            <a:r>
+              <a:rPr>
+                <a:latin typeface="Inter"/>
+              </a:rPr>
+              <a:t>Data scope for every source: Illustrative sample data. Each digest is the SHA-256 fingerprint of the exact data the report used.</a:t>
+            </a:r>
+          </a:p>
+        </p:txBody>
+      </p:sp>
+      <p:sp>
+        <p:nvSpPr>
+          <p:cNvPr id="10" name="Rectangle 9"/>
+          <p:cNvSpPr/>
+          <p:nvPr/>
+        </p:nvSpPr>
+        <p:spPr>
+          <a:xfrm>
+            <a:off x="640080" y="6446520"/>
+            <a:ext cx="10908792" cy="9144"/>
+          </a:xfrm>
+          <a:prstGeom prst="rect">
+            <a:avLst/>
+          </a:prstGeom>
+          <a:solidFill>
+            <a:srgbClr val="E3E7EC"/>
+          </a:solidFill>
+          <a:ln>
+            <a:solidFill>
+              <a:srgbClr val="E3E7EC"/>
+            </a:solidFill>
+          </a:ln>
+        </p:spPr>
+        <p:style>
+          <a:lnRef idx="1">
+            <a:schemeClr val="accent1"/>
+          </a:lnRef>
+          <a:fillRef idx="3">
+            <a:schemeClr val="accent1"/>
+          </a:fillRef>
+          <a:effectRef idx="2">
+            <a:schemeClr val="accent1"/>
+          </a:effectRef>
+          <a:fontRef idx="minor">
+            <a:schemeClr val="lt1"/>
+          </a:fontRef>
+        </p:style>
+        <p:txBody>
+          <a:bodyPr rtlCol="0" anchor="ctr"/>
+          <a:lstStyle/>
+          <a:p>
+            <a:pPr algn="ctr">
+              <a:defRPr>
+                <a:latin typeface="Inter"/>
+              </a:defRPr>
+            </a:pPr>
+          </a:p>
+        </p:txBody>
+      </p:sp>
+      <p:sp>
+        <p:nvSpPr>
+          <p:cNvPr id="11" name="TextBox 10"/>
+          <p:cNvSpPr txBox="1"/>
+          <p:nvPr/>
+        </p:nvSpPr>
+        <p:spPr>
+          <a:xfrm>
+            <a:off x="640080" y="6501384"/>
+            <a:ext cx="4297680" cy="146304"/>
+          </a:xfrm>
+          <a:prstGeom prst="rect">
+            <a:avLst/>
+          </a:prstGeom>
+          <a:noFill/>
+        </p:spPr>
+        <p:txBody>
+          <a:bodyPr wrap="none" lIns="9144" rIns="9144" tIns="9144" bIns="9144" anchor="t">
+            <a:spAutoFit/>
+          </a:bodyPr>
+          <a:lstStyle/>
+          <a:p>
+            <a:pPr algn="l">
+              <a:spcAft>
+                <a:spcPts val="0"/>
+              </a:spcAft>
+              <a:defRPr sz="650" b="0">
+                <a:solidFill>
+                  <a:srgbClr val="8A94A1"/>
+                </a:solidFill>
+                <a:latin typeface="Inter"/>
+              </a:defRPr>
+            </a:pPr>
+            <a:r>
+              <a:rPr>
+                <a:latin typeface="Inter"/>
+              </a:rPr>
+              <a:t>Sources: S1 · S2 · S3 · S4 · S5 · S6 · S7 · S8</a:t>
+            </a:r>
+          </a:p>
+        </p:txBody>
+      </p:sp>
+      <p:sp>
+        <p:nvSpPr>
+          <p:cNvPr id="12" name="TextBox 11"/>
+          <p:cNvSpPr txBox="1"/>
+          <p:nvPr/>
+        </p:nvSpPr>
+        <p:spPr>
+          <a:xfrm>
+            <a:off x="4480560" y="6501384"/>
+            <a:ext cx="5303520" cy="146304"/>
+          </a:xfrm>
+          <a:prstGeom prst="rect">
+            <a:avLst/>
+          </a:prstGeom>
+          <a:noFill/>
+        </p:spPr>
+        <p:txBody>
+          <a:bodyPr wrap="none" lIns="9144" rIns="9144" tIns="9144" bIns="9144" anchor="t">
+            <a:spAutoFit/>
+          </a:bodyPr>
+          <a:lstStyle/>
+          <a:p>
+            <a:pPr algn="ctr">
+              <a:spcAft>
+                <a:spcPts val="0"/>
+              </a:spcAft>
+              <a:defRPr sz="650" b="0">
+                <a:solidFill>
+                  <a:srgbClr val="8A94A1"/>
+                </a:solidFill>
+                <a:latin typeface="Inter"/>
+              </a:defRPr>
+            </a:pPr>
+            <a:r>
+              <a:rPr>
+                <a:latin typeface="Inter"/>
+              </a:rPr>
+              <a:t>Confidential — Investment Committee · Data as of 2026-06-30</a:t>
+            </a:r>
+          </a:p>
+        </p:txBody>
+      </p:sp>
+      <p:sp>
+        <p:nvSpPr>
+          <p:cNvPr id="13" name="TextBox 12"/>
+          <p:cNvSpPr txBox="1"/>
+          <p:nvPr/>
+        </p:nvSpPr>
+        <p:spPr>
+          <a:xfrm>
+            <a:off x="10287000" y="6501384"/>
+            <a:ext cx="1261872" cy="146304"/>
+          </a:xfrm>
+          <a:prstGeom prst="rect">
+            <a:avLst/>
+          </a:prstGeom>
+          <a:noFill/>
+        </p:spPr>
+        <p:txBody>
+          <a:bodyPr wrap="none" lIns="9144" rIns="9144" tIns="9144" bIns="9144" anchor="t">
+            <a:spAutoFit/>
+          </a:bodyPr>
+          <a:lstStyle/>
+          <a:p>
+            <a:pPr algn="r">
+              <a:spcAft>
+                <a:spcPts val="0"/>
+              </a:spcAft>
+              <a:defRPr sz="650" b="0">
+                <a:solidFill>
+                  <a:srgbClr val="8A94A1"/>
+                </a:solidFill>
+                <a:latin typeface="Inter"/>
+              </a:defRPr>
+            </a:pPr>
+            <a:r>
+              <a:rPr>
+                <a:latin typeface="Inter"/>
+              </a:rPr>
+              <a:t>30</a:t>
+            </a:r>
+          </a:p>
+        </p:txBody>
+      </p:sp>
+    </p:spTree>
+  </p:cSld>
+  <p:clrMapOvr>
+    <a:masterClrMapping/>
+  </p:clrMapOvr>
+</p:sld>
+</file>
+
+<file path=ppt/slides/slide31.xml><?xml version="1.0" encoding="utf-8"?>
+<p:sld xmlns:a="http://schemas.openxmlformats.org/drawingml/2006/main" xmlns:p="http://schemas.openxmlformats.org/presentationml/2006/main" xmlns:r="http://schemas.openxmlformats.org/officeDocument/2006/relationships">
+  <p:cSld>
+    <p:spTree>
+      <p:nvGrpSpPr>
+        <p:cNvPr id="1" name=""/>
+        <p:cNvGrpSpPr/>
+        <p:nvPr/>
+      </p:nvGrpSpPr>
+      <p:grpSpPr/>
+      <p:sp>
+        <p:nvSpPr>
+          <p:cNvPr id="2" name="Rectangle 1"/>
+          <p:cNvSpPr/>
+          <p:nvPr/>
+        </p:nvSpPr>
+        <p:spPr>
+          <a:xfrm>
+            <a:off x="0" y="0"/>
+            <a:ext cx="12191695" cy="6858000"/>
+          </a:xfrm>
+          <a:prstGeom prst="rect">
+            <a:avLst/>
+          </a:prstGeom>
+          <a:solidFill>
+            <a:srgbClr val="FFFFFF"/>
+          </a:solidFill>
+          <a:ln>
+            <a:solidFill>
+              <a:srgbClr val="FFFFFF"/>
+            </a:solidFill>
+          </a:ln>
+        </p:spPr>
+        <p:style>
+          <a:lnRef idx="1">
+            <a:schemeClr val="accent1"/>
+          </a:lnRef>
+          <a:fillRef idx="3">
+            <a:schemeClr val="accent1"/>
+          </a:fillRef>
+          <a:effectRef idx="2">
+            <a:schemeClr val="accent1"/>
+          </a:effectRef>
+          <a:fontRef idx="minor">
+            <a:schemeClr val="lt1"/>
+          </a:fontRef>
+        </p:style>
+        <p:txBody>
+          <a:bodyPr rtlCol="0" anchor="ctr"/>
+          <a:lstStyle/>
+          <a:p>
+            <a:pPr algn="ctr">
+              <a:defRPr>
+                <a:latin typeface="Inter"/>
+              </a:defRPr>
+            </a:pPr>
+          </a:p>
+        </p:txBody>
+      </p:sp>
+      <p:sp>
+        <p:nvSpPr>
+          <p:cNvPr id="3" name="TextBox 2"/>
+          <p:cNvSpPr txBox="1"/>
+          <p:nvPr/>
+        </p:nvSpPr>
+        <p:spPr>
+          <a:xfrm>
+            <a:off x="640080" y="566928"/>
+            <a:ext cx="10058400" cy="530352"/>
+          </a:xfrm>
+          <a:prstGeom prst="rect">
+            <a:avLst/>
+          </a:prstGeom>
+          <a:noFill/>
+        </p:spPr>
+        <p:txBody>
+          <a:bodyPr wrap="none" lIns="9144" rIns="9144" tIns="9144" bIns="9144" anchor="t">
+            <a:spAutoFit/>
+          </a:bodyPr>
+          <a:lstStyle/>
+          <a:p>
+            <a:pPr algn="l">
+              <a:spcAft>
+                <a:spcPts val="0"/>
+              </a:spcAft>
+              <a:defRPr sz="2300" b="1">
+                <a:solidFill>
+                  <a:srgbClr val="0D1117"/>
+                </a:solidFill>
+                <a:latin typeface="Inter"/>
+              </a:defRPr>
+            </a:pPr>
+            <a:r>
+              <a:rPr>
+                <a:latin typeface="Inter"/>
+              </a:rPr>
+              <a:t>Appendix — Server Metric Methods and Disclosures</a:t>
+            </a:r>
+          </a:p>
+        </p:txBody>
+      </p:sp>
+      <p:sp>
+        <p:nvSpPr>
+          <p:cNvPr id="4" name="Rectangle 3"/>
+          <p:cNvSpPr/>
+          <p:nvPr/>
+        </p:nvSpPr>
+        <p:spPr>
+          <a:xfrm>
+            <a:off x="640080" y="1115568"/>
+            <a:ext cx="10908792" cy="18288"/>
+          </a:xfrm>
+          <a:prstGeom prst="rect">
+            <a:avLst/>
+          </a:prstGeom>
+          <a:solidFill>
+            <a:srgbClr val="0D1117"/>
+          </a:solidFill>
+          <a:ln>
+            <a:solidFill>
+              <a:srgbClr val="0D1117"/>
+            </a:solidFill>
+          </a:ln>
+        </p:spPr>
+        <p:style>
+          <a:lnRef idx="1">
+            <a:schemeClr val="accent1"/>
+          </a:lnRef>
+          <a:fillRef idx="3">
+            <a:schemeClr val="accent1"/>
+          </a:fillRef>
+          <a:effectRef idx="2">
+            <a:schemeClr val="accent1"/>
+          </a:effectRef>
+          <a:fontRef idx="minor">
+            <a:schemeClr val="lt1"/>
+          </a:fontRef>
+        </p:style>
+        <p:txBody>
+          <a:bodyPr rtlCol="0" anchor="ctr"/>
+          <a:lstStyle/>
+          <a:p>
+            <a:pPr algn="ctr">
+              <a:defRPr>
+                <a:latin typeface="Inter"/>
+              </a:defRPr>
+            </a:pPr>
+          </a:p>
+        </p:txBody>
+      </p:sp>
+      <p:sp>
+        <p:nvSpPr>
+          <p:cNvPr id="5" name="Rectangle 4"/>
+          <p:cNvSpPr/>
+          <p:nvPr/>
+        </p:nvSpPr>
+        <p:spPr>
+          <a:xfrm>
+            <a:off x="11018520" y="502920"/>
+            <a:ext cx="530352" cy="393192"/>
+          </a:xfrm>
+          <a:prstGeom prst="rect">
+            <a:avLst/>
+          </a:prstGeom>
+          <a:solidFill>
+            <a:srgbClr val="9AA5B1"/>
+          </a:solidFill>
+          <a:ln>
+            <a:solidFill>
+              <a:srgbClr val="9AA5B1"/>
+            </a:solidFill>
+          </a:ln>
+        </p:spPr>
+        <p:style>
+          <a:lnRef idx="1">
+            <a:schemeClr val="accent1"/>
+          </a:lnRef>
+          <a:fillRef idx="3">
+            <a:schemeClr val="accent1"/>
+          </a:fillRef>
+          <a:effectRef idx="2">
+            <a:schemeClr val="accent1"/>
+          </a:effectRef>
+          <a:fontRef idx="minor">
+            <a:schemeClr val="lt1"/>
+          </a:fontRef>
+        </p:style>
+        <p:txBody>
+          <a:bodyPr rtlCol="0" anchor="ctr"/>
+          <a:lstStyle/>
+          <a:p>
+            <a:pPr algn="ctr">
+              <a:defRPr>
+                <a:latin typeface="Inter"/>
+              </a:defRPr>
+            </a:pPr>
+          </a:p>
+        </p:txBody>
+      </p:sp>
+      <p:sp>
+        <p:nvSpPr>
+          <p:cNvPr id="6" name="TextBox 5"/>
+          <p:cNvSpPr txBox="1"/>
+          <p:nvPr/>
+        </p:nvSpPr>
+        <p:spPr>
+          <a:xfrm>
+            <a:off x="11045952" y="557784"/>
+            <a:ext cx="475488" cy="182880"/>
+          </a:xfrm>
+          <a:prstGeom prst="rect">
+            <a:avLst/>
+          </a:prstGeom>
+          <a:noFill/>
+        </p:spPr>
+        <p:txBody>
+          <a:bodyPr wrap="none" lIns="9144" rIns="9144" tIns="9144" bIns="9144" anchor="t">
+            <a:spAutoFit/>
+          </a:bodyPr>
+          <a:lstStyle/>
+          <a:p>
+            <a:pPr algn="ctr">
+              <a:spcAft>
+                <a:spcPts val="0"/>
+              </a:spcAft>
+              <a:defRPr sz="1000" b="1">
+                <a:solidFill>
+                  <a:srgbClr val="0D1117"/>
+                </a:solidFill>
+                <a:latin typeface="Inter"/>
+              </a:defRPr>
+            </a:pPr>
+            <a:r>
+              <a:rPr>
+                <a:latin typeface="Inter"/>
+              </a:rPr>
+              <a:t>B</a:t>
+            </a:r>
+          </a:p>
+        </p:txBody>
+      </p:sp>
+      <p:sp>
+        <p:nvSpPr>
+          <p:cNvPr id="7" name="TextBox 6"/>
+          <p:cNvSpPr txBox="1"/>
+          <p:nvPr/>
+        </p:nvSpPr>
+        <p:spPr>
+          <a:xfrm>
+            <a:off x="640080" y="1325880"/>
+            <a:ext cx="10908792" cy="201168"/>
+          </a:xfrm>
+          <a:prstGeom prst="rect">
+            <a:avLst/>
+          </a:prstGeom>
+          <a:noFill/>
+        </p:spPr>
+        <p:txBody>
+          <a:bodyPr wrap="none" lIns="9144" rIns="9144" tIns="9144" bIns="9144" anchor="t">
+            <a:spAutoFit/>
+          </a:bodyPr>
+          <a:lstStyle/>
+          <a:p>
+            <a:pPr algn="l">
+              <a:spcAft>
+                <a:spcPts val="0"/>
+              </a:spcAft>
+              <a:defRPr sz="720" b="1">
+                <a:solidFill>
+                  <a:srgbClr val="4A5563"/>
+                </a:solidFill>
+                <a:latin typeface="Inter"/>
+              </a:defRPr>
+            </a:pPr>
+            <a:r>
+              <a:rPr>
+                <a:latin typeface="Inter"/>
+              </a:rPr>
               <a:t>SERVER METRIC METHODS</a:t>
             </a:r>
           </a:p>
@@ -31076,7 +30291,7 @@
       </p:sp>
       <p:graphicFrame>
         <p:nvGraphicFramePr>
-          <p:cNvPr id="9" name="Table 8"/>
+          <p:cNvPr id="8" name="Table 7"/>
           <p:cNvGraphicFramePr>
             <a:graphicFrameLocks noGrp="1"/>
           </p:cNvGraphicFramePr>
@@ -31790,7 +31005,7 @@
       </p:graphicFrame>
       <p:sp>
         <p:nvSpPr>
-          <p:cNvPr id="10" name="Rectangle 9"/>
+          <p:cNvPr id="9" name="Rectangle 8"/>
           <p:cNvSpPr/>
           <p:nvPr/>
         </p:nvSpPr>
@@ -31839,7 +31054,7 @@
       </p:sp>
       <p:sp>
         <p:nvSpPr>
-          <p:cNvPr id="11" name="TextBox 10"/>
+          <p:cNvPr id="10" name="TextBox 9"/>
           <p:cNvSpPr txBox="1"/>
           <p:nvPr/>
         </p:nvSpPr>
@@ -31881,7 +31096,7 @@
       </p:sp>
       <p:sp>
         <p:nvSpPr>
-          <p:cNvPr id="12" name="TextBox 11"/>
+          <p:cNvPr id="11" name="TextBox 10"/>
           <p:cNvSpPr txBox="1"/>
           <p:nvPr/>
         </p:nvSpPr>
@@ -31923,7 +31138,7 @@
       </p:sp>
       <p:sp>
         <p:nvSpPr>
-          <p:cNvPr id="13" name="TextBox 12"/>
+          <p:cNvPr id="12" name="TextBox 11"/>
           <p:cNvSpPr txBox="1"/>
           <p:nvPr/>
         </p:nvSpPr>
@@ -31958,7 +31173,7 @@
               <a:rPr>
                 <a:latin typeface="Inter"/>
               </a:rPr>
-              <a:t>30</a:t>
+              <a:t>31</a:t>
             </a:r>
           </a:p>
         </p:txBody>
@@ -32038,48 +31253,6 @@
         </p:nvSpPr>
         <p:spPr>
           <a:xfrm>
-            <a:off x="5897880" y="310896"/>
-            <a:ext cx="4800600" cy="256032"/>
-          </a:xfrm>
-          <a:prstGeom prst="rect">
-            <a:avLst/>
-          </a:prstGeom>
-          <a:noFill/>
-        </p:spPr>
-        <p:txBody>
-          <a:bodyPr wrap="none" lIns="9144" rIns="9144" tIns="9144" bIns="9144" anchor="t">
-            <a:spAutoFit/>
-          </a:bodyPr>
-          <a:lstStyle/>
-          <a:p>
-            <a:pPr algn="r">
-              <a:spcAft>
-                <a:spcPts val="0"/>
-              </a:spcAft>
-              <a:defRPr sz="680" b="1">
-                <a:solidFill>
-                  <a:srgbClr val="4F6B00"/>
-                </a:solidFill>
-                <a:latin typeface="Inter"/>
-              </a:defRPr>
-            </a:pPr>
-            <a:r>
-              <a:rPr>
-                <a:latin typeface="Inter"/>
-              </a:rPr>
-              <a:t>Illustrative, Gradient Maintained — demo data, not the client's holdings or managers</a:t>
-            </a:r>
-          </a:p>
-        </p:txBody>
-      </p:sp>
-      <p:sp>
-        <p:nvSpPr>
-          <p:cNvPr id="4" name="TextBox 3"/>
-          <p:cNvSpPr txBox="1"/>
-          <p:nvPr/>
-        </p:nvSpPr>
-        <p:spPr>
-          <a:xfrm>
             <a:off x="640080" y="566928"/>
             <a:ext cx="10058400" cy="530352"/>
           </a:xfrm>
@@ -32116,7 +31289,7 @@
       </p:sp>
       <p:sp>
         <p:nvSpPr>
-          <p:cNvPr id="5" name="Rectangle 4"/>
+          <p:cNvPr id="4" name="Rectangle 3"/>
           <p:cNvSpPr/>
           <p:nvPr/>
         </p:nvSpPr>
@@ -32165,7 +31338,7 @@
       </p:sp>
       <p:sp>
         <p:nvSpPr>
-          <p:cNvPr id="6" name="Rectangle 5"/>
+          <p:cNvPr id="5" name="Rectangle 4"/>
           <p:cNvSpPr/>
           <p:nvPr/>
         </p:nvSpPr>
@@ -32214,7 +31387,7 @@
       </p:sp>
       <p:sp>
         <p:nvSpPr>
-          <p:cNvPr id="7" name="TextBox 6"/>
+          <p:cNvPr id="6" name="TextBox 5"/>
           <p:cNvSpPr txBox="1"/>
           <p:nvPr/>
         </p:nvSpPr>
@@ -32256,14 +31429,14 @@
       </p:sp>
       <p:sp>
         <p:nvSpPr>
-          <p:cNvPr id="8" name="Rectangle 7"/>
+          <p:cNvPr id="7" name="Rectangle 6"/>
           <p:cNvSpPr/>
           <p:nvPr/>
         </p:nvSpPr>
         <p:spPr>
           <a:xfrm>
             <a:off x="640080" y="1325880"/>
-            <a:ext cx="10908792" cy="2373284"/>
+            <a:ext cx="10908792" cy="2365259"/>
           </a:xfrm>
           <a:prstGeom prst="rect">
             <a:avLst/>
@@ -32305,14 +31478,14 @@
       </p:sp>
       <p:sp>
         <p:nvSpPr>
-          <p:cNvPr id="9" name="Rectangle 8"/>
+          <p:cNvPr id="8" name="Rectangle 7"/>
           <p:cNvSpPr/>
           <p:nvPr/>
         </p:nvSpPr>
         <p:spPr>
           <a:xfrm>
             <a:off x="640080" y="1325880"/>
-            <a:ext cx="54864" cy="2373284"/>
+            <a:ext cx="54864" cy="2365259"/>
           </a:xfrm>
           <a:prstGeom prst="rect">
             <a:avLst/>
@@ -32354,7 +31527,7 @@
       </p:sp>
       <p:sp>
         <p:nvSpPr>
-          <p:cNvPr id="10" name="TextBox 9"/>
+          <p:cNvPr id="9" name="TextBox 8"/>
           <p:cNvSpPr txBox="1"/>
           <p:nvPr/>
         </p:nvSpPr>
@@ -32389,21 +31562,21 @@
               <a:rPr>
                 <a:latin typeface="Inter"/>
               </a:rPr>
-              <a:t>Key judgment — primary measure</a:t>
+              <a:t>Key judgment — Sleeve size</a:t>
             </a:r>
           </a:p>
         </p:txBody>
       </p:sp>
       <p:sp>
         <p:nvSpPr>
-          <p:cNvPr id="11" name="TextBox 10"/>
+          <p:cNvPr id="10" name="TextBox 9"/>
           <p:cNvSpPr txBox="1"/>
           <p:nvPr/>
         </p:nvSpPr>
         <p:spPr>
           <a:xfrm>
             <a:off x="804671" y="1719072"/>
-            <a:ext cx="10616184" cy="1888652"/>
+            <a:ext cx="10616184" cy="1880627"/>
           </a:xfrm>
           <a:prstGeom prst="rect">
             <a:avLst/>
@@ -32431,21 +31604,21 @@
               <a:rPr>
                 <a:latin typeface="Inter"/>
               </a:rPr>
-              <a:t>Observation: Fixed-income weight is 28.0% in the review evidence [S2]. Why it matters: This measure establishes the baseline for comparing later governed results. Uncertainty: The source basis may omit newer observations outside the reviewed evidence. What would change the view: A refreshed source report showing a change above 1%.</a:t>
+              <a:t>Observation: Fixed income is 28.0% of total NAV [S2]. Why it matters: The shift is sized against this sleeve, not the total fund. Uncertainty: The weight will move with market values before implementation. What would change the view: A drift of more than 1pp before funding.</a:t>
             </a:r>
           </a:p>
         </p:txBody>
       </p:sp>
       <p:sp>
         <p:nvSpPr>
-          <p:cNvPr id="12" name="Rectangle 11"/>
+          <p:cNvPr id="11" name="Rectangle 10"/>
           <p:cNvSpPr/>
           <p:nvPr/>
         </p:nvSpPr>
         <p:spPr>
           <a:xfrm>
-            <a:off x="640080" y="3808892"/>
-            <a:ext cx="10908792" cy="2409027"/>
+            <a:off x="640080" y="3800867"/>
+            <a:ext cx="10908792" cy="2417052"/>
           </a:xfrm>
           <a:prstGeom prst="rect">
             <a:avLst/>
@@ -32487,14 +31660,14 @@
       </p:sp>
       <p:sp>
         <p:nvSpPr>
-          <p:cNvPr id="13" name="Rectangle 12"/>
+          <p:cNvPr id="12" name="Rectangle 11"/>
           <p:cNvSpPr/>
           <p:nvPr/>
         </p:nvSpPr>
         <p:spPr>
           <a:xfrm>
-            <a:off x="640080" y="3808892"/>
-            <a:ext cx="54864" cy="2409027"/>
+            <a:off x="640080" y="3800867"/>
+            <a:ext cx="54864" cy="2417052"/>
           </a:xfrm>
           <a:prstGeom prst="rect">
             <a:avLst/>
@@ -32536,13 +31709,13 @@
       </p:sp>
       <p:sp>
         <p:nvSpPr>
-          <p:cNvPr id="14" name="TextBox 13"/>
+          <p:cNvPr id="13" name="TextBox 12"/>
           <p:cNvSpPr txBox="1"/>
           <p:nvPr/>
         </p:nvSpPr>
         <p:spPr>
           <a:xfrm>
-            <a:off x="804671" y="3918620"/>
+            <a:off x="804671" y="3910595"/>
             <a:ext cx="10616184" cy="228600"/>
           </a:xfrm>
           <a:prstGeom prst="rect">
@@ -32571,21 +31744,21 @@
               <a:rPr>
                 <a:latin typeface="Inter"/>
               </a:rPr>
-              <a:t>Key judgment — monitoring priority</a:t>
+              <a:t>Key judgment — Liquidity</a:t>
             </a:r>
           </a:p>
         </p:txBody>
       </p:sp>
       <p:sp>
         <p:nvSpPr>
-          <p:cNvPr id="15" name="TextBox 14"/>
+          <p:cNvPr id="14" name="TextBox 13"/>
           <p:cNvSpPr txBox="1"/>
           <p:nvPr/>
         </p:nvSpPr>
         <p:spPr>
           <a:xfrm>
-            <a:off x="804671" y="4202084"/>
-            <a:ext cx="10616184" cy="1924395"/>
+            <a:off x="804671" y="4194059"/>
+            <a:ext cx="10616184" cy="1932420"/>
           </a:xfrm>
           <a:prstGeom prst="rect">
             <a:avLst/>
@@ -32613,14 +31786,14 @@
               <a:rPr>
                 <a:latin typeface="Inter"/>
               </a:rPr>
-              <a:t>Observation: Liquid share is 96.0% in the review evidence [S3]. Why it matters: This result determines which item receives priority in the next monitoring cycle. Uncertainty: Supporting coverage may omit later filings or corroborating detail. What would change the view: A new filing or report that resolves the item or changes it by 1%.</a:t>
+              <a:t>Observation: 96.0% of the sleeve is liquid within the policy window [S3]. Why it matters: The shift can be implemented without breaching liquidity limits. Uncertainty: Liquidity tiers use manager-reported terms. What would change the view: A manager imposing new redemption terms.</a:t>
             </a:r>
           </a:p>
         </p:txBody>
       </p:sp>
       <p:sp>
         <p:nvSpPr>
-          <p:cNvPr id="16" name="Rectangle 15"/>
+          <p:cNvPr id="15" name="Rectangle 14"/>
           <p:cNvSpPr/>
           <p:nvPr/>
         </p:nvSpPr>
@@ -32669,7 +31842,7 @@
       </p:sp>
       <p:sp>
         <p:nvSpPr>
-          <p:cNvPr id="17" name="TextBox 16"/>
+          <p:cNvPr id="16" name="TextBox 15"/>
           <p:cNvSpPr txBox="1"/>
           <p:nvPr/>
         </p:nvSpPr>
@@ -32711,7 +31884,7 @@
       </p:sp>
       <p:sp>
         <p:nvSpPr>
-          <p:cNvPr id="18" name="TextBox 17"/>
+          <p:cNvPr id="17" name="TextBox 16"/>
           <p:cNvSpPr txBox="1"/>
           <p:nvPr/>
         </p:nvSpPr>
@@ -32753,7 +31926,7 @@
       </p:sp>
       <p:sp>
         <p:nvSpPr>
-          <p:cNvPr id="19" name="TextBox 18"/>
+          <p:cNvPr id="18" name="TextBox 17"/>
           <p:cNvSpPr txBox="1"/>
           <p:nvPr/>
         </p:nvSpPr>
@@ -32868,48 +32041,6 @@
         </p:nvSpPr>
         <p:spPr>
           <a:xfrm>
-            <a:off x="5897880" y="310896"/>
-            <a:ext cx="4800600" cy="256032"/>
-          </a:xfrm>
-          <a:prstGeom prst="rect">
-            <a:avLst/>
-          </a:prstGeom>
-          <a:noFill/>
-        </p:spPr>
-        <p:txBody>
-          <a:bodyPr wrap="none" lIns="9144" rIns="9144" tIns="9144" bIns="9144" anchor="t">
-            <a:spAutoFit/>
-          </a:bodyPr>
-          <a:lstStyle/>
-          <a:p>
-            <a:pPr algn="r">
-              <a:spcAft>
-                <a:spcPts val="0"/>
-              </a:spcAft>
-              <a:defRPr sz="680" b="1">
-                <a:solidFill>
-                  <a:srgbClr val="4F6B00"/>
-                </a:solidFill>
-                <a:latin typeface="Inter"/>
-              </a:defRPr>
-            </a:pPr>
-            <a:r>
-              <a:rPr>
-                <a:latin typeface="Inter"/>
-              </a:rPr>
-              <a:t>Illustrative, Gradient Maintained — demo data, not the client's holdings or managers</a:t>
-            </a:r>
-          </a:p>
-        </p:txBody>
-      </p:sp>
-      <p:sp>
-        <p:nvSpPr>
-          <p:cNvPr id="4" name="TextBox 3"/>
-          <p:cNvSpPr txBox="1"/>
-          <p:nvPr/>
-        </p:nvSpPr>
-        <p:spPr>
-          <a:xfrm>
             <a:off x="640080" y="566928"/>
             <a:ext cx="10058400" cy="530352"/>
           </a:xfrm>
@@ -32946,7 +32077,7 @@
       </p:sp>
       <p:sp>
         <p:nvSpPr>
-          <p:cNvPr id="5" name="Rectangle 4"/>
+          <p:cNvPr id="4" name="Rectangle 3"/>
           <p:cNvSpPr/>
           <p:nvPr/>
         </p:nvSpPr>
@@ -32995,7 +32126,7 @@
       </p:sp>
       <p:sp>
         <p:nvSpPr>
-          <p:cNvPr id="6" name="Rectangle 5"/>
+          <p:cNvPr id="5" name="Rectangle 4"/>
           <p:cNvSpPr/>
           <p:nvPr/>
         </p:nvSpPr>
@@ -33044,7 +32175,7 @@
       </p:sp>
       <p:sp>
         <p:nvSpPr>
-          <p:cNvPr id="7" name="TextBox 6"/>
+          <p:cNvPr id="6" name="TextBox 5"/>
           <p:cNvSpPr txBox="1"/>
           <p:nvPr/>
         </p:nvSpPr>
@@ -33086,7 +32217,7 @@
       </p:sp>
       <p:graphicFrame>
         <p:nvGraphicFramePr>
-          <p:cNvPr id="8" name="Table 7"/>
+          <p:cNvPr id="7" name="Table 6"/>
           <p:cNvGraphicFramePr>
             <a:graphicFrameLocks noGrp="1"/>
           </p:cNvGraphicFramePr>
@@ -33448,7 +32579,7 @@
       </p:graphicFrame>
       <p:sp>
         <p:nvSpPr>
-          <p:cNvPr id="9" name="TextBox 8"/>
+          <p:cNvPr id="8" name="TextBox 7"/>
           <p:cNvSpPr txBox="1"/>
           <p:nvPr/>
         </p:nvSpPr>
@@ -33490,7 +32621,7 @@
       </p:sp>
       <p:graphicFrame>
         <p:nvGraphicFramePr>
-          <p:cNvPr id="10" name="Table 9"/>
+          <p:cNvPr id="9" name="Table 8"/>
           <p:cNvGraphicFramePr>
             <a:graphicFrameLocks noGrp="1"/>
           </p:cNvGraphicFramePr>
@@ -34023,7 +33154,7 @@
                         <a:rPr>
                           <a:latin typeface="Inter"/>
                         </a:rPr>
-                        <a:t>● Watch</a:t>
+                        <a:t>● Near limit</a:t>
                       </a:r>
                     </a:p>
                   </a:txBody>
@@ -34067,7 +33198,7 @@
       </p:graphicFrame>
       <p:sp>
         <p:nvSpPr>
-          <p:cNvPr id="11" name="Rectangle 10"/>
+          <p:cNvPr id="10" name="Rectangle 9"/>
           <p:cNvSpPr/>
           <p:nvPr/>
         </p:nvSpPr>
@@ -34116,7 +33247,7 @@
       </p:sp>
       <p:sp>
         <p:nvSpPr>
-          <p:cNvPr id="12" name="TextBox 11"/>
+          <p:cNvPr id="11" name="TextBox 10"/>
           <p:cNvSpPr txBox="1"/>
           <p:nvPr/>
         </p:nvSpPr>
@@ -34158,7 +33289,7 @@
       </p:sp>
       <p:sp>
         <p:nvSpPr>
-          <p:cNvPr id="13" name="TextBox 12"/>
+          <p:cNvPr id="12" name="TextBox 11"/>
           <p:cNvSpPr txBox="1"/>
           <p:nvPr/>
         </p:nvSpPr>
@@ -34200,7 +33331,7 @@
       </p:sp>
       <p:sp>
         <p:nvSpPr>
-          <p:cNvPr id="14" name="TextBox 13"/>
+          <p:cNvPr id="13" name="TextBox 12"/>
           <p:cNvSpPr txBox="1"/>
           <p:nvPr/>
         </p:nvSpPr>
@@ -34315,48 +33446,6 @@
         </p:nvSpPr>
         <p:spPr>
           <a:xfrm>
-            <a:off x="5897880" y="310896"/>
-            <a:ext cx="4800600" cy="256032"/>
-          </a:xfrm>
-          <a:prstGeom prst="rect">
-            <a:avLst/>
-          </a:prstGeom>
-          <a:noFill/>
-        </p:spPr>
-        <p:txBody>
-          <a:bodyPr wrap="none" lIns="9144" rIns="9144" tIns="9144" bIns="9144" anchor="t">
-            <a:spAutoFit/>
-          </a:bodyPr>
-          <a:lstStyle/>
-          <a:p>
-            <a:pPr algn="r">
-              <a:spcAft>
-                <a:spcPts val="0"/>
-              </a:spcAft>
-              <a:defRPr sz="680" b="1">
-                <a:solidFill>
-                  <a:srgbClr val="4F6B00"/>
-                </a:solidFill>
-                <a:latin typeface="Inter"/>
-              </a:defRPr>
-            </a:pPr>
-            <a:r>
-              <a:rPr>
-                <a:latin typeface="Inter"/>
-              </a:rPr>
-              <a:t>Illustrative, Gradient Maintained — demo data, not the client's holdings or managers</a:t>
-            </a:r>
-          </a:p>
-        </p:txBody>
-      </p:sp>
-      <p:sp>
-        <p:nvSpPr>
-          <p:cNvPr id="4" name="TextBox 3"/>
-          <p:cNvSpPr txBox="1"/>
-          <p:nvPr/>
-        </p:nvSpPr>
-        <p:spPr>
-          <a:xfrm>
             <a:off x="640080" y="566928"/>
             <a:ext cx="10058400" cy="530352"/>
           </a:xfrm>
@@ -34393,7 +33482,7 @@
       </p:sp>
       <p:sp>
         <p:nvSpPr>
-          <p:cNvPr id="5" name="Rectangle 4"/>
+          <p:cNvPr id="4" name="Rectangle 3"/>
           <p:cNvSpPr/>
           <p:nvPr/>
         </p:nvSpPr>
@@ -34442,7 +33531,7 @@
       </p:sp>
       <p:sp>
         <p:nvSpPr>
-          <p:cNvPr id="6" name="Rectangle 5"/>
+          <p:cNvPr id="5" name="Rectangle 4"/>
           <p:cNvSpPr/>
           <p:nvPr/>
         </p:nvSpPr>
@@ -34491,7 +33580,7 @@
       </p:sp>
       <p:sp>
         <p:nvSpPr>
-          <p:cNvPr id="7" name="TextBox 6"/>
+          <p:cNvPr id="6" name="TextBox 5"/>
           <p:cNvSpPr txBox="1"/>
           <p:nvPr/>
         </p:nvSpPr>
@@ -34533,7 +33622,7 @@
       </p:sp>
       <p:sp>
         <p:nvSpPr>
-          <p:cNvPr id="8" name="TextBox 7"/>
+          <p:cNvPr id="7" name="TextBox 6"/>
           <p:cNvSpPr txBox="1"/>
           <p:nvPr/>
         </p:nvSpPr>
@@ -34575,7 +33664,7 @@
       </p:sp>
       <p:graphicFrame>
         <p:nvGraphicFramePr>
-          <p:cNvPr id="9" name="Chart 8"/>
+          <p:cNvPr id="8" name="Chart 7"/>
           <p:cNvGraphicFramePr>
             <a:graphicFrameLocks noGrp="1"/>
           </p:cNvGraphicFramePr>
@@ -34593,7 +33682,7 @@
       </p:graphicFrame>
       <p:sp>
         <p:nvSpPr>
-          <p:cNvPr id="10" name="Rectangle 9"/>
+          <p:cNvPr id="9" name="Rectangle 8"/>
           <p:cNvSpPr/>
           <p:nvPr/>
         </p:nvSpPr>
@@ -34642,7 +33731,7 @@
       </p:sp>
       <p:sp>
         <p:nvSpPr>
-          <p:cNvPr id="11" name="TextBox 10"/>
+          <p:cNvPr id="10" name="TextBox 9"/>
           <p:cNvSpPr txBox="1"/>
           <p:nvPr/>
         </p:nvSpPr>
@@ -34684,7 +33773,7 @@
       </p:sp>
       <p:sp>
         <p:nvSpPr>
-          <p:cNvPr id="12" name="TextBox 11"/>
+          <p:cNvPr id="11" name="TextBox 10"/>
           <p:cNvSpPr txBox="1"/>
           <p:nvPr/>
         </p:nvSpPr>
@@ -34726,7 +33815,7 @@
       </p:sp>
       <p:sp>
         <p:nvSpPr>
-          <p:cNvPr id="13" name="TextBox 12"/>
+          <p:cNvPr id="12" name="TextBox 11"/>
           <p:cNvSpPr txBox="1"/>
           <p:nvPr/>
         </p:nvSpPr>
@@ -34841,48 +33930,6 @@
         </p:nvSpPr>
         <p:spPr>
           <a:xfrm>
-            <a:off x="5897880" y="310896"/>
-            <a:ext cx="4800600" cy="256032"/>
-          </a:xfrm>
-          <a:prstGeom prst="rect">
-            <a:avLst/>
-          </a:prstGeom>
-          <a:noFill/>
-        </p:spPr>
-        <p:txBody>
-          <a:bodyPr wrap="none" lIns="9144" rIns="9144" tIns="9144" bIns="9144" anchor="t">
-            <a:spAutoFit/>
-          </a:bodyPr>
-          <a:lstStyle/>
-          <a:p>
-            <a:pPr algn="r">
-              <a:spcAft>
-                <a:spcPts val="0"/>
-              </a:spcAft>
-              <a:defRPr sz="680" b="1">
-                <a:solidFill>
-                  <a:srgbClr val="4F6B00"/>
-                </a:solidFill>
-                <a:latin typeface="Inter"/>
-              </a:defRPr>
-            </a:pPr>
-            <a:r>
-              <a:rPr>
-                <a:latin typeface="Inter"/>
-              </a:rPr>
-              <a:t>Illustrative, Gradient Maintained — demo data, not the client's holdings or managers</a:t>
-            </a:r>
-          </a:p>
-        </p:txBody>
-      </p:sp>
-      <p:sp>
-        <p:nvSpPr>
-          <p:cNvPr id="4" name="TextBox 3"/>
-          <p:cNvSpPr txBox="1"/>
-          <p:nvPr/>
-        </p:nvSpPr>
-        <p:spPr>
-          <a:xfrm>
             <a:off x="640080" y="566928"/>
             <a:ext cx="10058400" cy="530352"/>
           </a:xfrm>
@@ -34919,7 +33966,7 @@
       </p:sp>
       <p:sp>
         <p:nvSpPr>
-          <p:cNvPr id="5" name="Rectangle 4"/>
+          <p:cNvPr id="4" name="Rectangle 3"/>
           <p:cNvSpPr/>
           <p:nvPr/>
         </p:nvSpPr>
@@ -34968,7 +34015,7 @@
       </p:sp>
       <p:sp>
         <p:nvSpPr>
-          <p:cNvPr id="6" name="Rectangle 5"/>
+          <p:cNvPr id="5" name="Rectangle 4"/>
           <p:cNvSpPr/>
           <p:nvPr/>
         </p:nvSpPr>
@@ -35017,7 +34064,7 @@
       </p:sp>
       <p:sp>
         <p:nvSpPr>
-          <p:cNvPr id="7" name="TextBox 6"/>
+          <p:cNvPr id="6" name="TextBox 5"/>
           <p:cNvSpPr txBox="1"/>
           <p:nvPr/>
         </p:nvSpPr>
@@ -35059,7 +34106,7 @@
       </p:sp>
       <p:sp>
         <p:nvSpPr>
-          <p:cNvPr id="8" name="TextBox 7"/>
+          <p:cNvPr id="7" name="TextBox 6"/>
           <p:cNvSpPr txBox="1"/>
           <p:nvPr/>
         </p:nvSpPr>
@@ -35101,7 +34148,7 @@
       </p:sp>
       <p:graphicFrame>
         <p:nvGraphicFramePr>
-          <p:cNvPr id="9" name="Table 8"/>
+          <p:cNvPr id="8" name="Table 7"/>
           <p:cNvGraphicFramePr>
             <a:graphicFrameLocks noGrp="1"/>
           </p:cNvGraphicFramePr>
@@ -35787,7 +34834,7 @@
       </p:graphicFrame>
       <p:sp>
         <p:nvSpPr>
-          <p:cNvPr id="10" name="TextBox 9"/>
+          <p:cNvPr id="9" name="TextBox 8"/>
           <p:cNvSpPr txBox="1"/>
           <p:nvPr/>
         </p:nvSpPr>
@@ -35829,7 +34876,7 @@
       </p:sp>
       <p:sp>
         <p:nvSpPr>
-          <p:cNvPr id="11" name="Rectangle 10"/>
+          <p:cNvPr id="10" name="Rectangle 9"/>
           <p:cNvSpPr/>
           <p:nvPr/>
         </p:nvSpPr>
@@ -35878,7 +34925,7 @@
       </p:sp>
       <p:sp>
         <p:nvSpPr>
-          <p:cNvPr id="12" name="TextBox 11"/>
+          <p:cNvPr id="11" name="TextBox 10"/>
           <p:cNvSpPr txBox="1"/>
           <p:nvPr/>
         </p:nvSpPr>
@@ -35920,7 +34967,7 @@
       </p:sp>
       <p:sp>
         <p:nvSpPr>
-          <p:cNvPr id="13" name="TextBox 12"/>
+          <p:cNvPr id="12" name="TextBox 11"/>
           <p:cNvSpPr txBox="1"/>
           <p:nvPr/>
         </p:nvSpPr>
@@ -35962,7 +35009,7 @@
       </p:sp>
       <p:sp>
         <p:nvSpPr>
-          <p:cNvPr id="14" name="TextBox 13"/>
+          <p:cNvPr id="13" name="TextBox 12"/>
           <p:cNvSpPr txBox="1"/>
           <p:nvPr/>
         </p:nvSpPr>
@@ -36078,7 +35125,7 @@
         <p:spPr>
           <a:xfrm>
             <a:off x="640080" y="329184"/>
-            <a:ext cx="5303520" cy="182880"/>
+            <a:ext cx="9875520" cy="182880"/>
           </a:xfrm>
           <a:prstGeom prst="rect">
             <a:avLst/>
@@ -36119,48 +35166,6 @@
         </p:nvSpPr>
         <p:spPr>
           <a:xfrm>
-            <a:off x="5897880" y="310896"/>
-            <a:ext cx="4800600" cy="256032"/>
-          </a:xfrm>
-          <a:prstGeom prst="rect">
-            <a:avLst/>
-          </a:prstGeom>
-          <a:noFill/>
-        </p:spPr>
-        <p:txBody>
-          <a:bodyPr wrap="none" lIns="9144" rIns="9144" tIns="9144" bIns="9144" anchor="t">
-            <a:spAutoFit/>
-          </a:bodyPr>
-          <a:lstStyle/>
-          <a:p>
-            <a:pPr algn="r">
-              <a:spcAft>
-                <a:spcPts val="0"/>
-              </a:spcAft>
-              <a:defRPr sz="680" b="1">
-                <a:solidFill>
-                  <a:srgbClr val="4F6B00"/>
-                </a:solidFill>
-                <a:latin typeface="Inter"/>
-              </a:defRPr>
-            </a:pPr>
-            <a:r>
-              <a:rPr>
-                <a:latin typeface="Inter"/>
-              </a:rPr>
-              <a:t>Illustrative, Gradient Maintained — demo data, not the client's holdings or managers</a:t>
-            </a:r>
-          </a:p>
-        </p:txBody>
-      </p:sp>
-      <p:sp>
-        <p:nvSpPr>
-          <p:cNvPr id="5" name="TextBox 4"/>
-          <p:cNvSpPr txBox="1"/>
-          <p:nvPr/>
-        </p:nvSpPr>
-        <p:spPr>
-          <a:xfrm>
             <a:off x="640080" y="566928"/>
             <a:ext cx="10058400" cy="530352"/>
           </a:xfrm>
@@ -36197,7 +35202,7 @@
       </p:sp>
       <p:sp>
         <p:nvSpPr>
-          <p:cNvPr id="6" name="Rectangle 5"/>
+          <p:cNvPr id="5" name="Rectangle 4"/>
           <p:cNvSpPr/>
           <p:nvPr/>
         </p:nvSpPr>
@@ -36246,7 +35251,7 @@
       </p:sp>
       <p:sp>
         <p:nvSpPr>
-          <p:cNvPr id="7" name="Rectangle 6"/>
+          <p:cNvPr id="6" name="Rectangle 5"/>
           <p:cNvSpPr/>
           <p:nvPr/>
         </p:nvSpPr>
@@ -36295,7 +35300,7 @@
       </p:sp>
       <p:sp>
         <p:nvSpPr>
-          <p:cNvPr id="8" name="TextBox 7"/>
+          <p:cNvPr id="7" name="TextBox 6"/>
           <p:cNvSpPr txBox="1"/>
           <p:nvPr/>
         </p:nvSpPr>
@@ -36337,7 +35342,7 @@
       </p:sp>
       <p:sp>
         <p:nvSpPr>
-          <p:cNvPr id="9" name="TextBox 8"/>
+          <p:cNvPr id="8" name="TextBox 7"/>
           <p:cNvSpPr txBox="1"/>
           <p:nvPr/>
         </p:nvSpPr>
@@ -36379,7 +35384,7 @@
       </p:sp>
       <p:sp>
         <p:nvSpPr>
-          <p:cNvPr id="10" name="TextBox 9"/>
+          <p:cNvPr id="9" name="TextBox 8"/>
           <p:cNvSpPr txBox="1"/>
           <p:nvPr/>
         </p:nvSpPr>
@@ -36421,7 +35426,7 @@
       </p:sp>
       <p:sp>
         <p:nvSpPr>
-          <p:cNvPr id="11" name="Rectangle 10"/>
+          <p:cNvPr id="10" name="Rectangle 9"/>
           <p:cNvSpPr/>
           <p:nvPr/>
         </p:nvSpPr>
@@ -36470,7 +35475,7 @@
       </p:sp>
       <p:sp>
         <p:nvSpPr>
-          <p:cNvPr id="12" name="Oval 11"/>
+          <p:cNvPr id="11" name="Oval 10"/>
           <p:cNvSpPr/>
           <p:nvPr/>
         </p:nvSpPr>
@@ -36519,7 +35524,7 @@
       </p:sp>
       <p:sp>
         <p:nvSpPr>
-          <p:cNvPr id="13" name="Rectangle 12"/>
+          <p:cNvPr id="12" name="Rectangle 11"/>
           <p:cNvSpPr/>
           <p:nvPr/>
         </p:nvSpPr>
@@ -36568,7 +35573,7 @@
       </p:sp>
       <p:sp>
         <p:nvSpPr>
-          <p:cNvPr id="14" name="TextBox 13"/>
+          <p:cNvPr id="13" name="TextBox 12"/>
           <p:cNvSpPr txBox="1"/>
           <p:nvPr/>
         </p:nvSpPr>
@@ -36610,7 +35615,7 @@
       </p:sp>
       <p:sp>
         <p:nvSpPr>
-          <p:cNvPr id="15" name="Rectangle 14"/>
+          <p:cNvPr id="14" name="Rectangle 13"/>
           <p:cNvSpPr/>
           <p:nvPr/>
         </p:nvSpPr>
@@ -36659,7 +35664,7 @@
       </p:sp>
       <p:sp>
         <p:nvSpPr>
-          <p:cNvPr id="16" name="Oval 15"/>
+          <p:cNvPr id="15" name="Oval 14"/>
           <p:cNvSpPr/>
           <p:nvPr/>
         </p:nvSpPr>
@@ -36708,7 +35713,7 @@
       </p:sp>
       <p:sp>
         <p:nvSpPr>
-          <p:cNvPr id="17" name="Rectangle 16"/>
+          <p:cNvPr id="16" name="Rectangle 15"/>
           <p:cNvSpPr/>
           <p:nvPr/>
         </p:nvSpPr>
@@ -36757,7 +35762,7 @@
       </p:sp>
       <p:sp>
         <p:nvSpPr>
-          <p:cNvPr id="18" name="TextBox 17"/>
+          <p:cNvPr id="17" name="TextBox 16"/>
           <p:cNvSpPr txBox="1"/>
           <p:nvPr/>
         </p:nvSpPr>
@@ -36799,7 +35804,7 @@
       </p:sp>
       <p:sp>
         <p:nvSpPr>
-          <p:cNvPr id="19" name="Rectangle 18"/>
+          <p:cNvPr id="18" name="Rectangle 17"/>
           <p:cNvSpPr/>
           <p:nvPr/>
         </p:nvSpPr>
@@ -36848,7 +35853,7 @@
       </p:sp>
       <p:sp>
         <p:nvSpPr>
-          <p:cNvPr id="20" name="Oval 19"/>
+          <p:cNvPr id="19" name="Oval 18"/>
           <p:cNvSpPr/>
           <p:nvPr/>
         </p:nvSpPr>
@@ -36897,7 +35902,7 @@
       </p:sp>
       <p:sp>
         <p:nvSpPr>
-          <p:cNvPr id="21" name="Rectangle 20"/>
+          <p:cNvPr id="20" name="Rectangle 19"/>
           <p:cNvSpPr/>
           <p:nvPr/>
         </p:nvSpPr>
@@ -36946,7 +35951,7 @@
       </p:sp>
       <p:sp>
         <p:nvSpPr>
-          <p:cNvPr id="22" name="Rectangle 21"/>
+          <p:cNvPr id="21" name="Rectangle 20"/>
           <p:cNvSpPr/>
           <p:nvPr/>
         </p:nvSpPr>
@@ -36995,7 +36000,7 @@
       </p:sp>
       <p:sp>
         <p:nvSpPr>
-          <p:cNvPr id="23" name="TextBox 22"/>
+          <p:cNvPr id="22" name="TextBox 21"/>
           <p:cNvSpPr txBox="1"/>
           <p:nvPr/>
         </p:nvSpPr>
@@ -37037,7 +36042,7 @@
       </p:sp>
       <p:sp>
         <p:nvSpPr>
-          <p:cNvPr id="24" name="TextBox 23"/>
+          <p:cNvPr id="23" name="TextBox 22"/>
           <p:cNvSpPr txBox="1"/>
           <p:nvPr/>
         </p:nvSpPr>
@@ -37079,7 +36084,7 @@
       </p:sp>
       <p:sp>
         <p:nvSpPr>
-          <p:cNvPr id="25" name="TextBox 24"/>
+          <p:cNvPr id="24" name="TextBox 23"/>
           <p:cNvSpPr txBox="1"/>
           <p:nvPr/>
         </p:nvSpPr>
@@ -37195,7 +36200,7 @@
         <p:spPr>
           <a:xfrm>
             <a:off x="640080" y="329184"/>
-            <a:ext cx="5303520" cy="182880"/>
+            <a:ext cx="9875520" cy="182880"/>
           </a:xfrm>
           <a:prstGeom prst="rect">
             <a:avLst/>
@@ -37236,48 +36241,6 @@
         </p:nvSpPr>
         <p:spPr>
           <a:xfrm>
-            <a:off x="5897880" y="310896"/>
-            <a:ext cx="4800600" cy="256032"/>
-          </a:xfrm>
-          <a:prstGeom prst="rect">
-            <a:avLst/>
-          </a:prstGeom>
-          <a:noFill/>
-        </p:spPr>
-        <p:txBody>
-          <a:bodyPr wrap="none" lIns="9144" rIns="9144" tIns="9144" bIns="9144" anchor="t">
-            <a:spAutoFit/>
-          </a:bodyPr>
-          <a:lstStyle/>
-          <a:p>
-            <a:pPr algn="r">
-              <a:spcAft>
-                <a:spcPts val="0"/>
-              </a:spcAft>
-              <a:defRPr sz="680" b="1">
-                <a:solidFill>
-                  <a:srgbClr val="4F6B00"/>
-                </a:solidFill>
-                <a:latin typeface="Inter"/>
-              </a:defRPr>
-            </a:pPr>
-            <a:r>
-              <a:rPr>
-                <a:latin typeface="Inter"/>
-              </a:rPr>
-              <a:t>Illustrative, Gradient Maintained — demo data, not the client's holdings or managers</a:t>
-            </a:r>
-          </a:p>
-        </p:txBody>
-      </p:sp>
-      <p:sp>
-        <p:nvSpPr>
-          <p:cNvPr id="5" name="TextBox 4"/>
-          <p:cNvSpPr txBox="1"/>
-          <p:nvPr/>
-        </p:nvSpPr>
-        <p:spPr>
-          <a:xfrm>
             <a:off x="640080" y="566928"/>
             <a:ext cx="10058400" cy="530352"/>
           </a:xfrm>
@@ -37314,7 +36277,7 @@
       </p:sp>
       <p:sp>
         <p:nvSpPr>
-          <p:cNvPr id="6" name="Rectangle 5"/>
+          <p:cNvPr id="5" name="Rectangle 4"/>
           <p:cNvSpPr/>
           <p:nvPr/>
         </p:nvSpPr>
@@ -37363,7 +36326,7 @@
       </p:sp>
       <p:sp>
         <p:nvSpPr>
-          <p:cNvPr id="7" name="Rectangle 6"/>
+          <p:cNvPr id="6" name="Rectangle 5"/>
           <p:cNvSpPr/>
           <p:nvPr/>
         </p:nvSpPr>
@@ -37412,7 +36375,7 @@
       </p:sp>
       <p:sp>
         <p:nvSpPr>
-          <p:cNvPr id="8" name="TextBox 7"/>
+          <p:cNvPr id="7" name="TextBox 6"/>
           <p:cNvSpPr txBox="1"/>
           <p:nvPr/>
         </p:nvSpPr>
@@ -37454,7 +36417,7 @@
       </p:sp>
       <p:sp>
         <p:nvSpPr>
-          <p:cNvPr id="9" name="TextBox 8"/>
+          <p:cNvPr id="8" name="TextBox 7"/>
           <p:cNvSpPr txBox="1"/>
           <p:nvPr/>
         </p:nvSpPr>
@@ -37496,7 +36459,7 @@
       </p:sp>
       <p:graphicFrame>
         <p:nvGraphicFramePr>
-          <p:cNvPr id="10" name="Chart 9"/>
+          <p:cNvPr id="9" name="Chart 8"/>
           <p:cNvGraphicFramePr>
             <a:graphicFrameLocks noGrp="1"/>
           </p:cNvGraphicFramePr>
@@ -37514,7 +36477,7 @@
       </p:graphicFrame>
       <p:sp>
         <p:nvSpPr>
-          <p:cNvPr id="11" name="Rectangle 10"/>
+          <p:cNvPr id="10" name="Rectangle 9"/>
           <p:cNvSpPr/>
           <p:nvPr/>
         </p:nvSpPr>
@@ -37563,7 +36526,7 @@
       </p:sp>
       <p:sp>
         <p:nvSpPr>
-          <p:cNvPr id="12" name="TextBox 11"/>
+          <p:cNvPr id="11" name="TextBox 10"/>
           <p:cNvSpPr txBox="1"/>
           <p:nvPr/>
         </p:nvSpPr>
@@ -37605,7 +36568,7 @@
       </p:sp>
       <p:sp>
         <p:nvSpPr>
-          <p:cNvPr id="13" name="TextBox 12"/>
+          <p:cNvPr id="12" name="TextBox 11"/>
           <p:cNvSpPr txBox="1"/>
           <p:nvPr/>
         </p:nvSpPr>
@@ -37647,7 +36610,7 @@
       </p:sp>
       <p:sp>
         <p:nvSpPr>
-          <p:cNvPr id="14" name="TextBox 13"/>
+          <p:cNvPr id="13" name="TextBox 12"/>
           <p:cNvSpPr txBox="1"/>
           <p:nvPr/>
         </p:nvSpPr>

--- a/plugins/gradient-cio/assets/examples/gradient-portfolio-construction-fixed-income.pptx
+++ b/plugins/gradient-cio/assets/examples/gradient-portfolio-construction-fixed-income.pptx
@@ -33,6 +33,7 @@
     <ns0:sldId id="281" ns1:id="rId32"/>
     <ns0:sldId id="282" ns1:id="rId33"/>
     <ns0:sldId id="283" ns1:id="rId34"/>
+    <ns0:sldId id="284" ns1:id="rId35"/>
   </ns0:sldIdLst>
   <ns0:sldSz cx="12191695" cy="6858000" type="screen16x9"/>
   <ns0:notesSz cx="6858000" cy="9144000"/>
@@ -5060,224 +5061,7 @@
       </p:sp>
       <p:sp>
         <p:nvSpPr>
-          <p:cNvPr id="17" name="Rectangle 16"/>
-          <p:cNvSpPr/>
-          <p:nvPr/>
-        </p:nvSpPr>
-        <p:spPr>
-          <a:xfrm>
-            <a:off x="685800" y="5687568"/>
-            <a:ext cx="3337560" cy="530352"/>
-          </a:xfrm>
-          <a:prstGeom prst="rect">
-            <a:avLst/>
-          </a:prstGeom>
-          <a:solidFill>
-            <a:srgbClr val="F2A93B"/>
-          </a:solidFill>
-          <a:ln>
-            <a:solidFill>
-              <a:srgbClr val="F2A93B"/>
-            </a:solidFill>
-          </a:ln>
-        </p:spPr>
-        <p:style>
-          <a:lnRef idx="1">
-            <a:schemeClr val="accent1"/>
-          </a:lnRef>
-          <a:fillRef idx="3">
-            <a:schemeClr val="accent1"/>
-          </a:fillRef>
-          <a:effectRef idx="2">
-            <a:schemeClr val="accent1"/>
-          </a:effectRef>
-          <a:fontRef idx="minor">
-            <a:schemeClr val="lt1"/>
-          </a:fontRef>
-        </p:style>
-        <p:txBody>
-          <a:bodyPr rtlCol="0" anchor="ctr"/>
-          <a:lstStyle/>
-          <a:p>
-            <a:pPr algn="ctr">
-              <a:defRPr>
-                <a:latin typeface="Inter"/>
-              </a:defRPr>
-            </a:pPr>
-          </a:p>
-        </p:txBody>
-      </p:sp>
-      <p:sp>
-        <p:nvSpPr>
-          <p:cNvPr id="18" name="TextBox 17"/>
-          <p:cNvSpPr txBox="1"/>
-          <p:nvPr/>
-        </p:nvSpPr>
-        <p:spPr>
-          <a:xfrm>
-            <a:off x="822960" y="5760720"/>
-            <a:ext cx="3063240" cy="128016"/>
-          </a:xfrm>
-          <a:prstGeom prst="rect">
-            <a:avLst/>
-          </a:prstGeom>
-          <a:noFill/>
-        </p:spPr>
-        <p:txBody>
-          <a:bodyPr wrap="none" lIns="9144" rIns="9144" tIns="9144" bIns="9144" anchor="t">
-            <a:spAutoFit/>
-          </a:bodyPr>
-          <a:lstStyle/>
-          <a:p>
-            <a:pPr algn="l">
-              <a:spcAft>
-                <a:spcPts val="0"/>
-              </a:spcAft>
-              <a:defRPr sz="620" b="1">
-                <a:solidFill>
-                  <a:srgbClr val="0D1117"/>
-                </a:solidFill>
-                <a:latin typeface="Inter"/>
-              </a:defRPr>
-            </a:pPr>
-            <a:r>
-              <a:rPr>
-                <a:latin typeface="Inter"/>
-              </a:rPr>
-              <a:t>OVERALL VIEW</a:t>
-            </a:r>
-          </a:p>
-        </p:txBody>
-      </p:sp>
-      <p:sp>
-        <p:nvSpPr>
-          <p:cNvPr id="19" name="TextBox 18"/>
-          <p:cNvSpPr txBox="1"/>
-          <p:nvPr/>
-        </p:nvSpPr>
-        <p:spPr>
-          <a:xfrm>
-            <a:off x="822960" y="5916168"/>
-            <a:ext cx="3063240" cy="182880"/>
-          </a:xfrm>
-          <a:prstGeom prst="rect">
-            <a:avLst/>
-          </a:prstGeom>
-          <a:noFill/>
-        </p:spPr>
-        <p:txBody>
-          <a:bodyPr wrap="none" lIns="9144" rIns="9144" tIns="9144" bIns="9144" anchor="t">
-            <a:spAutoFit/>
-          </a:bodyPr>
-          <a:lstStyle/>
-          <a:p>
-            <a:pPr algn="l">
-              <a:spcAft>
-                <a:spcPts val="0"/>
-              </a:spcAft>
-              <a:defRPr sz="900" b="1">
-                <a:solidFill>
-                  <a:srgbClr val="0D1117"/>
-                </a:solidFill>
-                <a:latin typeface="Inter"/>
-              </a:defRPr>
-            </a:pPr>
-            <a:r>
-              <a:rPr>
-                <a:latin typeface="Inter"/>
-              </a:rPr>
-              <a:t>Credit allocation proposed</a:t>
-            </a:r>
-          </a:p>
-        </p:txBody>
-      </p:sp>
-      <p:sp>
-        <p:nvSpPr>
-          <p:cNvPr id="20" name="TextBox 19"/>
-          <p:cNvSpPr txBox="1"/>
-          <p:nvPr/>
-        </p:nvSpPr>
-        <p:spPr>
-          <a:xfrm>
-            <a:off x="4297680" y="5733288"/>
-            <a:ext cx="3108960" cy="164592"/>
-          </a:xfrm>
-          <a:prstGeom prst="rect">
-            <a:avLst/>
-          </a:prstGeom>
-          <a:noFill/>
-        </p:spPr>
-        <p:txBody>
-          <a:bodyPr wrap="none" lIns="9144" rIns="9144" tIns="9144" bIns="9144" anchor="t">
-            <a:spAutoFit/>
-          </a:bodyPr>
-          <a:lstStyle/>
-          <a:p>
-            <a:pPr algn="l">
-              <a:spcAft>
-                <a:spcPts val="0"/>
-              </a:spcAft>
-              <a:defRPr sz="650" b="1">
-                <a:solidFill>
-                  <a:srgbClr val="8A94A1"/>
-                </a:solidFill>
-                <a:latin typeface="Inter"/>
-              </a:defRPr>
-            </a:pPr>
-            <a:r>
-              <a:rPr>
-                <a:latin typeface="Inter"/>
-              </a:rPr>
-              <a:t>SCOPE REVIEWED</a:t>
-            </a:r>
-          </a:p>
-        </p:txBody>
-      </p:sp>
-      <p:sp>
-        <p:nvSpPr>
-          <p:cNvPr id="21" name="TextBox 20"/>
-          <p:cNvSpPr txBox="1"/>
-          <p:nvPr/>
-        </p:nvSpPr>
-        <p:spPr>
-          <a:xfrm>
-            <a:off x="4297680" y="5934456"/>
-            <a:ext cx="3108960" cy="201168"/>
-          </a:xfrm>
-          <a:prstGeom prst="rect">
-            <a:avLst/>
-          </a:prstGeom>
-          <a:noFill/>
-        </p:spPr>
-        <p:txBody>
-          <a:bodyPr wrap="none" lIns="9144" rIns="9144" tIns="9144" bIns="9144" anchor="t">
-            <a:spAutoFit/>
-          </a:bodyPr>
-          <a:lstStyle/>
-          <a:p>
-            <a:pPr algn="l">
-              <a:spcAft>
-                <a:spcPts val="0"/>
-              </a:spcAft>
-              <a:defRPr sz="800" b="1">
-                <a:solidFill>
-                  <a:srgbClr val="FFFFFF"/>
-                </a:solidFill>
-                <a:latin typeface="Inter"/>
-              </a:defRPr>
-            </a:pPr>
-            <a:r>
-              <a:rPr>
-                <a:latin typeface="Inter"/>
-              </a:rPr>
-              <a:t>8 of 9 · Partial</a:t>
-            </a:r>
-          </a:p>
-        </p:txBody>
-      </p:sp>
-      <p:sp>
-        <p:nvSpPr>
-          <p:cNvPr id="22" name="TextBox 21"/>
+          <p:cNvPr id="17" name="TextBox 16"/>
           <p:cNvSpPr txBox="1"/>
           <p:nvPr/>
         </p:nvSpPr>
@@ -5319,7 +5103,7 @@
       </p:sp>
       <p:sp>
         <p:nvSpPr>
-          <p:cNvPr id="23" name="TextBox 22"/>
+          <p:cNvPr id="18" name="TextBox 17"/>
           <p:cNvSpPr txBox="1"/>
           <p:nvPr/>
         </p:nvSpPr>
@@ -5361,7 +5145,7 @@
       </p:sp>
       <p:sp>
         <p:nvSpPr>
-          <p:cNvPr id="24" name="TextBox 23"/>
+          <p:cNvPr id="19" name="TextBox 18"/>
           <p:cNvSpPr txBox="1"/>
           <p:nvPr/>
         </p:nvSpPr>
@@ -5477,7 +5261,7 @@
         <p:spPr>
           <a:xfrm>
             <a:off x="640080" y="329184"/>
-            <a:ext cx="5303520" cy="182880"/>
+            <a:ext cx="9875520" cy="182880"/>
           </a:xfrm>
           <a:prstGeom prst="rect">
             <a:avLst/>
@@ -5518,48 +5302,6 @@
         </p:nvSpPr>
         <p:spPr>
           <a:xfrm>
-            <a:off x="5897880" y="310896"/>
-            <a:ext cx="4800600" cy="256032"/>
-          </a:xfrm>
-          <a:prstGeom prst="rect">
-            <a:avLst/>
-          </a:prstGeom>
-          <a:noFill/>
-        </p:spPr>
-        <p:txBody>
-          <a:bodyPr wrap="none" lIns="9144" rIns="9144" tIns="9144" bIns="9144" anchor="t">
-            <a:spAutoFit/>
-          </a:bodyPr>
-          <a:lstStyle/>
-          <a:p>
-            <a:pPr algn="r">
-              <a:spcAft>
-                <a:spcPts val="0"/>
-              </a:spcAft>
-              <a:defRPr sz="680" b="1">
-                <a:solidFill>
-                  <a:srgbClr val="4F6B00"/>
-                </a:solidFill>
-                <a:latin typeface="Inter"/>
-              </a:defRPr>
-            </a:pPr>
-            <a:r>
-              <a:rPr>
-                <a:latin typeface="Inter"/>
-              </a:rPr>
-              <a:t>Illustrative, Gradient Maintained — demo data, not the client's holdings or managers</a:t>
-            </a:r>
-          </a:p>
-        </p:txBody>
-      </p:sp>
-      <p:sp>
-        <p:nvSpPr>
-          <p:cNvPr id="5" name="TextBox 4"/>
-          <p:cNvSpPr txBox="1"/>
-          <p:nvPr/>
-        </p:nvSpPr>
-        <p:spPr>
-          <a:xfrm>
             <a:off x="640080" y="566928"/>
             <a:ext cx="10058400" cy="530352"/>
           </a:xfrm>
@@ -5596,7 +5338,7 @@
       </p:sp>
       <p:sp>
         <p:nvSpPr>
-          <p:cNvPr id="6" name="Rectangle 5"/>
+          <p:cNvPr id="5" name="Rectangle 4"/>
           <p:cNvSpPr/>
           <p:nvPr/>
         </p:nvSpPr>
@@ -5645,7 +5387,7 @@
       </p:sp>
       <p:sp>
         <p:nvSpPr>
-          <p:cNvPr id="7" name="Rectangle 6"/>
+          <p:cNvPr id="6" name="Rectangle 5"/>
           <p:cNvSpPr/>
           <p:nvPr/>
         </p:nvSpPr>
@@ -5694,7 +5436,7 @@
       </p:sp>
       <p:sp>
         <p:nvSpPr>
-          <p:cNvPr id="8" name="TextBox 7"/>
+          <p:cNvPr id="7" name="TextBox 6"/>
           <p:cNvSpPr txBox="1"/>
           <p:nvPr/>
         </p:nvSpPr>
@@ -5736,7 +5478,7 @@
       </p:sp>
       <p:sp>
         <p:nvSpPr>
-          <p:cNvPr id="9" name="TextBox 8"/>
+          <p:cNvPr id="8" name="TextBox 7"/>
           <p:cNvSpPr txBox="1"/>
           <p:nvPr/>
         </p:nvSpPr>
@@ -5778,7 +5520,7 @@
       </p:sp>
       <p:graphicFrame>
         <p:nvGraphicFramePr>
-          <p:cNvPr id="10" name="Table 9"/>
+          <p:cNvPr id="9" name="Table 8"/>
           <p:cNvGraphicFramePr>
             <a:graphicFrameLocks noGrp="1"/>
           </p:cNvGraphicFramePr>
@@ -6464,7 +6206,7 @@
       </p:graphicFrame>
       <p:sp>
         <p:nvSpPr>
-          <p:cNvPr id="11" name="Rectangle 10"/>
+          <p:cNvPr id="10" name="Rectangle 9"/>
           <p:cNvSpPr/>
           <p:nvPr/>
         </p:nvSpPr>
@@ -6513,7 +6255,7 @@
       </p:sp>
       <p:sp>
         <p:nvSpPr>
-          <p:cNvPr id="12" name="Rectangle 11"/>
+          <p:cNvPr id="11" name="Rectangle 10"/>
           <p:cNvSpPr/>
           <p:nvPr/>
         </p:nvSpPr>
@@ -6562,7 +6304,7 @@
       </p:sp>
       <p:sp>
         <p:nvSpPr>
-          <p:cNvPr id="13" name="TextBox 12"/>
+          <p:cNvPr id="12" name="TextBox 11"/>
           <p:cNvSpPr txBox="1"/>
           <p:nvPr/>
         </p:nvSpPr>
@@ -6604,7 +6346,7 @@
       </p:sp>
       <p:sp>
         <p:nvSpPr>
-          <p:cNvPr id="14" name="TextBox 13"/>
+          <p:cNvPr id="13" name="TextBox 12"/>
           <p:cNvSpPr txBox="1"/>
           <p:nvPr/>
         </p:nvSpPr>
@@ -6646,7 +6388,7 @@
       </p:sp>
       <p:sp>
         <p:nvSpPr>
-          <p:cNvPr id="15" name="TextBox 14"/>
+          <p:cNvPr id="14" name="TextBox 13"/>
           <p:cNvSpPr txBox="1"/>
           <p:nvPr/>
         </p:nvSpPr>
@@ -6688,7 +6430,7 @@
       </p:sp>
       <p:sp>
         <p:nvSpPr>
-          <p:cNvPr id="16" name="Rectangle 15"/>
+          <p:cNvPr id="15" name="Rectangle 14"/>
           <p:cNvSpPr/>
           <p:nvPr/>
         </p:nvSpPr>
@@ -6737,7 +6479,7 @@
       </p:sp>
       <p:sp>
         <p:nvSpPr>
-          <p:cNvPr id="17" name="TextBox 16"/>
+          <p:cNvPr id="16" name="TextBox 15"/>
           <p:cNvSpPr txBox="1"/>
           <p:nvPr/>
         </p:nvSpPr>
@@ -6779,7 +6521,7 @@
       </p:sp>
       <p:sp>
         <p:nvSpPr>
-          <p:cNvPr id="18" name="TextBox 17"/>
+          <p:cNvPr id="17" name="TextBox 16"/>
           <p:cNvSpPr txBox="1"/>
           <p:nvPr/>
         </p:nvSpPr>
@@ -6821,7 +6563,7 @@
       </p:sp>
       <p:sp>
         <p:nvSpPr>
-          <p:cNvPr id="19" name="TextBox 18"/>
+          <p:cNvPr id="18" name="TextBox 17"/>
           <p:cNvSpPr txBox="1"/>
           <p:nvPr/>
         </p:nvSpPr>
@@ -6936,48 +6678,6 @@
         </p:nvSpPr>
         <p:spPr>
           <a:xfrm>
-            <a:off x="5897880" y="310896"/>
-            <a:ext cx="4800600" cy="256032"/>
-          </a:xfrm>
-          <a:prstGeom prst="rect">
-            <a:avLst/>
-          </a:prstGeom>
-          <a:noFill/>
-        </p:spPr>
-        <p:txBody>
-          <a:bodyPr wrap="none" lIns="9144" rIns="9144" tIns="9144" bIns="9144" anchor="t">
-            <a:spAutoFit/>
-          </a:bodyPr>
-          <a:lstStyle/>
-          <a:p>
-            <a:pPr algn="r">
-              <a:spcAft>
-                <a:spcPts val="0"/>
-              </a:spcAft>
-              <a:defRPr sz="680" b="1">
-                <a:solidFill>
-                  <a:srgbClr val="4F6B00"/>
-                </a:solidFill>
-                <a:latin typeface="Inter"/>
-              </a:defRPr>
-            </a:pPr>
-            <a:r>
-              <a:rPr>
-                <a:latin typeface="Inter"/>
-              </a:rPr>
-              <a:t>Illustrative, Gradient Maintained — demo data, not the client's holdings or managers</a:t>
-            </a:r>
-          </a:p>
-        </p:txBody>
-      </p:sp>
-      <p:sp>
-        <p:nvSpPr>
-          <p:cNvPr id="4" name="TextBox 3"/>
-          <p:cNvSpPr txBox="1"/>
-          <p:nvPr/>
-        </p:nvSpPr>
-        <p:spPr>
-          <a:xfrm>
             <a:off x="640080" y="566928"/>
             <a:ext cx="10058400" cy="530352"/>
           </a:xfrm>
@@ -7014,7 +6714,7 @@
       </p:sp>
       <p:sp>
         <p:nvSpPr>
-          <p:cNvPr id="5" name="Rectangle 4"/>
+          <p:cNvPr id="4" name="Rectangle 3"/>
           <p:cNvSpPr/>
           <p:nvPr/>
         </p:nvSpPr>
@@ -7063,7 +6763,7 @@
       </p:sp>
       <p:sp>
         <p:nvSpPr>
-          <p:cNvPr id="6" name="Rectangle 5"/>
+          <p:cNvPr id="5" name="Rectangle 4"/>
           <p:cNvSpPr/>
           <p:nvPr/>
         </p:nvSpPr>
@@ -7112,7 +6812,7 @@
       </p:sp>
       <p:sp>
         <p:nvSpPr>
-          <p:cNvPr id="7" name="TextBox 6"/>
+          <p:cNvPr id="6" name="TextBox 5"/>
           <p:cNvSpPr txBox="1"/>
           <p:nvPr/>
         </p:nvSpPr>
@@ -7154,7 +6854,7 @@
       </p:sp>
       <p:sp>
         <p:nvSpPr>
-          <p:cNvPr id="8" name="TextBox 7"/>
+          <p:cNvPr id="7" name="TextBox 6"/>
           <p:cNvSpPr txBox="1"/>
           <p:nvPr/>
         </p:nvSpPr>
@@ -7196,7 +6896,7 @@
       </p:sp>
       <p:graphicFrame>
         <p:nvGraphicFramePr>
-          <p:cNvPr id="9" name="Chart 8"/>
+          <p:cNvPr id="8" name="Chart 7"/>
           <p:cNvGraphicFramePr>
             <a:graphicFrameLocks noGrp="1"/>
           </p:cNvGraphicFramePr>
@@ -7214,7 +6914,7 @@
       </p:graphicFrame>
       <p:sp>
         <p:nvSpPr>
-          <p:cNvPr id="10" name="Rectangle 9"/>
+          <p:cNvPr id="9" name="Rectangle 8"/>
           <p:cNvSpPr/>
           <p:nvPr/>
         </p:nvSpPr>
@@ -7263,7 +6963,7 @@
       </p:sp>
       <p:sp>
         <p:nvSpPr>
-          <p:cNvPr id="11" name="TextBox 10"/>
+          <p:cNvPr id="10" name="TextBox 9"/>
           <p:cNvSpPr txBox="1"/>
           <p:nvPr/>
         </p:nvSpPr>
@@ -7305,7 +7005,7 @@
       </p:sp>
       <p:sp>
         <p:nvSpPr>
-          <p:cNvPr id="12" name="TextBox 11"/>
+          <p:cNvPr id="11" name="TextBox 10"/>
           <p:cNvSpPr txBox="1"/>
           <p:nvPr/>
         </p:nvSpPr>
@@ -7347,7 +7047,7 @@
       </p:sp>
       <p:sp>
         <p:nvSpPr>
-          <p:cNvPr id="13" name="TextBox 12"/>
+          <p:cNvPr id="12" name="TextBox 11"/>
           <p:cNvSpPr txBox="1"/>
           <p:nvPr/>
         </p:nvSpPr>
@@ -7462,48 +7162,6 @@
         </p:nvSpPr>
         <p:spPr>
           <a:xfrm>
-            <a:off x="5897880" y="310896"/>
-            <a:ext cx="4800600" cy="256032"/>
-          </a:xfrm>
-          <a:prstGeom prst="rect">
-            <a:avLst/>
-          </a:prstGeom>
-          <a:noFill/>
-        </p:spPr>
-        <p:txBody>
-          <a:bodyPr wrap="none" lIns="9144" rIns="9144" tIns="9144" bIns="9144" anchor="t">
-            <a:spAutoFit/>
-          </a:bodyPr>
-          <a:lstStyle/>
-          <a:p>
-            <a:pPr algn="r">
-              <a:spcAft>
-                <a:spcPts val="0"/>
-              </a:spcAft>
-              <a:defRPr sz="680" b="1">
-                <a:solidFill>
-                  <a:srgbClr val="4F6B00"/>
-                </a:solidFill>
-                <a:latin typeface="Inter"/>
-              </a:defRPr>
-            </a:pPr>
-            <a:r>
-              <a:rPr>
-                <a:latin typeface="Inter"/>
-              </a:rPr>
-              <a:t>Illustrative, Gradient Maintained — demo data, not the client's holdings or managers</a:t>
-            </a:r>
-          </a:p>
-        </p:txBody>
-      </p:sp>
-      <p:sp>
-        <p:nvSpPr>
-          <p:cNvPr id="4" name="TextBox 3"/>
-          <p:cNvSpPr txBox="1"/>
-          <p:nvPr/>
-        </p:nvSpPr>
-        <p:spPr>
-          <a:xfrm>
             <a:off x="640080" y="566928"/>
             <a:ext cx="10058400" cy="530352"/>
           </a:xfrm>
@@ -7540,7 +7198,7 @@
       </p:sp>
       <p:sp>
         <p:nvSpPr>
-          <p:cNvPr id="5" name="Rectangle 4"/>
+          <p:cNvPr id="4" name="Rectangle 3"/>
           <p:cNvSpPr/>
           <p:nvPr/>
         </p:nvSpPr>
@@ -7589,7 +7247,7 @@
       </p:sp>
       <p:sp>
         <p:nvSpPr>
-          <p:cNvPr id="6" name="Rectangle 5"/>
+          <p:cNvPr id="5" name="Rectangle 4"/>
           <p:cNvSpPr/>
           <p:nvPr/>
         </p:nvSpPr>
@@ -7638,7 +7296,7 @@
       </p:sp>
       <p:sp>
         <p:nvSpPr>
-          <p:cNvPr id="7" name="TextBox 6"/>
+          <p:cNvPr id="6" name="TextBox 5"/>
           <p:cNvSpPr txBox="1"/>
           <p:nvPr/>
         </p:nvSpPr>
@@ -7680,7 +7338,7 @@
       </p:sp>
       <p:sp>
         <p:nvSpPr>
-          <p:cNvPr id="8" name="TextBox 7"/>
+          <p:cNvPr id="7" name="TextBox 6"/>
           <p:cNvSpPr txBox="1"/>
           <p:nvPr/>
         </p:nvSpPr>
@@ -7722,7 +7380,7 @@
       </p:sp>
       <p:graphicFrame>
         <p:nvGraphicFramePr>
-          <p:cNvPr id="9" name="Table 8"/>
+          <p:cNvPr id="8" name="Table 7"/>
           <p:cNvGraphicFramePr>
             <a:graphicFrameLocks noGrp="1"/>
           </p:cNvGraphicFramePr>
@@ -8299,7 +7957,7 @@
       </p:graphicFrame>
       <p:sp>
         <p:nvSpPr>
-          <p:cNvPr id="10" name="TextBox 9"/>
+          <p:cNvPr id="9" name="TextBox 8"/>
           <p:cNvSpPr txBox="1"/>
           <p:nvPr/>
         </p:nvSpPr>
@@ -8341,7 +7999,7 @@
       </p:sp>
       <p:graphicFrame>
         <p:nvGraphicFramePr>
-          <p:cNvPr id="11" name="Table 10"/>
+          <p:cNvPr id="10" name="Table 9"/>
           <p:cNvGraphicFramePr>
             <a:graphicFrameLocks noGrp="1"/>
           </p:cNvGraphicFramePr>
@@ -8783,7 +8441,7 @@
       </p:graphicFrame>
       <p:sp>
         <p:nvSpPr>
-          <p:cNvPr id="12" name="TextBox 11"/>
+          <p:cNvPr id="11" name="TextBox 10"/>
           <p:cNvSpPr txBox="1"/>
           <p:nvPr/>
         </p:nvSpPr>
@@ -8825,7 +8483,7 @@
       </p:sp>
       <p:sp>
         <p:nvSpPr>
-          <p:cNvPr id="13" name="Rectangle 12"/>
+          <p:cNvPr id="12" name="Rectangle 11"/>
           <p:cNvSpPr/>
           <p:nvPr/>
         </p:nvSpPr>
@@ -8874,7 +8532,7 @@
       </p:sp>
       <p:sp>
         <p:nvSpPr>
-          <p:cNvPr id="14" name="TextBox 13"/>
+          <p:cNvPr id="13" name="TextBox 12"/>
           <p:cNvSpPr txBox="1"/>
           <p:nvPr/>
         </p:nvSpPr>
@@ -8916,7 +8574,7 @@
       </p:sp>
       <p:sp>
         <p:nvSpPr>
-          <p:cNvPr id="15" name="TextBox 14"/>
+          <p:cNvPr id="14" name="TextBox 13"/>
           <p:cNvSpPr txBox="1"/>
           <p:nvPr/>
         </p:nvSpPr>
@@ -8958,7 +8616,7 @@
       </p:sp>
       <p:sp>
         <p:nvSpPr>
-          <p:cNvPr id="16" name="TextBox 15"/>
+          <p:cNvPr id="15" name="TextBox 14"/>
           <p:cNvSpPr txBox="1"/>
           <p:nvPr/>
         </p:nvSpPr>
@@ -9073,48 +8731,6 @@
         </p:nvSpPr>
         <p:spPr>
           <a:xfrm>
-            <a:off x="5897880" y="310896"/>
-            <a:ext cx="4800600" cy="256032"/>
-          </a:xfrm>
-          <a:prstGeom prst="rect">
-            <a:avLst/>
-          </a:prstGeom>
-          <a:noFill/>
-        </p:spPr>
-        <p:txBody>
-          <a:bodyPr wrap="none" lIns="9144" rIns="9144" tIns="9144" bIns="9144" anchor="t">
-            <a:spAutoFit/>
-          </a:bodyPr>
-          <a:lstStyle/>
-          <a:p>
-            <a:pPr algn="r">
-              <a:spcAft>
-                <a:spcPts val="0"/>
-              </a:spcAft>
-              <a:defRPr sz="680" b="1">
-                <a:solidFill>
-                  <a:srgbClr val="4F6B00"/>
-                </a:solidFill>
-                <a:latin typeface="Inter"/>
-              </a:defRPr>
-            </a:pPr>
-            <a:r>
-              <a:rPr>
-                <a:latin typeface="Inter"/>
-              </a:rPr>
-              <a:t>Illustrative, Gradient Maintained — demo data, not the client's holdings or managers</a:t>
-            </a:r>
-          </a:p>
-        </p:txBody>
-      </p:sp>
-      <p:sp>
-        <p:nvSpPr>
-          <p:cNvPr id="4" name="TextBox 3"/>
-          <p:cNvSpPr txBox="1"/>
-          <p:nvPr/>
-        </p:nvSpPr>
-        <p:spPr>
-          <a:xfrm>
             <a:off x="640080" y="566928"/>
             <a:ext cx="10058400" cy="530352"/>
           </a:xfrm>
@@ -9151,7 +8767,7 @@
       </p:sp>
       <p:sp>
         <p:nvSpPr>
-          <p:cNvPr id="5" name="Rectangle 4"/>
+          <p:cNvPr id="4" name="Rectangle 3"/>
           <p:cNvSpPr/>
           <p:nvPr/>
         </p:nvSpPr>
@@ -9200,7 +8816,7 @@
       </p:sp>
       <p:sp>
         <p:nvSpPr>
-          <p:cNvPr id="6" name="Rectangle 5"/>
+          <p:cNvPr id="5" name="Rectangle 4"/>
           <p:cNvSpPr/>
           <p:nvPr/>
         </p:nvSpPr>
@@ -9249,7 +8865,7 @@
       </p:sp>
       <p:sp>
         <p:nvSpPr>
-          <p:cNvPr id="7" name="TextBox 6"/>
+          <p:cNvPr id="6" name="TextBox 5"/>
           <p:cNvSpPr txBox="1"/>
           <p:nvPr/>
         </p:nvSpPr>
@@ -9291,7 +8907,7 @@
       </p:sp>
       <p:graphicFrame>
         <p:nvGraphicFramePr>
-          <p:cNvPr id="8" name="Table 7"/>
+          <p:cNvPr id="7" name="Table 6"/>
           <p:cNvGraphicFramePr>
             <a:graphicFrameLocks noGrp="1"/>
           </p:cNvGraphicFramePr>
@@ -9541,7 +9157,7 @@
       </p:graphicFrame>
       <p:sp>
         <p:nvSpPr>
-          <p:cNvPr id="9" name="Rectangle 8"/>
+          <p:cNvPr id="8" name="Rectangle 7"/>
           <p:cNvSpPr/>
           <p:nvPr/>
         </p:nvSpPr>
@@ -9590,7 +9206,7 @@
       </p:sp>
       <p:sp>
         <p:nvSpPr>
-          <p:cNvPr id="10" name="TextBox 9"/>
+          <p:cNvPr id="9" name="TextBox 8"/>
           <p:cNvSpPr txBox="1"/>
           <p:nvPr/>
         </p:nvSpPr>
@@ -9632,7 +9248,7 @@
       </p:sp>
       <p:sp>
         <p:nvSpPr>
-          <p:cNvPr id="11" name="TextBox 10"/>
+          <p:cNvPr id="10" name="TextBox 9"/>
           <p:cNvSpPr txBox="1"/>
           <p:nvPr/>
         </p:nvSpPr>
@@ -9674,7 +9290,7 @@
       </p:sp>
       <p:sp>
         <p:nvSpPr>
-          <p:cNvPr id="12" name="TextBox 11"/>
+          <p:cNvPr id="11" name="TextBox 10"/>
           <p:cNvSpPr txBox="1"/>
           <p:nvPr/>
         </p:nvSpPr>
@@ -9790,7 +9406,7 @@
         <p:spPr>
           <a:xfrm>
             <a:off x="640080" y="329184"/>
-            <a:ext cx="5303520" cy="182880"/>
+            <a:ext cx="9875520" cy="182880"/>
           </a:xfrm>
           <a:prstGeom prst="rect">
             <a:avLst/>
@@ -9831,48 +9447,6 @@
         </p:nvSpPr>
         <p:spPr>
           <a:xfrm>
-            <a:off x="5897880" y="310896"/>
-            <a:ext cx="4800600" cy="256032"/>
-          </a:xfrm>
-          <a:prstGeom prst="rect">
-            <a:avLst/>
-          </a:prstGeom>
-          <a:noFill/>
-        </p:spPr>
-        <p:txBody>
-          <a:bodyPr wrap="none" lIns="9144" rIns="9144" tIns="9144" bIns="9144" anchor="t">
-            <a:spAutoFit/>
-          </a:bodyPr>
-          <a:lstStyle/>
-          <a:p>
-            <a:pPr algn="r">
-              <a:spcAft>
-                <a:spcPts val="0"/>
-              </a:spcAft>
-              <a:defRPr sz="680" b="1">
-                <a:solidFill>
-                  <a:srgbClr val="4F6B00"/>
-                </a:solidFill>
-                <a:latin typeface="Inter"/>
-              </a:defRPr>
-            </a:pPr>
-            <a:r>
-              <a:rPr>
-                <a:latin typeface="Inter"/>
-              </a:rPr>
-              <a:t>Illustrative, Gradient Maintained — demo data, not the client's holdings or managers</a:t>
-            </a:r>
-          </a:p>
-        </p:txBody>
-      </p:sp>
-      <p:sp>
-        <p:nvSpPr>
-          <p:cNvPr id="5" name="TextBox 4"/>
-          <p:cNvSpPr txBox="1"/>
-          <p:nvPr/>
-        </p:nvSpPr>
-        <p:spPr>
-          <a:xfrm>
             <a:off x="640080" y="566928"/>
             <a:ext cx="10058400" cy="530352"/>
           </a:xfrm>
@@ -9909,7 +9483,7 @@
       </p:sp>
       <p:sp>
         <p:nvSpPr>
-          <p:cNvPr id="6" name="Rectangle 5"/>
+          <p:cNvPr id="5" name="Rectangle 4"/>
           <p:cNvSpPr/>
           <p:nvPr/>
         </p:nvSpPr>
@@ -9958,7 +9532,7 @@
       </p:sp>
       <p:sp>
         <p:nvSpPr>
-          <p:cNvPr id="7" name="Rectangle 6"/>
+          <p:cNvPr id="6" name="Rectangle 5"/>
           <p:cNvSpPr/>
           <p:nvPr/>
         </p:nvSpPr>
@@ -10007,7 +9581,7 @@
       </p:sp>
       <p:sp>
         <p:nvSpPr>
-          <p:cNvPr id="8" name="TextBox 7"/>
+          <p:cNvPr id="7" name="TextBox 6"/>
           <p:cNvSpPr txBox="1"/>
           <p:nvPr/>
         </p:nvSpPr>
@@ -10049,7 +9623,7 @@
       </p:sp>
       <p:sp>
         <p:nvSpPr>
-          <p:cNvPr id="9" name="Rectangle 8"/>
+          <p:cNvPr id="8" name="Rectangle 7"/>
           <p:cNvSpPr/>
           <p:nvPr/>
         </p:nvSpPr>
@@ -10098,7 +9672,7 @@
       </p:sp>
       <p:sp>
         <p:nvSpPr>
-          <p:cNvPr id="10" name="Rectangle 9"/>
+          <p:cNvPr id="9" name="Rectangle 8"/>
           <p:cNvSpPr/>
           <p:nvPr/>
         </p:nvSpPr>
@@ -10147,7 +9721,7 @@
       </p:sp>
       <p:sp>
         <p:nvSpPr>
-          <p:cNvPr id="11" name="TextBox 10"/>
+          <p:cNvPr id="10" name="TextBox 9"/>
           <p:cNvSpPr txBox="1"/>
           <p:nvPr/>
         </p:nvSpPr>
@@ -10189,7 +9763,7 @@
       </p:sp>
       <p:sp>
         <p:nvSpPr>
-          <p:cNvPr id="12" name="TextBox 11"/>
+          <p:cNvPr id="11" name="TextBox 10"/>
           <p:cNvSpPr txBox="1"/>
           <p:nvPr/>
         </p:nvSpPr>
@@ -10231,7 +9805,7 @@
       </p:sp>
       <p:sp>
         <p:nvSpPr>
-          <p:cNvPr id="13" name="TextBox 12"/>
+          <p:cNvPr id="12" name="TextBox 11"/>
           <p:cNvSpPr txBox="1"/>
           <p:nvPr/>
         </p:nvSpPr>
@@ -10273,7 +9847,7 @@
       </p:sp>
       <p:sp>
         <p:nvSpPr>
-          <p:cNvPr id="14" name="Rectangle 13"/>
+          <p:cNvPr id="13" name="Rectangle 12"/>
           <p:cNvSpPr/>
           <p:nvPr/>
         </p:nvSpPr>
@@ -10322,7 +9896,7 @@
       </p:sp>
       <p:sp>
         <p:nvSpPr>
-          <p:cNvPr id="15" name="Rectangle 14"/>
+          <p:cNvPr id="14" name="Rectangle 13"/>
           <p:cNvSpPr/>
           <p:nvPr/>
         </p:nvSpPr>
@@ -10371,7 +9945,7 @@
       </p:sp>
       <p:sp>
         <p:nvSpPr>
-          <p:cNvPr id="16" name="TextBox 15"/>
+          <p:cNvPr id="15" name="TextBox 14"/>
           <p:cNvSpPr txBox="1"/>
           <p:nvPr/>
         </p:nvSpPr>
@@ -10413,7 +9987,7 @@
       </p:sp>
       <p:sp>
         <p:nvSpPr>
-          <p:cNvPr id="17" name="TextBox 16"/>
+          <p:cNvPr id="16" name="TextBox 15"/>
           <p:cNvSpPr txBox="1"/>
           <p:nvPr/>
         </p:nvSpPr>
@@ -10455,7 +10029,7 @@
       </p:sp>
       <p:sp>
         <p:nvSpPr>
-          <p:cNvPr id="18" name="TextBox 17"/>
+          <p:cNvPr id="17" name="TextBox 16"/>
           <p:cNvSpPr txBox="1"/>
           <p:nvPr/>
         </p:nvSpPr>
@@ -10497,7 +10071,7 @@
       </p:sp>
       <p:sp>
         <p:nvSpPr>
-          <p:cNvPr id="19" name="Rectangle 18"/>
+          <p:cNvPr id="18" name="Rectangle 17"/>
           <p:cNvSpPr/>
           <p:nvPr/>
         </p:nvSpPr>
@@ -10546,7 +10120,7 @@
       </p:sp>
       <p:sp>
         <p:nvSpPr>
-          <p:cNvPr id="20" name="Rectangle 19"/>
+          <p:cNvPr id="19" name="Rectangle 18"/>
           <p:cNvSpPr/>
           <p:nvPr/>
         </p:nvSpPr>
@@ -10595,7 +10169,7 @@
       </p:sp>
       <p:sp>
         <p:nvSpPr>
-          <p:cNvPr id="21" name="TextBox 20"/>
+          <p:cNvPr id="20" name="TextBox 19"/>
           <p:cNvSpPr txBox="1"/>
           <p:nvPr/>
         </p:nvSpPr>
@@ -10637,7 +10211,7 @@
       </p:sp>
       <p:sp>
         <p:nvSpPr>
-          <p:cNvPr id="22" name="TextBox 21"/>
+          <p:cNvPr id="21" name="TextBox 20"/>
           <p:cNvSpPr txBox="1"/>
           <p:nvPr/>
         </p:nvSpPr>
@@ -10679,7 +10253,7 @@
       </p:sp>
       <p:sp>
         <p:nvSpPr>
-          <p:cNvPr id="23" name="TextBox 22"/>
+          <p:cNvPr id="22" name="TextBox 21"/>
           <p:cNvSpPr txBox="1"/>
           <p:nvPr/>
         </p:nvSpPr>
@@ -10721,7 +10295,7 @@
       </p:sp>
       <p:sp>
         <p:nvSpPr>
-          <p:cNvPr id="24" name="Rectangle 23"/>
+          <p:cNvPr id="23" name="Rectangle 22"/>
           <p:cNvSpPr/>
           <p:nvPr/>
         </p:nvSpPr>
@@ -10770,7 +10344,7 @@
       </p:sp>
       <p:sp>
         <p:nvSpPr>
-          <p:cNvPr id="25" name="Rectangle 24"/>
+          <p:cNvPr id="24" name="Rectangle 23"/>
           <p:cNvSpPr/>
           <p:nvPr/>
         </p:nvSpPr>
@@ -10819,7 +10393,7 @@
       </p:sp>
       <p:sp>
         <p:nvSpPr>
-          <p:cNvPr id="26" name="TextBox 25"/>
+          <p:cNvPr id="25" name="TextBox 24"/>
           <p:cNvSpPr txBox="1"/>
           <p:nvPr/>
         </p:nvSpPr>
@@ -10861,7 +10435,7 @@
       </p:sp>
       <p:sp>
         <p:nvSpPr>
-          <p:cNvPr id="27" name="TextBox 26"/>
+          <p:cNvPr id="26" name="TextBox 25"/>
           <p:cNvSpPr txBox="1"/>
           <p:nvPr/>
         </p:nvSpPr>
@@ -10903,7 +10477,7 @@
       </p:sp>
       <p:sp>
         <p:nvSpPr>
-          <p:cNvPr id="28" name="TextBox 27"/>
+          <p:cNvPr id="27" name="TextBox 26"/>
           <p:cNvSpPr txBox="1"/>
           <p:nvPr/>
         </p:nvSpPr>
@@ -10945,7 +10519,7 @@
       </p:sp>
       <p:sp>
         <p:nvSpPr>
-          <p:cNvPr id="29" name="Rectangle 28"/>
+          <p:cNvPr id="28" name="Rectangle 27"/>
           <p:cNvSpPr/>
           <p:nvPr/>
         </p:nvSpPr>
@@ -10994,7 +10568,7 @@
       </p:sp>
       <p:sp>
         <p:nvSpPr>
-          <p:cNvPr id="30" name="TextBox 29"/>
+          <p:cNvPr id="29" name="TextBox 28"/>
           <p:cNvSpPr txBox="1"/>
           <p:nvPr/>
         </p:nvSpPr>
@@ -11036,7 +10610,7 @@
       </p:sp>
       <p:sp>
         <p:nvSpPr>
-          <p:cNvPr id="31" name="TextBox 30"/>
+          <p:cNvPr id="30" name="TextBox 29"/>
           <p:cNvSpPr txBox="1"/>
           <p:nvPr/>
         </p:nvSpPr>
@@ -11078,7 +10652,7 @@
       </p:sp>
       <p:sp>
         <p:nvSpPr>
-          <p:cNvPr id="32" name="TextBox 31"/>
+          <p:cNvPr id="31" name="TextBox 30"/>
           <p:cNvSpPr txBox="1"/>
           <p:nvPr/>
         </p:nvSpPr>
@@ -11194,7 +10768,7 @@
         <p:spPr>
           <a:xfrm>
             <a:off x="640080" y="329184"/>
-            <a:ext cx="5303520" cy="182880"/>
+            <a:ext cx="9875520" cy="182880"/>
           </a:xfrm>
           <a:prstGeom prst="rect">
             <a:avLst/>
@@ -11235,48 +10809,6 @@
         </p:nvSpPr>
         <p:spPr>
           <a:xfrm>
-            <a:off x="5897880" y="310896"/>
-            <a:ext cx="4800600" cy="256032"/>
-          </a:xfrm>
-          <a:prstGeom prst="rect">
-            <a:avLst/>
-          </a:prstGeom>
-          <a:noFill/>
-        </p:spPr>
-        <p:txBody>
-          <a:bodyPr wrap="none" lIns="9144" rIns="9144" tIns="9144" bIns="9144" anchor="t">
-            <a:spAutoFit/>
-          </a:bodyPr>
-          <a:lstStyle/>
-          <a:p>
-            <a:pPr algn="r">
-              <a:spcAft>
-                <a:spcPts val="0"/>
-              </a:spcAft>
-              <a:defRPr sz="680" b="1">
-                <a:solidFill>
-                  <a:srgbClr val="4F6B00"/>
-                </a:solidFill>
-                <a:latin typeface="Inter"/>
-              </a:defRPr>
-            </a:pPr>
-            <a:r>
-              <a:rPr>
-                <a:latin typeface="Inter"/>
-              </a:rPr>
-              <a:t>Illustrative, Gradient Maintained — demo data, not the client's holdings or managers</a:t>
-            </a:r>
-          </a:p>
-        </p:txBody>
-      </p:sp>
-      <p:sp>
-        <p:nvSpPr>
-          <p:cNvPr id="5" name="TextBox 4"/>
-          <p:cNvSpPr txBox="1"/>
-          <p:nvPr/>
-        </p:nvSpPr>
-        <p:spPr>
-          <a:xfrm>
             <a:off x="640080" y="566928"/>
             <a:ext cx="10058400" cy="530352"/>
           </a:xfrm>
@@ -11313,7 +10845,7 @@
       </p:sp>
       <p:sp>
         <p:nvSpPr>
-          <p:cNvPr id="6" name="Rectangle 5"/>
+          <p:cNvPr id="5" name="Rectangle 4"/>
           <p:cNvSpPr/>
           <p:nvPr/>
         </p:nvSpPr>
@@ -11362,7 +10894,7 @@
       </p:sp>
       <p:sp>
         <p:nvSpPr>
-          <p:cNvPr id="7" name="Rectangle 6"/>
+          <p:cNvPr id="6" name="Rectangle 5"/>
           <p:cNvSpPr/>
           <p:nvPr/>
         </p:nvSpPr>
@@ -11411,7 +10943,7 @@
       </p:sp>
       <p:sp>
         <p:nvSpPr>
-          <p:cNvPr id="8" name="TextBox 7"/>
+          <p:cNvPr id="7" name="TextBox 6"/>
           <p:cNvSpPr txBox="1"/>
           <p:nvPr/>
         </p:nvSpPr>
@@ -11453,7 +10985,7 @@
       </p:sp>
       <p:sp>
         <p:nvSpPr>
-          <p:cNvPr id="9" name="TextBox 8"/>
+          <p:cNvPr id="8" name="TextBox 7"/>
           <p:cNvSpPr txBox="1"/>
           <p:nvPr/>
         </p:nvSpPr>
@@ -11495,7 +11027,7 @@
       </p:sp>
       <p:graphicFrame>
         <p:nvGraphicFramePr>
-          <p:cNvPr id="10" name="Chart 9"/>
+          <p:cNvPr id="9" name="Chart 8"/>
           <p:cNvGraphicFramePr>
             <a:graphicFrameLocks noGrp="1"/>
           </p:cNvGraphicFramePr>
@@ -11513,7 +11045,7 @@
       </p:graphicFrame>
       <p:sp>
         <p:nvSpPr>
-          <p:cNvPr id="11" name="Rectangle 10"/>
+          <p:cNvPr id="10" name="Rectangle 9"/>
           <p:cNvSpPr/>
           <p:nvPr/>
         </p:nvSpPr>
@@ -11562,7 +11094,7 @@
       </p:sp>
       <p:sp>
         <p:nvSpPr>
-          <p:cNvPr id="12" name="TextBox 11"/>
+          <p:cNvPr id="11" name="TextBox 10"/>
           <p:cNvSpPr txBox="1"/>
           <p:nvPr/>
         </p:nvSpPr>
@@ -11604,7 +11136,7 @@
       </p:sp>
       <p:sp>
         <p:nvSpPr>
-          <p:cNvPr id="13" name="TextBox 12"/>
+          <p:cNvPr id="12" name="TextBox 11"/>
           <p:cNvSpPr txBox="1"/>
           <p:nvPr/>
         </p:nvSpPr>
@@ -11646,7 +11178,7 @@
       </p:sp>
       <p:sp>
         <p:nvSpPr>
-          <p:cNvPr id="14" name="TextBox 13"/>
+          <p:cNvPr id="13" name="TextBox 12"/>
           <p:cNvSpPr txBox="1"/>
           <p:nvPr/>
         </p:nvSpPr>
@@ -11762,7 +11294,7 @@
         <p:spPr>
           <a:xfrm>
             <a:off x="640080" y="329184"/>
-            <a:ext cx="5303520" cy="182880"/>
+            <a:ext cx="9875520" cy="182880"/>
           </a:xfrm>
           <a:prstGeom prst="rect">
             <a:avLst/>
@@ -11803,48 +11335,6 @@
         </p:nvSpPr>
         <p:spPr>
           <a:xfrm>
-            <a:off x="5897880" y="310896"/>
-            <a:ext cx="4800600" cy="256032"/>
-          </a:xfrm>
-          <a:prstGeom prst="rect">
-            <a:avLst/>
-          </a:prstGeom>
-          <a:noFill/>
-        </p:spPr>
-        <p:txBody>
-          <a:bodyPr wrap="none" lIns="9144" rIns="9144" tIns="9144" bIns="9144" anchor="t">
-            <a:spAutoFit/>
-          </a:bodyPr>
-          <a:lstStyle/>
-          <a:p>
-            <a:pPr algn="r">
-              <a:spcAft>
-                <a:spcPts val="0"/>
-              </a:spcAft>
-              <a:defRPr sz="680" b="1">
-                <a:solidFill>
-                  <a:srgbClr val="4F6B00"/>
-                </a:solidFill>
-                <a:latin typeface="Inter"/>
-              </a:defRPr>
-            </a:pPr>
-            <a:r>
-              <a:rPr>
-                <a:latin typeface="Inter"/>
-              </a:rPr>
-              <a:t>Illustrative, Gradient Maintained — demo data, not the client's holdings or managers</a:t>
-            </a:r>
-          </a:p>
-        </p:txBody>
-      </p:sp>
-      <p:sp>
-        <p:nvSpPr>
-          <p:cNvPr id="5" name="TextBox 4"/>
-          <p:cNvSpPr txBox="1"/>
-          <p:nvPr/>
-        </p:nvSpPr>
-        <p:spPr>
-          <a:xfrm>
             <a:off x="640080" y="566928"/>
             <a:ext cx="10058400" cy="530352"/>
           </a:xfrm>
@@ -11881,7 +11371,7 @@
       </p:sp>
       <p:sp>
         <p:nvSpPr>
-          <p:cNvPr id="6" name="Rectangle 5"/>
+          <p:cNvPr id="5" name="Rectangle 4"/>
           <p:cNvSpPr/>
           <p:nvPr/>
         </p:nvSpPr>
@@ -11930,7 +11420,7 @@
       </p:sp>
       <p:sp>
         <p:nvSpPr>
-          <p:cNvPr id="7" name="Rectangle 6"/>
+          <p:cNvPr id="6" name="Rectangle 5"/>
           <p:cNvSpPr/>
           <p:nvPr/>
         </p:nvSpPr>
@@ -11979,7 +11469,7 @@
       </p:sp>
       <p:sp>
         <p:nvSpPr>
-          <p:cNvPr id="8" name="TextBox 7"/>
+          <p:cNvPr id="7" name="TextBox 6"/>
           <p:cNvSpPr txBox="1"/>
           <p:nvPr/>
         </p:nvSpPr>
@@ -12021,7 +11511,7 @@
       </p:sp>
       <p:sp>
         <p:nvSpPr>
-          <p:cNvPr id="9" name="TextBox 8"/>
+          <p:cNvPr id="8" name="TextBox 7"/>
           <p:cNvSpPr txBox="1"/>
           <p:nvPr/>
         </p:nvSpPr>
@@ -12063,7 +11553,7 @@
       </p:sp>
       <p:graphicFrame>
         <p:nvGraphicFramePr>
-          <p:cNvPr id="10" name="Table 9"/>
+          <p:cNvPr id="9" name="Table 8"/>
           <p:cNvGraphicFramePr>
             <a:graphicFrameLocks noGrp="1"/>
           </p:cNvGraphicFramePr>
@@ -12640,7 +12130,7 @@
       </p:graphicFrame>
       <p:sp>
         <p:nvSpPr>
-          <p:cNvPr id="11" name="Rectangle 10"/>
+          <p:cNvPr id="10" name="Rectangle 9"/>
           <p:cNvSpPr/>
           <p:nvPr/>
         </p:nvSpPr>
@@ -12689,7 +12179,7 @@
       </p:sp>
       <p:sp>
         <p:nvSpPr>
-          <p:cNvPr id="12" name="Rectangle 11"/>
+          <p:cNvPr id="11" name="Rectangle 10"/>
           <p:cNvSpPr/>
           <p:nvPr/>
         </p:nvSpPr>
@@ -12738,7 +12228,7 @@
       </p:sp>
       <p:sp>
         <p:nvSpPr>
-          <p:cNvPr id="13" name="TextBox 12"/>
+          <p:cNvPr id="12" name="TextBox 11"/>
           <p:cNvSpPr txBox="1"/>
           <p:nvPr/>
         </p:nvSpPr>
@@ -12780,7 +12270,7 @@
       </p:sp>
       <p:sp>
         <p:nvSpPr>
-          <p:cNvPr id="14" name="TextBox 13"/>
+          <p:cNvPr id="13" name="TextBox 12"/>
           <p:cNvSpPr txBox="1"/>
           <p:nvPr/>
         </p:nvSpPr>
@@ -12822,7 +12312,7 @@
       </p:sp>
       <p:sp>
         <p:nvSpPr>
-          <p:cNvPr id="15" name="TextBox 14"/>
+          <p:cNvPr id="14" name="TextBox 13"/>
           <p:cNvSpPr txBox="1"/>
           <p:nvPr/>
         </p:nvSpPr>
@@ -12864,7 +12354,7 @@
       </p:sp>
       <p:sp>
         <p:nvSpPr>
-          <p:cNvPr id="16" name="Rectangle 15"/>
+          <p:cNvPr id="15" name="Rectangle 14"/>
           <p:cNvSpPr/>
           <p:nvPr/>
         </p:nvSpPr>
@@ -12913,7 +12403,7 @@
       </p:sp>
       <p:sp>
         <p:nvSpPr>
-          <p:cNvPr id="17" name="TextBox 16"/>
+          <p:cNvPr id="16" name="TextBox 15"/>
           <p:cNvSpPr txBox="1"/>
           <p:nvPr/>
         </p:nvSpPr>
@@ -12955,7 +12445,7 @@
       </p:sp>
       <p:sp>
         <p:nvSpPr>
-          <p:cNvPr id="18" name="TextBox 17"/>
+          <p:cNvPr id="17" name="TextBox 16"/>
           <p:cNvSpPr txBox="1"/>
           <p:nvPr/>
         </p:nvSpPr>
@@ -12997,7 +12487,7 @@
       </p:sp>
       <p:sp>
         <p:nvSpPr>
-          <p:cNvPr id="19" name="TextBox 18"/>
+          <p:cNvPr id="18" name="TextBox 17"/>
           <p:cNvSpPr txBox="1"/>
           <p:nvPr/>
         </p:nvSpPr>
@@ -13113,7 +12603,7 @@
         <p:spPr>
           <a:xfrm>
             <a:off x="640080" y="329184"/>
-            <a:ext cx="5303520" cy="182880"/>
+            <a:ext cx="9875520" cy="182880"/>
           </a:xfrm>
           <a:prstGeom prst="rect">
             <a:avLst/>
@@ -13154,48 +12644,6 @@
         </p:nvSpPr>
         <p:spPr>
           <a:xfrm>
-            <a:off x="5897880" y="310896"/>
-            <a:ext cx="4800600" cy="256032"/>
-          </a:xfrm>
-          <a:prstGeom prst="rect">
-            <a:avLst/>
-          </a:prstGeom>
-          <a:noFill/>
-        </p:spPr>
-        <p:txBody>
-          <a:bodyPr wrap="none" lIns="9144" rIns="9144" tIns="9144" bIns="9144" anchor="t">
-            <a:spAutoFit/>
-          </a:bodyPr>
-          <a:lstStyle/>
-          <a:p>
-            <a:pPr algn="r">
-              <a:spcAft>
-                <a:spcPts val="0"/>
-              </a:spcAft>
-              <a:defRPr sz="680" b="1">
-                <a:solidFill>
-                  <a:srgbClr val="4F6B00"/>
-                </a:solidFill>
-                <a:latin typeface="Inter"/>
-              </a:defRPr>
-            </a:pPr>
-            <a:r>
-              <a:rPr>
-                <a:latin typeface="Inter"/>
-              </a:rPr>
-              <a:t>Illustrative, Gradient Maintained — demo data, not the client's holdings or managers</a:t>
-            </a:r>
-          </a:p>
-        </p:txBody>
-      </p:sp>
-      <p:sp>
-        <p:nvSpPr>
-          <p:cNvPr id="5" name="TextBox 4"/>
-          <p:cNvSpPr txBox="1"/>
-          <p:nvPr/>
-        </p:nvSpPr>
-        <p:spPr>
-          <a:xfrm>
             <a:off x="640080" y="566928"/>
             <a:ext cx="10058400" cy="530352"/>
           </a:xfrm>
@@ -13232,7 +12680,7 @@
       </p:sp>
       <p:sp>
         <p:nvSpPr>
-          <p:cNvPr id="6" name="Rectangle 5"/>
+          <p:cNvPr id="5" name="Rectangle 4"/>
           <p:cNvSpPr/>
           <p:nvPr/>
         </p:nvSpPr>
@@ -13281,7 +12729,7 @@
       </p:sp>
       <p:sp>
         <p:nvSpPr>
-          <p:cNvPr id="7" name="Rectangle 6"/>
+          <p:cNvPr id="6" name="Rectangle 5"/>
           <p:cNvSpPr/>
           <p:nvPr/>
         </p:nvSpPr>
@@ -13330,7 +12778,7 @@
       </p:sp>
       <p:sp>
         <p:nvSpPr>
-          <p:cNvPr id="8" name="TextBox 7"/>
+          <p:cNvPr id="7" name="TextBox 6"/>
           <p:cNvSpPr txBox="1"/>
           <p:nvPr/>
         </p:nvSpPr>
@@ -13372,7 +12820,7 @@
       </p:sp>
       <p:sp>
         <p:nvSpPr>
-          <p:cNvPr id="9" name="TextBox 8"/>
+          <p:cNvPr id="8" name="TextBox 7"/>
           <p:cNvSpPr txBox="1"/>
           <p:nvPr/>
         </p:nvSpPr>
@@ -13414,7 +12862,7 @@
       </p:sp>
       <p:graphicFrame>
         <p:nvGraphicFramePr>
-          <p:cNvPr id="10" name="Chart 9"/>
+          <p:cNvPr id="9" name="Chart 8"/>
           <p:cNvGraphicFramePr>
             <a:graphicFrameLocks noGrp="1"/>
           </p:cNvGraphicFramePr>
@@ -13432,7 +12880,7 @@
       </p:graphicFrame>
       <p:sp>
         <p:nvSpPr>
-          <p:cNvPr id="11" name="Rectangle 10"/>
+          <p:cNvPr id="10" name="Rectangle 9"/>
           <p:cNvSpPr/>
           <p:nvPr/>
         </p:nvSpPr>
@@ -13481,7 +12929,7 @@
       </p:sp>
       <p:sp>
         <p:nvSpPr>
-          <p:cNvPr id="12" name="TextBox 11"/>
+          <p:cNvPr id="11" name="TextBox 10"/>
           <p:cNvSpPr txBox="1"/>
           <p:nvPr/>
         </p:nvSpPr>
@@ -13523,7 +12971,7 @@
       </p:sp>
       <p:sp>
         <p:nvSpPr>
-          <p:cNvPr id="13" name="TextBox 12"/>
+          <p:cNvPr id="12" name="TextBox 11"/>
           <p:cNvSpPr txBox="1"/>
           <p:nvPr/>
         </p:nvSpPr>
@@ -13565,7 +13013,7 @@
       </p:sp>
       <p:sp>
         <p:nvSpPr>
-          <p:cNvPr id="14" name="TextBox 13"/>
+          <p:cNvPr id="13" name="TextBox 12"/>
           <p:cNvSpPr txBox="1"/>
           <p:nvPr/>
         </p:nvSpPr>
@@ -13681,7 +13129,7 @@
         <p:spPr>
           <a:xfrm>
             <a:off x="640080" y="329184"/>
-            <a:ext cx="5303520" cy="182880"/>
+            <a:ext cx="9875520" cy="182880"/>
           </a:xfrm>
           <a:prstGeom prst="rect">
             <a:avLst/>
@@ -13722,48 +13170,6 @@
         </p:nvSpPr>
         <p:spPr>
           <a:xfrm>
-            <a:off x="5897880" y="310896"/>
-            <a:ext cx="4800600" cy="256032"/>
-          </a:xfrm>
-          <a:prstGeom prst="rect">
-            <a:avLst/>
-          </a:prstGeom>
-          <a:noFill/>
-        </p:spPr>
-        <p:txBody>
-          <a:bodyPr wrap="none" lIns="9144" rIns="9144" tIns="9144" bIns="9144" anchor="t">
-            <a:spAutoFit/>
-          </a:bodyPr>
-          <a:lstStyle/>
-          <a:p>
-            <a:pPr algn="r">
-              <a:spcAft>
-                <a:spcPts val="0"/>
-              </a:spcAft>
-              <a:defRPr sz="680" b="1">
-                <a:solidFill>
-                  <a:srgbClr val="4F6B00"/>
-                </a:solidFill>
-                <a:latin typeface="Inter"/>
-              </a:defRPr>
-            </a:pPr>
-            <a:r>
-              <a:rPr>
-                <a:latin typeface="Inter"/>
-              </a:rPr>
-              <a:t>Illustrative, Gradient Maintained — demo data, not the client's holdings or managers</a:t>
-            </a:r>
-          </a:p>
-        </p:txBody>
-      </p:sp>
-      <p:sp>
-        <p:nvSpPr>
-          <p:cNvPr id="5" name="TextBox 4"/>
-          <p:cNvSpPr txBox="1"/>
-          <p:nvPr/>
-        </p:nvSpPr>
-        <p:spPr>
-          <a:xfrm>
             <a:off x="640080" y="566928"/>
             <a:ext cx="10058400" cy="530352"/>
           </a:xfrm>
@@ -13800,7 +13206,7 @@
       </p:sp>
       <p:sp>
         <p:nvSpPr>
-          <p:cNvPr id="6" name="Rectangle 5"/>
+          <p:cNvPr id="5" name="Rectangle 4"/>
           <p:cNvSpPr/>
           <p:nvPr/>
         </p:nvSpPr>
@@ -13849,7 +13255,7 @@
       </p:sp>
       <p:sp>
         <p:nvSpPr>
-          <p:cNvPr id="7" name="Rectangle 6"/>
+          <p:cNvPr id="6" name="Rectangle 5"/>
           <p:cNvSpPr/>
           <p:nvPr/>
         </p:nvSpPr>
@@ -13898,7 +13304,7 @@
       </p:sp>
       <p:sp>
         <p:nvSpPr>
-          <p:cNvPr id="8" name="TextBox 7"/>
+          <p:cNvPr id="7" name="TextBox 6"/>
           <p:cNvSpPr txBox="1"/>
           <p:nvPr/>
         </p:nvSpPr>
@@ -13940,7 +13346,7 @@
       </p:sp>
       <p:graphicFrame>
         <p:nvGraphicFramePr>
-          <p:cNvPr id="9" name="Table 8"/>
+          <p:cNvPr id="8" name="Table 7"/>
           <p:cNvGraphicFramePr>
             <a:graphicFrameLocks noGrp="1"/>
           </p:cNvGraphicFramePr>
@@ -14246,7 +13652,7 @@
       </p:graphicFrame>
       <p:sp>
         <p:nvSpPr>
-          <p:cNvPr id="10" name="Rectangle 9"/>
+          <p:cNvPr id="9" name="Rectangle 8"/>
           <p:cNvSpPr/>
           <p:nvPr/>
         </p:nvSpPr>
@@ -14295,7 +13701,7 @@
       </p:sp>
       <p:sp>
         <p:nvSpPr>
-          <p:cNvPr id="11" name="TextBox 10"/>
+          <p:cNvPr id="10" name="TextBox 9"/>
           <p:cNvSpPr txBox="1"/>
           <p:nvPr/>
         </p:nvSpPr>
@@ -14337,7 +13743,7 @@
       </p:sp>
       <p:sp>
         <p:nvSpPr>
-          <p:cNvPr id="12" name="TextBox 11"/>
+          <p:cNvPr id="11" name="TextBox 10"/>
           <p:cNvSpPr txBox="1"/>
           <p:nvPr/>
         </p:nvSpPr>
@@ -14379,7 +13785,7 @@
       </p:sp>
       <p:sp>
         <p:nvSpPr>
-          <p:cNvPr id="13" name="TextBox 12"/>
+          <p:cNvPr id="12" name="TextBox 11"/>
           <p:cNvSpPr txBox="1"/>
           <p:nvPr/>
         </p:nvSpPr>
@@ -14495,7 +13901,7 @@
         <p:spPr>
           <a:xfrm>
             <a:off x="640080" y="329184"/>
-            <a:ext cx="5303520" cy="182880"/>
+            <a:ext cx="9875520" cy="182880"/>
           </a:xfrm>
           <a:prstGeom prst="rect">
             <a:avLst/>
@@ -14536,48 +13942,6 @@
         </p:nvSpPr>
         <p:spPr>
           <a:xfrm>
-            <a:off x="5897880" y="310896"/>
-            <a:ext cx="4800600" cy="256032"/>
-          </a:xfrm>
-          <a:prstGeom prst="rect">
-            <a:avLst/>
-          </a:prstGeom>
-          <a:noFill/>
-        </p:spPr>
-        <p:txBody>
-          <a:bodyPr wrap="none" lIns="9144" rIns="9144" tIns="9144" bIns="9144" anchor="t">
-            <a:spAutoFit/>
-          </a:bodyPr>
-          <a:lstStyle/>
-          <a:p>
-            <a:pPr algn="r">
-              <a:spcAft>
-                <a:spcPts val="0"/>
-              </a:spcAft>
-              <a:defRPr sz="680" b="1">
-                <a:solidFill>
-                  <a:srgbClr val="4F6B00"/>
-                </a:solidFill>
-                <a:latin typeface="Inter"/>
-              </a:defRPr>
-            </a:pPr>
-            <a:r>
-              <a:rPr>
-                <a:latin typeface="Inter"/>
-              </a:rPr>
-              <a:t>Illustrative, Gradient Maintained — demo data, not the client's holdings or managers</a:t>
-            </a:r>
-          </a:p>
-        </p:txBody>
-      </p:sp>
-      <p:sp>
-        <p:nvSpPr>
-          <p:cNvPr id="5" name="TextBox 4"/>
-          <p:cNvSpPr txBox="1"/>
-          <p:nvPr/>
-        </p:nvSpPr>
-        <p:spPr>
-          <a:xfrm>
             <a:off x="640080" y="566928"/>
             <a:ext cx="10058400" cy="530352"/>
           </a:xfrm>
@@ -14614,7 +13978,7 @@
       </p:sp>
       <p:sp>
         <p:nvSpPr>
-          <p:cNvPr id="6" name="Rectangle 5"/>
+          <p:cNvPr id="5" name="Rectangle 4"/>
           <p:cNvSpPr/>
           <p:nvPr/>
         </p:nvSpPr>
@@ -14663,7 +14027,7 @@
       </p:sp>
       <p:sp>
         <p:nvSpPr>
-          <p:cNvPr id="7" name="Rectangle 6"/>
+          <p:cNvPr id="6" name="Rectangle 5"/>
           <p:cNvSpPr/>
           <p:nvPr/>
         </p:nvSpPr>
@@ -14712,7 +14076,7 @@
       </p:sp>
       <p:sp>
         <p:nvSpPr>
-          <p:cNvPr id="8" name="TextBox 7"/>
+          <p:cNvPr id="7" name="TextBox 6"/>
           <p:cNvSpPr txBox="1"/>
           <p:nvPr/>
         </p:nvSpPr>
@@ -14754,7 +14118,7 @@
       </p:sp>
       <p:sp>
         <p:nvSpPr>
-          <p:cNvPr id="9" name="TextBox 8"/>
+          <p:cNvPr id="8" name="TextBox 7"/>
           <p:cNvSpPr txBox="1"/>
           <p:nvPr/>
         </p:nvSpPr>
@@ -14796,7 +14160,7 @@
       </p:sp>
       <p:graphicFrame>
         <p:nvGraphicFramePr>
-          <p:cNvPr id="10" name="Table 9"/>
+          <p:cNvPr id="9" name="Table 8"/>
           <p:cNvGraphicFramePr>
             <a:graphicFrameLocks noGrp="1"/>
           </p:cNvGraphicFramePr>
@@ -15155,7 +14519,7 @@
       </p:graphicFrame>
       <p:sp>
         <p:nvSpPr>
-          <p:cNvPr id="11" name="Rectangle 10"/>
+          <p:cNvPr id="10" name="Rectangle 9"/>
           <p:cNvSpPr/>
           <p:nvPr/>
         </p:nvSpPr>
@@ -15204,7 +14568,7 @@
       </p:sp>
       <p:sp>
         <p:nvSpPr>
-          <p:cNvPr id="12" name="Rectangle 11"/>
+          <p:cNvPr id="11" name="Rectangle 10"/>
           <p:cNvSpPr/>
           <p:nvPr/>
         </p:nvSpPr>
@@ -15253,7 +14617,7 @@
       </p:sp>
       <p:sp>
         <p:nvSpPr>
-          <p:cNvPr id="13" name="TextBox 12"/>
+          <p:cNvPr id="12" name="TextBox 11"/>
           <p:cNvSpPr txBox="1"/>
           <p:nvPr/>
         </p:nvSpPr>
@@ -15295,7 +14659,7 @@
       </p:sp>
       <p:sp>
         <p:nvSpPr>
-          <p:cNvPr id="14" name="TextBox 13"/>
+          <p:cNvPr id="13" name="TextBox 12"/>
           <p:cNvSpPr txBox="1"/>
           <p:nvPr/>
         </p:nvSpPr>
@@ -15337,7 +14701,7 @@
       </p:sp>
       <p:sp>
         <p:nvSpPr>
-          <p:cNvPr id="15" name="TextBox 14"/>
+          <p:cNvPr id="14" name="TextBox 13"/>
           <p:cNvSpPr txBox="1"/>
           <p:nvPr/>
         </p:nvSpPr>
@@ -15379,7 +14743,7 @@
       </p:sp>
       <p:sp>
         <p:nvSpPr>
-          <p:cNvPr id="16" name="Rectangle 15"/>
+          <p:cNvPr id="15" name="Rectangle 14"/>
           <p:cNvSpPr/>
           <p:nvPr/>
         </p:nvSpPr>
@@ -15428,7 +14792,7 @@
       </p:sp>
       <p:sp>
         <p:nvSpPr>
-          <p:cNvPr id="17" name="TextBox 16"/>
+          <p:cNvPr id="16" name="TextBox 15"/>
           <p:cNvSpPr txBox="1"/>
           <p:nvPr/>
         </p:nvSpPr>
@@ -15470,7 +14834,7 @@
       </p:sp>
       <p:sp>
         <p:nvSpPr>
-          <p:cNvPr id="18" name="TextBox 17"/>
+          <p:cNvPr id="17" name="TextBox 16"/>
           <p:cNvSpPr txBox="1"/>
           <p:nvPr/>
         </p:nvSpPr>
@@ -15512,7 +14876,7 @@
       </p:sp>
       <p:sp>
         <p:nvSpPr>
-          <p:cNvPr id="19" name="TextBox 18"/>
+          <p:cNvPr id="18" name="TextBox 17"/>
           <p:cNvSpPr txBox="1"/>
           <p:nvPr/>
         </p:nvSpPr>
@@ -15627,48 +14991,6 @@
         </p:nvSpPr>
         <p:spPr>
           <a:xfrm>
-            <a:off x="5897880" y="310896"/>
-            <a:ext cx="4800600" cy="256032"/>
-          </a:xfrm>
-          <a:prstGeom prst="rect">
-            <a:avLst/>
-          </a:prstGeom>
-          <a:noFill/>
-        </p:spPr>
-        <p:txBody>
-          <a:bodyPr wrap="none" lIns="9144" rIns="9144" tIns="9144" bIns="9144" anchor="t">
-            <a:spAutoFit/>
-          </a:bodyPr>
-          <a:lstStyle/>
-          <a:p>
-            <a:pPr algn="r">
-              <a:spcAft>
-                <a:spcPts val="0"/>
-              </a:spcAft>
-              <a:defRPr sz="680" b="1">
-                <a:solidFill>
-                  <a:srgbClr val="4F6B00"/>
-                </a:solidFill>
-                <a:latin typeface="Inter"/>
-              </a:defRPr>
-            </a:pPr>
-            <a:r>
-              <a:rPr>
-                <a:latin typeface="Inter"/>
-              </a:rPr>
-              <a:t>Illustrative, Gradient Maintained — demo data, not the client's holdings or managers</a:t>
-            </a:r>
-          </a:p>
-        </p:txBody>
-      </p:sp>
-      <p:sp>
-        <p:nvSpPr>
-          <p:cNvPr id="4" name="TextBox 3"/>
-          <p:cNvSpPr txBox="1"/>
-          <p:nvPr/>
-        </p:nvSpPr>
-        <p:spPr>
-          <a:xfrm>
             <a:off x="640080" y="566928"/>
             <a:ext cx="10058400" cy="530352"/>
           </a:xfrm>
@@ -15705,7 +15027,7 @@
       </p:sp>
       <p:sp>
         <p:nvSpPr>
-          <p:cNvPr id="5" name="Rectangle 4"/>
+          <p:cNvPr id="4" name="Rectangle 3"/>
           <p:cNvSpPr/>
           <p:nvPr/>
         </p:nvSpPr>
@@ -15754,7 +15076,7 @@
       </p:sp>
       <p:sp>
         <p:nvSpPr>
-          <p:cNvPr id="6" name="Rectangle 5"/>
+          <p:cNvPr id="5" name="Rectangle 4"/>
           <p:cNvSpPr/>
           <p:nvPr/>
         </p:nvSpPr>
@@ -15803,7 +15125,7 @@
       </p:sp>
       <p:sp>
         <p:nvSpPr>
-          <p:cNvPr id="7" name="TextBox 6"/>
+          <p:cNvPr id="6" name="TextBox 5"/>
           <p:cNvSpPr txBox="1"/>
           <p:nvPr/>
         </p:nvSpPr>
@@ -15845,14 +15167,105 @@
       </p:sp>
       <p:sp>
         <p:nvSpPr>
-          <p:cNvPr id="8" name="Rectangle 7"/>
+          <p:cNvPr id="7" name="Rectangle 6"/>
           <p:cNvSpPr/>
           <p:nvPr/>
         </p:nvSpPr>
         <p:spPr>
           <a:xfrm>
-            <a:off x="640080" y="1325880"/>
-            <a:ext cx="10908792" cy="2034909"/>
+            <a:off x="640080" y="1399032"/>
+            <a:ext cx="73152" cy="1109837"/>
+          </a:xfrm>
+          <a:prstGeom prst="rect">
+            <a:avLst/>
+          </a:prstGeom>
+          <a:solidFill>
+            <a:srgbClr val="F2A93B"/>
+          </a:solidFill>
+          <a:ln>
+            <a:solidFill>
+              <a:srgbClr val="F2A93B"/>
+            </a:solidFill>
+          </a:ln>
+        </p:spPr>
+        <p:style>
+          <a:lnRef idx="1">
+            <a:schemeClr val="accent1"/>
+          </a:lnRef>
+          <a:fillRef idx="3">
+            <a:schemeClr val="accent1"/>
+          </a:fillRef>
+          <a:effectRef idx="2">
+            <a:schemeClr val="accent1"/>
+          </a:effectRef>
+          <a:fontRef idx="minor">
+            <a:schemeClr val="lt1"/>
+          </a:fontRef>
+        </p:style>
+        <p:txBody>
+          <a:bodyPr rtlCol="0" anchor="ctr"/>
+          <a:lstStyle/>
+          <a:p>
+            <a:pPr algn="ctr">
+              <a:defRPr>
+                <a:latin typeface="Inter"/>
+              </a:defRPr>
+            </a:pPr>
+          </a:p>
+        </p:txBody>
+      </p:sp>
+      <p:sp>
+        <p:nvSpPr>
+          <p:cNvPr id="8" name="TextBox 7"/>
+          <p:cNvSpPr txBox="1"/>
+          <p:nvPr/>
+        </p:nvSpPr>
+        <p:spPr>
+          <a:xfrm>
+            <a:off x="896112" y="1371600"/>
+            <a:ext cx="10588752" cy="728561"/>
+          </a:xfrm>
+          <a:prstGeom prst="rect">
+            <a:avLst/>
+          </a:prstGeom>
+          <a:noFill/>
+        </p:spPr>
+        <p:txBody>
+          <a:bodyPr wrap="none" lIns="9144" rIns="9144" tIns="9144" bIns="9144" anchor="t">
+            <a:spAutoFit/>
+          </a:bodyPr>
+          <a:lstStyle/>
+          <a:p>
+            <a:pPr algn="l">
+              <a:spcAft>
+                <a:spcPts val="0"/>
+              </a:spcAft>
+              <a:defRPr sz="1800" b="1">
+                <a:solidFill>
+                  <a:srgbClr val="0D1117"/>
+                </a:solidFill>
+                <a:latin typeface="Inter"/>
+              </a:defRPr>
+            </a:pPr>
+            <a:r>
+              <a:rPr>
+                <a:latin typeface="Inter"/>
+              </a:rPr>
+              <a:t>Shift 3.0pp from core-plus credit to core bonds</a:t>
+            </a:r>
+          </a:p>
+        </p:txBody>
+      </p:sp>
+      <p:sp>
+        <p:nvSpPr>
+          <p:cNvPr id="9" name="Rectangle 8"/>
+          <p:cNvSpPr/>
+          <p:nvPr/>
+        </p:nvSpPr>
+        <p:spPr>
+          <a:xfrm>
+            <a:off x="640080" y="2691749"/>
+            <a:ext cx="10908792" cy="1453721"/>
           </a:xfrm>
           <a:prstGeom prst="rect">
             <a:avLst/>
@@ -15894,14 +15307,14 @@
       </p:sp>
       <p:sp>
         <p:nvSpPr>
-          <p:cNvPr id="9" name="Rectangle 8"/>
+          <p:cNvPr id="10" name="Rectangle 9"/>
           <p:cNvSpPr/>
           <p:nvPr/>
         </p:nvSpPr>
         <p:spPr>
           <a:xfrm>
-            <a:off x="640080" y="1325880"/>
-            <a:ext cx="54864" cy="2034909"/>
+            <a:off x="640080" y="2691749"/>
+            <a:ext cx="54864" cy="1453721"/>
           </a:xfrm>
           <a:prstGeom prst="rect">
             <a:avLst/>
@@ -15943,13 +15356,13 @@
       </p:sp>
       <p:sp>
         <p:nvSpPr>
-          <p:cNvPr id="10" name="TextBox 9"/>
+          <p:cNvPr id="11" name="TextBox 10"/>
           <p:cNvSpPr txBox="1"/>
           <p:nvPr/>
         </p:nvSpPr>
         <p:spPr>
           <a:xfrm>
-            <a:off x="804671" y="1435607"/>
+            <a:off x="804671" y="2801477"/>
             <a:ext cx="10616184" cy="228600"/>
           </a:xfrm>
           <a:prstGeom prst="rect">
@@ -15985,14 +15398,14 @@
       </p:sp>
       <p:sp>
         <p:nvSpPr>
-          <p:cNvPr id="11" name="TextBox 10"/>
+          <p:cNvPr id="12" name="TextBox 11"/>
           <p:cNvSpPr txBox="1"/>
           <p:nvPr/>
         </p:nvSpPr>
         <p:spPr>
           <a:xfrm>
-            <a:off x="804671" y="1719072"/>
-            <a:ext cx="10616184" cy="1550277"/>
+            <a:off x="804671" y="3084941"/>
+            <a:ext cx="10616184" cy="969089"/>
           </a:xfrm>
           <a:prstGeom prst="rect">
             <a:avLst/>
@@ -16027,14 +15440,14 @@
       </p:sp>
       <p:sp>
         <p:nvSpPr>
-          <p:cNvPr id="12" name="Rectangle 11"/>
+          <p:cNvPr id="13" name="Rectangle 12"/>
           <p:cNvSpPr/>
           <p:nvPr/>
         </p:nvSpPr>
         <p:spPr>
           <a:xfrm>
-            <a:off x="640080" y="3470517"/>
-            <a:ext cx="2644902" cy="2747402"/>
+            <a:off x="640080" y="4255199"/>
+            <a:ext cx="2644902" cy="1962720"/>
           </a:xfrm>
           <a:prstGeom prst="rect">
             <a:avLst/>
@@ -16076,13 +15489,13 @@
       </p:sp>
       <p:sp>
         <p:nvSpPr>
-          <p:cNvPr id="13" name="Rectangle 12"/>
+          <p:cNvPr id="14" name="Rectangle 13"/>
           <p:cNvSpPr/>
           <p:nvPr/>
         </p:nvSpPr>
         <p:spPr>
           <a:xfrm>
-            <a:off x="640080" y="3470517"/>
+            <a:off x="640080" y="4255199"/>
             <a:ext cx="2644902" cy="45720"/>
           </a:xfrm>
           <a:prstGeom prst="rect">
@@ -16125,13 +15538,13 @@
       </p:sp>
       <p:sp>
         <p:nvSpPr>
-          <p:cNvPr id="14" name="TextBox 13"/>
+          <p:cNvPr id="15" name="TextBox 14"/>
           <p:cNvSpPr txBox="1"/>
           <p:nvPr/>
         </p:nvSpPr>
         <p:spPr>
           <a:xfrm>
-            <a:off x="749808" y="3598533"/>
+            <a:off x="749808" y="4383215"/>
             <a:ext cx="2425446" cy="201168"/>
           </a:xfrm>
           <a:prstGeom prst="rect">
@@ -16167,13 +15580,13 @@
       </p:sp>
       <p:sp>
         <p:nvSpPr>
-          <p:cNvPr id="15" name="TextBox 14"/>
+          <p:cNvPr id="16" name="TextBox 15"/>
           <p:cNvSpPr txBox="1"/>
           <p:nvPr/>
         </p:nvSpPr>
         <p:spPr>
           <a:xfrm>
-            <a:off x="749808" y="3854565"/>
+            <a:off x="749808" y="4639247"/>
             <a:ext cx="2425446" cy="475488"/>
           </a:xfrm>
           <a:prstGeom prst="rect">
@@ -16209,7 +15622,7 @@
       </p:sp>
       <p:sp>
         <p:nvSpPr>
-          <p:cNvPr id="16" name="TextBox 15"/>
+          <p:cNvPr id="17" name="TextBox 16"/>
           <p:cNvSpPr txBox="1"/>
           <p:nvPr/>
         </p:nvSpPr>
@@ -16251,14 +15664,14 @@
       </p:sp>
       <p:sp>
         <p:nvSpPr>
-          <p:cNvPr id="17" name="Rectangle 16"/>
+          <p:cNvPr id="18" name="Rectangle 17"/>
           <p:cNvSpPr/>
           <p:nvPr/>
         </p:nvSpPr>
         <p:spPr>
           <a:xfrm>
-            <a:off x="3394710" y="3470517"/>
-            <a:ext cx="2644902" cy="2747402"/>
+            <a:off x="3394710" y="4255199"/>
+            <a:ext cx="2644902" cy="1962720"/>
           </a:xfrm>
           <a:prstGeom prst="rect">
             <a:avLst/>
@@ -16300,13 +15713,13 @@
       </p:sp>
       <p:sp>
         <p:nvSpPr>
-          <p:cNvPr id="18" name="Rectangle 17"/>
+          <p:cNvPr id="19" name="Rectangle 18"/>
           <p:cNvSpPr/>
           <p:nvPr/>
         </p:nvSpPr>
         <p:spPr>
           <a:xfrm>
-            <a:off x="3394710" y="3470517"/>
+            <a:off x="3394710" y="4255199"/>
             <a:ext cx="2644902" cy="45720"/>
           </a:xfrm>
           <a:prstGeom prst="rect">
@@ -16349,13 +15762,13 @@
       </p:sp>
       <p:sp>
         <p:nvSpPr>
-          <p:cNvPr id="19" name="TextBox 18"/>
+          <p:cNvPr id="20" name="TextBox 19"/>
           <p:cNvSpPr txBox="1"/>
           <p:nvPr/>
         </p:nvSpPr>
         <p:spPr>
           <a:xfrm>
-            <a:off x="3504438" y="3598533"/>
+            <a:off x="3504438" y="4383215"/>
             <a:ext cx="2425446" cy="201168"/>
           </a:xfrm>
           <a:prstGeom prst="rect">
@@ -16391,13 +15804,13 @@
       </p:sp>
       <p:sp>
         <p:nvSpPr>
-          <p:cNvPr id="20" name="TextBox 19"/>
+          <p:cNvPr id="21" name="TextBox 20"/>
           <p:cNvSpPr txBox="1"/>
           <p:nvPr/>
         </p:nvSpPr>
         <p:spPr>
           <a:xfrm>
-            <a:off x="3504438" y="3854565"/>
+            <a:off x="3504438" y="4639247"/>
             <a:ext cx="2425446" cy="475488"/>
           </a:xfrm>
           <a:prstGeom prst="rect">
@@ -16433,7 +15846,7 @@
       </p:sp>
       <p:sp>
         <p:nvSpPr>
-          <p:cNvPr id="21" name="TextBox 20"/>
+          <p:cNvPr id="22" name="TextBox 21"/>
           <p:cNvSpPr txBox="1"/>
           <p:nvPr/>
         </p:nvSpPr>
@@ -16475,14 +15888,14 @@
       </p:sp>
       <p:sp>
         <p:nvSpPr>
-          <p:cNvPr id="22" name="Rectangle 21"/>
+          <p:cNvPr id="23" name="Rectangle 22"/>
           <p:cNvSpPr/>
           <p:nvPr/>
         </p:nvSpPr>
         <p:spPr>
           <a:xfrm>
-            <a:off x="6149340" y="3470517"/>
-            <a:ext cx="2644902" cy="2747402"/>
+            <a:off x="6149340" y="4255199"/>
+            <a:ext cx="2644902" cy="1962720"/>
           </a:xfrm>
           <a:prstGeom prst="rect">
             <a:avLst/>
@@ -16524,13 +15937,13 @@
       </p:sp>
       <p:sp>
         <p:nvSpPr>
-          <p:cNvPr id="23" name="Rectangle 22"/>
+          <p:cNvPr id="24" name="Rectangle 23"/>
           <p:cNvSpPr/>
           <p:nvPr/>
         </p:nvSpPr>
         <p:spPr>
           <a:xfrm>
-            <a:off x="6149340" y="3470517"/>
+            <a:off x="6149340" y="4255199"/>
             <a:ext cx="2644902" cy="45720"/>
           </a:xfrm>
           <a:prstGeom prst="rect">
@@ -16573,13 +15986,13 @@
       </p:sp>
       <p:sp>
         <p:nvSpPr>
-          <p:cNvPr id="24" name="TextBox 23"/>
+          <p:cNvPr id="25" name="TextBox 24"/>
           <p:cNvSpPr txBox="1"/>
           <p:nvPr/>
         </p:nvSpPr>
         <p:spPr>
           <a:xfrm>
-            <a:off x="6259068" y="3598533"/>
+            <a:off x="6259068" y="4383215"/>
             <a:ext cx="2425446" cy="201168"/>
           </a:xfrm>
           <a:prstGeom prst="rect">
@@ -16615,13 +16028,13 @@
       </p:sp>
       <p:sp>
         <p:nvSpPr>
-          <p:cNvPr id="25" name="TextBox 24"/>
+          <p:cNvPr id="26" name="TextBox 25"/>
           <p:cNvSpPr txBox="1"/>
           <p:nvPr/>
         </p:nvSpPr>
         <p:spPr>
           <a:xfrm>
-            <a:off x="6259068" y="3854565"/>
+            <a:off x="6259068" y="4639247"/>
             <a:ext cx="2425446" cy="475488"/>
           </a:xfrm>
           <a:prstGeom prst="rect">
@@ -16657,7 +16070,7 @@
       </p:sp>
       <p:sp>
         <p:nvSpPr>
-          <p:cNvPr id="26" name="TextBox 25"/>
+          <p:cNvPr id="27" name="TextBox 26"/>
           <p:cNvSpPr txBox="1"/>
           <p:nvPr/>
         </p:nvSpPr>
@@ -16699,14 +16112,14 @@
       </p:sp>
       <p:sp>
         <p:nvSpPr>
-          <p:cNvPr id="27" name="Rectangle 26"/>
+          <p:cNvPr id="28" name="Rectangle 27"/>
           <p:cNvSpPr/>
           <p:nvPr/>
         </p:nvSpPr>
         <p:spPr>
           <a:xfrm>
-            <a:off x="8903970" y="3470517"/>
-            <a:ext cx="2644902" cy="2747402"/>
+            <a:off x="8903970" y="4255199"/>
+            <a:ext cx="2644902" cy="1962720"/>
           </a:xfrm>
           <a:prstGeom prst="rect">
             <a:avLst/>
@@ -16748,13 +16161,13 @@
       </p:sp>
       <p:sp>
         <p:nvSpPr>
-          <p:cNvPr id="28" name="Rectangle 27"/>
+          <p:cNvPr id="29" name="Rectangle 28"/>
           <p:cNvSpPr/>
           <p:nvPr/>
         </p:nvSpPr>
         <p:spPr>
           <a:xfrm>
-            <a:off x="8903970" y="3470517"/>
+            <a:off x="8903970" y="4255199"/>
             <a:ext cx="2644902" cy="45720"/>
           </a:xfrm>
           <a:prstGeom prst="rect">
@@ -16797,13 +16210,13 @@
       </p:sp>
       <p:sp>
         <p:nvSpPr>
-          <p:cNvPr id="29" name="TextBox 28"/>
+          <p:cNvPr id="30" name="TextBox 29"/>
           <p:cNvSpPr txBox="1"/>
           <p:nvPr/>
         </p:nvSpPr>
         <p:spPr>
           <a:xfrm>
-            <a:off x="9013698" y="3598533"/>
+            <a:off x="9013698" y="4383215"/>
             <a:ext cx="2425446" cy="201168"/>
           </a:xfrm>
           <a:prstGeom prst="rect">
@@ -16839,13 +16252,13 @@
       </p:sp>
       <p:sp>
         <p:nvSpPr>
-          <p:cNvPr id="30" name="TextBox 29"/>
+          <p:cNvPr id="31" name="TextBox 30"/>
           <p:cNvSpPr txBox="1"/>
           <p:nvPr/>
         </p:nvSpPr>
         <p:spPr>
           <a:xfrm>
-            <a:off x="9013698" y="3854565"/>
+            <a:off x="9013698" y="4639247"/>
             <a:ext cx="2425446" cy="475488"/>
           </a:xfrm>
           <a:prstGeom prst="rect">
@@ -16881,7 +16294,7 @@
       </p:sp>
       <p:sp>
         <p:nvSpPr>
-          <p:cNvPr id="31" name="TextBox 30"/>
+          <p:cNvPr id="32" name="TextBox 31"/>
           <p:cNvSpPr txBox="1"/>
           <p:nvPr/>
         </p:nvSpPr>
@@ -16923,7 +16336,7 @@
       </p:sp>
       <p:sp>
         <p:nvSpPr>
-          <p:cNvPr id="32" name="Rectangle 31"/>
+          <p:cNvPr id="33" name="Rectangle 32"/>
           <p:cNvSpPr/>
           <p:nvPr/>
         </p:nvSpPr>
@@ -16972,7 +16385,7 @@
       </p:sp>
       <p:sp>
         <p:nvSpPr>
-          <p:cNvPr id="33" name="TextBox 32"/>
+          <p:cNvPr id="34" name="TextBox 33"/>
           <p:cNvSpPr txBox="1"/>
           <p:nvPr/>
         </p:nvSpPr>
@@ -17014,7 +16427,7 @@
       </p:sp>
       <p:sp>
         <p:nvSpPr>
-          <p:cNvPr id="34" name="TextBox 33"/>
+          <p:cNvPr id="35" name="TextBox 34"/>
           <p:cNvSpPr txBox="1"/>
           <p:nvPr/>
         </p:nvSpPr>
@@ -17056,7 +16469,7 @@
       </p:sp>
       <p:sp>
         <p:nvSpPr>
-          <p:cNvPr id="35" name="TextBox 34"/>
+          <p:cNvPr id="36" name="TextBox 35"/>
           <p:cNvSpPr txBox="1"/>
           <p:nvPr/>
         </p:nvSpPr>
@@ -17171,48 +16584,6 @@
         </p:nvSpPr>
         <p:spPr>
           <a:xfrm>
-            <a:off x="5897880" y="310896"/>
-            <a:ext cx="4800600" cy="256032"/>
-          </a:xfrm>
-          <a:prstGeom prst="rect">
-            <a:avLst/>
-          </a:prstGeom>
-          <a:noFill/>
-        </p:spPr>
-        <p:txBody>
-          <a:bodyPr wrap="none" lIns="9144" rIns="9144" tIns="9144" bIns="9144" anchor="t">
-            <a:spAutoFit/>
-          </a:bodyPr>
-          <a:lstStyle/>
-          <a:p>
-            <a:pPr algn="r">
-              <a:spcAft>
-                <a:spcPts val="0"/>
-              </a:spcAft>
-              <a:defRPr sz="680" b="1">
-                <a:solidFill>
-                  <a:srgbClr val="4F6B00"/>
-                </a:solidFill>
-                <a:latin typeface="Inter"/>
-              </a:defRPr>
-            </a:pPr>
-            <a:r>
-              <a:rPr>
-                <a:latin typeface="Inter"/>
-              </a:rPr>
-              <a:t>Illustrative, Gradient Maintained — demo data, not the client's holdings or managers</a:t>
-            </a:r>
-          </a:p>
-        </p:txBody>
-      </p:sp>
-      <p:sp>
-        <p:nvSpPr>
-          <p:cNvPr id="4" name="TextBox 3"/>
-          <p:cNvSpPr txBox="1"/>
-          <p:nvPr/>
-        </p:nvSpPr>
-        <p:spPr>
-          <a:xfrm>
             <a:off x="640080" y="566928"/>
             <a:ext cx="10058400" cy="530352"/>
           </a:xfrm>
@@ -17249,7 +16620,7 @@
       </p:sp>
       <p:sp>
         <p:nvSpPr>
-          <p:cNvPr id="5" name="Rectangle 4"/>
+          <p:cNvPr id="4" name="Rectangle 3"/>
           <p:cNvSpPr/>
           <p:nvPr/>
         </p:nvSpPr>
@@ -17298,7 +16669,7 @@
       </p:sp>
       <p:sp>
         <p:nvSpPr>
-          <p:cNvPr id="6" name="Rectangle 5"/>
+          <p:cNvPr id="5" name="Rectangle 4"/>
           <p:cNvSpPr/>
           <p:nvPr/>
         </p:nvSpPr>
@@ -17347,7 +16718,7 @@
       </p:sp>
       <p:sp>
         <p:nvSpPr>
-          <p:cNvPr id="7" name="TextBox 6"/>
+          <p:cNvPr id="6" name="TextBox 5"/>
           <p:cNvSpPr txBox="1"/>
           <p:nvPr/>
         </p:nvSpPr>
@@ -17389,7 +16760,7 @@
       </p:sp>
       <p:sp>
         <p:nvSpPr>
-          <p:cNvPr id="8" name="TextBox 7"/>
+          <p:cNvPr id="7" name="TextBox 6"/>
           <p:cNvSpPr txBox="1"/>
           <p:nvPr/>
         </p:nvSpPr>
@@ -17431,7 +16802,7 @@
       </p:sp>
       <p:graphicFrame>
         <p:nvGraphicFramePr>
-          <p:cNvPr id="9" name="Chart 8"/>
+          <p:cNvPr id="8" name="Chart 7"/>
           <p:cNvGraphicFramePr>
             <a:graphicFrameLocks noGrp="1"/>
           </p:cNvGraphicFramePr>
@@ -17449,7 +16820,7 @@
       </p:graphicFrame>
       <p:sp>
         <p:nvSpPr>
-          <p:cNvPr id="10" name="Rectangle 9"/>
+          <p:cNvPr id="9" name="Rectangle 8"/>
           <p:cNvSpPr/>
           <p:nvPr/>
         </p:nvSpPr>
@@ -17498,7 +16869,7 @@
       </p:sp>
       <p:sp>
         <p:nvSpPr>
-          <p:cNvPr id="11" name="TextBox 10"/>
+          <p:cNvPr id="10" name="TextBox 9"/>
           <p:cNvSpPr txBox="1"/>
           <p:nvPr/>
         </p:nvSpPr>
@@ -17540,7 +16911,7 @@
       </p:sp>
       <p:sp>
         <p:nvSpPr>
-          <p:cNvPr id="12" name="TextBox 11"/>
+          <p:cNvPr id="11" name="TextBox 10"/>
           <p:cNvSpPr txBox="1"/>
           <p:nvPr/>
         </p:nvSpPr>
@@ -17582,7 +16953,7 @@
       </p:sp>
       <p:sp>
         <p:nvSpPr>
-          <p:cNvPr id="13" name="TextBox 12"/>
+          <p:cNvPr id="12" name="TextBox 11"/>
           <p:cNvSpPr txBox="1"/>
           <p:nvPr/>
         </p:nvSpPr>
@@ -17697,48 +17068,6 @@
         </p:nvSpPr>
         <p:spPr>
           <a:xfrm>
-            <a:off x="5897880" y="310896"/>
-            <a:ext cx="4800600" cy="256032"/>
-          </a:xfrm>
-          <a:prstGeom prst="rect">
-            <a:avLst/>
-          </a:prstGeom>
-          <a:noFill/>
-        </p:spPr>
-        <p:txBody>
-          <a:bodyPr wrap="none" lIns="9144" rIns="9144" tIns="9144" bIns="9144" anchor="t">
-            <a:spAutoFit/>
-          </a:bodyPr>
-          <a:lstStyle/>
-          <a:p>
-            <a:pPr algn="r">
-              <a:spcAft>
-                <a:spcPts val="0"/>
-              </a:spcAft>
-              <a:defRPr sz="680" b="1">
-                <a:solidFill>
-                  <a:srgbClr val="4F6B00"/>
-                </a:solidFill>
-                <a:latin typeface="Inter"/>
-              </a:defRPr>
-            </a:pPr>
-            <a:r>
-              <a:rPr>
-                <a:latin typeface="Inter"/>
-              </a:rPr>
-              <a:t>Illustrative, Gradient Maintained — demo data, not the client's holdings or managers</a:t>
-            </a:r>
-          </a:p>
-        </p:txBody>
-      </p:sp>
-      <p:sp>
-        <p:nvSpPr>
-          <p:cNvPr id="4" name="TextBox 3"/>
-          <p:cNvSpPr txBox="1"/>
-          <p:nvPr/>
-        </p:nvSpPr>
-        <p:spPr>
-          <a:xfrm>
             <a:off x="640080" y="566928"/>
             <a:ext cx="10058400" cy="530352"/>
           </a:xfrm>
@@ -17775,7 +17104,7 @@
       </p:sp>
       <p:sp>
         <p:nvSpPr>
-          <p:cNvPr id="5" name="Rectangle 4"/>
+          <p:cNvPr id="4" name="Rectangle 3"/>
           <p:cNvSpPr/>
           <p:nvPr/>
         </p:nvSpPr>
@@ -17824,7 +17153,7 @@
       </p:sp>
       <p:sp>
         <p:nvSpPr>
-          <p:cNvPr id="6" name="Rectangle 5"/>
+          <p:cNvPr id="5" name="Rectangle 4"/>
           <p:cNvSpPr/>
           <p:nvPr/>
         </p:nvSpPr>
@@ -17873,7 +17202,7 @@
       </p:sp>
       <p:sp>
         <p:nvSpPr>
-          <p:cNvPr id="7" name="TextBox 6"/>
+          <p:cNvPr id="6" name="TextBox 5"/>
           <p:cNvSpPr txBox="1"/>
           <p:nvPr/>
         </p:nvSpPr>
@@ -17915,7 +17244,7 @@
       </p:sp>
       <p:sp>
         <p:nvSpPr>
-          <p:cNvPr id="8" name="TextBox 7"/>
+          <p:cNvPr id="7" name="TextBox 6"/>
           <p:cNvSpPr txBox="1"/>
           <p:nvPr/>
         </p:nvSpPr>
@@ -17957,7 +17286,7 @@
       </p:sp>
       <p:graphicFrame>
         <p:nvGraphicFramePr>
-          <p:cNvPr id="9" name="Table 8"/>
+          <p:cNvPr id="8" name="Table 7"/>
           <p:cNvGraphicFramePr>
             <a:graphicFrameLocks noGrp="1"/>
           </p:cNvGraphicFramePr>
@@ -18490,7 +17819,7 @@
                         <a:rPr>
                           <a:latin typeface="Inter"/>
                         </a:rPr>
-                        <a:t>● not assessed</a:t>
+                        <a:t>● Not assessed</a:t>
                       </a:r>
                     </a:p>
                   </a:txBody>
@@ -18534,7 +17863,7 @@
       </p:graphicFrame>
       <p:sp>
         <p:nvSpPr>
-          <p:cNvPr id="10" name="TextBox 9"/>
+          <p:cNvPr id="9" name="TextBox 8"/>
           <p:cNvSpPr txBox="1"/>
           <p:nvPr/>
         </p:nvSpPr>
@@ -18576,7 +17905,7 @@
       </p:sp>
       <p:graphicFrame>
         <p:nvGraphicFramePr>
-          <p:cNvPr id="11" name="Table 10"/>
+          <p:cNvPr id="10" name="Table 9"/>
           <p:cNvGraphicFramePr>
             <a:graphicFrameLocks noGrp="1"/>
           </p:cNvGraphicFramePr>
@@ -19016,7 +18345,7 @@
       </p:graphicFrame>
       <p:sp>
         <p:nvSpPr>
-          <p:cNvPr id="12" name="TextBox 11"/>
+          <p:cNvPr id="11" name="TextBox 10"/>
           <p:cNvSpPr txBox="1"/>
           <p:nvPr/>
         </p:nvSpPr>
@@ -19058,7 +18387,7 @@
       </p:sp>
       <p:sp>
         <p:nvSpPr>
-          <p:cNvPr id="13" name="Rectangle 12"/>
+          <p:cNvPr id="12" name="Rectangle 11"/>
           <p:cNvSpPr/>
           <p:nvPr/>
         </p:nvSpPr>
@@ -19107,7 +18436,7 @@
       </p:sp>
       <p:sp>
         <p:nvSpPr>
-          <p:cNvPr id="14" name="TextBox 13"/>
+          <p:cNvPr id="13" name="TextBox 12"/>
           <p:cNvSpPr txBox="1"/>
           <p:nvPr/>
         </p:nvSpPr>
@@ -19149,7 +18478,7 @@
       </p:sp>
       <p:sp>
         <p:nvSpPr>
-          <p:cNvPr id="15" name="TextBox 14"/>
+          <p:cNvPr id="14" name="TextBox 13"/>
           <p:cNvSpPr txBox="1"/>
           <p:nvPr/>
         </p:nvSpPr>
@@ -19191,7 +18520,7 @@
       </p:sp>
       <p:sp>
         <p:nvSpPr>
-          <p:cNvPr id="16" name="TextBox 15"/>
+          <p:cNvPr id="15" name="TextBox 14"/>
           <p:cNvSpPr txBox="1"/>
           <p:nvPr/>
         </p:nvSpPr>
@@ -19306,48 +18635,6 @@
         </p:nvSpPr>
         <p:spPr>
           <a:xfrm>
-            <a:off x="5897880" y="310896"/>
-            <a:ext cx="4800600" cy="256032"/>
-          </a:xfrm>
-          <a:prstGeom prst="rect">
-            <a:avLst/>
-          </a:prstGeom>
-          <a:noFill/>
-        </p:spPr>
-        <p:txBody>
-          <a:bodyPr wrap="none" lIns="9144" rIns="9144" tIns="9144" bIns="9144" anchor="t">
-            <a:spAutoFit/>
-          </a:bodyPr>
-          <a:lstStyle/>
-          <a:p>
-            <a:pPr algn="r">
-              <a:spcAft>
-                <a:spcPts val="0"/>
-              </a:spcAft>
-              <a:defRPr sz="680" b="1">
-                <a:solidFill>
-                  <a:srgbClr val="4F6B00"/>
-                </a:solidFill>
-                <a:latin typeface="Inter"/>
-              </a:defRPr>
-            </a:pPr>
-            <a:r>
-              <a:rPr>
-                <a:latin typeface="Inter"/>
-              </a:rPr>
-              <a:t>Illustrative, Gradient Maintained — demo data, not the client's holdings or managers</a:t>
-            </a:r>
-          </a:p>
-        </p:txBody>
-      </p:sp>
-      <p:sp>
-        <p:nvSpPr>
-          <p:cNvPr id="4" name="TextBox 3"/>
-          <p:cNvSpPr txBox="1"/>
-          <p:nvPr/>
-        </p:nvSpPr>
-        <p:spPr>
-          <a:xfrm>
             <a:off x="640080" y="566928"/>
             <a:ext cx="10058400" cy="530352"/>
           </a:xfrm>
@@ -19384,7 +18671,7 @@
       </p:sp>
       <p:sp>
         <p:nvSpPr>
-          <p:cNvPr id="5" name="Rectangle 4"/>
+          <p:cNvPr id="4" name="Rectangle 3"/>
           <p:cNvSpPr/>
           <p:nvPr/>
         </p:nvSpPr>
@@ -19433,7 +18720,7 @@
       </p:sp>
       <p:sp>
         <p:nvSpPr>
-          <p:cNvPr id="6" name="Rectangle 5"/>
+          <p:cNvPr id="5" name="Rectangle 4"/>
           <p:cNvSpPr/>
           <p:nvPr/>
         </p:nvSpPr>
@@ -19482,7 +18769,7 @@
       </p:sp>
       <p:sp>
         <p:nvSpPr>
-          <p:cNvPr id="7" name="TextBox 6"/>
+          <p:cNvPr id="6" name="TextBox 5"/>
           <p:cNvSpPr txBox="1"/>
           <p:nvPr/>
         </p:nvSpPr>
@@ -19524,7 +18811,7 @@
       </p:sp>
       <p:sp>
         <p:nvSpPr>
-          <p:cNvPr id="8" name="TextBox 7"/>
+          <p:cNvPr id="7" name="TextBox 6"/>
           <p:cNvSpPr txBox="1"/>
           <p:nvPr/>
         </p:nvSpPr>
@@ -19566,7 +18853,7 @@
       </p:sp>
       <p:graphicFrame>
         <p:nvGraphicFramePr>
-          <p:cNvPr id="9" name="Chart 8"/>
+          <p:cNvPr id="8" name="Chart 7"/>
           <p:cNvGraphicFramePr>
             <a:graphicFrameLocks noGrp="1"/>
           </p:cNvGraphicFramePr>
@@ -19584,7 +18871,7 @@
       </p:graphicFrame>
       <p:sp>
         <p:nvSpPr>
-          <p:cNvPr id="10" name="Rectangle 9"/>
+          <p:cNvPr id="9" name="Rectangle 8"/>
           <p:cNvSpPr/>
           <p:nvPr/>
         </p:nvSpPr>
@@ -19633,7 +18920,7 @@
       </p:sp>
       <p:sp>
         <p:nvSpPr>
-          <p:cNvPr id="11" name="TextBox 10"/>
+          <p:cNvPr id="10" name="TextBox 9"/>
           <p:cNvSpPr txBox="1"/>
           <p:nvPr/>
         </p:nvSpPr>
@@ -19675,7 +18962,7 @@
       </p:sp>
       <p:sp>
         <p:nvSpPr>
-          <p:cNvPr id="12" name="TextBox 11"/>
+          <p:cNvPr id="11" name="TextBox 10"/>
           <p:cNvSpPr txBox="1"/>
           <p:nvPr/>
         </p:nvSpPr>
@@ -19717,7 +19004,7 @@
       </p:sp>
       <p:sp>
         <p:nvSpPr>
-          <p:cNvPr id="13" name="TextBox 12"/>
+          <p:cNvPr id="12" name="TextBox 11"/>
           <p:cNvSpPr txBox="1"/>
           <p:nvPr/>
         </p:nvSpPr>
@@ -19832,48 +19119,6 @@
         </p:nvSpPr>
         <p:spPr>
           <a:xfrm>
-            <a:off x="5897880" y="310896"/>
-            <a:ext cx="4800600" cy="256032"/>
-          </a:xfrm>
-          <a:prstGeom prst="rect">
-            <a:avLst/>
-          </a:prstGeom>
-          <a:noFill/>
-        </p:spPr>
-        <p:txBody>
-          <a:bodyPr wrap="none" lIns="9144" rIns="9144" tIns="9144" bIns="9144" anchor="t">
-            <a:spAutoFit/>
-          </a:bodyPr>
-          <a:lstStyle/>
-          <a:p>
-            <a:pPr algn="r">
-              <a:spcAft>
-                <a:spcPts val="0"/>
-              </a:spcAft>
-              <a:defRPr sz="680" b="1">
-                <a:solidFill>
-                  <a:srgbClr val="4F6B00"/>
-                </a:solidFill>
-                <a:latin typeface="Inter"/>
-              </a:defRPr>
-            </a:pPr>
-            <a:r>
-              <a:rPr>
-                <a:latin typeface="Inter"/>
-              </a:rPr>
-              <a:t>Illustrative, Gradient Maintained — demo data, not the client's holdings or managers</a:t>
-            </a:r>
-          </a:p>
-        </p:txBody>
-      </p:sp>
-      <p:sp>
-        <p:nvSpPr>
-          <p:cNvPr id="4" name="TextBox 3"/>
-          <p:cNvSpPr txBox="1"/>
-          <p:nvPr/>
-        </p:nvSpPr>
-        <p:spPr>
-          <a:xfrm>
             <a:off x="640080" y="566928"/>
             <a:ext cx="10058400" cy="530352"/>
           </a:xfrm>
@@ -19910,7 +19155,7 @@
       </p:sp>
       <p:sp>
         <p:nvSpPr>
-          <p:cNvPr id="5" name="Rectangle 4"/>
+          <p:cNvPr id="4" name="Rectangle 3"/>
           <p:cNvSpPr/>
           <p:nvPr/>
         </p:nvSpPr>
@@ -19959,7 +19204,7 @@
       </p:sp>
       <p:sp>
         <p:nvSpPr>
-          <p:cNvPr id="6" name="Rectangle 5"/>
+          <p:cNvPr id="5" name="Rectangle 4"/>
           <p:cNvSpPr/>
           <p:nvPr/>
         </p:nvSpPr>
@@ -20008,7 +19253,7 @@
       </p:sp>
       <p:sp>
         <p:nvSpPr>
-          <p:cNvPr id="7" name="TextBox 6"/>
+          <p:cNvPr id="6" name="TextBox 5"/>
           <p:cNvSpPr txBox="1"/>
           <p:nvPr/>
         </p:nvSpPr>
@@ -20050,7 +19295,7 @@
       </p:sp>
       <p:sp>
         <p:nvSpPr>
-          <p:cNvPr id="8" name="TextBox 7"/>
+          <p:cNvPr id="7" name="TextBox 6"/>
           <p:cNvSpPr txBox="1"/>
           <p:nvPr/>
         </p:nvSpPr>
@@ -20092,7 +19337,7 @@
       </p:sp>
       <p:graphicFrame>
         <p:nvGraphicFramePr>
-          <p:cNvPr id="9" name="Table 8"/>
+          <p:cNvPr id="8" name="Table 7"/>
           <p:cNvGraphicFramePr>
             <a:graphicFrameLocks noGrp="1"/>
           </p:cNvGraphicFramePr>
@@ -20669,7 +19914,7 @@
       </p:graphicFrame>
       <p:sp>
         <p:nvSpPr>
-          <p:cNvPr id="10" name="Rectangle 9"/>
+          <p:cNvPr id="9" name="Rectangle 8"/>
           <p:cNvSpPr/>
           <p:nvPr/>
         </p:nvSpPr>
@@ -20718,7 +19963,7 @@
       </p:sp>
       <p:sp>
         <p:nvSpPr>
-          <p:cNvPr id="11" name="Rectangle 10"/>
+          <p:cNvPr id="10" name="Rectangle 9"/>
           <p:cNvSpPr/>
           <p:nvPr/>
         </p:nvSpPr>
@@ -20767,7 +20012,7 @@
       </p:sp>
       <p:sp>
         <p:nvSpPr>
-          <p:cNvPr id="12" name="TextBox 11"/>
+          <p:cNvPr id="11" name="TextBox 10"/>
           <p:cNvSpPr txBox="1"/>
           <p:nvPr/>
         </p:nvSpPr>
@@ -20809,7 +20054,7 @@
       </p:sp>
       <p:sp>
         <p:nvSpPr>
-          <p:cNvPr id="13" name="TextBox 12"/>
+          <p:cNvPr id="12" name="TextBox 11"/>
           <p:cNvSpPr txBox="1"/>
           <p:nvPr/>
         </p:nvSpPr>
@@ -20851,7 +20096,7 @@
       </p:sp>
       <p:sp>
         <p:nvSpPr>
-          <p:cNvPr id="14" name="Rectangle 13"/>
+          <p:cNvPr id="13" name="Rectangle 12"/>
           <p:cNvSpPr/>
           <p:nvPr/>
         </p:nvSpPr>
@@ -20900,7 +20145,7 @@
       </p:sp>
       <p:sp>
         <p:nvSpPr>
-          <p:cNvPr id="15" name="TextBox 14"/>
+          <p:cNvPr id="14" name="TextBox 13"/>
           <p:cNvSpPr txBox="1"/>
           <p:nvPr/>
         </p:nvSpPr>
@@ -20942,7 +20187,7 @@
       </p:sp>
       <p:sp>
         <p:nvSpPr>
-          <p:cNvPr id="16" name="TextBox 15"/>
+          <p:cNvPr id="15" name="TextBox 14"/>
           <p:cNvSpPr txBox="1"/>
           <p:nvPr/>
         </p:nvSpPr>
@@ -20984,7 +20229,7 @@
       </p:sp>
       <p:sp>
         <p:nvSpPr>
-          <p:cNvPr id="17" name="TextBox 16"/>
+          <p:cNvPr id="16" name="TextBox 15"/>
           <p:cNvSpPr txBox="1"/>
           <p:nvPr/>
         </p:nvSpPr>
@@ -21099,48 +20344,6 @@
         </p:nvSpPr>
         <p:spPr>
           <a:xfrm>
-            <a:off x="5897880" y="310896"/>
-            <a:ext cx="4800600" cy="256032"/>
-          </a:xfrm>
-          <a:prstGeom prst="rect">
-            <a:avLst/>
-          </a:prstGeom>
-          <a:noFill/>
-        </p:spPr>
-        <p:txBody>
-          <a:bodyPr wrap="none" lIns="9144" rIns="9144" tIns="9144" bIns="9144" anchor="t">
-            <a:spAutoFit/>
-          </a:bodyPr>
-          <a:lstStyle/>
-          <a:p>
-            <a:pPr algn="r">
-              <a:spcAft>
-                <a:spcPts val="0"/>
-              </a:spcAft>
-              <a:defRPr sz="680" b="1">
-                <a:solidFill>
-                  <a:srgbClr val="4F6B00"/>
-                </a:solidFill>
-                <a:latin typeface="Inter"/>
-              </a:defRPr>
-            </a:pPr>
-            <a:r>
-              <a:rPr>
-                <a:latin typeface="Inter"/>
-              </a:rPr>
-              <a:t>Illustrative, Gradient Maintained — demo data, not the client's holdings or managers</a:t>
-            </a:r>
-          </a:p>
-        </p:txBody>
-      </p:sp>
-      <p:sp>
-        <p:nvSpPr>
-          <p:cNvPr id="4" name="TextBox 3"/>
-          <p:cNvSpPr txBox="1"/>
-          <p:nvPr/>
-        </p:nvSpPr>
-        <p:spPr>
-          <a:xfrm>
             <a:off x="640080" y="566928"/>
             <a:ext cx="10058400" cy="530352"/>
           </a:xfrm>
@@ -21177,7 +20380,7 @@
       </p:sp>
       <p:sp>
         <p:nvSpPr>
-          <p:cNvPr id="5" name="Rectangle 4"/>
+          <p:cNvPr id="4" name="Rectangle 3"/>
           <p:cNvSpPr/>
           <p:nvPr/>
         </p:nvSpPr>
@@ -21226,7 +20429,7 @@
       </p:sp>
       <p:sp>
         <p:nvSpPr>
-          <p:cNvPr id="6" name="Rectangle 5"/>
+          <p:cNvPr id="5" name="Rectangle 4"/>
           <p:cNvSpPr/>
           <p:nvPr/>
         </p:nvSpPr>
@@ -21275,7 +20478,7 @@
       </p:sp>
       <p:sp>
         <p:nvSpPr>
-          <p:cNvPr id="7" name="TextBox 6"/>
+          <p:cNvPr id="6" name="TextBox 5"/>
           <p:cNvSpPr txBox="1"/>
           <p:nvPr/>
         </p:nvSpPr>
@@ -21317,7 +20520,7 @@
       </p:sp>
       <p:sp>
         <p:nvSpPr>
-          <p:cNvPr id="8" name="TextBox 7"/>
+          <p:cNvPr id="7" name="TextBox 6"/>
           <p:cNvSpPr txBox="1"/>
           <p:nvPr/>
         </p:nvSpPr>
@@ -21359,7 +20562,7 @@
       </p:sp>
       <p:graphicFrame>
         <p:nvGraphicFramePr>
-          <p:cNvPr id="9" name="Table 8"/>
+          <p:cNvPr id="8" name="Table 7"/>
           <p:cNvGraphicFramePr>
             <a:graphicFrameLocks noGrp="1"/>
           </p:cNvGraphicFramePr>
@@ -21881,7 +21084,7 @@
       </p:graphicFrame>
       <p:sp>
         <p:nvSpPr>
-          <p:cNvPr id="10" name="TextBox 9"/>
+          <p:cNvPr id="9" name="TextBox 8"/>
           <p:cNvSpPr txBox="1"/>
           <p:nvPr/>
         </p:nvSpPr>
@@ -21923,7 +21126,7 @@
       </p:sp>
       <p:graphicFrame>
         <p:nvGraphicFramePr>
-          <p:cNvPr id="11" name="Table 10"/>
+          <p:cNvPr id="10" name="Table 9"/>
           <p:cNvGraphicFramePr>
             <a:graphicFrameLocks noGrp="1"/>
           </p:cNvGraphicFramePr>
@@ -22281,7 +21484,7 @@
       </p:graphicFrame>
       <p:sp>
         <p:nvSpPr>
-          <p:cNvPr id="12" name="TextBox 11"/>
+          <p:cNvPr id="11" name="TextBox 10"/>
           <p:cNvSpPr txBox="1"/>
           <p:nvPr/>
         </p:nvSpPr>
@@ -22361,7 +21564,7 @@
       </p:sp>
       <p:sp>
         <p:nvSpPr>
-          <p:cNvPr id="13" name="Rectangle 12"/>
+          <p:cNvPr id="12" name="Rectangle 11"/>
           <p:cNvSpPr/>
           <p:nvPr/>
         </p:nvSpPr>
@@ -22410,7 +21613,7 @@
       </p:sp>
       <p:sp>
         <p:nvSpPr>
-          <p:cNvPr id="14" name="TextBox 13"/>
+          <p:cNvPr id="13" name="TextBox 12"/>
           <p:cNvSpPr txBox="1"/>
           <p:nvPr/>
         </p:nvSpPr>
@@ -22452,7 +21655,7 @@
       </p:sp>
       <p:sp>
         <p:nvSpPr>
-          <p:cNvPr id="15" name="TextBox 14"/>
+          <p:cNvPr id="14" name="TextBox 13"/>
           <p:cNvSpPr txBox="1"/>
           <p:nvPr/>
         </p:nvSpPr>
@@ -22494,7 +21697,7 @@
       </p:sp>
       <p:sp>
         <p:nvSpPr>
-          <p:cNvPr id="16" name="TextBox 15"/>
+          <p:cNvPr id="15" name="TextBox 14"/>
           <p:cNvSpPr txBox="1"/>
           <p:nvPr/>
         </p:nvSpPr>
@@ -22609,48 +21812,6 @@
         </p:nvSpPr>
         <p:spPr>
           <a:xfrm>
-            <a:off x="5897880" y="310896"/>
-            <a:ext cx="4800600" cy="256032"/>
-          </a:xfrm>
-          <a:prstGeom prst="rect">
-            <a:avLst/>
-          </a:prstGeom>
-          <a:noFill/>
-        </p:spPr>
-        <p:txBody>
-          <a:bodyPr wrap="none" lIns="9144" rIns="9144" tIns="9144" bIns="9144" anchor="t">
-            <a:spAutoFit/>
-          </a:bodyPr>
-          <a:lstStyle/>
-          <a:p>
-            <a:pPr algn="r">
-              <a:spcAft>
-                <a:spcPts val="0"/>
-              </a:spcAft>
-              <a:defRPr sz="680" b="1">
-                <a:solidFill>
-                  <a:srgbClr val="4F6B00"/>
-                </a:solidFill>
-                <a:latin typeface="Inter"/>
-              </a:defRPr>
-            </a:pPr>
-            <a:r>
-              <a:rPr>
-                <a:latin typeface="Inter"/>
-              </a:rPr>
-              <a:t>Illustrative, Gradient Maintained — demo data, not the client's holdings or managers</a:t>
-            </a:r>
-          </a:p>
-        </p:txBody>
-      </p:sp>
-      <p:sp>
-        <p:nvSpPr>
-          <p:cNvPr id="4" name="TextBox 3"/>
-          <p:cNvSpPr txBox="1"/>
-          <p:nvPr/>
-        </p:nvSpPr>
-        <p:spPr>
-          <a:xfrm>
             <a:off x="640080" y="566928"/>
             <a:ext cx="10058400" cy="530352"/>
           </a:xfrm>
@@ -22687,7 +21848,7 @@
       </p:sp>
       <p:sp>
         <p:nvSpPr>
-          <p:cNvPr id="5" name="Rectangle 4"/>
+          <p:cNvPr id="4" name="Rectangle 3"/>
           <p:cNvSpPr/>
           <p:nvPr/>
         </p:nvSpPr>
@@ -22736,7 +21897,7 @@
       </p:sp>
       <p:sp>
         <p:nvSpPr>
-          <p:cNvPr id="6" name="Rectangle 5"/>
+          <p:cNvPr id="5" name="Rectangle 4"/>
           <p:cNvSpPr/>
           <p:nvPr/>
         </p:nvSpPr>
@@ -22785,7 +21946,7 @@
       </p:sp>
       <p:sp>
         <p:nvSpPr>
-          <p:cNvPr id="7" name="TextBox 6"/>
+          <p:cNvPr id="6" name="TextBox 5"/>
           <p:cNvSpPr txBox="1"/>
           <p:nvPr/>
         </p:nvSpPr>
@@ -22827,7 +21988,7 @@
       </p:sp>
       <p:sp>
         <p:nvSpPr>
-          <p:cNvPr id="8" name="TextBox 7"/>
+          <p:cNvPr id="7" name="TextBox 6"/>
           <p:cNvSpPr txBox="1"/>
           <p:nvPr/>
         </p:nvSpPr>
@@ -22869,7 +22030,7 @@
       </p:sp>
       <p:graphicFrame>
         <p:nvGraphicFramePr>
-          <p:cNvPr id="9" name="Table 8"/>
+          <p:cNvPr id="8" name="Table 7"/>
           <p:cNvGraphicFramePr>
             <a:graphicFrameLocks noGrp="1"/>
           </p:cNvGraphicFramePr>
@@ -23446,7 +22607,7 @@
       </p:graphicFrame>
       <p:sp>
         <p:nvSpPr>
-          <p:cNvPr id="10" name="TextBox 9"/>
+          <p:cNvPr id="9" name="TextBox 8"/>
           <p:cNvSpPr txBox="1"/>
           <p:nvPr/>
         </p:nvSpPr>
@@ -23488,7 +22649,7 @@
       </p:sp>
       <p:graphicFrame>
         <p:nvGraphicFramePr>
-          <p:cNvPr id="11" name="Table 10"/>
+          <p:cNvPr id="10" name="Table 9"/>
           <p:cNvGraphicFramePr>
             <a:graphicFrameLocks noGrp="1"/>
           </p:cNvGraphicFramePr>
@@ -24065,7 +23226,7 @@
       </p:graphicFrame>
       <p:sp>
         <p:nvSpPr>
-          <p:cNvPr id="12" name="Rectangle 11"/>
+          <p:cNvPr id="11" name="Rectangle 10"/>
           <p:cNvSpPr/>
           <p:nvPr/>
         </p:nvSpPr>
@@ -24114,7 +23275,7 @@
       </p:sp>
       <p:sp>
         <p:nvSpPr>
-          <p:cNvPr id="13" name="TextBox 12"/>
+          <p:cNvPr id="12" name="TextBox 11"/>
           <p:cNvSpPr txBox="1"/>
           <p:nvPr/>
         </p:nvSpPr>
@@ -24156,7 +23317,7 @@
       </p:sp>
       <p:sp>
         <p:nvSpPr>
-          <p:cNvPr id="14" name="TextBox 13"/>
+          <p:cNvPr id="13" name="TextBox 12"/>
           <p:cNvSpPr txBox="1"/>
           <p:nvPr/>
         </p:nvSpPr>
@@ -24198,7 +23359,7 @@
       </p:sp>
       <p:sp>
         <p:nvSpPr>
-          <p:cNvPr id="15" name="TextBox 14"/>
+          <p:cNvPr id="14" name="TextBox 13"/>
           <p:cNvSpPr txBox="1"/>
           <p:nvPr/>
         </p:nvSpPr>
@@ -24313,48 +23474,6 @@
         </p:nvSpPr>
         <p:spPr>
           <a:xfrm>
-            <a:off x="5897880" y="310896"/>
-            <a:ext cx="4800600" cy="256032"/>
-          </a:xfrm>
-          <a:prstGeom prst="rect">
-            <a:avLst/>
-          </a:prstGeom>
-          <a:noFill/>
-        </p:spPr>
-        <p:txBody>
-          <a:bodyPr wrap="none" lIns="9144" rIns="9144" tIns="9144" bIns="9144" anchor="t">
-            <a:spAutoFit/>
-          </a:bodyPr>
-          <a:lstStyle/>
-          <a:p>
-            <a:pPr algn="r">
-              <a:spcAft>
-                <a:spcPts val="0"/>
-              </a:spcAft>
-              <a:defRPr sz="680" b="1">
-                <a:solidFill>
-                  <a:srgbClr val="4F6B00"/>
-                </a:solidFill>
-                <a:latin typeface="Inter"/>
-              </a:defRPr>
-            </a:pPr>
-            <a:r>
-              <a:rPr>
-                <a:latin typeface="Inter"/>
-              </a:rPr>
-              <a:t>Illustrative, Gradient Maintained — demo data, not the client's holdings or managers</a:t>
-            </a:r>
-          </a:p>
-        </p:txBody>
-      </p:sp>
-      <p:sp>
-        <p:nvSpPr>
-          <p:cNvPr id="4" name="TextBox 3"/>
-          <p:cNvSpPr txBox="1"/>
-          <p:nvPr/>
-        </p:nvSpPr>
-        <p:spPr>
-          <a:xfrm>
             <a:off x="640080" y="566928"/>
             <a:ext cx="10058400" cy="530352"/>
           </a:xfrm>
@@ -24391,7 +23510,7 @@
       </p:sp>
       <p:sp>
         <p:nvSpPr>
-          <p:cNvPr id="5" name="Rectangle 4"/>
+          <p:cNvPr id="4" name="Rectangle 3"/>
           <p:cNvSpPr/>
           <p:nvPr/>
         </p:nvSpPr>
@@ -24440,7 +23559,7 @@
       </p:sp>
       <p:sp>
         <p:nvSpPr>
-          <p:cNvPr id="6" name="Rectangle 5"/>
+          <p:cNvPr id="5" name="Rectangle 4"/>
           <p:cNvSpPr/>
           <p:nvPr/>
         </p:nvSpPr>
@@ -24489,7 +23608,7 @@
       </p:sp>
       <p:sp>
         <p:nvSpPr>
-          <p:cNvPr id="7" name="TextBox 6"/>
+          <p:cNvPr id="6" name="TextBox 5"/>
           <p:cNvSpPr txBox="1"/>
           <p:nvPr/>
         </p:nvSpPr>
@@ -24531,7 +23650,7 @@
       </p:sp>
       <p:graphicFrame>
         <p:nvGraphicFramePr>
-          <p:cNvPr id="8" name="Table 7"/>
+          <p:cNvPr id="7" name="Table 6"/>
           <p:cNvGraphicFramePr>
             <a:graphicFrameLocks noGrp="1"/>
           </p:cNvGraphicFramePr>
@@ -24680,7 +23799,7 @@
                         <a:rPr>
                           <a:latin typeface="Inter"/>
                         </a:rPr>
-                        <a:t>● available</a:t>
+                        <a:t>● Available</a:t>
                       </a:r>
                     </a:p>
                   </a:txBody>
@@ -24763,7 +23882,7 @@
                         <a:rPr>
                           <a:latin typeface="Inter"/>
                         </a:rPr>
-                        <a:t>● available</a:t>
+                        <a:t>● Available</a:t>
                       </a:r>
                     </a:p>
                   </a:txBody>
@@ -24846,7 +23965,7 @@
                         <a:rPr>
                           <a:latin typeface="Inter"/>
                         </a:rPr>
-                        <a:t>● available</a:t>
+                        <a:t>● Available</a:t>
                       </a:r>
                     </a:p>
                   </a:txBody>
@@ -24929,7 +24048,7 @@
                         <a:rPr>
                           <a:latin typeface="Inter"/>
                         </a:rPr>
-                        <a:t>● available</a:t>
+                        <a:t>● Available</a:t>
                       </a:r>
                     </a:p>
                   </a:txBody>
@@ -25012,7 +24131,7 @@
                         <a:rPr>
                           <a:latin typeface="Inter"/>
                         </a:rPr>
-                        <a:t>● available</a:t>
+                        <a:t>● Available</a:t>
                       </a:r>
                     </a:p>
                   </a:txBody>
@@ -25095,7 +24214,7 @@
                         <a:rPr>
                           <a:latin typeface="Inter"/>
                         </a:rPr>
-                        <a:t>● available</a:t>
+                        <a:t>● Available</a:t>
                       </a:r>
                     </a:p>
                   </a:txBody>
@@ -25178,7 +24297,7 @@
                         <a:rPr>
                           <a:latin typeface="Inter"/>
                         </a:rPr>
-                        <a:t>● unavailable</a:t>
+                        <a:t>● Not available</a:t>
                       </a:r>
                     </a:p>
                   </a:txBody>
@@ -25222,7 +24341,7 @@
       </p:graphicFrame>
       <p:sp>
         <p:nvSpPr>
-          <p:cNvPr id="9" name="Rectangle 8"/>
+          <p:cNvPr id="8" name="Rectangle 7"/>
           <p:cNvSpPr/>
           <p:nvPr/>
         </p:nvSpPr>
@@ -25271,7 +24390,7 @@
       </p:sp>
       <p:sp>
         <p:nvSpPr>
-          <p:cNvPr id="10" name="TextBox 9"/>
+          <p:cNvPr id="9" name="TextBox 8"/>
           <p:cNvSpPr txBox="1"/>
           <p:nvPr/>
         </p:nvSpPr>
@@ -25313,7 +24432,7 @@
       </p:sp>
       <p:sp>
         <p:nvSpPr>
-          <p:cNvPr id="11" name="TextBox 10"/>
+          <p:cNvPr id="10" name="TextBox 9"/>
           <p:cNvSpPr txBox="1"/>
           <p:nvPr/>
         </p:nvSpPr>
@@ -25355,7 +24474,7 @@
       </p:sp>
       <p:sp>
         <p:nvSpPr>
-          <p:cNvPr id="12" name="TextBox 11"/>
+          <p:cNvPr id="11" name="TextBox 10"/>
           <p:cNvSpPr txBox="1"/>
           <p:nvPr/>
         </p:nvSpPr>
@@ -25470,48 +24589,6 @@
         </p:nvSpPr>
         <p:spPr>
           <a:xfrm>
-            <a:off x="5897880" y="310896"/>
-            <a:ext cx="4800600" cy="256032"/>
-          </a:xfrm>
-          <a:prstGeom prst="rect">
-            <a:avLst/>
-          </a:prstGeom>
-          <a:noFill/>
-        </p:spPr>
-        <p:txBody>
-          <a:bodyPr wrap="none" lIns="9144" rIns="9144" tIns="9144" bIns="9144" anchor="t">
-            <a:spAutoFit/>
-          </a:bodyPr>
-          <a:lstStyle/>
-          <a:p>
-            <a:pPr algn="r">
-              <a:spcAft>
-                <a:spcPts val="0"/>
-              </a:spcAft>
-              <a:defRPr sz="680" b="1">
-                <a:solidFill>
-                  <a:srgbClr val="4F6B00"/>
-                </a:solidFill>
-                <a:latin typeface="Inter"/>
-              </a:defRPr>
-            </a:pPr>
-            <a:r>
-              <a:rPr>
-                <a:latin typeface="Inter"/>
-              </a:rPr>
-              <a:t>Illustrative, Gradient Maintained — demo data, not the client's holdings or managers</a:t>
-            </a:r>
-          </a:p>
-        </p:txBody>
-      </p:sp>
-      <p:sp>
-        <p:nvSpPr>
-          <p:cNvPr id="4" name="TextBox 3"/>
-          <p:cNvSpPr txBox="1"/>
-          <p:nvPr/>
-        </p:nvSpPr>
-        <p:spPr>
-          <a:xfrm>
             <a:off x="640080" y="566928"/>
             <a:ext cx="10058400" cy="530352"/>
           </a:xfrm>
@@ -25548,7 +24625,7 @@
       </p:sp>
       <p:sp>
         <p:nvSpPr>
-          <p:cNvPr id="5" name="Rectangle 4"/>
+          <p:cNvPr id="4" name="Rectangle 3"/>
           <p:cNvSpPr/>
           <p:nvPr/>
         </p:nvSpPr>
@@ -25597,7 +24674,7 @@
       </p:sp>
       <p:sp>
         <p:nvSpPr>
-          <p:cNvPr id="6" name="Rectangle 5"/>
+          <p:cNvPr id="5" name="Rectangle 4"/>
           <p:cNvSpPr/>
           <p:nvPr/>
         </p:nvSpPr>
@@ -25646,7 +24723,7 @@
       </p:sp>
       <p:sp>
         <p:nvSpPr>
-          <p:cNvPr id="7" name="TextBox 6"/>
+          <p:cNvPr id="6" name="TextBox 5"/>
           <p:cNvSpPr txBox="1"/>
           <p:nvPr/>
         </p:nvSpPr>
@@ -25688,7 +24765,7 @@
       </p:sp>
       <p:graphicFrame>
         <p:nvGraphicFramePr>
-          <p:cNvPr id="8" name="Table 7"/>
+          <p:cNvPr id="7" name="Table 6"/>
           <p:cNvGraphicFramePr>
             <a:graphicFrameLocks noGrp="1"/>
           </p:cNvGraphicFramePr>
@@ -25706,14 +24783,10 @@
               </a:tblPr>
               <a:tblGrid>
                 <a:gridCol w="2011680"/>
-                <a:gridCol w="1112139"/>
-                <a:gridCol w="1112139"/>
-                <a:gridCol w="1112139"/>
-                <a:gridCol w="1112139"/>
-                <a:gridCol w="1112139"/>
-                <a:gridCol w="1112139"/>
-                <a:gridCol w="1112139"/>
-                <a:gridCol w="1112139"/>
+                <a:gridCol w="2224278"/>
+                <a:gridCol w="2224278"/>
+                <a:gridCol w="2224278"/>
+                <a:gridCol w="2224278"/>
               </a:tblGrid>
               <a:tr h="521208">
                 <a:tc>
@@ -25787,7 +24860,7 @@
                         <a:rPr>
                           <a:latin typeface="Inter"/>
                         </a:rPr>
-                        <a:t>Basis</a:t>
+                        <a:t>Source</a:t>
                       </a:r>
                     </a:p>
                   </a:txBody>
@@ -25814,7 +24887,7 @@
                         <a:rPr>
                           <a:latin typeface="Inter"/>
                         </a:rPr>
-                        <a:t>Tool / view</a:t>
+                        <a:t>As of</a:t>
                       </a:r>
                     </a:p>
                   </a:txBody>
@@ -25841,115 +24914,7 @@
                         <a:rPr>
                           <a:latin typeface="Inter"/>
                         </a:rPr>
-                        <a:t>Key parameters</a:t>
-                      </a:r>
-                    </a:p>
-                  </a:txBody>
-                  <a:tcPr marL="54864" marR="54864" marT="27432" marB="27432" anchor="ctr">
-                    <a:solidFill>
-                      <a:srgbClr val="0D1117"/>
-                    </a:solidFill>
-                  </a:tcPr>
-                </a:tc>
-                <a:tc>
-                  <a:txBody>
-                    <a:bodyPr/>
-                    <a:lstStyle/>
-                    <a:p>
-                      <a:pPr>
-                        <a:defRPr sz="750" b="1">
-                          <a:solidFill>
-                            <a:srgbClr val="FFFFFF"/>
-                          </a:solidFill>
-                          <a:latin typeface="Inter"/>
-                        </a:defRPr>
-                      </a:pPr>
-                      <a:r>
-                        <a:rPr>
-                          <a:latin typeface="Inter"/>
-                        </a:rPr>
-                        <a:t>As of</a:t>
-                      </a:r>
-                    </a:p>
-                  </a:txBody>
-                  <a:tcPr marL="54864" marR="54864" marT="27432" marB="27432" anchor="ctr">
-                    <a:solidFill>
-                      <a:srgbClr val="0D1117"/>
-                    </a:solidFill>
-                  </a:tcPr>
-                </a:tc>
-                <a:tc>
-                  <a:txBody>
-                    <a:bodyPr/>
-                    <a:lstStyle/>
-                    <a:p>
-                      <a:pPr>
-                        <a:defRPr sz="750" b="1">
-                          <a:solidFill>
-                            <a:srgbClr val="FFFFFF"/>
-                          </a:solidFill>
-                          <a:latin typeface="Inter"/>
-                        </a:defRPr>
-                      </a:pPr>
-                      <a:r>
-                        <a:rPr>
-                          <a:latin typeface="Inter"/>
-                        </a:rPr>
-                        <a:t>Data scope</a:t>
-                      </a:r>
-                    </a:p>
-                  </a:txBody>
-                  <a:tcPr marL="54864" marR="54864" marT="27432" marB="27432" anchor="ctr">
-                    <a:solidFill>
-                      <a:srgbClr val="0D1117"/>
-                    </a:solidFill>
-                  </a:tcPr>
-                </a:tc>
-                <a:tc>
-                  <a:txBody>
-                    <a:bodyPr/>
-                    <a:lstStyle/>
-                    <a:p>
-                      <a:pPr>
-                        <a:defRPr sz="750" b="1">
-                          <a:solidFill>
-                            <a:srgbClr val="FFFFFF"/>
-                          </a:solidFill>
-                          <a:latin typeface="Inter"/>
-                        </a:defRPr>
-                      </a:pPr>
-                      <a:r>
-                        <a:rPr>
-                          <a:latin typeface="Inter"/>
-                        </a:rPr>
-                        <a:t>Validation</a:t>
-                      </a:r>
-                    </a:p>
-                  </a:txBody>
-                  <a:tcPr marL="54864" marR="54864" marT="27432" marB="27432" anchor="ctr">
-                    <a:solidFill>
-                      <a:srgbClr val="0D1117"/>
-                    </a:solidFill>
-                  </a:tcPr>
-                </a:tc>
-                <a:tc>
-                  <a:txBody>
-                    <a:bodyPr/>
-                    <a:lstStyle/>
-                    <a:p>
-                      <a:pPr>
-                        <a:defRPr sz="750" b="1">
-                          <a:solidFill>
-                            <a:srgbClr val="FFFFFF"/>
-                          </a:solidFill>
-                          <a:latin typeface="Inter"/>
-                        </a:defRPr>
-                      </a:pPr>
-                      <a:r>
-                        <a:rPr>
-                          <a:latin typeface="Inter"/>
-                        </a:rPr>
-                        <a:t>Digest</a:t>
+                        <a:t>Check</a:t>
                       </a:r>
                     </a:p>
                   </a:txBody>
@@ -25967,7 +24932,7 @@
                     <a:lstStyle/>
                     <a:p>
                       <a:pPr>
-                        <a:defRPr sz="650" b="1">
+                        <a:defRPr sz="720" b="1">
                           <a:solidFill>
                             <a:srgbClr val="0D1117"/>
                           </a:solidFill>
@@ -25994,7 +24959,7 @@
                     <a:lstStyle/>
                     <a:p>
                       <a:pPr>
-                        <a:defRPr sz="650" b="0">
+                        <a:defRPr sz="720" b="0">
                           <a:solidFill>
                             <a:srgbClr val="0D1117"/>
                           </a:solidFill>
@@ -26021,7 +24986,7 @@
                     <a:lstStyle/>
                     <a:p>
                       <a:pPr>
-                        <a:defRPr sz="650" b="0">
+                        <a:defRPr sz="720" b="0">
                           <a:solidFill>
                             <a:srgbClr val="0D1117"/>
                           </a:solidFill>
@@ -26032,7 +24997,7 @@
                         <a:rPr>
                           <a:latin typeface="Inter"/>
                         </a:rPr>
-                        <a:t>gradient_tool</a:t>
+                        <a:t>list_organizations; get_gradient_capabilities</a:t>
                       </a:r>
                     </a:p>
                   </a:txBody>
@@ -26048,7 +25013,7 @@
                     <a:lstStyle/>
                     <a:p>
                       <a:pPr>
-                        <a:defRPr sz="650" b="0">
+                        <a:defRPr sz="720" b="0">
                           <a:solidFill>
                             <a:srgbClr val="0D1117"/>
                           </a:solidFill>
@@ -26059,7 +25024,7 @@
                         <a:rPr>
                           <a:latin typeface="Inter"/>
                         </a:rPr>
-                        <a:t>list_organizations; get_gradient_capabilities</a:t>
+                        <a:t>2026-06-30</a:t>
                       </a:r>
                     </a:p>
                   </a:txBody>
@@ -26075,132 +25040,24 @@
                     <a:lstStyle/>
                     <a:p>
                       <a:pPr>
-                        <a:defRPr sz="650" b="0">
-                          <a:solidFill>
-                            <a:srgbClr val="0D1117"/>
-                          </a:solidFill>
-                          <a:latin typeface="Inter"/>
-                        </a:defRPr>
-                      </a:pPr>
-                      <a:r>
-                        <a:rPr>
-                          <a:latin typeface="Inter"/>
-                        </a:rPr>
-                        <a:t>organization=test</a:t>
-                      </a:r>
-                    </a:p>
-                  </a:txBody>
-                  <a:tcPr marL="54864" marR="54864" marT="27432" marB="27432" anchor="ctr">
-                    <a:solidFill>
-                      <a:srgbClr val="FFFFFF"/>
-                    </a:solidFill>
-                  </a:tcPr>
-                </a:tc>
-                <a:tc>
-                  <a:txBody>
-                    <a:bodyPr/>
-                    <a:lstStyle/>
-                    <a:p>
-                      <a:pPr>
-                        <a:defRPr sz="650" b="0">
-                          <a:solidFill>
-                            <a:srgbClr val="0D1117"/>
-                          </a:solidFill>
-                          <a:latin typeface="Inter"/>
-                        </a:defRPr>
-                      </a:pPr>
-                      <a:r>
-                        <a:rPr>
-                          <a:latin typeface="Inter"/>
-                        </a:rPr>
-                        <a:t>2026-06-30</a:t>
-                      </a:r>
-                    </a:p>
-                  </a:txBody>
-                  <a:tcPr marL="54864" marR="54864" marT="27432" marB="27432" anchor="ctr">
-                    <a:solidFill>
-                      <a:srgbClr val="FFFFFF"/>
-                    </a:solidFill>
-                  </a:tcPr>
-                </a:tc>
-                <a:tc>
-                  <a:txBody>
-                    <a:bodyPr/>
-                    <a:lstStyle/>
-                    <a:p>
-                      <a:pPr>
-                        <a:defRPr sz="650" b="0">
-                          <a:solidFill>
-                            <a:srgbClr val="0D1117"/>
-                          </a:solidFill>
-                          <a:latin typeface="Inter"/>
-                        </a:defRPr>
-                      </a:pPr>
-                      <a:r>
-                        <a:rPr>
-                          <a:latin typeface="Inter"/>
-                        </a:rPr>
-                        <a:t>Illustrative sample data</a:t>
-                      </a:r>
-                    </a:p>
-                  </a:txBody>
-                  <a:tcPr marL="54864" marR="54864" marT="27432" marB="27432" anchor="ctr">
-                    <a:solidFill>
-                      <a:srgbClr val="FFFFFF"/>
-                    </a:solidFill>
-                  </a:tcPr>
-                </a:tc>
-                <a:tc>
-                  <a:txBody>
-                    <a:bodyPr/>
-                    <a:lstStyle/>
-                    <a:p>
-                      <a:pPr>
-                        <a:defRPr sz="650" b="0">
-                          <a:solidFill>
-                            <a:srgbClr val="0D1117"/>
-                          </a:solidFill>
-                          <a:latin typeface="Inter"/>
-                        </a:defRPr>
-                      </a:pPr>
-                      <a:r>
-                        <a:rPr>
-                          <a:latin typeface="Inter"/>
-                        </a:rPr>
-                        <a:t>passed</a:t>
-                      </a:r>
-                    </a:p>
-                  </a:txBody>
-                  <a:tcPr marL="54864" marR="54864" marT="27432" marB="27432" anchor="ctr">
-                    <a:solidFill>
-                      <a:srgbClr val="FFFFFF"/>
-                    </a:solidFill>
-                  </a:tcPr>
-                </a:tc>
-                <a:tc>
-                  <a:txBody>
-                    <a:bodyPr/>
-                    <a:lstStyle/>
-                    <a:p>
-                      <a:pPr>
-                        <a:defRPr sz="650" b="0">
-                          <a:solidFill>
-                            <a:srgbClr val="0D1117"/>
-                          </a:solidFill>
-                          <a:latin typeface="Inter"/>
-                        </a:defRPr>
-                      </a:pPr>
-                      <a:r>
-                        <a:rPr>
-                          <a:latin typeface="Inter"/>
-                        </a:rPr>
-                        <a:t>sha256:aaaaaaaaaaaaaaaaaaaaaaaaaaaaaaaaaaaaaaaaaaaaaaaaaaaaaaaaaaaaaaaa</a:t>
-                      </a:r>
-                    </a:p>
-                  </a:txBody>
-                  <a:tcPr marL="54864" marR="54864" marT="27432" marB="27432" anchor="ctr">
-                    <a:solidFill>
-                      <a:srgbClr val="FFFFFF"/>
+                        <a:defRPr sz="720" b="1">
+                          <a:solidFill>
+                            <a:srgbClr val="C6F432"/>
+                          </a:solidFill>
+                          <a:latin typeface="Inter"/>
+                        </a:defRPr>
+                      </a:pPr>
+                      <a:r>
+                        <a:rPr>
+                          <a:latin typeface="Inter"/>
+                        </a:rPr>
+                        <a:t>● Passed</a:t>
+                      </a:r>
+                    </a:p>
+                  </a:txBody>
+                  <a:tcPr marL="54864" marR="54864" marT="27432" marB="27432" anchor="ctr">
+                    <a:solidFill>
+                      <a:srgbClr val="F5F7F9"/>
                     </a:solidFill>
                   </a:tcPr>
                 </a:tc>
@@ -26212,7 +25069,7 @@
                     <a:lstStyle/>
                     <a:p>
                       <a:pPr>
-                        <a:defRPr sz="650" b="1">
+                        <a:defRPr sz="720" b="1">
                           <a:solidFill>
                             <a:srgbClr val="0D1117"/>
                           </a:solidFill>
@@ -26239,7 +25096,7 @@
                     <a:lstStyle/>
                     <a:p>
                       <a:pPr>
-                        <a:defRPr sz="650" b="0">
+                        <a:defRPr sz="720" b="0">
                           <a:solidFill>
                             <a:srgbClr val="0D1117"/>
                           </a:solidFill>
@@ -26266,7 +25123,7 @@
                     <a:lstStyle/>
                     <a:p>
                       <a:pPr>
-                        <a:defRPr sz="650" b="0">
+                        <a:defRPr sz="720" b="0">
                           <a:solidFill>
                             <a:srgbClr val="0D1117"/>
                           </a:solidFill>
@@ -26277,7 +25134,7 @@
                         <a:rPr>
                           <a:latin typeface="Inter"/>
                         </a:rPr>
-                        <a:t>gradient_tool</a:t>
+                        <a:t>list_portfolios; get_portfolio_structure</a:t>
                       </a:r>
                     </a:p>
                   </a:txBody>
@@ -26293,7 +25150,7 @@
                     <a:lstStyle/>
                     <a:p>
                       <a:pPr>
-                        <a:defRPr sz="650" b="0">
+                        <a:defRPr sz="720" b="0">
                           <a:solidFill>
                             <a:srgbClr val="0D1117"/>
                           </a:solidFill>
@@ -26304,7 +25161,7 @@
                         <a:rPr>
                           <a:latin typeface="Inter"/>
                         </a:rPr>
-                        <a:t>list_portfolios; get_portfolio_structure</a:t>
+                        <a:t>2026-06-30</a:t>
                       </a:r>
                     </a:p>
                   </a:txBody>
@@ -26320,126 +25177,18 @@
                     <a:lstStyle/>
                     <a:p>
                       <a:pPr>
-                        <a:defRPr sz="650" b="0">
-                          <a:solidFill>
-                            <a:srgbClr val="0D1117"/>
-                          </a:solidFill>
-                          <a:latin typeface="Inter"/>
-                        </a:defRPr>
-                      </a:pPr>
-                      <a:r>
-                        <a:rPr>
-                          <a:latin typeface="Inter"/>
-                        </a:rPr>
-                        <a:t>allocation_tree</a:t>
-                      </a:r>
-                    </a:p>
-                  </a:txBody>
-                  <a:tcPr marL="54864" marR="54864" marT="27432" marB="27432" anchor="ctr">
-                    <a:solidFill>
-                      <a:srgbClr val="F5F7F9"/>
-                    </a:solidFill>
-                  </a:tcPr>
-                </a:tc>
-                <a:tc>
-                  <a:txBody>
-                    <a:bodyPr/>
-                    <a:lstStyle/>
-                    <a:p>
-                      <a:pPr>
-                        <a:defRPr sz="650" b="0">
-                          <a:solidFill>
-                            <a:srgbClr val="0D1117"/>
-                          </a:solidFill>
-                          <a:latin typeface="Inter"/>
-                        </a:defRPr>
-                      </a:pPr>
-                      <a:r>
-                        <a:rPr>
-                          <a:latin typeface="Inter"/>
-                        </a:rPr>
-                        <a:t>2026-06-30</a:t>
-                      </a:r>
-                    </a:p>
-                  </a:txBody>
-                  <a:tcPr marL="54864" marR="54864" marT="27432" marB="27432" anchor="ctr">
-                    <a:solidFill>
-                      <a:srgbClr val="F5F7F9"/>
-                    </a:solidFill>
-                  </a:tcPr>
-                </a:tc>
-                <a:tc>
-                  <a:txBody>
-                    <a:bodyPr/>
-                    <a:lstStyle/>
-                    <a:p>
-                      <a:pPr>
-                        <a:defRPr sz="650" b="0">
-                          <a:solidFill>
-                            <a:srgbClr val="0D1117"/>
-                          </a:solidFill>
-                          <a:latin typeface="Inter"/>
-                        </a:defRPr>
-                      </a:pPr>
-                      <a:r>
-                        <a:rPr>
-                          <a:latin typeface="Inter"/>
-                        </a:rPr>
-                        <a:t>Illustrative sample data</a:t>
-                      </a:r>
-                    </a:p>
-                  </a:txBody>
-                  <a:tcPr marL="54864" marR="54864" marT="27432" marB="27432" anchor="ctr">
-                    <a:solidFill>
-                      <a:srgbClr val="F5F7F9"/>
-                    </a:solidFill>
-                  </a:tcPr>
-                </a:tc>
-                <a:tc>
-                  <a:txBody>
-                    <a:bodyPr/>
-                    <a:lstStyle/>
-                    <a:p>
-                      <a:pPr>
-                        <a:defRPr sz="650" b="0">
-                          <a:solidFill>
-                            <a:srgbClr val="0D1117"/>
-                          </a:solidFill>
-                          <a:latin typeface="Inter"/>
-                        </a:defRPr>
-                      </a:pPr>
-                      <a:r>
-                        <a:rPr>
-                          <a:latin typeface="Inter"/>
-                        </a:rPr>
-                        <a:t>passed</a:t>
-                      </a:r>
-                    </a:p>
-                  </a:txBody>
-                  <a:tcPr marL="54864" marR="54864" marT="27432" marB="27432" anchor="ctr">
-                    <a:solidFill>
-                      <a:srgbClr val="F5F7F9"/>
-                    </a:solidFill>
-                  </a:tcPr>
-                </a:tc>
-                <a:tc>
-                  <a:txBody>
-                    <a:bodyPr/>
-                    <a:lstStyle/>
-                    <a:p>
-                      <a:pPr>
-                        <a:defRPr sz="650" b="0">
-                          <a:solidFill>
-                            <a:srgbClr val="0D1117"/>
-                          </a:solidFill>
-                          <a:latin typeface="Inter"/>
-                        </a:defRPr>
-                      </a:pPr>
-                      <a:r>
-                        <a:rPr>
-                          <a:latin typeface="Inter"/>
-                        </a:rPr>
-                        <a:t>sha256:aaaaaaaaaaaaaaaaaaaaaaaaaaaaaaaaaaaaaaaaaaaaaaaaaaaaaaaaaaaaaaaa</a:t>
+                        <a:defRPr sz="720" b="1">
+                          <a:solidFill>
+                            <a:srgbClr val="C6F432"/>
+                          </a:solidFill>
+                          <a:latin typeface="Inter"/>
+                        </a:defRPr>
+                      </a:pPr>
+                      <a:r>
+                        <a:rPr>
+                          <a:latin typeface="Inter"/>
+                        </a:rPr>
+                        <a:t>● Passed</a:t>
                       </a:r>
                     </a:p>
                   </a:txBody>
@@ -26457,7 +25206,7 @@
                     <a:lstStyle/>
                     <a:p>
                       <a:pPr>
-                        <a:defRPr sz="650" b="1">
+                        <a:defRPr sz="720" b="1">
                           <a:solidFill>
                             <a:srgbClr val="0D1117"/>
                           </a:solidFill>
@@ -26484,7 +25233,7 @@
                     <a:lstStyle/>
                     <a:p>
                       <a:pPr>
-                        <a:defRPr sz="650" b="0">
+                        <a:defRPr sz="720" b="0">
                           <a:solidFill>
                             <a:srgbClr val="0D1117"/>
                           </a:solidFill>
@@ -26511,7 +25260,7 @@
                     <a:lstStyle/>
                     <a:p>
                       <a:pPr>
-                        <a:defRPr sz="650" b="0">
+                        <a:defRPr sz="720" b="0">
                           <a:solidFill>
                             <a:srgbClr val="0D1117"/>
                           </a:solidFill>
@@ -26522,7 +25271,7 @@
                         <a:rPr>
                           <a:latin typeface="Inter"/>
                         </a:rPr>
-                        <a:t>gradient_tool</a:t>
+                        <a:t>check_portfolio_policy</a:t>
                       </a:r>
                     </a:p>
                   </a:txBody>
@@ -26538,7 +25287,7 @@
                     <a:lstStyle/>
                     <a:p>
                       <a:pPr>
-                        <a:defRPr sz="650" b="0">
+                        <a:defRPr sz="720" b="0">
                           <a:solidFill>
                             <a:srgbClr val="0D1117"/>
                           </a:solidFill>
@@ -26549,7 +25298,7 @@
                         <a:rPr>
                           <a:latin typeface="Inter"/>
                         </a:rPr>
-                        <a:t>check_portfolio_policy</a:t>
+                        <a:t>2026-06-30</a:t>
                       </a:r>
                     </a:p>
                   </a:txBody>
@@ -26565,132 +25314,24 @@
                     <a:lstStyle/>
                     <a:p>
                       <a:pPr>
-                        <a:defRPr sz="650" b="0">
-                          <a:solidFill>
-                            <a:srgbClr val="0D1117"/>
-                          </a:solidFill>
-                          <a:latin typeface="Inter"/>
-                        </a:defRPr>
-                      </a:pPr>
-                      <a:r>
-                        <a:rPr>
-                          <a:latin typeface="Inter"/>
-                        </a:rPr>
-                        <a:t>portfolio=test</a:t>
-                      </a:r>
-                    </a:p>
-                  </a:txBody>
-                  <a:tcPr marL="54864" marR="54864" marT="27432" marB="27432" anchor="ctr">
-                    <a:solidFill>
-                      <a:srgbClr val="FFFFFF"/>
-                    </a:solidFill>
-                  </a:tcPr>
-                </a:tc>
-                <a:tc>
-                  <a:txBody>
-                    <a:bodyPr/>
-                    <a:lstStyle/>
-                    <a:p>
-                      <a:pPr>
-                        <a:defRPr sz="650" b="0">
-                          <a:solidFill>
-                            <a:srgbClr val="0D1117"/>
-                          </a:solidFill>
-                          <a:latin typeface="Inter"/>
-                        </a:defRPr>
-                      </a:pPr>
-                      <a:r>
-                        <a:rPr>
-                          <a:latin typeface="Inter"/>
-                        </a:rPr>
-                        <a:t>2026-06-30</a:t>
-                      </a:r>
-                    </a:p>
-                  </a:txBody>
-                  <a:tcPr marL="54864" marR="54864" marT="27432" marB="27432" anchor="ctr">
-                    <a:solidFill>
-                      <a:srgbClr val="FFFFFF"/>
-                    </a:solidFill>
-                  </a:tcPr>
-                </a:tc>
-                <a:tc>
-                  <a:txBody>
-                    <a:bodyPr/>
-                    <a:lstStyle/>
-                    <a:p>
-                      <a:pPr>
-                        <a:defRPr sz="650" b="0">
-                          <a:solidFill>
-                            <a:srgbClr val="0D1117"/>
-                          </a:solidFill>
-                          <a:latin typeface="Inter"/>
-                        </a:defRPr>
-                      </a:pPr>
-                      <a:r>
-                        <a:rPr>
-                          <a:latin typeface="Inter"/>
-                        </a:rPr>
-                        <a:t>Illustrative sample data</a:t>
-                      </a:r>
-                    </a:p>
-                  </a:txBody>
-                  <a:tcPr marL="54864" marR="54864" marT="27432" marB="27432" anchor="ctr">
-                    <a:solidFill>
-                      <a:srgbClr val="FFFFFF"/>
-                    </a:solidFill>
-                  </a:tcPr>
-                </a:tc>
-                <a:tc>
-                  <a:txBody>
-                    <a:bodyPr/>
-                    <a:lstStyle/>
-                    <a:p>
-                      <a:pPr>
-                        <a:defRPr sz="650" b="0">
-                          <a:solidFill>
-                            <a:srgbClr val="0D1117"/>
-                          </a:solidFill>
-                          <a:latin typeface="Inter"/>
-                        </a:defRPr>
-                      </a:pPr>
-                      <a:r>
-                        <a:rPr>
-                          <a:latin typeface="Inter"/>
-                        </a:rPr>
-                        <a:t>passed</a:t>
-                      </a:r>
-                    </a:p>
-                  </a:txBody>
-                  <a:tcPr marL="54864" marR="54864" marT="27432" marB="27432" anchor="ctr">
-                    <a:solidFill>
-                      <a:srgbClr val="FFFFFF"/>
-                    </a:solidFill>
-                  </a:tcPr>
-                </a:tc>
-                <a:tc>
-                  <a:txBody>
-                    <a:bodyPr/>
-                    <a:lstStyle/>
-                    <a:p>
-                      <a:pPr>
-                        <a:defRPr sz="650" b="0">
-                          <a:solidFill>
-                            <a:srgbClr val="0D1117"/>
-                          </a:solidFill>
-                          <a:latin typeface="Inter"/>
-                        </a:defRPr>
-                      </a:pPr>
-                      <a:r>
-                        <a:rPr>
-                          <a:latin typeface="Inter"/>
-                        </a:rPr>
-                        <a:t>sha256:aaaaaaaaaaaaaaaaaaaaaaaaaaaaaaaaaaaaaaaaaaaaaaaaaaaaaaaaaaaaaaaa</a:t>
-                      </a:r>
-                    </a:p>
-                  </a:txBody>
-                  <a:tcPr marL="54864" marR="54864" marT="27432" marB="27432" anchor="ctr">
-                    <a:solidFill>
-                      <a:srgbClr val="FFFFFF"/>
+                        <a:defRPr sz="720" b="1">
+                          <a:solidFill>
+                            <a:srgbClr val="C6F432"/>
+                          </a:solidFill>
+                          <a:latin typeface="Inter"/>
+                        </a:defRPr>
+                      </a:pPr>
+                      <a:r>
+                        <a:rPr>
+                          <a:latin typeface="Inter"/>
+                        </a:rPr>
+                        <a:t>● Passed</a:t>
+                      </a:r>
+                    </a:p>
+                  </a:txBody>
+                  <a:tcPr marL="54864" marR="54864" marT="27432" marB="27432" anchor="ctr">
+                    <a:solidFill>
+                      <a:srgbClr val="F5F7F9"/>
                     </a:solidFill>
                   </a:tcPr>
                 </a:tc>
@@ -26702,7 +25343,7 @@
                     <a:lstStyle/>
                     <a:p>
                       <a:pPr>
-                        <a:defRPr sz="650" b="1">
+                        <a:defRPr sz="720" b="1">
                           <a:solidFill>
                             <a:srgbClr val="0D1117"/>
                           </a:solidFill>
@@ -26729,7 +25370,7 @@
                     <a:lstStyle/>
                     <a:p>
                       <a:pPr>
-                        <a:defRPr sz="650" b="0">
+                        <a:defRPr sz="720" b="0">
                           <a:solidFill>
                             <a:srgbClr val="0D1117"/>
                           </a:solidFill>
@@ -26756,7 +25397,7 @@
                     <a:lstStyle/>
                     <a:p>
                       <a:pPr>
-                        <a:defRPr sz="650" b="0">
+                        <a:defRPr sz="720" b="0">
                           <a:solidFill>
                             <a:srgbClr val="0D1117"/>
                           </a:solidFill>
@@ -26767,7 +25408,7 @@
                         <a:rPr>
                           <a:latin typeface="Inter"/>
                         </a:rPr>
-                        <a:t>gradient_tool</a:t>
+                        <a:t>get_portfolio_exposure</a:t>
                       </a:r>
                     </a:p>
                   </a:txBody>
@@ -26783,7 +25424,7 @@
                     <a:lstStyle/>
                     <a:p>
                       <a:pPr>
-                        <a:defRPr sz="650" b="0">
+                        <a:defRPr sz="720" b="0">
                           <a:solidFill>
                             <a:srgbClr val="0D1117"/>
                           </a:solidFill>
@@ -26794,7 +25435,7 @@
                         <a:rPr>
                           <a:latin typeface="Inter"/>
                         </a:rPr>
-                        <a:t>get_portfolio_exposure</a:t>
+                        <a:t>2026-06-30</a:t>
                       </a:r>
                     </a:p>
                   </a:txBody>
@@ -26810,126 +25451,18 @@
                     <a:lstStyle/>
                     <a:p>
                       <a:pPr>
-                        <a:defRPr sz="650" b="0">
-                          <a:solidFill>
-                            <a:srgbClr val="0D1117"/>
-                          </a:solidFill>
-                          <a:latin typeface="Inter"/>
-                        </a:defRPr>
-                      </a:pPr>
-                      <a:r>
-                        <a:rPr>
-                          <a:latin typeface="Inter"/>
-                        </a:rPr>
-                        <a:t>fixed_income</a:t>
-                      </a:r>
-                    </a:p>
-                  </a:txBody>
-                  <a:tcPr marL="54864" marR="54864" marT="27432" marB="27432" anchor="ctr">
-                    <a:solidFill>
-                      <a:srgbClr val="F5F7F9"/>
-                    </a:solidFill>
-                  </a:tcPr>
-                </a:tc>
-                <a:tc>
-                  <a:txBody>
-                    <a:bodyPr/>
-                    <a:lstStyle/>
-                    <a:p>
-                      <a:pPr>
-                        <a:defRPr sz="650" b="0">
-                          <a:solidFill>
-                            <a:srgbClr val="0D1117"/>
-                          </a:solidFill>
-                          <a:latin typeface="Inter"/>
-                        </a:defRPr>
-                      </a:pPr>
-                      <a:r>
-                        <a:rPr>
-                          <a:latin typeface="Inter"/>
-                        </a:rPr>
-                        <a:t>2026-06-30</a:t>
-                      </a:r>
-                    </a:p>
-                  </a:txBody>
-                  <a:tcPr marL="54864" marR="54864" marT="27432" marB="27432" anchor="ctr">
-                    <a:solidFill>
-                      <a:srgbClr val="F5F7F9"/>
-                    </a:solidFill>
-                  </a:tcPr>
-                </a:tc>
-                <a:tc>
-                  <a:txBody>
-                    <a:bodyPr/>
-                    <a:lstStyle/>
-                    <a:p>
-                      <a:pPr>
-                        <a:defRPr sz="650" b="0">
-                          <a:solidFill>
-                            <a:srgbClr val="0D1117"/>
-                          </a:solidFill>
-                          <a:latin typeface="Inter"/>
-                        </a:defRPr>
-                      </a:pPr>
-                      <a:r>
-                        <a:rPr>
-                          <a:latin typeface="Inter"/>
-                        </a:rPr>
-                        <a:t>Illustrative sample data</a:t>
-                      </a:r>
-                    </a:p>
-                  </a:txBody>
-                  <a:tcPr marL="54864" marR="54864" marT="27432" marB="27432" anchor="ctr">
-                    <a:solidFill>
-                      <a:srgbClr val="F5F7F9"/>
-                    </a:solidFill>
-                  </a:tcPr>
-                </a:tc>
-                <a:tc>
-                  <a:txBody>
-                    <a:bodyPr/>
-                    <a:lstStyle/>
-                    <a:p>
-                      <a:pPr>
-                        <a:defRPr sz="650" b="0">
-                          <a:solidFill>
-                            <a:srgbClr val="0D1117"/>
-                          </a:solidFill>
-                          <a:latin typeface="Inter"/>
-                        </a:defRPr>
-                      </a:pPr>
-                      <a:r>
-                        <a:rPr>
-                          <a:latin typeface="Inter"/>
-                        </a:rPr>
-                        <a:t>passed</a:t>
-                      </a:r>
-                    </a:p>
-                  </a:txBody>
-                  <a:tcPr marL="54864" marR="54864" marT="27432" marB="27432" anchor="ctr">
-                    <a:solidFill>
-                      <a:srgbClr val="F5F7F9"/>
-                    </a:solidFill>
-                  </a:tcPr>
-                </a:tc>
-                <a:tc>
-                  <a:txBody>
-                    <a:bodyPr/>
-                    <a:lstStyle/>
-                    <a:p>
-                      <a:pPr>
-                        <a:defRPr sz="650" b="0">
-                          <a:solidFill>
-                            <a:srgbClr val="0D1117"/>
-                          </a:solidFill>
-                          <a:latin typeface="Inter"/>
-                        </a:defRPr>
-                      </a:pPr>
-                      <a:r>
-                        <a:rPr>
-                          <a:latin typeface="Inter"/>
-                        </a:rPr>
-                        <a:t>sha256:aaaaaaaaaaaaaaaaaaaaaaaaaaaaaaaaaaaaaaaaaaaaaaaaaaaaaaaaaaaaaaaa</a:t>
+                        <a:defRPr sz="720" b="1">
+                          <a:solidFill>
+                            <a:srgbClr val="C6F432"/>
+                          </a:solidFill>
+                          <a:latin typeface="Inter"/>
+                        </a:defRPr>
+                      </a:pPr>
+                      <a:r>
+                        <a:rPr>
+                          <a:latin typeface="Inter"/>
+                        </a:rPr>
+                        <a:t>● Passed</a:t>
                       </a:r>
                     </a:p>
                   </a:txBody>
@@ -26947,7 +25480,7 @@
                     <a:lstStyle/>
                     <a:p>
                       <a:pPr>
-                        <a:defRPr sz="650" b="1">
+                        <a:defRPr sz="720" b="1">
                           <a:solidFill>
                             <a:srgbClr val="0D1117"/>
                           </a:solidFill>
@@ -26974,7 +25507,7 @@
                     <a:lstStyle/>
                     <a:p>
                       <a:pPr>
-                        <a:defRPr sz="650" b="0">
+                        <a:defRPr sz="720" b="0">
                           <a:solidFill>
                             <a:srgbClr val="0D1117"/>
                           </a:solidFill>
@@ -27001,7 +25534,7 @@
                     <a:lstStyle/>
                     <a:p>
                       <a:pPr>
-                        <a:defRPr sz="650" b="0">
+                        <a:defRPr sz="720" b="0">
                           <a:solidFill>
                             <a:srgbClr val="0D1117"/>
                           </a:solidFill>
@@ -27012,7 +25545,7 @@
                         <a:rPr>
                           <a:latin typeface="Inter"/>
                         </a:rPr>
-                        <a:t>gradient_tool</a:t>
+                        <a:t>get_portfolio_historical_returns; get_portfolio_attribution</a:t>
                       </a:r>
                     </a:p>
                   </a:txBody>
@@ -27028,7 +25561,7 @@
                     <a:lstStyle/>
                     <a:p>
                       <a:pPr>
-                        <a:defRPr sz="650" b="0">
+                        <a:defRPr sz="720" b="0">
                           <a:solidFill>
                             <a:srgbClr val="0D1117"/>
                           </a:solidFill>
@@ -27039,7 +25572,7 @@
                         <a:rPr>
                           <a:latin typeface="Inter"/>
                         </a:rPr>
-                        <a:t>get_portfolio_historical_returns; get_portfolio_attribution</a:t>
+                        <a:t>2026-06-30</a:t>
                       </a:r>
                     </a:p>
                   </a:txBody>
@@ -27055,132 +25588,24 @@
                     <a:lstStyle/>
                     <a:p>
                       <a:pPr>
-                        <a:defRPr sz="650" b="0">
-                          <a:solidFill>
-                            <a:srgbClr val="0D1117"/>
-                          </a:solidFill>
-                          <a:latin typeface="Inter"/>
-                        </a:defRPr>
-                      </a:pPr>
-                      <a:r>
-                        <a:rPr>
-                          <a:latin typeface="Inter"/>
-                        </a:rPr>
-                        <a:t>all sections</a:t>
-                      </a:r>
-                    </a:p>
-                  </a:txBody>
-                  <a:tcPr marL="54864" marR="54864" marT="27432" marB="27432" anchor="ctr">
-                    <a:solidFill>
-                      <a:srgbClr val="FFFFFF"/>
-                    </a:solidFill>
-                  </a:tcPr>
-                </a:tc>
-                <a:tc>
-                  <a:txBody>
-                    <a:bodyPr/>
-                    <a:lstStyle/>
-                    <a:p>
-                      <a:pPr>
-                        <a:defRPr sz="650" b="0">
-                          <a:solidFill>
-                            <a:srgbClr val="0D1117"/>
-                          </a:solidFill>
-                          <a:latin typeface="Inter"/>
-                        </a:defRPr>
-                      </a:pPr>
-                      <a:r>
-                        <a:rPr>
-                          <a:latin typeface="Inter"/>
-                        </a:rPr>
-                        <a:t>2026-06-30</a:t>
-                      </a:r>
-                    </a:p>
-                  </a:txBody>
-                  <a:tcPr marL="54864" marR="54864" marT="27432" marB="27432" anchor="ctr">
-                    <a:solidFill>
-                      <a:srgbClr val="FFFFFF"/>
-                    </a:solidFill>
-                  </a:tcPr>
-                </a:tc>
-                <a:tc>
-                  <a:txBody>
-                    <a:bodyPr/>
-                    <a:lstStyle/>
-                    <a:p>
-                      <a:pPr>
-                        <a:defRPr sz="650" b="0">
-                          <a:solidFill>
-                            <a:srgbClr val="0D1117"/>
-                          </a:solidFill>
-                          <a:latin typeface="Inter"/>
-                        </a:defRPr>
-                      </a:pPr>
-                      <a:r>
-                        <a:rPr>
-                          <a:latin typeface="Inter"/>
-                        </a:rPr>
-                        <a:t>Illustrative sample data</a:t>
-                      </a:r>
-                    </a:p>
-                  </a:txBody>
-                  <a:tcPr marL="54864" marR="54864" marT="27432" marB="27432" anchor="ctr">
-                    <a:solidFill>
-                      <a:srgbClr val="FFFFFF"/>
-                    </a:solidFill>
-                  </a:tcPr>
-                </a:tc>
-                <a:tc>
-                  <a:txBody>
-                    <a:bodyPr/>
-                    <a:lstStyle/>
-                    <a:p>
-                      <a:pPr>
-                        <a:defRPr sz="650" b="0">
-                          <a:solidFill>
-                            <a:srgbClr val="0D1117"/>
-                          </a:solidFill>
-                          <a:latin typeface="Inter"/>
-                        </a:defRPr>
-                      </a:pPr>
-                      <a:r>
-                        <a:rPr>
-                          <a:latin typeface="Inter"/>
-                        </a:rPr>
-                        <a:t>passed</a:t>
-                      </a:r>
-                    </a:p>
-                  </a:txBody>
-                  <a:tcPr marL="54864" marR="54864" marT="27432" marB="27432" anchor="ctr">
-                    <a:solidFill>
-                      <a:srgbClr val="FFFFFF"/>
-                    </a:solidFill>
-                  </a:tcPr>
-                </a:tc>
-                <a:tc>
-                  <a:txBody>
-                    <a:bodyPr/>
-                    <a:lstStyle/>
-                    <a:p>
-                      <a:pPr>
-                        <a:defRPr sz="650" b="0">
-                          <a:solidFill>
-                            <a:srgbClr val="0D1117"/>
-                          </a:solidFill>
-                          <a:latin typeface="Inter"/>
-                        </a:defRPr>
-                      </a:pPr>
-                      <a:r>
-                        <a:rPr>
-                          <a:latin typeface="Inter"/>
-                        </a:rPr>
-                        <a:t>sha256:aaaaaaaaaaaaaaaaaaaaaaaaaaaaaaaaaaaaaaaaaaaaaaaaaaaaaaaaaaaaaaaa</a:t>
-                      </a:r>
-                    </a:p>
-                  </a:txBody>
-                  <a:tcPr marL="54864" marR="54864" marT="27432" marB="27432" anchor="ctr">
-                    <a:solidFill>
-                      <a:srgbClr val="FFFFFF"/>
+                        <a:defRPr sz="720" b="1">
+                          <a:solidFill>
+                            <a:srgbClr val="C6F432"/>
+                          </a:solidFill>
+                          <a:latin typeface="Inter"/>
+                        </a:defRPr>
+                      </a:pPr>
+                      <a:r>
+                        <a:rPr>
+                          <a:latin typeface="Inter"/>
+                        </a:rPr>
+                        <a:t>● Passed</a:t>
+                      </a:r>
+                    </a:p>
+                  </a:txBody>
+                  <a:tcPr marL="54864" marR="54864" marT="27432" marB="27432" anchor="ctr">
+                    <a:solidFill>
+                      <a:srgbClr val="F5F7F9"/>
                     </a:solidFill>
                   </a:tcPr>
                 </a:tc>
@@ -27192,7 +25617,7 @@
                     <a:lstStyle/>
                     <a:p>
                       <a:pPr>
-                        <a:defRPr sz="650" b="1">
+                        <a:defRPr sz="720" b="1">
                           <a:solidFill>
                             <a:srgbClr val="0D1117"/>
                           </a:solidFill>
@@ -27219,7 +25644,7 @@
                     <a:lstStyle/>
                     <a:p>
                       <a:pPr>
-                        <a:defRPr sz="650" b="0">
+                        <a:defRPr sz="720" b="0">
                           <a:solidFill>
                             <a:srgbClr val="0D1117"/>
                           </a:solidFill>
@@ -27246,7 +25671,7 @@
                     <a:lstStyle/>
                     <a:p>
                       <a:pPr>
-                        <a:defRPr sz="650" b="0">
+                        <a:defRPr sz="720" b="0">
                           <a:solidFill>
                             <a:srgbClr val="0D1117"/>
                           </a:solidFill>
@@ -27257,7 +25682,7 @@
                         <a:rPr>
                           <a:latin typeface="Inter"/>
                         </a:rPr>
-                        <a:t>gradient_tool</a:t>
+                        <a:t>get_macro_conditions</a:t>
                       </a:r>
                     </a:p>
                   </a:txBody>
@@ -27273,7 +25698,7 @@
                     <a:lstStyle/>
                     <a:p>
                       <a:pPr>
-                        <a:defRPr sz="650" b="0">
+                        <a:defRPr sz="720" b="0">
                           <a:solidFill>
                             <a:srgbClr val="0D1117"/>
                           </a:solidFill>
@@ -27284,7 +25709,7 @@
                         <a:rPr>
                           <a:latin typeface="Inter"/>
                         </a:rPr>
-                        <a:t>get_macro_conditions</a:t>
+                        <a:t>2026-06-30</a:t>
                       </a:r>
                     </a:p>
                   </a:txBody>
@@ -27300,126 +25725,18 @@
                     <a:lstStyle/>
                     <a:p>
                       <a:pPr>
-                        <a:defRPr sz="650" b="0">
-                          <a:solidFill>
-                            <a:srgbClr val="0D1117"/>
-                          </a:solidFill>
-                          <a:latin typeface="Inter"/>
-                        </a:defRPr>
-                      </a:pPr>
-                      <a:r>
-                        <a:rPr>
-                          <a:latin typeface="Inter"/>
-                        </a:rPr>
-                        <a:t>credit_spreads</a:t>
-                      </a:r>
-                    </a:p>
-                  </a:txBody>
-                  <a:tcPr marL="54864" marR="54864" marT="27432" marB="27432" anchor="ctr">
-                    <a:solidFill>
-                      <a:srgbClr val="F5F7F9"/>
-                    </a:solidFill>
-                  </a:tcPr>
-                </a:tc>
-                <a:tc>
-                  <a:txBody>
-                    <a:bodyPr/>
-                    <a:lstStyle/>
-                    <a:p>
-                      <a:pPr>
-                        <a:defRPr sz="650" b="0">
-                          <a:solidFill>
-                            <a:srgbClr val="0D1117"/>
-                          </a:solidFill>
-                          <a:latin typeface="Inter"/>
-                        </a:defRPr>
-                      </a:pPr>
-                      <a:r>
-                        <a:rPr>
-                          <a:latin typeface="Inter"/>
-                        </a:rPr>
-                        <a:t>2026-06-30</a:t>
-                      </a:r>
-                    </a:p>
-                  </a:txBody>
-                  <a:tcPr marL="54864" marR="54864" marT="27432" marB="27432" anchor="ctr">
-                    <a:solidFill>
-                      <a:srgbClr val="F5F7F9"/>
-                    </a:solidFill>
-                  </a:tcPr>
-                </a:tc>
-                <a:tc>
-                  <a:txBody>
-                    <a:bodyPr/>
-                    <a:lstStyle/>
-                    <a:p>
-                      <a:pPr>
-                        <a:defRPr sz="650" b="0">
-                          <a:solidFill>
-                            <a:srgbClr val="0D1117"/>
-                          </a:solidFill>
-                          <a:latin typeface="Inter"/>
-                        </a:defRPr>
-                      </a:pPr>
-                      <a:r>
-                        <a:rPr>
-                          <a:latin typeface="Inter"/>
-                        </a:rPr>
-                        <a:t>Illustrative sample data</a:t>
-                      </a:r>
-                    </a:p>
-                  </a:txBody>
-                  <a:tcPr marL="54864" marR="54864" marT="27432" marB="27432" anchor="ctr">
-                    <a:solidFill>
-                      <a:srgbClr val="F5F7F9"/>
-                    </a:solidFill>
-                  </a:tcPr>
-                </a:tc>
-                <a:tc>
-                  <a:txBody>
-                    <a:bodyPr/>
-                    <a:lstStyle/>
-                    <a:p>
-                      <a:pPr>
-                        <a:defRPr sz="650" b="0">
-                          <a:solidFill>
-                            <a:srgbClr val="0D1117"/>
-                          </a:solidFill>
-                          <a:latin typeface="Inter"/>
-                        </a:defRPr>
-                      </a:pPr>
-                      <a:r>
-                        <a:rPr>
-                          <a:latin typeface="Inter"/>
-                        </a:rPr>
-                        <a:t>passed</a:t>
-                      </a:r>
-                    </a:p>
-                  </a:txBody>
-                  <a:tcPr marL="54864" marR="54864" marT="27432" marB="27432" anchor="ctr">
-                    <a:solidFill>
-                      <a:srgbClr val="F5F7F9"/>
-                    </a:solidFill>
-                  </a:tcPr>
-                </a:tc>
-                <a:tc>
-                  <a:txBody>
-                    <a:bodyPr/>
-                    <a:lstStyle/>
-                    <a:p>
-                      <a:pPr>
-                        <a:defRPr sz="650" b="0">
-                          <a:solidFill>
-                            <a:srgbClr val="0D1117"/>
-                          </a:solidFill>
-                          <a:latin typeface="Inter"/>
-                        </a:defRPr>
-                      </a:pPr>
-                      <a:r>
-                        <a:rPr>
-                          <a:latin typeface="Inter"/>
-                        </a:rPr>
-                        <a:t>sha256:aaaaaaaaaaaaaaaaaaaaaaaaaaaaaaaaaaaaaaaaaaaaaaaaaaaaaaaaaaaaaaaa</a:t>
+                        <a:defRPr sz="720" b="1">
+                          <a:solidFill>
+                            <a:srgbClr val="C6F432"/>
+                          </a:solidFill>
+                          <a:latin typeface="Inter"/>
+                        </a:defRPr>
+                      </a:pPr>
+                      <a:r>
+                        <a:rPr>
+                          <a:latin typeface="Inter"/>
+                        </a:rPr>
+                        <a:t>● Passed</a:t>
                       </a:r>
                     </a:p>
                   </a:txBody>
@@ -27437,7 +25754,7 @@
                     <a:lstStyle/>
                     <a:p>
                       <a:pPr>
-                        <a:defRPr sz="650" b="1">
+                        <a:defRPr sz="720" b="1">
                           <a:solidFill>
                             <a:srgbClr val="0D1117"/>
                           </a:solidFill>
@@ -27464,7 +25781,7 @@
                     <a:lstStyle/>
                     <a:p>
                       <a:pPr>
-                        <a:defRPr sz="650" b="0">
+                        <a:defRPr sz="720" b="0">
                           <a:solidFill>
                             <a:srgbClr val="0D1117"/>
                           </a:solidFill>
@@ -27491,7 +25808,7 @@
                     <a:lstStyle/>
                     <a:p>
                       <a:pPr>
-                        <a:defRPr sz="650" b="0">
+                        <a:defRPr sz="720" b="0">
                           <a:solidFill>
                             <a:srgbClr val="0D1117"/>
                           </a:solidFill>
@@ -27502,7 +25819,7 @@
                         <a:rPr>
                           <a:latin typeface="Inter"/>
                         </a:rPr>
-                        <a:t>gradient_tool</a:t>
+                        <a:t>get_capital_market_assumptions</a:t>
                       </a:r>
                     </a:p>
                   </a:txBody>
@@ -27518,7 +25835,7 @@
                     <a:lstStyle/>
                     <a:p>
                       <a:pPr>
-                        <a:defRPr sz="650" b="0">
+                        <a:defRPr sz="720" b="0">
                           <a:solidFill>
                             <a:srgbClr val="0D1117"/>
                           </a:solidFill>
@@ -27529,7 +25846,7 @@
                         <a:rPr>
                           <a:latin typeface="Inter"/>
                         </a:rPr>
-                        <a:t>get_capital_market_assumptions</a:t>
+                        <a:t>2026-06-15</a:t>
                       </a:r>
                     </a:p>
                   </a:txBody>
@@ -27545,132 +25862,24 @@
                     <a:lstStyle/>
                     <a:p>
                       <a:pPr>
-                        <a:defRPr sz="650" b="0">
-                          <a:solidFill>
-                            <a:srgbClr val="0D1117"/>
-                          </a:solidFill>
-                          <a:latin typeface="Inter"/>
-                        </a:defRPr>
-                      </a:pPr>
-                      <a:r>
-                        <a:rPr>
-                          <a:latin typeface="Inter"/>
-                        </a:rPr>
-                        <a:t>baseline</a:t>
-                      </a:r>
-                    </a:p>
-                  </a:txBody>
-                  <a:tcPr marL="54864" marR="54864" marT="27432" marB="27432" anchor="ctr">
-                    <a:solidFill>
-                      <a:srgbClr val="FFFFFF"/>
-                    </a:solidFill>
-                  </a:tcPr>
-                </a:tc>
-                <a:tc>
-                  <a:txBody>
-                    <a:bodyPr/>
-                    <a:lstStyle/>
-                    <a:p>
-                      <a:pPr>
-                        <a:defRPr sz="650" b="0">
-                          <a:solidFill>
-                            <a:srgbClr val="0D1117"/>
-                          </a:solidFill>
-                          <a:latin typeface="Inter"/>
-                        </a:defRPr>
-                      </a:pPr>
-                      <a:r>
-                        <a:rPr>
-                          <a:latin typeface="Inter"/>
-                        </a:rPr>
-                        <a:t>2026-06-15</a:t>
-                      </a:r>
-                    </a:p>
-                  </a:txBody>
-                  <a:tcPr marL="54864" marR="54864" marT="27432" marB="27432" anchor="ctr">
-                    <a:solidFill>
-                      <a:srgbClr val="FFFFFF"/>
-                    </a:solidFill>
-                  </a:tcPr>
-                </a:tc>
-                <a:tc>
-                  <a:txBody>
-                    <a:bodyPr/>
-                    <a:lstStyle/>
-                    <a:p>
-                      <a:pPr>
-                        <a:defRPr sz="650" b="0">
-                          <a:solidFill>
-                            <a:srgbClr val="0D1117"/>
-                          </a:solidFill>
-                          <a:latin typeface="Inter"/>
-                        </a:defRPr>
-                      </a:pPr>
-                      <a:r>
-                        <a:rPr>
-                          <a:latin typeface="Inter"/>
-                        </a:rPr>
-                        <a:t>Illustrative sample data</a:t>
-                      </a:r>
-                    </a:p>
-                  </a:txBody>
-                  <a:tcPr marL="54864" marR="54864" marT="27432" marB="27432" anchor="ctr">
-                    <a:solidFill>
-                      <a:srgbClr val="FFFFFF"/>
-                    </a:solidFill>
-                  </a:tcPr>
-                </a:tc>
-                <a:tc>
-                  <a:txBody>
-                    <a:bodyPr/>
-                    <a:lstStyle/>
-                    <a:p>
-                      <a:pPr>
-                        <a:defRPr sz="650" b="0">
-                          <a:solidFill>
-                            <a:srgbClr val="0D1117"/>
-                          </a:solidFill>
-                          <a:latin typeface="Inter"/>
-                        </a:defRPr>
-                      </a:pPr>
-                      <a:r>
-                        <a:rPr>
-                          <a:latin typeface="Inter"/>
-                        </a:rPr>
-                        <a:t>passed</a:t>
-                      </a:r>
-                    </a:p>
-                  </a:txBody>
-                  <a:tcPr marL="54864" marR="54864" marT="27432" marB="27432" anchor="ctr">
-                    <a:solidFill>
-                      <a:srgbClr val="FFFFFF"/>
-                    </a:solidFill>
-                  </a:tcPr>
-                </a:tc>
-                <a:tc>
-                  <a:txBody>
-                    <a:bodyPr/>
-                    <a:lstStyle/>
-                    <a:p>
-                      <a:pPr>
-                        <a:defRPr sz="650" b="0">
-                          <a:solidFill>
-                            <a:srgbClr val="0D1117"/>
-                          </a:solidFill>
-                          <a:latin typeface="Inter"/>
-                        </a:defRPr>
-                      </a:pPr>
-                      <a:r>
-                        <a:rPr>
-                          <a:latin typeface="Inter"/>
-                        </a:rPr>
-                        <a:t>sha256:aaaaaaaaaaaaaaaaaaaaaaaaaaaaaaaaaaaaaaaaaaaaaaaaaaaaaaaaaaaaaaaa</a:t>
-                      </a:r>
-                    </a:p>
-                  </a:txBody>
-                  <a:tcPr marL="54864" marR="54864" marT="27432" marB="27432" anchor="ctr">
-                    <a:solidFill>
-                      <a:srgbClr val="FFFFFF"/>
+                        <a:defRPr sz="720" b="1">
+                          <a:solidFill>
+                            <a:srgbClr val="C6F432"/>
+                          </a:solidFill>
+                          <a:latin typeface="Inter"/>
+                        </a:defRPr>
+                      </a:pPr>
+                      <a:r>
+                        <a:rPr>
+                          <a:latin typeface="Inter"/>
+                        </a:rPr>
+                        <a:t>● Passed</a:t>
+                      </a:r>
+                    </a:p>
+                  </a:txBody>
+                  <a:tcPr marL="54864" marR="54864" marT="27432" marB="27432" anchor="ctr">
+                    <a:solidFill>
+                      <a:srgbClr val="F5F7F9"/>
                     </a:solidFill>
                   </a:tcPr>
                 </a:tc>
@@ -27682,7 +25891,7 @@
                     <a:lstStyle/>
                     <a:p>
                       <a:pPr>
-                        <a:defRPr sz="650" b="1">
+                        <a:defRPr sz="720" b="1">
                           <a:solidFill>
                             <a:srgbClr val="0D1117"/>
                           </a:solidFill>
@@ -27709,7 +25918,7 @@
                     <a:lstStyle/>
                     <a:p>
                       <a:pPr>
-                        <a:defRPr sz="650" b="0">
+                        <a:defRPr sz="720" b="0">
                           <a:solidFill>
                             <a:srgbClr val="0D1117"/>
                           </a:solidFill>
@@ -27736,7 +25945,7 @@
                     <a:lstStyle/>
                     <a:p>
                       <a:pPr>
-                        <a:defRPr sz="650" b="0">
+                        <a:defRPr sz="720" b="0">
                           <a:solidFill>
                             <a:srgbClr val="0D1117"/>
                           </a:solidFill>
@@ -27747,7 +25956,7 @@
                         <a:rPr>
                           <a:latin typeface="Inter"/>
                         </a:rPr>
-                        <a:t>gradient_tool</a:t>
+                        <a:t>get_gradient_capabilities</a:t>
                       </a:r>
                     </a:p>
                   </a:txBody>
@@ -27763,7 +25972,7 @@
                     <a:lstStyle/>
                     <a:p>
                       <a:pPr>
-                        <a:defRPr sz="650" b="0">
+                        <a:defRPr sz="720" b="0">
                           <a:solidFill>
                             <a:srgbClr val="0D1117"/>
                           </a:solidFill>
@@ -27774,7 +25983,7 @@
                         <a:rPr>
                           <a:latin typeface="Inter"/>
                         </a:rPr>
-                        <a:t>get_gradient_capabilities</a:t>
+                        <a:t>2026-06-30</a:t>
                       </a:r>
                     </a:p>
                   </a:txBody>
@@ -27790,126 +25999,18 @@
                     <a:lstStyle/>
                     <a:p>
                       <a:pPr>
-                        <a:defRPr sz="650" b="0">
-                          <a:solidFill>
-                            <a:srgbClr val="0D1117"/>
-                          </a:solidFill>
-                          <a:latin typeface="Inter"/>
-                        </a:defRPr>
-                      </a:pPr>
-                      <a:r>
-                        <a:rPr>
-                          <a:latin typeface="Inter"/>
-                        </a:rPr>
-                        <a:t>illustrative</a:t>
-                      </a:r>
-                    </a:p>
-                  </a:txBody>
-                  <a:tcPr marL="54864" marR="54864" marT="27432" marB="27432" anchor="ctr">
-                    <a:solidFill>
-                      <a:srgbClr val="F5F7F9"/>
-                    </a:solidFill>
-                  </a:tcPr>
-                </a:tc>
-                <a:tc>
-                  <a:txBody>
-                    <a:bodyPr/>
-                    <a:lstStyle/>
-                    <a:p>
-                      <a:pPr>
-                        <a:defRPr sz="650" b="0">
-                          <a:solidFill>
-                            <a:srgbClr val="0D1117"/>
-                          </a:solidFill>
-                          <a:latin typeface="Inter"/>
-                        </a:defRPr>
-                      </a:pPr>
-                      <a:r>
-                        <a:rPr>
-                          <a:latin typeface="Inter"/>
-                        </a:rPr>
-                        <a:t>2026-06-30</a:t>
-                      </a:r>
-                    </a:p>
-                  </a:txBody>
-                  <a:tcPr marL="54864" marR="54864" marT="27432" marB="27432" anchor="ctr">
-                    <a:solidFill>
-                      <a:srgbClr val="F5F7F9"/>
-                    </a:solidFill>
-                  </a:tcPr>
-                </a:tc>
-                <a:tc>
-                  <a:txBody>
-                    <a:bodyPr/>
-                    <a:lstStyle/>
-                    <a:p>
-                      <a:pPr>
-                        <a:defRPr sz="650" b="0">
-                          <a:solidFill>
-                            <a:srgbClr val="0D1117"/>
-                          </a:solidFill>
-                          <a:latin typeface="Inter"/>
-                        </a:defRPr>
-                      </a:pPr>
-                      <a:r>
-                        <a:rPr>
-                          <a:latin typeface="Inter"/>
-                        </a:rPr>
-                        <a:t>Illustrative sample data</a:t>
-                      </a:r>
-                    </a:p>
-                  </a:txBody>
-                  <a:tcPr marL="54864" marR="54864" marT="27432" marB="27432" anchor="ctr">
-                    <a:solidFill>
-                      <a:srgbClr val="F5F7F9"/>
-                    </a:solidFill>
-                  </a:tcPr>
-                </a:tc>
-                <a:tc>
-                  <a:txBody>
-                    <a:bodyPr/>
-                    <a:lstStyle/>
-                    <a:p>
-                      <a:pPr>
-                        <a:defRPr sz="650" b="0">
-                          <a:solidFill>
-                            <a:srgbClr val="0D1117"/>
-                          </a:solidFill>
-                          <a:latin typeface="Inter"/>
-                        </a:defRPr>
-                      </a:pPr>
-                      <a:r>
-                        <a:rPr>
-                          <a:latin typeface="Inter"/>
-                        </a:rPr>
-                        <a:t>advisory</a:t>
-                      </a:r>
-                    </a:p>
-                  </a:txBody>
-                  <a:tcPr marL="54864" marR="54864" marT="27432" marB="27432" anchor="ctr">
-                    <a:solidFill>
-                      <a:srgbClr val="F5F7F9"/>
-                    </a:solidFill>
-                  </a:tcPr>
-                </a:tc>
-                <a:tc>
-                  <a:txBody>
-                    <a:bodyPr/>
-                    <a:lstStyle/>
-                    <a:p>
-                      <a:pPr>
-                        <a:defRPr sz="650" b="0">
-                          <a:solidFill>
-                            <a:srgbClr val="0D1117"/>
-                          </a:solidFill>
-                          <a:latin typeface="Inter"/>
-                        </a:defRPr>
-                      </a:pPr>
-                      <a:r>
-                        <a:rPr>
-                          <a:latin typeface="Inter"/>
-                        </a:rPr>
-                        <a:t>sha256:aaaaaaaaaaaaaaaaaaaaaaaaaaaaaaaaaaaaaaaaaaaaaaaaaaaaaaaaaaaaaaaa</a:t>
+                        <a:defRPr sz="720" b="1">
+                          <a:solidFill>
+                            <a:srgbClr val="F2A93B"/>
+                          </a:solidFill>
+                          <a:latin typeface="Inter"/>
+                        </a:defRPr>
+                      </a:pPr>
+                      <a:r>
+                        <a:rPr>
+                          <a:latin typeface="Inter"/>
+                        </a:rPr>
+                        <a:t>● Advisory</a:t>
                       </a:r>
                     </a:p>
                   </a:txBody>
@@ -27926,7 +26027,7 @@
       </p:graphicFrame>
       <p:sp>
         <p:nvSpPr>
-          <p:cNvPr id="9" name="TextBox 8"/>
+          <p:cNvPr id="8" name="TextBox 7"/>
           <p:cNvSpPr txBox="1"/>
           <p:nvPr/>
         </p:nvSpPr>
@@ -27968,7 +26069,7 @@
       </p:sp>
       <p:sp>
         <p:nvSpPr>
-          <p:cNvPr id="10" name="Rectangle 9"/>
+          <p:cNvPr id="9" name="Rectangle 8"/>
           <p:cNvSpPr/>
           <p:nvPr/>
         </p:nvSpPr>
@@ -28017,7 +26118,7 @@
       </p:sp>
       <p:sp>
         <p:nvSpPr>
-          <p:cNvPr id="11" name="TextBox 10"/>
+          <p:cNvPr id="10" name="TextBox 9"/>
           <p:cNvSpPr txBox="1"/>
           <p:nvPr/>
         </p:nvSpPr>
@@ -28059,7 +26160,7 @@
       </p:sp>
       <p:sp>
         <p:nvSpPr>
-          <p:cNvPr id="12" name="TextBox 11"/>
+          <p:cNvPr id="11" name="TextBox 10"/>
           <p:cNvSpPr txBox="1"/>
           <p:nvPr/>
         </p:nvSpPr>
@@ -28101,7 +26202,7 @@
       </p:sp>
       <p:sp>
         <p:nvSpPr>
-          <p:cNvPr id="13" name="TextBox 12"/>
+          <p:cNvPr id="12" name="TextBox 11"/>
           <p:cNvSpPr txBox="1"/>
           <p:nvPr/>
         </p:nvSpPr>
@@ -28216,48 +26317,6 @@
         </p:nvSpPr>
         <p:spPr>
           <a:xfrm>
-            <a:off x="5897880" y="310896"/>
-            <a:ext cx="4800600" cy="256032"/>
-          </a:xfrm>
-          <a:prstGeom prst="rect">
-            <a:avLst/>
-          </a:prstGeom>
-          <a:noFill/>
-        </p:spPr>
-        <p:txBody>
-          <a:bodyPr wrap="none" lIns="9144" rIns="9144" tIns="9144" bIns="9144" anchor="t">
-            <a:spAutoFit/>
-          </a:bodyPr>
-          <a:lstStyle/>
-          <a:p>
-            <a:pPr algn="r">
-              <a:spcAft>
-                <a:spcPts val="0"/>
-              </a:spcAft>
-              <a:defRPr sz="680" b="1">
-                <a:solidFill>
-                  <a:srgbClr val="4F6B00"/>
-                </a:solidFill>
-                <a:latin typeface="Inter"/>
-              </a:defRPr>
-            </a:pPr>
-            <a:r>
-              <a:rPr>
-                <a:latin typeface="Inter"/>
-              </a:rPr>
-              <a:t>Illustrative, Gradient Maintained — demo data, not the client's holdings or managers</a:t>
-            </a:r>
-          </a:p>
-        </p:txBody>
-      </p:sp>
-      <p:sp>
-        <p:nvSpPr>
-          <p:cNvPr id="4" name="TextBox 3"/>
-          <p:cNvSpPr txBox="1"/>
-          <p:nvPr/>
-        </p:nvSpPr>
-        <p:spPr>
-          <a:xfrm>
             <a:off x="640080" y="566928"/>
             <a:ext cx="10058400" cy="530352"/>
           </a:xfrm>
@@ -28287,14 +26346,14 @@
               <a:rPr>
                 <a:latin typeface="Inter"/>
               </a:rPr>
-              <a:t>Appendix — Server Metric Methods and Disclosures</a:t>
+              <a:t>Appendix — Sources and methods — continued</a:t>
             </a:r>
           </a:p>
         </p:txBody>
       </p:sp>
       <p:sp>
         <p:nvSpPr>
-          <p:cNvPr id="5" name="Rectangle 4"/>
+          <p:cNvPr id="4" name="Rectangle 3"/>
           <p:cNvSpPr/>
           <p:nvPr/>
         </p:nvSpPr>
@@ -28343,7 +26402,7 @@
       </p:sp>
       <p:sp>
         <p:nvSpPr>
-          <p:cNvPr id="6" name="Rectangle 5"/>
+          <p:cNvPr id="5" name="Rectangle 4"/>
           <p:cNvSpPr/>
           <p:nvPr/>
         </p:nvSpPr>
@@ -28392,7 +26451,7 @@
       </p:sp>
       <p:sp>
         <p:nvSpPr>
-          <p:cNvPr id="7" name="TextBox 6"/>
+          <p:cNvPr id="6" name="TextBox 5"/>
           <p:cNvSpPr txBox="1"/>
           <p:nvPr/>
         </p:nvSpPr>
@@ -28427,14 +26486,14 @@
               <a:rPr>
                 <a:latin typeface="Inter"/>
               </a:rPr>
-              <a:t>B</a:t>
+              <a:t>A</a:t>
             </a:r>
           </a:p>
         </p:txBody>
       </p:sp>
       <p:sp>
         <p:nvSpPr>
-          <p:cNvPr id="8" name="TextBox 7"/>
+          <p:cNvPr id="7" name="TextBox 6"/>
           <p:cNvSpPr txBox="1"/>
           <p:nvPr/>
         </p:nvSpPr>
@@ -28469,6 +26528,1288 @@
               <a:rPr>
                 <a:latin typeface="Inter"/>
               </a:rPr>
+              <a:t>SOURCE AUDIT TRAIL</a:t>
+            </a:r>
+          </a:p>
+        </p:txBody>
+      </p:sp>
+      <p:graphicFrame>
+        <p:nvGraphicFramePr>
+          <p:cNvPr id="8" name="Table 7"/>
+          <p:cNvGraphicFramePr>
+            <a:graphicFrameLocks noGrp="1"/>
+          </p:cNvGraphicFramePr>
+          <p:nvPr/>
+        </p:nvGraphicFramePr>
+        <p:xfrm>
+          <a:off x="640080" y="1600200"/>
+          <a:ext cx="10908792" cy="4416552"/>
+        </p:xfrm>
+        <a:graphic>
+          <a:graphicData uri="http://schemas.openxmlformats.org/drawingml/2006/table">
+            <a:tbl>
+              <a:tblPr firstRow="1" bandRow="1">
+                <a:tableStyleId>{5C22544A-7EE6-4342-B048-85BDC9FD1C3A}</a:tableStyleId>
+              </a:tblPr>
+              <a:tblGrid>
+                <a:gridCol w="2011680"/>
+                <a:gridCol w="4448556"/>
+                <a:gridCol w="4448556"/>
+              </a:tblGrid>
+              <a:tr h="490728">
+                <a:tc>
+                  <a:txBody>
+                    <a:bodyPr/>
+                    <a:lstStyle/>
+                    <a:p>
+                      <a:pPr>
+                        <a:defRPr sz="750" b="1">
+                          <a:solidFill>
+                            <a:srgbClr val="FFFFFF"/>
+                          </a:solidFill>
+                          <a:latin typeface="Inter"/>
+                        </a:defRPr>
+                      </a:pPr>
+                      <a:r>
+                        <a:rPr>
+                          <a:latin typeface="Inter"/>
+                        </a:rPr>
+                        <a:t>Tag</a:t>
+                      </a:r>
+                    </a:p>
+                  </a:txBody>
+                  <a:tcPr marL="54864" marR="54864" marT="27432" marB="27432" anchor="ctr">
+                    <a:solidFill>
+                      <a:srgbClr val="0D1117"/>
+                    </a:solidFill>
+                  </a:tcPr>
+                </a:tc>
+                <a:tc>
+                  <a:txBody>
+                    <a:bodyPr/>
+                    <a:lstStyle/>
+                    <a:p>
+                      <a:pPr>
+                        <a:defRPr sz="750" b="1">
+                          <a:solidFill>
+                            <a:srgbClr val="FFFFFF"/>
+                          </a:solidFill>
+                          <a:latin typeface="Inter"/>
+                        </a:defRPr>
+                      </a:pPr>
+                      <a:r>
+                        <a:rPr>
+                          <a:latin typeface="Inter"/>
+                        </a:rPr>
+                        <a:t>Key parameters</a:t>
+                      </a:r>
+                    </a:p>
+                  </a:txBody>
+                  <a:tcPr marL="54864" marR="54864" marT="27432" marB="27432" anchor="ctr">
+                    <a:solidFill>
+                      <a:srgbClr val="0D1117"/>
+                    </a:solidFill>
+                  </a:tcPr>
+                </a:tc>
+                <a:tc>
+                  <a:txBody>
+                    <a:bodyPr/>
+                    <a:lstStyle/>
+                    <a:p>
+                      <a:pPr>
+                        <a:defRPr sz="750" b="1">
+                          <a:solidFill>
+                            <a:srgbClr val="FFFFFF"/>
+                          </a:solidFill>
+                          <a:latin typeface="Inter"/>
+                        </a:defRPr>
+                      </a:pPr>
+                      <a:r>
+                        <a:rPr>
+                          <a:latin typeface="Inter"/>
+                        </a:rPr>
+                        <a:t>Digest</a:t>
+                      </a:r>
+                    </a:p>
+                  </a:txBody>
+                  <a:tcPr marL="54864" marR="54864" marT="27432" marB="27432" anchor="ctr">
+                    <a:solidFill>
+                      <a:srgbClr val="0D1117"/>
+                    </a:solidFill>
+                  </a:tcPr>
+                </a:tc>
+              </a:tr>
+              <a:tr h="490728">
+                <a:tc>
+                  <a:txBody>
+                    <a:bodyPr/>
+                    <a:lstStyle/>
+                    <a:p>
+                      <a:pPr>
+                        <a:defRPr sz="800" b="1">
+                          <a:solidFill>
+                            <a:srgbClr val="0D1117"/>
+                          </a:solidFill>
+                          <a:latin typeface="Inter"/>
+                        </a:defRPr>
+                      </a:pPr>
+                      <a:r>
+                        <a:rPr>
+                          <a:latin typeface="Inter"/>
+                        </a:rPr>
+                        <a:t>S1</a:t>
+                      </a:r>
+                    </a:p>
+                  </a:txBody>
+                  <a:tcPr marL="54864" marR="54864" marT="27432" marB="27432" anchor="ctr">
+                    <a:solidFill>
+                      <a:srgbClr val="FFFFFF"/>
+                    </a:solidFill>
+                  </a:tcPr>
+                </a:tc>
+                <a:tc>
+                  <a:txBody>
+                    <a:bodyPr/>
+                    <a:lstStyle/>
+                    <a:p>
+                      <a:pPr>
+                        <a:defRPr sz="800" b="0">
+                          <a:solidFill>
+                            <a:srgbClr val="0D1117"/>
+                          </a:solidFill>
+                          <a:latin typeface="Inter"/>
+                        </a:defRPr>
+                      </a:pPr>
+                      <a:r>
+                        <a:rPr>
+                          <a:latin typeface="Inter"/>
+                        </a:rPr>
+                        <a:t>organization=test</a:t>
+                      </a:r>
+                    </a:p>
+                  </a:txBody>
+                  <a:tcPr marL="54864" marR="54864" marT="27432" marB="27432" anchor="ctr">
+                    <a:solidFill>
+                      <a:srgbClr val="FFFFFF"/>
+                    </a:solidFill>
+                  </a:tcPr>
+                </a:tc>
+                <a:tc>
+                  <a:txBody>
+                    <a:bodyPr/>
+                    <a:lstStyle/>
+                    <a:p>
+                      <a:pPr>
+                        <a:defRPr sz="800" b="0">
+                          <a:solidFill>
+                            <a:srgbClr val="0D1117"/>
+                          </a:solidFill>
+                          <a:latin typeface="Inter"/>
+                        </a:defRPr>
+                      </a:pPr>
+                      <a:r>
+                        <a:rPr>
+                          <a:latin typeface="Inter"/>
+                        </a:rPr>
+                        <a:t>sha256:aaaaaaaaaaaaaaaaaaaaaaaaaaaaaaaaaaaaaaaaaaaaaaaaaaaaaaaaaaaaaaaa</a:t>
+                      </a:r>
+                    </a:p>
+                  </a:txBody>
+                  <a:tcPr marL="54864" marR="54864" marT="27432" marB="27432" anchor="ctr">
+                    <a:solidFill>
+                      <a:srgbClr val="FFFFFF"/>
+                    </a:solidFill>
+                  </a:tcPr>
+                </a:tc>
+              </a:tr>
+              <a:tr h="490728">
+                <a:tc>
+                  <a:txBody>
+                    <a:bodyPr/>
+                    <a:lstStyle/>
+                    <a:p>
+                      <a:pPr>
+                        <a:defRPr sz="800" b="1">
+                          <a:solidFill>
+                            <a:srgbClr val="0D1117"/>
+                          </a:solidFill>
+                          <a:latin typeface="Inter"/>
+                        </a:defRPr>
+                      </a:pPr>
+                      <a:r>
+                        <a:rPr>
+                          <a:latin typeface="Inter"/>
+                        </a:rPr>
+                        <a:t>S2</a:t>
+                      </a:r>
+                    </a:p>
+                  </a:txBody>
+                  <a:tcPr marL="54864" marR="54864" marT="27432" marB="27432" anchor="ctr">
+                    <a:solidFill>
+                      <a:srgbClr val="F5F7F9"/>
+                    </a:solidFill>
+                  </a:tcPr>
+                </a:tc>
+                <a:tc>
+                  <a:txBody>
+                    <a:bodyPr/>
+                    <a:lstStyle/>
+                    <a:p>
+                      <a:pPr>
+                        <a:defRPr sz="800" b="0">
+                          <a:solidFill>
+                            <a:srgbClr val="0D1117"/>
+                          </a:solidFill>
+                          <a:latin typeface="Inter"/>
+                        </a:defRPr>
+                      </a:pPr>
+                      <a:r>
+                        <a:rPr>
+                          <a:latin typeface="Inter"/>
+                        </a:rPr>
+                        <a:t>allocation_tree</a:t>
+                      </a:r>
+                    </a:p>
+                  </a:txBody>
+                  <a:tcPr marL="54864" marR="54864" marT="27432" marB="27432" anchor="ctr">
+                    <a:solidFill>
+                      <a:srgbClr val="F5F7F9"/>
+                    </a:solidFill>
+                  </a:tcPr>
+                </a:tc>
+                <a:tc>
+                  <a:txBody>
+                    <a:bodyPr/>
+                    <a:lstStyle/>
+                    <a:p>
+                      <a:pPr>
+                        <a:defRPr sz="800" b="0">
+                          <a:solidFill>
+                            <a:srgbClr val="0D1117"/>
+                          </a:solidFill>
+                          <a:latin typeface="Inter"/>
+                        </a:defRPr>
+                      </a:pPr>
+                      <a:r>
+                        <a:rPr>
+                          <a:latin typeface="Inter"/>
+                        </a:rPr>
+                        <a:t>sha256:aaaaaaaaaaaaaaaaaaaaaaaaaaaaaaaaaaaaaaaaaaaaaaaaaaaaaaaaaaaaaaaa</a:t>
+                      </a:r>
+                    </a:p>
+                  </a:txBody>
+                  <a:tcPr marL="54864" marR="54864" marT="27432" marB="27432" anchor="ctr">
+                    <a:solidFill>
+                      <a:srgbClr val="F5F7F9"/>
+                    </a:solidFill>
+                  </a:tcPr>
+                </a:tc>
+              </a:tr>
+              <a:tr h="490728">
+                <a:tc>
+                  <a:txBody>
+                    <a:bodyPr/>
+                    <a:lstStyle/>
+                    <a:p>
+                      <a:pPr>
+                        <a:defRPr sz="800" b="1">
+                          <a:solidFill>
+                            <a:srgbClr val="0D1117"/>
+                          </a:solidFill>
+                          <a:latin typeface="Inter"/>
+                        </a:defRPr>
+                      </a:pPr>
+                      <a:r>
+                        <a:rPr>
+                          <a:latin typeface="Inter"/>
+                        </a:rPr>
+                        <a:t>S3</a:t>
+                      </a:r>
+                    </a:p>
+                  </a:txBody>
+                  <a:tcPr marL="54864" marR="54864" marT="27432" marB="27432" anchor="ctr">
+                    <a:solidFill>
+                      <a:srgbClr val="FFFFFF"/>
+                    </a:solidFill>
+                  </a:tcPr>
+                </a:tc>
+                <a:tc>
+                  <a:txBody>
+                    <a:bodyPr/>
+                    <a:lstStyle/>
+                    <a:p>
+                      <a:pPr>
+                        <a:defRPr sz="800" b="0">
+                          <a:solidFill>
+                            <a:srgbClr val="0D1117"/>
+                          </a:solidFill>
+                          <a:latin typeface="Inter"/>
+                        </a:defRPr>
+                      </a:pPr>
+                      <a:r>
+                        <a:rPr>
+                          <a:latin typeface="Inter"/>
+                        </a:rPr>
+                        <a:t>portfolio=test</a:t>
+                      </a:r>
+                    </a:p>
+                  </a:txBody>
+                  <a:tcPr marL="54864" marR="54864" marT="27432" marB="27432" anchor="ctr">
+                    <a:solidFill>
+                      <a:srgbClr val="FFFFFF"/>
+                    </a:solidFill>
+                  </a:tcPr>
+                </a:tc>
+                <a:tc>
+                  <a:txBody>
+                    <a:bodyPr/>
+                    <a:lstStyle/>
+                    <a:p>
+                      <a:pPr>
+                        <a:defRPr sz="800" b="0">
+                          <a:solidFill>
+                            <a:srgbClr val="0D1117"/>
+                          </a:solidFill>
+                          <a:latin typeface="Inter"/>
+                        </a:defRPr>
+                      </a:pPr>
+                      <a:r>
+                        <a:rPr>
+                          <a:latin typeface="Inter"/>
+                        </a:rPr>
+                        <a:t>sha256:aaaaaaaaaaaaaaaaaaaaaaaaaaaaaaaaaaaaaaaaaaaaaaaaaaaaaaaaaaaaaaaa</a:t>
+                      </a:r>
+                    </a:p>
+                  </a:txBody>
+                  <a:tcPr marL="54864" marR="54864" marT="27432" marB="27432" anchor="ctr">
+                    <a:solidFill>
+                      <a:srgbClr val="FFFFFF"/>
+                    </a:solidFill>
+                  </a:tcPr>
+                </a:tc>
+              </a:tr>
+              <a:tr h="490728">
+                <a:tc>
+                  <a:txBody>
+                    <a:bodyPr/>
+                    <a:lstStyle/>
+                    <a:p>
+                      <a:pPr>
+                        <a:defRPr sz="800" b="1">
+                          <a:solidFill>
+                            <a:srgbClr val="0D1117"/>
+                          </a:solidFill>
+                          <a:latin typeface="Inter"/>
+                        </a:defRPr>
+                      </a:pPr>
+                      <a:r>
+                        <a:rPr>
+                          <a:latin typeface="Inter"/>
+                        </a:rPr>
+                        <a:t>S4</a:t>
+                      </a:r>
+                    </a:p>
+                  </a:txBody>
+                  <a:tcPr marL="54864" marR="54864" marT="27432" marB="27432" anchor="ctr">
+                    <a:solidFill>
+                      <a:srgbClr val="F5F7F9"/>
+                    </a:solidFill>
+                  </a:tcPr>
+                </a:tc>
+                <a:tc>
+                  <a:txBody>
+                    <a:bodyPr/>
+                    <a:lstStyle/>
+                    <a:p>
+                      <a:pPr>
+                        <a:defRPr sz="800" b="0">
+                          <a:solidFill>
+                            <a:srgbClr val="0D1117"/>
+                          </a:solidFill>
+                          <a:latin typeface="Inter"/>
+                        </a:defRPr>
+                      </a:pPr>
+                      <a:r>
+                        <a:rPr>
+                          <a:latin typeface="Inter"/>
+                        </a:rPr>
+                        <a:t>fixed_income</a:t>
+                      </a:r>
+                    </a:p>
+                  </a:txBody>
+                  <a:tcPr marL="54864" marR="54864" marT="27432" marB="27432" anchor="ctr">
+                    <a:solidFill>
+                      <a:srgbClr val="F5F7F9"/>
+                    </a:solidFill>
+                  </a:tcPr>
+                </a:tc>
+                <a:tc>
+                  <a:txBody>
+                    <a:bodyPr/>
+                    <a:lstStyle/>
+                    <a:p>
+                      <a:pPr>
+                        <a:defRPr sz="800" b="0">
+                          <a:solidFill>
+                            <a:srgbClr val="0D1117"/>
+                          </a:solidFill>
+                          <a:latin typeface="Inter"/>
+                        </a:defRPr>
+                      </a:pPr>
+                      <a:r>
+                        <a:rPr>
+                          <a:latin typeface="Inter"/>
+                        </a:rPr>
+                        <a:t>sha256:aaaaaaaaaaaaaaaaaaaaaaaaaaaaaaaaaaaaaaaaaaaaaaaaaaaaaaaaaaaaaaaa</a:t>
+                      </a:r>
+                    </a:p>
+                  </a:txBody>
+                  <a:tcPr marL="54864" marR="54864" marT="27432" marB="27432" anchor="ctr">
+                    <a:solidFill>
+                      <a:srgbClr val="F5F7F9"/>
+                    </a:solidFill>
+                  </a:tcPr>
+                </a:tc>
+              </a:tr>
+              <a:tr h="490728">
+                <a:tc>
+                  <a:txBody>
+                    <a:bodyPr/>
+                    <a:lstStyle/>
+                    <a:p>
+                      <a:pPr>
+                        <a:defRPr sz="800" b="1">
+                          <a:solidFill>
+                            <a:srgbClr val="0D1117"/>
+                          </a:solidFill>
+                          <a:latin typeface="Inter"/>
+                        </a:defRPr>
+                      </a:pPr>
+                      <a:r>
+                        <a:rPr>
+                          <a:latin typeface="Inter"/>
+                        </a:rPr>
+                        <a:t>S5</a:t>
+                      </a:r>
+                    </a:p>
+                  </a:txBody>
+                  <a:tcPr marL="54864" marR="54864" marT="27432" marB="27432" anchor="ctr">
+                    <a:solidFill>
+                      <a:srgbClr val="FFFFFF"/>
+                    </a:solidFill>
+                  </a:tcPr>
+                </a:tc>
+                <a:tc>
+                  <a:txBody>
+                    <a:bodyPr/>
+                    <a:lstStyle/>
+                    <a:p>
+                      <a:pPr>
+                        <a:defRPr sz="800" b="0">
+                          <a:solidFill>
+                            <a:srgbClr val="0D1117"/>
+                          </a:solidFill>
+                          <a:latin typeface="Inter"/>
+                        </a:defRPr>
+                      </a:pPr>
+                      <a:r>
+                        <a:rPr>
+                          <a:latin typeface="Inter"/>
+                        </a:rPr>
+                        <a:t>all sections</a:t>
+                      </a:r>
+                    </a:p>
+                  </a:txBody>
+                  <a:tcPr marL="54864" marR="54864" marT="27432" marB="27432" anchor="ctr">
+                    <a:solidFill>
+                      <a:srgbClr val="FFFFFF"/>
+                    </a:solidFill>
+                  </a:tcPr>
+                </a:tc>
+                <a:tc>
+                  <a:txBody>
+                    <a:bodyPr/>
+                    <a:lstStyle/>
+                    <a:p>
+                      <a:pPr>
+                        <a:defRPr sz="800" b="0">
+                          <a:solidFill>
+                            <a:srgbClr val="0D1117"/>
+                          </a:solidFill>
+                          <a:latin typeface="Inter"/>
+                        </a:defRPr>
+                      </a:pPr>
+                      <a:r>
+                        <a:rPr>
+                          <a:latin typeface="Inter"/>
+                        </a:rPr>
+                        <a:t>sha256:aaaaaaaaaaaaaaaaaaaaaaaaaaaaaaaaaaaaaaaaaaaaaaaaaaaaaaaaaaaaaaaa</a:t>
+                      </a:r>
+                    </a:p>
+                  </a:txBody>
+                  <a:tcPr marL="54864" marR="54864" marT="27432" marB="27432" anchor="ctr">
+                    <a:solidFill>
+                      <a:srgbClr val="FFFFFF"/>
+                    </a:solidFill>
+                  </a:tcPr>
+                </a:tc>
+              </a:tr>
+              <a:tr h="490728">
+                <a:tc>
+                  <a:txBody>
+                    <a:bodyPr/>
+                    <a:lstStyle/>
+                    <a:p>
+                      <a:pPr>
+                        <a:defRPr sz="800" b="1">
+                          <a:solidFill>
+                            <a:srgbClr val="0D1117"/>
+                          </a:solidFill>
+                          <a:latin typeface="Inter"/>
+                        </a:defRPr>
+                      </a:pPr>
+                      <a:r>
+                        <a:rPr>
+                          <a:latin typeface="Inter"/>
+                        </a:rPr>
+                        <a:t>S6</a:t>
+                      </a:r>
+                    </a:p>
+                  </a:txBody>
+                  <a:tcPr marL="54864" marR="54864" marT="27432" marB="27432" anchor="ctr">
+                    <a:solidFill>
+                      <a:srgbClr val="F5F7F9"/>
+                    </a:solidFill>
+                  </a:tcPr>
+                </a:tc>
+                <a:tc>
+                  <a:txBody>
+                    <a:bodyPr/>
+                    <a:lstStyle/>
+                    <a:p>
+                      <a:pPr>
+                        <a:defRPr sz="800" b="0">
+                          <a:solidFill>
+                            <a:srgbClr val="0D1117"/>
+                          </a:solidFill>
+                          <a:latin typeface="Inter"/>
+                        </a:defRPr>
+                      </a:pPr>
+                      <a:r>
+                        <a:rPr>
+                          <a:latin typeface="Inter"/>
+                        </a:rPr>
+                        <a:t>credit_spreads</a:t>
+                      </a:r>
+                    </a:p>
+                  </a:txBody>
+                  <a:tcPr marL="54864" marR="54864" marT="27432" marB="27432" anchor="ctr">
+                    <a:solidFill>
+                      <a:srgbClr val="F5F7F9"/>
+                    </a:solidFill>
+                  </a:tcPr>
+                </a:tc>
+                <a:tc>
+                  <a:txBody>
+                    <a:bodyPr/>
+                    <a:lstStyle/>
+                    <a:p>
+                      <a:pPr>
+                        <a:defRPr sz="800" b="0">
+                          <a:solidFill>
+                            <a:srgbClr val="0D1117"/>
+                          </a:solidFill>
+                          <a:latin typeface="Inter"/>
+                        </a:defRPr>
+                      </a:pPr>
+                      <a:r>
+                        <a:rPr>
+                          <a:latin typeface="Inter"/>
+                        </a:rPr>
+                        <a:t>sha256:aaaaaaaaaaaaaaaaaaaaaaaaaaaaaaaaaaaaaaaaaaaaaaaaaaaaaaaaaaaaaaaa</a:t>
+                      </a:r>
+                    </a:p>
+                  </a:txBody>
+                  <a:tcPr marL="54864" marR="54864" marT="27432" marB="27432" anchor="ctr">
+                    <a:solidFill>
+                      <a:srgbClr val="F5F7F9"/>
+                    </a:solidFill>
+                  </a:tcPr>
+                </a:tc>
+              </a:tr>
+              <a:tr h="490728">
+                <a:tc>
+                  <a:txBody>
+                    <a:bodyPr/>
+                    <a:lstStyle/>
+                    <a:p>
+                      <a:pPr>
+                        <a:defRPr sz="800" b="1">
+                          <a:solidFill>
+                            <a:srgbClr val="0D1117"/>
+                          </a:solidFill>
+                          <a:latin typeface="Inter"/>
+                        </a:defRPr>
+                      </a:pPr>
+                      <a:r>
+                        <a:rPr>
+                          <a:latin typeface="Inter"/>
+                        </a:rPr>
+                        <a:t>S7</a:t>
+                      </a:r>
+                    </a:p>
+                  </a:txBody>
+                  <a:tcPr marL="54864" marR="54864" marT="27432" marB="27432" anchor="ctr">
+                    <a:solidFill>
+                      <a:srgbClr val="FFFFFF"/>
+                    </a:solidFill>
+                  </a:tcPr>
+                </a:tc>
+                <a:tc>
+                  <a:txBody>
+                    <a:bodyPr/>
+                    <a:lstStyle/>
+                    <a:p>
+                      <a:pPr>
+                        <a:defRPr sz="800" b="0">
+                          <a:solidFill>
+                            <a:srgbClr val="0D1117"/>
+                          </a:solidFill>
+                          <a:latin typeface="Inter"/>
+                        </a:defRPr>
+                      </a:pPr>
+                      <a:r>
+                        <a:rPr>
+                          <a:latin typeface="Inter"/>
+                        </a:rPr>
+                        <a:t>baseline</a:t>
+                      </a:r>
+                    </a:p>
+                  </a:txBody>
+                  <a:tcPr marL="54864" marR="54864" marT="27432" marB="27432" anchor="ctr">
+                    <a:solidFill>
+                      <a:srgbClr val="FFFFFF"/>
+                    </a:solidFill>
+                  </a:tcPr>
+                </a:tc>
+                <a:tc>
+                  <a:txBody>
+                    <a:bodyPr/>
+                    <a:lstStyle/>
+                    <a:p>
+                      <a:pPr>
+                        <a:defRPr sz="800" b="0">
+                          <a:solidFill>
+                            <a:srgbClr val="0D1117"/>
+                          </a:solidFill>
+                          <a:latin typeface="Inter"/>
+                        </a:defRPr>
+                      </a:pPr>
+                      <a:r>
+                        <a:rPr>
+                          <a:latin typeface="Inter"/>
+                        </a:rPr>
+                        <a:t>sha256:aaaaaaaaaaaaaaaaaaaaaaaaaaaaaaaaaaaaaaaaaaaaaaaaaaaaaaaaaaaaaaaa</a:t>
+                      </a:r>
+                    </a:p>
+                  </a:txBody>
+                  <a:tcPr marL="54864" marR="54864" marT="27432" marB="27432" anchor="ctr">
+                    <a:solidFill>
+                      <a:srgbClr val="FFFFFF"/>
+                    </a:solidFill>
+                  </a:tcPr>
+                </a:tc>
+              </a:tr>
+              <a:tr h="490728">
+                <a:tc>
+                  <a:txBody>
+                    <a:bodyPr/>
+                    <a:lstStyle/>
+                    <a:p>
+                      <a:pPr>
+                        <a:defRPr sz="800" b="1">
+                          <a:solidFill>
+                            <a:srgbClr val="0D1117"/>
+                          </a:solidFill>
+                          <a:latin typeface="Inter"/>
+                        </a:defRPr>
+                      </a:pPr>
+                      <a:r>
+                        <a:rPr>
+                          <a:latin typeface="Inter"/>
+                        </a:rPr>
+                        <a:t>S8</a:t>
+                      </a:r>
+                    </a:p>
+                  </a:txBody>
+                  <a:tcPr marL="54864" marR="54864" marT="27432" marB="27432" anchor="ctr">
+                    <a:solidFill>
+                      <a:srgbClr val="F5F7F9"/>
+                    </a:solidFill>
+                  </a:tcPr>
+                </a:tc>
+                <a:tc>
+                  <a:txBody>
+                    <a:bodyPr/>
+                    <a:lstStyle/>
+                    <a:p>
+                      <a:pPr>
+                        <a:defRPr sz="800" b="0">
+                          <a:solidFill>
+                            <a:srgbClr val="0D1117"/>
+                          </a:solidFill>
+                          <a:latin typeface="Inter"/>
+                        </a:defRPr>
+                      </a:pPr>
+                      <a:r>
+                        <a:rPr>
+                          <a:latin typeface="Inter"/>
+                        </a:rPr>
+                        <a:t>illustrative</a:t>
+                      </a:r>
+                    </a:p>
+                  </a:txBody>
+                  <a:tcPr marL="54864" marR="54864" marT="27432" marB="27432" anchor="ctr">
+                    <a:solidFill>
+                      <a:srgbClr val="F5F7F9"/>
+                    </a:solidFill>
+                  </a:tcPr>
+                </a:tc>
+                <a:tc>
+                  <a:txBody>
+                    <a:bodyPr/>
+                    <a:lstStyle/>
+                    <a:p>
+                      <a:pPr>
+                        <a:defRPr sz="800" b="0">
+                          <a:solidFill>
+                            <a:srgbClr val="0D1117"/>
+                          </a:solidFill>
+                          <a:latin typeface="Inter"/>
+                        </a:defRPr>
+                      </a:pPr>
+                      <a:r>
+                        <a:rPr>
+                          <a:latin typeface="Inter"/>
+                        </a:rPr>
+                        <a:t>sha256:aaaaaaaaaaaaaaaaaaaaaaaaaaaaaaaaaaaaaaaaaaaaaaaaaaaaaaaaaaaaaaaa</a:t>
+                      </a:r>
+                    </a:p>
+                  </a:txBody>
+                  <a:tcPr marL="54864" marR="54864" marT="27432" marB="27432" anchor="ctr">
+                    <a:solidFill>
+                      <a:srgbClr val="F5F7F9"/>
+                    </a:solidFill>
+                  </a:tcPr>
+                </a:tc>
+              </a:tr>
+            </a:tbl>
+          </a:graphicData>
+        </a:graphic>
+      </p:graphicFrame>
+      <p:sp>
+        <p:nvSpPr>
+          <p:cNvPr id="9" name="TextBox 8"/>
+          <p:cNvSpPr txBox="1"/>
+          <p:nvPr/>
+        </p:nvSpPr>
+        <p:spPr>
+          <a:xfrm>
+            <a:off x="640080" y="6035040"/>
+            <a:ext cx="10908792" cy="164592"/>
+          </a:xfrm>
+          <a:prstGeom prst="rect">
+            <a:avLst/>
+          </a:prstGeom>
+          <a:noFill/>
+        </p:spPr>
+        <p:txBody>
+          <a:bodyPr wrap="none" lIns="9144" rIns="9144" tIns="9144" bIns="9144" anchor="t">
+            <a:spAutoFit/>
+          </a:bodyPr>
+          <a:lstStyle/>
+          <a:p>
+            <a:pPr algn="l">
+              <a:spcAft>
+                <a:spcPts val="0"/>
+              </a:spcAft>
+              <a:defRPr sz="680" b="0">
+                <a:solidFill>
+                  <a:srgbClr val="8A94A1"/>
+                </a:solidFill>
+                <a:latin typeface="Inter"/>
+              </a:defRPr>
+            </a:pPr>
+            <a:r>
+              <a:rPr>
+                <a:latin typeface="Inter"/>
+              </a:rPr>
+              <a:t>Data scope for every source: Illustrative sample data. Each digest is the SHA-256 fingerprint of the exact data the report used.</a:t>
+            </a:r>
+          </a:p>
+        </p:txBody>
+      </p:sp>
+      <p:sp>
+        <p:nvSpPr>
+          <p:cNvPr id="10" name="Rectangle 9"/>
+          <p:cNvSpPr/>
+          <p:nvPr/>
+        </p:nvSpPr>
+        <p:spPr>
+          <a:xfrm>
+            <a:off x="640080" y="6446520"/>
+            <a:ext cx="10908792" cy="9144"/>
+          </a:xfrm>
+          <a:prstGeom prst="rect">
+            <a:avLst/>
+          </a:prstGeom>
+          <a:solidFill>
+            <a:srgbClr val="E3E7EC"/>
+          </a:solidFill>
+          <a:ln>
+            <a:solidFill>
+              <a:srgbClr val="E3E7EC"/>
+            </a:solidFill>
+          </a:ln>
+        </p:spPr>
+        <p:style>
+          <a:lnRef idx="1">
+            <a:schemeClr val="accent1"/>
+          </a:lnRef>
+          <a:fillRef idx="3">
+            <a:schemeClr val="accent1"/>
+          </a:fillRef>
+          <a:effectRef idx="2">
+            <a:schemeClr val="accent1"/>
+          </a:effectRef>
+          <a:fontRef idx="minor">
+            <a:schemeClr val="lt1"/>
+          </a:fontRef>
+        </p:style>
+        <p:txBody>
+          <a:bodyPr rtlCol="0" anchor="ctr"/>
+          <a:lstStyle/>
+          <a:p>
+            <a:pPr algn="ctr">
+              <a:defRPr>
+                <a:latin typeface="Inter"/>
+              </a:defRPr>
+            </a:pPr>
+          </a:p>
+        </p:txBody>
+      </p:sp>
+      <p:sp>
+        <p:nvSpPr>
+          <p:cNvPr id="11" name="TextBox 10"/>
+          <p:cNvSpPr txBox="1"/>
+          <p:nvPr/>
+        </p:nvSpPr>
+        <p:spPr>
+          <a:xfrm>
+            <a:off x="640080" y="6501384"/>
+            <a:ext cx="4297680" cy="146304"/>
+          </a:xfrm>
+          <a:prstGeom prst="rect">
+            <a:avLst/>
+          </a:prstGeom>
+          <a:noFill/>
+        </p:spPr>
+        <p:txBody>
+          <a:bodyPr wrap="none" lIns="9144" rIns="9144" tIns="9144" bIns="9144" anchor="t">
+            <a:spAutoFit/>
+          </a:bodyPr>
+          <a:lstStyle/>
+          <a:p>
+            <a:pPr algn="l">
+              <a:spcAft>
+                <a:spcPts val="0"/>
+              </a:spcAft>
+              <a:defRPr sz="650" b="0">
+                <a:solidFill>
+                  <a:srgbClr val="8A94A1"/>
+                </a:solidFill>
+                <a:latin typeface="Inter"/>
+              </a:defRPr>
+            </a:pPr>
+            <a:r>
+              <a:rPr>
+                <a:latin typeface="Inter"/>
+              </a:rPr>
+              <a:t>Sources: S1 · S2 · S3 · S4 · S5 · S6 · S7 · S8</a:t>
+            </a:r>
+          </a:p>
+        </p:txBody>
+      </p:sp>
+      <p:sp>
+        <p:nvSpPr>
+          <p:cNvPr id="12" name="TextBox 11"/>
+          <p:cNvSpPr txBox="1"/>
+          <p:nvPr/>
+        </p:nvSpPr>
+        <p:spPr>
+          <a:xfrm>
+            <a:off x="4480560" y="6501384"/>
+            <a:ext cx="5303520" cy="146304"/>
+          </a:xfrm>
+          <a:prstGeom prst="rect">
+            <a:avLst/>
+          </a:prstGeom>
+          <a:noFill/>
+        </p:spPr>
+        <p:txBody>
+          <a:bodyPr wrap="none" lIns="9144" rIns="9144" tIns="9144" bIns="9144" anchor="t">
+            <a:spAutoFit/>
+          </a:bodyPr>
+          <a:lstStyle/>
+          <a:p>
+            <a:pPr algn="ctr">
+              <a:spcAft>
+                <a:spcPts val="0"/>
+              </a:spcAft>
+              <a:defRPr sz="650" b="0">
+                <a:solidFill>
+                  <a:srgbClr val="8A94A1"/>
+                </a:solidFill>
+                <a:latin typeface="Inter"/>
+              </a:defRPr>
+            </a:pPr>
+            <a:r>
+              <a:rPr>
+                <a:latin typeface="Inter"/>
+              </a:rPr>
+              <a:t>Confidential — Investment Committee · Data as of 2026-06-30</a:t>
+            </a:r>
+          </a:p>
+        </p:txBody>
+      </p:sp>
+      <p:sp>
+        <p:nvSpPr>
+          <p:cNvPr id="13" name="TextBox 12"/>
+          <p:cNvSpPr txBox="1"/>
+          <p:nvPr/>
+        </p:nvSpPr>
+        <p:spPr>
+          <a:xfrm>
+            <a:off x="10287000" y="6501384"/>
+            <a:ext cx="1261872" cy="146304"/>
+          </a:xfrm>
+          <a:prstGeom prst="rect">
+            <a:avLst/>
+          </a:prstGeom>
+          <a:noFill/>
+        </p:spPr>
+        <p:txBody>
+          <a:bodyPr wrap="none" lIns="9144" rIns="9144" tIns="9144" bIns="9144" anchor="t">
+            <a:spAutoFit/>
+          </a:bodyPr>
+          <a:lstStyle/>
+          <a:p>
+            <a:pPr algn="r">
+              <a:spcAft>
+                <a:spcPts val="0"/>
+              </a:spcAft>
+              <a:defRPr sz="650" b="0">
+                <a:solidFill>
+                  <a:srgbClr val="8A94A1"/>
+                </a:solidFill>
+                <a:latin typeface="Inter"/>
+              </a:defRPr>
+            </a:pPr>
+            <a:r>
+              <a:rPr>
+                <a:latin typeface="Inter"/>
+              </a:rPr>
+              <a:t>28</a:t>
+            </a:r>
+          </a:p>
+        </p:txBody>
+      </p:sp>
+    </p:spTree>
+  </p:cSld>
+  <p:clrMapOvr>
+    <a:masterClrMapping/>
+  </p:clrMapOvr>
+</p:sld>
+</file>
+
+<file path=ppt/slides/slide29.xml><?xml version="1.0" encoding="utf-8"?>
+<p:sld xmlns:a="http://schemas.openxmlformats.org/drawingml/2006/main" xmlns:p="http://schemas.openxmlformats.org/presentationml/2006/main" xmlns:r="http://schemas.openxmlformats.org/officeDocument/2006/relationships">
+  <p:cSld>
+    <p:spTree>
+      <p:nvGrpSpPr>
+        <p:cNvPr id="1" name=""/>
+        <p:cNvGrpSpPr/>
+        <p:nvPr/>
+      </p:nvGrpSpPr>
+      <p:grpSpPr/>
+      <p:sp>
+        <p:nvSpPr>
+          <p:cNvPr id="2" name="Rectangle 1"/>
+          <p:cNvSpPr/>
+          <p:nvPr/>
+        </p:nvSpPr>
+        <p:spPr>
+          <a:xfrm>
+            <a:off x="0" y="0"/>
+            <a:ext cx="12191695" cy="6858000"/>
+          </a:xfrm>
+          <a:prstGeom prst="rect">
+            <a:avLst/>
+          </a:prstGeom>
+          <a:solidFill>
+            <a:srgbClr val="FFFFFF"/>
+          </a:solidFill>
+          <a:ln>
+            <a:solidFill>
+              <a:srgbClr val="FFFFFF"/>
+            </a:solidFill>
+          </a:ln>
+        </p:spPr>
+        <p:style>
+          <a:lnRef idx="1">
+            <a:schemeClr val="accent1"/>
+          </a:lnRef>
+          <a:fillRef idx="3">
+            <a:schemeClr val="accent1"/>
+          </a:fillRef>
+          <a:effectRef idx="2">
+            <a:schemeClr val="accent1"/>
+          </a:effectRef>
+          <a:fontRef idx="minor">
+            <a:schemeClr val="lt1"/>
+          </a:fontRef>
+        </p:style>
+        <p:txBody>
+          <a:bodyPr rtlCol="0" anchor="ctr"/>
+          <a:lstStyle/>
+          <a:p>
+            <a:pPr algn="ctr">
+              <a:defRPr>
+                <a:latin typeface="Inter"/>
+              </a:defRPr>
+            </a:pPr>
+          </a:p>
+        </p:txBody>
+      </p:sp>
+      <p:sp>
+        <p:nvSpPr>
+          <p:cNvPr id="3" name="TextBox 2"/>
+          <p:cNvSpPr txBox="1"/>
+          <p:nvPr/>
+        </p:nvSpPr>
+        <p:spPr>
+          <a:xfrm>
+            <a:off x="640080" y="566928"/>
+            <a:ext cx="10058400" cy="530352"/>
+          </a:xfrm>
+          <a:prstGeom prst="rect">
+            <a:avLst/>
+          </a:prstGeom>
+          <a:noFill/>
+        </p:spPr>
+        <p:txBody>
+          <a:bodyPr wrap="none" lIns="9144" rIns="9144" tIns="9144" bIns="9144" anchor="t">
+            <a:spAutoFit/>
+          </a:bodyPr>
+          <a:lstStyle/>
+          <a:p>
+            <a:pPr algn="l">
+              <a:spcAft>
+                <a:spcPts val="0"/>
+              </a:spcAft>
+              <a:defRPr sz="2300" b="1">
+                <a:solidFill>
+                  <a:srgbClr val="0D1117"/>
+                </a:solidFill>
+                <a:latin typeface="Inter"/>
+              </a:defRPr>
+            </a:pPr>
+            <a:r>
+              <a:rPr>
+                <a:latin typeface="Inter"/>
+              </a:rPr>
+              <a:t>Appendix — Server Metric Methods and Disclosures</a:t>
+            </a:r>
+          </a:p>
+        </p:txBody>
+      </p:sp>
+      <p:sp>
+        <p:nvSpPr>
+          <p:cNvPr id="4" name="Rectangle 3"/>
+          <p:cNvSpPr/>
+          <p:nvPr/>
+        </p:nvSpPr>
+        <p:spPr>
+          <a:xfrm>
+            <a:off x="640080" y="1115568"/>
+            <a:ext cx="10908792" cy="18288"/>
+          </a:xfrm>
+          <a:prstGeom prst="rect">
+            <a:avLst/>
+          </a:prstGeom>
+          <a:solidFill>
+            <a:srgbClr val="0D1117"/>
+          </a:solidFill>
+          <a:ln>
+            <a:solidFill>
+              <a:srgbClr val="0D1117"/>
+            </a:solidFill>
+          </a:ln>
+        </p:spPr>
+        <p:style>
+          <a:lnRef idx="1">
+            <a:schemeClr val="accent1"/>
+          </a:lnRef>
+          <a:fillRef idx="3">
+            <a:schemeClr val="accent1"/>
+          </a:fillRef>
+          <a:effectRef idx="2">
+            <a:schemeClr val="accent1"/>
+          </a:effectRef>
+          <a:fontRef idx="minor">
+            <a:schemeClr val="lt1"/>
+          </a:fontRef>
+        </p:style>
+        <p:txBody>
+          <a:bodyPr rtlCol="0" anchor="ctr"/>
+          <a:lstStyle/>
+          <a:p>
+            <a:pPr algn="ctr">
+              <a:defRPr>
+                <a:latin typeface="Inter"/>
+              </a:defRPr>
+            </a:pPr>
+          </a:p>
+        </p:txBody>
+      </p:sp>
+      <p:sp>
+        <p:nvSpPr>
+          <p:cNvPr id="5" name="Rectangle 4"/>
+          <p:cNvSpPr/>
+          <p:nvPr/>
+        </p:nvSpPr>
+        <p:spPr>
+          <a:xfrm>
+            <a:off x="11018520" y="502920"/>
+            <a:ext cx="530352" cy="393192"/>
+          </a:xfrm>
+          <a:prstGeom prst="rect">
+            <a:avLst/>
+          </a:prstGeom>
+          <a:solidFill>
+            <a:srgbClr val="9AA5B1"/>
+          </a:solidFill>
+          <a:ln>
+            <a:solidFill>
+              <a:srgbClr val="9AA5B1"/>
+            </a:solidFill>
+          </a:ln>
+        </p:spPr>
+        <p:style>
+          <a:lnRef idx="1">
+            <a:schemeClr val="accent1"/>
+          </a:lnRef>
+          <a:fillRef idx="3">
+            <a:schemeClr val="accent1"/>
+          </a:fillRef>
+          <a:effectRef idx="2">
+            <a:schemeClr val="accent1"/>
+          </a:effectRef>
+          <a:fontRef idx="minor">
+            <a:schemeClr val="lt1"/>
+          </a:fontRef>
+        </p:style>
+        <p:txBody>
+          <a:bodyPr rtlCol="0" anchor="ctr"/>
+          <a:lstStyle/>
+          <a:p>
+            <a:pPr algn="ctr">
+              <a:defRPr>
+                <a:latin typeface="Inter"/>
+              </a:defRPr>
+            </a:pPr>
+          </a:p>
+        </p:txBody>
+      </p:sp>
+      <p:sp>
+        <p:nvSpPr>
+          <p:cNvPr id="6" name="TextBox 5"/>
+          <p:cNvSpPr txBox="1"/>
+          <p:nvPr/>
+        </p:nvSpPr>
+        <p:spPr>
+          <a:xfrm>
+            <a:off x="11045952" y="557784"/>
+            <a:ext cx="475488" cy="182880"/>
+          </a:xfrm>
+          <a:prstGeom prst="rect">
+            <a:avLst/>
+          </a:prstGeom>
+          <a:noFill/>
+        </p:spPr>
+        <p:txBody>
+          <a:bodyPr wrap="none" lIns="9144" rIns="9144" tIns="9144" bIns="9144" anchor="t">
+            <a:spAutoFit/>
+          </a:bodyPr>
+          <a:lstStyle/>
+          <a:p>
+            <a:pPr algn="ctr">
+              <a:spcAft>
+                <a:spcPts val="0"/>
+              </a:spcAft>
+              <a:defRPr sz="1000" b="1">
+                <a:solidFill>
+                  <a:srgbClr val="0D1117"/>
+                </a:solidFill>
+                <a:latin typeface="Inter"/>
+              </a:defRPr>
+            </a:pPr>
+            <a:r>
+              <a:rPr>
+                <a:latin typeface="Inter"/>
+              </a:rPr>
+              <a:t>B</a:t>
+            </a:r>
+          </a:p>
+        </p:txBody>
+      </p:sp>
+      <p:sp>
+        <p:nvSpPr>
+          <p:cNvPr id="7" name="TextBox 6"/>
+          <p:cNvSpPr txBox="1"/>
+          <p:nvPr/>
+        </p:nvSpPr>
+        <p:spPr>
+          <a:xfrm>
+            <a:off x="640080" y="1325880"/>
+            <a:ext cx="10908792" cy="201168"/>
+          </a:xfrm>
+          <a:prstGeom prst="rect">
+            <a:avLst/>
+          </a:prstGeom>
+          <a:noFill/>
+        </p:spPr>
+        <p:txBody>
+          <a:bodyPr wrap="none" lIns="9144" rIns="9144" tIns="9144" bIns="9144" anchor="t">
+            <a:spAutoFit/>
+          </a:bodyPr>
+          <a:lstStyle/>
+          <a:p>
+            <a:pPr algn="l">
+              <a:spcAft>
+                <a:spcPts val="0"/>
+              </a:spcAft>
+              <a:defRPr sz="720" b="1">
+                <a:solidFill>
+                  <a:srgbClr val="4A5563"/>
+                </a:solidFill>
+                <a:latin typeface="Inter"/>
+              </a:defRPr>
+            </a:pPr>
+            <a:r>
+              <a:rPr>
+                <a:latin typeface="Inter"/>
+              </a:rPr>
               <a:t>SERVER METRIC METHODS</a:t>
             </a:r>
           </a:p>
@@ -28476,7 +27817,7 @@
       </p:sp>
       <p:graphicFrame>
         <p:nvGraphicFramePr>
-          <p:cNvPr id="9" name="Table 8"/>
+          <p:cNvPr id="8" name="Table 7"/>
           <p:cNvGraphicFramePr>
             <a:graphicFrameLocks noGrp="1"/>
           </p:cNvGraphicFramePr>
@@ -29190,7 +28531,7 @@
       </p:graphicFrame>
       <p:sp>
         <p:nvSpPr>
-          <p:cNvPr id="10" name="Rectangle 9"/>
+          <p:cNvPr id="9" name="Rectangle 8"/>
           <p:cNvSpPr/>
           <p:nvPr/>
         </p:nvSpPr>
@@ -29239,7 +28580,7 @@
       </p:sp>
       <p:sp>
         <p:nvSpPr>
-          <p:cNvPr id="11" name="TextBox 10"/>
+          <p:cNvPr id="10" name="TextBox 9"/>
           <p:cNvSpPr txBox="1"/>
           <p:nvPr/>
         </p:nvSpPr>
@@ -29281,7 +28622,7 @@
       </p:sp>
       <p:sp>
         <p:nvSpPr>
-          <p:cNvPr id="12" name="TextBox 11"/>
+          <p:cNvPr id="11" name="TextBox 10"/>
           <p:cNvSpPr txBox="1"/>
           <p:nvPr/>
         </p:nvSpPr>
@@ -29323,7 +28664,7 @@
       </p:sp>
       <p:sp>
         <p:nvSpPr>
-          <p:cNvPr id="13" name="TextBox 12"/>
+          <p:cNvPr id="12" name="TextBox 11"/>
           <p:cNvSpPr txBox="1"/>
           <p:nvPr/>
         </p:nvSpPr>
@@ -29358,7 +28699,7 @@
               <a:rPr>
                 <a:latin typeface="Inter"/>
               </a:rPr>
-              <a:t>28</a:t>
+              <a:t>29</a:t>
             </a:r>
           </a:p>
         </p:txBody>
@@ -29438,48 +28779,6 @@
         </p:nvSpPr>
         <p:spPr>
           <a:xfrm>
-            <a:off x="5897880" y="310896"/>
-            <a:ext cx="4800600" cy="256032"/>
-          </a:xfrm>
-          <a:prstGeom prst="rect">
-            <a:avLst/>
-          </a:prstGeom>
-          <a:noFill/>
-        </p:spPr>
-        <p:txBody>
-          <a:bodyPr wrap="none" lIns="9144" rIns="9144" tIns="9144" bIns="9144" anchor="t">
-            <a:spAutoFit/>
-          </a:bodyPr>
-          <a:lstStyle/>
-          <a:p>
-            <a:pPr algn="r">
-              <a:spcAft>
-                <a:spcPts val="0"/>
-              </a:spcAft>
-              <a:defRPr sz="680" b="1">
-                <a:solidFill>
-                  <a:srgbClr val="4F6B00"/>
-                </a:solidFill>
-                <a:latin typeface="Inter"/>
-              </a:defRPr>
-            </a:pPr>
-            <a:r>
-              <a:rPr>
-                <a:latin typeface="Inter"/>
-              </a:rPr>
-              <a:t>Illustrative, Gradient Maintained — demo data, not the client's holdings or managers</a:t>
-            </a:r>
-          </a:p>
-        </p:txBody>
-      </p:sp>
-      <p:sp>
-        <p:nvSpPr>
-          <p:cNvPr id="4" name="TextBox 3"/>
-          <p:cNvSpPr txBox="1"/>
-          <p:nvPr/>
-        </p:nvSpPr>
-        <p:spPr>
-          <a:xfrm>
             <a:off x="640080" y="566928"/>
             <a:ext cx="10058400" cy="530352"/>
           </a:xfrm>
@@ -29516,7 +28815,7 @@
       </p:sp>
       <p:sp>
         <p:nvSpPr>
-          <p:cNvPr id="5" name="Rectangle 4"/>
+          <p:cNvPr id="4" name="Rectangle 3"/>
           <p:cNvSpPr/>
           <p:nvPr/>
         </p:nvSpPr>
@@ -29565,7 +28864,7 @@
       </p:sp>
       <p:sp>
         <p:nvSpPr>
-          <p:cNvPr id="6" name="Rectangle 5"/>
+          <p:cNvPr id="5" name="Rectangle 4"/>
           <p:cNvSpPr/>
           <p:nvPr/>
         </p:nvSpPr>
@@ -29614,7 +28913,7 @@
       </p:sp>
       <p:sp>
         <p:nvSpPr>
-          <p:cNvPr id="7" name="TextBox 6"/>
+          <p:cNvPr id="6" name="TextBox 5"/>
           <p:cNvSpPr txBox="1"/>
           <p:nvPr/>
         </p:nvSpPr>
@@ -29656,7 +28955,7 @@
       </p:sp>
       <p:sp>
         <p:nvSpPr>
-          <p:cNvPr id="8" name="Rectangle 7"/>
+          <p:cNvPr id="7" name="Rectangle 6"/>
           <p:cNvSpPr/>
           <p:nvPr/>
         </p:nvSpPr>
@@ -29705,7 +29004,7 @@
       </p:sp>
       <p:sp>
         <p:nvSpPr>
-          <p:cNvPr id="9" name="Rectangle 8"/>
+          <p:cNvPr id="8" name="Rectangle 7"/>
           <p:cNvSpPr/>
           <p:nvPr/>
         </p:nvSpPr>
@@ -29754,7 +29053,7 @@
       </p:sp>
       <p:sp>
         <p:nvSpPr>
-          <p:cNvPr id="10" name="TextBox 9"/>
+          <p:cNvPr id="9" name="TextBox 8"/>
           <p:cNvSpPr txBox="1"/>
           <p:nvPr/>
         </p:nvSpPr>
@@ -29796,7 +29095,7 @@
       </p:sp>
       <p:sp>
         <p:nvSpPr>
-          <p:cNvPr id="11" name="TextBox 10"/>
+          <p:cNvPr id="10" name="TextBox 9"/>
           <p:cNvSpPr txBox="1"/>
           <p:nvPr/>
         </p:nvSpPr>
@@ -29838,7 +29137,7 @@
       </p:sp>
       <p:sp>
         <p:nvSpPr>
-          <p:cNvPr id="12" name="TextBox 11"/>
+          <p:cNvPr id="11" name="TextBox 10"/>
           <p:cNvSpPr txBox="1"/>
           <p:nvPr/>
         </p:nvSpPr>
@@ -29880,7 +29179,7 @@
       </p:sp>
       <p:graphicFrame>
         <p:nvGraphicFramePr>
-          <p:cNvPr id="13" name="Table 12"/>
+          <p:cNvPr id="12" name="Table 11"/>
           <p:cNvGraphicFramePr>
             <a:graphicFrameLocks noGrp="1"/>
           </p:cNvGraphicFramePr>
@@ -30348,7 +29647,7 @@
       </p:graphicFrame>
       <p:sp>
         <p:nvSpPr>
-          <p:cNvPr id="14" name="Rectangle 13"/>
+          <p:cNvPr id="13" name="Rectangle 12"/>
           <p:cNvSpPr/>
           <p:nvPr/>
         </p:nvSpPr>
@@ -30397,7 +29696,7 @@
       </p:sp>
       <p:sp>
         <p:nvSpPr>
-          <p:cNvPr id="15" name="Rectangle 14"/>
+          <p:cNvPr id="14" name="Rectangle 13"/>
           <p:cNvSpPr/>
           <p:nvPr/>
         </p:nvSpPr>
@@ -30446,7 +29745,7 @@
       </p:sp>
       <p:sp>
         <p:nvSpPr>
-          <p:cNvPr id="16" name="TextBox 15"/>
+          <p:cNvPr id="15" name="TextBox 14"/>
           <p:cNvSpPr txBox="1"/>
           <p:nvPr/>
         </p:nvSpPr>
@@ -30488,7 +29787,7 @@
       </p:sp>
       <p:sp>
         <p:nvSpPr>
-          <p:cNvPr id="17" name="TextBox 16"/>
+          <p:cNvPr id="16" name="TextBox 15"/>
           <p:cNvSpPr txBox="1"/>
           <p:nvPr/>
         </p:nvSpPr>
@@ -30530,7 +29829,7 @@
       </p:sp>
       <p:sp>
         <p:nvSpPr>
-          <p:cNvPr id="18" name="Rectangle 17"/>
+          <p:cNvPr id="17" name="Rectangle 16"/>
           <p:cNvSpPr/>
           <p:nvPr/>
         </p:nvSpPr>
@@ -30579,7 +29878,7 @@
       </p:sp>
       <p:sp>
         <p:nvSpPr>
-          <p:cNvPr id="19" name="Rectangle 18"/>
+          <p:cNvPr id="18" name="Rectangle 17"/>
           <p:cNvSpPr/>
           <p:nvPr/>
         </p:nvSpPr>
@@ -30628,7 +29927,7 @@
       </p:sp>
       <p:sp>
         <p:nvSpPr>
-          <p:cNvPr id="20" name="TextBox 19"/>
+          <p:cNvPr id="19" name="TextBox 18"/>
           <p:cNvSpPr txBox="1"/>
           <p:nvPr/>
         </p:nvSpPr>
@@ -30663,14 +29962,14 @@
               <a:rPr>
                 <a:latin typeface="Inter"/>
               </a:rPr>
-              <a:t>Key judgment — headline signal</a:t>
+              <a:t>Key judgment — Credit shift</a:t>
             </a:r>
           </a:p>
         </p:txBody>
       </p:sp>
       <p:sp>
         <p:nvSpPr>
-          <p:cNvPr id="21" name="TextBox 20"/>
+          <p:cNvPr id="20" name="TextBox 19"/>
           <p:cNvSpPr txBox="1"/>
           <p:nvPr/>
         </p:nvSpPr>
@@ -30705,14 +30004,14 @@
               <a:rPr>
                 <a:latin typeface="Inter"/>
               </a:rPr>
-              <a:t>Observation: The sample report carries a credit-allocation signal above the prior neutral baseline [S1]. Why it matters: This signal focuses oversight on the report's most decision-relevant condition. Uncertainty: Evidence coverage may exclude newer or more detailed observations. What would change the view: A governed refresh showing a different signal or breached threshold.</a:t>
+              <a:t>Observation: The proposal moves 3.0pp from core-plus credit to core government and investment-grade bonds [S1]. Why it matters: It lowers credit spread risk while keeping the fixed-income weight unchanged. Uncertainty: Security-level duration and transaction costs are not yet confirmed. What would change the view: Confirmed costs above the expected yield give-up.</a:t>
             </a:r>
           </a:p>
         </p:txBody>
       </p:sp>
       <p:sp>
         <p:nvSpPr>
-          <p:cNvPr id="22" name="Rectangle 21"/>
+          <p:cNvPr id="21" name="Rectangle 20"/>
           <p:cNvSpPr/>
           <p:nvPr/>
         </p:nvSpPr>
@@ -30761,7 +30060,7 @@
       </p:sp>
       <p:sp>
         <p:nvSpPr>
-          <p:cNvPr id="23" name="TextBox 22"/>
+          <p:cNvPr id="22" name="TextBox 21"/>
           <p:cNvSpPr txBox="1"/>
           <p:nvPr/>
         </p:nvSpPr>
@@ -30803,7 +30102,7 @@
       </p:sp>
       <p:sp>
         <p:nvSpPr>
-          <p:cNvPr id="24" name="TextBox 23"/>
+          <p:cNvPr id="23" name="TextBox 22"/>
           <p:cNvSpPr txBox="1"/>
           <p:nvPr/>
         </p:nvSpPr>
@@ -30845,7 +30144,7 @@
       </p:sp>
       <p:sp>
         <p:nvSpPr>
-          <p:cNvPr id="25" name="TextBox 24"/>
+          <p:cNvPr id="24" name="TextBox 23"/>
           <p:cNvSpPr txBox="1"/>
           <p:nvPr/>
         </p:nvSpPr>
@@ -30960,48 +30259,6 @@
         </p:nvSpPr>
         <p:spPr>
           <a:xfrm>
-            <a:off x="5897880" y="310896"/>
-            <a:ext cx="4800600" cy="256032"/>
-          </a:xfrm>
-          <a:prstGeom prst="rect">
-            <a:avLst/>
-          </a:prstGeom>
-          <a:noFill/>
-        </p:spPr>
-        <p:txBody>
-          <a:bodyPr wrap="none" lIns="9144" rIns="9144" tIns="9144" bIns="9144" anchor="t">
-            <a:spAutoFit/>
-          </a:bodyPr>
-          <a:lstStyle/>
-          <a:p>
-            <a:pPr algn="r">
-              <a:spcAft>
-                <a:spcPts val="0"/>
-              </a:spcAft>
-              <a:defRPr sz="680" b="1">
-                <a:solidFill>
-                  <a:srgbClr val="4F6B00"/>
-                </a:solidFill>
-                <a:latin typeface="Inter"/>
-              </a:defRPr>
-            </a:pPr>
-            <a:r>
-              <a:rPr>
-                <a:latin typeface="Inter"/>
-              </a:rPr>
-              <a:t>Illustrative, Gradient Maintained — demo data, not the client's holdings or managers</a:t>
-            </a:r>
-          </a:p>
-        </p:txBody>
-      </p:sp>
-      <p:sp>
-        <p:nvSpPr>
-          <p:cNvPr id="4" name="TextBox 3"/>
-          <p:cNvSpPr txBox="1"/>
-          <p:nvPr/>
-        </p:nvSpPr>
-        <p:spPr>
-          <a:xfrm>
             <a:off x="640080" y="566928"/>
             <a:ext cx="10058400" cy="530352"/>
           </a:xfrm>
@@ -31038,7 +30295,7 @@
       </p:sp>
       <p:sp>
         <p:nvSpPr>
-          <p:cNvPr id="5" name="Rectangle 4"/>
+          <p:cNvPr id="4" name="Rectangle 3"/>
           <p:cNvSpPr/>
           <p:nvPr/>
         </p:nvSpPr>
@@ -31087,7 +30344,7 @@
       </p:sp>
       <p:sp>
         <p:nvSpPr>
-          <p:cNvPr id="6" name="Rectangle 5"/>
+          <p:cNvPr id="5" name="Rectangle 4"/>
           <p:cNvSpPr/>
           <p:nvPr/>
         </p:nvSpPr>
@@ -31136,7 +30393,7 @@
       </p:sp>
       <p:sp>
         <p:nvSpPr>
-          <p:cNvPr id="7" name="TextBox 6"/>
+          <p:cNvPr id="6" name="TextBox 5"/>
           <p:cNvSpPr txBox="1"/>
           <p:nvPr/>
         </p:nvSpPr>
@@ -31178,7 +30435,7 @@
       </p:sp>
       <p:sp>
         <p:nvSpPr>
-          <p:cNvPr id="8" name="Rectangle 7"/>
+          <p:cNvPr id="7" name="Rectangle 6"/>
           <p:cNvSpPr/>
           <p:nvPr/>
         </p:nvSpPr>
@@ -31227,7 +30484,7 @@
       </p:sp>
       <p:sp>
         <p:nvSpPr>
-          <p:cNvPr id="9" name="Rectangle 8"/>
+          <p:cNvPr id="8" name="Rectangle 7"/>
           <p:cNvSpPr/>
           <p:nvPr/>
         </p:nvSpPr>
@@ -31276,7 +30533,7 @@
       </p:sp>
       <p:sp>
         <p:nvSpPr>
-          <p:cNvPr id="10" name="TextBox 9"/>
+          <p:cNvPr id="9" name="TextBox 8"/>
           <p:cNvSpPr txBox="1"/>
           <p:nvPr/>
         </p:nvSpPr>
@@ -31311,14 +30568,14 @@
               <a:rPr>
                 <a:latin typeface="Inter"/>
               </a:rPr>
-              <a:t>Key judgment — primary measure</a:t>
+              <a:t>Key judgment — Sleeve size</a:t>
             </a:r>
           </a:p>
         </p:txBody>
       </p:sp>
       <p:sp>
         <p:nvSpPr>
-          <p:cNvPr id="11" name="TextBox 10"/>
+          <p:cNvPr id="10" name="TextBox 9"/>
           <p:cNvSpPr txBox="1"/>
           <p:nvPr/>
         </p:nvSpPr>
@@ -31353,14 +30610,14 @@
               <a:rPr>
                 <a:latin typeface="Inter"/>
               </a:rPr>
-              <a:t>Observation: Fixed-income weight is 28.0% in the review evidence [S2]. Why it matters: This measure establishes the baseline for comparing later governed results. Uncertainty: The source basis may omit newer observations outside the reviewed evidence. What would change the view: A refreshed source report showing a change above 1%.</a:t>
+              <a:t>Observation: Fixed income is 28.0% of total NAV [S2]. Why it matters: The shift is sized against this sleeve, not the total fund. Uncertainty: The weight will move with market values before implementation. What would change the view: A drift of more than 1pp before funding.</a:t>
             </a:r>
           </a:p>
         </p:txBody>
       </p:sp>
       <p:sp>
         <p:nvSpPr>
-          <p:cNvPr id="12" name="Rectangle 11"/>
+          <p:cNvPr id="11" name="Rectangle 10"/>
           <p:cNvSpPr/>
           <p:nvPr/>
         </p:nvSpPr>
@@ -31409,7 +30666,7 @@
       </p:sp>
       <p:sp>
         <p:nvSpPr>
-          <p:cNvPr id="13" name="Rectangle 12"/>
+          <p:cNvPr id="12" name="Rectangle 11"/>
           <p:cNvSpPr/>
           <p:nvPr/>
         </p:nvSpPr>
@@ -31458,7 +30715,7 @@
       </p:sp>
       <p:sp>
         <p:nvSpPr>
-          <p:cNvPr id="14" name="TextBox 13"/>
+          <p:cNvPr id="13" name="TextBox 12"/>
           <p:cNvSpPr txBox="1"/>
           <p:nvPr/>
         </p:nvSpPr>
@@ -31493,14 +30750,14 @@
               <a:rPr>
                 <a:latin typeface="Inter"/>
               </a:rPr>
-              <a:t>Key judgment — monitoring priority</a:t>
+              <a:t>Key judgment — Liquidity</a:t>
             </a:r>
           </a:p>
         </p:txBody>
       </p:sp>
       <p:sp>
         <p:nvSpPr>
-          <p:cNvPr id="15" name="TextBox 14"/>
+          <p:cNvPr id="14" name="TextBox 13"/>
           <p:cNvSpPr txBox="1"/>
           <p:nvPr/>
         </p:nvSpPr>
@@ -31535,14 +30792,14 @@
               <a:rPr>
                 <a:latin typeface="Inter"/>
               </a:rPr>
-              <a:t>Observation: Liquid share is 96.0% in the review evidence [S3]. Why it matters: This result determines which item receives priority in the next monitoring cycle. Uncertainty: Supporting coverage may omit later filings or corroborating detail. What would change the view: A new filing or report that resolves the item or changes it by 1%.</a:t>
+              <a:t>Observation: 96.0% of the sleeve is liquid within the policy window [S3]. Why it matters: The shift can be implemented without breaching liquidity limits. Uncertainty: Liquidity tiers use manager-reported terms. What would change the view: A manager imposing new redemption terms.</a:t>
             </a:r>
           </a:p>
         </p:txBody>
       </p:sp>
       <p:sp>
         <p:nvSpPr>
-          <p:cNvPr id="16" name="Rectangle 15"/>
+          <p:cNvPr id="15" name="Rectangle 14"/>
           <p:cNvSpPr/>
           <p:nvPr/>
         </p:nvSpPr>
@@ -31591,7 +30848,7 @@
       </p:sp>
       <p:sp>
         <p:nvSpPr>
-          <p:cNvPr id="17" name="TextBox 16"/>
+          <p:cNvPr id="16" name="TextBox 15"/>
           <p:cNvSpPr txBox="1"/>
           <p:nvPr/>
         </p:nvSpPr>
@@ -31633,7 +30890,7 @@
       </p:sp>
       <p:sp>
         <p:nvSpPr>
-          <p:cNvPr id="18" name="TextBox 17"/>
+          <p:cNvPr id="17" name="TextBox 16"/>
           <p:cNvSpPr txBox="1"/>
           <p:nvPr/>
         </p:nvSpPr>
@@ -31675,7 +30932,7 @@
       </p:sp>
       <p:sp>
         <p:nvSpPr>
-          <p:cNvPr id="19" name="TextBox 18"/>
+          <p:cNvPr id="18" name="TextBox 17"/>
           <p:cNvSpPr txBox="1"/>
           <p:nvPr/>
         </p:nvSpPr>
@@ -31790,48 +31047,6 @@
         </p:nvSpPr>
         <p:spPr>
           <a:xfrm>
-            <a:off x="5897880" y="310896"/>
-            <a:ext cx="4800600" cy="256032"/>
-          </a:xfrm>
-          <a:prstGeom prst="rect">
-            <a:avLst/>
-          </a:prstGeom>
-          <a:noFill/>
-        </p:spPr>
-        <p:txBody>
-          <a:bodyPr wrap="none" lIns="9144" rIns="9144" tIns="9144" bIns="9144" anchor="t">
-            <a:spAutoFit/>
-          </a:bodyPr>
-          <a:lstStyle/>
-          <a:p>
-            <a:pPr algn="r">
-              <a:spcAft>
-                <a:spcPts val="0"/>
-              </a:spcAft>
-              <a:defRPr sz="680" b="1">
-                <a:solidFill>
-                  <a:srgbClr val="4F6B00"/>
-                </a:solidFill>
-                <a:latin typeface="Inter"/>
-              </a:defRPr>
-            </a:pPr>
-            <a:r>
-              <a:rPr>
-                <a:latin typeface="Inter"/>
-              </a:rPr>
-              <a:t>Illustrative, Gradient Maintained — demo data, not the client's holdings or managers</a:t>
-            </a:r>
-          </a:p>
-        </p:txBody>
-      </p:sp>
-      <p:sp>
-        <p:nvSpPr>
-          <p:cNvPr id="4" name="TextBox 3"/>
-          <p:cNvSpPr txBox="1"/>
-          <p:nvPr/>
-        </p:nvSpPr>
-        <p:spPr>
-          <a:xfrm>
             <a:off x="640080" y="566928"/>
             <a:ext cx="10058400" cy="530352"/>
           </a:xfrm>
@@ -31868,7 +31083,7 @@
       </p:sp>
       <p:sp>
         <p:nvSpPr>
-          <p:cNvPr id="5" name="Rectangle 4"/>
+          <p:cNvPr id="4" name="Rectangle 3"/>
           <p:cNvSpPr/>
           <p:nvPr/>
         </p:nvSpPr>
@@ -31917,7 +31132,7 @@
       </p:sp>
       <p:sp>
         <p:nvSpPr>
-          <p:cNvPr id="6" name="Rectangle 5"/>
+          <p:cNvPr id="5" name="Rectangle 4"/>
           <p:cNvSpPr/>
           <p:nvPr/>
         </p:nvSpPr>
@@ -31966,7 +31181,7 @@
       </p:sp>
       <p:sp>
         <p:nvSpPr>
-          <p:cNvPr id="7" name="TextBox 6"/>
+          <p:cNvPr id="6" name="TextBox 5"/>
           <p:cNvSpPr txBox="1"/>
           <p:nvPr/>
         </p:nvSpPr>
@@ -32008,7 +31223,7 @@
       </p:sp>
       <p:graphicFrame>
         <p:nvGraphicFramePr>
-          <p:cNvPr id="8" name="Table 7"/>
+          <p:cNvPr id="7" name="Table 6"/>
           <p:cNvGraphicFramePr>
             <a:graphicFrameLocks noGrp="1"/>
           </p:cNvGraphicFramePr>
@@ -32370,7 +31585,7 @@
       </p:graphicFrame>
       <p:sp>
         <p:nvSpPr>
-          <p:cNvPr id="9" name="TextBox 8"/>
+          <p:cNvPr id="8" name="TextBox 7"/>
           <p:cNvSpPr txBox="1"/>
           <p:nvPr/>
         </p:nvSpPr>
@@ -32412,7 +31627,7 @@
       </p:sp>
       <p:graphicFrame>
         <p:nvGraphicFramePr>
-          <p:cNvPr id="10" name="Table 9"/>
+          <p:cNvPr id="9" name="Table 8"/>
           <p:cNvGraphicFramePr>
             <a:graphicFrameLocks noGrp="1"/>
           </p:cNvGraphicFramePr>
@@ -32945,7 +32160,7 @@
                         <a:rPr>
                           <a:latin typeface="Inter"/>
                         </a:rPr>
-                        <a:t>● Watch</a:t>
+                        <a:t>● Near limit</a:t>
                       </a:r>
                     </a:p>
                   </a:txBody>
@@ -32989,7 +32204,7 @@
       </p:graphicFrame>
       <p:sp>
         <p:nvSpPr>
-          <p:cNvPr id="11" name="Rectangle 10"/>
+          <p:cNvPr id="10" name="Rectangle 9"/>
           <p:cNvSpPr/>
           <p:nvPr/>
         </p:nvSpPr>
@@ -33038,7 +32253,7 @@
       </p:sp>
       <p:sp>
         <p:nvSpPr>
-          <p:cNvPr id="12" name="TextBox 11"/>
+          <p:cNvPr id="11" name="TextBox 10"/>
           <p:cNvSpPr txBox="1"/>
           <p:nvPr/>
         </p:nvSpPr>
@@ -33080,7 +32295,7 @@
       </p:sp>
       <p:sp>
         <p:nvSpPr>
-          <p:cNvPr id="13" name="TextBox 12"/>
+          <p:cNvPr id="12" name="TextBox 11"/>
           <p:cNvSpPr txBox="1"/>
           <p:nvPr/>
         </p:nvSpPr>
@@ -33122,7 +32337,7 @@
       </p:sp>
       <p:sp>
         <p:nvSpPr>
-          <p:cNvPr id="14" name="TextBox 13"/>
+          <p:cNvPr id="13" name="TextBox 12"/>
           <p:cNvSpPr txBox="1"/>
           <p:nvPr/>
         </p:nvSpPr>
@@ -33237,48 +32452,6 @@
         </p:nvSpPr>
         <p:spPr>
           <a:xfrm>
-            <a:off x="5897880" y="310896"/>
-            <a:ext cx="4800600" cy="256032"/>
-          </a:xfrm>
-          <a:prstGeom prst="rect">
-            <a:avLst/>
-          </a:prstGeom>
-          <a:noFill/>
-        </p:spPr>
-        <p:txBody>
-          <a:bodyPr wrap="none" lIns="9144" rIns="9144" tIns="9144" bIns="9144" anchor="t">
-            <a:spAutoFit/>
-          </a:bodyPr>
-          <a:lstStyle/>
-          <a:p>
-            <a:pPr algn="r">
-              <a:spcAft>
-                <a:spcPts val="0"/>
-              </a:spcAft>
-              <a:defRPr sz="680" b="1">
-                <a:solidFill>
-                  <a:srgbClr val="4F6B00"/>
-                </a:solidFill>
-                <a:latin typeface="Inter"/>
-              </a:defRPr>
-            </a:pPr>
-            <a:r>
-              <a:rPr>
-                <a:latin typeface="Inter"/>
-              </a:rPr>
-              <a:t>Illustrative, Gradient Maintained — demo data, not the client's holdings or managers</a:t>
-            </a:r>
-          </a:p>
-        </p:txBody>
-      </p:sp>
-      <p:sp>
-        <p:nvSpPr>
-          <p:cNvPr id="4" name="TextBox 3"/>
-          <p:cNvSpPr txBox="1"/>
-          <p:nvPr/>
-        </p:nvSpPr>
-        <p:spPr>
-          <a:xfrm>
             <a:off x="640080" y="566928"/>
             <a:ext cx="10058400" cy="530352"/>
           </a:xfrm>
@@ -33315,7 +32488,7 @@
       </p:sp>
       <p:sp>
         <p:nvSpPr>
-          <p:cNvPr id="5" name="Rectangle 4"/>
+          <p:cNvPr id="4" name="Rectangle 3"/>
           <p:cNvSpPr/>
           <p:nvPr/>
         </p:nvSpPr>
@@ -33364,7 +32537,7 @@
       </p:sp>
       <p:sp>
         <p:nvSpPr>
-          <p:cNvPr id="6" name="Rectangle 5"/>
+          <p:cNvPr id="5" name="Rectangle 4"/>
           <p:cNvSpPr/>
           <p:nvPr/>
         </p:nvSpPr>
@@ -33413,7 +32586,7 @@
       </p:sp>
       <p:sp>
         <p:nvSpPr>
-          <p:cNvPr id="7" name="TextBox 6"/>
+          <p:cNvPr id="6" name="TextBox 5"/>
           <p:cNvSpPr txBox="1"/>
           <p:nvPr/>
         </p:nvSpPr>
@@ -33455,7 +32628,7 @@
       </p:sp>
       <p:sp>
         <p:nvSpPr>
-          <p:cNvPr id="8" name="TextBox 7"/>
+          <p:cNvPr id="7" name="TextBox 6"/>
           <p:cNvSpPr txBox="1"/>
           <p:nvPr/>
         </p:nvSpPr>
@@ -33497,7 +32670,7 @@
       </p:sp>
       <p:graphicFrame>
         <p:nvGraphicFramePr>
-          <p:cNvPr id="9" name="Chart 8"/>
+          <p:cNvPr id="8" name="Chart 7"/>
           <p:cNvGraphicFramePr>
             <a:graphicFrameLocks noGrp="1"/>
           </p:cNvGraphicFramePr>
@@ -33515,7 +32688,7 @@
       </p:graphicFrame>
       <p:sp>
         <p:nvSpPr>
-          <p:cNvPr id="10" name="Rectangle 9"/>
+          <p:cNvPr id="9" name="Rectangle 8"/>
           <p:cNvSpPr/>
           <p:nvPr/>
         </p:nvSpPr>
@@ -33564,7 +32737,7 @@
       </p:sp>
       <p:sp>
         <p:nvSpPr>
-          <p:cNvPr id="11" name="TextBox 10"/>
+          <p:cNvPr id="10" name="TextBox 9"/>
           <p:cNvSpPr txBox="1"/>
           <p:nvPr/>
         </p:nvSpPr>
@@ -33606,7 +32779,7 @@
       </p:sp>
       <p:sp>
         <p:nvSpPr>
-          <p:cNvPr id="12" name="TextBox 11"/>
+          <p:cNvPr id="11" name="TextBox 10"/>
           <p:cNvSpPr txBox="1"/>
           <p:nvPr/>
         </p:nvSpPr>
@@ -33648,7 +32821,7 @@
       </p:sp>
       <p:sp>
         <p:nvSpPr>
-          <p:cNvPr id="13" name="TextBox 12"/>
+          <p:cNvPr id="12" name="TextBox 11"/>
           <p:cNvSpPr txBox="1"/>
           <p:nvPr/>
         </p:nvSpPr>
@@ -33763,48 +32936,6 @@
         </p:nvSpPr>
         <p:spPr>
           <a:xfrm>
-            <a:off x="5897880" y="310896"/>
-            <a:ext cx="4800600" cy="256032"/>
-          </a:xfrm>
-          <a:prstGeom prst="rect">
-            <a:avLst/>
-          </a:prstGeom>
-          <a:noFill/>
-        </p:spPr>
-        <p:txBody>
-          <a:bodyPr wrap="none" lIns="9144" rIns="9144" tIns="9144" bIns="9144" anchor="t">
-            <a:spAutoFit/>
-          </a:bodyPr>
-          <a:lstStyle/>
-          <a:p>
-            <a:pPr algn="r">
-              <a:spcAft>
-                <a:spcPts val="0"/>
-              </a:spcAft>
-              <a:defRPr sz="680" b="1">
-                <a:solidFill>
-                  <a:srgbClr val="4F6B00"/>
-                </a:solidFill>
-                <a:latin typeface="Inter"/>
-              </a:defRPr>
-            </a:pPr>
-            <a:r>
-              <a:rPr>
-                <a:latin typeface="Inter"/>
-              </a:rPr>
-              <a:t>Illustrative, Gradient Maintained — demo data, not the client's holdings or managers</a:t>
-            </a:r>
-          </a:p>
-        </p:txBody>
-      </p:sp>
-      <p:sp>
-        <p:nvSpPr>
-          <p:cNvPr id="4" name="TextBox 3"/>
-          <p:cNvSpPr txBox="1"/>
-          <p:nvPr/>
-        </p:nvSpPr>
-        <p:spPr>
-          <a:xfrm>
             <a:off x="640080" y="566928"/>
             <a:ext cx="10058400" cy="530352"/>
           </a:xfrm>
@@ -33841,7 +32972,7 @@
       </p:sp>
       <p:sp>
         <p:nvSpPr>
-          <p:cNvPr id="5" name="Rectangle 4"/>
+          <p:cNvPr id="4" name="Rectangle 3"/>
           <p:cNvSpPr/>
           <p:nvPr/>
         </p:nvSpPr>
@@ -33890,7 +33021,7 @@
       </p:sp>
       <p:sp>
         <p:nvSpPr>
-          <p:cNvPr id="6" name="Rectangle 5"/>
+          <p:cNvPr id="5" name="Rectangle 4"/>
           <p:cNvSpPr/>
           <p:nvPr/>
         </p:nvSpPr>
@@ -33939,7 +33070,7 @@
       </p:sp>
       <p:sp>
         <p:nvSpPr>
-          <p:cNvPr id="7" name="TextBox 6"/>
+          <p:cNvPr id="6" name="TextBox 5"/>
           <p:cNvSpPr txBox="1"/>
           <p:nvPr/>
         </p:nvSpPr>
@@ -33981,7 +33112,7 @@
       </p:sp>
       <p:sp>
         <p:nvSpPr>
-          <p:cNvPr id="8" name="TextBox 7"/>
+          <p:cNvPr id="7" name="TextBox 6"/>
           <p:cNvSpPr txBox="1"/>
           <p:nvPr/>
         </p:nvSpPr>
@@ -34023,7 +33154,7 @@
       </p:sp>
       <p:graphicFrame>
         <p:nvGraphicFramePr>
-          <p:cNvPr id="9" name="Table 8"/>
+          <p:cNvPr id="8" name="Table 7"/>
           <p:cNvGraphicFramePr>
             <a:graphicFrameLocks noGrp="1"/>
           </p:cNvGraphicFramePr>
@@ -34709,7 +33840,7 @@
       </p:graphicFrame>
       <p:sp>
         <p:nvSpPr>
-          <p:cNvPr id="10" name="TextBox 9"/>
+          <p:cNvPr id="9" name="TextBox 8"/>
           <p:cNvSpPr txBox="1"/>
           <p:nvPr/>
         </p:nvSpPr>
@@ -34751,7 +33882,7 @@
       </p:sp>
       <p:sp>
         <p:nvSpPr>
-          <p:cNvPr id="11" name="Rectangle 10"/>
+          <p:cNvPr id="10" name="Rectangle 9"/>
           <p:cNvSpPr/>
           <p:nvPr/>
         </p:nvSpPr>
@@ -34800,7 +33931,7 @@
       </p:sp>
       <p:sp>
         <p:nvSpPr>
-          <p:cNvPr id="12" name="TextBox 11"/>
+          <p:cNvPr id="11" name="TextBox 10"/>
           <p:cNvSpPr txBox="1"/>
           <p:nvPr/>
         </p:nvSpPr>
@@ -34842,7 +33973,7 @@
       </p:sp>
       <p:sp>
         <p:nvSpPr>
-          <p:cNvPr id="13" name="TextBox 12"/>
+          <p:cNvPr id="12" name="TextBox 11"/>
           <p:cNvSpPr txBox="1"/>
           <p:nvPr/>
         </p:nvSpPr>
@@ -34884,7 +34015,7 @@
       </p:sp>
       <p:sp>
         <p:nvSpPr>
-          <p:cNvPr id="14" name="TextBox 13"/>
+          <p:cNvPr id="13" name="TextBox 12"/>
           <p:cNvSpPr txBox="1"/>
           <p:nvPr/>
         </p:nvSpPr>
@@ -35000,7 +34131,7 @@
         <p:spPr>
           <a:xfrm>
             <a:off x="640080" y="329184"/>
-            <a:ext cx="5303520" cy="182880"/>
+            <a:ext cx="9875520" cy="182880"/>
           </a:xfrm>
           <a:prstGeom prst="rect">
             <a:avLst/>
@@ -35041,48 +34172,6 @@
         </p:nvSpPr>
         <p:spPr>
           <a:xfrm>
-            <a:off x="5897880" y="310896"/>
-            <a:ext cx="4800600" cy="256032"/>
-          </a:xfrm>
-          <a:prstGeom prst="rect">
-            <a:avLst/>
-          </a:prstGeom>
-          <a:noFill/>
-        </p:spPr>
-        <p:txBody>
-          <a:bodyPr wrap="none" lIns="9144" rIns="9144" tIns="9144" bIns="9144" anchor="t">
-            <a:spAutoFit/>
-          </a:bodyPr>
-          <a:lstStyle/>
-          <a:p>
-            <a:pPr algn="r">
-              <a:spcAft>
-                <a:spcPts val="0"/>
-              </a:spcAft>
-              <a:defRPr sz="680" b="1">
-                <a:solidFill>
-                  <a:srgbClr val="4F6B00"/>
-                </a:solidFill>
-                <a:latin typeface="Inter"/>
-              </a:defRPr>
-            </a:pPr>
-            <a:r>
-              <a:rPr>
-                <a:latin typeface="Inter"/>
-              </a:rPr>
-              <a:t>Illustrative, Gradient Maintained — demo data, not the client's holdings or managers</a:t>
-            </a:r>
-          </a:p>
-        </p:txBody>
-      </p:sp>
-      <p:sp>
-        <p:nvSpPr>
-          <p:cNvPr id="5" name="TextBox 4"/>
-          <p:cNvSpPr txBox="1"/>
-          <p:nvPr/>
-        </p:nvSpPr>
-        <p:spPr>
-          <a:xfrm>
             <a:off x="640080" y="566928"/>
             <a:ext cx="10058400" cy="530352"/>
           </a:xfrm>
@@ -35119,7 +34208,7 @@
       </p:sp>
       <p:sp>
         <p:nvSpPr>
-          <p:cNvPr id="6" name="Rectangle 5"/>
+          <p:cNvPr id="5" name="Rectangle 4"/>
           <p:cNvSpPr/>
           <p:nvPr/>
         </p:nvSpPr>
@@ -35168,7 +34257,7 @@
       </p:sp>
       <p:sp>
         <p:nvSpPr>
-          <p:cNvPr id="7" name="Rectangle 6"/>
+          <p:cNvPr id="6" name="Rectangle 5"/>
           <p:cNvSpPr/>
           <p:nvPr/>
         </p:nvSpPr>
@@ -35217,7 +34306,7 @@
       </p:sp>
       <p:sp>
         <p:nvSpPr>
-          <p:cNvPr id="8" name="TextBox 7"/>
+          <p:cNvPr id="7" name="TextBox 6"/>
           <p:cNvSpPr txBox="1"/>
           <p:nvPr/>
         </p:nvSpPr>
@@ -35259,7 +34348,7 @@
       </p:sp>
       <p:sp>
         <p:nvSpPr>
-          <p:cNvPr id="9" name="TextBox 8"/>
+          <p:cNvPr id="8" name="TextBox 7"/>
           <p:cNvSpPr txBox="1"/>
           <p:nvPr/>
         </p:nvSpPr>
@@ -35301,7 +34390,7 @@
       </p:sp>
       <p:sp>
         <p:nvSpPr>
-          <p:cNvPr id="10" name="TextBox 9"/>
+          <p:cNvPr id="9" name="TextBox 8"/>
           <p:cNvSpPr txBox="1"/>
           <p:nvPr/>
         </p:nvSpPr>
@@ -35343,7 +34432,7 @@
       </p:sp>
       <p:sp>
         <p:nvSpPr>
-          <p:cNvPr id="11" name="Rectangle 10"/>
+          <p:cNvPr id="10" name="Rectangle 9"/>
           <p:cNvSpPr/>
           <p:nvPr/>
         </p:nvSpPr>
@@ -35392,7 +34481,7 @@
       </p:sp>
       <p:sp>
         <p:nvSpPr>
-          <p:cNvPr id="12" name="Oval 11"/>
+          <p:cNvPr id="11" name="Oval 10"/>
           <p:cNvSpPr/>
           <p:nvPr/>
         </p:nvSpPr>
@@ -35441,7 +34530,7 @@
       </p:sp>
       <p:sp>
         <p:nvSpPr>
-          <p:cNvPr id="13" name="Rectangle 12"/>
+          <p:cNvPr id="12" name="Rectangle 11"/>
           <p:cNvSpPr/>
           <p:nvPr/>
         </p:nvSpPr>
@@ -35490,7 +34579,7 @@
       </p:sp>
       <p:sp>
         <p:nvSpPr>
-          <p:cNvPr id="14" name="TextBox 13"/>
+          <p:cNvPr id="13" name="TextBox 12"/>
           <p:cNvSpPr txBox="1"/>
           <p:nvPr/>
         </p:nvSpPr>
@@ -35532,7 +34621,7 @@
       </p:sp>
       <p:sp>
         <p:nvSpPr>
-          <p:cNvPr id="15" name="Rectangle 14"/>
+          <p:cNvPr id="14" name="Rectangle 13"/>
           <p:cNvSpPr/>
           <p:nvPr/>
         </p:nvSpPr>
@@ -35581,7 +34670,7 @@
       </p:sp>
       <p:sp>
         <p:nvSpPr>
-          <p:cNvPr id="16" name="Oval 15"/>
+          <p:cNvPr id="15" name="Oval 14"/>
           <p:cNvSpPr/>
           <p:nvPr/>
         </p:nvSpPr>
@@ -35630,7 +34719,7 @@
       </p:sp>
       <p:sp>
         <p:nvSpPr>
-          <p:cNvPr id="17" name="Rectangle 16"/>
+          <p:cNvPr id="16" name="Rectangle 15"/>
           <p:cNvSpPr/>
           <p:nvPr/>
         </p:nvSpPr>
@@ -35679,7 +34768,7 @@
       </p:sp>
       <p:sp>
         <p:nvSpPr>
-          <p:cNvPr id="18" name="TextBox 17"/>
+          <p:cNvPr id="17" name="TextBox 16"/>
           <p:cNvSpPr txBox="1"/>
           <p:nvPr/>
         </p:nvSpPr>
@@ -35721,7 +34810,7 @@
       </p:sp>
       <p:sp>
         <p:nvSpPr>
-          <p:cNvPr id="19" name="Rectangle 18"/>
+          <p:cNvPr id="18" name="Rectangle 17"/>
           <p:cNvSpPr/>
           <p:nvPr/>
         </p:nvSpPr>
@@ -35770,7 +34859,7 @@
       </p:sp>
       <p:sp>
         <p:nvSpPr>
-          <p:cNvPr id="20" name="Oval 19"/>
+          <p:cNvPr id="19" name="Oval 18"/>
           <p:cNvSpPr/>
           <p:nvPr/>
         </p:nvSpPr>
@@ -35819,7 +34908,7 @@
       </p:sp>
       <p:sp>
         <p:nvSpPr>
-          <p:cNvPr id="21" name="Rectangle 20"/>
+          <p:cNvPr id="20" name="Rectangle 19"/>
           <p:cNvSpPr/>
           <p:nvPr/>
         </p:nvSpPr>
@@ -35868,7 +34957,7 @@
       </p:sp>
       <p:sp>
         <p:nvSpPr>
-          <p:cNvPr id="22" name="Rectangle 21"/>
+          <p:cNvPr id="21" name="Rectangle 20"/>
           <p:cNvSpPr/>
           <p:nvPr/>
         </p:nvSpPr>
@@ -35917,7 +35006,7 @@
       </p:sp>
       <p:sp>
         <p:nvSpPr>
-          <p:cNvPr id="23" name="TextBox 22"/>
+          <p:cNvPr id="22" name="TextBox 21"/>
           <p:cNvSpPr txBox="1"/>
           <p:nvPr/>
         </p:nvSpPr>
@@ -35959,7 +35048,7 @@
       </p:sp>
       <p:graphicFrame>
         <p:nvGraphicFramePr>
-          <p:cNvPr id="24" name="Chart 23"/>
+          <p:cNvPr id="23" name="Chart 22"/>
           <p:cNvGraphicFramePr>
             <a:graphicFrameLocks noGrp="1"/>
           </p:cNvGraphicFramePr>
@@ -35977,7 +35066,7 @@
       </p:graphicFrame>
       <p:sp>
         <p:nvSpPr>
-          <p:cNvPr id="25" name="Rectangle 24"/>
+          <p:cNvPr id="24" name="Rectangle 23"/>
           <p:cNvSpPr/>
           <p:nvPr/>
         </p:nvSpPr>
@@ -36026,7 +35115,7 @@
       </p:sp>
       <p:sp>
         <p:nvSpPr>
-          <p:cNvPr id="26" name="TextBox 25"/>
+          <p:cNvPr id="25" name="TextBox 24"/>
           <p:cNvSpPr txBox="1"/>
           <p:nvPr/>
         </p:nvSpPr>
@@ -36068,7 +35157,7 @@
       </p:sp>
       <p:sp>
         <p:nvSpPr>
-          <p:cNvPr id="27" name="TextBox 26"/>
+          <p:cNvPr id="26" name="TextBox 25"/>
           <p:cNvSpPr txBox="1"/>
           <p:nvPr/>
         </p:nvSpPr>
@@ -36110,7 +35199,7 @@
       </p:sp>
       <p:sp>
         <p:nvSpPr>
-          <p:cNvPr id="28" name="TextBox 27"/>
+          <p:cNvPr id="27" name="TextBox 26"/>
           <p:cNvSpPr txBox="1"/>
           <p:nvPr/>
         </p:nvSpPr>
@@ -36226,7 +35315,7 @@
         <p:spPr>
           <a:xfrm>
             <a:off x="640080" y="329184"/>
-            <a:ext cx="5303520" cy="182880"/>
+            <a:ext cx="9875520" cy="182880"/>
           </a:xfrm>
           <a:prstGeom prst="rect">
             <a:avLst/>
@@ -36267,48 +35356,6 @@
         </p:nvSpPr>
         <p:spPr>
           <a:xfrm>
-            <a:off x="5897880" y="310896"/>
-            <a:ext cx="4800600" cy="256032"/>
-          </a:xfrm>
-          <a:prstGeom prst="rect">
-            <a:avLst/>
-          </a:prstGeom>
-          <a:noFill/>
-        </p:spPr>
-        <p:txBody>
-          <a:bodyPr wrap="none" lIns="9144" rIns="9144" tIns="9144" bIns="9144" anchor="t">
-            <a:spAutoFit/>
-          </a:bodyPr>
-          <a:lstStyle/>
-          <a:p>
-            <a:pPr algn="r">
-              <a:spcAft>
-                <a:spcPts val="0"/>
-              </a:spcAft>
-              <a:defRPr sz="680" b="1">
-                <a:solidFill>
-                  <a:srgbClr val="4F6B00"/>
-                </a:solidFill>
-                <a:latin typeface="Inter"/>
-              </a:defRPr>
-            </a:pPr>
-            <a:r>
-              <a:rPr>
-                <a:latin typeface="Inter"/>
-              </a:rPr>
-              <a:t>Illustrative, Gradient Maintained — demo data, not the client's holdings or managers</a:t>
-            </a:r>
-          </a:p>
-        </p:txBody>
-      </p:sp>
-      <p:sp>
-        <p:nvSpPr>
-          <p:cNvPr id="5" name="TextBox 4"/>
-          <p:cNvSpPr txBox="1"/>
-          <p:nvPr/>
-        </p:nvSpPr>
-        <p:spPr>
-          <a:xfrm>
             <a:off x="640080" y="566928"/>
             <a:ext cx="10058400" cy="530352"/>
           </a:xfrm>
@@ -36345,7 +35392,7 @@
       </p:sp>
       <p:sp>
         <p:nvSpPr>
-          <p:cNvPr id="6" name="Rectangle 5"/>
+          <p:cNvPr id="5" name="Rectangle 4"/>
           <p:cNvSpPr/>
           <p:nvPr/>
         </p:nvSpPr>
@@ -36394,7 +35441,7 @@
       </p:sp>
       <p:sp>
         <p:nvSpPr>
-          <p:cNvPr id="7" name="Rectangle 6"/>
+          <p:cNvPr id="6" name="Rectangle 5"/>
           <p:cNvSpPr/>
           <p:nvPr/>
         </p:nvSpPr>
@@ -36443,7 +35490,7 @@
       </p:sp>
       <p:sp>
         <p:nvSpPr>
-          <p:cNvPr id="8" name="TextBox 7"/>
+          <p:cNvPr id="7" name="TextBox 6"/>
           <p:cNvSpPr txBox="1"/>
           <p:nvPr/>
         </p:nvSpPr>
@@ -36485,7 +35532,7 @@
       </p:sp>
       <p:sp>
         <p:nvSpPr>
-          <p:cNvPr id="9" name="TextBox 8"/>
+          <p:cNvPr id="8" name="TextBox 7"/>
           <p:cNvSpPr txBox="1"/>
           <p:nvPr/>
         </p:nvSpPr>
@@ -36527,7 +35574,7 @@
       </p:sp>
       <p:graphicFrame>
         <p:nvGraphicFramePr>
-          <p:cNvPr id="10" name="Chart 9"/>
+          <p:cNvPr id="9" name="Chart 8"/>
           <p:cNvGraphicFramePr>
             <a:graphicFrameLocks noGrp="1"/>
           </p:cNvGraphicFramePr>
@@ -36545,7 +35592,7 @@
       </p:graphicFrame>
       <p:sp>
         <p:nvSpPr>
-          <p:cNvPr id="11" name="Rectangle 10"/>
+          <p:cNvPr id="10" name="Rectangle 9"/>
           <p:cNvSpPr/>
           <p:nvPr/>
         </p:nvSpPr>
@@ -36594,7 +35641,7 @@
       </p:sp>
       <p:sp>
         <p:nvSpPr>
-          <p:cNvPr id="12" name="TextBox 11"/>
+          <p:cNvPr id="11" name="TextBox 10"/>
           <p:cNvSpPr txBox="1"/>
           <p:nvPr/>
         </p:nvSpPr>
@@ -36636,7 +35683,7 @@
       </p:sp>
       <p:sp>
         <p:nvSpPr>
-          <p:cNvPr id="13" name="TextBox 12"/>
+          <p:cNvPr id="12" name="TextBox 11"/>
           <p:cNvSpPr txBox="1"/>
           <p:nvPr/>
         </p:nvSpPr>
@@ -36678,7 +35725,7 @@
       </p:sp>
       <p:sp>
         <p:nvSpPr>
-          <p:cNvPr id="14" name="TextBox 13"/>
+          <p:cNvPr id="13" name="TextBox 12"/>
           <p:cNvSpPr txBox="1"/>
           <p:nvPr/>
         </p:nvSpPr>
